--- a/cierre_base.pptx
+++ b/cierre_base.pptx
@@ -9683,7 +9683,7 @@
               <a:rPr lang="es-MX" b="1" dirty="0">
                 <a:latin typeface="Aptos (cuerpo)"/>
               </a:rPr>
-              <a:t>Eventualidades de proyectos con retraso</a:t>
+              <a:t>Eventualidades de proyectos con atraso</a:t>
             </a:r>
             <a:endParaRPr lang="es-MX" b="1" dirty="0">
               <a:highlight>
@@ -9751,14 +9751,12 @@
                         <a:buNone/>
                       </a:pPr>
                       <a:r>
-                        <a:rPr lang="es-MX" sz="1100" u="none" strike="noStrike" kern="1200">
+                        <a:rPr lang="es-MX" sz="1100" b="1" u="none" strike="noStrike" kern="1200">
                           <a:solidFill>
                             <a:schemeClr val="tx1"/>
                           </a:solidFill>
                           <a:effectLst/>
                           <a:latin typeface="Aptos (cuerpo)"/>
-                          <a:ea typeface="+mn-ea"/>
-                          <a:cs typeface="+mn-cs"/>
                         </a:rPr>
                         <a:t>No</a:t>
                       </a:r>
@@ -9770,36 +9768,24 @@
                         <a:schemeClr val="tx1"/>
                       </a:solidFill>
                       <a:prstDash val="solid"/>
-                      <a:round/>
-                      <a:headEnd type="none" w="med" len="med"/>
-                      <a:tailEnd type="none" w="med" len="med"/>
                     </a:lnL>
                     <a:lnR w="12700" cap="flat" cmpd="sng" algn="ctr">
                       <a:solidFill>
                         <a:schemeClr val="tx1"/>
                       </a:solidFill>
                       <a:prstDash val="solid"/>
-                      <a:round/>
-                      <a:headEnd type="none" w="med" len="med"/>
-                      <a:tailEnd type="none" w="med" len="med"/>
                     </a:lnR>
                     <a:lnT w="12700" cap="flat" cmpd="sng" algn="ctr">
                       <a:solidFill>
                         <a:schemeClr val="tx1"/>
                       </a:solidFill>
                       <a:prstDash val="solid"/>
-                      <a:round/>
-                      <a:headEnd type="none" w="med" len="med"/>
-                      <a:tailEnd type="none" w="med" len="med"/>
                     </a:lnT>
                     <a:lnB w="12700" cap="flat" cmpd="sng" algn="ctr">
                       <a:solidFill>
                         <a:schemeClr val="tx1"/>
                       </a:solidFill>
                       <a:prstDash val="solid"/>
-                      <a:round/>
-                      <a:headEnd type="none" w="med" len="med"/>
-                      <a:tailEnd type="none" w="med" len="med"/>
                     </a:lnB>
                     <a:noFill/>
                   </a:tcPr>
@@ -9813,14 +9799,12 @@
                         <a:buNone/>
                       </a:pPr>
                       <a:r>
-                        <a:rPr lang="es-MX" sz="1100" u="none" strike="noStrike" kern="1200">
+                        <a:rPr lang="es-MX" sz="1100" b="1" u="none" strike="noStrike" kern="1200">
                           <a:solidFill>
                             <a:schemeClr val="tx1"/>
                           </a:solidFill>
                           <a:effectLst/>
                           <a:latin typeface="Aptos (cuerpo)"/>
-                          <a:ea typeface="+mn-ea"/>
-                          <a:cs typeface="+mn-cs"/>
                         </a:rPr>
                         <a:t>Proyecto</a:t>
                       </a:r>
@@ -9832,36 +9816,24 @@
                         <a:schemeClr val="tx1"/>
                       </a:solidFill>
                       <a:prstDash val="solid"/>
-                      <a:round/>
-                      <a:headEnd type="none" w="med" len="med"/>
-                      <a:tailEnd type="none" w="med" len="med"/>
                     </a:lnL>
                     <a:lnR w="12700" cap="flat" cmpd="sng" algn="ctr">
                       <a:solidFill>
                         <a:schemeClr val="tx1"/>
                       </a:solidFill>
                       <a:prstDash val="solid"/>
-                      <a:round/>
-                      <a:headEnd type="none" w="med" len="med"/>
-                      <a:tailEnd type="none" w="med" len="med"/>
                     </a:lnR>
                     <a:lnT w="12700" cap="flat" cmpd="sng" algn="ctr">
                       <a:solidFill>
                         <a:schemeClr val="tx1"/>
                       </a:solidFill>
                       <a:prstDash val="solid"/>
-                      <a:round/>
-                      <a:headEnd type="none" w="med" len="med"/>
-                      <a:tailEnd type="none" w="med" len="med"/>
                     </a:lnT>
                     <a:lnB w="12700" cap="flat" cmpd="sng" algn="ctr">
                       <a:solidFill>
                         <a:schemeClr val="tx1"/>
                       </a:solidFill>
                       <a:prstDash val="solid"/>
-                      <a:round/>
-                      <a:headEnd type="none" w="med" len="med"/>
-                      <a:tailEnd type="none" w="med" len="med"/>
                     </a:lnB>
                     <a:noFill/>
                   </a:tcPr>
@@ -9871,18 +9843,16 @@
                     <a:bodyPr/>
                     <a:lstStyle/>
                     <a:p>
-                      <a:pPr algn="ctr" fontAlgn="b">
+                      <a:pPr marL="0" algn="ctr" defTabSz="457200" rtl="0" eaLnBrk="1" fontAlgn="b" latinLnBrk="0" hangingPunct="1">
                         <a:buNone/>
                       </a:pPr>
                       <a:r>
-                        <a:rPr lang="es-MX" sz="1100" u="none" strike="noStrike" kern="1200">
+                        <a:rPr lang="es-MX" sz="1100" b="1" u="none" strike="noStrike" kern="1200">
                           <a:solidFill>
                             <a:schemeClr val="tx1"/>
                           </a:solidFill>
                           <a:effectLst/>
                           <a:latin typeface="Aptos (cuerpo)"/>
-                          <a:ea typeface="+mn-ea"/>
-                          <a:cs typeface="+mn-cs"/>
                         </a:rPr>
                         <a:t>Eventualidades</a:t>
                       </a:r>
@@ -9894,57 +9864,40 @@
                         <a:schemeClr val="tx1"/>
                       </a:solidFill>
                       <a:prstDash val="solid"/>
-                      <a:round/>
-                      <a:headEnd type="none" w="med" len="med"/>
-                      <a:tailEnd type="none" w="med" len="med"/>
                     </a:lnL>
                     <a:lnR w="12700" cap="flat" cmpd="sng" algn="ctr">
                       <a:solidFill>
                         <a:schemeClr val="tx1"/>
                       </a:solidFill>
                       <a:prstDash val="solid"/>
-                      <a:round/>
-                      <a:headEnd type="none" w="med" len="med"/>
-                      <a:tailEnd type="none" w="med" len="med"/>
                     </a:lnR>
                     <a:lnT w="12700" cap="flat" cmpd="sng" algn="ctr">
                       <a:solidFill>
                         <a:schemeClr val="tx1"/>
                       </a:solidFill>
                       <a:prstDash val="solid"/>
-                      <a:round/>
-                      <a:headEnd type="none" w="med" len="med"/>
-                      <a:tailEnd type="none" w="med" len="med"/>
                     </a:lnT>
                     <a:lnB w="12700" cap="flat" cmpd="sng" algn="ctr">
                       <a:solidFill>
                         <a:schemeClr val="tx1"/>
                       </a:solidFill>
                       <a:prstDash val="solid"/>
-                      <a:round/>
-                      <a:headEnd type="none" w="med" len="med"/>
-                      <a:tailEnd type="none" w="med" len="med"/>
                     </a:lnB>
                     <a:noFill/>
                   </a:tcPr>
                 </a:tc>
-                <a:extLst>
-                  <a:ext uri="{0D108BD9-81ED-4DB2-BD59-A6C34878D82A}">
-                    <a16:rowId xmlns:a16="http://schemas.microsoft.com/office/drawing/2014/main" val="4174057675"/>
-                  </a:ext>
-                </a:extLst>
               </a:tr>
-              <a:tr h="349144">
+              <a:tr h="420000">
                 <a:tc>
                   <a:txBody>
                     <a:bodyPr/>
                     <a:lstStyle/>
                     <a:p>
-                      <a:pPr algn="ctr" fontAlgn="b">
+                      <a:pPr marL="0" algn="ctr" defTabSz="457200" rtl="0" eaLnBrk="1" fontAlgn="b" latinLnBrk="0" hangingPunct="1">
                         <a:buNone/>
                       </a:pPr>
                       <a:r>
-                        <a:rPr lang="es-MX" sz="1100" b="0" i="0" u="none" strike="noStrike">
+                        <a:rPr lang="es-MX" sz="1000" u="none" strike="noStrike" kern="1200">
                           <a:solidFill>
                             <a:schemeClr val="tx1"/>
                           </a:solidFill>
@@ -9961,36 +9914,24 @@
                         <a:schemeClr val="tx1"/>
                       </a:solidFill>
                       <a:prstDash val="solid"/>
-                      <a:round/>
-                      <a:headEnd type="none" w="med" len="med"/>
-                      <a:tailEnd type="none" w="med" len="med"/>
                     </a:lnL>
                     <a:lnR w="12700" cap="flat" cmpd="sng" algn="ctr">
                       <a:solidFill>
                         <a:schemeClr val="tx1"/>
                       </a:solidFill>
                       <a:prstDash val="solid"/>
-                      <a:round/>
-                      <a:headEnd type="none" w="med" len="med"/>
-                      <a:tailEnd type="none" w="med" len="med"/>
                     </a:lnR>
                     <a:lnT w="12700" cap="flat" cmpd="sng" algn="ctr">
                       <a:solidFill>
                         <a:schemeClr val="tx1"/>
                       </a:solidFill>
                       <a:prstDash val="solid"/>
-                      <a:round/>
-                      <a:headEnd type="none" w="med" len="med"/>
-                      <a:tailEnd type="none" w="med" len="med"/>
                     </a:lnT>
                     <a:lnB w="12700" cap="flat" cmpd="sng" algn="ctr">
                       <a:solidFill>
                         <a:schemeClr val="tx1"/>
                       </a:solidFill>
                       <a:prstDash val="solid"/>
-                      <a:round/>
-                      <a:headEnd type="none" w="med" len="med"/>
-                      <a:tailEnd type="none" w="med" len="med"/>
                     </a:lnB>
                     <a:noFill/>
                   </a:tcPr>
@@ -10000,40 +9941,19 @@
                     <a:bodyPr/>
                     <a:lstStyle/>
                     <a:p>
-                      <a:pPr marL="0" marR="0" lvl="0" indent="0" algn="l" defTabSz="685800" rtl="0" eaLnBrk="1" fontAlgn="b" latinLnBrk="0" hangingPunct="1">
-                        <a:lnSpc>
-                          <a:spcPct val="100000"/>
-                        </a:lnSpc>
-                        <a:spcBef>
-                          <a:spcPts val="0"/>
-                        </a:spcBef>
-                        <a:spcAft>
-                          <a:spcPts val="0"/>
-                        </a:spcAft>
-                        <a:buClrTx/>
-                        <a:buSzTx/>
-                        <a:buFontTx/>
+                      <a:pPr marL="0" algn="l" defTabSz="457200" rtl="0" eaLnBrk="1" fontAlgn="b" latinLnBrk="0" hangingPunct="1">
                         <a:buNone/>
-                        <a:tabLst/>
-                        <a:defRPr/>
                       </a:pPr>
                       <a:r>
-                        <a:rPr lang="es-MX" sz="1100" u="none" strike="noStrike">
+                        <a:rPr lang="es-MX" sz="1000" u="none" strike="noStrike" kern="1200">
                           <a:solidFill>
                             <a:schemeClr val="tx1"/>
                           </a:solidFill>
                           <a:effectLst/>
                           <a:latin typeface="Aptos (cuerpo)"/>
                         </a:rPr>
-                        <a:t>Cartera || Cambio de PAC de timbrado (ATEB)</a:t>
-                      </a:r>
-                      <a:endParaRPr lang="es-MX" sz="1100" b="0" i="0" u="none" strike="noStrike">
-                        <a:solidFill>
-                          <a:schemeClr val="tx1"/>
-                        </a:solidFill>
-                        <a:effectLst/>
-                        <a:latin typeface="Aptos (cuerpo)"/>
-                      </a:endParaRPr>
+                        <a:t>Tesoreria || Adcontent H2H</a:t>
+                      </a:r>
                     </a:p>
                   </a:txBody>
                   <a:tcPr marL="6244" marR="6244" marT="6244" marB="0" anchor="ctr">
@@ -10042,36 +9962,24 @@
                         <a:schemeClr val="tx1"/>
                       </a:solidFill>
                       <a:prstDash val="solid"/>
-                      <a:round/>
-                      <a:headEnd type="none" w="med" len="med"/>
-                      <a:tailEnd type="none" w="med" len="med"/>
                     </a:lnL>
                     <a:lnR w="12700" cap="flat" cmpd="sng" algn="ctr">
                       <a:solidFill>
                         <a:schemeClr val="tx1"/>
                       </a:solidFill>
                       <a:prstDash val="solid"/>
-                      <a:round/>
-                      <a:headEnd type="none" w="med" len="med"/>
-                      <a:tailEnd type="none" w="med" len="med"/>
                     </a:lnR>
                     <a:lnT w="12700" cap="flat" cmpd="sng" algn="ctr">
                       <a:solidFill>
                         <a:schemeClr val="tx1"/>
                       </a:solidFill>
                       <a:prstDash val="solid"/>
-                      <a:round/>
-                      <a:headEnd type="none" w="med" len="med"/>
-                      <a:tailEnd type="none" w="med" len="med"/>
                     </a:lnT>
                     <a:lnB w="12700" cap="flat" cmpd="sng" algn="ctr">
                       <a:solidFill>
                         <a:schemeClr val="tx1"/>
                       </a:solidFill>
                       <a:prstDash val="solid"/>
-                      <a:round/>
-                      <a:headEnd type="none" w="med" len="med"/>
-                      <a:tailEnd type="none" w="med" len="med"/>
                     </a:lnB>
                     <a:noFill/>
                   </a:tcPr>
@@ -10081,18 +9989,18 @@
                     <a:bodyPr/>
                     <a:lstStyle/>
                     <a:p>
-                      <a:pPr algn="l" fontAlgn="b">
+                      <a:pPr marL="0" algn="l" defTabSz="457200" rtl="0" eaLnBrk="1" fontAlgn="b" latinLnBrk="0" hangingPunct="1">
                         <a:buNone/>
                       </a:pPr>
                       <a:r>
-                        <a:rPr lang="es-MX" sz="1100" b="0" i="0" u="none" strike="noStrike">
+                        <a:rPr lang="es-MX" sz="1000" u="none" strike="noStrike" kern="1200">
                           <a:solidFill>
                             <a:schemeClr val="tx1"/>
                           </a:solidFill>
                           <a:effectLst/>
                           <a:latin typeface="Aptos (cuerpo)"/>
                         </a:rPr>
-                        <a:t>Pendiente de Firma de convenio de Lumo, Firma de AyO pendiente de firma de Representante Legal</a:t>
+                        <a:t>eventualdiad</a:t>
                       </a:r>
                     </a:p>
                   </a:txBody>
@@ -10102,57 +10010,40 @@
                         <a:schemeClr val="tx1"/>
                       </a:solidFill>
                       <a:prstDash val="solid"/>
-                      <a:round/>
-                      <a:headEnd type="none" w="med" len="med"/>
-                      <a:tailEnd type="none" w="med" len="med"/>
                     </a:lnL>
                     <a:lnR w="12700" cap="flat" cmpd="sng" algn="ctr">
                       <a:solidFill>
                         <a:schemeClr val="tx1"/>
                       </a:solidFill>
                       <a:prstDash val="solid"/>
-                      <a:round/>
-                      <a:headEnd type="none" w="med" len="med"/>
-                      <a:tailEnd type="none" w="med" len="med"/>
                     </a:lnR>
                     <a:lnT w="12700" cap="flat" cmpd="sng" algn="ctr">
                       <a:solidFill>
                         <a:schemeClr val="tx1"/>
                       </a:solidFill>
                       <a:prstDash val="solid"/>
-                      <a:round/>
-                      <a:headEnd type="none" w="med" len="med"/>
-                      <a:tailEnd type="none" w="med" len="med"/>
                     </a:lnT>
                     <a:lnB w="12700" cap="flat" cmpd="sng" algn="ctr">
                       <a:solidFill>
                         <a:schemeClr val="tx1"/>
                       </a:solidFill>
                       <a:prstDash val="solid"/>
-                      <a:round/>
-                      <a:headEnd type="none" w="med" len="med"/>
-                      <a:tailEnd type="none" w="med" len="med"/>
                     </a:lnB>
                     <a:noFill/>
                   </a:tcPr>
                 </a:tc>
-                <a:extLst>
-                  <a:ext uri="{0D108BD9-81ED-4DB2-BD59-A6C34878D82A}">
-                    <a16:rowId xmlns:a16="http://schemas.microsoft.com/office/drawing/2014/main" val="3248437908"/>
-                  </a:ext>
-                </a:extLst>
               </a:tr>
-              <a:tr h="520594">
+              <a:tr h="420000">
                 <a:tc>
                   <a:txBody>
                     <a:bodyPr/>
                     <a:lstStyle/>
                     <a:p>
-                      <a:pPr algn="ctr" fontAlgn="b">
+                      <a:pPr marL="0" algn="ctr" defTabSz="457200" rtl="0" eaLnBrk="1" fontAlgn="b" latinLnBrk="0" hangingPunct="1">
                         <a:buNone/>
                       </a:pPr>
                       <a:r>
-                        <a:rPr lang="es-ES" sz="1100" b="0" i="0" u="none" strike="noStrike">
+                        <a:rPr lang="es-MX" sz="1000" u="none" strike="noStrike" kern="1200">
                           <a:solidFill>
                             <a:schemeClr val="tx1"/>
                           </a:solidFill>
@@ -10161,13 +10052,6 @@
                         </a:rPr>
                         <a:t>2</a:t>
                       </a:r>
-                      <a:endParaRPr lang="es-MX" sz="1100" b="0" i="0" u="none" strike="noStrike">
-                        <a:solidFill>
-                          <a:schemeClr val="tx1"/>
-                        </a:solidFill>
-                        <a:effectLst/>
-                        <a:latin typeface="Aptos (cuerpo)"/>
-                      </a:endParaRPr>
                     </a:p>
                   </a:txBody>
                   <a:tcPr marL="6244" marR="6244" marT="6244" marB="0" anchor="ctr">
@@ -10176,36 +10060,24 @@
                         <a:schemeClr val="tx1"/>
                       </a:solidFill>
                       <a:prstDash val="solid"/>
-                      <a:round/>
-                      <a:headEnd type="none" w="med" len="med"/>
-                      <a:tailEnd type="none" w="med" len="med"/>
                     </a:lnL>
                     <a:lnR w="12700" cap="flat" cmpd="sng" algn="ctr">
                       <a:solidFill>
                         <a:schemeClr val="tx1"/>
                       </a:solidFill>
                       <a:prstDash val="solid"/>
-                      <a:round/>
-                      <a:headEnd type="none" w="med" len="med"/>
-                      <a:tailEnd type="none" w="med" len="med"/>
                     </a:lnR>
                     <a:lnT w="12700" cap="flat" cmpd="sng" algn="ctr">
                       <a:solidFill>
                         <a:schemeClr val="tx1"/>
                       </a:solidFill>
                       <a:prstDash val="solid"/>
-                      <a:round/>
-                      <a:headEnd type="none" w="med" len="med"/>
-                      <a:tailEnd type="none" w="med" len="med"/>
                     </a:lnT>
                     <a:lnB w="12700" cap="flat" cmpd="sng" algn="ctr">
                       <a:solidFill>
                         <a:schemeClr val="tx1"/>
                       </a:solidFill>
                       <a:prstDash val="solid"/>
-                      <a:round/>
-                      <a:headEnd type="none" w="med" len="med"/>
-                      <a:tailEnd type="none" w="med" len="med"/>
                     </a:lnB>
                     <a:noFill/>
                   </a:tcPr>
@@ -10215,20 +10087,18 @@
                     <a:bodyPr/>
                     <a:lstStyle/>
                     <a:p>
-                      <a:pPr algn="l" fontAlgn="b">
+                      <a:pPr marL="0" algn="l" defTabSz="457200" rtl="0" eaLnBrk="1" fontAlgn="b" latinLnBrk="0" hangingPunct="1">
                         <a:buNone/>
                       </a:pPr>
                       <a:r>
-                        <a:rPr lang="es-MX" sz="1100" b="0" i="0" u="none" strike="noStrike" kern="1200" dirty="0">
+                        <a:rPr lang="es-MX" sz="1000" u="none" strike="noStrike" kern="1200">
                           <a:solidFill>
                             <a:schemeClr val="tx1"/>
                           </a:solidFill>
                           <a:effectLst/>
                           <a:latin typeface="Aptos (cuerpo)"/>
-                          <a:ea typeface="+mn-ea"/>
-                          <a:cs typeface="+mn-cs"/>
-                        </a:rPr>
-                        <a:t>Contabilidad || Integración Mecánica – SAE (Fase 1-2)</a:t>
+                        </a:rPr>
+                        <a:t>Operaciones Fleet || Data Lab</a:t>
                       </a:r>
                     </a:p>
                   </a:txBody>
@@ -10238,36 +10108,24 @@
                         <a:schemeClr val="tx1"/>
                       </a:solidFill>
                       <a:prstDash val="solid"/>
-                      <a:round/>
-                      <a:headEnd type="none" w="med" len="med"/>
-                      <a:tailEnd type="none" w="med" len="med"/>
                     </a:lnL>
                     <a:lnR w="12700" cap="flat" cmpd="sng" algn="ctr">
                       <a:solidFill>
                         <a:schemeClr val="tx1"/>
                       </a:solidFill>
                       <a:prstDash val="solid"/>
-                      <a:round/>
-                      <a:headEnd type="none" w="med" len="med"/>
-                      <a:tailEnd type="none" w="med" len="med"/>
                     </a:lnR>
                     <a:lnT w="12700" cap="flat" cmpd="sng" algn="ctr">
                       <a:solidFill>
                         <a:schemeClr val="tx1"/>
                       </a:solidFill>
                       <a:prstDash val="solid"/>
-                      <a:round/>
-                      <a:headEnd type="none" w="med" len="med"/>
-                      <a:tailEnd type="none" w="med" len="med"/>
                     </a:lnT>
                     <a:lnB w="12700" cap="flat" cmpd="sng" algn="ctr">
                       <a:solidFill>
                         <a:schemeClr val="tx1"/>
                       </a:solidFill>
                       <a:prstDash val="solid"/>
-                      <a:round/>
-                      <a:headEnd type="none" w="med" len="med"/>
-                      <a:tailEnd type="none" w="med" len="med"/>
                     </a:lnB>
                     <a:noFill/>
                   </a:tcPr>
@@ -10277,65 +10135,19 @@
                     <a:bodyPr/>
                     <a:lstStyle/>
                     <a:p>
-                      <a:pPr marL="0" lvl="0" indent="0" algn="l">
-                        <a:lnSpc>
-                          <a:spcPct val="100000"/>
-                        </a:lnSpc>
-                        <a:spcBef>
-                          <a:spcPts val="0"/>
-                        </a:spcBef>
-                        <a:spcAft>
-                          <a:spcPts val="0"/>
-                        </a:spcAft>
+                      <a:pPr marL="0" algn="l" defTabSz="457200" rtl="0" eaLnBrk="1" fontAlgn="b" latinLnBrk="0" hangingPunct="1">
                         <a:buNone/>
                       </a:pPr>
                       <a:r>
-                        <a:rPr lang="es-MX" sz="1100" b="0" i="0" u="none" strike="noStrike" kern="1200" noProof="0">
+                        <a:rPr lang="es-MX" sz="1000" u="none" strike="noStrike" kern="1200">
                           <a:solidFill>
                             <a:schemeClr val="tx1"/>
                           </a:solidFill>
                           <a:effectLst/>
                           <a:latin typeface="Aptos (cuerpo)"/>
-                          <a:ea typeface="+mn-ea"/>
-                          <a:cs typeface="+mn-cs"/>
-                        </a:rPr>
-                        <a:t>Se tuvieron imprevistos en la carga del catálogo de refacciones en Mecanica Mx</a:t>
-                      </a:r>
-                    </a:p>
-                    <a:p>
-                      <a:pPr marL="0" lvl="0" indent="0" algn="l">
-                        <a:lnSpc>
-                          <a:spcPct val="100000"/>
-                        </a:lnSpc>
-                        <a:spcBef>
-                          <a:spcPts val="0"/>
-                        </a:spcBef>
-                        <a:spcAft>
-                          <a:spcPts val="0"/>
-                        </a:spcAft>
-                        <a:buNone/>
-                      </a:pPr>
-                      <a:r>
-                        <a:rPr lang="es-MX" sz="1100" b="0" i="0" u="none" strike="noStrike" kern="1200" noProof="0">
-                          <a:solidFill>
-                            <a:schemeClr val="tx1"/>
-                          </a:solidFill>
-                          <a:effectLst/>
-                          <a:latin typeface="Aptos (cuerpo)"/>
-                          <a:ea typeface="+mn-ea"/>
-                          <a:cs typeface="+mn-cs"/>
-                        </a:rPr>
-                        <a:t>Actualización del catálogo de proveedores.</a:t>
-                      </a:r>
-                      <a:endParaRPr lang="es-MX" sz="1100" b="0" i="0" u="none" strike="noStrike" kern="1200">
-                        <a:solidFill>
-                          <a:schemeClr val="tx1"/>
-                        </a:solidFill>
-                        <a:effectLst/>
-                        <a:latin typeface="Aptos (cuerpo)"/>
-                        <a:ea typeface="+mn-ea"/>
-                        <a:cs typeface="+mn-cs"/>
-                      </a:endParaRPr>
+                        </a:rPr>
+                        <a:t>dasdasdasdasd</a:t>
+                      </a:r>
                     </a:p>
                   </a:txBody>
                   <a:tcPr marL="6244" marR="6244" marT="6244" marB="0" anchor="ctr">
@@ -10344,57 +10156,40 @@
                         <a:schemeClr val="tx1"/>
                       </a:solidFill>
                       <a:prstDash val="solid"/>
-                      <a:round/>
-                      <a:headEnd type="none" w="med" len="med"/>
-                      <a:tailEnd type="none" w="med" len="med"/>
                     </a:lnL>
                     <a:lnR w="12700" cap="flat" cmpd="sng" algn="ctr">
                       <a:solidFill>
                         <a:schemeClr val="tx1"/>
                       </a:solidFill>
                       <a:prstDash val="solid"/>
-                      <a:round/>
-                      <a:headEnd type="none" w="med" len="med"/>
-                      <a:tailEnd type="none" w="med" len="med"/>
                     </a:lnR>
                     <a:lnT w="12700" cap="flat" cmpd="sng" algn="ctr">
                       <a:solidFill>
                         <a:schemeClr val="tx1"/>
                       </a:solidFill>
                       <a:prstDash val="solid"/>
-                      <a:round/>
-                      <a:headEnd type="none" w="med" len="med"/>
-                      <a:tailEnd type="none" w="med" len="med"/>
                     </a:lnT>
                     <a:lnB w="12700" cap="flat" cmpd="sng" algn="ctr">
                       <a:solidFill>
                         <a:schemeClr val="tx1"/>
                       </a:solidFill>
                       <a:prstDash val="solid"/>
-                      <a:round/>
-                      <a:headEnd type="none" w="med" len="med"/>
-                      <a:tailEnd type="none" w="med" len="med"/>
                     </a:lnB>
                     <a:noFill/>
                   </a:tcPr>
                 </a:tc>
-                <a:extLst>
-                  <a:ext uri="{0D108BD9-81ED-4DB2-BD59-A6C34878D82A}">
-                    <a16:rowId xmlns:a16="http://schemas.microsoft.com/office/drawing/2014/main" val="1382980361"/>
-                  </a:ext>
-                </a:extLst>
               </a:tr>
-              <a:tr h="718457">
+              <a:tr h="420000">
                 <a:tc>
                   <a:txBody>
                     <a:bodyPr/>
                     <a:lstStyle/>
                     <a:p>
-                      <a:pPr algn="ctr" fontAlgn="b">
+                      <a:pPr marL="0" algn="ctr" defTabSz="457200" rtl="0" eaLnBrk="1" fontAlgn="b" latinLnBrk="0" hangingPunct="1">
                         <a:buNone/>
                       </a:pPr>
                       <a:r>
-                        <a:rPr lang="es-MX" sz="1100" b="0" i="0" u="none" strike="noStrike">
+                        <a:rPr lang="es-MX" sz="1000" u="none" strike="noStrike" kern="1200">
                           <a:solidFill>
                             <a:schemeClr val="tx1"/>
                           </a:solidFill>
@@ -10411,36 +10206,24 @@
                         <a:schemeClr val="tx1"/>
                       </a:solidFill>
                       <a:prstDash val="solid"/>
-                      <a:round/>
-                      <a:headEnd type="none" w="med" len="med"/>
-                      <a:tailEnd type="none" w="med" len="med"/>
                     </a:lnL>
                     <a:lnR w="12700" cap="flat" cmpd="sng" algn="ctr">
                       <a:solidFill>
                         <a:schemeClr val="tx1"/>
                       </a:solidFill>
                       <a:prstDash val="solid"/>
-                      <a:round/>
-                      <a:headEnd type="none" w="med" len="med"/>
-                      <a:tailEnd type="none" w="med" len="med"/>
                     </a:lnR>
                     <a:lnT w="12700" cap="flat" cmpd="sng" algn="ctr">
                       <a:solidFill>
                         <a:schemeClr val="tx1"/>
                       </a:solidFill>
                       <a:prstDash val="solid"/>
-                      <a:round/>
-                      <a:headEnd type="none" w="med" len="med"/>
-                      <a:tailEnd type="none" w="med" len="med"/>
                     </a:lnT>
                     <a:lnB w="12700" cap="flat" cmpd="sng" algn="ctr">
                       <a:solidFill>
                         <a:schemeClr val="tx1"/>
                       </a:solidFill>
                       <a:prstDash val="solid"/>
-                      <a:round/>
-                      <a:headEnd type="none" w="med" len="med"/>
-                      <a:tailEnd type="none" w="med" len="med"/>
                     </a:lnB>
                     <a:noFill/>
                   </a:tcPr>
@@ -10450,26 +10233,19 @@
                     <a:bodyPr/>
                     <a:lstStyle/>
                     <a:p>
-                      <a:pPr lvl="0" algn="l">
+                      <a:pPr marL="0" algn="l" defTabSz="457200" rtl="0" eaLnBrk="1" fontAlgn="b" latinLnBrk="0" hangingPunct="1">
                         <a:buNone/>
                       </a:pPr>
                       <a:r>
-                        <a:rPr lang="es-MX" sz="1100" u="none" strike="noStrike">
+                        <a:rPr lang="es-MX" sz="1000" u="none" strike="noStrike" kern="1200">
                           <a:solidFill>
                             <a:schemeClr val="tx1"/>
                           </a:solidFill>
                           <a:effectLst/>
                           <a:latin typeface="Aptos (cuerpo)"/>
                         </a:rPr>
-                        <a:t>TRIM || MarketPlace || Caddi</a:t>
-                      </a:r>
-                      <a:endParaRPr lang="es-MX" sz="1100" b="0" i="0" u="none" strike="noStrike">
-                        <a:solidFill>
-                          <a:schemeClr val="tx1"/>
-                        </a:solidFill>
-                        <a:effectLst/>
-                        <a:latin typeface="Aptos (cuerpo)"/>
-                      </a:endParaRPr>
+                        <a:t>Operaciones Fleet || Nueva Instancia</a:t>
+                      </a:r>
                     </a:p>
                   </a:txBody>
                   <a:tcPr marL="6244" marR="6244" marT="6244" marB="0" anchor="ctr">
@@ -10478,36 +10254,24 @@
                         <a:schemeClr val="tx1"/>
                       </a:solidFill>
                       <a:prstDash val="solid"/>
-                      <a:round/>
-                      <a:headEnd type="none" w="med" len="med"/>
-                      <a:tailEnd type="none" w="med" len="med"/>
                     </a:lnL>
                     <a:lnR w="12700" cap="flat" cmpd="sng" algn="ctr">
                       <a:solidFill>
                         <a:schemeClr val="tx1"/>
                       </a:solidFill>
                       <a:prstDash val="solid"/>
-                      <a:round/>
-                      <a:headEnd type="none" w="med" len="med"/>
-                      <a:tailEnd type="none" w="med" len="med"/>
                     </a:lnR>
                     <a:lnT w="12700" cap="flat" cmpd="sng" algn="ctr">
                       <a:solidFill>
                         <a:schemeClr val="tx1"/>
                       </a:solidFill>
                       <a:prstDash val="solid"/>
-                      <a:round/>
-                      <a:headEnd type="none" w="med" len="med"/>
-                      <a:tailEnd type="none" w="med" len="med"/>
                     </a:lnT>
                     <a:lnB w="12700" cap="flat" cmpd="sng" algn="ctr">
                       <a:solidFill>
                         <a:schemeClr val="tx1"/>
                       </a:solidFill>
                       <a:prstDash val="solid"/>
-                      <a:round/>
-                      <a:headEnd type="none" w="med" len="med"/>
-                      <a:tailEnd type="none" w="med" len="med"/>
                     </a:lnB>
                     <a:noFill/>
                   </a:tcPr>
@@ -10517,85 +10281,19 @@
                     <a:bodyPr/>
                     <a:lstStyle/>
                     <a:p>
-                      <a:pPr marL="0" lvl="0" indent="0" algn="l">
-                        <a:lnSpc>
-                          <a:spcPct val="100000"/>
-                        </a:lnSpc>
-                        <a:spcBef>
-                          <a:spcPts val="0"/>
-                        </a:spcBef>
-                        <a:spcAft>
-                          <a:spcPts val="0"/>
-                        </a:spcAft>
+                      <a:pPr marL="0" algn="l" defTabSz="457200" rtl="0" eaLnBrk="1" fontAlgn="b" latinLnBrk="0" hangingPunct="1">
                         <a:buNone/>
                       </a:pPr>
                       <a:r>
-                        <a:rPr lang="es-MX" sz="800" b="0" i="0" u="none" strike="noStrike" noProof="0">
-                          <a:solidFill>
-                            <a:schemeClr val="tx1"/>
-                          </a:solidFill>
-                          <a:effectLst/>
-                          <a:latin typeface="Segoe UI"/>
-                          <a:cs typeface="Segoe UI"/>
-                        </a:rPr>
-                        <a:t>E</a:t>
-                      </a:r>
-                      <a:r>
-                        <a:rPr lang="es-MX" sz="1100" u="none" strike="noStrike" kern="1200" noProof="0">
+                        <a:rPr lang="es-MX" sz="1000" u="none" strike="noStrike" kern="1200">
                           <a:solidFill>
                             <a:schemeClr val="tx1"/>
                           </a:solidFill>
                           <a:effectLst/>
                           <a:latin typeface="Aptos (cuerpo)"/>
-                          <a:ea typeface="+mn-ea"/>
-                          <a:cs typeface="+mn-cs"/>
-                        </a:rPr>
-                        <a:t>xistió un retraso en la carga del código AMI en Intelimotor.</a:t>
-                      </a:r>
-                      <a:endParaRPr lang="es-ES" sz="1100" u="none" strike="noStrike" kern="1200" noProof="0">
-                        <a:solidFill>
-                          <a:schemeClr val="tx1"/>
-                        </a:solidFill>
-                        <a:effectLst/>
-                        <a:latin typeface="Aptos (cuerpo)"/>
-                        <a:ea typeface="+mn-ea"/>
-                        <a:cs typeface="+mn-cs"/>
-                      </a:endParaRPr>
-                    </a:p>
-                    <a:p>
-                      <a:pPr marL="0" lvl="0" indent="0" algn="l">
-                        <a:lnSpc>
-                          <a:spcPct val="100000"/>
-                        </a:lnSpc>
-                        <a:spcBef>
-                          <a:spcPts val="0"/>
-                        </a:spcBef>
-                        <a:spcAft>
-                          <a:spcPts val="0"/>
-                        </a:spcAft>
-                        <a:buNone/>
-                      </a:pPr>
-                      <a:r>
-                        <a:rPr lang="es-MX" sz="1100" u="none" strike="noStrike" kern="1200" noProof="0">
-                          <a:solidFill>
-                            <a:schemeClr val="tx1"/>
-                          </a:solidFill>
-                          <a:effectLst/>
-                          <a:latin typeface="Aptos (cuerpo)"/>
-                          <a:ea typeface="+mn-ea"/>
-                          <a:cs typeface="+mn-cs"/>
-                        </a:rPr>
-                        <a:t>Seguros Ana tardó en realizar la validación de los XML de prueba.</a:t>
-                      </a:r>
-                      <a:endParaRPr lang="es-MX" sz="1100" u="none" strike="noStrike" kern="1200">
-                        <a:solidFill>
-                          <a:schemeClr val="tx1"/>
-                        </a:solidFill>
-                        <a:effectLst/>
-                        <a:latin typeface="Aptos (cuerpo)"/>
-                        <a:ea typeface="+mn-ea"/>
-                        <a:cs typeface="+mn-cs"/>
-                      </a:endParaRPr>
+                        </a:rPr>
+                        <a:t>ggdgsefreheh</a:t>
+                      </a:r>
                     </a:p>
                   </a:txBody>
                   <a:tcPr marL="6244" marR="6244" marT="6244" marB="0" anchor="ctr">
@@ -10604,57 +10302,40 @@
                         <a:schemeClr val="tx1"/>
                       </a:solidFill>
                       <a:prstDash val="solid"/>
-                      <a:round/>
-                      <a:headEnd type="none" w="med" len="med"/>
-                      <a:tailEnd type="none" w="med" len="med"/>
                     </a:lnL>
                     <a:lnR w="12700" cap="flat" cmpd="sng" algn="ctr">
                       <a:solidFill>
                         <a:schemeClr val="tx1"/>
                       </a:solidFill>
                       <a:prstDash val="solid"/>
-                      <a:round/>
-                      <a:headEnd type="none" w="med" len="med"/>
-                      <a:tailEnd type="none" w="med" len="med"/>
                     </a:lnR>
                     <a:lnT w="12700" cap="flat" cmpd="sng" algn="ctr">
                       <a:solidFill>
                         <a:schemeClr val="tx1"/>
                       </a:solidFill>
                       <a:prstDash val="solid"/>
-                      <a:round/>
-                      <a:headEnd type="none" w="med" len="med"/>
-                      <a:tailEnd type="none" w="med" len="med"/>
                     </a:lnT>
                     <a:lnB w="12700" cap="flat" cmpd="sng" algn="ctr">
                       <a:solidFill>
                         <a:schemeClr val="tx1"/>
                       </a:solidFill>
                       <a:prstDash val="solid"/>
-                      <a:round/>
-                      <a:headEnd type="none" w="med" len="med"/>
-                      <a:tailEnd type="none" w="med" len="med"/>
                     </a:lnB>
                     <a:noFill/>
                   </a:tcPr>
                 </a:tc>
-                <a:extLst>
-                  <a:ext uri="{0D108BD9-81ED-4DB2-BD59-A6C34878D82A}">
-                    <a16:rowId xmlns:a16="http://schemas.microsoft.com/office/drawing/2014/main" val="2986911556"/>
-                  </a:ext>
-                </a:extLst>
               </a:tr>
-              <a:tr h="594360">
+              <a:tr h="420000">
                 <a:tc>
                   <a:txBody>
                     <a:bodyPr/>
                     <a:lstStyle/>
                     <a:p>
-                      <a:pPr algn="ctr" fontAlgn="b">
+                      <a:pPr marL="0" algn="ctr" defTabSz="457200" rtl="0" eaLnBrk="1" fontAlgn="b" latinLnBrk="0" hangingPunct="1">
                         <a:buNone/>
                       </a:pPr>
                       <a:r>
-                        <a:rPr lang="es-ES" sz="1100" b="0" i="0" u="none" strike="noStrike">
+                        <a:rPr lang="es-MX" sz="1000" u="none" strike="noStrike" kern="1200">
                           <a:solidFill>
                             <a:schemeClr val="tx1"/>
                           </a:solidFill>
@@ -10663,13 +10344,6 @@
                         </a:rPr>
                         <a:t>4</a:t>
                       </a:r>
-                      <a:endParaRPr lang="es-MX" sz="1100" b="0" i="0" u="none" strike="noStrike">
-                        <a:solidFill>
-                          <a:schemeClr val="tx1"/>
-                        </a:solidFill>
-                        <a:effectLst/>
-                        <a:latin typeface="Aptos (cuerpo)"/>
-                      </a:endParaRPr>
                     </a:p>
                   </a:txBody>
                   <a:tcPr marL="6244" marR="6244" marT="6244" marB="0" anchor="ctr">
@@ -10678,36 +10352,24 @@
                         <a:schemeClr val="tx1"/>
                       </a:solidFill>
                       <a:prstDash val="solid"/>
-                      <a:round/>
-                      <a:headEnd type="none" w="med" len="med"/>
-                      <a:tailEnd type="none" w="med" len="med"/>
                     </a:lnL>
                     <a:lnR w="12700" cap="flat" cmpd="sng" algn="ctr">
                       <a:solidFill>
                         <a:schemeClr val="tx1"/>
                       </a:solidFill>
                       <a:prstDash val="solid"/>
-                      <a:round/>
-                      <a:headEnd type="none" w="med" len="med"/>
-                      <a:tailEnd type="none" w="med" len="med"/>
                     </a:lnR>
                     <a:lnT w="12700" cap="flat" cmpd="sng" algn="ctr">
                       <a:solidFill>
                         <a:schemeClr val="tx1"/>
                       </a:solidFill>
                       <a:prstDash val="solid"/>
-                      <a:round/>
-                      <a:headEnd type="none" w="med" len="med"/>
-                      <a:tailEnd type="none" w="med" len="med"/>
                     </a:lnT>
                     <a:lnB w="12700" cap="flat" cmpd="sng" algn="ctr">
                       <a:solidFill>
                         <a:schemeClr val="tx1"/>
                       </a:solidFill>
                       <a:prstDash val="solid"/>
-                      <a:round/>
-                      <a:headEnd type="none" w="med" len="med"/>
-                      <a:tailEnd type="none" w="med" len="med"/>
                     </a:lnB>
                     <a:noFill/>
                   </a:tcPr>
@@ -10717,18 +10379,18 @@
                     <a:bodyPr/>
                     <a:lstStyle/>
                     <a:p>
-                      <a:pPr algn="l" fontAlgn="b">
+                      <a:pPr marL="0" algn="l" defTabSz="457200" rtl="0" eaLnBrk="1" fontAlgn="b" latinLnBrk="0" hangingPunct="1">
                         <a:buNone/>
                       </a:pPr>
                       <a:r>
-                        <a:rPr lang="es-MX" sz="1100" b="0" i="0" u="none" strike="noStrike">
+                        <a:rPr lang="es-MX" sz="1000" u="none" strike="noStrike" kern="1200">
                           <a:solidFill>
                             <a:schemeClr val="tx1"/>
                           </a:solidFill>
                           <a:effectLst/>
                           <a:latin typeface="Aptos (cuerpo)"/>
                         </a:rPr>
-                        <a:t>Operaciones Fleet || Desarrollos</a:t>
+                        <a:t>Migración oficinas Tlalnepantla</a:t>
                       </a:r>
                     </a:p>
                   </a:txBody>
@@ -10738,36 +10400,24 @@
                         <a:schemeClr val="tx1"/>
                       </a:solidFill>
                       <a:prstDash val="solid"/>
-                      <a:round/>
-                      <a:headEnd type="none" w="med" len="med"/>
-                      <a:tailEnd type="none" w="med" len="med"/>
                     </a:lnL>
                     <a:lnR w="12700" cap="flat" cmpd="sng" algn="ctr">
                       <a:solidFill>
                         <a:schemeClr val="tx1"/>
                       </a:solidFill>
                       <a:prstDash val="solid"/>
-                      <a:round/>
-                      <a:headEnd type="none" w="med" len="med"/>
-                      <a:tailEnd type="none" w="med" len="med"/>
                     </a:lnR>
                     <a:lnT w="12700" cap="flat" cmpd="sng" algn="ctr">
                       <a:solidFill>
                         <a:schemeClr val="tx1"/>
                       </a:solidFill>
                       <a:prstDash val="solid"/>
-                      <a:round/>
-                      <a:headEnd type="none" w="med" len="med"/>
-                      <a:tailEnd type="none" w="med" len="med"/>
                     </a:lnT>
                     <a:lnB w="12700" cap="flat" cmpd="sng" algn="ctr">
                       <a:solidFill>
                         <a:schemeClr val="tx1"/>
                       </a:solidFill>
                       <a:prstDash val="solid"/>
-                      <a:round/>
-                      <a:headEnd type="none" w="med" len="med"/>
-                      <a:tailEnd type="none" w="med" len="med"/>
                     </a:lnB>
                     <a:noFill/>
                   </a:tcPr>
@@ -10777,27 +10427,19 @@
                     <a:bodyPr/>
                     <a:lstStyle/>
                     <a:p>
-                      <a:pPr marL="0" indent="0" algn="l" fontAlgn="b">
-                        <a:buFont typeface="Arial" panose="020B0604020202020204" pitchFamily="34" charset="0"/>
+                      <a:pPr marL="0" algn="l" defTabSz="457200" rtl="0" eaLnBrk="1" fontAlgn="b" latinLnBrk="0" hangingPunct="1">
                         <a:buNone/>
                       </a:pPr>
                       <a:r>
-                        <a:rPr lang="es-ES" sz="1100" b="0" i="0" u="none" strike="noStrike">
+                        <a:rPr lang="es-MX" sz="1000" u="none" strike="noStrike" kern="1200">
                           <a:solidFill>
                             <a:schemeClr val="tx1"/>
                           </a:solidFill>
                           <a:effectLst/>
                           <a:latin typeface="Aptos (cuerpo)"/>
                         </a:rPr>
-                        <a:t>Por cargas de trabajo el usuario no ha podido concluir con las pruebas de certificación de Roles y Permisos</a:t>
-                      </a:r>
-                      <a:endParaRPr lang="es-MX" sz="1100" b="0" i="0" u="none" strike="noStrike">
-                        <a:solidFill>
-                          <a:schemeClr val="tx1"/>
-                        </a:solidFill>
-                        <a:effectLst/>
-                        <a:latin typeface="Aptos (cuerpo)"/>
-                      </a:endParaRPr>
+                        <a:t>documetacnion</a:t>
+                      </a:r>
                     </a:p>
                   </a:txBody>
                   <a:tcPr marL="6244" marR="6244" marT="6244" marB="0" anchor="ctr">
@@ -10806,233 +10448,28 @@
                         <a:schemeClr val="tx1"/>
                       </a:solidFill>
                       <a:prstDash val="solid"/>
-                      <a:round/>
-                      <a:headEnd type="none" w="med" len="med"/>
-                      <a:tailEnd type="none" w="med" len="med"/>
                     </a:lnL>
                     <a:lnR w="12700" cap="flat" cmpd="sng" algn="ctr">
                       <a:solidFill>
                         <a:schemeClr val="tx1"/>
                       </a:solidFill>
                       <a:prstDash val="solid"/>
-                      <a:round/>
-                      <a:headEnd type="none" w="med" len="med"/>
-                      <a:tailEnd type="none" w="med" len="med"/>
                     </a:lnR>
                     <a:lnT w="12700" cap="flat" cmpd="sng" algn="ctr">
                       <a:solidFill>
                         <a:schemeClr val="tx1"/>
                       </a:solidFill>
                       <a:prstDash val="solid"/>
-                      <a:round/>
-                      <a:headEnd type="none" w="med" len="med"/>
-                      <a:tailEnd type="none" w="med" len="med"/>
                     </a:lnT>
                     <a:lnB w="12700" cap="flat" cmpd="sng" algn="ctr">
                       <a:solidFill>
                         <a:schemeClr val="tx1"/>
                       </a:solidFill>
                       <a:prstDash val="solid"/>
-                      <a:round/>
-                      <a:headEnd type="none" w="med" len="med"/>
-                      <a:tailEnd type="none" w="med" len="med"/>
                     </a:lnB>
                     <a:noFill/>
                   </a:tcPr>
                 </a:tc>
-                <a:extLst>
-                  <a:ext uri="{0D108BD9-81ED-4DB2-BD59-A6C34878D82A}">
-                    <a16:rowId xmlns:a16="http://schemas.microsoft.com/office/drawing/2014/main" val="1272086280"/>
-                  </a:ext>
-                </a:extLst>
-              </a:tr>
-              <a:tr h="594360">
-                <a:tc>
-                  <a:txBody>
-                    <a:bodyPr/>
-                    <a:lstStyle/>
-                    <a:p>
-                      <a:pPr algn="ctr" fontAlgn="b">
-                        <a:buNone/>
-                      </a:pPr>
-                      <a:r>
-                        <a:rPr lang="es-MX" sz="1100" b="0" i="0" u="none" strike="noStrike">
-                          <a:solidFill>
-                            <a:schemeClr val="tx1"/>
-                          </a:solidFill>
-                          <a:effectLst/>
-                          <a:latin typeface="Aptos (cuerpo)"/>
-                        </a:rPr>
-                        <a:t>5</a:t>
-                      </a:r>
-                    </a:p>
-                  </a:txBody>
-                  <a:tcPr marL="6244" marR="6244" marT="6244" marB="0" anchor="ctr">
-                    <a:lnL w="12700" cap="flat" cmpd="sng" algn="ctr">
-                      <a:solidFill>
-                        <a:schemeClr val="tx1"/>
-                      </a:solidFill>
-                      <a:prstDash val="solid"/>
-                      <a:round/>
-                      <a:headEnd type="none" w="med" len="med"/>
-                      <a:tailEnd type="none" w="med" len="med"/>
-                    </a:lnL>
-                    <a:lnR w="12700" cap="flat" cmpd="sng" algn="ctr">
-                      <a:solidFill>
-                        <a:schemeClr val="tx1"/>
-                      </a:solidFill>
-                      <a:prstDash val="solid"/>
-                      <a:round/>
-                      <a:headEnd type="none" w="med" len="med"/>
-                      <a:tailEnd type="none" w="med" len="med"/>
-                    </a:lnR>
-                    <a:lnT w="12700" cap="flat" cmpd="sng" algn="ctr">
-                      <a:solidFill>
-                        <a:schemeClr val="tx1"/>
-                      </a:solidFill>
-                      <a:prstDash val="solid"/>
-                      <a:round/>
-                      <a:headEnd type="none" w="med" len="med"/>
-                      <a:tailEnd type="none" w="med" len="med"/>
-                    </a:lnT>
-                    <a:lnB w="12700" cap="flat" cmpd="sng" algn="ctr">
-                      <a:solidFill>
-                        <a:schemeClr val="tx1"/>
-                      </a:solidFill>
-                      <a:prstDash val="solid"/>
-                      <a:round/>
-                      <a:headEnd type="none" w="med" len="med"/>
-                      <a:tailEnd type="none" w="med" len="med"/>
-                    </a:lnB>
-                    <a:noFill/>
-                  </a:tcPr>
-                </a:tc>
-                <a:tc>
-                  <a:txBody>
-                    <a:bodyPr/>
-                    <a:lstStyle/>
-                    <a:p>
-                      <a:pPr algn="l" fontAlgn="b">
-                        <a:buNone/>
-                      </a:pPr>
-                      <a:r>
-                        <a:rPr lang="es-MX" sz="1100" b="0" i="0" u="none" strike="noStrike">
-                          <a:solidFill>
-                            <a:schemeClr val="tx1"/>
-                          </a:solidFill>
-                          <a:effectLst/>
-                          <a:latin typeface="Aptos (cuerpo)"/>
-                        </a:rPr>
-                        <a:t>Tesorería || Adcontent H2H</a:t>
-                      </a:r>
-                    </a:p>
-                  </a:txBody>
-                  <a:tcPr marL="6244" marR="6244" marT="6244" marB="0" anchor="ctr">
-                    <a:lnL w="12700" cap="flat" cmpd="sng" algn="ctr">
-                      <a:solidFill>
-                        <a:schemeClr val="tx1"/>
-                      </a:solidFill>
-                      <a:prstDash val="solid"/>
-                      <a:round/>
-                      <a:headEnd type="none" w="med" len="med"/>
-                      <a:tailEnd type="none" w="med" len="med"/>
-                    </a:lnL>
-                    <a:lnR w="12700" cap="flat" cmpd="sng" algn="ctr">
-                      <a:solidFill>
-                        <a:schemeClr val="tx1"/>
-                      </a:solidFill>
-                      <a:prstDash val="solid"/>
-                      <a:round/>
-                      <a:headEnd type="none" w="med" len="med"/>
-                      <a:tailEnd type="none" w="med" len="med"/>
-                    </a:lnR>
-                    <a:lnT w="12700" cap="flat" cmpd="sng" algn="ctr">
-                      <a:solidFill>
-                        <a:schemeClr val="tx1"/>
-                      </a:solidFill>
-                      <a:prstDash val="solid"/>
-                      <a:round/>
-                      <a:headEnd type="none" w="med" len="med"/>
-                      <a:tailEnd type="none" w="med" len="med"/>
-                    </a:lnT>
-                    <a:lnB w="12700" cap="flat" cmpd="sng" algn="ctr">
-                      <a:solidFill>
-                        <a:schemeClr val="tx1"/>
-                      </a:solidFill>
-                      <a:prstDash val="solid"/>
-                      <a:round/>
-                      <a:headEnd type="none" w="med" len="med"/>
-                      <a:tailEnd type="none" w="med" len="med"/>
-                    </a:lnB>
-                    <a:noFill/>
-                  </a:tcPr>
-                </a:tc>
-                <a:tc>
-                  <a:txBody>
-                    <a:bodyPr/>
-                    <a:lstStyle/>
-                    <a:p>
-                      <a:pPr marL="0" indent="0" algn="l" fontAlgn="b">
-                        <a:buFont typeface="Arial" panose="020B0604020202020204" pitchFamily="34" charset="0"/>
-                        <a:buNone/>
-                      </a:pPr>
-                      <a:r>
-                        <a:rPr lang="es-MX" sz="1100" b="0" i="0" u="none" strike="noStrike" dirty="0">
-                          <a:solidFill>
-                            <a:schemeClr val="tx1"/>
-                          </a:solidFill>
-                          <a:effectLst/>
-                          <a:latin typeface="Aptos (cuerpo)"/>
-                        </a:rPr>
-                        <a:t>Pendiente Autorización de Dirección de Finanzas</a:t>
-                      </a:r>
-                    </a:p>
-                  </a:txBody>
-                  <a:tcPr marL="6244" marR="6244" marT="6244" marB="0" anchor="ctr">
-                    <a:lnL w="12700" cap="flat" cmpd="sng" algn="ctr">
-                      <a:solidFill>
-                        <a:schemeClr val="tx1"/>
-                      </a:solidFill>
-                      <a:prstDash val="solid"/>
-                      <a:round/>
-                      <a:headEnd type="none" w="med" len="med"/>
-                      <a:tailEnd type="none" w="med" len="med"/>
-                    </a:lnL>
-                    <a:lnR w="12700" cap="flat" cmpd="sng" algn="ctr">
-                      <a:solidFill>
-                        <a:schemeClr val="tx1"/>
-                      </a:solidFill>
-                      <a:prstDash val="solid"/>
-                      <a:round/>
-                      <a:headEnd type="none" w="med" len="med"/>
-                      <a:tailEnd type="none" w="med" len="med"/>
-                    </a:lnR>
-                    <a:lnT w="12700" cap="flat" cmpd="sng" algn="ctr">
-                      <a:solidFill>
-                        <a:schemeClr val="tx1"/>
-                      </a:solidFill>
-                      <a:prstDash val="solid"/>
-                      <a:round/>
-                      <a:headEnd type="none" w="med" len="med"/>
-                      <a:tailEnd type="none" w="med" len="med"/>
-                    </a:lnT>
-                    <a:lnB w="12700" cap="flat" cmpd="sng" algn="ctr">
-                      <a:solidFill>
-                        <a:schemeClr val="tx1"/>
-                      </a:solidFill>
-                      <a:prstDash val="solid"/>
-                      <a:round/>
-                      <a:headEnd type="none" w="med" len="med"/>
-                      <a:tailEnd type="none" w="med" len="med"/>
-                    </a:lnB>
-                    <a:noFill/>
-                  </a:tcPr>
-                </a:tc>
-                <a:extLst>
-                  <a:ext uri="{0D108BD9-81ED-4DB2-BD59-A6C34878D82A}">
-                    <a16:rowId xmlns:a16="http://schemas.microsoft.com/office/drawing/2014/main" val="2497780819"/>
-                  </a:ext>
-                </a:extLst>
               </a:tr>
             </a:tbl>
           </a:graphicData>

--- a/cierre_base.pptx
+++ b/cierre_base.pptx
@@ -5394,31 +5394,6 @@
           <a:chExt cx="0" cy="0"/>
         </a:xfrm>
       </p:grpSpPr>
-      <p:sp>
-        <p:nvSpPr>
-          <p:cNvPr id="2" name="Título 1">
-            <a:extLst>
-              <a:ext uri="{FF2B5EF4-FFF2-40B4-BE49-F238E27FC236}">
-                <a16:creationId xmlns:a16="http://schemas.microsoft.com/office/drawing/2014/main" id="{8C5096DD-8213-E4D6-FEA5-3E1E3E00F286}"/>
-              </a:ext>
-            </a:extLst>
-          </p:cNvPr>
-          <p:cNvSpPr>
-            <a:spLocks noGrp="1"/>
-          </p:cNvSpPr>
-          <p:nvPr>
-            <p:ph type="ctrTitle"/>
-          </p:nvPr>
-        </p:nvSpPr>
-        <p:spPr/>
-        <p:txBody>
-          <a:bodyPr/>
-          <a:lstStyle/>
-          <a:p>
-            <a:endParaRPr lang="es-MX"/>
-          </a:p>
-        </p:txBody>
-      </p:sp>
       <p:sp>
         <p:nvSpPr>
           <p:cNvPr id="3" name="Rectangle 2"/>

--- a/cierre_base.pptx
+++ b/cierre_base.pptx
@@ -5331,8 +5331,8 @@
         </p:nvSpPr>
         <p:spPr>
           <a:xfrm>
-            <a:off x="1554480" y="4607642"/>
-            <a:ext cx="6858000" cy="282834"/>
+            <a:off x="0" y="4607642"/>
+            <a:ext cx="8686800" cy="282834"/>
           </a:xfrm>
           <a:prstGeom prst="rect">
             <a:avLst/>
@@ -5345,7 +5345,7 @@
           </a:bodyPr>
           <a:lstStyle/>
           <a:p>
-            <a:pPr algn="ctr"/>
+            <a:pPr algn="r"/>
             <a:r>
               <a:rPr lang="es-MX" sz="1388" b="1" dirty="0">
                 <a:solidFill>
@@ -5402,7 +5402,7 @@
         </p:nvSpPr>
         <p:spPr>
           <a:xfrm>
-            <a:off x="73152" y="566928"/>
+            <a:off x="73152" y="932688"/>
             <a:ext cx="1229868" cy="566928"/>
           </a:xfrm>
           <a:prstGeom prst="rect">
@@ -5447,7 +5447,7 @@
         </p:nvSpPr>
         <p:spPr>
           <a:xfrm>
-            <a:off x="73152" y="594360"/>
+            <a:off x="73152" y="960120"/>
             <a:ext cx="1229868" cy="292608"/>
           </a:xfrm>
           <a:prstGeom prst="rect">
@@ -5482,7 +5482,7 @@
         </p:nvSpPr>
         <p:spPr>
           <a:xfrm>
-            <a:off x="73152" y="905256"/>
+            <a:off x="73152" y="1271016"/>
             <a:ext cx="1229868" cy="219456"/>
           </a:xfrm>
           <a:prstGeom prst="rect">
@@ -5517,7 +5517,7 @@
         </p:nvSpPr>
         <p:spPr>
           <a:xfrm>
-            <a:off x="1353312" y="566928"/>
+            <a:off x="1353312" y="932688"/>
             <a:ext cx="1229868" cy="566928"/>
           </a:xfrm>
           <a:prstGeom prst="rect">
@@ -5562,7 +5562,7 @@
         </p:nvSpPr>
         <p:spPr>
           <a:xfrm>
-            <a:off x="1353312" y="594360"/>
+            <a:off x="1353312" y="960120"/>
             <a:ext cx="1229868" cy="292608"/>
           </a:xfrm>
           <a:prstGeom prst="rect">
@@ -5597,7 +5597,7 @@
         </p:nvSpPr>
         <p:spPr>
           <a:xfrm>
-            <a:off x="1353312" y="905256"/>
+            <a:off x="1353312" y="1271016"/>
             <a:ext cx="1229868" cy="219456"/>
           </a:xfrm>
           <a:prstGeom prst="rect">
@@ -5632,7 +5632,7 @@
         </p:nvSpPr>
         <p:spPr>
           <a:xfrm>
-            <a:off x="2633472" y="566928"/>
+            <a:off x="2633472" y="932688"/>
             <a:ext cx="1229868" cy="566928"/>
           </a:xfrm>
           <a:prstGeom prst="rect">
@@ -5677,7 +5677,7 @@
         </p:nvSpPr>
         <p:spPr>
           <a:xfrm>
-            <a:off x="2633472" y="594360"/>
+            <a:off x="2633472" y="960120"/>
             <a:ext cx="1229868" cy="292608"/>
           </a:xfrm>
           <a:prstGeom prst="rect">
@@ -5712,7 +5712,7 @@
         </p:nvSpPr>
         <p:spPr>
           <a:xfrm>
-            <a:off x="2633472" y="905256"/>
+            <a:off x="2633472" y="1271016"/>
             <a:ext cx="1229868" cy="219456"/>
           </a:xfrm>
           <a:prstGeom prst="rect">
@@ -5747,7 +5747,7 @@
         </p:nvSpPr>
         <p:spPr>
           <a:xfrm>
-            <a:off x="3913631" y="566928"/>
+            <a:off x="3913631" y="932688"/>
             <a:ext cx="1229868" cy="566928"/>
           </a:xfrm>
           <a:prstGeom prst="rect">
@@ -5792,7 +5792,7 @@
         </p:nvSpPr>
         <p:spPr>
           <a:xfrm>
-            <a:off x="3913631" y="594360"/>
+            <a:off x="3913631" y="960120"/>
             <a:ext cx="1229868" cy="292608"/>
           </a:xfrm>
           <a:prstGeom prst="rect">
@@ -5827,7 +5827,7 @@
         </p:nvSpPr>
         <p:spPr>
           <a:xfrm>
-            <a:off x="3913631" y="905256"/>
+            <a:off x="3913631" y="1271016"/>
             <a:ext cx="1229868" cy="219456"/>
           </a:xfrm>
           <a:prstGeom prst="rect">
@@ -5863,7 +5863,7 @@
         </p:nvSpPr>
         <p:spPr>
           <a:xfrm>
-            <a:off x="5193792" y="566928"/>
+            <a:off x="5193792" y="932688"/>
             <a:ext cx="1229868" cy="566928"/>
           </a:xfrm>
           <a:prstGeom prst="rect">
@@ -5908,7 +5908,7 @@
         </p:nvSpPr>
         <p:spPr>
           <a:xfrm>
-            <a:off x="5193792" y="594360"/>
+            <a:off x="5193792" y="960120"/>
             <a:ext cx="1229868" cy="292608"/>
           </a:xfrm>
           <a:prstGeom prst="rect">
@@ -5943,7 +5943,7 @@
         </p:nvSpPr>
         <p:spPr>
           <a:xfrm>
-            <a:off x="5193792" y="905256"/>
+            <a:off x="5193792" y="1271016"/>
             <a:ext cx="1229868" cy="219456"/>
           </a:xfrm>
           <a:prstGeom prst="rect">
@@ -5978,7 +5978,7 @@
         </p:nvSpPr>
         <p:spPr>
           <a:xfrm>
-            <a:off x="6473952" y="566928"/>
+            <a:off x="6473952" y="932688"/>
             <a:ext cx="1229868" cy="566928"/>
           </a:xfrm>
           <a:prstGeom prst="rect">
@@ -6023,7 +6023,7 @@
         </p:nvSpPr>
         <p:spPr>
           <a:xfrm>
-            <a:off x="6473952" y="594360"/>
+            <a:off x="6473952" y="960120"/>
             <a:ext cx="1229868" cy="292608"/>
           </a:xfrm>
           <a:prstGeom prst="rect">
@@ -6058,7 +6058,7 @@
         </p:nvSpPr>
         <p:spPr>
           <a:xfrm>
-            <a:off x="6473952" y="905256"/>
+            <a:off x="6473952" y="1271016"/>
             <a:ext cx="1229868" cy="219456"/>
           </a:xfrm>
           <a:prstGeom prst="rect">
@@ -6093,7 +6093,7 @@
         </p:nvSpPr>
         <p:spPr>
           <a:xfrm>
-            <a:off x="7754111" y="566928"/>
+            <a:off x="7754111" y="932688"/>
             <a:ext cx="1229868" cy="566928"/>
           </a:xfrm>
           <a:prstGeom prst="rect">
@@ -6138,7 +6138,7 @@
         </p:nvSpPr>
         <p:spPr>
           <a:xfrm>
-            <a:off x="7754111" y="594360"/>
+            <a:off x="7754111" y="960120"/>
             <a:ext cx="1229868" cy="292608"/>
           </a:xfrm>
           <a:prstGeom prst="rect">
@@ -6173,7 +6173,7 @@
         </p:nvSpPr>
         <p:spPr>
           <a:xfrm>
-            <a:off x="7754111" y="905256"/>
+            <a:off x="7754111" y="1271016"/>
             <a:ext cx="1229868" cy="219456"/>
           </a:xfrm>
           <a:prstGeom prst="rect">
@@ -6208,7 +6208,7 @@
         </p:nvSpPr>
         <p:spPr>
           <a:xfrm>
-            <a:off x="1600200" y="36576"/>
+            <a:off x="1600200" y="402336"/>
             <a:ext cx="5943600" cy="310896"/>
           </a:xfrm>
           <a:prstGeom prst="rect">
@@ -6243,7 +6243,7 @@
         </p:nvSpPr>
         <p:spPr>
           <a:xfrm>
-            <a:off x="0" y="347472"/>
+            <a:off x="0" y="713232"/>
             <a:ext cx="9144000" cy="164592"/>
           </a:xfrm>
           <a:prstGeom prst="rect">
@@ -6279,7 +6279,7 @@
           <p:nvPr/>
         </p:nvGraphicFramePr>
         <p:xfrm>
-          <a:off x="73152" y="1188720"/>
+          <a:off x="73152" y="1554480"/>
           <a:ext cx="8741664" cy="3346704"/>
         </p:xfrm>
         <a:graphic>

--- a/cierre_base.pptx
+++ b/cierre_base.pptx
@@ -10365,7 +10365,7 @@
                           <a:effectLst/>
                           <a:latin typeface="Aptos (cuerpo)"/>
                         </a:rPr>
-                        <a:t>Migración oficinas Tlalnepantla</a:t>
+                        <a:t>Capital Humano || BUK Campos Personalizados</a:t>
                       </a:r>
                     </a:p>
                   </a:txBody>
@@ -10413,7 +10413,153 @@
                           <a:effectLst/>
                           <a:latin typeface="Aptos (cuerpo)"/>
                         </a:rPr>
-                        <a:t>documetacnion</a:t>
+                        <a:t>fsdgshsdh</a:t>
+                      </a:r>
+                    </a:p>
+                  </a:txBody>
+                  <a:tcPr marL="6244" marR="6244" marT="6244" marB="0" anchor="ctr">
+                    <a:lnL w="12700" cap="flat" cmpd="sng" algn="ctr">
+                      <a:solidFill>
+                        <a:schemeClr val="tx1"/>
+                      </a:solidFill>
+                      <a:prstDash val="solid"/>
+                    </a:lnL>
+                    <a:lnR w="12700" cap="flat" cmpd="sng" algn="ctr">
+                      <a:solidFill>
+                        <a:schemeClr val="tx1"/>
+                      </a:solidFill>
+                      <a:prstDash val="solid"/>
+                    </a:lnR>
+                    <a:lnT w="12700" cap="flat" cmpd="sng" algn="ctr">
+                      <a:solidFill>
+                        <a:schemeClr val="tx1"/>
+                      </a:solidFill>
+                      <a:prstDash val="solid"/>
+                    </a:lnT>
+                    <a:lnB w="12700" cap="flat" cmpd="sng" algn="ctr">
+                      <a:solidFill>
+                        <a:schemeClr val="tx1"/>
+                      </a:solidFill>
+                      <a:prstDash val="solid"/>
+                    </a:lnB>
+                    <a:noFill/>
+                  </a:tcPr>
+                </a:tc>
+              </a:tr>
+              <a:tr h="420000">
+                <a:tc>
+                  <a:txBody>
+                    <a:bodyPr/>
+                    <a:lstStyle/>
+                    <a:p>
+                      <a:pPr marL="0" algn="ctr" defTabSz="457200" rtl="0" eaLnBrk="1" fontAlgn="b" latinLnBrk="0" hangingPunct="1">
+                        <a:buNone/>
+                      </a:pPr>
+                      <a:r>
+                        <a:rPr lang="es-MX" sz="1000" u="none" strike="noStrike" kern="1200">
+                          <a:solidFill>
+                            <a:schemeClr val="tx1"/>
+                          </a:solidFill>
+                          <a:effectLst/>
+                          <a:latin typeface="Aptos (cuerpo)"/>
+                        </a:rPr>
+                        <a:t>5</a:t>
+                      </a:r>
+                    </a:p>
+                  </a:txBody>
+                  <a:tcPr marL="6244" marR="6244" marT="6244" marB="0" anchor="ctr">
+                    <a:lnL w="12700" cap="flat" cmpd="sng" algn="ctr">
+                      <a:solidFill>
+                        <a:schemeClr val="tx1"/>
+                      </a:solidFill>
+                      <a:prstDash val="solid"/>
+                    </a:lnL>
+                    <a:lnR w="12700" cap="flat" cmpd="sng" algn="ctr">
+                      <a:solidFill>
+                        <a:schemeClr val="tx1"/>
+                      </a:solidFill>
+                      <a:prstDash val="solid"/>
+                    </a:lnR>
+                    <a:lnT w="12700" cap="flat" cmpd="sng" algn="ctr">
+                      <a:solidFill>
+                        <a:schemeClr val="tx1"/>
+                      </a:solidFill>
+                      <a:prstDash val="solid"/>
+                    </a:lnT>
+                    <a:lnB w="12700" cap="flat" cmpd="sng" algn="ctr">
+                      <a:solidFill>
+                        <a:schemeClr val="tx1"/>
+                      </a:solidFill>
+                      <a:prstDash val="solid"/>
+                    </a:lnB>
+                    <a:noFill/>
+                  </a:tcPr>
+                </a:tc>
+                <a:tc>
+                  <a:txBody>
+                    <a:bodyPr/>
+                    <a:lstStyle/>
+                    <a:p>
+                      <a:pPr marL="0" algn="l" defTabSz="457200" rtl="0" eaLnBrk="1" fontAlgn="b" latinLnBrk="0" hangingPunct="1">
+                        <a:buNone/>
+                      </a:pPr>
+                      <a:r>
+                        <a:rPr lang="es-MX" sz="1000" u="none" strike="noStrike" kern="1200">
+                          <a:solidFill>
+                            <a:schemeClr val="tx1"/>
+                          </a:solidFill>
+                          <a:effectLst/>
+                          <a:latin typeface="Aptos (cuerpo)"/>
+                        </a:rPr>
+                        <a:t>Talleres || Integración Mecanica Mx - SAE</a:t>
+                      </a:r>
+                    </a:p>
+                  </a:txBody>
+                  <a:tcPr marL="6244" marR="6244" marT="6244" marB="0" anchor="ctr">
+                    <a:lnL w="12700" cap="flat" cmpd="sng" algn="ctr">
+                      <a:solidFill>
+                        <a:schemeClr val="tx1"/>
+                      </a:solidFill>
+                      <a:prstDash val="solid"/>
+                    </a:lnL>
+                    <a:lnR w="12700" cap="flat" cmpd="sng" algn="ctr">
+                      <a:solidFill>
+                        <a:schemeClr val="tx1"/>
+                      </a:solidFill>
+                      <a:prstDash val="solid"/>
+                    </a:lnR>
+                    <a:lnT w="12700" cap="flat" cmpd="sng" algn="ctr">
+                      <a:solidFill>
+                        <a:schemeClr val="tx1"/>
+                      </a:solidFill>
+                      <a:prstDash val="solid"/>
+                    </a:lnT>
+                    <a:lnB w="12700" cap="flat" cmpd="sng" algn="ctr">
+                      <a:solidFill>
+                        <a:schemeClr val="tx1"/>
+                      </a:solidFill>
+                      <a:prstDash val="solid"/>
+                    </a:lnB>
+                    <a:noFill/>
+                  </a:tcPr>
+                </a:tc>
+                <a:tc>
+                  <a:txBody>
+                    <a:bodyPr/>
+                    <a:lstStyle/>
+                    <a:p>
+                      <a:pPr marL="0" algn="l" defTabSz="457200" rtl="0" eaLnBrk="1" fontAlgn="b" latinLnBrk="0" hangingPunct="1">
+                        <a:buNone/>
+                      </a:pPr>
+                      <a:r>
+                        <a:rPr lang="es-MX" sz="1000" u="none" strike="noStrike" kern="1200">
+                          <a:solidFill>
+                            <a:schemeClr val="tx1"/>
+                          </a:solidFill>
+                          <a:effectLst/>
+                          <a:latin typeface="Aptos (cuerpo)"/>
+                        </a:rPr>
+                        <a:t>asasfagdgdsgg</a:t>
                       </a:r>
                     </a:p>
                   </a:txBody>

--- a/cierre_base.pptx
+++ b/cierre_base.pptx
@@ -5331,8 +5331,8 @@
         </p:nvSpPr>
         <p:spPr>
           <a:xfrm>
-            <a:off x="0" y="4607642"/>
-            <a:ext cx="8686800" cy="282834"/>
+            <a:off x="1554480" y="4607642"/>
+            <a:ext cx="6858000" cy="282834"/>
           </a:xfrm>
           <a:prstGeom prst="rect">
             <a:avLst/>
@@ -5345,7 +5345,7 @@
           </a:bodyPr>
           <a:lstStyle/>
           <a:p>
-            <a:pPr algn="r"/>
+            <a:pPr algn="ctr"/>
             <a:r>
               <a:rPr lang="es-MX" sz="1388" b="1" dirty="0">
                 <a:solidFill>
@@ -5353,7 +5353,7 @@
                 </a:solidFill>
                 <a:latin typeface="Arial Nova Light"/>
               </a:rPr>
-              <a:t>Cierre semanal del 25 de Junio al 2 de Julio</a:t>
+              <a:t>Cierre semanal del 2 de Julio al 9 de Julio</a:t>
             </a:r>
             <a:endParaRPr lang="es-MX" sz="1400" b="1" dirty="0">
               <a:solidFill>
@@ -5402,7 +5402,7 @@
         </p:nvSpPr>
         <p:spPr>
           <a:xfrm>
-            <a:off x="73152" y="932688"/>
+            <a:off x="73152" y="566928"/>
             <a:ext cx="1229868" cy="566928"/>
           </a:xfrm>
           <a:prstGeom prst="rect">
@@ -5447,7 +5447,7 @@
         </p:nvSpPr>
         <p:spPr>
           <a:xfrm>
-            <a:off x="73152" y="960120"/>
+            <a:off x="73152" y="594360"/>
             <a:ext cx="1229868" cy="292608"/>
           </a:xfrm>
           <a:prstGeom prst="rect">
@@ -5469,7 +5469,7 @@
                 </a:solidFill>
                 <a:latin typeface="Calibri"/>
               </a:rPr>
-              <a:t>16</a:t>
+              <a:t>18</a:t>
             </a:r>
           </a:p>
         </p:txBody>
@@ -5482,7 +5482,7 @@
         </p:nvSpPr>
         <p:spPr>
           <a:xfrm>
-            <a:off x="73152" y="1271016"/>
+            <a:off x="73152" y="905256"/>
             <a:ext cx="1229868" cy="219456"/>
           </a:xfrm>
           <a:prstGeom prst="rect">
@@ -5517,7 +5517,7 @@
         </p:nvSpPr>
         <p:spPr>
           <a:xfrm>
-            <a:off x="1353312" y="932688"/>
+            <a:off x="1353312" y="566928"/>
             <a:ext cx="1229868" cy="566928"/>
           </a:xfrm>
           <a:prstGeom prst="rect">
@@ -5562,7 +5562,7 @@
         </p:nvSpPr>
         <p:spPr>
           <a:xfrm>
-            <a:off x="1353312" y="960120"/>
+            <a:off x="1353312" y="594360"/>
             <a:ext cx="1229868" cy="292608"/>
           </a:xfrm>
           <a:prstGeom prst="rect">
@@ -5584,7 +5584,7 @@
                 </a:solidFill>
                 <a:latin typeface="Calibri"/>
               </a:rPr>
-              <a:t>7</a:t>
+              <a:t>9</a:t>
             </a:r>
           </a:p>
         </p:txBody>
@@ -5597,7 +5597,7 @@
         </p:nvSpPr>
         <p:spPr>
           <a:xfrm>
-            <a:off x="1353312" y="1271016"/>
+            <a:off x="1353312" y="905256"/>
             <a:ext cx="1229868" cy="219456"/>
           </a:xfrm>
           <a:prstGeom prst="rect">
@@ -5632,7 +5632,7 @@
         </p:nvSpPr>
         <p:spPr>
           <a:xfrm>
-            <a:off x="2633472" y="932688"/>
+            <a:off x="2633472" y="566928"/>
             <a:ext cx="1229868" cy="566928"/>
           </a:xfrm>
           <a:prstGeom prst="rect">
@@ -5677,7 +5677,7 @@
         </p:nvSpPr>
         <p:spPr>
           <a:xfrm>
-            <a:off x="2633472" y="960120"/>
+            <a:off x="2633472" y="594360"/>
             <a:ext cx="1229868" cy="292608"/>
           </a:xfrm>
           <a:prstGeom prst="rect">
@@ -5699,7 +5699,7 @@
                 </a:solidFill>
                 <a:latin typeface="Calibri"/>
               </a:rPr>
-              <a:t>4</a:t>
+              <a:t>3</a:t>
             </a:r>
           </a:p>
         </p:txBody>
@@ -5712,7 +5712,7 @@
         </p:nvSpPr>
         <p:spPr>
           <a:xfrm>
-            <a:off x="2633472" y="1271016"/>
+            <a:off x="2633472" y="905256"/>
             <a:ext cx="1229868" cy="219456"/>
           </a:xfrm>
           <a:prstGeom prst="rect">
@@ -5747,7 +5747,7 @@
         </p:nvSpPr>
         <p:spPr>
           <a:xfrm>
-            <a:off x="3913631" y="932688"/>
+            <a:off x="3913631" y="566928"/>
             <a:ext cx="1229868" cy="566928"/>
           </a:xfrm>
           <a:prstGeom prst="rect">
@@ -5792,7 +5792,7 @@
         </p:nvSpPr>
         <p:spPr>
           <a:xfrm>
-            <a:off x="3913631" y="960120"/>
+            <a:off x="3913631" y="594360"/>
             <a:ext cx="1229868" cy="292608"/>
           </a:xfrm>
           <a:prstGeom prst="rect">
@@ -5814,7 +5814,7 @@
                 </a:solidFill>
                 <a:latin typeface="Calibri"/>
               </a:rPr>
-              <a:t>1</a:t>
+              <a:t>2</a:t>
             </a:r>
           </a:p>
         </p:txBody>
@@ -5827,7 +5827,7 @@
         </p:nvSpPr>
         <p:spPr>
           <a:xfrm>
-            <a:off x="3913631" y="1271016"/>
+            <a:off x="3913631" y="905256"/>
             <a:ext cx="1229868" cy="219456"/>
           </a:xfrm>
           <a:prstGeom prst="rect">
@@ -5863,7 +5863,7 @@
         </p:nvSpPr>
         <p:spPr>
           <a:xfrm>
-            <a:off x="5193792" y="932688"/>
+            <a:off x="5193792" y="566928"/>
             <a:ext cx="1229868" cy="566928"/>
           </a:xfrm>
           <a:prstGeom prst="rect">
@@ -5908,7 +5908,7 @@
         </p:nvSpPr>
         <p:spPr>
           <a:xfrm>
-            <a:off x="5193792" y="960120"/>
+            <a:off x="5193792" y="594360"/>
             <a:ext cx="1229868" cy="292608"/>
           </a:xfrm>
           <a:prstGeom prst="rect">
@@ -5943,7 +5943,7 @@
         </p:nvSpPr>
         <p:spPr>
           <a:xfrm>
-            <a:off x="5193792" y="1271016"/>
+            <a:off x="5193792" y="905256"/>
             <a:ext cx="1229868" cy="219456"/>
           </a:xfrm>
           <a:prstGeom prst="rect">
@@ -5978,7 +5978,7 @@
         </p:nvSpPr>
         <p:spPr>
           <a:xfrm>
-            <a:off x="6473952" y="932688"/>
+            <a:off x="6473952" y="566928"/>
             <a:ext cx="1229868" cy="566928"/>
           </a:xfrm>
           <a:prstGeom prst="rect">
@@ -6023,7 +6023,7 @@
         </p:nvSpPr>
         <p:spPr>
           <a:xfrm>
-            <a:off x="6473952" y="960120"/>
+            <a:off x="6473952" y="594360"/>
             <a:ext cx="1229868" cy="292608"/>
           </a:xfrm>
           <a:prstGeom prst="rect">
@@ -6045,7 +6045,7 @@
                 </a:solidFill>
                 <a:latin typeface="Calibri"/>
               </a:rPr>
-              <a:t>6</a:t>
+              <a:t>3</a:t>
             </a:r>
           </a:p>
         </p:txBody>
@@ -6058,7 +6058,7 @@
         </p:nvSpPr>
         <p:spPr>
           <a:xfrm>
-            <a:off x="6473952" y="1271016"/>
+            <a:off x="6473952" y="905256"/>
             <a:ext cx="1229868" cy="219456"/>
           </a:xfrm>
           <a:prstGeom prst="rect">
@@ -6093,7 +6093,7 @@
         </p:nvSpPr>
         <p:spPr>
           <a:xfrm>
-            <a:off x="7754111" y="932688"/>
+            <a:off x="7754111" y="566928"/>
             <a:ext cx="1229868" cy="566928"/>
           </a:xfrm>
           <a:prstGeom prst="rect">
@@ -6138,7 +6138,7 @@
         </p:nvSpPr>
         <p:spPr>
           <a:xfrm>
-            <a:off x="7754111" y="960120"/>
+            <a:off x="7754111" y="594360"/>
             <a:ext cx="1229868" cy="292608"/>
           </a:xfrm>
           <a:prstGeom prst="rect">
@@ -6173,7 +6173,7 @@
         </p:nvSpPr>
         <p:spPr>
           <a:xfrm>
-            <a:off x="7754111" y="1271016"/>
+            <a:off x="7754111" y="905256"/>
             <a:ext cx="1229868" cy="219456"/>
           </a:xfrm>
           <a:prstGeom prst="rect">
@@ -6208,7 +6208,7 @@
         </p:nvSpPr>
         <p:spPr>
           <a:xfrm>
-            <a:off x="1600200" y="402336"/>
+            <a:off x="1600200" y="36576"/>
             <a:ext cx="5943600" cy="310896"/>
           </a:xfrm>
           <a:prstGeom prst="rect">
@@ -6243,7 +6243,7 @@
         </p:nvSpPr>
         <p:spPr>
           <a:xfrm>
-            <a:off x="0" y="713232"/>
+            <a:off x="0" y="347472"/>
             <a:ext cx="9144000" cy="164592"/>
           </a:xfrm>
           <a:prstGeom prst="rect">
@@ -6265,7 +6265,7 @@
                 </a:solidFill>
                 <a:latin typeface="Calibri"/>
               </a:rPr>
-              <a:t>Cierre semanal del 25 de Junio al 2 de Julio</a:t>
+              <a:t>Cierre semanal del 2 de Julio al 9 de Julio</a:t>
             </a:r>
           </a:p>
         </p:txBody>
@@ -6279,8 +6279,8 @@
           <p:nvPr/>
         </p:nvGraphicFramePr>
         <p:xfrm>
-          <a:off x="73152" y="1554480"/>
-          <a:ext cx="8741664" cy="3346704"/>
+          <a:off x="73152" y="1188720"/>
+          <a:ext cx="8741664" cy="3739896"/>
         </p:xfrm>
         <a:graphic>
           <a:graphicData uri="http://schemas.openxmlformats.org/drawingml/2006/table">
@@ -6590,7 +6590,7 @@
                           </a:solidFill>
                           <a:latin typeface="Calibri"/>
                         </a:rPr>
-                        <a:t>98%</a:t>
+                        <a:t>82%</a:t>
                       </a:r>
                     </a:p>
                   </a:txBody>
@@ -6613,7 +6613,7 @@
                           </a:solidFill>
                           <a:latin typeface="Calibri"/>
                         </a:rPr>
-                        <a:t>97%</a:t>
+                        <a:t>100%</a:t>
                       </a:r>
                     </a:p>
                   </a:txBody>
@@ -6632,11 +6632,11 @@
                       <a:r>
                         <a:rPr sz="700" b="1">
                           <a:solidFill>
-                            <a:srgbClr val="22C55E"/>
-                          </a:solidFill>
-                          <a:latin typeface="Calibri"/>
-                        </a:rPr>
-                        <a:t>98%</a:t>
+                            <a:srgbClr val="EF4444"/>
+                          </a:solidFill>
+                          <a:latin typeface="Calibri"/>
+                        </a:rPr>
+                        <a:t>82%</a:t>
                       </a:r>
                     </a:p>
                   </a:txBody>
@@ -6644,12 +6644,12 @@
                     <a:gradFill>
                       <a:gsLst>
                         <a:gs pos="0">
-                          <a:srgbClr val="22C55E"/>
+                          <a:srgbClr val="EF4444"/>
                         </a:gs>
-                        <a:gs pos="98000">
-                          <a:srgbClr val="22C55E"/>
+                        <a:gs pos="82000">
+                          <a:srgbClr val="EF4444"/>
                         </a:gs>
-                        <a:gs pos="98500">
+                        <a:gs pos="82500">
                           <a:srgbClr val="E2E2E2"/>
                         </a:gs>
                         <a:gs pos="100000">
@@ -6669,11 +6669,11 @@
                       <a:r>
                         <a:rPr sz="700" b="1">
                           <a:solidFill>
-                            <a:srgbClr val="22C55E"/>
-                          </a:solidFill>
-                          <a:latin typeface="Calibri"/>
-                        </a:rPr>
-                        <a:t>A tiempo</a:t>
+                            <a:srgbClr val="EF4444"/>
+                          </a:solidFill>
+                          <a:latin typeface="Calibri"/>
+                        </a:rPr>
+                        <a:t>Atrasado</a:t>
                       </a:r>
                     </a:p>
                   </a:txBody>
@@ -7371,7 +7371,7 @@
                           </a:solidFill>
                           <a:latin typeface="Calibri"/>
                         </a:rPr>
-                        <a:t>90%</a:t>
+                        <a:t>91%</a:t>
                       </a:r>
                     </a:p>
                   </a:txBody>
@@ -7748,6 +7748,1522 @@
                           </a:solidFill>
                           <a:latin typeface="Calibri"/>
                         </a:rPr>
+                        <a:t>100%</a:t>
+                      </a:r>
+                    </a:p>
+                  </a:txBody>
+                  <a:tcPr>
+                    <a:solidFill>
+                      <a:srgbClr val="F5F7FA"/>
+                    </a:solidFill>
+                  </a:tcPr>
+                </a:tc>
+                <a:tc>
+                  <a:txBody>
+                    <a:bodyPr wrap="square"/>
+                    <a:lstStyle/>
+                    <a:p>
+                      <a:pPr algn="ctr"/>
+                      <a:r>
+                        <a:rPr sz="700" b="0">
+                          <a:solidFill>
+                            <a:srgbClr val="555555"/>
+                          </a:solidFill>
+                          <a:latin typeface="Calibri"/>
+                        </a:rPr>
+                        <a:t>100%</a:t>
+                      </a:r>
+                    </a:p>
+                  </a:txBody>
+                  <a:tcPr>
+                    <a:solidFill>
+                      <a:srgbClr val="F5F7FA"/>
+                    </a:solidFill>
+                  </a:tcPr>
+                </a:tc>
+                <a:tc>
+                  <a:txBody>
+                    <a:bodyPr wrap="square"/>
+                    <a:lstStyle/>
+                    <a:p>
+                      <a:pPr algn="r"/>
+                      <a:r>
+                        <a:rPr sz="700" b="1">
+                          <a:solidFill>
+                            <a:srgbClr val="22C55E"/>
+                          </a:solidFill>
+                          <a:latin typeface="Calibri"/>
+                        </a:rPr>
+                        <a:t>100%</a:t>
+                      </a:r>
+                    </a:p>
+                  </a:txBody>
+                  <a:tcPr>
+                    <a:solidFill>
+                      <a:srgbClr val="22C55E"/>
+                    </a:solidFill>
+                  </a:tcPr>
+                </a:tc>
+                <a:tc>
+                  <a:txBody>
+                    <a:bodyPr wrap="square"/>
+                    <a:lstStyle/>
+                    <a:p>
+                      <a:pPr algn="ctr"/>
+                      <a:r>
+                        <a:rPr sz="700" b="1">
+                          <a:solidFill>
+                            <a:srgbClr val="22C55E"/>
+                          </a:solidFill>
+                          <a:latin typeface="Calibri"/>
+                        </a:rPr>
+                        <a:t>Terminado</a:t>
+                      </a:r>
+                    </a:p>
+                  </a:txBody>
+                  <a:tcPr>
+                    <a:solidFill>
+                      <a:srgbClr val="F5F7FA"/>
+                    </a:solidFill>
+                  </a:tcPr>
+                </a:tc>
+              </a:tr>
+              <a:tr h="196596">
+                <a:tc>
+                  <a:txBody>
+                    <a:bodyPr wrap="square"/>
+                    <a:lstStyle/>
+                    <a:p>
+                      <a:pPr algn="ctr"/>
+                      <a:r>
+                        <a:rPr sz="700" b="1">
+                          <a:solidFill>
+                            <a:srgbClr val="1A2340"/>
+                          </a:solidFill>
+                          <a:latin typeface="Calibri"/>
+                        </a:rPr>
+                        <a:t>Proyecto</a:t>
+                      </a:r>
+                    </a:p>
+                  </a:txBody>
+                  <a:tcPr>
+                    <a:solidFill>
+                      <a:srgbClr val="FFFFFF"/>
+                    </a:solidFill>
+                  </a:tcPr>
+                </a:tc>
+                <a:tc>
+                  <a:txBody>
+                    <a:bodyPr wrap="square"/>
+                    <a:lstStyle/>
+                    <a:p>
+                      <a:pPr algn="l"/>
+                      <a:r>
+                        <a:rPr sz="700" b="0">
+                          <a:solidFill>
+                            <a:srgbClr val="1A2340"/>
+                          </a:solidFill>
+                          <a:latin typeface="Calibri"/>
+                        </a:rPr>
+                        <a:t>Operaciones Fleet || Lobby Fix</a:t>
+                      </a:r>
+                    </a:p>
+                  </a:txBody>
+                  <a:tcPr>
+                    <a:solidFill>
+                      <a:srgbClr val="FFFFFF"/>
+                    </a:solidFill>
+                  </a:tcPr>
+                </a:tc>
+                <a:tc>
+                  <a:txBody>
+                    <a:bodyPr wrap="square"/>
+                    <a:lstStyle/>
+                    <a:p>
+                      <a:pPr algn="ctr"/>
+                      <a:r>
+                        <a:rPr sz="700" b="0">
+                          <a:solidFill>
+                            <a:srgbClr val="555555"/>
+                          </a:solidFill>
+                          <a:latin typeface="Calibri"/>
+                        </a:rPr>
+                        <a:t>11/11/2025</a:t>
+                      </a:r>
+                    </a:p>
+                  </a:txBody>
+                  <a:tcPr>
+                    <a:solidFill>
+                      <a:srgbClr val="FFFFFF"/>
+                    </a:solidFill>
+                  </a:tcPr>
+                </a:tc>
+                <a:tc>
+                  <a:txBody>
+                    <a:bodyPr wrap="square"/>
+                    <a:lstStyle/>
+                    <a:p>
+                      <a:pPr algn="ctr"/>
+                      <a:r>
+                        <a:rPr sz="700" b="0">
+                          <a:solidFill>
+                            <a:srgbClr val="555555"/>
+                          </a:solidFill>
+                          <a:latin typeface="Calibri"/>
+                        </a:rPr>
+                        <a:t>29/06/2026</a:t>
+                      </a:r>
+                    </a:p>
+                  </a:txBody>
+                  <a:tcPr>
+                    <a:solidFill>
+                      <a:srgbClr val="FFFFFF"/>
+                    </a:solidFill>
+                  </a:tcPr>
+                </a:tc>
+                <a:tc>
+                  <a:txBody>
+                    <a:bodyPr wrap="square"/>
+                    <a:lstStyle/>
+                    <a:p>
+                      <a:pPr algn="ctr"/>
+                      <a:r>
+                        <a:rPr sz="700" b="1">
+                          <a:solidFill>
+                            <a:srgbClr val="1A2340"/>
+                          </a:solidFill>
+                          <a:latin typeface="Calibri"/>
+                        </a:rPr>
+                        <a:t>100%</a:t>
+                      </a:r>
+                    </a:p>
+                  </a:txBody>
+                  <a:tcPr>
+                    <a:solidFill>
+                      <a:srgbClr val="FFFFFF"/>
+                    </a:solidFill>
+                  </a:tcPr>
+                </a:tc>
+                <a:tc>
+                  <a:txBody>
+                    <a:bodyPr wrap="square"/>
+                    <a:lstStyle/>
+                    <a:p>
+                      <a:pPr algn="ctr"/>
+                      <a:r>
+                        <a:rPr sz="700" b="0">
+                          <a:solidFill>
+                            <a:srgbClr val="555555"/>
+                          </a:solidFill>
+                          <a:latin typeface="Calibri"/>
+                        </a:rPr>
+                        <a:t>100%</a:t>
+                      </a:r>
+                    </a:p>
+                  </a:txBody>
+                  <a:tcPr>
+                    <a:solidFill>
+                      <a:srgbClr val="FFFFFF"/>
+                    </a:solidFill>
+                  </a:tcPr>
+                </a:tc>
+                <a:tc>
+                  <a:txBody>
+                    <a:bodyPr wrap="square"/>
+                    <a:lstStyle/>
+                    <a:p>
+                      <a:pPr algn="r"/>
+                      <a:r>
+                        <a:rPr sz="700" b="1">
+                          <a:solidFill>
+                            <a:srgbClr val="22C55E"/>
+                          </a:solidFill>
+                          <a:latin typeface="Calibri"/>
+                        </a:rPr>
+                        <a:t>100%</a:t>
+                      </a:r>
+                    </a:p>
+                  </a:txBody>
+                  <a:tcPr>
+                    <a:solidFill>
+                      <a:srgbClr val="22C55E"/>
+                    </a:solidFill>
+                  </a:tcPr>
+                </a:tc>
+                <a:tc>
+                  <a:txBody>
+                    <a:bodyPr wrap="square"/>
+                    <a:lstStyle/>
+                    <a:p>
+                      <a:pPr algn="ctr"/>
+                      <a:r>
+                        <a:rPr sz="700" b="1">
+                          <a:solidFill>
+                            <a:srgbClr val="22C55E"/>
+                          </a:solidFill>
+                          <a:latin typeface="Calibri"/>
+                        </a:rPr>
+                        <a:t>Terminado</a:t>
+                      </a:r>
+                    </a:p>
+                  </a:txBody>
+                  <a:tcPr>
+                    <a:solidFill>
+                      <a:srgbClr val="FFFFFF"/>
+                    </a:solidFill>
+                  </a:tcPr>
+                </a:tc>
+              </a:tr>
+              <a:tr h="196596">
+                <a:tc>
+                  <a:txBody>
+                    <a:bodyPr wrap="square"/>
+                    <a:lstStyle/>
+                    <a:p>
+                      <a:pPr algn="ctr"/>
+                      <a:r>
+                        <a:rPr sz="700" b="1">
+                          <a:solidFill>
+                            <a:srgbClr val="1A2340"/>
+                          </a:solidFill>
+                          <a:latin typeface="Calibri"/>
+                        </a:rPr>
+                        <a:t>Proyecto</a:t>
+                      </a:r>
+                    </a:p>
+                  </a:txBody>
+                  <a:tcPr>
+                    <a:solidFill>
+                      <a:srgbClr val="F5F7FA"/>
+                    </a:solidFill>
+                  </a:tcPr>
+                </a:tc>
+                <a:tc>
+                  <a:txBody>
+                    <a:bodyPr wrap="square"/>
+                    <a:lstStyle/>
+                    <a:p>
+                      <a:pPr algn="l"/>
+                      <a:r>
+                        <a:rPr sz="700" b="0">
+                          <a:solidFill>
+                            <a:srgbClr val="1A2340"/>
+                          </a:solidFill>
+                          <a:latin typeface="Calibri"/>
+                        </a:rPr>
+                        <a:t>Operaciones Fleet || Nexcar || Desarrollos</a:t>
+                      </a:r>
+                    </a:p>
+                  </a:txBody>
+                  <a:tcPr>
+                    <a:solidFill>
+                      <a:srgbClr val="F5F7FA"/>
+                    </a:solidFill>
+                  </a:tcPr>
+                </a:tc>
+                <a:tc>
+                  <a:txBody>
+                    <a:bodyPr wrap="square"/>
+                    <a:lstStyle/>
+                    <a:p>
+                      <a:pPr algn="ctr"/>
+                      <a:r>
+                        <a:rPr sz="700" b="0">
+                          <a:solidFill>
+                            <a:srgbClr val="555555"/>
+                          </a:solidFill>
+                          <a:latin typeface="Calibri"/>
+                        </a:rPr>
+                        <a:t>05/03/2026</a:t>
+                      </a:r>
+                    </a:p>
+                  </a:txBody>
+                  <a:tcPr>
+                    <a:solidFill>
+                      <a:srgbClr val="F5F7FA"/>
+                    </a:solidFill>
+                  </a:tcPr>
+                </a:tc>
+                <a:tc>
+                  <a:txBody>
+                    <a:bodyPr wrap="square"/>
+                    <a:lstStyle/>
+                    <a:p>
+                      <a:pPr algn="ctr"/>
+                      <a:r>
+                        <a:rPr sz="700" b="0">
+                          <a:solidFill>
+                            <a:srgbClr val="555555"/>
+                          </a:solidFill>
+                          <a:latin typeface="Calibri"/>
+                        </a:rPr>
+                        <a:t>10/07/2026</a:t>
+                      </a:r>
+                    </a:p>
+                  </a:txBody>
+                  <a:tcPr>
+                    <a:solidFill>
+                      <a:srgbClr val="F5F7FA"/>
+                    </a:solidFill>
+                  </a:tcPr>
+                </a:tc>
+                <a:tc>
+                  <a:txBody>
+                    <a:bodyPr wrap="square"/>
+                    <a:lstStyle/>
+                    <a:p>
+                      <a:pPr algn="ctr"/>
+                      <a:r>
+                        <a:rPr sz="700" b="1">
+                          <a:solidFill>
+                            <a:srgbClr val="1A2340"/>
+                          </a:solidFill>
+                          <a:latin typeface="Calibri"/>
+                        </a:rPr>
+                        <a:t>100%</a:t>
+                      </a:r>
+                    </a:p>
+                  </a:txBody>
+                  <a:tcPr>
+                    <a:solidFill>
+                      <a:srgbClr val="F5F7FA"/>
+                    </a:solidFill>
+                  </a:tcPr>
+                </a:tc>
+                <a:tc>
+                  <a:txBody>
+                    <a:bodyPr wrap="square"/>
+                    <a:lstStyle/>
+                    <a:p>
+                      <a:pPr algn="ctr"/>
+                      <a:r>
+                        <a:rPr sz="700" b="0">
+                          <a:solidFill>
+                            <a:srgbClr val="555555"/>
+                          </a:solidFill>
+                          <a:latin typeface="Calibri"/>
+                        </a:rPr>
+                        <a:t>96%</a:t>
+                      </a:r>
+                    </a:p>
+                  </a:txBody>
+                  <a:tcPr>
+                    <a:solidFill>
+                      <a:srgbClr val="F5F7FA"/>
+                    </a:solidFill>
+                  </a:tcPr>
+                </a:tc>
+                <a:tc>
+                  <a:txBody>
+                    <a:bodyPr wrap="square"/>
+                    <a:lstStyle/>
+                    <a:p>
+                      <a:pPr algn="r"/>
+                      <a:r>
+                        <a:rPr sz="700" b="1">
+                          <a:solidFill>
+                            <a:srgbClr val="22C55E"/>
+                          </a:solidFill>
+                          <a:latin typeface="Calibri"/>
+                        </a:rPr>
+                        <a:t>100%</a:t>
+                      </a:r>
+                    </a:p>
+                  </a:txBody>
+                  <a:tcPr>
+                    <a:solidFill>
+                      <a:srgbClr val="22C55E"/>
+                    </a:solidFill>
+                  </a:tcPr>
+                </a:tc>
+                <a:tc>
+                  <a:txBody>
+                    <a:bodyPr wrap="square"/>
+                    <a:lstStyle/>
+                    <a:p>
+                      <a:pPr algn="ctr"/>
+                      <a:r>
+                        <a:rPr sz="700" b="1">
+                          <a:solidFill>
+                            <a:srgbClr val="22C55E"/>
+                          </a:solidFill>
+                          <a:latin typeface="Calibri"/>
+                        </a:rPr>
+                        <a:t>Terminado</a:t>
+                      </a:r>
+                    </a:p>
+                  </a:txBody>
+                  <a:tcPr>
+                    <a:solidFill>
+                      <a:srgbClr val="F5F7FA"/>
+                    </a:solidFill>
+                  </a:tcPr>
+                </a:tc>
+              </a:tr>
+              <a:tr h="196596">
+                <a:tc>
+                  <a:txBody>
+                    <a:bodyPr wrap="square"/>
+                    <a:lstStyle/>
+                    <a:p>
+                      <a:pPr algn="ctr"/>
+                      <a:r>
+                        <a:rPr sz="700" b="1">
+                          <a:solidFill>
+                            <a:srgbClr val="1A2340"/>
+                          </a:solidFill>
+                          <a:latin typeface="Calibri"/>
+                        </a:rPr>
+                        <a:t>Proyecto</a:t>
+                      </a:r>
+                    </a:p>
+                  </a:txBody>
+                  <a:tcPr>
+                    <a:solidFill>
+                      <a:srgbClr val="FFFFFF"/>
+                    </a:solidFill>
+                  </a:tcPr>
+                </a:tc>
+                <a:tc>
+                  <a:txBody>
+                    <a:bodyPr wrap="square"/>
+                    <a:lstStyle/>
+                    <a:p>
+                      <a:pPr algn="l"/>
+                      <a:r>
+                        <a:rPr sz="700" b="0">
+                          <a:solidFill>
+                            <a:srgbClr val="1A2340"/>
+                          </a:solidFill>
+                          <a:latin typeface="Calibri"/>
+                        </a:rPr>
+                        <a:t>Operaciones Fleet || Data Lab</a:t>
+                      </a:r>
+                    </a:p>
+                  </a:txBody>
+                  <a:tcPr>
+                    <a:solidFill>
+                      <a:srgbClr val="FFFFFF"/>
+                    </a:solidFill>
+                  </a:tcPr>
+                </a:tc>
+                <a:tc>
+                  <a:txBody>
+                    <a:bodyPr wrap="square"/>
+                    <a:lstStyle/>
+                    <a:p>
+                      <a:pPr algn="ctr"/>
+                      <a:r>
+                        <a:rPr sz="700" b="0">
+                          <a:solidFill>
+                            <a:srgbClr val="555555"/>
+                          </a:solidFill>
+                          <a:latin typeface="Calibri"/>
+                        </a:rPr>
+                        <a:t>20/01/2026</a:t>
+                      </a:r>
+                    </a:p>
+                  </a:txBody>
+                  <a:tcPr>
+                    <a:solidFill>
+                      <a:srgbClr val="FFFFFF"/>
+                    </a:solidFill>
+                  </a:tcPr>
+                </a:tc>
+                <a:tc>
+                  <a:txBody>
+                    <a:bodyPr wrap="square"/>
+                    <a:lstStyle/>
+                    <a:p>
+                      <a:pPr algn="ctr"/>
+                      <a:r>
+                        <a:rPr sz="700" b="0">
+                          <a:solidFill>
+                            <a:srgbClr val="555555"/>
+                          </a:solidFill>
+                          <a:latin typeface="Calibri"/>
+                        </a:rPr>
+                        <a:t>22/06/2026</a:t>
+                      </a:r>
+                    </a:p>
+                  </a:txBody>
+                  <a:tcPr>
+                    <a:solidFill>
+                      <a:srgbClr val="FFFFFF"/>
+                    </a:solidFill>
+                  </a:tcPr>
+                </a:tc>
+                <a:tc>
+                  <a:txBody>
+                    <a:bodyPr wrap="square"/>
+                    <a:lstStyle/>
+                    <a:p>
+                      <a:pPr algn="ctr"/>
+                      <a:r>
+                        <a:rPr sz="700" b="1">
+                          <a:solidFill>
+                            <a:srgbClr val="1A2340"/>
+                          </a:solidFill>
+                          <a:latin typeface="Calibri"/>
+                        </a:rPr>
+                        <a:t>100%</a:t>
+                      </a:r>
+                    </a:p>
+                  </a:txBody>
+                  <a:tcPr>
+                    <a:solidFill>
+                      <a:srgbClr val="FFFFFF"/>
+                    </a:solidFill>
+                  </a:tcPr>
+                </a:tc>
+                <a:tc>
+                  <a:txBody>
+                    <a:bodyPr wrap="square"/>
+                    <a:lstStyle/>
+                    <a:p>
+                      <a:pPr algn="ctr"/>
+                      <a:r>
+                        <a:rPr sz="700" b="0">
+                          <a:solidFill>
+                            <a:srgbClr val="555555"/>
+                          </a:solidFill>
+                          <a:latin typeface="Calibri"/>
+                        </a:rPr>
+                        <a:t>100%</a:t>
+                      </a:r>
+                    </a:p>
+                  </a:txBody>
+                  <a:tcPr>
+                    <a:solidFill>
+                      <a:srgbClr val="FFFFFF"/>
+                    </a:solidFill>
+                  </a:tcPr>
+                </a:tc>
+                <a:tc>
+                  <a:txBody>
+                    <a:bodyPr wrap="square"/>
+                    <a:lstStyle/>
+                    <a:p>
+                      <a:pPr algn="r"/>
+                      <a:r>
+                        <a:rPr sz="700" b="1">
+                          <a:solidFill>
+                            <a:srgbClr val="22C55E"/>
+                          </a:solidFill>
+                          <a:latin typeface="Calibri"/>
+                        </a:rPr>
+                        <a:t>100%</a:t>
+                      </a:r>
+                    </a:p>
+                  </a:txBody>
+                  <a:tcPr>
+                    <a:solidFill>
+                      <a:srgbClr val="22C55E"/>
+                    </a:solidFill>
+                  </a:tcPr>
+                </a:tc>
+                <a:tc>
+                  <a:txBody>
+                    <a:bodyPr wrap="square"/>
+                    <a:lstStyle/>
+                    <a:p>
+                      <a:pPr algn="ctr"/>
+                      <a:r>
+                        <a:rPr sz="700" b="1">
+                          <a:solidFill>
+                            <a:srgbClr val="22C55E"/>
+                          </a:solidFill>
+                          <a:latin typeface="Calibri"/>
+                        </a:rPr>
+                        <a:t>Terminado</a:t>
+                      </a:r>
+                    </a:p>
+                  </a:txBody>
+                  <a:tcPr>
+                    <a:solidFill>
+                      <a:srgbClr val="FFFFFF"/>
+                    </a:solidFill>
+                  </a:tcPr>
+                </a:tc>
+              </a:tr>
+              <a:tr h="196596">
+                <a:tc>
+                  <a:txBody>
+                    <a:bodyPr wrap="square"/>
+                    <a:lstStyle/>
+                    <a:p>
+                      <a:pPr algn="ctr"/>
+                      <a:r>
+                        <a:rPr sz="700" b="1">
+                          <a:solidFill>
+                            <a:srgbClr val="1A2340"/>
+                          </a:solidFill>
+                          <a:latin typeface="Calibri"/>
+                        </a:rPr>
+                        <a:t>Proyecto</a:t>
+                      </a:r>
+                    </a:p>
+                  </a:txBody>
+                  <a:tcPr>
+                    <a:solidFill>
+                      <a:srgbClr val="F5F7FA"/>
+                    </a:solidFill>
+                  </a:tcPr>
+                </a:tc>
+                <a:tc>
+                  <a:txBody>
+                    <a:bodyPr wrap="square"/>
+                    <a:lstStyle/>
+                    <a:p>
+                      <a:pPr algn="l"/>
+                      <a:r>
+                        <a:rPr sz="700" b="0">
+                          <a:solidFill>
+                            <a:srgbClr val="1A2340"/>
+                          </a:solidFill>
+                          <a:latin typeface="Calibri"/>
+                        </a:rPr>
+                        <a:t>Cartera || Cambio de Pac de Timbrado</a:t>
+                      </a:r>
+                    </a:p>
+                  </a:txBody>
+                  <a:tcPr>
+                    <a:solidFill>
+                      <a:srgbClr val="F5F7FA"/>
+                    </a:solidFill>
+                  </a:tcPr>
+                </a:tc>
+                <a:tc>
+                  <a:txBody>
+                    <a:bodyPr wrap="square"/>
+                    <a:lstStyle/>
+                    <a:p>
+                      <a:pPr algn="ctr"/>
+                      <a:r>
+                        <a:rPr sz="700" b="0">
+                          <a:solidFill>
+                            <a:srgbClr val="555555"/>
+                          </a:solidFill>
+                          <a:latin typeface="Calibri"/>
+                        </a:rPr>
+                        <a:t>07/07/2025</a:t>
+                      </a:r>
+                    </a:p>
+                  </a:txBody>
+                  <a:tcPr>
+                    <a:solidFill>
+                      <a:srgbClr val="F5F7FA"/>
+                    </a:solidFill>
+                  </a:tcPr>
+                </a:tc>
+                <a:tc>
+                  <a:txBody>
+                    <a:bodyPr wrap="square"/>
+                    <a:lstStyle/>
+                    <a:p>
+                      <a:pPr algn="ctr"/>
+                      <a:r>
+                        <a:rPr sz="700" b="0">
+                          <a:solidFill>
+                            <a:srgbClr val="555555"/>
+                          </a:solidFill>
+                          <a:latin typeface="Calibri"/>
+                        </a:rPr>
+                        <a:t>25/02/2026</a:t>
+                      </a:r>
+                    </a:p>
+                  </a:txBody>
+                  <a:tcPr>
+                    <a:solidFill>
+                      <a:srgbClr val="F5F7FA"/>
+                    </a:solidFill>
+                  </a:tcPr>
+                </a:tc>
+                <a:tc>
+                  <a:txBody>
+                    <a:bodyPr wrap="square"/>
+                    <a:lstStyle/>
+                    <a:p>
+                      <a:pPr algn="ctr"/>
+                      <a:r>
+                        <a:rPr sz="700" b="1">
+                          <a:solidFill>
+                            <a:srgbClr val="1A2340"/>
+                          </a:solidFill>
+                          <a:latin typeface="Calibri"/>
+                        </a:rPr>
+                        <a:t>100%</a:t>
+                      </a:r>
+                    </a:p>
+                  </a:txBody>
+                  <a:tcPr>
+                    <a:solidFill>
+                      <a:srgbClr val="F5F7FA"/>
+                    </a:solidFill>
+                  </a:tcPr>
+                </a:tc>
+                <a:tc>
+                  <a:txBody>
+                    <a:bodyPr wrap="square"/>
+                    <a:lstStyle/>
+                    <a:p>
+                      <a:pPr algn="ctr"/>
+                      <a:r>
+                        <a:rPr sz="700" b="0">
+                          <a:solidFill>
+                            <a:srgbClr val="555555"/>
+                          </a:solidFill>
+                          <a:latin typeface="Calibri"/>
+                        </a:rPr>
+                        <a:t>100%</a:t>
+                      </a:r>
+                    </a:p>
+                  </a:txBody>
+                  <a:tcPr>
+                    <a:solidFill>
+                      <a:srgbClr val="F5F7FA"/>
+                    </a:solidFill>
+                  </a:tcPr>
+                </a:tc>
+                <a:tc>
+                  <a:txBody>
+                    <a:bodyPr wrap="square"/>
+                    <a:lstStyle/>
+                    <a:p>
+                      <a:pPr algn="r"/>
+                      <a:r>
+                        <a:rPr sz="700" b="1">
+                          <a:solidFill>
+                            <a:srgbClr val="22C55E"/>
+                          </a:solidFill>
+                          <a:latin typeface="Calibri"/>
+                        </a:rPr>
+                        <a:t>100%</a:t>
+                      </a:r>
+                    </a:p>
+                  </a:txBody>
+                  <a:tcPr>
+                    <a:solidFill>
+                      <a:srgbClr val="22C55E"/>
+                    </a:solidFill>
+                  </a:tcPr>
+                </a:tc>
+                <a:tc>
+                  <a:txBody>
+                    <a:bodyPr wrap="square"/>
+                    <a:lstStyle/>
+                    <a:p>
+                      <a:pPr algn="ctr"/>
+                      <a:r>
+                        <a:rPr sz="700" b="1">
+                          <a:solidFill>
+                            <a:srgbClr val="22C55E"/>
+                          </a:solidFill>
+                          <a:latin typeface="Calibri"/>
+                        </a:rPr>
+                        <a:t>Terminado</a:t>
+                      </a:r>
+                    </a:p>
+                  </a:txBody>
+                  <a:tcPr>
+                    <a:solidFill>
+                      <a:srgbClr val="F5F7FA"/>
+                    </a:solidFill>
+                  </a:tcPr>
+                </a:tc>
+              </a:tr>
+              <a:tr h="196596">
+                <a:tc>
+                  <a:txBody>
+                    <a:bodyPr wrap="square"/>
+                    <a:lstStyle/>
+                    <a:p>
+                      <a:pPr algn="ctr"/>
+                      <a:r>
+                        <a:rPr sz="700" b="1">
+                          <a:solidFill>
+                            <a:srgbClr val="1A2340"/>
+                          </a:solidFill>
+                          <a:latin typeface="Calibri"/>
+                        </a:rPr>
+                        <a:t>Proyecto</a:t>
+                      </a:r>
+                    </a:p>
+                  </a:txBody>
+                  <a:tcPr>
+                    <a:solidFill>
+                      <a:srgbClr val="FFFFFF"/>
+                    </a:solidFill>
+                  </a:tcPr>
+                </a:tc>
+                <a:tc>
+                  <a:txBody>
+                    <a:bodyPr wrap="square"/>
+                    <a:lstStyle/>
+                    <a:p>
+                      <a:pPr algn="l"/>
+                      <a:r>
+                        <a:rPr sz="700" b="0">
+                          <a:solidFill>
+                            <a:srgbClr val="1A2340"/>
+                          </a:solidFill>
+                          <a:latin typeface="Calibri"/>
+                        </a:rPr>
+                        <a:t>Operaciones Fleet || Nueva Instancia</a:t>
+                      </a:r>
+                    </a:p>
+                  </a:txBody>
+                  <a:tcPr>
+                    <a:solidFill>
+                      <a:srgbClr val="FFFFFF"/>
+                    </a:solidFill>
+                  </a:tcPr>
+                </a:tc>
+                <a:tc>
+                  <a:txBody>
+                    <a:bodyPr wrap="square"/>
+                    <a:lstStyle/>
+                    <a:p>
+                      <a:pPr algn="ctr"/>
+                      <a:r>
+                        <a:rPr sz="700" b="0">
+                          <a:solidFill>
+                            <a:srgbClr val="555555"/>
+                          </a:solidFill>
+                          <a:latin typeface="Calibri"/>
+                        </a:rPr>
+                        <a:t>08/08/2025</a:t>
+                      </a:r>
+                    </a:p>
+                  </a:txBody>
+                  <a:tcPr>
+                    <a:solidFill>
+                      <a:srgbClr val="FFFFFF"/>
+                    </a:solidFill>
+                  </a:tcPr>
+                </a:tc>
+                <a:tc>
+                  <a:txBody>
+                    <a:bodyPr wrap="square"/>
+                    <a:lstStyle/>
+                    <a:p>
+                      <a:pPr algn="ctr"/>
+                      <a:r>
+                        <a:rPr sz="700" b="0">
+                          <a:solidFill>
+                            <a:srgbClr val="555555"/>
+                          </a:solidFill>
+                          <a:latin typeface="Calibri"/>
+                        </a:rPr>
+                        <a:t>01/06/2026</a:t>
+                      </a:r>
+                    </a:p>
+                  </a:txBody>
+                  <a:tcPr>
+                    <a:solidFill>
+                      <a:srgbClr val="FFFFFF"/>
+                    </a:solidFill>
+                  </a:tcPr>
+                </a:tc>
+                <a:tc>
+                  <a:txBody>
+                    <a:bodyPr wrap="square"/>
+                    <a:lstStyle/>
+                    <a:p>
+                      <a:pPr algn="ctr"/>
+                      <a:r>
+                        <a:rPr sz="700" b="1">
+                          <a:solidFill>
+                            <a:srgbClr val="1A2340"/>
+                          </a:solidFill>
+                          <a:latin typeface="Calibri"/>
+                        </a:rPr>
+                        <a:t>100%</a:t>
+                      </a:r>
+                    </a:p>
+                  </a:txBody>
+                  <a:tcPr>
+                    <a:solidFill>
+                      <a:srgbClr val="FFFFFF"/>
+                    </a:solidFill>
+                  </a:tcPr>
+                </a:tc>
+                <a:tc>
+                  <a:txBody>
+                    <a:bodyPr wrap="square"/>
+                    <a:lstStyle/>
+                    <a:p>
+                      <a:pPr algn="ctr"/>
+                      <a:r>
+                        <a:rPr sz="700" b="0">
+                          <a:solidFill>
+                            <a:srgbClr val="555555"/>
+                          </a:solidFill>
+                          <a:latin typeface="Calibri"/>
+                        </a:rPr>
+                        <a:t>100%</a:t>
+                      </a:r>
+                    </a:p>
+                  </a:txBody>
+                  <a:tcPr>
+                    <a:solidFill>
+                      <a:srgbClr val="FFFFFF"/>
+                    </a:solidFill>
+                  </a:tcPr>
+                </a:tc>
+                <a:tc>
+                  <a:txBody>
+                    <a:bodyPr wrap="square"/>
+                    <a:lstStyle/>
+                    <a:p>
+                      <a:pPr algn="r"/>
+                      <a:r>
+                        <a:rPr sz="700" b="1">
+                          <a:solidFill>
+                            <a:srgbClr val="22C55E"/>
+                          </a:solidFill>
+                          <a:latin typeface="Calibri"/>
+                        </a:rPr>
+                        <a:t>100%</a:t>
+                      </a:r>
+                    </a:p>
+                  </a:txBody>
+                  <a:tcPr>
+                    <a:solidFill>
+                      <a:srgbClr val="22C55E"/>
+                    </a:solidFill>
+                  </a:tcPr>
+                </a:tc>
+                <a:tc>
+                  <a:txBody>
+                    <a:bodyPr wrap="square"/>
+                    <a:lstStyle/>
+                    <a:p>
+                      <a:pPr algn="ctr"/>
+                      <a:r>
+                        <a:rPr sz="700" b="1">
+                          <a:solidFill>
+                            <a:srgbClr val="22C55E"/>
+                          </a:solidFill>
+                          <a:latin typeface="Calibri"/>
+                        </a:rPr>
+                        <a:t>Terminado</a:t>
+                      </a:r>
+                    </a:p>
+                  </a:txBody>
+                  <a:tcPr>
+                    <a:solidFill>
+                      <a:srgbClr val="FFFFFF"/>
+                    </a:solidFill>
+                  </a:tcPr>
+                </a:tc>
+              </a:tr>
+              <a:tr h="196596">
+                <a:tc>
+                  <a:txBody>
+                    <a:bodyPr wrap="square"/>
+                    <a:lstStyle/>
+                    <a:p>
+                      <a:pPr algn="ctr"/>
+                      <a:r>
+                        <a:rPr sz="700" b="1">
+                          <a:solidFill>
+                            <a:srgbClr val="1A2340"/>
+                          </a:solidFill>
+                          <a:latin typeface="Calibri"/>
+                        </a:rPr>
+                        <a:t>Proyecto</a:t>
+                      </a:r>
+                    </a:p>
+                  </a:txBody>
+                  <a:tcPr>
+                    <a:solidFill>
+                      <a:srgbClr val="F5F7FA"/>
+                    </a:solidFill>
+                  </a:tcPr>
+                </a:tc>
+                <a:tc>
+                  <a:txBody>
+                    <a:bodyPr wrap="square"/>
+                    <a:lstStyle/>
+                    <a:p>
+                      <a:pPr algn="l"/>
+                      <a:r>
+                        <a:rPr sz="700" b="0">
+                          <a:solidFill>
+                            <a:srgbClr val="1A2340"/>
+                          </a:solidFill>
+                          <a:latin typeface="Calibri"/>
+                        </a:rPr>
+                        <a:t>Tesoreria || Adcontent H2H</a:t>
+                      </a:r>
+                    </a:p>
+                  </a:txBody>
+                  <a:tcPr>
+                    <a:solidFill>
+                      <a:srgbClr val="F5F7FA"/>
+                    </a:solidFill>
+                  </a:tcPr>
+                </a:tc>
+                <a:tc>
+                  <a:txBody>
+                    <a:bodyPr wrap="square"/>
+                    <a:lstStyle/>
+                    <a:p>
+                      <a:pPr algn="ctr"/>
+                      <a:r>
+                        <a:rPr sz="700" b="0">
+                          <a:solidFill>
+                            <a:srgbClr val="555555"/>
+                          </a:solidFill>
+                          <a:latin typeface="Calibri"/>
+                        </a:rPr>
+                        <a:t>07/04/2026</a:t>
+                      </a:r>
+                    </a:p>
+                  </a:txBody>
+                  <a:tcPr>
+                    <a:solidFill>
+                      <a:srgbClr val="F5F7FA"/>
+                    </a:solidFill>
+                  </a:tcPr>
+                </a:tc>
+                <a:tc>
+                  <a:txBody>
+                    <a:bodyPr wrap="square"/>
+                    <a:lstStyle/>
+                    <a:p>
+                      <a:pPr algn="ctr"/>
+                      <a:r>
+                        <a:rPr sz="700" b="0">
+                          <a:solidFill>
+                            <a:srgbClr val="555555"/>
+                          </a:solidFill>
+                          <a:latin typeface="Calibri"/>
+                        </a:rPr>
+                        <a:t>26/08/2026</a:t>
+                      </a:r>
+                    </a:p>
+                  </a:txBody>
+                  <a:tcPr>
+                    <a:solidFill>
+                      <a:srgbClr val="F5F7FA"/>
+                    </a:solidFill>
+                  </a:tcPr>
+                </a:tc>
+                <a:tc>
+                  <a:txBody>
+                    <a:bodyPr wrap="square"/>
+                    <a:lstStyle/>
+                    <a:p>
+                      <a:pPr algn="ctr"/>
+                      <a:r>
+                        <a:rPr sz="700" b="1">
+                          <a:solidFill>
+                            <a:srgbClr val="1A2340"/>
+                          </a:solidFill>
+                          <a:latin typeface="Calibri"/>
+                        </a:rPr>
+                        <a:t>22%</a:t>
+                      </a:r>
+                    </a:p>
+                  </a:txBody>
+                  <a:tcPr>
+                    <a:solidFill>
+                      <a:srgbClr val="F5F7FA"/>
+                    </a:solidFill>
+                  </a:tcPr>
+                </a:tc>
+                <a:tc>
+                  <a:txBody>
+                    <a:bodyPr wrap="square"/>
+                    <a:lstStyle/>
+                    <a:p>
+                      <a:pPr algn="ctr"/>
+                      <a:r>
+                        <a:rPr sz="700" b="0">
+                          <a:solidFill>
+                            <a:srgbClr val="555555"/>
+                          </a:solidFill>
+                          <a:latin typeface="Calibri"/>
+                        </a:rPr>
+                        <a:t>63%</a:t>
+                      </a:r>
+                    </a:p>
+                  </a:txBody>
+                  <a:tcPr>
+                    <a:solidFill>
+                      <a:srgbClr val="F5F7FA"/>
+                    </a:solidFill>
+                  </a:tcPr>
+                </a:tc>
+                <a:tc>
+                  <a:txBody>
+                    <a:bodyPr wrap="square"/>
+                    <a:lstStyle/>
+                    <a:p>
+                      <a:pPr algn="r"/>
+                      <a:r>
+                        <a:rPr sz="700" b="1">
+                          <a:solidFill>
+                            <a:srgbClr val="EF4444"/>
+                          </a:solidFill>
+                          <a:latin typeface="Calibri"/>
+                        </a:rPr>
+                        <a:t>22%</a:t>
+                      </a:r>
+                    </a:p>
+                  </a:txBody>
+                  <a:tcPr>
+                    <a:gradFill>
+                      <a:gsLst>
+                        <a:gs pos="0">
+                          <a:srgbClr val="EF4444"/>
+                        </a:gs>
+                        <a:gs pos="22000">
+                          <a:srgbClr val="EF4444"/>
+                        </a:gs>
+                        <a:gs pos="22500">
+                          <a:srgbClr val="E2E2E2"/>
+                        </a:gs>
+                        <a:gs pos="100000">
+                          <a:srgbClr val="E2E2E2"/>
+                        </a:gs>
+                      </a:gsLst>
+                      <a:lin ang="0" scaled="0"/>
+                    </a:gradFill>
+                  </a:tcPr>
+                </a:tc>
+                <a:tc>
+                  <a:txBody>
+                    <a:bodyPr wrap="square"/>
+                    <a:lstStyle/>
+                    <a:p>
+                      <a:pPr algn="ctr"/>
+                      <a:r>
+                        <a:rPr sz="700" b="1">
+                          <a:solidFill>
+                            <a:srgbClr val="EF4444"/>
+                          </a:solidFill>
+                          <a:latin typeface="Calibri"/>
+                        </a:rPr>
+                        <a:t>Atrasado</a:t>
+                      </a:r>
+                    </a:p>
+                  </a:txBody>
+                  <a:tcPr>
+                    <a:solidFill>
+                      <a:srgbClr val="F5F7FA"/>
+                    </a:solidFill>
+                  </a:tcPr>
+                </a:tc>
+              </a:tr>
+              <a:tr h="196596">
+                <a:tc>
+                  <a:txBody>
+                    <a:bodyPr wrap="square"/>
+                    <a:lstStyle/>
+                    <a:p>
+                      <a:pPr algn="ctr"/>
+                      <a:r>
+                        <a:rPr sz="700" b="1">
+                          <a:solidFill>
+                            <a:srgbClr val="1A2340"/>
+                          </a:solidFill>
+                          <a:latin typeface="Calibri"/>
+                        </a:rPr>
+                        <a:t>Proyecto</a:t>
+                      </a:r>
+                    </a:p>
+                  </a:txBody>
+                  <a:tcPr>
+                    <a:solidFill>
+                      <a:srgbClr val="FFFFFF"/>
+                    </a:solidFill>
+                  </a:tcPr>
+                </a:tc>
+                <a:tc>
+                  <a:txBody>
+                    <a:bodyPr wrap="square"/>
+                    <a:lstStyle/>
+                    <a:p>
+                      <a:pPr algn="l"/>
+                      <a:r>
+                        <a:rPr sz="700" b="0">
+                          <a:solidFill>
+                            <a:srgbClr val="1A2340"/>
+                          </a:solidFill>
+                          <a:latin typeface="Calibri"/>
+                        </a:rPr>
+                        <a:t>Talleres || Integración Mecanica Mx - SAE</a:t>
+                      </a:r>
+                    </a:p>
+                  </a:txBody>
+                  <a:tcPr>
+                    <a:solidFill>
+                      <a:srgbClr val="FFFFFF"/>
+                    </a:solidFill>
+                  </a:tcPr>
+                </a:tc>
+                <a:tc>
+                  <a:txBody>
+                    <a:bodyPr wrap="square"/>
+                    <a:lstStyle/>
+                    <a:p>
+                      <a:pPr algn="ctr"/>
+                      <a:r>
+                        <a:rPr sz="700" b="0">
+                          <a:solidFill>
+                            <a:srgbClr val="555555"/>
+                          </a:solidFill>
+                          <a:latin typeface="Calibri"/>
+                        </a:rPr>
+                        <a:t>20/04/2026</a:t>
+                      </a:r>
+                    </a:p>
+                  </a:txBody>
+                  <a:tcPr>
+                    <a:solidFill>
+                      <a:srgbClr val="FFFFFF"/>
+                    </a:solidFill>
+                  </a:tcPr>
+                </a:tc>
+                <a:tc>
+                  <a:txBody>
+                    <a:bodyPr wrap="square"/>
+                    <a:lstStyle/>
+                    <a:p>
+                      <a:pPr algn="ctr"/>
+                      <a:r>
+                        <a:rPr sz="700" b="0">
+                          <a:solidFill>
+                            <a:srgbClr val="555555"/>
+                          </a:solidFill>
+                          <a:latin typeface="Calibri"/>
+                        </a:rPr>
+                        <a:t>20/07/2026</a:t>
+                      </a:r>
+                    </a:p>
+                  </a:txBody>
+                  <a:tcPr>
+                    <a:solidFill>
+                      <a:srgbClr val="FFFFFF"/>
+                    </a:solidFill>
+                  </a:tcPr>
+                </a:tc>
+                <a:tc>
+                  <a:txBody>
+                    <a:bodyPr wrap="square"/>
+                    <a:lstStyle/>
+                    <a:p>
+                      <a:pPr algn="ctr"/>
+                      <a:r>
+                        <a:rPr sz="700" b="1">
+                          <a:solidFill>
+                            <a:srgbClr val="1A2340"/>
+                          </a:solidFill>
+                          <a:latin typeface="Calibri"/>
+                        </a:rPr>
+                        <a:t>80%</a:t>
+                      </a:r>
+                    </a:p>
+                  </a:txBody>
+                  <a:tcPr>
+                    <a:solidFill>
+                      <a:srgbClr val="FFFFFF"/>
+                    </a:solidFill>
+                  </a:tcPr>
+                </a:tc>
+                <a:tc>
+                  <a:txBody>
+                    <a:bodyPr wrap="square"/>
+                    <a:lstStyle/>
+                    <a:p>
+                      <a:pPr algn="ctr"/>
+                      <a:r>
+                        <a:rPr sz="700" b="0">
+                          <a:solidFill>
+                            <a:srgbClr val="555555"/>
+                          </a:solidFill>
+                          <a:latin typeface="Calibri"/>
+                        </a:rPr>
+                        <a:t>84%</a:t>
+                      </a:r>
+                    </a:p>
+                  </a:txBody>
+                  <a:tcPr>
+                    <a:solidFill>
+                      <a:srgbClr val="FFFFFF"/>
+                    </a:solidFill>
+                  </a:tcPr>
+                </a:tc>
+                <a:tc>
+                  <a:txBody>
+                    <a:bodyPr wrap="square"/>
+                    <a:lstStyle/>
+                    <a:p>
+                      <a:pPr algn="r"/>
+                      <a:r>
+                        <a:rPr sz="700" b="1">
+                          <a:solidFill>
+                            <a:srgbClr val="F59E0B"/>
+                          </a:solidFill>
+                          <a:latin typeface="Calibri"/>
+                        </a:rPr>
+                        <a:t>80%</a:t>
+                      </a:r>
+                    </a:p>
+                  </a:txBody>
+                  <a:tcPr>
+                    <a:gradFill>
+                      <a:gsLst>
+                        <a:gs pos="0">
+                          <a:srgbClr val="F59E0B"/>
+                        </a:gs>
+                        <a:gs pos="80000">
+                          <a:srgbClr val="F59E0B"/>
+                        </a:gs>
+                        <a:gs pos="80500">
+                          <a:srgbClr val="E2E2E2"/>
+                        </a:gs>
+                        <a:gs pos="100000">
+                          <a:srgbClr val="E2E2E2"/>
+                        </a:gs>
+                      </a:gsLst>
+                      <a:lin ang="0" scaled="0"/>
+                    </a:gradFill>
+                  </a:tcPr>
+                </a:tc>
+                <a:tc>
+                  <a:txBody>
+                    <a:bodyPr wrap="square"/>
+                    <a:lstStyle/>
+                    <a:p>
+                      <a:pPr algn="ctr"/>
+                      <a:r>
+                        <a:rPr sz="700" b="1">
+                          <a:solidFill>
+                            <a:srgbClr val="F59E0B"/>
+                          </a:solidFill>
+                          <a:latin typeface="Calibri"/>
+                        </a:rPr>
+                        <a:t>Riesgo de atraso</a:t>
+                      </a:r>
+                    </a:p>
+                  </a:txBody>
+                  <a:tcPr>
+                    <a:solidFill>
+                      <a:srgbClr val="FFFFFF"/>
+                    </a:solidFill>
+                  </a:tcPr>
+                </a:tc>
+              </a:tr>
+              <a:tr h="196596">
+                <a:tc>
+                  <a:txBody>
+                    <a:bodyPr wrap="square"/>
+                    <a:lstStyle/>
+                    <a:p>
+                      <a:pPr algn="ctr"/>
+                      <a:r>
+                        <a:rPr sz="700" b="1">
+                          <a:solidFill>
+                            <a:srgbClr val="1A2340"/>
+                          </a:solidFill>
+                          <a:latin typeface="Calibri"/>
+                        </a:rPr>
+                        <a:t>Proyecto</a:t>
+                      </a:r>
+                    </a:p>
+                  </a:txBody>
+                  <a:tcPr>
+                    <a:solidFill>
+                      <a:srgbClr val="F5F7FA"/>
+                    </a:solidFill>
+                  </a:tcPr>
+                </a:tc>
+                <a:tc>
+                  <a:txBody>
+                    <a:bodyPr wrap="square"/>
+                    <a:lstStyle/>
+                    <a:p>
+                      <a:pPr algn="l"/>
+                      <a:r>
+                        <a:rPr sz="700" b="0">
+                          <a:solidFill>
+                            <a:srgbClr val="1A2340"/>
+                          </a:solidFill>
+                          <a:latin typeface="Calibri"/>
+                        </a:rPr>
+                        <a:t>Contabilidad || Integración Mecanica-SAE (Fase 2)</a:t>
+                      </a:r>
+                    </a:p>
+                  </a:txBody>
+                  <a:tcPr>
+                    <a:solidFill>
+                      <a:srgbClr val="F5F7FA"/>
+                    </a:solidFill>
+                  </a:tcPr>
+                </a:tc>
+                <a:tc>
+                  <a:txBody>
+                    <a:bodyPr wrap="square"/>
+                    <a:lstStyle/>
+                    <a:p>
+                      <a:pPr algn="ctr"/>
+                      <a:r>
+                        <a:rPr sz="700" b="0">
+                          <a:solidFill>
+                            <a:srgbClr val="555555"/>
+                          </a:solidFill>
+                          <a:latin typeface="Calibri"/>
+                        </a:rPr>
+                        <a:t>21/04/2026</a:t>
+                      </a:r>
+                    </a:p>
+                  </a:txBody>
+                  <a:tcPr>
+                    <a:solidFill>
+                      <a:srgbClr val="F5F7FA"/>
+                    </a:solidFill>
+                  </a:tcPr>
+                </a:tc>
+                <a:tc>
+                  <a:txBody>
+                    <a:bodyPr wrap="square"/>
+                    <a:lstStyle/>
+                    <a:p>
+                      <a:pPr algn="ctr"/>
+                      <a:r>
+                        <a:rPr sz="700" b="0">
+                          <a:solidFill>
+                            <a:srgbClr val="555555"/>
+                          </a:solidFill>
+                          <a:latin typeface="Calibri"/>
+                        </a:rPr>
+                        <a:t>12/06/2026</a:t>
+                      </a:r>
+                    </a:p>
+                  </a:txBody>
+                  <a:tcPr>
+                    <a:solidFill>
+                      <a:srgbClr val="F5F7FA"/>
+                    </a:solidFill>
+                  </a:tcPr>
+                </a:tc>
+                <a:tc>
+                  <a:txBody>
+                    <a:bodyPr wrap="square"/>
+                    <a:lstStyle/>
+                    <a:p>
+                      <a:pPr algn="ctr"/>
+                      <a:r>
+                        <a:rPr sz="700" b="1">
+                          <a:solidFill>
+                            <a:srgbClr val="1A2340"/>
+                          </a:solidFill>
+                          <a:latin typeface="Calibri"/>
+                        </a:rPr>
                         <a:t>99%</a:t>
                       </a:r>
                     </a:p>
@@ -7879,7 +9395,7 @@
                           </a:solidFill>
                           <a:latin typeface="Calibri"/>
                         </a:rPr>
-                        <a:t>Operaciones Fleet || Lobby Fix</a:t>
+                        <a:t>DTI || Integración de sistemas</a:t>
                       </a:r>
                     </a:p>
                   </a:txBody>
@@ -7902,7 +9418,7 @@
                           </a:solidFill>
                           <a:latin typeface="Calibri"/>
                         </a:rPr>
-                        <a:t>11/11/2025</a:t>
+                        <a:t>01/06/2026</a:t>
                       </a:r>
                     </a:p>
                   </a:txBody>
@@ -7925,7 +9441,7 @@
                           </a:solidFill>
                           <a:latin typeface="Calibri"/>
                         </a:rPr>
-                        <a:t>29/06/2026</a:t>
+                        <a:t>23/09/2026</a:t>
                       </a:r>
                     </a:p>
                   </a:txBody>
@@ -7948,7 +9464,7 @@
                           </a:solidFill>
                           <a:latin typeface="Calibri"/>
                         </a:rPr>
-                        <a:t>100%</a:t>
+                        <a:t>31%</a:t>
                       </a:r>
                     </a:p>
                   </a:txBody>
@@ -7971,7 +9487,7 @@
                           </a:solidFill>
                           <a:latin typeface="Calibri"/>
                         </a:rPr>
-                        <a:t>100%</a:t>
+                        <a:t>30%</a:t>
                       </a:r>
                     </a:p>
                   </a:txBody>
@@ -7994,193 +9510,7 @@
                           </a:solidFill>
                           <a:latin typeface="Calibri"/>
                         </a:rPr>
-                        <a:t>100%</a:t>
-                      </a:r>
-                    </a:p>
-                  </a:txBody>
-                  <a:tcPr>
-                    <a:solidFill>
-                      <a:srgbClr val="22C55E"/>
-                    </a:solidFill>
-                  </a:tcPr>
-                </a:tc>
-                <a:tc>
-                  <a:txBody>
-                    <a:bodyPr wrap="square"/>
-                    <a:lstStyle/>
-                    <a:p>
-                      <a:pPr algn="ctr"/>
-                      <a:r>
-                        <a:rPr sz="700" b="1">
-                          <a:solidFill>
-                            <a:srgbClr val="22C55E"/>
-                          </a:solidFill>
-                          <a:latin typeface="Calibri"/>
-                        </a:rPr>
-                        <a:t>Terminado</a:t>
-                      </a:r>
-                    </a:p>
-                  </a:txBody>
-                  <a:tcPr>
-                    <a:solidFill>
-                      <a:srgbClr val="FFFFFF"/>
-                    </a:solidFill>
-                  </a:tcPr>
-                </a:tc>
-              </a:tr>
-              <a:tr h="196596">
-                <a:tc>
-                  <a:txBody>
-                    <a:bodyPr wrap="square"/>
-                    <a:lstStyle/>
-                    <a:p>
-                      <a:pPr algn="ctr"/>
-                      <a:r>
-                        <a:rPr sz="700" b="1">
-                          <a:solidFill>
-                            <a:srgbClr val="1A2340"/>
-                          </a:solidFill>
-                          <a:latin typeface="Calibri"/>
-                        </a:rPr>
-                        <a:t>Proyecto</a:t>
-                      </a:r>
-                    </a:p>
-                  </a:txBody>
-                  <a:tcPr>
-                    <a:solidFill>
-                      <a:srgbClr val="F5F7FA"/>
-                    </a:solidFill>
-                  </a:tcPr>
-                </a:tc>
-                <a:tc>
-                  <a:txBody>
-                    <a:bodyPr wrap="square"/>
-                    <a:lstStyle/>
-                    <a:p>
-                      <a:pPr algn="l"/>
-                      <a:r>
-                        <a:rPr sz="700" b="0">
-                          <a:solidFill>
-                            <a:srgbClr val="1A2340"/>
-                          </a:solidFill>
-                          <a:latin typeface="Calibri"/>
-                        </a:rPr>
-                        <a:t>Nexcar || Desarrollo Status</a:t>
-                      </a:r>
-                    </a:p>
-                  </a:txBody>
-                  <a:tcPr>
-                    <a:solidFill>
-                      <a:srgbClr val="F5F7FA"/>
-                    </a:solidFill>
-                  </a:tcPr>
-                </a:tc>
-                <a:tc>
-                  <a:txBody>
-                    <a:bodyPr wrap="square"/>
-                    <a:lstStyle/>
-                    <a:p>
-                      <a:pPr algn="ctr"/>
-                      <a:r>
-                        <a:rPr sz="700" b="0">
-                          <a:solidFill>
-                            <a:srgbClr val="555555"/>
-                          </a:solidFill>
-                          <a:latin typeface="Calibri"/>
-                        </a:rPr>
-                        <a:t>05/03/2026</a:t>
-                      </a:r>
-                    </a:p>
-                  </a:txBody>
-                  <a:tcPr>
-                    <a:solidFill>
-                      <a:srgbClr val="F5F7FA"/>
-                    </a:solidFill>
-                  </a:tcPr>
-                </a:tc>
-                <a:tc>
-                  <a:txBody>
-                    <a:bodyPr wrap="square"/>
-                    <a:lstStyle/>
-                    <a:p>
-                      <a:pPr algn="ctr"/>
-                      <a:r>
-                        <a:rPr sz="700" b="0">
-                          <a:solidFill>
-                            <a:srgbClr val="555555"/>
-                          </a:solidFill>
-                          <a:latin typeface="Calibri"/>
-                        </a:rPr>
-                        <a:t>10/07/2026</a:t>
-                      </a:r>
-                    </a:p>
-                  </a:txBody>
-                  <a:tcPr>
-                    <a:solidFill>
-                      <a:srgbClr val="F5F7FA"/>
-                    </a:solidFill>
-                  </a:tcPr>
-                </a:tc>
-                <a:tc>
-                  <a:txBody>
-                    <a:bodyPr wrap="square"/>
-                    <a:lstStyle/>
-                    <a:p>
-                      <a:pPr algn="ctr"/>
-                      <a:r>
-                        <a:rPr sz="700" b="1">
-                          <a:solidFill>
-                            <a:srgbClr val="1A2340"/>
-                          </a:solidFill>
-                          <a:latin typeface="Calibri"/>
-                        </a:rPr>
-                        <a:t>99%</a:t>
-                      </a:r>
-                    </a:p>
-                  </a:txBody>
-                  <a:tcPr>
-                    <a:solidFill>
-                      <a:srgbClr val="F5F7FA"/>
-                    </a:solidFill>
-                  </a:tcPr>
-                </a:tc>
-                <a:tc>
-                  <a:txBody>
-                    <a:bodyPr wrap="square"/>
-                    <a:lstStyle/>
-                    <a:p>
-                      <a:pPr algn="ctr"/>
-                      <a:r>
-                        <a:rPr sz="700" b="0">
-                          <a:solidFill>
-                            <a:srgbClr val="555555"/>
-                          </a:solidFill>
-                          <a:latin typeface="Calibri"/>
-                        </a:rPr>
-                        <a:t>91%</a:t>
-                      </a:r>
-                    </a:p>
-                  </a:txBody>
-                  <a:tcPr>
-                    <a:solidFill>
-                      <a:srgbClr val="F5F7FA"/>
-                    </a:solidFill>
-                  </a:tcPr>
-                </a:tc>
-                <a:tc>
-                  <a:txBody>
-                    <a:bodyPr wrap="square"/>
-                    <a:lstStyle/>
-                    <a:p>
-                      <a:pPr algn="r"/>
-                      <a:r>
-                        <a:rPr sz="700" b="1">
-                          <a:solidFill>
-                            <a:srgbClr val="22C55E"/>
-                          </a:solidFill>
-                          <a:latin typeface="Calibri"/>
-                        </a:rPr>
-                        <a:t>99%</a:t>
+                        <a:t>31%</a:t>
                       </a:r>
                     </a:p>
                   </a:txBody>
@@ -8190,10 +9520,10 @@
                         <a:gs pos="0">
                           <a:srgbClr val="22C55E"/>
                         </a:gs>
-                        <a:gs pos="99000">
+                        <a:gs pos="31000">
                           <a:srgbClr val="22C55E"/>
                         </a:gs>
-                        <a:gs pos="99500">
+                        <a:gs pos="31500">
                           <a:srgbClr val="E2E2E2"/>
                         </a:gs>
                         <a:gs pos="100000">
@@ -8223,7 +9553,7 @@
                   </a:txBody>
                   <a:tcPr>
                     <a:solidFill>
-                      <a:srgbClr val="F5F7FA"/>
+                      <a:srgbClr val="FFFFFF"/>
                     </a:solidFill>
                   </a:tcPr>
                 </a:tc>
@@ -8248,7 +9578,7 @@
                   </a:txBody>
                   <a:tcPr>
                     <a:solidFill>
-                      <a:srgbClr val="FFFFFF"/>
+                      <a:srgbClr val="F5F7FA"/>
                     </a:solidFill>
                   </a:tcPr>
                 </a:tc>
@@ -8265,13 +9595,13 @@
                           </a:solidFill>
                           <a:latin typeface="Calibri"/>
                         </a:rPr>
-                        <a:t>Operaciones Fleet || Data Lab</a:t>
-                      </a:r>
-                    </a:p>
-                  </a:txBody>
-                  <a:tcPr>
-                    <a:solidFill>
-                      <a:srgbClr val="FFFFFF"/>
+                        <a:t>Capital Humano || BUK Personalizados Fase 2</a:t>
+                      </a:r>
+                    </a:p>
+                  </a:txBody>
+                  <a:tcPr>
+                    <a:solidFill>
+                      <a:srgbClr val="F5F7FA"/>
                     </a:solidFill>
                   </a:tcPr>
                 </a:tc>
@@ -8288,13 +9618,13 @@
                           </a:solidFill>
                           <a:latin typeface="Calibri"/>
                         </a:rPr>
-                        <a:t>20/01/2026</a:t>
-                      </a:r>
-                    </a:p>
-                  </a:txBody>
-                  <a:tcPr>
-                    <a:solidFill>
-                      <a:srgbClr val="FFFFFF"/>
+                        <a:t>08/06/2026</a:t>
+                      </a:r>
+                    </a:p>
+                  </a:txBody>
+                  <a:tcPr>
+                    <a:solidFill>
+                      <a:srgbClr val="F5F7FA"/>
                     </a:solidFill>
                   </a:tcPr>
                 </a:tc>
@@ -8311,13 +9641,13 @@
                           </a:solidFill>
                           <a:latin typeface="Calibri"/>
                         </a:rPr>
-                        <a:t>22/06/2026</a:t>
-                      </a:r>
-                    </a:p>
-                  </a:txBody>
-                  <a:tcPr>
-                    <a:solidFill>
-                      <a:srgbClr val="FFFFFF"/>
+                        <a:t>11/08/2026</a:t>
+                      </a:r>
+                    </a:p>
+                  </a:txBody>
+                  <a:tcPr>
+                    <a:solidFill>
+                      <a:srgbClr val="F5F7FA"/>
                     </a:solidFill>
                   </a:tcPr>
                 </a:tc>
@@ -8334,13 +9664,13 @@
                           </a:solidFill>
                           <a:latin typeface="Calibri"/>
                         </a:rPr>
-                        <a:t>100%</a:t>
-                      </a:r>
-                    </a:p>
-                  </a:txBody>
-                  <a:tcPr>
-                    <a:solidFill>
-                      <a:srgbClr val="FFFFFF"/>
+                        <a:t>74%</a:t>
+                      </a:r>
+                    </a:p>
+                  </a:txBody>
+                  <a:tcPr>
+                    <a:solidFill>
+                      <a:srgbClr val="F5F7FA"/>
                     </a:solidFill>
                   </a:tcPr>
                 </a:tc>
@@ -8357,13 +9687,13 @@
                           </a:solidFill>
                           <a:latin typeface="Calibri"/>
                         </a:rPr>
-                        <a:t>100%</a:t>
-                      </a:r>
-                    </a:p>
-                  </a:txBody>
-                  <a:tcPr>
-                    <a:solidFill>
-                      <a:srgbClr val="FFFFFF"/>
+                        <a:t>43%</a:t>
+                      </a:r>
+                    </a:p>
+                  </a:txBody>
+                  <a:tcPr>
+                    <a:solidFill>
+                      <a:srgbClr val="F5F7FA"/>
                     </a:solidFill>
                   </a:tcPr>
                 </a:tc>
@@ -8380,565 +9710,7 @@
                           </a:solidFill>
                           <a:latin typeface="Calibri"/>
                         </a:rPr>
-                        <a:t>100%</a:t>
-                      </a:r>
-                    </a:p>
-                  </a:txBody>
-                  <a:tcPr>
-                    <a:solidFill>
-                      <a:srgbClr val="22C55E"/>
-                    </a:solidFill>
-                  </a:tcPr>
-                </a:tc>
-                <a:tc>
-                  <a:txBody>
-                    <a:bodyPr wrap="square"/>
-                    <a:lstStyle/>
-                    <a:p>
-                      <a:pPr algn="ctr"/>
-                      <a:r>
-                        <a:rPr sz="700" b="1">
-                          <a:solidFill>
-                            <a:srgbClr val="22C55E"/>
-                          </a:solidFill>
-                          <a:latin typeface="Calibri"/>
-                        </a:rPr>
-                        <a:t>Terminado</a:t>
-                      </a:r>
-                    </a:p>
-                  </a:txBody>
-                  <a:tcPr>
-                    <a:solidFill>
-                      <a:srgbClr val="FFFFFF"/>
-                    </a:solidFill>
-                  </a:tcPr>
-                </a:tc>
-              </a:tr>
-              <a:tr h="196596">
-                <a:tc>
-                  <a:txBody>
-                    <a:bodyPr wrap="square"/>
-                    <a:lstStyle/>
-                    <a:p>
-                      <a:pPr algn="ctr"/>
-                      <a:r>
-                        <a:rPr sz="700" b="1">
-                          <a:solidFill>
-                            <a:srgbClr val="1A2340"/>
-                          </a:solidFill>
-                          <a:latin typeface="Calibri"/>
-                        </a:rPr>
-                        <a:t>Proyecto</a:t>
-                      </a:r>
-                    </a:p>
-                  </a:txBody>
-                  <a:tcPr>
-                    <a:solidFill>
-                      <a:srgbClr val="F5F7FA"/>
-                    </a:solidFill>
-                  </a:tcPr>
-                </a:tc>
-                <a:tc>
-                  <a:txBody>
-                    <a:bodyPr wrap="square"/>
-                    <a:lstStyle/>
-                    <a:p>
-                      <a:pPr algn="l"/>
-                      <a:r>
-                        <a:rPr sz="700" b="0">
-                          <a:solidFill>
-                            <a:srgbClr val="1A2340"/>
-                          </a:solidFill>
-                          <a:latin typeface="Calibri"/>
-                        </a:rPr>
-                        <a:t>Cartera || Cambio de Pac de Timbrado</a:t>
-                      </a:r>
-                    </a:p>
-                  </a:txBody>
-                  <a:tcPr>
-                    <a:solidFill>
-                      <a:srgbClr val="F5F7FA"/>
-                    </a:solidFill>
-                  </a:tcPr>
-                </a:tc>
-                <a:tc>
-                  <a:txBody>
-                    <a:bodyPr wrap="square"/>
-                    <a:lstStyle/>
-                    <a:p>
-                      <a:pPr algn="ctr"/>
-                      <a:r>
-                        <a:rPr sz="700" b="0">
-                          <a:solidFill>
-                            <a:srgbClr val="555555"/>
-                          </a:solidFill>
-                          <a:latin typeface="Calibri"/>
-                        </a:rPr>
-                        <a:t>07/07/2025</a:t>
-                      </a:r>
-                    </a:p>
-                  </a:txBody>
-                  <a:tcPr>
-                    <a:solidFill>
-                      <a:srgbClr val="F5F7FA"/>
-                    </a:solidFill>
-                  </a:tcPr>
-                </a:tc>
-                <a:tc>
-                  <a:txBody>
-                    <a:bodyPr wrap="square"/>
-                    <a:lstStyle/>
-                    <a:p>
-                      <a:pPr algn="ctr"/>
-                      <a:r>
-                        <a:rPr sz="700" b="0">
-                          <a:solidFill>
-                            <a:srgbClr val="555555"/>
-                          </a:solidFill>
-                          <a:latin typeface="Calibri"/>
-                        </a:rPr>
-                        <a:t>25/02/2026</a:t>
-                      </a:r>
-                    </a:p>
-                  </a:txBody>
-                  <a:tcPr>
-                    <a:solidFill>
-                      <a:srgbClr val="F5F7FA"/>
-                    </a:solidFill>
-                  </a:tcPr>
-                </a:tc>
-                <a:tc>
-                  <a:txBody>
-                    <a:bodyPr wrap="square"/>
-                    <a:lstStyle/>
-                    <a:p>
-                      <a:pPr algn="ctr"/>
-                      <a:r>
-                        <a:rPr sz="700" b="1">
-                          <a:solidFill>
-                            <a:srgbClr val="1A2340"/>
-                          </a:solidFill>
-                          <a:latin typeface="Calibri"/>
-                        </a:rPr>
-                        <a:t>100%</a:t>
-                      </a:r>
-                    </a:p>
-                  </a:txBody>
-                  <a:tcPr>
-                    <a:solidFill>
-                      <a:srgbClr val="F5F7FA"/>
-                    </a:solidFill>
-                  </a:tcPr>
-                </a:tc>
-                <a:tc>
-                  <a:txBody>
-                    <a:bodyPr wrap="square"/>
-                    <a:lstStyle/>
-                    <a:p>
-                      <a:pPr algn="ctr"/>
-                      <a:r>
-                        <a:rPr sz="700" b="0">
-                          <a:solidFill>
-                            <a:srgbClr val="555555"/>
-                          </a:solidFill>
-                          <a:latin typeface="Calibri"/>
-                        </a:rPr>
-                        <a:t>100%</a:t>
-                      </a:r>
-                    </a:p>
-                  </a:txBody>
-                  <a:tcPr>
-                    <a:solidFill>
-                      <a:srgbClr val="F5F7FA"/>
-                    </a:solidFill>
-                  </a:tcPr>
-                </a:tc>
-                <a:tc>
-                  <a:txBody>
-                    <a:bodyPr wrap="square"/>
-                    <a:lstStyle/>
-                    <a:p>
-                      <a:pPr algn="r"/>
-                      <a:r>
-                        <a:rPr sz="700" b="1">
-                          <a:solidFill>
-                            <a:srgbClr val="22C55E"/>
-                          </a:solidFill>
-                          <a:latin typeface="Calibri"/>
-                        </a:rPr>
-                        <a:t>100%</a:t>
-                      </a:r>
-                    </a:p>
-                  </a:txBody>
-                  <a:tcPr>
-                    <a:solidFill>
-                      <a:srgbClr val="22C55E"/>
-                    </a:solidFill>
-                  </a:tcPr>
-                </a:tc>
-                <a:tc>
-                  <a:txBody>
-                    <a:bodyPr wrap="square"/>
-                    <a:lstStyle/>
-                    <a:p>
-                      <a:pPr algn="ctr"/>
-                      <a:r>
-                        <a:rPr sz="700" b="1">
-                          <a:solidFill>
-                            <a:srgbClr val="22C55E"/>
-                          </a:solidFill>
-                          <a:latin typeface="Calibri"/>
-                        </a:rPr>
-                        <a:t>Terminado</a:t>
-                      </a:r>
-                    </a:p>
-                  </a:txBody>
-                  <a:tcPr>
-                    <a:solidFill>
-                      <a:srgbClr val="F5F7FA"/>
-                    </a:solidFill>
-                  </a:tcPr>
-                </a:tc>
-              </a:tr>
-              <a:tr h="196596">
-                <a:tc>
-                  <a:txBody>
-                    <a:bodyPr wrap="square"/>
-                    <a:lstStyle/>
-                    <a:p>
-                      <a:pPr algn="ctr"/>
-                      <a:r>
-                        <a:rPr sz="700" b="1">
-                          <a:solidFill>
-                            <a:srgbClr val="1A2340"/>
-                          </a:solidFill>
-                          <a:latin typeface="Calibri"/>
-                        </a:rPr>
-                        <a:t>Proyecto</a:t>
-                      </a:r>
-                    </a:p>
-                  </a:txBody>
-                  <a:tcPr>
-                    <a:solidFill>
-                      <a:srgbClr val="FFFFFF"/>
-                    </a:solidFill>
-                  </a:tcPr>
-                </a:tc>
-                <a:tc>
-                  <a:txBody>
-                    <a:bodyPr wrap="square"/>
-                    <a:lstStyle/>
-                    <a:p>
-                      <a:pPr algn="l"/>
-                      <a:r>
-                        <a:rPr sz="700" b="0">
-                          <a:solidFill>
-                            <a:srgbClr val="1A2340"/>
-                          </a:solidFill>
-                          <a:latin typeface="Calibri"/>
-                        </a:rPr>
-                        <a:t>Operaciones Fleet || Nueva Instancia</a:t>
-                      </a:r>
-                    </a:p>
-                  </a:txBody>
-                  <a:tcPr>
-                    <a:solidFill>
-                      <a:srgbClr val="FFFFFF"/>
-                    </a:solidFill>
-                  </a:tcPr>
-                </a:tc>
-                <a:tc>
-                  <a:txBody>
-                    <a:bodyPr wrap="square"/>
-                    <a:lstStyle/>
-                    <a:p>
-                      <a:pPr algn="ctr"/>
-                      <a:r>
-                        <a:rPr sz="700" b="0">
-                          <a:solidFill>
-                            <a:srgbClr val="555555"/>
-                          </a:solidFill>
-                          <a:latin typeface="Calibri"/>
-                        </a:rPr>
-                        <a:t>08/08/2025</a:t>
-                      </a:r>
-                    </a:p>
-                  </a:txBody>
-                  <a:tcPr>
-                    <a:solidFill>
-                      <a:srgbClr val="FFFFFF"/>
-                    </a:solidFill>
-                  </a:tcPr>
-                </a:tc>
-                <a:tc>
-                  <a:txBody>
-                    <a:bodyPr wrap="square"/>
-                    <a:lstStyle/>
-                    <a:p>
-                      <a:pPr algn="ctr"/>
-                      <a:r>
-                        <a:rPr sz="700" b="0">
-                          <a:solidFill>
-                            <a:srgbClr val="555555"/>
-                          </a:solidFill>
-                          <a:latin typeface="Calibri"/>
-                        </a:rPr>
-                        <a:t>01/06/2026</a:t>
-                      </a:r>
-                    </a:p>
-                  </a:txBody>
-                  <a:tcPr>
-                    <a:solidFill>
-                      <a:srgbClr val="FFFFFF"/>
-                    </a:solidFill>
-                  </a:tcPr>
-                </a:tc>
-                <a:tc>
-                  <a:txBody>
-                    <a:bodyPr wrap="square"/>
-                    <a:lstStyle/>
-                    <a:p>
-                      <a:pPr algn="ctr"/>
-                      <a:r>
-                        <a:rPr sz="700" b="1">
-                          <a:solidFill>
-                            <a:srgbClr val="1A2340"/>
-                          </a:solidFill>
-                          <a:latin typeface="Calibri"/>
-                        </a:rPr>
-                        <a:t>100%</a:t>
-                      </a:r>
-                    </a:p>
-                  </a:txBody>
-                  <a:tcPr>
-                    <a:solidFill>
-                      <a:srgbClr val="FFFFFF"/>
-                    </a:solidFill>
-                  </a:tcPr>
-                </a:tc>
-                <a:tc>
-                  <a:txBody>
-                    <a:bodyPr wrap="square"/>
-                    <a:lstStyle/>
-                    <a:p>
-                      <a:pPr algn="ctr"/>
-                      <a:r>
-                        <a:rPr sz="700" b="0">
-                          <a:solidFill>
-                            <a:srgbClr val="555555"/>
-                          </a:solidFill>
-                          <a:latin typeface="Calibri"/>
-                        </a:rPr>
-                        <a:t>100%</a:t>
-                      </a:r>
-                    </a:p>
-                  </a:txBody>
-                  <a:tcPr>
-                    <a:solidFill>
-                      <a:srgbClr val="FFFFFF"/>
-                    </a:solidFill>
-                  </a:tcPr>
-                </a:tc>
-                <a:tc>
-                  <a:txBody>
-                    <a:bodyPr wrap="square"/>
-                    <a:lstStyle/>
-                    <a:p>
-                      <a:pPr algn="r"/>
-                      <a:r>
-                        <a:rPr sz="700" b="1">
-                          <a:solidFill>
-                            <a:srgbClr val="22C55E"/>
-                          </a:solidFill>
-                          <a:latin typeface="Calibri"/>
-                        </a:rPr>
-                        <a:t>100%</a:t>
-                      </a:r>
-                    </a:p>
-                  </a:txBody>
-                  <a:tcPr>
-                    <a:solidFill>
-                      <a:srgbClr val="22C55E"/>
-                    </a:solidFill>
-                  </a:tcPr>
-                </a:tc>
-                <a:tc>
-                  <a:txBody>
-                    <a:bodyPr wrap="square"/>
-                    <a:lstStyle/>
-                    <a:p>
-                      <a:pPr algn="ctr"/>
-                      <a:r>
-                        <a:rPr sz="700" b="1">
-                          <a:solidFill>
-                            <a:srgbClr val="22C55E"/>
-                          </a:solidFill>
-                          <a:latin typeface="Calibri"/>
-                        </a:rPr>
-                        <a:t>Terminado</a:t>
-                      </a:r>
-                    </a:p>
-                  </a:txBody>
-                  <a:tcPr>
-                    <a:solidFill>
-                      <a:srgbClr val="FFFFFF"/>
-                    </a:solidFill>
-                  </a:tcPr>
-                </a:tc>
-              </a:tr>
-              <a:tr h="196596">
-                <a:tc>
-                  <a:txBody>
-                    <a:bodyPr wrap="square"/>
-                    <a:lstStyle/>
-                    <a:p>
-                      <a:pPr algn="ctr"/>
-                      <a:r>
-                        <a:rPr sz="700" b="1">
-                          <a:solidFill>
-                            <a:srgbClr val="1A2340"/>
-                          </a:solidFill>
-                          <a:latin typeface="Calibri"/>
-                        </a:rPr>
-                        <a:t>Proyecto</a:t>
-                      </a:r>
-                    </a:p>
-                  </a:txBody>
-                  <a:tcPr>
-                    <a:solidFill>
-                      <a:srgbClr val="F5F7FA"/>
-                    </a:solidFill>
-                  </a:tcPr>
-                </a:tc>
-                <a:tc>
-                  <a:txBody>
-                    <a:bodyPr wrap="square"/>
-                    <a:lstStyle/>
-                    <a:p>
-                      <a:pPr algn="l"/>
-                      <a:r>
-                        <a:rPr sz="700" b="0">
-                          <a:solidFill>
-                            <a:srgbClr val="1A2340"/>
-                          </a:solidFill>
-                          <a:latin typeface="Calibri"/>
-                        </a:rPr>
-                        <a:t>Tesoreria || Adcontent H2H</a:t>
-                      </a:r>
-                    </a:p>
-                  </a:txBody>
-                  <a:tcPr>
-                    <a:solidFill>
-                      <a:srgbClr val="F5F7FA"/>
-                    </a:solidFill>
-                  </a:tcPr>
-                </a:tc>
-                <a:tc>
-                  <a:txBody>
-                    <a:bodyPr wrap="square"/>
-                    <a:lstStyle/>
-                    <a:p>
-                      <a:pPr algn="ctr"/>
-                      <a:r>
-                        <a:rPr sz="700" b="0">
-                          <a:solidFill>
-                            <a:srgbClr val="555555"/>
-                          </a:solidFill>
-                          <a:latin typeface="Calibri"/>
-                        </a:rPr>
-                        <a:t>07/04/2026</a:t>
-                      </a:r>
-                    </a:p>
-                  </a:txBody>
-                  <a:tcPr>
-                    <a:solidFill>
-                      <a:srgbClr val="F5F7FA"/>
-                    </a:solidFill>
-                  </a:tcPr>
-                </a:tc>
-                <a:tc>
-                  <a:txBody>
-                    <a:bodyPr wrap="square"/>
-                    <a:lstStyle/>
-                    <a:p>
-                      <a:pPr algn="ctr"/>
-                      <a:r>
-                        <a:rPr sz="700" b="0">
-                          <a:solidFill>
-                            <a:srgbClr val="555555"/>
-                          </a:solidFill>
-                          <a:latin typeface="Calibri"/>
-                        </a:rPr>
-                        <a:t>26/08/2026</a:t>
-                      </a:r>
-                    </a:p>
-                  </a:txBody>
-                  <a:tcPr>
-                    <a:solidFill>
-                      <a:srgbClr val="F5F7FA"/>
-                    </a:solidFill>
-                  </a:tcPr>
-                </a:tc>
-                <a:tc>
-                  <a:txBody>
-                    <a:bodyPr wrap="square"/>
-                    <a:lstStyle/>
-                    <a:p>
-                      <a:pPr algn="ctr"/>
-                      <a:r>
-                        <a:rPr sz="700" b="1">
-                          <a:solidFill>
-                            <a:srgbClr val="1A2340"/>
-                          </a:solidFill>
-                          <a:latin typeface="Calibri"/>
-                        </a:rPr>
-                        <a:t>22%</a:t>
-                      </a:r>
-                    </a:p>
-                  </a:txBody>
-                  <a:tcPr>
-                    <a:solidFill>
-                      <a:srgbClr val="F5F7FA"/>
-                    </a:solidFill>
-                  </a:tcPr>
-                </a:tc>
-                <a:tc>
-                  <a:txBody>
-                    <a:bodyPr wrap="square"/>
-                    <a:lstStyle/>
-                    <a:p>
-                      <a:pPr algn="ctr"/>
-                      <a:r>
-                        <a:rPr sz="700" b="0">
-                          <a:solidFill>
-                            <a:srgbClr val="555555"/>
-                          </a:solidFill>
-                          <a:latin typeface="Calibri"/>
-                        </a:rPr>
-                        <a:t>58%</a:t>
-                      </a:r>
-                    </a:p>
-                  </a:txBody>
-                  <a:tcPr>
-                    <a:solidFill>
-                      <a:srgbClr val="F5F7FA"/>
-                    </a:solidFill>
-                  </a:tcPr>
-                </a:tc>
-                <a:tc>
-                  <a:txBody>
-                    <a:bodyPr wrap="square"/>
-                    <a:lstStyle/>
-                    <a:p>
-                      <a:pPr algn="r"/>
-                      <a:r>
-                        <a:rPr sz="700" b="1">
-                          <a:solidFill>
-                            <a:srgbClr val="EF4444"/>
-                          </a:solidFill>
-                          <a:latin typeface="Calibri"/>
-                        </a:rPr>
-                        <a:t>22%</a:t>
+                        <a:t>74%</a:t>
                       </a:r>
                     </a:p>
                   </a:txBody>
@@ -8946,210 +9718,10 @@
                     <a:gradFill>
                       <a:gsLst>
                         <a:gs pos="0">
-                          <a:srgbClr val="EF4444"/>
-                        </a:gs>
-                        <a:gs pos="22000">
-                          <a:srgbClr val="EF4444"/>
-                        </a:gs>
-                        <a:gs pos="22500">
-                          <a:srgbClr val="E2E2E2"/>
-                        </a:gs>
-                        <a:gs pos="100000">
-                          <a:srgbClr val="E2E2E2"/>
-                        </a:gs>
-                      </a:gsLst>
-                      <a:lin ang="0" scaled="0"/>
-                    </a:gradFill>
-                  </a:tcPr>
-                </a:tc>
-                <a:tc>
-                  <a:txBody>
-                    <a:bodyPr wrap="square"/>
-                    <a:lstStyle/>
-                    <a:p>
-                      <a:pPr algn="ctr"/>
-                      <a:r>
-                        <a:rPr sz="700" b="1">
-                          <a:solidFill>
-                            <a:srgbClr val="EF4444"/>
-                          </a:solidFill>
-                          <a:latin typeface="Calibri"/>
-                        </a:rPr>
-                        <a:t>Atrasado</a:t>
-                      </a:r>
-                    </a:p>
-                  </a:txBody>
-                  <a:tcPr>
-                    <a:solidFill>
-                      <a:srgbClr val="F5F7FA"/>
-                    </a:solidFill>
-                  </a:tcPr>
-                </a:tc>
-              </a:tr>
-              <a:tr h="196596">
-                <a:tc>
-                  <a:txBody>
-                    <a:bodyPr wrap="square"/>
-                    <a:lstStyle/>
-                    <a:p>
-                      <a:pPr algn="ctr"/>
-                      <a:r>
-                        <a:rPr sz="700" b="1">
-                          <a:solidFill>
-                            <a:srgbClr val="1A2340"/>
-                          </a:solidFill>
-                          <a:latin typeface="Calibri"/>
-                        </a:rPr>
-                        <a:t>Proyecto</a:t>
-                      </a:r>
-                    </a:p>
-                  </a:txBody>
-                  <a:tcPr>
-                    <a:solidFill>
-                      <a:srgbClr val="FFFFFF"/>
-                    </a:solidFill>
-                  </a:tcPr>
-                </a:tc>
-                <a:tc>
-                  <a:txBody>
-                    <a:bodyPr wrap="square"/>
-                    <a:lstStyle/>
-                    <a:p>
-                      <a:pPr algn="l"/>
-                      <a:r>
-                        <a:rPr sz="700" b="0">
-                          <a:solidFill>
-                            <a:srgbClr val="1A2340"/>
-                          </a:solidFill>
-                          <a:latin typeface="Calibri"/>
-                        </a:rPr>
-                        <a:t>Talleres || Integración Mecanica Mx - SAE</a:t>
-                      </a:r>
-                    </a:p>
-                  </a:txBody>
-                  <a:tcPr>
-                    <a:solidFill>
-                      <a:srgbClr val="FFFFFF"/>
-                    </a:solidFill>
-                  </a:tcPr>
-                </a:tc>
-                <a:tc>
-                  <a:txBody>
-                    <a:bodyPr wrap="square"/>
-                    <a:lstStyle/>
-                    <a:p>
-                      <a:pPr algn="ctr"/>
-                      <a:r>
-                        <a:rPr sz="700" b="0">
-                          <a:solidFill>
-                            <a:srgbClr val="555555"/>
-                          </a:solidFill>
-                          <a:latin typeface="Calibri"/>
-                        </a:rPr>
-                        <a:t>20/04/2026</a:t>
-                      </a:r>
-                    </a:p>
-                  </a:txBody>
-                  <a:tcPr>
-                    <a:solidFill>
-                      <a:srgbClr val="FFFFFF"/>
-                    </a:solidFill>
-                  </a:tcPr>
-                </a:tc>
-                <a:tc>
-                  <a:txBody>
-                    <a:bodyPr wrap="square"/>
-                    <a:lstStyle/>
-                    <a:p>
-                      <a:pPr algn="ctr"/>
-                      <a:r>
-                        <a:rPr sz="700" b="0">
-                          <a:solidFill>
-                            <a:srgbClr val="555555"/>
-                          </a:solidFill>
-                          <a:latin typeface="Calibri"/>
-                        </a:rPr>
-                        <a:t>20/07/2026</a:t>
-                      </a:r>
-                    </a:p>
-                  </a:txBody>
-                  <a:tcPr>
-                    <a:solidFill>
-                      <a:srgbClr val="FFFFFF"/>
-                    </a:solidFill>
-                  </a:tcPr>
-                </a:tc>
-                <a:tc>
-                  <a:txBody>
-                    <a:bodyPr wrap="square"/>
-                    <a:lstStyle/>
-                    <a:p>
-                      <a:pPr algn="ctr"/>
-                      <a:r>
-                        <a:rPr sz="700" b="1">
-                          <a:solidFill>
-                            <a:srgbClr val="1A2340"/>
-                          </a:solidFill>
-                          <a:latin typeface="Calibri"/>
-                        </a:rPr>
-                        <a:t>74%</a:t>
-                      </a:r>
-                    </a:p>
-                  </a:txBody>
-                  <a:tcPr>
-                    <a:solidFill>
-                      <a:srgbClr val="FFFFFF"/>
-                    </a:solidFill>
-                  </a:tcPr>
-                </a:tc>
-                <a:tc>
-                  <a:txBody>
-                    <a:bodyPr wrap="square"/>
-                    <a:lstStyle/>
-                    <a:p>
-                      <a:pPr algn="ctr"/>
-                      <a:r>
-                        <a:rPr sz="700" b="0">
-                          <a:solidFill>
-                            <a:srgbClr val="555555"/>
-                          </a:solidFill>
-                          <a:latin typeface="Calibri"/>
-                        </a:rPr>
-                        <a:t>76%</a:t>
-                      </a:r>
-                    </a:p>
-                  </a:txBody>
-                  <a:tcPr>
-                    <a:solidFill>
-                      <a:srgbClr val="FFFFFF"/>
-                    </a:solidFill>
-                  </a:tcPr>
-                </a:tc>
-                <a:tc>
-                  <a:txBody>
-                    <a:bodyPr wrap="square"/>
-                    <a:lstStyle/>
-                    <a:p>
-                      <a:pPr algn="r"/>
-                      <a:r>
-                        <a:rPr sz="700" b="1">
-                          <a:solidFill>
-                            <a:srgbClr val="F59E0B"/>
-                          </a:solidFill>
-                          <a:latin typeface="Calibri"/>
-                        </a:rPr>
-                        <a:t>74%</a:t>
-                      </a:r>
-                    </a:p>
-                  </a:txBody>
-                  <a:tcPr>
-                    <a:gradFill>
-                      <a:gsLst>
-                        <a:gs pos="0">
-                          <a:srgbClr val="F59E0B"/>
+                          <a:srgbClr val="22C55E"/>
                         </a:gs>
                         <a:gs pos="74000">
-                          <a:srgbClr val="F59E0B"/>
+                          <a:srgbClr val="22C55E"/>
                         </a:gs>
                         <a:gs pos="74500">
                           <a:srgbClr val="E2E2E2"/>
@@ -9171,17 +9743,17 @@
                       <a:r>
                         <a:rPr sz="700" b="1">
                           <a:solidFill>
-                            <a:srgbClr val="F59E0B"/>
-                          </a:solidFill>
-                          <a:latin typeface="Calibri"/>
-                        </a:rPr>
-                        <a:t>Riesgo de atraso</a:t>
-                      </a:r>
-                    </a:p>
-                  </a:txBody>
-                  <a:tcPr>
-                    <a:solidFill>
-                      <a:srgbClr val="FFFFFF"/>
+                            <a:srgbClr val="22C55E"/>
+                          </a:solidFill>
+                          <a:latin typeface="Calibri"/>
+                        </a:rPr>
+                        <a:t>A tiempo</a:t>
+                      </a:r>
+                    </a:p>
+                  </a:txBody>
+                  <a:tcPr>
+                    <a:solidFill>
+                      <a:srgbClr val="F5F7FA"/>
                     </a:solidFill>
                   </a:tcPr>
                 </a:tc>
@@ -9206,7 +9778,7 @@
                   </a:txBody>
                   <a:tcPr>
                     <a:solidFill>
-                      <a:srgbClr val="F5F7FA"/>
+                      <a:srgbClr val="FFFFFF"/>
                     </a:solidFill>
                   </a:tcPr>
                 </a:tc>
@@ -9223,13 +9795,13 @@
                           </a:solidFill>
                           <a:latin typeface="Calibri"/>
                         </a:rPr>
-                        <a:t>Contabilidad || Integración Mecanica-SAE (Fase 2)</a:t>
-                      </a:r>
-                    </a:p>
-                  </a:txBody>
-                  <a:tcPr>
-                    <a:solidFill>
-                      <a:srgbClr val="F5F7FA"/>
+                        <a:t>Operaciones Fleet || Adcontent - Sfleet</a:t>
+                      </a:r>
+                    </a:p>
+                  </a:txBody>
+                  <a:tcPr>
+                    <a:solidFill>
+                      <a:srgbClr val="FFFFFF"/>
                     </a:solidFill>
                   </a:tcPr>
                 </a:tc>
@@ -9246,13 +9818,13 @@
                           </a:solidFill>
                           <a:latin typeface="Calibri"/>
                         </a:rPr>
-                        <a:t>21/04/2026</a:t>
-                      </a:r>
-                    </a:p>
-                  </a:txBody>
-                  <a:tcPr>
-                    <a:solidFill>
-                      <a:srgbClr val="F5F7FA"/>
+                        <a:t>15/06/2026</a:t>
+                      </a:r>
+                    </a:p>
+                  </a:txBody>
+                  <a:tcPr>
+                    <a:solidFill>
+                      <a:srgbClr val="FFFFFF"/>
                     </a:solidFill>
                   </a:tcPr>
                 </a:tc>
@@ -9269,13 +9841,13 @@
                           </a:solidFill>
                           <a:latin typeface="Calibri"/>
                         </a:rPr>
-                        <a:t>12/06/2026</a:t>
-                      </a:r>
-                    </a:p>
-                  </a:txBody>
-                  <a:tcPr>
-                    <a:solidFill>
-                      <a:srgbClr val="F5F7FA"/>
+                        <a:t>08/02/2027</a:t>
+                      </a:r>
+                    </a:p>
+                  </a:txBody>
+                  <a:tcPr>
+                    <a:solidFill>
+                      <a:srgbClr val="FFFFFF"/>
                     </a:solidFill>
                   </a:tcPr>
                 </a:tc>
@@ -9292,13 +9864,13 @@
                           </a:solidFill>
                           <a:latin typeface="Calibri"/>
                         </a:rPr>
-                        <a:t>99%</a:t>
-                      </a:r>
-                    </a:p>
-                  </a:txBody>
-                  <a:tcPr>
-                    <a:solidFill>
-                      <a:srgbClr val="F5F7FA"/>
+                        <a:t>4%</a:t>
+                      </a:r>
+                    </a:p>
+                  </a:txBody>
+                  <a:tcPr>
+                    <a:solidFill>
+                      <a:srgbClr val="FFFFFF"/>
                     </a:solidFill>
                   </a:tcPr>
                 </a:tc>
@@ -9315,13 +9887,13 @@
                           </a:solidFill>
                           <a:latin typeface="Calibri"/>
                         </a:rPr>
-                        <a:t>100%</a:t>
-                      </a:r>
-                    </a:p>
-                  </a:txBody>
-                  <a:tcPr>
-                    <a:solidFill>
-                      <a:srgbClr val="F5F7FA"/>
+                        <a:t>8%</a:t>
+                      </a:r>
+                    </a:p>
+                  </a:txBody>
+                  <a:tcPr>
+                    <a:solidFill>
+                      <a:srgbClr val="FFFFFF"/>
                     </a:solidFill>
                   </a:tcPr>
                 </a:tc>
@@ -9334,11 +9906,11 @@
                       <a:r>
                         <a:rPr sz="700" b="1">
                           <a:solidFill>
-                            <a:srgbClr val="EF4444"/>
-                          </a:solidFill>
-                          <a:latin typeface="Calibri"/>
-                        </a:rPr>
-                        <a:t>99%</a:t>
+                            <a:srgbClr val="F59E0B"/>
+                          </a:solidFill>
+                          <a:latin typeface="Calibri"/>
+                        </a:rPr>
+                        <a:t>4%</a:t>
                       </a:r>
                     </a:p>
                   </a:txBody>
@@ -9346,12 +9918,12 @@
                     <a:gradFill>
                       <a:gsLst>
                         <a:gs pos="0">
-                          <a:srgbClr val="EF4444"/>
+                          <a:srgbClr val="F59E0B"/>
                         </a:gs>
-                        <a:gs pos="99000">
-                          <a:srgbClr val="EF4444"/>
+                        <a:gs pos="4000">
+                          <a:srgbClr val="F59E0B"/>
                         </a:gs>
-                        <a:gs pos="99500">
+                        <a:gs pos="4500">
                           <a:srgbClr val="E2E2E2"/>
                         </a:gs>
                         <a:gs pos="100000">
@@ -9371,211 +9943,11 @@
                       <a:r>
                         <a:rPr sz="700" b="1">
                           <a:solidFill>
-                            <a:srgbClr val="EF4444"/>
-                          </a:solidFill>
-                          <a:latin typeface="Calibri"/>
-                        </a:rPr>
-                        <a:t>Atrasado</a:t>
-                      </a:r>
-                    </a:p>
-                  </a:txBody>
-                  <a:tcPr>
-                    <a:solidFill>
-                      <a:srgbClr val="F5F7FA"/>
-                    </a:solidFill>
-                  </a:tcPr>
-                </a:tc>
-              </a:tr>
-              <a:tr h="196596">
-                <a:tc>
-                  <a:txBody>
-                    <a:bodyPr wrap="square"/>
-                    <a:lstStyle/>
-                    <a:p>
-                      <a:pPr algn="ctr"/>
-                      <a:r>
-                        <a:rPr sz="700" b="1">
-                          <a:solidFill>
-                            <a:srgbClr val="1A2340"/>
-                          </a:solidFill>
-                          <a:latin typeface="Calibri"/>
-                        </a:rPr>
-                        <a:t>Proyecto</a:t>
-                      </a:r>
-                    </a:p>
-                  </a:txBody>
-                  <a:tcPr>
-                    <a:solidFill>
-                      <a:srgbClr val="FFFFFF"/>
-                    </a:solidFill>
-                  </a:tcPr>
-                </a:tc>
-                <a:tc>
-                  <a:txBody>
-                    <a:bodyPr wrap="square"/>
-                    <a:lstStyle/>
-                    <a:p>
-                      <a:pPr algn="l"/>
-                      <a:r>
-                        <a:rPr sz="700" b="0">
-                          <a:solidFill>
-                            <a:srgbClr val="1A2340"/>
-                          </a:solidFill>
-                          <a:latin typeface="Calibri"/>
-                        </a:rPr>
-                        <a:t>Capital Humano || BUK Personalizados Fase 2</a:t>
-                      </a:r>
-                    </a:p>
-                  </a:txBody>
-                  <a:tcPr>
-                    <a:solidFill>
-                      <a:srgbClr val="FFFFFF"/>
-                    </a:solidFill>
-                  </a:tcPr>
-                </a:tc>
-                <a:tc>
-                  <a:txBody>
-                    <a:bodyPr wrap="square"/>
-                    <a:lstStyle/>
-                    <a:p>
-                      <a:pPr algn="ctr"/>
-                      <a:r>
-                        <a:rPr sz="700" b="0">
-                          <a:solidFill>
-                            <a:srgbClr val="555555"/>
-                          </a:solidFill>
-                          <a:latin typeface="Calibri"/>
-                        </a:rPr>
-                        <a:t>08/06/2026</a:t>
-                      </a:r>
-                    </a:p>
-                  </a:txBody>
-                  <a:tcPr>
-                    <a:solidFill>
-                      <a:srgbClr val="FFFFFF"/>
-                    </a:solidFill>
-                  </a:tcPr>
-                </a:tc>
-                <a:tc>
-                  <a:txBody>
-                    <a:bodyPr wrap="square"/>
-                    <a:lstStyle/>
-                    <a:p>
-                      <a:pPr algn="ctr"/>
-                      <a:r>
-                        <a:rPr sz="700" b="0">
-                          <a:solidFill>
-                            <a:srgbClr val="555555"/>
-                          </a:solidFill>
-                          <a:latin typeface="Calibri"/>
-                        </a:rPr>
-                        <a:t>11/08/2026</a:t>
-                      </a:r>
-                    </a:p>
-                  </a:txBody>
-                  <a:tcPr>
-                    <a:solidFill>
-                      <a:srgbClr val="FFFFFF"/>
-                    </a:solidFill>
-                  </a:tcPr>
-                </a:tc>
-                <a:tc>
-                  <a:txBody>
-                    <a:bodyPr wrap="square"/>
-                    <a:lstStyle/>
-                    <a:p>
-                      <a:pPr algn="ctr"/>
-                      <a:r>
-                        <a:rPr sz="700" b="1">
-                          <a:solidFill>
-                            <a:srgbClr val="1A2340"/>
-                          </a:solidFill>
-                          <a:latin typeface="Calibri"/>
-                        </a:rPr>
-                        <a:t>39%</a:t>
-                      </a:r>
-                    </a:p>
-                  </a:txBody>
-                  <a:tcPr>
-                    <a:solidFill>
-                      <a:srgbClr val="FFFFFF"/>
-                    </a:solidFill>
-                  </a:tcPr>
-                </a:tc>
-                <a:tc>
-                  <a:txBody>
-                    <a:bodyPr wrap="square"/>
-                    <a:lstStyle/>
-                    <a:p>
-                      <a:pPr algn="ctr"/>
-                      <a:r>
-                        <a:rPr sz="700" b="0">
-                          <a:solidFill>
-                            <a:srgbClr val="555555"/>
-                          </a:solidFill>
-                          <a:latin typeface="Calibri"/>
-                        </a:rPr>
-                        <a:t>32%</a:t>
-                      </a:r>
-                    </a:p>
-                  </a:txBody>
-                  <a:tcPr>
-                    <a:solidFill>
-                      <a:srgbClr val="FFFFFF"/>
-                    </a:solidFill>
-                  </a:tcPr>
-                </a:tc>
-                <a:tc>
-                  <a:txBody>
-                    <a:bodyPr wrap="square"/>
-                    <a:lstStyle/>
-                    <a:p>
-                      <a:pPr algn="r"/>
-                      <a:r>
-                        <a:rPr sz="700" b="1">
-                          <a:solidFill>
-                            <a:srgbClr val="22C55E"/>
-                          </a:solidFill>
-                          <a:latin typeface="Calibri"/>
-                        </a:rPr>
-                        <a:t>39%</a:t>
-                      </a:r>
-                    </a:p>
-                  </a:txBody>
-                  <a:tcPr>
-                    <a:gradFill>
-                      <a:gsLst>
-                        <a:gs pos="0">
-                          <a:srgbClr val="22C55E"/>
-                        </a:gs>
-                        <a:gs pos="39000">
-                          <a:srgbClr val="22C55E"/>
-                        </a:gs>
-                        <a:gs pos="39500">
-                          <a:srgbClr val="E2E2E2"/>
-                        </a:gs>
-                        <a:gs pos="100000">
-                          <a:srgbClr val="E2E2E2"/>
-                        </a:gs>
-                      </a:gsLst>
-                      <a:lin ang="0" scaled="0"/>
-                    </a:gradFill>
-                  </a:tcPr>
-                </a:tc>
-                <a:tc>
-                  <a:txBody>
-                    <a:bodyPr wrap="square"/>
-                    <a:lstStyle/>
-                    <a:p>
-                      <a:pPr algn="ctr"/>
-                      <a:r>
-                        <a:rPr sz="700" b="1">
-                          <a:solidFill>
-                            <a:srgbClr val="22C55E"/>
-                          </a:solidFill>
-                          <a:latin typeface="Calibri"/>
-                        </a:rPr>
-                        <a:t>A tiempo</a:t>
+                            <a:srgbClr val="F59E0B"/>
+                          </a:solidFill>
+                          <a:latin typeface="Calibri"/>
+                        </a:rPr>
+                        <a:t>Riesgo de atraso</a:t>
                       </a:r>
                     </a:p>
                   </a:txBody>
@@ -9658,7 +10030,7 @@
               <a:rPr lang="es-MX" b="1" dirty="0">
                 <a:latin typeface="Aptos (cuerpo)"/>
               </a:rPr>
-              <a:t>Eventualidades de proyectos con atraso</a:t>
+              <a:t>Eventualidades de proyectos con retraso</a:t>
             </a:r>
             <a:endParaRPr lang="es-MX" b="1" dirty="0">
               <a:highlight>
@@ -9726,12 +10098,14 @@
                         <a:buNone/>
                       </a:pPr>
                       <a:r>
-                        <a:rPr lang="es-MX" sz="1100" b="1" u="none" strike="noStrike" kern="1200">
+                        <a:rPr lang="es-MX" sz="1100" u="none" strike="noStrike" kern="1200">
                           <a:solidFill>
                             <a:schemeClr val="tx1"/>
                           </a:solidFill>
                           <a:effectLst/>
                           <a:latin typeface="Aptos (cuerpo)"/>
+                          <a:ea typeface="+mn-ea"/>
+                          <a:cs typeface="+mn-cs"/>
                         </a:rPr>
                         <a:t>No</a:t>
                       </a:r>
@@ -9743,24 +10117,36 @@
                         <a:schemeClr val="tx1"/>
                       </a:solidFill>
                       <a:prstDash val="solid"/>
+                      <a:round/>
+                      <a:headEnd type="none" w="med" len="med"/>
+                      <a:tailEnd type="none" w="med" len="med"/>
                     </a:lnL>
                     <a:lnR w="12700" cap="flat" cmpd="sng" algn="ctr">
                       <a:solidFill>
                         <a:schemeClr val="tx1"/>
                       </a:solidFill>
                       <a:prstDash val="solid"/>
+                      <a:round/>
+                      <a:headEnd type="none" w="med" len="med"/>
+                      <a:tailEnd type="none" w="med" len="med"/>
                     </a:lnR>
                     <a:lnT w="12700" cap="flat" cmpd="sng" algn="ctr">
                       <a:solidFill>
                         <a:schemeClr val="tx1"/>
                       </a:solidFill>
                       <a:prstDash val="solid"/>
+                      <a:round/>
+                      <a:headEnd type="none" w="med" len="med"/>
+                      <a:tailEnd type="none" w="med" len="med"/>
                     </a:lnT>
                     <a:lnB w="12700" cap="flat" cmpd="sng" algn="ctr">
                       <a:solidFill>
                         <a:schemeClr val="tx1"/>
                       </a:solidFill>
                       <a:prstDash val="solid"/>
+                      <a:round/>
+                      <a:headEnd type="none" w="med" len="med"/>
+                      <a:tailEnd type="none" w="med" len="med"/>
                     </a:lnB>
                     <a:noFill/>
                   </a:tcPr>
@@ -9774,12 +10160,14 @@
                         <a:buNone/>
                       </a:pPr>
                       <a:r>
-                        <a:rPr lang="es-MX" sz="1100" b="1" u="none" strike="noStrike" kern="1200">
+                        <a:rPr lang="es-MX" sz="1100" u="none" strike="noStrike" kern="1200">
                           <a:solidFill>
                             <a:schemeClr val="tx1"/>
                           </a:solidFill>
                           <a:effectLst/>
                           <a:latin typeface="Aptos (cuerpo)"/>
+                          <a:ea typeface="+mn-ea"/>
+                          <a:cs typeface="+mn-cs"/>
                         </a:rPr>
                         <a:t>Proyecto</a:t>
                       </a:r>
@@ -9791,24 +10179,36 @@
                         <a:schemeClr val="tx1"/>
                       </a:solidFill>
                       <a:prstDash val="solid"/>
+                      <a:round/>
+                      <a:headEnd type="none" w="med" len="med"/>
+                      <a:tailEnd type="none" w="med" len="med"/>
                     </a:lnL>
                     <a:lnR w="12700" cap="flat" cmpd="sng" algn="ctr">
                       <a:solidFill>
                         <a:schemeClr val="tx1"/>
                       </a:solidFill>
                       <a:prstDash val="solid"/>
+                      <a:round/>
+                      <a:headEnd type="none" w="med" len="med"/>
+                      <a:tailEnd type="none" w="med" len="med"/>
                     </a:lnR>
                     <a:lnT w="12700" cap="flat" cmpd="sng" algn="ctr">
                       <a:solidFill>
                         <a:schemeClr val="tx1"/>
                       </a:solidFill>
                       <a:prstDash val="solid"/>
+                      <a:round/>
+                      <a:headEnd type="none" w="med" len="med"/>
+                      <a:tailEnd type="none" w="med" len="med"/>
                     </a:lnT>
                     <a:lnB w="12700" cap="flat" cmpd="sng" algn="ctr">
                       <a:solidFill>
                         <a:schemeClr val="tx1"/>
                       </a:solidFill>
                       <a:prstDash val="solid"/>
+                      <a:round/>
+                      <a:headEnd type="none" w="med" len="med"/>
+                      <a:tailEnd type="none" w="med" len="med"/>
                     </a:lnB>
                     <a:noFill/>
                   </a:tcPr>
@@ -9818,16 +10218,18 @@
                     <a:bodyPr/>
                     <a:lstStyle/>
                     <a:p>
-                      <a:pPr marL="0" algn="ctr" defTabSz="457200" rtl="0" eaLnBrk="1" fontAlgn="b" latinLnBrk="0" hangingPunct="1">
+                      <a:pPr algn="ctr" fontAlgn="b">
                         <a:buNone/>
                       </a:pPr>
                       <a:r>
-                        <a:rPr lang="es-MX" sz="1100" b="1" u="none" strike="noStrike" kern="1200">
+                        <a:rPr lang="es-MX" sz="1100" u="none" strike="noStrike" kern="1200">
                           <a:solidFill>
                             <a:schemeClr val="tx1"/>
                           </a:solidFill>
                           <a:effectLst/>
                           <a:latin typeface="Aptos (cuerpo)"/>
+                          <a:ea typeface="+mn-ea"/>
+                          <a:cs typeface="+mn-cs"/>
                         </a:rPr>
                         <a:t>Eventualidades</a:t>
                       </a:r>
@@ -9839,40 +10241,57 @@
                         <a:schemeClr val="tx1"/>
                       </a:solidFill>
                       <a:prstDash val="solid"/>
+                      <a:round/>
+                      <a:headEnd type="none" w="med" len="med"/>
+                      <a:tailEnd type="none" w="med" len="med"/>
                     </a:lnL>
                     <a:lnR w="12700" cap="flat" cmpd="sng" algn="ctr">
                       <a:solidFill>
                         <a:schemeClr val="tx1"/>
                       </a:solidFill>
                       <a:prstDash val="solid"/>
+                      <a:round/>
+                      <a:headEnd type="none" w="med" len="med"/>
+                      <a:tailEnd type="none" w="med" len="med"/>
                     </a:lnR>
                     <a:lnT w="12700" cap="flat" cmpd="sng" algn="ctr">
                       <a:solidFill>
                         <a:schemeClr val="tx1"/>
                       </a:solidFill>
                       <a:prstDash val="solid"/>
+                      <a:round/>
+                      <a:headEnd type="none" w="med" len="med"/>
+                      <a:tailEnd type="none" w="med" len="med"/>
                     </a:lnT>
                     <a:lnB w="12700" cap="flat" cmpd="sng" algn="ctr">
                       <a:solidFill>
                         <a:schemeClr val="tx1"/>
                       </a:solidFill>
                       <a:prstDash val="solid"/>
+                      <a:round/>
+                      <a:headEnd type="none" w="med" len="med"/>
+                      <a:tailEnd type="none" w="med" len="med"/>
                     </a:lnB>
                     <a:noFill/>
                   </a:tcPr>
                 </a:tc>
+                <a:extLst>
+                  <a:ext uri="{0D108BD9-81ED-4DB2-BD59-A6C34878D82A}">
+                    <a16:rowId xmlns:a16="http://schemas.microsoft.com/office/drawing/2014/main" val="4174057675"/>
+                  </a:ext>
+                </a:extLst>
               </a:tr>
-              <a:tr h="420000">
+              <a:tr h="349144">
                 <a:tc>
                   <a:txBody>
                     <a:bodyPr/>
                     <a:lstStyle/>
                     <a:p>
-                      <a:pPr marL="0" algn="ctr" defTabSz="457200" rtl="0" eaLnBrk="1" fontAlgn="b" latinLnBrk="0" hangingPunct="1">
+                      <a:pPr algn="ctr" fontAlgn="b">
                         <a:buNone/>
                       </a:pPr>
                       <a:r>
-                        <a:rPr lang="es-MX" sz="1000" u="none" strike="noStrike" kern="1200">
+                        <a:rPr lang="es-MX" sz="1100" b="0" i="0" u="none" strike="noStrike">
                           <a:solidFill>
                             <a:schemeClr val="tx1"/>
                           </a:solidFill>
@@ -9889,24 +10308,36 @@
                         <a:schemeClr val="tx1"/>
                       </a:solidFill>
                       <a:prstDash val="solid"/>
+                      <a:round/>
+                      <a:headEnd type="none" w="med" len="med"/>
+                      <a:tailEnd type="none" w="med" len="med"/>
                     </a:lnL>
                     <a:lnR w="12700" cap="flat" cmpd="sng" algn="ctr">
                       <a:solidFill>
                         <a:schemeClr val="tx1"/>
                       </a:solidFill>
                       <a:prstDash val="solid"/>
+                      <a:round/>
+                      <a:headEnd type="none" w="med" len="med"/>
+                      <a:tailEnd type="none" w="med" len="med"/>
                     </a:lnR>
                     <a:lnT w="12700" cap="flat" cmpd="sng" algn="ctr">
                       <a:solidFill>
                         <a:schemeClr val="tx1"/>
                       </a:solidFill>
                       <a:prstDash val="solid"/>
+                      <a:round/>
+                      <a:headEnd type="none" w="med" len="med"/>
+                      <a:tailEnd type="none" w="med" len="med"/>
                     </a:lnT>
                     <a:lnB w="12700" cap="flat" cmpd="sng" algn="ctr">
                       <a:solidFill>
                         <a:schemeClr val="tx1"/>
                       </a:solidFill>
                       <a:prstDash val="solid"/>
+                      <a:round/>
+                      <a:headEnd type="none" w="med" len="med"/>
+                      <a:tailEnd type="none" w="med" len="med"/>
                     </a:lnB>
                     <a:noFill/>
                   </a:tcPr>
@@ -9916,19 +10347,40 @@
                     <a:bodyPr/>
                     <a:lstStyle/>
                     <a:p>
-                      <a:pPr marL="0" algn="l" defTabSz="457200" rtl="0" eaLnBrk="1" fontAlgn="b" latinLnBrk="0" hangingPunct="1">
+                      <a:pPr marL="0" marR="0" lvl="0" indent="0" algn="l" defTabSz="685800" rtl="0" eaLnBrk="1" fontAlgn="b" latinLnBrk="0" hangingPunct="1">
+                        <a:lnSpc>
+                          <a:spcPct val="100000"/>
+                        </a:lnSpc>
+                        <a:spcBef>
+                          <a:spcPts val="0"/>
+                        </a:spcBef>
+                        <a:spcAft>
+                          <a:spcPts val="0"/>
+                        </a:spcAft>
+                        <a:buClrTx/>
+                        <a:buSzTx/>
+                        <a:buFontTx/>
                         <a:buNone/>
+                        <a:tabLst/>
+                        <a:defRPr/>
                       </a:pPr>
                       <a:r>
-                        <a:rPr lang="es-MX" sz="1000" u="none" strike="noStrike" kern="1200">
+                        <a:rPr lang="es-MX" sz="1100" u="none" strike="noStrike">
                           <a:solidFill>
                             <a:schemeClr val="tx1"/>
                           </a:solidFill>
                           <a:effectLst/>
                           <a:latin typeface="Aptos (cuerpo)"/>
                         </a:rPr>
-                        <a:t>Tesoreria || Adcontent H2H</a:t>
-                      </a:r>
+                        <a:t>Cartera || Cambio de PAC de timbrado (ATEB)</a:t>
+                      </a:r>
+                      <a:endParaRPr lang="es-MX" sz="1100" b="0" i="0" u="none" strike="noStrike">
+                        <a:solidFill>
+                          <a:schemeClr val="tx1"/>
+                        </a:solidFill>
+                        <a:effectLst/>
+                        <a:latin typeface="Aptos (cuerpo)"/>
+                      </a:endParaRPr>
                     </a:p>
                   </a:txBody>
                   <a:tcPr marL="6244" marR="6244" marT="6244" marB="0" anchor="ctr">
@@ -9937,24 +10389,36 @@
                         <a:schemeClr val="tx1"/>
                       </a:solidFill>
                       <a:prstDash val="solid"/>
+                      <a:round/>
+                      <a:headEnd type="none" w="med" len="med"/>
+                      <a:tailEnd type="none" w="med" len="med"/>
                     </a:lnL>
                     <a:lnR w="12700" cap="flat" cmpd="sng" algn="ctr">
                       <a:solidFill>
                         <a:schemeClr val="tx1"/>
                       </a:solidFill>
                       <a:prstDash val="solid"/>
+                      <a:round/>
+                      <a:headEnd type="none" w="med" len="med"/>
+                      <a:tailEnd type="none" w="med" len="med"/>
                     </a:lnR>
                     <a:lnT w="12700" cap="flat" cmpd="sng" algn="ctr">
                       <a:solidFill>
                         <a:schemeClr val="tx1"/>
                       </a:solidFill>
                       <a:prstDash val="solid"/>
+                      <a:round/>
+                      <a:headEnd type="none" w="med" len="med"/>
+                      <a:tailEnd type="none" w="med" len="med"/>
                     </a:lnT>
                     <a:lnB w="12700" cap="flat" cmpd="sng" algn="ctr">
                       <a:solidFill>
                         <a:schemeClr val="tx1"/>
                       </a:solidFill>
                       <a:prstDash val="solid"/>
+                      <a:round/>
+                      <a:headEnd type="none" w="med" len="med"/>
+                      <a:tailEnd type="none" w="med" len="med"/>
                     </a:lnB>
                     <a:noFill/>
                   </a:tcPr>
@@ -9964,18 +10428,18 @@
                     <a:bodyPr/>
                     <a:lstStyle/>
                     <a:p>
-                      <a:pPr marL="0" algn="l" defTabSz="457200" rtl="0" eaLnBrk="1" fontAlgn="b" latinLnBrk="0" hangingPunct="1">
+                      <a:pPr algn="l" fontAlgn="b">
                         <a:buNone/>
                       </a:pPr>
                       <a:r>
-                        <a:rPr lang="es-MX" sz="1000" u="none" strike="noStrike" kern="1200">
+                        <a:rPr lang="es-MX" sz="1100" b="0" i="0" u="none" strike="noStrike">
                           <a:solidFill>
                             <a:schemeClr val="tx1"/>
                           </a:solidFill>
                           <a:effectLst/>
                           <a:latin typeface="Aptos (cuerpo)"/>
                         </a:rPr>
-                        <a:t>eventualdiad</a:t>
+                        <a:t>Pendiente de Firma de convenio de Lumo, Firma de AyO pendiente de firma de Representante Legal</a:t>
                       </a:r>
                     </a:p>
                   </a:txBody>
@@ -9985,40 +10449,57 @@
                         <a:schemeClr val="tx1"/>
                       </a:solidFill>
                       <a:prstDash val="solid"/>
+                      <a:round/>
+                      <a:headEnd type="none" w="med" len="med"/>
+                      <a:tailEnd type="none" w="med" len="med"/>
                     </a:lnL>
                     <a:lnR w="12700" cap="flat" cmpd="sng" algn="ctr">
                       <a:solidFill>
                         <a:schemeClr val="tx1"/>
                       </a:solidFill>
                       <a:prstDash val="solid"/>
+                      <a:round/>
+                      <a:headEnd type="none" w="med" len="med"/>
+                      <a:tailEnd type="none" w="med" len="med"/>
                     </a:lnR>
                     <a:lnT w="12700" cap="flat" cmpd="sng" algn="ctr">
                       <a:solidFill>
                         <a:schemeClr val="tx1"/>
                       </a:solidFill>
                       <a:prstDash val="solid"/>
+                      <a:round/>
+                      <a:headEnd type="none" w="med" len="med"/>
+                      <a:tailEnd type="none" w="med" len="med"/>
                     </a:lnT>
                     <a:lnB w="12700" cap="flat" cmpd="sng" algn="ctr">
                       <a:solidFill>
                         <a:schemeClr val="tx1"/>
                       </a:solidFill>
                       <a:prstDash val="solid"/>
+                      <a:round/>
+                      <a:headEnd type="none" w="med" len="med"/>
+                      <a:tailEnd type="none" w="med" len="med"/>
                     </a:lnB>
                     <a:noFill/>
                   </a:tcPr>
                 </a:tc>
+                <a:extLst>
+                  <a:ext uri="{0D108BD9-81ED-4DB2-BD59-A6C34878D82A}">
+                    <a16:rowId xmlns:a16="http://schemas.microsoft.com/office/drawing/2014/main" val="3248437908"/>
+                  </a:ext>
+                </a:extLst>
               </a:tr>
-              <a:tr h="420000">
+              <a:tr h="520594">
                 <a:tc>
                   <a:txBody>
                     <a:bodyPr/>
                     <a:lstStyle/>
                     <a:p>
-                      <a:pPr marL="0" algn="ctr" defTabSz="457200" rtl="0" eaLnBrk="1" fontAlgn="b" latinLnBrk="0" hangingPunct="1">
+                      <a:pPr algn="ctr" fontAlgn="b">
                         <a:buNone/>
                       </a:pPr>
                       <a:r>
-                        <a:rPr lang="es-MX" sz="1000" u="none" strike="noStrike" kern="1200">
+                        <a:rPr lang="es-ES" sz="1100" b="0" i="0" u="none" strike="noStrike">
                           <a:solidFill>
                             <a:schemeClr val="tx1"/>
                           </a:solidFill>
@@ -10027,6 +10508,13 @@
                         </a:rPr>
                         <a:t>2</a:t>
                       </a:r>
+                      <a:endParaRPr lang="es-MX" sz="1100" b="0" i="0" u="none" strike="noStrike">
+                        <a:solidFill>
+                          <a:schemeClr val="tx1"/>
+                        </a:solidFill>
+                        <a:effectLst/>
+                        <a:latin typeface="Aptos (cuerpo)"/>
+                      </a:endParaRPr>
                     </a:p>
                   </a:txBody>
                   <a:tcPr marL="6244" marR="6244" marT="6244" marB="0" anchor="ctr">
@@ -10035,24 +10523,36 @@
                         <a:schemeClr val="tx1"/>
                       </a:solidFill>
                       <a:prstDash val="solid"/>
+                      <a:round/>
+                      <a:headEnd type="none" w="med" len="med"/>
+                      <a:tailEnd type="none" w="med" len="med"/>
                     </a:lnL>
                     <a:lnR w="12700" cap="flat" cmpd="sng" algn="ctr">
                       <a:solidFill>
                         <a:schemeClr val="tx1"/>
                       </a:solidFill>
                       <a:prstDash val="solid"/>
+                      <a:round/>
+                      <a:headEnd type="none" w="med" len="med"/>
+                      <a:tailEnd type="none" w="med" len="med"/>
                     </a:lnR>
                     <a:lnT w="12700" cap="flat" cmpd="sng" algn="ctr">
                       <a:solidFill>
                         <a:schemeClr val="tx1"/>
                       </a:solidFill>
                       <a:prstDash val="solid"/>
+                      <a:round/>
+                      <a:headEnd type="none" w="med" len="med"/>
+                      <a:tailEnd type="none" w="med" len="med"/>
                     </a:lnT>
                     <a:lnB w="12700" cap="flat" cmpd="sng" algn="ctr">
                       <a:solidFill>
                         <a:schemeClr val="tx1"/>
                       </a:solidFill>
                       <a:prstDash val="solid"/>
+                      <a:round/>
+                      <a:headEnd type="none" w="med" len="med"/>
+                      <a:tailEnd type="none" w="med" len="med"/>
                     </a:lnB>
                     <a:noFill/>
                   </a:tcPr>
@@ -10062,18 +10562,20 @@
                     <a:bodyPr/>
                     <a:lstStyle/>
                     <a:p>
-                      <a:pPr marL="0" algn="l" defTabSz="457200" rtl="0" eaLnBrk="1" fontAlgn="b" latinLnBrk="0" hangingPunct="1">
+                      <a:pPr algn="l" fontAlgn="b">
                         <a:buNone/>
                       </a:pPr>
                       <a:r>
-                        <a:rPr lang="es-MX" sz="1000" u="none" strike="noStrike" kern="1200">
+                        <a:rPr lang="es-MX" sz="1100" b="0" i="0" u="none" strike="noStrike" kern="1200" dirty="0">
                           <a:solidFill>
                             <a:schemeClr val="tx1"/>
                           </a:solidFill>
                           <a:effectLst/>
                           <a:latin typeface="Aptos (cuerpo)"/>
-                        </a:rPr>
-                        <a:t>Operaciones Fleet || Data Lab</a:t>
+                          <a:ea typeface="+mn-ea"/>
+                          <a:cs typeface="+mn-cs"/>
+                        </a:rPr>
+                        <a:t>Contabilidad || Integración Mecánica – SAE (Fase 1-2)</a:t>
                       </a:r>
                     </a:p>
                   </a:txBody>
@@ -10083,24 +10585,36 @@
                         <a:schemeClr val="tx1"/>
                       </a:solidFill>
                       <a:prstDash val="solid"/>
+                      <a:round/>
+                      <a:headEnd type="none" w="med" len="med"/>
+                      <a:tailEnd type="none" w="med" len="med"/>
                     </a:lnL>
                     <a:lnR w="12700" cap="flat" cmpd="sng" algn="ctr">
                       <a:solidFill>
                         <a:schemeClr val="tx1"/>
                       </a:solidFill>
                       <a:prstDash val="solid"/>
+                      <a:round/>
+                      <a:headEnd type="none" w="med" len="med"/>
+                      <a:tailEnd type="none" w="med" len="med"/>
                     </a:lnR>
                     <a:lnT w="12700" cap="flat" cmpd="sng" algn="ctr">
                       <a:solidFill>
                         <a:schemeClr val="tx1"/>
                       </a:solidFill>
                       <a:prstDash val="solid"/>
+                      <a:round/>
+                      <a:headEnd type="none" w="med" len="med"/>
+                      <a:tailEnd type="none" w="med" len="med"/>
                     </a:lnT>
                     <a:lnB w="12700" cap="flat" cmpd="sng" algn="ctr">
                       <a:solidFill>
                         <a:schemeClr val="tx1"/>
                       </a:solidFill>
                       <a:prstDash val="solid"/>
+                      <a:round/>
+                      <a:headEnd type="none" w="med" len="med"/>
+                      <a:tailEnd type="none" w="med" len="med"/>
                     </a:lnB>
                     <a:noFill/>
                   </a:tcPr>
@@ -10110,19 +10624,65 @@
                     <a:bodyPr/>
                     <a:lstStyle/>
                     <a:p>
-                      <a:pPr marL="0" algn="l" defTabSz="457200" rtl="0" eaLnBrk="1" fontAlgn="b" latinLnBrk="0" hangingPunct="1">
+                      <a:pPr marL="0" lvl="0" indent="0" algn="l">
+                        <a:lnSpc>
+                          <a:spcPct val="100000"/>
+                        </a:lnSpc>
+                        <a:spcBef>
+                          <a:spcPts val="0"/>
+                        </a:spcBef>
+                        <a:spcAft>
+                          <a:spcPts val="0"/>
+                        </a:spcAft>
                         <a:buNone/>
                       </a:pPr>
                       <a:r>
-                        <a:rPr lang="es-MX" sz="1000" u="none" strike="noStrike" kern="1200">
+                        <a:rPr lang="es-MX" sz="1100" b="0" i="0" u="none" strike="noStrike" kern="1200" noProof="0">
                           <a:solidFill>
                             <a:schemeClr val="tx1"/>
                           </a:solidFill>
                           <a:effectLst/>
                           <a:latin typeface="Aptos (cuerpo)"/>
-                        </a:rPr>
-                        <a:t>dasdasdasdasd</a:t>
-                      </a:r>
+                          <a:ea typeface="+mn-ea"/>
+                          <a:cs typeface="+mn-cs"/>
+                        </a:rPr>
+                        <a:t>Se tuvieron imprevistos en la carga del catálogo de refacciones en Mecanica Mx</a:t>
+                      </a:r>
+                    </a:p>
+                    <a:p>
+                      <a:pPr marL="0" lvl="0" indent="0" algn="l">
+                        <a:lnSpc>
+                          <a:spcPct val="100000"/>
+                        </a:lnSpc>
+                        <a:spcBef>
+                          <a:spcPts val="0"/>
+                        </a:spcBef>
+                        <a:spcAft>
+                          <a:spcPts val="0"/>
+                        </a:spcAft>
+                        <a:buNone/>
+                      </a:pPr>
+                      <a:r>
+                        <a:rPr lang="es-MX" sz="1100" b="0" i="0" u="none" strike="noStrike" kern="1200" noProof="0">
+                          <a:solidFill>
+                            <a:schemeClr val="tx1"/>
+                          </a:solidFill>
+                          <a:effectLst/>
+                          <a:latin typeface="Aptos (cuerpo)"/>
+                          <a:ea typeface="+mn-ea"/>
+                          <a:cs typeface="+mn-cs"/>
+                        </a:rPr>
+                        <a:t>Actualización del catálogo de proveedores.</a:t>
+                      </a:r>
+                      <a:endParaRPr lang="es-MX" sz="1100" b="0" i="0" u="none" strike="noStrike" kern="1200">
+                        <a:solidFill>
+                          <a:schemeClr val="tx1"/>
+                        </a:solidFill>
+                        <a:effectLst/>
+                        <a:latin typeface="Aptos (cuerpo)"/>
+                        <a:ea typeface="+mn-ea"/>
+                        <a:cs typeface="+mn-cs"/>
+                      </a:endParaRPr>
                     </a:p>
                   </a:txBody>
                   <a:tcPr marL="6244" marR="6244" marT="6244" marB="0" anchor="ctr">
@@ -10131,40 +10691,57 @@
                         <a:schemeClr val="tx1"/>
                       </a:solidFill>
                       <a:prstDash val="solid"/>
+                      <a:round/>
+                      <a:headEnd type="none" w="med" len="med"/>
+                      <a:tailEnd type="none" w="med" len="med"/>
                     </a:lnL>
                     <a:lnR w="12700" cap="flat" cmpd="sng" algn="ctr">
                       <a:solidFill>
                         <a:schemeClr val="tx1"/>
                       </a:solidFill>
                       <a:prstDash val="solid"/>
+                      <a:round/>
+                      <a:headEnd type="none" w="med" len="med"/>
+                      <a:tailEnd type="none" w="med" len="med"/>
                     </a:lnR>
                     <a:lnT w="12700" cap="flat" cmpd="sng" algn="ctr">
                       <a:solidFill>
                         <a:schemeClr val="tx1"/>
                       </a:solidFill>
                       <a:prstDash val="solid"/>
+                      <a:round/>
+                      <a:headEnd type="none" w="med" len="med"/>
+                      <a:tailEnd type="none" w="med" len="med"/>
                     </a:lnT>
                     <a:lnB w="12700" cap="flat" cmpd="sng" algn="ctr">
                       <a:solidFill>
                         <a:schemeClr val="tx1"/>
                       </a:solidFill>
                       <a:prstDash val="solid"/>
+                      <a:round/>
+                      <a:headEnd type="none" w="med" len="med"/>
+                      <a:tailEnd type="none" w="med" len="med"/>
                     </a:lnB>
                     <a:noFill/>
                   </a:tcPr>
                 </a:tc>
+                <a:extLst>
+                  <a:ext uri="{0D108BD9-81ED-4DB2-BD59-A6C34878D82A}">
+                    <a16:rowId xmlns:a16="http://schemas.microsoft.com/office/drawing/2014/main" val="1382980361"/>
+                  </a:ext>
+                </a:extLst>
               </a:tr>
-              <a:tr h="420000">
+              <a:tr h="718457">
                 <a:tc>
                   <a:txBody>
                     <a:bodyPr/>
                     <a:lstStyle/>
                     <a:p>
-                      <a:pPr marL="0" algn="ctr" defTabSz="457200" rtl="0" eaLnBrk="1" fontAlgn="b" latinLnBrk="0" hangingPunct="1">
+                      <a:pPr algn="ctr" fontAlgn="b">
                         <a:buNone/>
                       </a:pPr>
                       <a:r>
-                        <a:rPr lang="es-MX" sz="1000" u="none" strike="noStrike" kern="1200">
+                        <a:rPr lang="es-MX" sz="1100" b="0" i="0" u="none" strike="noStrike">
                           <a:solidFill>
                             <a:schemeClr val="tx1"/>
                           </a:solidFill>
@@ -10181,24 +10758,36 @@
                         <a:schemeClr val="tx1"/>
                       </a:solidFill>
                       <a:prstDash val="solid"/>
+                      <a:round/>
+                      <a:headEnd type="none" w="med" len="med"/>
+                      <a:tailEnd type="none" w="med" len="med"/>
                     </a:lnL>
                     <a:lnR w="12700" cap="flat" cmpd="sng" algn="ctr">
                       <a:solidFill>
                         <a:schemeClr val="tx1"/>
                       </a:solidFill>
                       <a:prstDash val="solid"/>
+                      <a:round/>
+                      <a:headEnd type="none" w="med" len="med"/>
+                      <a:tailEnd type="none" w="med" len="med"/>
                     </a:lnR>
                     <a:lnT w="12700" cap="flat" cmpd="sng" algn="ctr">
                       <a:solidFill>
                         <a:schemeClr val="tx1"/>
                       </a:solidFill>
                       <a:prstDash val="solid"/>
+                      <a:round/>
+                      <a:headEnd type="none" w="med" len="med"/>
+                      <a:tailEnd type="none" w="med" len="med"/>
                     </a:lnT>
                     <a:lnB w="12700" cap="flat" cmpd="sng" algn="ctr">
                       <a:solidFill>
                         <a:schemeClr val="tx1"/>
                       </a:solidFill>
                       <a:prstDash val="solid"/>
+                      <a:round/>
+                      <a:headEnd type="none" w="med" len="med"/>
+                      <a:tailEnd type="none" w="med" len="med"/>
                     </a:lnB>
                     <a:noFill/>
                   </a:tcPr>
@@ -10208,19 +10797,26 @@
                     <a:bodyPr/>
                     <a:lstStyle/>
                     <a:p>
-                      <a:pPr marL="0" algn="l" defTabSz="457200" rtl="0" eaLnBrk="1" fontAlgn="b" latinLnBrk="0" hangingPunct="1">
+                      <a:pPr lvl="0" algn="l">
                         <a:buNone/>
                       </a:pPr>
                       <a:r>
-                        <a:rPr lang="es-MX" sz="1000" u="none" strike="noStrike" kern="1200">
+                        <a:rPr lang="es-MX" sz="1100" u="none" strike="noStrike">
                           <a:solidFill>
                             <a:schemeClr val="tx1"/>
                           </a:solidFill>
                           <a:effectLst/>
                           <a:latin typeface="Aptos (cuerpo)"/>
                         </a:rPr>
-                        <a:t>Operaciones Fleet || Nueva Instancia</a:t>
-                      </a:r>
+                        <a:t>TRIM || MarketPlace || Caddi</a:t>
+                      </a:r>
+                      <a:endParaRPr lang="es-MX" sz="1100" b="0" i="0" u="none" strike="noStrike">
+                        <a:solidFill>
+                          <a:schemeClr val="tx1"/>
+                        </a:solidFill>
+                        <a:effectLst/>
+                        <a:latin typeface="Aptos (cuerpo)"/>
+                      </a:endParaRPr>
                     </a:p>
                   </a:txBody>
                   <a:tcPr marL="6244" marR="6244" marT="6244" marB="0" anchor="ctr">
@@ -10229,24 +10825,36 @@
                         <a:schemeClr val="tx1"/>
                       </a:solidFill>
                       <a:prstDash val="solid"/>
+                      <a:round/>
+                      <a:headEnd type="none" w="med" len="med"/>
+                      <a:tailEnd type="none" w="med" len="med"/>
                     </a:lnL>
                     <a:lnR w="12700" cap="flat" cmpd="sng" algn="ctr">
                       <a:solidFill>
                         <a:schemeClr val="tx1"/>
                       </a:solidFill>
                       <a:prstDash val="solid"/>
+                      <a:round/>
+                      <a:headEnd type="none" w="med" len="med"/>
+                      <a:tailEnd type="none" w="med" len="med"/>
                     </a:lnR>
                     <a:lnT w="12700" cap="flat" cmpd="sng" algn="ctr">
                       <a:solidFill>
                         <a:schemeClr val="tx1"/>
                       </a:solidFill>
                       <a:prstDash val="solid"/>
+                      <a:round/>
+                      <a:headEnd type="none" w="med" len="med"/>
+                      <a:tailEnd type="none" w="med" len="med"/>
                     </a:lnT>
                     <a:lnB w="12700" cap="flat" cmpd="sng" algn="ctr">
                       <a:solidFill>
                         <a:schemeClr val="tx1"/>
                       </a:solidFill>
                       <a:prstDash val="solid"/>
+                      <a:round/>
+                      <a:headEnd type="none" w="med" len="med"/>
+                      <a:tailEnd type="none" w="med" len="med"/>
                     </a:lnB>
                     <a:noFill/>
                   </a:tcPr>
@@ -10256,19 +10864,85 @@
                     <a:bodyPr/>
                     <a:lstStyle/>
                     <a:p>
-                      <a:pPr marL="0" algn="l" defTabSz="457200" rtl="0" eaLnBrk="1" fontAlgn="b" latinLnBrk="0" hangingPunct="1">
+                      <a:pPr marL="0" lvl="0" indent="0" algn="l">
+                        <a:lnSpc>
+                          <a:spcPct val="100000"/>
+                        </a:lnSpc>
+                        <a:spcBef>
+                          <a:spcPts val="0"/>
+                        </a:spcBef>
+                        <a:spcAft>
+                          <a:spcPts val="0"/>
+                        </a:spcAft>
                         <a:buNone/>
                       </a:pPr>
                       <a:r>
-                        <a:rPr lang="es-MX" sz="1000" u="none" strike="noStrike" kern="1200">
+                        <a:rPr lang="es-MX" sz="800" b="0" i="0" u="none" strike="noStrike" noProof="0">
+                          <a:solidFill>
+                            <a:schemeClr val="tx1"/>
+                          </a:solidFill>
+                          <a:effectLst/>
+                          <a:latin typeface="Segoe UI"/>
+                          <a:cs typeface="Segoe UI"/>
+                        </a:rPr>
+                        <a:t>E</a:t>
+                      </a:r>
+                      <a:r>
+                        <a:rPr lang="es-MX" sz="1100" u="none" strike="noStrike" kern="1200" noProof="0">
                           <a:solidFill>
                             <a:schemeClr val="tx1"/>
                           </a:solidFill>
                           <a:effectLst/>
                           <a:latin typeface="Aptos (cuerpo)"/>
-                        </a:rPr>
-                        <a:t>ggdgsefreheh</a:t>
-                      </a:r>
+                          <a:ea typeface="+mn-ea"/>
+                          <a:cs typeface="+mn-cs"/>
+                        </a:rPr>
+                        <a:t>xistió un retraso en la carga del código AMI en Intelimotor.</a:t>
+                      </a:r>
+                      <a:endParaRPr lang="es-ES" sz="1100" u="none" strike="noStrike" kern="1200" noProof="0">
+                        <a:solidFill>
+                          <a:schemeClr val="tx1"/>
+                        </a:solidFill>
+                        <a:effectLst/>
+                        <a:latin typeface="Aptos (cuerpo)"/>
+                        <a:ea typeface="+mn-ea"/>
+                        <a:cs typeface="+mn-cs"/>
+                      </a:endParaRPr>
+                    </a:p>
+                    <a:p>
+                      <a:pPr marL="0" lvl="0" indent="0" algn="l">
+                        <a:lnSpc>
+                          <a:spcPct val="100000"/>
+                        </a:lnSpc>
+                        <a:spcBef>
+                          <a:spcPts val="0"/>
+                        </a:spcBef>
+                        <a:spcAft>
+                          <a:spcPts val="0"/>
+                        </a:spcAft>
+                        <a:buNone/>
+                      </a:pPr>
+                      <a:r>
+                        <a:rPr lang="es-MX" sz="1100" u="none" strike="noStrike" kern="1200" noProof="0">
+                          <a:solidFill>
+                            <a:schemeClr val="tx1"/>
+                          </a:solidFill>
+                          <a:effectLst/>
+                          <a:latin typeface="Aptos (cuerpo)"/>
+                          <a:ea typeface="+mn-ea"/>
+                          <a:cs typeface="+mn-cs"/>
+                        </a:rPr>
+                        <a:t>Seguros Ana tardó en realizar la validación de los XML de prueba.</a:t>
+                      </a:r>
+                      <a:endParaRPr lang="es-MX" sz="1100" u="none" strike="noStrike" kern="1200">
+                        <a:solidFill>
+                          <a:schemeClr val="tx1"/>
+                        </a:solidFill>
+                        <a:effectLst/>
+                        <a:latin typeface="Aptos (cuerpo)"/>
+                        <a:ea typeface="+mn-ea"/>
+                        <a:cs typeface="+mn-cs"/>
+                      </a:endParaRPr>
                     </a:p>
                   </a:txBody>
                   <a:tcPr marL="6244" marR="6244" marT="6244" marB="0" anchor="ctr">
@@ -10277,40 +10951,57 @@
                         <a:schemeClr val="tx1"/>
                       </a:solidFill>
                       <a:prstDash val="solid"/>
+                      <a:round/>
+                      <a:headEnd type="none" w="med" len="med"/>
+                      <a:tailEnd type="none" w="med" len="med"/>
                     </a:lnL>
                     <a:lnR w="12700" cap="flat" cmpd="sng" algn="ctr">
                       <a:solidFill>
                         <a:schemeClr val="tx1"/>
                       </a:solidFill>
                       <a:prstDash val="solid"/>
+                      <a:round/>
+                      <a:headEnd type="none" w="med" len="med"/>
+                      <a:tailEnd type="none" w="med" len="med"/>
                     </a:lnR>
                     <a:lnT w="12700" cap="flat" cmpd="sng" algn="ctr">
                       <a:solidFill>
                         <a:schemeClr val="tx1"/>
                       </a:solidFill>
                       <a:prstDash val="solid"/>
+                      <a:round/>
+                      <a:headEnd type="none" w="med" len="med"/>
+                      <a:tailEnd type="none" w="med" len="med"/>
                     </a:lnT>
                     <a:lnB w="12700" cap="flat" cmpd="sng" algn="ctr">
                       <a:solidFill>
                         <a:schemeClr val="tx1"/>
                       </a:solidFill>
                       <a:prstDash val="solid"/>
+                      <a:round/>
+                      <a:headEnd type="none" w="med" len="med"/>
+                      <a:tailEnd type="none" w="med" len="med"/>
                     </a:lnB>
                     <a:noFill/>
                   </a:tcPr>
                 </a:tc>
+                <a:extLst>
+                  <a:ext uri="{0D108BD9-81ED-4DB2-BD59-A6C34878D82A}">
+                    <a16:rowId xmlns:a16="http://schemas.microsoft.com/office/drawing/2014/main" val="2986911556"/>
+                  </a:ext>
+                </a:extLst>
               </a:tr>
-              <a:tr h="420000">
+              <a:tr h="594360">
                 <a:tc>
                   <a:txBody>
                     <a:bodyPr/>
                     <a:lstStyle/>
                     <a:p>
-                      <a:pPr marL="0" algn="ctr" defTabSz="457200" rtl="0" eaLnBrk="1" fontAlgn="b" latinLnBrk="0" hangingPunct="1">
+                      <a:pPr algn="ctr" fontAlgn="b">
                         <a:buNone/>
                       </a:pPr>
                       <a:r>
-                        <a:rPr lang="es-MX" sz="1000" u="none" strike="noStrike" kern="1200">
+                        <a:rPr lang="es-ES" sz="1100" b="0" i="0" u="none" strike="noStrike">
                           <a:solidFill>
                             <a:schemeClr val="tx1"/>
                           </a:solidFill>
@@ -10319,6 +11010,13 @@
                         </a:rPr>
                         <a:t>4</a:t>
                       </a:r>
+                      <a:endParaRPr lang="es-MX" sz="1100" b="0" i="0" u="none" strike="noStrike">
+                        <a:solidFill>
+                          <a:schemeClr val="tx1"/>
+                        </a:solidFill>
+                        <a:effectLst/>
+                        <a:latin typeface="Aptos (cuerpo)"/>
+                      </a:endParaRPr>
                     </a:p>
                   </a:txBody>
                   <a:tcPr marL="6244" marR="6244" marT="6244" marB="0" anchor="ctr">
@@ -10327,24 +11025,36 @@
                         <a:schemeClr val="tx1"/>
                       </a:solidFill>
                       <a:prstDash val="solid"/>
+                      <a:round/>
+                      <a:headEnd type="none" w="med" len="med"/>
+                      <a:tailEnd type="none" w="med" len="med"/>
                     </a:lnL>
                     <a:lnR w="12700" cap="flat" cmpd="sng" algn="ctr">
                       <a:solidFill>
                         <a:schemeClr val="tx1"/>
                       </a:solidFill>
                       <a:prstDash val="solid"/>
+                      <a:round/>
+                      <a:headEnd type="none" w="med" len="med"/>
+                      <a:tailEnd type="none" w="med" len="med"/>
                     </a:lnR>
                     <a:lnT w="12700" cap="flat" cmpd="sng" algn="ctr">
                       <a:solidFill>
                         <a:schemeClr val="tx1"/>
                       </a:solidFill>
                       <a:prstDash val="solid"/>
+                      <a:round/>
+                      <a:headEnd type="none" w="med" len="med"/>
+                      <a:tailEnd type="none" w="med" len="med"/>
                     </a:lnT>
                     <a:lnB w="12700" cap="flat" cmpd="sng" algn="ctr">
                       <a:solidFill>
                         <a:schemeClr val="tx1"/>
                       </a:solidFill>
                       <a:prstDash val="solid"/>
+                      <a:round/>
+                      <a:headEnd type="none" w="med" len="med"/>
+                      <a:tailEnd type="none" w="med" len="med"/>
                     </a:lnB>
                     <a:noFill/>
                   </a:tcPr>
@@ -10354,18 +11064,18 @@
                     <a:bodyPr/>
                     <a:lstStyle/>
                     <a:p>
-                      <a:pPr marL="0" algn="l" defTabSz="457200" rtl="0" eaLnBrk="1" fontAlgn="b" latinLnBrk="0" hangingPunct="1">
+                      <a:pPr algn="l" fontAlgn="b">
                         <a:buNone/>
                       </a:pPr>
                       <a:r>
-                        <a:rPr lang="es-MX" sz="1000" u="none" strike="noStrike" kern="1200">
+                        <a:rPr lang="es-MX" sz="1100" b="0" i="0" u="none" strike="noStrike">
                           <a:solidFill>
                             <a:schemeClr val="tx1"/>
                           </a:solidFill>
                           <a:effectLst/>
                           <a:latin typeface="Aptos (cuerpo)"/>
                         </a:rPr>
-                        <a:t>Capital Humano || BUK Campos Personalizados</a:t>
+                        <a:t>Operaciones Fleet || Desarrollos</a:t>
                       </a:r>
                     </a:p>
                   </a:txBody>
@@ -10375,24 +11085,36 @@
                         <a:schemeClr val="tx1"/>
                       </a:solidFill>
                       <a:prstDash val="solid"/>
+                      <a:round/>
+                      <a:headEnd type="none" w="med" len="med"/>
+                      <a:tailEnd type="none" w="med" len="med"/>
                     </a:lnL>
                     <a:lnR w="12700" cap="flat" cmpd="sng" algn="ctr">
                       <a:solidFill>
                         <a:schemeClr val="tx1"/>
                       </a:solidFill>
                       <a:prstDash val="solid"/>
+                      <a:round/>
+                      <a:headEnd type="none" w="med" len="med"/>
+                      <a:tailEnd type="none" w="med" len="med"/>
                     </a:lnR>
                     <a:lnT w="12700" cap="flat" cmpd="sng" algn="ctr">
                       <a:solidFill>
                         <a:schemeClr val="tx1"/>
                       </a:solidFill>
                       <a:prstDash val="solid"/>
+                      <a:round/>
+                      <a:headEnd type="none" w="med" len="med"/>
+                      <a:tailEnd type="none" w="med" len="med"/>
                     </a:lnT>
                     <a:lnB w="12700" cap="flat" cmpd="sng" algn="ctr">
                       <a:solidFill>
                         <a:schemeClr val="tx1"/>
                       </a:solidFill>
                       <a:prstDash val="solid"/>
+                      <a:round/>
+                      <a:headEnd type="none" w="med" len="med"/>
+                      <a:tailEnd type="none" w="med" len="med"/>
                     </a:lnB>
                     <a:noFill/>
                   </a:tcPr>
@@ -10402,19 +11124,27 @@
                     <a:bodyPr/>
                     <a:lstStyle/>
                     <a:p>
-                      <a:pPr marL="0" algn="l" defTabSz="457200" rtl="0" eaLnBrk="1" fontAlgn="b" latinLnBrk="0" hangingPunct="1">
+                      <a:pPr marL="0" indent="0" algn="l" fontAlgn="b">
+                        <a:buFont typeface="Arial" panose="020B0604020202020204" pitchFamily="34" charset="0"/>
                         <a:buNone/>
                       </a:pPr>
                       <a:r>
-                        <a:rPr lang="es-MX" sz="1000" u="none" strike="noStrike" kern="1200">
+                        <a:rPr lang="es-ES" sz="1100" b="0" i="0" u="none" strike="noStrike">
                           <a:solidFill>
                             <a:schemeClr val="tx1"/>
                           </a:solidFill>
                           <a:effectLst/>
                           <a:latin typeface="Aptos (cuerpo)"/>
                         </a:rPr>
-                        <a:t>fsdgshsdh</a:t>
-                      </a:r>
+                        <a:t>Por cargas de trabajo el usuario no ha podido concluir con las pruebas de certificación de Roles y Permisos</a:t>
+                      </a:r>
+                      <a:endParaRPr lang="es-MX" sz="1100" b="0" i="0" u="none" strike="noStrike">
+                        <a:solidFill>
+                          <a:schemeClr val="tx1"/>
+                        </a:solidFill>
+                        <a:effectLst/>
+                        <a:latin typeface="Aptos (cuerpo)"/>
+                      </a:endParaRPr>
                     </a:p>
                   </a:txBody>
                   <a:tcPr marL="6244" marR="6244" marT="6244" marB="0" anchor="ctr">
@@ -10423,40 +11153,57 @@
                         <a:schemeClr val="tx1"/>
                       </a:solidFill>
                       <a:prstDash val="solid"/>
+                      <a:round/>
+                      <a:headEnd type="none" w="med" len="med"/>
+                      <a:tailEnd type="none" w="med" len="med"/>
                     </a:lnL>
                     <a:lnR w="12700" cap="flat" cmpd="sng" algn="ctr">
                       <a:solidFill>
                         <a:schemeClr val="tx1"/>
                       </a:solidFill>
                       <a:prstDash val="solid"/>
+                      <a:round/>
+                      <a:headEnd type="none" w="med" len="med"/>
+                      <a:tailEnd type="none" w="med" len="med"/>
                     </a:lnR>
                     <a:lnT w="12700" cap="flat" cmpd="sng" algn="ctr">
                       <a:solidFill>
                         <a:schemeClr val="tx1"/>
                       </a:solidFill>
                       <a:prstDash val="solid"/>
+                      <a:round/>
+                      <a:headEnd type="none" w="med" len="med"/>
+                      <a:tailEnd type="none" w="med" len="med"/>
                     </a:lnT>
                     <a:lnB w="12700" cap="flat" cmpd="sng" algn="ctr">
                       <a:solidFill>
                         <a:schemeClr val="tx1"/>
                       </a:solidFill>
                       <a:prstDash val="solid"/>
+                      <a:round/>
+                      <a:headEnd type="none" w="med" len="med"/>
+                      <a:tailEnd type="none" w="med" len="med"/>
                     </a:lnB>
                     <a:noFill/>
                   </a:tcPr>
                 </a:tc>
+                <a:extLst>
+                  <a:ext uri="{0D108BD9-81ED-4DB2-BD59-A6C34878D82A}">
+                    <a16:rowId xmlns:a16="http://schemas.microsoft.com/office/drawing/2014/main" val="1272086280"/>
+                  </a:ext>
+                </a:extLst>
               </a:tr>
-              <a:tr h="420000">
+              <a:tr h="594360">
                 <a:tc>
                   <a:txBody>
                     <a:bodyPr/>
                     <a:lstStyle/>
                     <a:p>
-                      <a:pPr marL="0" algn="ctr" defTabSz="457200" rtl="0" eaLnBrk="1" fontAlgn="b" latinLnBrk="0" hangingPunct="1">
+                      <a:pPr algn="ctr" fontAlgn="b">
                         <a:buNone/>
                       </a:pPr>
                       <a:r>
-                        <a:rPr lang="es-MX" sz="1000" u="none" strike="noStrike" kern="1200">
+                        <a:rPr lang="es-MX" sz="1100" b="0" i="0" u="none" strike="noStrike">
                           <a:solidFill>
                             <a:schemeClr val="tx1"/>
                           </a:solidFill>
@@ -10473,24 +11220,36 @@
                         <a:schemeClr val="tx1"/>
                       </a:solidFill>
                       <a:prstDash val="solid"/>
+                      <a:round/>
+                      <a:headEnd type="none" w="med" len="med"/>
+                      <a:tailEnd type="none" w="med" len="med"/>
                     </a:lnL>
                     <a:lnR w="12700" cap="flat" cmpd="sng" algn="ctr">
                       <a:solidFill>
                         <a:schemeClr val="tx1"/>
                       </a:solidFill>
                       <a:prstDash val="solid"/>
+                      <a:round/>
+                      <a:headEnd type="none" w="med" len="med"/>
+                      <a:tailEnd type="none" w="med" len="med"/>
                     </a:lnR>
                     <a:lnT w="12700" cap="flat" cmpd="sng" algn="ctr">
                       <a:solidFill>
                         <a:schemeClr val="tx1"/>
                       </a:solidFill>
                       <a:prstDash val="solid"/>
+                      <a:round/>
+                      <a:headEnd type="none" w="med" len="med"/>
+                      <a:tailEnd type="none" w="med" len="med"/>
                     </a:lnT>
                     <a:lnB w="12700" cap="flat" cmpd="sng" algn="ctr">
                       <a:solidFill>
                         <a:schemeClr val="tx1"/>
                       </a:solidFill>
                       <a:prstDash val="solid"/>
+                      <a:round/>
+                      <a:headEnd type="none" w="med" len="med"/>
+                      <a:tailEnd type="none" w="med" len="med"/>
                     </a:lnB>
                     <a:noFill/>
                   </a:tcPr>
@@ -10500,18 +11259,18 @@
                     <a:bodyPr/>
                     <a:lstStyle/>
                     <a:p>
-                      <a:pPr marL="0" algn="l" defTabSz="457200" rtl="0" eaLnBrk="1" fontAlgn="b" latinLnBrk="0" hangingPunct="1">
+                      <a:pPr algn="l" fontAlgn="b">
                         <a:buNone/>
                       </a:pPr>
                       <a:r>
-                        <a:rPr lang="es-MX" sz="1000" u="none" strike="noStrike" kern="1200">
+                        <a:rPr lang="es-MX" sz="1100" b="0" i="0" u="none" strike="noStrike">
                           <a:solidFill>
                             <a:schemeClr val="tx1"/>
                           </a:solidFill>
                           <a:effectLst/>
                           <a:latin typeface="Aptos (cuerpo)"/>
                         </a:rPr>
-                        <a:t>Talleres || Integración Mecanica Mx - SAE</a:t>
+                        <a:t>Tesorería || Adcontent H2H</a:t>
                       </a:r>
                     </a:p>
                   </a:txBody>
@@ -10521,24 +11280,36 @@
                         <a:schemeClr val="tx1"/>
                       </a:solidFill>
                       <a:prstDash val="solid"/>
+                      <a:round/>
+                      <a:headEnd type="none" w="med" len="med"/>
+                      <a:tailEnd type="none" w="med" len="med"/>
                     </a:lnL>
                     <a:lnR w="12700" cap="flat" cmpd="sng" algn="ctr">
                       <a:solidFill>
                         <a:schemeClr val="tx1"/>
                       </a:solidFill>
                       <a:prstDash val="solid"/>
+                      <a:round/>
+                      <a:headEnd type="none" w="med" len="med"/>
+                      <a:tailEnd type="none" w="med" len="med"/>
                     </a:lnR>
                     <a:lnT w="12700" cap="flat" cmpd="sng" algn="ctr">
                       <a:solidFill>
                         <a:schemeClr val="tx1"/>
                       </a:solidFill>
                       <a:prstDash val="solid"/>
+                      <a:round/>
+                      <a:headEnd type="none" w="med" len="med"/>
+                      <a:tailEnd type="none" w="med" len="med"/>
                     </a:lnT>
                     <a:lnB w="12700" cap="flat" cmpd="sng" algn="ctr">
                       <a:solidFill>
                         <a:schemeClr val="tx1"/>
                       </a:solidFill>
                       <a:prstDash val="solid"/>
+                      <a:round/>
+                      <a:headEnd type="none" w="med" len="med"/>
+                      <a:tailEnd type="none" w="med" len="med"/>
                     </a:lnB>
                     <a:noFill/>
                   </a:tcPr>
@@ -10548,18 +11319,19 @@
                     <a:bodyPr/>
                     <a:lstStyle/>
                     <a:p>
-                      <a:pPr marL="0" algn="l" defTabSz="457200" rtl="0" eaLnBrk="1" fontAlgn="b" latinLnBrk="0" hangingPunct="1">
+                      <a:pPr marL="0" indent="0" algn="l" fontAlgn="b">
+                        <a:buFont typeface="Arial" panose="020B0604020202020204" pitchFamily="34" charset="0"/>
                         <a:buNone/>
                       </a:pPr>
                       <a:r>
-                        <a:rPr lang="es-MX" sz="1000" u="none" strike="noStrike" kern="1200">
+                        <a:rPr lang="es-MX" sz="1100" b="0" i="0" u="none" strike="noStrike" dirty="0">
                           <a:solidFill>
                             <a:schemeClr val="tx1"/>
                           </a:solidFill>
                           <a:effectLst/>
                           <a:latin typeface="Aptos (cuerpo)"/>
                         </a:rPr>
-                        <a:t>asasfagdgdsgg</a:t>
+                        <a:t>Pendiente Autorización de Dirección de Finanzas</a:t>
                       </a:r>
                     </a:p>
                   </a:txBody>
@@ -10569,28 +11341,45 @@
                         <a:schemeClr val="tx1"/>
                       </a:solidFill>
                       <a:prstDash val="solid"/>
+                      <a:round/>
+                      <a:headEnd type="none" w="med" len="med"/>
+                      <a:tailEnd type="none" w="med" len="med"/>
                     </a:lnL>
                     <a:lnR w="12700" cap="flat" cmpd="sng" algn="ctr">
                       <a:solidFill>
                         <a:schemeClr val="tx1"/>
                       </a:solidFill>
                       <a:prstDash val="solid"/>
+                      <a:round/>
+                      <a:headEnd type="none" w="med" len="med"/>
+                      <a:tailEnd type="none" w="med" len="med"/>
                     </a:lnR>
                     <a:lnT w="12700" cap="flat" cmpd="sng" algn="ctr">
                       <a:solidFill>
                         <a:schemeClr val="tx1"/>
                       </a:solidFill>
                       <a:prstDash val="solid"/>
+                      <a:round/>
+                      <a:headEnd type="none" w="med" len="med"/>
+                      <a:tailEnd type="none" w="med" len="med"/>
                     </a:lnT>
                     <a:lnB w="12700" cap="flat" cmpd="sng" algn="ctr">
                       <a:solidFill>
                         <a:schemeClr val="tx1"/>
                       </a:solidFill>
                       <a:prstDash val="solid"/>
+                      <a:round/>
+                      <a:headEnd type="none" w="med" len="med"/>
+                      <a:tailEnd type="none" w="med" len="med"/>
                     </a:lnB>
                     <a:noFill/>
                   </a:tcPr>
                 </a:tc>
+                <a:extLst>
+                  <a:ext uri="{0D108BD9-81ED-4DB2-BD59-A6C34878D82A}">
+                    <a16:rowId xmlns:a16="http://schemas.microsoft.com/office/drawing/2014/main" val="2497780819"/>
+                  </a:ext>
+                </a:extLst>
               </a:tr>
             </a:tbl>
           </a:graphicData>

--- a/cierre_base.pptx
+++ b/cierre_base.pptx
@@ -6636,28 +6636,14 @@
                           </a:solidFill>
                           <a:latin typeface="Calibri"/>
                         </a:rPr>
-                        <a:t>82%</a:t>
-                      </a:r>
-                    </a:p>
-                  </a:txBody>
-                  <a:tcPr>
-                    <a:gradFill>
-                      <a:gsLst>
-                        <a:gs pos="0">
-                          <a:srgbClr val="EF4444"/>
-                        </a:gs>
-                        <a:gs pos="82000">
-                          <a:srgbClr val="EF4444"/>
-                        </a:gs>
-                        <a:gs pos="82500">
-                          <a:srgbClr val="E2E2E2"/>
-                        </a:gs>
-                        <a:gs pos="100000">
-                          <a:srgbClr val="E2E2E2"/>
-                        </a:gs>
-                      </a:gsLst>
-                      <a:lin ang="0" scaled="0"/>
-                    </a:gradFill>
+                        <a:t/>
+                      </a:r>
+                    </a:p>
+                  </a:txBody>
+                  <a:tcPr>
+                    <a:solidFill>
+                      <a:srgbClr val="F5F7FA"/>
+                    </a:solidFill>
                   </a:tcPr>
                 </a:tc>
                 <a:tc>
@@ -6836,13 +6822,13 @@
                           </a:solidFill>
                           <a:latin typeface="Calibri"/>
                         </a:rPr>
-                        <a:t>100%</a:t>
-                      </a:r>
-                    </a:p>
-                  </a:txBody>
-                  <a:tcPr>
-                    <a:solidFill>
-                      <a:srgbClr val="22C55E"/>
+                        <a:t/>
+                      </a:r>
+                    </a:p>
+                  </a:txBody>
+                  <a:tcPr>
+                    <a:solidFill>
+                      <a:srgbClr val="FFFFFF"/>
                     </a:solidFill>
                   </a:tcPr>
                 </a:tc>
@@ -7022,13 +7008,13 @@
                           </a:solidFill>
                           <a:latin typeface="Calibri"/>
                         </a:rPr>
-                        <a:t>100%</a:t>
-                      </a:r>
-                    </a:p>
-                  </a:txBody>
-                  <a:tcPr>
-                    <a:solidFill>
-                      <a:srgbClr val="22C55E"/>
+                        <a:t/>
+                      </a:r>
+                    </a:p>
+                  </a:txBody>
+                  <a:tcPr>
+                    <a:solidFill>
+                      <a:srgbClr val="F5F7FA"/>
                     </a:solidFill>
                   </a:tcPr>
                 </a:tc>
@@ -7208,13 +7194,13 @@
                           </a:solidFill>
                           <a:latin typeface="Calibri"/>
                         </a:rPr>
-                        <a:t>100%</a:t>
-                      </a:r>
-                    </a:p>
-                  </a:txBody>
-                  <a:tcPr>
-                    <a:solidFill>
-                      <a:srgbClr val="22C55E"/>
+                        <a:t/>
+                      </a:r>
+                    </a:p>
+                  </a:txBody>
+                  <a:tcPr>
+                    <a:solidFill>
+                      <a:srgbClr val="FFFFFF"/>
                     </a:solidFill>
                   </a:tcPr>
                 </a:tc>
@@ -7394,28 +7380,14 @@
                           </a:solidFill>
                           <a:latin typeface="Calibri"/>
                         </a:rPr>
-                        <a:t>97%</a:t>
-                      </a:r>
-                    </a:p>
-                  </a:txBody>
-                  <a:tcPr>
-                    <a:gradFill>
-                      <a:gsLst>
-                        <a:gs pos="0">
-                          <a:srgbClr val="22C55E"/>
-                        </a:gs>
-                        <a:gs pos="97000">
-                          <a:srgbClr val="22C55E"/>
-                        </a:gs>
-                        <a:gs pos="97500">
-                          <a:srgbClr val="E2E2E2"/>
-                        </a:gs>
-                        <a:gs pos="100000">
-                          <a:srgbClr val="E2E2E2"/>
-                        </a:gs>
-                      </a:gsLst>
-                      <a:lin ang="0" scaled="0"/>
-                    </a:gradFill>
+                        <a:t/>
+                      </a:r>
+                    </a:p>
+                  </a:txBody>
+                  <a:tcPr>
+                    <a:solidFill>
+                      <a:srgbClr val="F5F7FA"/>
+                    </a:solidFill>
                   </a:tcPr>
                 </a:tc>
                 <a:tc>
@@ -7594,28 +7566,14 @@
                           </a:solidFill>
                           <a:latin typeface="Calibri"/>
                         </a:rPr>
-                        <a:t>95%</a:t>
-                      </a:r>
-                    </a:p>
-                  </a:txBody>
-                  <a:tcPr>
-                    <a:gradFill>
-                      <a:gsLst>
-                        <a:gs pos="0">
-                          <a:srgbClr val="EF4444"/>
-                        </a:gs>
-                        <a:gs pos="95000">
-                          <a:srgbClr val="EF4444"/>
-                        </a:gs>
-                        <a:gs pos="95500">
-                          <a:srgbClr val="E2E2E2"/>
-                        </a:gs>
-                        <a:gs pos="100000">
-                          <a:srgbClr val="E2E2E2"/>
-                        </a:gs>
-                      </a:gsLst>
-                      <a:lin ang="0" scaled="0"/>
-                    </a:gradFill>
+                        <a:t/>
+                      </a:r>
+                    </a:p>
+                  </a:txBody>
+                  <a:tcPr>
+                    <a:solidFill>
+                      <a:srgbClr val="FFFFFF"/>
+                    </a:solidFill>
                   </a:tcPr>
                 </a:tc>
                 <a:tc>
@@ -7794,13 +7752,13 @@
                           </a:solidFill>
                           <a:latin typeface="Calibri"/>
                         </a:rPr>
-                        <a:t>100%</a:t>
-                      </a:r>
-                    </a:p>
-                  </a:txBody>
-                  <a:tcPr>
-                    <a:solidFill>
-                      <a:srgbClr val="22C55E"/>
+                        <a:t/>
+                      </a:r>
+                    </a:p>
+                  </a:txBody>
+                  <a:tcPr>
+                    <a:solidFill>
+                      <a:srgbClr val="F5F7FA"/>
                     </a:solidFill>
                   </a:tcPr>
                 </a:tc>
@@ -7980,13 +7938,13 @@
                           </a:solidFill>
                           <a:latin typeface="Calibri"/>
                         </a:rPr>
-                        <a:t>100%</a:t>
-                      </a:r>
-                    </a:p>
-                  </a:txBody>
-                  <a:tcPr>
-                    <a:solidFill>
-                      <a:srgbClr val="22C55E"/>
+                        <a:t/>
+                      </a:r>
+                    </a:p>
+                  </a:txBody>
+                  <a:tcPr>
+                    <a:solidFill>
+                      <a:srgbClr val="FFFFFF"/>
                     </a:solidFill>
                   </a:tcPr>
                 </a:tc>
@@ -8166,13 +8124,13 @@
                           </a:solidFill>
                           <a:latin typeface="Calibri"/>
                         </a:rPr>
-                        <a:t>100%</a:t>
-                      </a:r>
-                    </a:p>
-                  </a:txBody>
-                  <a:tcPr>
-                    <a:solidFill>
-                      <a:srgbClr val="22C55E"/>
+                        <a:t/>
+                      </a:r>
+                    </a:p>
+                  </a:txBody>
+                  <a:tcPr>
+                    <a:solidFill>
+                      <a:srgbClr val="F5F7FA"/>
                     </a:solidFill>
                   </a:tcPr>
                 </a:tc>
@@ -8352,13 +8310,13 @@
                           </a:solidFill>
                           <a:latin typeface="Calibri"/>
                         </a:rPr>
-                        <a:t>100%</a:t>
-                      </a:r>
-                    </a:p>
-                  </a:txBody>
-                  <a:tcPr>
-                    <a:solidFill>
-                      <a:srgbClr val="22C55E"/>
+                        <a:t/>
+                      </a:r>
+                    </a:p>
+                  </a:txBody>
+                  <a:tcPr>
+                    <a:solidFill>
+                      <a:srgbClr val="FFFFFF"/>
                     </a:solidFill>
                   </a:tcPr>
                 </a:tc>
@@ -8538,13 +8496,13 @@
                           </a:solidFill>
                           <a:latin typeface="Calibri"/>
                         </a:rPr>
-                        <a:t>100%</a:t>
-                      </a:r>
-                    </a:p>
-                  </a:txBody>
-                  <a:tcPr>
-                    <a:solidFill>
-                      <a:srgbClr val="22C55E"/>
+                        <a:t/>
+                      </a:r>
+                    </a:p>
+                  </a:txBody>
+                  <a:tcPr>
+                    <a:solidFill>
+                      <a:srgbClr val="F5F7FA"/>
                     </a:solidFill>
                   </a:tcPr>
                 </a:tc>
@@ -8724,13 +8682,13 @@
                           </a:solidFill>
                           <a:latin typeface="Calibri"/>
                         </a:rPr>
-                        <a:t>100%</a:t>
-                      </a:r>
-                    </a:p>
-                  </a:txBody>
-                  <a:tcPr>
-                    <a:solidFill>
-                      <a:srgbClr val="22C55E"/>
+                        <a:t/>
+                      </a:r>
+                    </a:p>
+                  </a:txBody>
+                  <a:tcPr>
+                    <a:solidFill>
+                      <a:srgbClr val="FFFFFF"/>
                     </a:solidFill>
                   </a:tcPr>
                 </a:tc>
@@ -8910,28 +8868,14 @@
                           </a:solidFill>
                           <a:latin typeface="Calibri"/>
                         </a:rPr>
-                        <a:t>22%</a:t>
-                      </a:r>
-                    </a:p>
-                  </a:txBody>
-                  <a:tcPr>
-                    <a:gradFill>
-                      <a:gsLst>
-                        <a:gs pos="0">
-                          <a:srgbClr val="EF4444"/>
-                        </a:gs>
-                        <a:gs pos="22000">
-                          <a:srgbClr val="EF4444"/>
-                        </a:gs>
-                        <a:gs pos="22500">
-                          <a:srgbClr val="E2E2E2"/>
-                        </a:gs>
-                        <a:gs pos="100000">
-                          <a:srgbClr val="E2E2E2"/>
-                        </a:gs>
-                      </a:gsLst>
-                      <a:lin ang="0" scaled="0"/>
-                    </a:gradFill>
+                        <a:t/>
+                      </a:r>
+                    </a:p>
+                  </a:txBody>
+                  <a:tcPr>
+                    <a:solidFill>
+                      <a:srgbClr val="F5F7FA"/>
+                    </a:solidFill>
                   </a:tcPr>
                 </a:tc>
                 <a:tc>
@@ -9110,28 +9054,14 @@
                           </a:solidFill>
                           <a:latin typeface="Calibri"/>
                         </a:rPr>
-                        <a:t>80%</a:t>
-                      </a:r>
-                    </a:p>
-                  </a:txBody>
-                  <a:tcPr>
-                    <a:gradFill>
-                      <a:gsLst>
-                        <a:gs pos="0">
-                          <a:srgbClr val="F59E0B"/>
-                        </a:gs>
-                        <a:gs pos="80000">
-                          <a:srgbClr val="F59E0B"/>
-                        </a:gs>
-                        <a:gs pos="80500">
-                          <a:srgbClr val="E2E2E2"/>
-                        </a:gs>
-                        <a:gs pos="100000">
-                          <a:srgbClr val="E2E2E2"/>
-                        </a:gs>
-                      </a:gsLst>
-                      <a:lin ang="0" scaled="0"/>
-                    </a:gradFill>
+                        <a:t/>
+                      </a:r>
+                    </a:p>
+                  </a:txBody>
+                  <a:tcPr>
+                    <a:solidFill>
+                      <a:srgbClr val="FFFFFF"/>
+                    </a:solidFill>
                   </a:tcPr>
                 </a:tc>
                 <a:tc>
@@ -9310,28 +9240,14 @@
                           </a:solidFill>
                           <a:latin typeface="Calibri"/>
                         </a:rPr>
-                        <a:t>99%</a:t>
-                      </a:r>
-                    </a:p>
-                  </a:txBody>
-                  <a:tcPr>
-                    <a:gradFill>
-                      <a:gsLst>
-                        <a:gs pos="0">
-                          <a:srgbClr val="EF4444"/>
-                        </a:gs>
-                        <a:gs pos="99000">
-                          <a:srgbClr val="EF4444"/>
-                        </a:gs>
-                        <a:gs pos="99500">
-                          <a:srgbClr val="E2E2E2"/>
-                        </a:gs>
-                        <a:gs pos="100000">
-                          <a:srgbClr val="E2E2E2"/>
-                        </a:gs>
-                      </a:gsLst>
-                      <a:lin ang="0" scaled="0"/>
-                    </a:gradFill>
+                        <a:t/>
+                      </a:r>
+                    </a:p>
+                  </a:txBody>
+                  <a:tcPr>
+                    <a:solidFill>
+                      <a:srgbClr val="F5F7FA"/>
+                    </a:solidFill>
                   </a:tcPr>
                 </a:tc>
                 <a:tc>
@@ -9510,28 +9426,14 @@
                           </a:solidFill>
                           <a:latin typeface="Calibri"/>
                         </a:rPr>
-                        <a:t>31%</a:t>
-                      </a:r>
-                    </a:p>
-                  </a:txBody>
-                  <a:tcPr>
-                    <a:gradFill>
-                      <a:gsLst>
-                        <a:gs pos="0">
-                          <a:srgbClr val="22C55E"/>
-                        </a:gs>
-                        <a:gs pos="31000">
-                          <a:srgbClr val="22C55E"/>
-                        </a:gs>
-                        <a:gs pos="31500">
-                          <a:srgbClr val="E2E2E2"/>
-                        </a:gs>
-                        <a:gs pos="100000">
-                          <a:srgbClr val="E2E2E2"/>
-                        </a:gs>
-                      </a:gsLst>
-                      <a:lin ang="0" scaled="0"/>
-                    </a:gradFill>
+                        <a:t/>
+                      </a:r>
+                    </a:p>
+                  </a:txBody>
+                  <a:tcPr>
+                    <a:solidFill>
+                      <a:srgbClr val="FFFFFF"/>
+                    </a:solidFill>
                   </a:tcPr>
                 </a:tc>
                 <a:tc>
@@ -9710,28 +9612,14 @@
                           </a:solidFill>
                           <a:latin typeface="Calibri"/>
                         </a:rPr>
-                        <a:t>74%</a:t>
-                      </a:r>
-                    </a:p>
-                  </a:txBody>
-                  <a:tcPr>
-                    <a:gradFill>
-                      <a:gsLst>
-                        <a:gs pos="0">
-                          <a:srgbClr val="22C55E"/>
-                        </a:gs>
-                        <a:gs pos="74000">
-                          <a:srgbClr val="22C55E"/>
-                        </a:gs>
-                        <a:gs pos="74500">
-                          <a:srgbClr val="E2E2E2"/>
-                        </a:gs>
-                        <a:gs pos="100000">
-                          <a:srgbClr val="E2E2E2"/>
-                        </a:gs>
-                      </a:gsLst>
-                      <a:lin ang="0" scaled="0"/>
-                    </a:gradFill>
+                        <a:t/>
+                      </a:r>
+                    </a:p>
+                  </a:txBody>
+                  <a:tcPr>
+                    <a:solidFill>
+                      <a:srgbClr val="F5F7FA"/>
+                    </a:solidFill>
                   </a:tcPr>
                 </a:tc>
                 <a:tc>
@@ -9910,28 +9798,14 @@
                           </a:solidFill>
                           <a:latin typeface="Calibri"/>
                         </a:rPr>
-                        <a:t>4%</a:t>
-                      </a:r>
-                    </a:p>
-                  </a:txBody>
-                  <a:tcPr>
-                    <a:gradFill>
-                      <a:gsLst>
-                        <a:gs pos="0">
-                          <a:srgbClr val="F59E0B"/>
-                        </a:gs>
-                        <a:gs pos="4000">
-                          <a:srgbClr val="F59E0B"/>
-                        </a:gs>
-                        <a:gs pos="4500">
-                          <a:srgbClr val="E2E2E2"/>
-                        </a:gs>
-                        <a:gs pos="100000">
-                          <a:srgbClr val="E2E2E2"/>
-                        </a:gs>
-                      </a:gsLst>
-                      <a:lin ang="0" scaled="0"/>
-                    </a:gradFill>
+                        <a:t/>
+                      </a:r>
+                    </a:p>
+                  </a:txBody>
+                  <a:tcPr>
+                    <a:solidFill>
+                      <a:srgbClr val="FFFFFF"/>
+                    </a:solidFill>
                   </a:tcPr>
                 </a:tc>
                 <a:tc>
@@ -9962,6 +9836,2490 @@
           </a:graphicData>
         </a:graphic>
       </p:graphicFrame>
+      <p:sp>
+        <p:nvSpPr>
+          <p:cNvPr id="27" name="Rounded Rectangle 26"/>
+          <p:cNvSpPr/>
+          <p:nvPr/>
+        </p:nvSpPr>
+        <p:spPr>
+          <a:xfrm>
+            <a:off x="5806440" y="1434122"/>
+            <a:ext cx="1691640" cy="108127"/>
+          </a:xfrm>
+          <a:prstGeom prst="roundRect">
+            <a:avLst>
+              <a:gd name="adj" fmla="val 50000"/>
+            </a:avLst>
+          </a:prstGeom>
+          <a:pattFill prst="smGrid">
+            <a:fgClr>
+              <a:srgbClr val="EF4444"/>
+            </a:fgClr>
+            <a:bgClr>
+              <a:srgbClr val="FFFFFF"/>
+            </a:bgClr>
+          </a:pattFill>
+          <a:ln>
+            <a:noFill/>
+          </a:ln>
+          <a:effectLst/>
+        </p:spPr>
+        <p:style>
+          <a:lnRef idx="1">
+            <a:schemeClr val="accent1"/>
+          </a:lnRef>
+          <a:fillRef idx="3">
+            <a:schemeClr val="accent1"/>
+          </a:fillRef>
+          <a:effectRef idx="2">
+            <a:schemeClr val="accent1"/>
+          </a:effectRef>
+          <a:fontRef idx="minor">
+            <a:schemeClr val="lt1"/>
+          </a:fontRef>
+        </p:style>
+        <p:txBody>
+          <a:bodyPr rtlCol="0" anchor="ctr"/>
+          <a:lstStyle/>
+          <a:p>
+            <a:pPr algn="ctr"/>
+          </a:p>
+        </p:txBody>
+      </p:sp>
+      <p:sp>
+        <p:nvSpPr>
+          <p:cNvPr id="28" name="Rounded Rectangle 27"/>
+          <p:cNvSpPr/>
+          <p:nvPr/>
+        </p:nvSpPr>
+        <p:spPr>
+          <a:xfrm>
+            <a:off x="5806440" y="1434122"/>
+            <a:ext cx="1387144" cy="108127"/>
+          </a:xfrm>
+          <a:prstGeom prst="roundRect">
+            <a:avLst>
+              <a:gd name="adj" fmla="val 50000"/>
+            </a:avLst>
+          </a:prstGeom>
+          <a:solidFill>
+            <a:srgbClr val="EF4444"/>
+          </a:solidFill>
+          <a:ln>
+            <a:noFill/>
+          </a:ln>
+          <a:effectLst>
+            <a:outerShdw blurRad="76200" dist="19050" dir="5400000" rotWithShape="0">
+              <a:srgbClr val="EF4444">
+                <a:alpha val="55000"/>
+              </a:srgbClr>
+            </a:outerShdw>
+          </a:effectLst>
+        </p:spPr>
+        <p:style>
+          <a:lnRef idx="1">
+            <a:schemeClr val="accent1"/>
+          </a:lnRef>
+          <a:fillRef idx="3">
+            <a:schemeClr val="accent1"/>
+          </a:fillRef>
+          <a:effectRef idx="2">
+            <a:schemeClr val="accent1"/>
+          </a:effectRef>
+          <a:fontRef idx="minor">
+            <a:schemeClr val="lt1"/>
+          </a:fontRef>
+        </p:style>
+        <p:txBody>
+          <a:bodyPr rtlCol="0" anchor="ctr"/>
+          <a:lstStyle/>
+          <a:p>
+            <a:pPr algn="ctr"/>
+          </a:p>
+        </p:txBody>
+      </p:sp>
+      <p:sp>
+        <p:nvSpPr>
+          <p:cNvPr id="29" name="TextBox 28"/>
+          <p:cNvSpPr txBox="1"/>
+          <p:nvPr/>
+        </p:nvSpPr>
+        <p:spPr>
+          <a:xfrm>
+            <a:off x="7543800" y="1402118"/>
+            <a:ext cx="457200" cy="172135"/>
+          </a:xfrm>
+          <a:prstGeom prst="rect">
+            <a:avLst/>
+          </a:prstGeom>
+          <a:noFill/>
+        </p:spPr>
+        <p:txBody>
+          <a:bodyPr wrap="none" lIns="0" rIns="0" tIns="0" bIns="0">
+            <a:spAutoFit/>
+          </a:bodyPr>
+          <a:lstStyle/>
+          <a:p>
+            <a:pPr algn="l"/>
+            <a:r>
+              <a:rPr sz="800" b="1">
+                <a:solidFill>
+                  <a:srgbClr val="EF4444"/>
+                </a:solidFill>
+                <a:latin typeface="Calibri"/>
+              </a:rPr>
+              <a:t>82%</a:t>
+            </a:r>
+          </a:p>
+        </p:txBody>
+      </p:sp>
+      <p:sp>
+        <p:nvSpPr>
+          <p:cNvPr id="30" name="Rounded Rectangle 29"/>
+          <p:cNvSpPr/>
+          <p:nvPr/>
+        </p:nvSpPr>
+        <p:spPr>
+          <a:xfrm>
+            <a:off x="5806440" y="1630718"/>
+            <a:ext cx="1691640" cy="108127"/>
+          </a:xfrm>
+          <a:prstGeom prst="roundRect">
+            <a:avLst>
+              <a:gd name="adj" fmla="val 50000"/>
+            </a:avLst>
+          </a:prstGeom>
+          <a:pattFill prst="smGrid">
+            <a:fgClr>
+              <a:srgbClr val="22C55E"/>
+            </a:fgClr>
+            <a:bgClr>
+              <a:srgbClr val="FFFFFF"/>
+            </a:bgClr>
+          </a:pattFill>
+          <a:ln>
+            <a:noFill/>
+          </a:ln>
+          <a:effectLst/>
+        </p:spPr>
+        <p:style>
+          <a:lnRef idx="1">
+            <a:schemeClr val="accent1"/>
+          </a:lnRef>
+          <a:fillRef idx="3">
+            <a:schemeClr val="accent1"/>
+          </a:fillRef>
+          <a:effectRef idx="2">
+            <a:schemeClr val="accent1"/>
+          </a:effectRef>
+          <a:fontRef idx="minor">
+            <a:schemeClr val="lt1"/>
+          </a:fontRef>
+        </p:style>
+        <p:txBody>
+          <a:bodyPr rtlCol="0" anchor="ctr"/>
+          <a:lstStyle/>
+          <a:p>
+            <a:pPr algn="ctr"/>
+          </a:p>
+        </p:txBody>
+      </p:sp>
+      <p:sp>
+        <p:nvSpPr>
+          <p:cNvPr id="31" name="Rounded Rectangle 30"/>
+          <p:cNvSpPr/>
+          <p:nvPr/>
+        </p:nvSpPr>
+        <p:spPr>
+          <a:xfrm>
+            <a:off x="5806440" y="1630718"/>
+            <a:ext cx="1691640" cy="108127"/>
+          </a:xfrm>
+          <a:prstGeom prst="roundRect">
+            <a:avLst>
+              <a:gd name="adj" fmla="val 50000"/>
+            </a:avLst>
+          </a:prstGeom>
+          <a:solidFill>
+            <a:srgbClr val="22C55E"/>
+          </a:solidFill>
+          <a:ln>
+            <a:noFill/>
+          </a:ln>
+          <a:effectLst>
+            <a:outerShdw blurRad="76200" dist="19050" dir="5400000" rotWithShape="0">
+              <a:srgbClr val="22C55E">
+                <a:alpha val="55000"/>
+              </a:srgbClr>
+            </a:outerShdw>
+          </a:effectLst>
+        </p:spPr>
+        <p:style>
+          <a:lnRef idx="1">
+            <a:schemeClr val="accent1"/>
+          </a:lnRef>
+          <a:fillRef idx="3">
+            <a:schemeClr val="accent1"/>
+          </a:fillRef>
+          <a:effectRef idx="2">
+            <a:schemeClr val="accent1"/>
+          </a:effectRef>
+          <a:fontRef idx="minor">
+            <a:schemeClr val="lt1"/>
+          </a:fontRef>
+        </p:style>
+        <p:txBody>
+          <a:bodyPr rtlCol="0" anchor="ctr"/>
+          <a:lstStyle/>
+          <a:p>
+            <a:pPr algn="ctr"/>
+          </a:p>
+        </p:txBody>
+      </p:sp>
+      <p:sp>
+        <p:nvSpPr>
+          <p:cNvPr id="32" name="TextBox 31"/>
+          <p:cNvSpPr txBox="1"/>
+          <p:nvPr/>
+        </p:nvSpPr>
+        <p:spPr>
+          <a:xfrm>
+            <a:off x="7543800" y="1598714"/>
+            <a:ext cx="457200" cy="172135"/>
+          </a:xfrm>
+          <a:prstGeom prst="rect">
+            <a:avLst/>
+          </a:prstGeom>
+          <a:noFill/>
+        </p:spPr>
+        <p:txBody>
+          <a:bodyPr wrap="none" lIns="0" rIns="0" tIns="0" bIns="0">
+            <a:spAutoFit/>
+          </a:bodyPr>
+          <a:lstStyle/>
+          <a:p>
+            <a:pPr algn="l"/>
+            <a:r>
+              <a:rPr sz="800" b="1">
+                <a:solidFill>
+                  <a:srgbClr val="22C55E"/>
+                </a:solidFill>
+                <a:latin typeface="Calibri"/>
+              </a:rPr>
+              <a:t>100%</a:t>
+            </a:r>
+          </a:p>
+        </p:txBody>
+      </p:sp>
+      <p:sp>
+        <p:nvSpPr>
+          <p:cNvPr id="33" name="Rounded Rectangle 32"/>
+          <p:cNvSpPr/>
+          <p:nvPr/>
+        </p:nvSpPr>
+        <p:spPr>
+          <a:xfrm>
+            <a:off x="5806440" y="1827314"/>
+            <a:ext cx="1691640" cy="108127"/>
+          </a:xfrm>
+          <a:prstGeom prst="roundRect">
+            <a:avLst>
+              <a:gd name="adj" fmla="val 50000"/>
+            </a:avLst>
+          </a:prstGeom>
+          <a:pattFill prst="smGrid">
+            <a:fgClr>
+              <a:srgbClr val="22C55E"/>
+            </a:fgClr>
+            <a:bgClr>
+              <a:srgbClr val="FFFFFF"/>
+            </a:bgClr>
+          </a:pattFill>
+          <a:ln>
+            <a:noFill/>
+          </a:ln>
+          <a:effectLst/>
+        </p:spPr>
+        <p:style>
+          <a:lnRef idx="1">
+            <a:schemeClr val="accent1"/>
+          </a:lnRef>
+          <a:fillRef idx="3">
+            <a:schemeClr val="accent1"/>
+          </a:fillRef>
+          <a:effectRef idx="2">
+            <a:schemeClr val="accent1"/>
+          </a:effectRef>
+          <a:fontRef idx="minor">
+            <a:schemeClr val="lt1"/>
+          </a:fontRef>
+        </p:style>
+        <p:txBody>
+          <a:bodyPr rtlCol="0" anchor="ctr"/>
+          <a:lstStyle/>
+          <a:p>
+            <a:pPr algn="ctr"/>
+          </a:p>
+        </p:txBody>
+      </p:sp>
+      <p:sp>
+        <p:nvSpPr>
+          <p:cNvPr id="34" name="Rounded Rectangle 33"/>
+          <p:cNvSpPr/>
+          <p:nvPr/>
+        </p:nvSpPr>
+        <p:spPr>
+          <a:xfrm>
+            <a:off x="5806440" y="1827314"/>
+            <a:ext cx="1691640" cy="108127"/>
+          </a:xfrm>
+          <a:prstGeom prst="roundRect">
+            <a:avLst>
+              <a:gd name="adj" fmla="val 50000"/>
+            </a:avLst>
+          </a:prstGeom>
+          <a:solidFill>
+            <a:srgbClr val="22C55E"/>
+          </a:solidFill>
+          <a:ln>
+            <a:noFill/>
+          </a:ln>
+          <a:effectLst>
+            <a:outerShdw blurRad="76200" dist="19050" dir="5400000" rotWithShape="0">
+              <a:srgbClr val="22C55E">
+                <a:alpha val="55000"/>
+              </a:srgbClr>
+            </a:outerShdw>
+          </a:effectLst>
+        </p:spPr>
+        <p:style>
+          <a:lnRef idx="1">
+            <a:schemeClr val="accent1"/>
+          </a:lnRef>
+          <a:fillRef idx="3">
+            <a:schemeClr val="accent1"/>
+          </a:fillRef>
+          <a:effectRef idx="2">
+            <a:schemeClr val="accent1"/>
+          </a:effectRef>
+          <a:fontRef idx="minor">
+            <a:schemeClr val="lt1"/>
+          </a:fontRef>
+        </p:style>
+        <p:txBody>
+          <a:bodyPr rtlCol="0" anchor="ctr"/>
+          <a:lstStyle/>
+          <a:p>
+            <a:pPr algn="ctr"/>
+          </a:p>
+        </p:txBody>
+      </p:sp>
+      <p:sp>
+        <p:nvSpPr>
+          <p:cNvPr id="35" name="TextBox 34"/>
+          <p:cNvSpPr txBox="1"/>
+          <p:nvPr/>
+        </p:nvSpPr>
+        <p:spPr>
+          <a:xfrm>
+            <a:off x="7543800" y="1795310"/>
+            <a:ext cx="457200" cy="172135"/>
+          </a:xfrm>
+          <a:prstGeom prst="rect">
+            <a:avLst/>
+          </a:prstGeom>
+          <a:noFill/>
+        </p:spPr>
+        <p:txBody>
+          <a:bodyPr wrap="none" lIns="0" rIns="0" tIns="0" bIns="0">
+            <a:spAutoFit/>
+          </a:bodyPr>
+          <a:lstStyle/>
+          <a:p>
+            <a:pPr algn="l"/>
+            <a:r>
+              <a:rPr sz="800" b="1">
+                <a:solidFill>
+                  <a:srgbClr val="22C55E"/>
+                </a:solidFill>
+                <a:latin typeface="Calibri"/>
+              </a:rPr>
+              <a:t>100%</a:t>
+            </a:r>
+          </a:p>
+        </p:txBody>
+      </p:sp>
+      <p:sp>
+        <p:nvSpPr>
+          <p:cNvPr id="36" name="Rounded Rectangle 35"/>
+          <p:cNvSpPr/>
+          <p:nvPr/>
+        </p:nvSpPr>
+        <p:spPr>
+          <a:xfrm>
+            <a:off x="5806440" y="2023910"/>
+            <a:ext cx="1691640" cy="108127"/>
+          </a:xfrm>
+          <a:prstGeom prst="roundRect">
+            <a:avLst>
+              <a:gd name="adj" fmla="val 50000"/>
+            </a:avLst>
+          </a:prstGeom>
+          <a:pattFill prst="smGrid">
+            <a:fgClr>
+              <a:srgbClr val="22C55E"/>
+            </a:fgClr>
+            <a:bgClr>
+              <a:srgbClr val="FFFFFF"/>
+            </a:bgClr>
+          </a:pattFill>
+          <a:ln>
+            <a:noFill/>
+          </a:ln>
+          <a:effectLst/>
+        </p:spPr>
+        <p:style>
+          <a:lnRef idx="1">
+            <a:schemeClr val="accent1"/>
+          </a:lnRef>
+          <a:fillRef idx="3">
+            <a:schemeClr val="accent1"/>
+          </a:fillRef>
+          <a:effectRef idx="2">
+            <a:schemeClr val="accent1"/>
+          </a:effectRef>
+          <a:fontRef idx="minor">
+            <a:schemeClr val="lt1"/>
+          </a:fontRef>
+        </p:style>
+        <p:txBody>
+          <a:bodyPr rtlCol="0" anchor="ctr"/>
+          <a:lstStyle/>
+          <a:p>
+            <a:pPr algn="ctr"/>
+          </a:p>
+        </p:txBody>
+      </p:sp>
+      <p:sp>
+        <p:nvSpPr>
+          <p:cNvPr id="37" name="Rounded Rectangle 36"/>
+          <p:cNvSpPr/>
+          <p:nvPr/>
+        </p:nvSpPr>
+        <p:spPr>
+          <a:xfrm>
+            <a:off x="5806440" y="2023910"/>
+            <a:ext cx="1691640" cy="108127"/>
+          </a:xfrm>
+          <a:prstGeom prst="roundRect">
+            <a:avLst>
+              <a:gd name="adj" fmla="val 50000"/>
+            </a:avLst>
+          </a:prstGeom>
+          <a:solidFill>
+            <a:srgbClr val="22C55E"/>
+          </a:solidFill>
+          <a:ln>
+            <a:noFill/>
+          </a:ln>
+          <a:effectLst>
+            <a:outerShdw blurRad="76200" dist="19050" dir="5400000" rotWithShape="0">
+              <a:srgbClr val="22C55E">
+                <a:alpha val="55000"/>
+              </a:srgbClr>
+            </a:outerShdw>
+          </a:effectLst>
+        </p:spPr>
+        <p:style>
+          <a:lnRef idx="1">
+            <a:schemeClr val="accent1"/>
+          </a:lnRef>
+          <a:fillRef idx="3">
+            <a:schemeClr val="accent1"/>
+          </a:fillRef>
+          <a:effectRef idx="2">
+            <a:schemeClr val="accent1"/>
+          </a:effectRef>
+          <a:fontRef idx="minor">
+            <a:schemeClr val="lt1"/>
+          </a:fontRef>
+        </p:style>
+        <p:txBody>
+          <a:bodyPr rtlCol="0" anchor="ctr"/>
+          <a:lstStyle/>
+          <a:p>
+            <a:pPr algn="ctr"/>
+          </a:p>
+        </p:txBody>
+      </p:sp>
+      <p:sp>
+        <p:nvSpPr>
+          <p:cNvPr id="38" name="TextBox 37"/>
+          <p:cNvSpPr txBox="1"/>
+          <p:nvPr/>
+        </p:nvSpPr>
+        <p:spPr>
+          <a:xfrm>
+            <a:off x="7543800" y="1991906"/>
+            <a:ext cx="457200" cy="172135"/>
+          </a:xfrm>
+          <a:prstGeom prst="rect">
+            <a:avLst/>
+          </a:prstGeom>
+          <a:noFill/>
+        </p:spPr>
+        <p:txBody>
+          <a:bodyPr wrap="none" lIns="0" rIns="0" tIns="0" bIns="0">
+            <a:spAutoFit/>
+          </a:bodyPr>
+          <a:lstStyle/>
+          <a:p>
+            <a:pPr algn="l"/>
+            <a:r>
+              <a:rPr sz="800" b="1">
+                <a:solidFill>
+                  <a:srgbClr val="22C55E"/>
+                </a:solidFill>
+                <a:latin typeface="Calibri"/>
+              </a:rPr>
+              <a:t>100%</a:t>
+            </a:r>
+          </a:p>
+        </p:txBody>
+      </p:sp>
+      <p:sp>
+        <p:nvSpPr>
+          <p:cNvPr id="39" name="Rounded Rectangle 38"/>
+          <p:cNvSpPr/>
+          <p:nvPr/>
+        </p:nvSpPr>
+        <p:spPr>
+          <a:xfrm>
+            <a:off x="5806440" y="2220506"/>
+            <a:ext cx="1691640" cy="108127"/>
+          </a:xfrm>
+          <a:prstGeom prst="roundRect">
+            <a:avLst>
+              <a:gd name="adj" fmla="val 50000"/>
+            </a:avLst>
+          </a:prstGeom>
+          <a:pattFill prst="smGrid">
+            <a:fgClr>
+              <a:srgbClr val="22C55E"/>
+            </a:fgClr>
+            <a:bgClr>
+              <a:srgbClr val="FFFFFF"/>
+            </a:bgClr>
+          </a:pattFill>
+          <a:ln>
+            <a:noFill/>
+          </a:ln>
+          <a:effectLst/>
+        </p:spPr>
+        <p:style>
+          <a:lnRef idx="1">
+            <a:schemeClr val="accent1"/>
+          </a:lnRef>
+          <a:fillRef idx="3">
+            <a:schemeClr val="accent1"/>
+          </a:fillRef>
+          <a:effectRef idx="2">
+            <a:schemeClr val="accent1"/>
+          </a:effectRef>
+          <a:fontRef idx="minor">
+            <a:schemeClr val="lt1"/>
+          </a:fontRef>
+        </p:style>
+        <p:txBody>
+          <a:bodyPr rtlCol="0" anchor="ctr"/>
+          <a:lstStyle/>
+          <a:p>
+            <a:pPr algn="ctr"/>
+          </a:p>
+        </p:txBody>
+      </p:sp>
+      <p:sp>
+        <p:nvSpPr>
+          <p:cNvPr id="40" name="Rounded Rectangle 39"/>
+          <p:cNvSpPr/>
+          <p:nvPr/>
+        </p:nvSpPr>
+        <p:spPr>
+          <a:xfrm>
+            <a:off x="5806440" y="2220506"/>
+            <a:ext cx="1640890" cy="108127"/>
+          </a:xfrm>
+          <a:prstGeom prst="roundRect">
+            <a:avLst>
+              <a:gd name="adj" fmla="val 50000"/>
+            </a:avLst>
+          </a:prstGeom>
+          <a:solidFill>
+            <a:srgbClr val="22C55E"/>
+          </a:solidFill>
+          <a:ln>
+            <a:noFill/>
+          </a:ln>
+          <a:effectLst>
+            <a:outerShdw blurRad="76200" dist="19050" dir="5400000" rotWithShape="0">
+              <a:srgbClr val="22C55E">
+                <a:alpha val="55000"/>
+              </a:srgbClr>
+            </a:outerShdw>
+          </a:effectLst>
+        </p:spPr>
+        <p:style>
+          <a:lnRef idx="1">
+            <a:schemeClr val="accent1"/>
+          </a:lnRef>
+          <a:fillRef idx="3">
+            <a:schemeClr val="accent1"/>
+          </a:fillRef>
+          <a:effectRef idx="2">
+            <a:schemeClr val="accent1"/>
+          </a:effectRef>
+          <a:fontRef idx="minor">
+            <a:schemeClr val="lt1"/>
+          </a:fontRef>
+        </p:style>
+        <p:txBody>
+          <a:bodyPr rtlCol="0" anchor="ctr"/>
+          <a:lstStyle/>
+          <a:p>
+            <a:pPr algn="ctr"/>
+          </a:p>
+        </p:txBody>
+      </p:sp>
+      <p:sp>
+        <p:nvSpPr>
+          <p:cNvPr id="41" name="TextBox 40"/>
+          <p:cNvSpPr txBox="1"/>
+          <p:nvPr/>
+        </p:nvSpPr>
+        <p:spPr>
+          <a:xfrm>
+            <a:off x="7543800" y="2188502"/>
+            <a:ext cx="457200" cy="172135"/>
+          </a:xfrm>
+          <a:prstGeom prst="rect">
+            <a:avLst/>
+          </a:prstGeom>
+          <a:noFill/>
+        </p:spPr>
+        <p:txBody>
+          <a:bodyPr wrap="none" lIns="0" rIns="0" tIns="0" bIns="0">
+            <a:spAutoFit/>
+          </a:bodyPr>
+          <a:lstStyle/>
+          <a:p>
+            <a:pPr algn="l"/>
+            <a:r>
+              <a:rPr sz="800" b="1">
+                <a:solidFill>
+                  <a:srgbClr val="22C55E"/>
+                </a:solidFill>
+                <a:latin typeface="Calibri"/>
+              </a:rPr>
+              <a:t>97%</a:t>
+            </a:r>
+          </a:p>
+        </p:txBody>
+      </p:sp>
+      <p:sp>
+        <p:nvSpPr>
+          <p:cNvPr id="42" name="Rounded Rectangle 41"/>
+          <p:cNvSpPr/>
+          <p:nvPr/>
+        </p:nvSpPr>
+        <p:spPr>
+          <a:xfrm>
+            <a:off x="5806440" y="2417102"/>
+            <a:ext cx="1691640" cy="108127"/>
+          </a:xfrm>
+          <a:prstGeom prst="roundRect">
+            <a:avLst>
+              <a:gd name="adj" fmla="val 50000"/>
+            </a:avLst>
+          </a:prstGeom>
+          <a:pattFill prst="smGrid">
+            <a:fgClr>
+              <a:srgbClr val="EF4444"/>
+            </a:fgClr>
+            <a:bgClr>
+              <a:srgbClr val="FFFFFF"/>
+            </a:bgClr>
+          </a:pattFill>
+          <a:ln>
+            <a:noFill/>
+          </a:ln>
+          <a:effectLst/>
+        </p:spPr>
+        <p:style>
+          <a:lnRef idx="1">
+            <a:schemeClr val="accent1"/>
+          </a:lnRef>
+          <a:fillRef idx="3">
+            <a:schemeClr val="accent1"/>
+          </a:fillRef>
+          <a:effectRef idx="2">
+            <a:schemeClr val="accent1"/>
+          </a:effectRef>
+          <a:fontRef idx="minor">
+            <a:schemeClr val="lt1"/>
+          </a:fontRef>
+        </p:style>
+        <p:txBody>
+          <a:bodyPr rtlCol="0" anchor="ctr"/>
+          <a:lstStyle/>
+          <a:p>
+            <a:pPr algn="ctr"/>
+          </a:p>
+        </p:txBody>
+      </p:sp>
+      <p:sp>
+        <p:nvSpPr>
+          <p:cNvPr id="43" name="Rounded Rectangle 42"/>
+          <p:cNvSpPr/>
+          <p:nvPr/>
+        </p:nvSpPr>
+        <p:spPr>
+          <a:xfrm>
+            <a:off x="5806440" y="2417102"/>
+            <a:ext cx="1607058" cy="108127"/>
+          </a:xfrm>
+          <a:prstGeom prst="roundRect">
+            <a:avLst>
+              <a:gd name="adj" fmla="val 50000"/>
+            </a:avLst>
+          </a:prstGeom>
+          <a:solidFill>
+            <a:srgbClr val="EF4444"/>
+          </a:solidFill>
+          <a:ln>
+            <a:noFill/>
+          </a:ln>
+          <a:effectLst>
+            <a:outerShdw blurRad="76200" dist="19050" dir="5400000" rotWithShape="0">
+              <a:srgbClr val="EF4444">
+                <a:alpha val="55000"/>
+              </a:srgbClr>
+            </a:outerShdw>
+          </a:effectLst>
+        </p:spPr>
+        <p:style>
+          <a:lnRef idx="1">
+            <a:schemeClr val="accent1"/>
+          </a:lnRef>
+          <a:fillRef idx="3">
+            <a:schemeClr val="accent1"/>
+          </a:fillRef>
+          <a:effectRef idx="2">
+            <a:schemeClr val="accent1"/>
+          </a:effectRef>
+          <a:fontRef idx="minor">
+            <a:schemeClr val="lt1"/>
+          </a:fontRef>
+        </p:style>
+        <p:txBody>
+          <a:bodyPr rtlCol="0" anchor="ctr"/>
+          <a:lstStyle/>
+          <a:p>
+            <a:pPr algn="ctr"/>
+          </a:p>
+        </p:txBody>
+      </p:sp>
+      <p:sp>
+        <p:nvSpPr>
+          <p:cNvPr id="44" name="TextBox 43"/>
+          <p:cNvSpPr txBox="1"/>
+          <p:nvPr/>
+        </p:nvSpPr>
+        <p:spPr>
+          <a:xfrm>
+            <a:off x="7543800" y="2385098"/>
+            <a:ext cx="457200" cy="172135"/>
+          </a:xfrm>
+          <a:prstGeom prst="rect">
+            <a:avLst/>
+          </a:prstGeom>
+          <a:noFill/>
+        </p:spPr>
+        <p:txBody>
+          <a:bodyPr wrap="none" lIns="0" rIns="0" tIns="0" bIns="0">
+            <a:spAutoFit/>
+          </a:bodyPr>
+          <a:lstStyle/>
+          <a:p>
+            <a:pPr algn="l"/>
+            <a:r>
+              <a:rPr sz="800" b="1">
+                <a:solidFill>
+                  <a:srgbClr val="EF4444"/>
+                </a:solidFill>
+                <a:latin typeface="Calibri"/>
+              </a:rPr>
+              <a:t>95%</a:t>
+            </a:r>
+          </a:p>
+        </p:txBody>
+      </p:sp>
+      <p:sp>
+        <p:nvSpPr>
+          <p:cNvPr id="45" name="Rounded Rectangle 44"/>
+          <p:cNvSpPr/>
+          <p:nvPr/>
+        </p:nvSpPr>
+        <p:spPr>
+          <a:xfrm>
+            <a:off x="5806440" y="2613698"/>
+            <a:ext cx="1691640" cy="108127"/>
+          </a:xfrm>
+          <a:prstGeom prst="roundRect">
+            <a:avLst>
+              <a:gd name="adj" fmla="val 50000"/>
+            </a:avLst>
+          </a:prstGeom>
+          <a:pattFill prst="smGrid">
+            <a:fgClr>
+              <a:srgbClr val="22C55E"/>
+            </a:fgClr>
+            <a:bgClr>
+              <a:srgbClr val="FFFFFF"/>
+            </a:bgClr>
+          </a:pattFill>
+          <a:ln>
+            <a:noFill/>
+          </a:ln>
+          <a:effectLst/>
+        </p:spPr>
+        <p:style>
+          <a:lnRef idx="1">
+            <a:schemeClr val="accent1"/>
+          </a:lnRef>
+          <a:fillRef idx="3">
+            <a:schemeClr val="accent1"/>
+          </a:fillRef>
+          <a:effectRef idx="2">
+            <a:schemeClr val="accent1"/>
+          </a:effectRef>
+          <a:fontRef idx="minor">
+            <a:schemeClr val="lt1"/>
+          </a:fontRef>
+        </p:style>
+        <p:txBody>
+          <a:bodyPr rtlCol="0" anchor="ctr"/>
+          <a:lstStyle/>
+          <a:p>
+            <a:pPr algn="ctr"/>
+          </a:p>
+        </p:txBody>
+      </p:sp>
+      <p:sp>
+        <p:nvSpPr>
+          <p:cNvPr id="46" name="Rounded Rectangle 45"/>
+          <p:cNvSpPr/>
+          <p:nvPr/>
+        </p:nvSpPr>
+        <p:spPr>
+          <a:xfrm>
+            <a:off x="5806440" y="2613698"/>
+            <a:ext cx="1691640" cy="108127"/>
+          </a:xfrm>
+          <a:prstGeom prst="roundRect">
+            <a:avLst>
+              <a:gd name="adj" fmla="val 50000"/>
+            </a:avLst>
+          </a:prstGeom>
+          <a:solidFill>
+            <a:srgbClr val="22C55E"/>
+          </a:solidFill>
+          <a:ln>
+            <a:noFill/>
+          </a:ln>
+          <a:effectLst>
+            <a:outerShdw blurRad="76200" dist="19050" dir="5400000" rotWithShape="0">
+              <a:srgbClr val="22C55E">
+                <a:alpha val="55000"/>
+              </a:srgbClr>
+            </a:outerShdw>
+          </a:effectLst>
+        </p:spPr>
+        <p:style>
+          <a:lnRef idx="1">
+            <a:schemeClr val="accent1"/>
+          </a:lnRef>
+          <a:fillRef idx="3">
+            <a:schemeClr val="accent1"/>
+          </a:fillRef>
+          <a:effectRef idx="2">
+            <a:schemeClr val="accent1"/>
+          </a:effectRef>
+          <a:fontRef idx="minor">
+            <a:schemeClr val="lt1"/>
+          </a:fontRef>
+        </p:style>
+        <p:txBody>
+          <a:bodyPr rtlCol="0" anchor="ctr"/>
+          <a:lstStyle/>
+          <a:p>
+            <a:pPr algn="ctr"/>
+          </a:p>
+        </p:txBody>
+      </p:sp>
+      <p:sp>
+        <p:nvSpPr>
+          <p:cNvPr id="47" name="TextBox 46"/>
+          <p:cNvSpPr txBox="1"/>
+          <p:nvPr/>
+        </p:nvSpPr>
+        <p:spPr>
+          <a:xfrm>
+            <a:off x="7543800" y="2581694"/>
+            <a:ext cx="457200" cy="172135"/>
+          </a:xfrm>
+          <a:prstGeom prst="rect">
+            <a:avLst/>
+          </a:prstGeom>
+          <a:noFill/>
+        </p:spPr>
+        <p:txBody>
+          <a:bodyPr wrap="none" lIns="0" rIns="0" tIns="0" bIns="0">
+            <a:spAutoFit/>
+          </a:bodyPr>
+          <a:lstStyle/>
+          <a:p>
+            <a:pPr algn="l"/>
+            <a:r>
+              <a:rPr sz="800" b="1">
+                <a:solidFill>
+                  <a:srgbClr val="22C55E"/>
+                </a:solidFill>
+                <a:latin typeface="Calibri"/>
+              </a:rPr>
+              <a:t>100%</a:t>
+            </a:r>
+          </a:p>
+        </p:txBody>
+      </p:sp>
+      <p:sp>
+        <p:nvSpPr>
+          <p:cNvPr id="48" name="Rounded Rectangle 47"/>
+          <p:cNvSpPr/>
+          <p:nvPr/>
+        </p:nvSpPr>
+        <p:spPr>
+          <a:xfrm>
+            <a:off x="5806440" y="2810294"/>
+            <a:ext cx="1691640" cy="108127"/>
+          </a:xfrm>
+          <a:prstGeom prst="roundRect">
+            <a:avLst>
+              <a:gd name="adj" fmla="val 50000"/>
+            </a:avLst>
+          </a:prstGeom>
+          <a:pattFill prst="smGrid">
+            <a:fgClr>
+              <a:srgbClr val="22C55E"/>
+            </a:fgClr>
+            <a:bgClr>
+              <a:srgbClr val="FFFFFF"/>
+            </a:bgClr>
+          </a:pattFill>
+          <a:ln>
+            <a:noFill/>
+          </a:ln>
+          <a:effectLst/>
+        </p:spPr>
+        <p:style>
+          <a:lnRef idx="1">
+            <a:schemeClr val="accent1"/>
+          </a:lnRef>
+          <a:fillRef idx="3">
+            <a:schemeClr val="accent1"/>
+          </a:fillRef>
+          <a:effectRef idx="2">
+            <a:schemeClr val="accent1"/>
+          </a:effectRef>
+          <a:fontRef idx="minor">
+            <a:schemeClr val="lt1"/>
+          </a:fontRef>
+        </p:style>
+        <p:txBody>
+          <a:bodyPr rtlCol="0" anchor="ctr"/>
+          <a:lstStyle/>
+          <a:p>
+            <a:pPr algn="ctr"/>
+          </a:p>
+        </p:txBody>
+      </p:sp>
+      <p:sp>
+        <p:nvSpPr>
+          <p:cNvPr id="49" name="Rounded Rectangle 48"/>
+          <p:cNvSpPr/>
+          <p:nvPr/>
+        </p:nvSpPr>
+        <p:spPr>
+          <a:xfrm>
+            <a:off x="5806440" y="2810294"/>
+            <a:ext cx="1691640" cy="108127"/>
+          </a:xfrm>
+          <a:prstGeom prst="roundRect">
+            <a:avLst>
+              <a:gd name="adj" fmla="val 50000"/>
+            </a:avLst>
+          </a:prstGeom>
+          <a:solidFill>
+            <a:srgbClr val="22C55E"/>
+          </a:solidFill>
+          <a:ln>
+            <a:noFill/>
+          </a:ln>
+          <a:effectLst>
+            <a:outerShdw blurRad="76200" dist="19050" dir="5400000" rotWithShape="0">
+              <a:srgbClr val="22C55E">
+                <a:alpha val="55000"/>
+              </a:srgbClr>
+            </a:outerShdw>
+          </a:effectLst>
+        </p:spPr>
+        <p:style>
+          <a:lnRef idx="1">
+            <a:schemeClr val="accent1"/>
+          </a:lnRef>
+          <a:fillRef idx="3">
+            <a:schemeClr val="accent1"/>
+          </a:fillRef>
+          <a:effectRef idx="2">
+            <a:schemeClr val="accent1"/>
+          </a:effectRef>
+          <a:fontRef idx="minor">
+            <a:schemeClr val="lt1"/>
+          </a:fontRef>
+        </p:style>
+        <p:txBody>
+          <a:bodyPr rtlCol="0" anchor="ctr"/>
+          <a:lstStyle/>
+          <a:p>
+            <a:pPr algn="ctr"/>
+          </a:p>
+        </p:txBody>
+      </p:sp>
+      <p:sp>
+        <p:nvSpPr>
+          <p:cNvPr id="50" name="TextBox 49"/>
+          <p:cNvSpPr txBox="1"/>
+          <p:nvPr/>
+        </p:nvSpPr>
+        <p:spPr>
+          <a:xfrm>
+            <a:off x="7543800" y="2778290"/>
+            <a:ext cx="457200" cy="172135"/>
+          </a:xfrm>
+          <a:prstGeom prst="rect">
+            <a:avLst/>
+          </a:prstGeom>
+          <a:noFill/>
+        </p:spPr>
+        <p:txBody>
+          <a:bodyPr wrap="none" lIns="0" rIns="0" tIns="0" bIns="0">
+            <a:spAutoFit/>
+          </a:bodyPr>
+          <a:lstStyle/>
+          <a:p>
+            <a:pPr algn="l"/>
+            <a:r>
+              <a:rPr sz="800" b="1">
+                <a:solidFill>
+                  <a:srgbClr val="22C55E"/>
+                </a:solidFill>
+                <a:latin typeface="Calibri"/>
+              </a:rPr>
+              <a:t>100%</a:t>
+            </a:r>
+          </a:p>
+        </p:txBody>
+      </p:sp>
+      <p:sp>
+        <p:nvSpPr>
+          <p:cNvPr id="51" name="Rounded Rectangle 50"/>
+          <p:cNvSpPr/>
+          <p:nvPr/>
+        </p:nvSpPr>
+        <p:spPr>
+          <a:xfrm>
+            <a:off x="5806440" y="3006890"/>
+            <a:ext cx="1691640" cy="108127"/>
+          </a:xfrm>
+          <a:prstGeom prst="roundRect">
+            <a:avLst>
+              <a:gd name="adj" fmla="val 50000"/>
+            </a:avLst>
+          </a:prstGeom>
+          <a:pattFill prst="smGrid">
+            <a:fgClr>
+              <a:srgbClr val="22C55E"/>
+            </a:fgClr>
+            <a:bgClr>
+              <a:srgbClr val="FFFFFF"/>
+            </a:bgClr>
+          </a:pattFill>
+          <a:ln>
+            <a:noFill/>
+          </a:ln>
+          <a:effectLst/>
+        </p:spPr>
+        <p:style>
+          <a:lnRef idx="1">
+            <a:schemeClr val="accent1"/>
+          </a:lnRef>
+          <a:fillRef idx="3">
+            <a:schemeClr val="accent1"/>
+          </a:fillRef>
+          <a:effectRef idx="2">
+            <a:schemeClr val="accent1"/>
+          </a:effectRef>
+          <a:fontRef idx="minor">
+            <a:schemeClr val="lt1"/>
+          </a:fontRef>
+        </p:style>
+        <p:txBody>
+          <a:bodyPr rtlCol="0" anchor="ctr"/>
+          <a:lstStyle/>
+          <a:p>
+            <a:pPr algn="ctr"/>
+          </a:p>
+        </p:txBody>
+      </p:sp>
+      <p:sp>
+        <p:nvSpPr>
+          <p:cNvPr id="52" name="Rounded Rectangle 51"/>
+          <p:cNvSpPr/>
+          <p:nvPr/>
+        </p:nvSpPr>
+        <p:spPr>
+          <a:xfrm>
+            <a:off x="5806440" y="3006890"/>
+            <a:ext cx="1691640" cy="108127"/>
+          </a:xfrm>
+          <a:prstGeom prst="roundRect">
+            <a:avLst>
+              <a:gd name="adj" fmla="val 50000"/>
+            </a:avLst>
+          </a:prstGeom>
+          <a:solidFill>
+            <a:srgbClr val="22C55E"/>
+          </a:solidFill>
+          <a:ln>
+            <a:noFill/>
+          </a:ln>
+          <a:effectLst>
+            <a:outerShdw blurRad="76200" dist="19050" dir="5400000" rotWithShape="0">
+              <a:srgbClr val="22C55E">
+                <a:alpha val="55000"/>
+              </a:srgbClr>
+            </a:outerShdw>
+          </a:effectLst>
+        </p:spPr>
+        <p:style>
+          <a:lnRef idx="1">
+            <a:schemeClr val="accent1"/>
+          </a:lnRef>
+          <a:fillRef idx="3">
+            <a:schemeClr val="accent1"/>
+          </a:fillRef>
+          <a:effectRef idx="2">
+            <a:schemeClr val="accent1"/>
+          </a:effectRef>
+          <a:fontRef idx="minor">
+            <a:schemeClr val="lt1"/>
+          </a:fontRef>
+        </p:style>
+        <p:txBody>
+          <a:bodyPr rtlCol="0" anchor="ctr"/>
+          <a:lstStyle/>
+          <a:p>
+            <a:pPr algn="ctr"/>
+          </a:p>
+        </p:txBody>
+      </p:sp>
+      <p:sp>
+        <p:nvSpPr>
+          <p:cNvPr id="53" name="TextBox 52"/>
+          <p:cNvSpPr txBox="1"/>
+          <p:nvPr/>
+        </p:nvSpPr>
+        <p:spPr>
+          <a:xfrm>
+            <a:off x="7543800" y="2974886"/>
+            <a:ext cx="457200" cy="172135"/>
+          </a:xfrm>
+          <a:prstGeom prst="rect">
+            <a:avLst/>
+          </a:prstGeom>
+          <a:noFill/>
+        </p:spPr>
+        <p:txBody>
+          <a:bodyPr wrap="none" lIns="0" rIns="0" tIns="0" bIns="0">
+            <a:spAutoFit/>
+          </a:bodyPr>
+          <a:lstStyle/>
+          <a:p>
+            <a:pPr algn="l"/>
+            <a:r>
+              <a:rPr sz="800" b="1">
+                <a:solidFill>
+                  <a:srgbClr val="22C55E"/>
+                </a:solidFill>
+                <a:latin typeface="Calibri"/>
+              </a:rPr>
+              <a:t>100%</a:t>
+            </a:r>
+          </a:p>
+        </p:txBody>
+      </p:sp>
+      <p:sp>
+        <p:nvSpPr>
+          <p:cNvPr id="54" name="Rounded Rectangle 53"/>
+          <p:cNvSpPr/>
+          <p:nvPr/>
+        </p:nvSpPr>
+        <p:spPr>
+          <a:xfrm>
+            <a:off x="5806440" y="3203486"/>
+            <a:ext cx="1691640" cy="108127"/>
+          </a:xfrm>
+          <a:prstGeom prst="roundRect">
+            <a:avLst>
+              <a:gd name="adj" fmla="val 50000"/>
+            </a:avLst>
+          </a:prstGeom>
+          <a:pattFill prst="smGrid">
+            <a:fgClr>
+              <a:srgbClr val="22C55E"/>
+            </a:fgClr>
+            <a:bgClr>
+              <a:srgbClr val="FFFFFF"/>
+            </a:bgClr>
+          </a:pattFill>
+          <a:ln>
+            <a:noFill/>
+          </a:ln>
+          <a:effectLst/>
+        </p:spPr>
+        <p:style>
+          <a:lnRef idx="1">
+            <a:schemeClr val="accent1"/>
+          </a:lnRef>
+          <a:fillRef idx="3">
+            <a:schemeClr val="accent1"/>
+          </a:fillRef>
+          <a:effectRef idx="2">
+            <a:schemeClr val="accent1"/>
+          </a:effectRef>
+          <a:fontRef idx="minor">
+            <a:schemeClr val="lt1"/>
+          </a:fontRef>
+        </p:style>
+        <p:txBody>
+          <a:bodyPr rtlCol="0" anchor="ctr"/>
+          <a:lstStyle/>
+          <a:p>
+            <a:pPr algn="ctr"/>
+          </a:p>
+        </p:txBody>
+      </p:sp>
+      <p:sp>
+        <p:nvSpPr>
+          <p:cNvPr id="55" name="Rounded Rectangle 54"/>
+          <p:cNvSpPr/>
+          <p:nvPr/>
+        </p:nvSpPr>
+        <p:spPr>
+          <a:xfrm>
+            <a:off x="5806440" y="3203486"/>
+            <a:ext cx="1691640" cy="108127"/>
+          </a:xfrm>
+          <a:prstGeom prst="roundRect">
+            <a:avLst>
+              <a:gd name="adj" fmla="val 50000"/>
+            </a:avLst>
+          </a:prstGeom>
+          <a:solidFill>
+            <a:srgbClr val="22C55E"/>
+          </a:solidFill>
+          <a:ln>
+            <a:noFill/>
+          </a:ln>
+          <a:effectLst>
+            <a:outerShdw blurRad="76200" dist="19050" dir="5400000" rotWithShape="0">
+              <a:srgbClr val="22C55E">
+                <a:alpha val="55000"/>
+              </a:srgbClr>
+            </a:outerShdw>
+          </a:effectLst>
+        </p:spPr>
+        <p:style>
+          <a:lnRef idx="1">
+            <a:schemeClr val="accent1"/>
+          </a:lnRef>
+          <a:fillRef idx="3">
+            <a:schemeClr val="accent1"/>
+          </a:fillRef>
+          <a:effectRef idx="2">
+            <a:schemeClr val="accent1"/>
+          </a:effectRef>
+          <a:fontRef idx="minor">
+            <a:schemeClr val="lt1"/>
+          </a:fontRef>
+        </p:style>
+        <p:txBody>
+          <a:bodyPr rtlCol="0" anchor="ctr"/>
+          <a:lstStyle/>
+          <a:p>
+            <a:pPr algn="ctr"/>
+          </a:p>
+        </p:txBody>
+      </p:sp>
+      <p:sp>
+        <p:nvSpPr>
+          <p:cNvPr id="56" name="TextBox 55"/>
+          <p:cNvSpPr txBox="1"/>
+          <p:nvPr/>
+        </p:nvSpPr>
+        <p:spPr>
+          <a:xfrm>
+            <a:off x="7543800" y="3171482"/>
+            <a:ext cx="457200" cy="172135"/>
+          </a:xfrm>
+          <a:prstGeom prst="rect">
+            <a:avLst/>
+          </a:prstGeom>
+          <a:noFill/>
+        </p:spPr>
+        <p:txBody>
+          <a:bodyPr wrap="none" lIns="0" rIns="0" tIns="0" bIns="0">
+            <a:spAutoFit/>
+          </a:bodyPr>
+          <a:lstStyle/>
+          <a:p>
+            <a:pPr algn="l"/>
+            <a:r>
+              <a:rPr sz="800" b="1">
+                <a:solidFill>
+                  <a:srgbClr val="22C55E"/>
+                </a:solidFill>
+                <a:latin typeface="Calibri"/>
+              </a:rPr>
+              <a:t>100%</a:t>
+            </a:r>
+          </a:p>
+        </p:txBody>
+      </p:sp>
+      <p:sp>
+        <p:nvSpPr>
+          <p:cNvPr id="57" name="Rounded Rectangle 56"/>
+          <p:cNvSpPr/>
+          <p:nvPr/>
+        </p:nvSpPr>
+        <p:spPr>
+          <a:xfrm>
+            <a:off x="5806440" y="3400082"/>
+            <a:ext cx="1691640" cy="108127"/>
+          </a:xfrm>
+          <a:prstGeom prst="roundRect">
+            <a:avLst>
+              <a:gd name="adj" fmla="val 50000"/>
+            </a:avLst>
+          </a:prstGeom>
+          <a:pattFill prst="smGrid">
+            <a:fgClr>
+              <a:srgbClr val="22C55E"/>
+            </a:fgClr>
+            <a:bgClr>
+              <a:srgbClr val="FFFFFF"/>
+            </a:bgClr>
+          </a:pattFill>
+          <a:ln>
+            <a:noFill/>
+          </a:ln>
+          <a:effectLst/>
+        </p:spPr>
+        <p:style>
+          <a:lnRef idx="1">
+            <a:schemeClr val="accent1"/>
+          </a:lnRef>
+          <a:fillRef idx="3">
+            <a:schemeClr val="accent1"/>
+          </a:fillRef>
+          <a:effectRef idx="2">
+            <a:schemeClr val="accent1"/>
+          </a:effectRef>
+          <a:fontRef idx="minor">
+            <a:schemeClr val="lt1"/>
+          </a:fontRef>
+        </p:style>
+        <p:txBody>
+          <a:bodyPr rtlCol="0" anchor="ctr"/>
+          <a:lstStyle/>
+          <a:p>
+            <a:pPr algn="ctr"/>
+          </a:p>
+        </p:txBody>
+      </p:sp>
+      <p:sp>
+        <p:nvSpPr>
+          <p:cNvPr id="58" name="Rounded Rectangle 57"/>
+          <p:cNvSpPr/>
+          <p:nvPr/>
+        </p:nvSpPr>
+        <p:spPr>
+          <a:xfrm>
+            <a:off x="5806440" y="3400082"/>
+            <a:ext cx="1691640" cy="108127"/>
+          </a:xfrm>
+          <a:prstGeom prst="roundRect">
+            <a:avLst>
+              <a:gd name="adj" fmla="val 50000"/>
+            </a:avLst>
+          </a:prstGeom>
+          <a:solidFill>
+            <a:srgbClr val="22C55E"/>
+          </a:solidFill>
+          <a:ln>
+            <a:noFill/>
+          </a:ln>
+          <a:effectLst>
+            <a:outerShdw blurRad="76200" dist="19050" dir="5400000" rotWithShape="0">
+              <a:srgbClr val="22C55E">
+                <a:alpha val="55000"/>
+              </a:srgbClr>
+            </a:outerShdw>
+          </a:effectLst>
+        </p:spPr>
+        <p:style>
+          <a:lnRef idx="1">
+            <a:schemeClr val="accent1"/>
+          </a:lnRef>
+          <a:fillRef idx="3">
+            <a:schemeClr val="accent1"/>
+          </a:fillRef>
+          <a:effectRef idx="2">
+            <a:schemeClr val="accent1"/>
+          </a:effectRef>
+          <a:fontRef idx="minor">
+            <a:schemeClr val="lt1"/>
+          </a:fontRef>
+        </p:style>
+        <p:txBody>
+          <a:bodyPr rtlCol="0" anchor="ctr"/>
+          <a:lstStyle/>
+          <a:p>
+            <a:pPr algn="ctr"/>
+          </a:p>
+        </p:txBody>
+      </p:sp>
+      <p:sp>
+        <p:nvSpPr>
+          <p:cNvPr id="59" name="TextBox 58"/>
+          <p:cNvSpPr txBox="1"/>
+          <p:nvPr/>
+        </p:nvSpPr>
+        <p:spPr>
+          <a:xfrm>
+            <a:off x="7543800" y="3368078"/>
+            <a:ext cx="457200" cy="172135"/>
+          </a:xfrm>
+          <a:prstGeom prst="rect">
+            <a:avLst/>
+          </a:prstGeom>
+          <a:noFill/>
+        </p:spPr>
+        <p:txBody>
+          <a:bodyPr wrap="none" lIns="0" rIns="0" tIns="0" bIns="0">
+            <a:spAutoFit/>
+          </a:bodyPr>
+          <a:lstStyle/>
+          <a:p>
+            <a:pPr algn="l"/>
+            <a:r>
+              <a:rPr sz="800" b="1">
+                <a:solidFill>
+                  <a:srgbClr val="22C55E"/>
+                </a:solidFill>
+                <a:latin typeface="Calibri"/>
+              </a:rPr>
+              <a:t>100%</a:t>
+            </a:r>
+          </a:p>
+        </p:txBody>
+      </p:sp>
+      <p:sp>
+        <p:nvSpPr>
+          <p:cNvPr id="60" name="Rounded Rectangle 59"/>
+          <p:cNvSpPr/>
+          <p:nvPr/>
+        </p:nvSpPr>
+        <p:spPr>
+          <a:xfrm>
+            <a:off x="5806440" y="3596678"/>
+            <a:ext cx="1691640" cy="108127"/>
+          </a:xfrm>
+          <a:prstGeom prst="roundRect">
+            <a:avLst>
+              <a:gd name="adj" fmla="val 50000"/>
+            </a:avLst>
+          </a:prstGeom>
+          <a:pattFill prst="smGrid">
+            <a:fgClr>
+              <a:srgbClr val="22C55E"/>
+            </a:fgClr>
+            <a:bgClr>
+              <a:srgbClr val="FFFFFF"/>
+            </a:bgClr>
+          </a:pattFill>
+          <a:ln>
+            <a:noFill/>
+          </a:ln>
+          <a:effectLst/>
+        </p:spPr>
+        <p:style>
+          <a:lnRef idx="1">
+            <a:schemeClr val="accent1"/>
+          </a:lnRef>
+          <a:fillRef idx="3">
+            <a:schemeClr val="accent1"/>
+          </a:fillRef>
+          <a:effectRef idx="2">
+            <a:schemeClr val="accent1"/>
+          </a:effectRef>
+          <a:fontRef idx="minor">
+            <a:schemeClr val="lt1"/>
+          </a:fontRef>
+        </p:style>
+        <p:txBody>
+          <a:bodyPr rtlCol="0" anchor="ctr"/>
+          <a:lstStyle/>
+          <a:p>
+            <a:pPr algn="ctr"/>
+          </a:p>
+        </p:txBody>
+      </p:sp>
+      <p:sp>
+        <p:nvSpPr>
+          <p:cNvPr id="61" name="Rounded Rectangle 60"/>
+          <p:cNvSpPr/>
+          <p:nvPr/>
+        </p:nvSpPr>
+        <p:spPr>
+          <a:xfrm>
+            <a:off x="5806440" y="3596678"/>
+            <a:ext cx="1691640" cy="108127"/>
+          </a:xfrm>
+          <a:prstGeom prst="roundRect">
+            <a:avLst>
+              <a:gd name="adj" fmla="val 50000"/>
+            </a:avLst>
+          </a:prstGeom>
+          <a:solidFill>
+            <a:srgbClr val="22C55E"/>
+          </a:solidFill>
+          <a:ln>
+            <a:noFill/>
+          </a:ln>
+          <a:effectLst>
+            <a:outerShdw blurRad="76200" dist="19050" dir="5400000" rotWithShape="0">
+              <a:srgbClr val="22C55E">
+                <a:alpha val="55000"/>
+              </a:srgbClr>
+            </a:outerShdw>
+          </a:effectLst>
+        </p:spPr>
+        <p:style>
+          <a:lnRef idx="1">
+            <a:schemeClr val="accent1"/>
+          </a:lnRef>
+          <a:fillRef idx="3">
+            <a:schemeClr val="accent1"/>
+          </a:fillRef>
+          <a:effectRef idx="2">
+            <a:schemeClr val="accent1"/>
+          </a:effectRef>
+          <a:fontRef idx="minor">
+            <a:schemeClr val="lt1"/>
+          </a:fontRef>
+        </p:style>
+        <p:txBody>
+          <a:bodyPr rtlCol="0" anchor="ctr"/>
+          <a:lstStyle/>
+          <a:p>
+            <a:pPr algn="ctr"/>
+          </a:p>
+        </p:txBody>
+      </p:sp>
+      <p:sp>
+        <p:nvSpPr>
+          <p:cNvPr id="62" name="TextBox 61"/>
+          <p:cNvSpPr txBox="1"/>
+          <p:nvPr/>
+        </p:nvSpPr>
+        <p:spPr>
+          <a:xfrm>
+            <a:off x="7543800" y="3564674"/>
+            <a:ext cx="457200" cy="172135"/>
+          </a:xfrm>
+          <a:prstGeom prst="rect">
+            <a:avLst/>
+          </a:prstGeom>
+          <a:noFill/>
+        </p:spPr>
+        <p:txBody>
+          <a:bodyPr wrap="none" lIns="0" rIns="0" tIns="0" bIns="0">
+            <a:spAutoFit/>
+          </a:bodyPr>
+          <a:lstStyle/>
+          <a:p>
+            <a:pPr algn="l"/>
+            <a:r>
+              <a:rPr sz="800" b="1">
+                <a:solidFill>
+                  <a:srgbClr val="22C55E"/>
+                </a:solidFill>
+                <a:latin typeface="Calibri"/>
+              </a:rPr>
+              <a:t>100%</a:t>
+            </a:r>
+          </a:p>
+        </p:txBody>
+      </p:sp>
+      <p:sp>
+        <p:nvSpPr>
+          <p:cNvPr id="63" name="Rounded Rectangle 62"/>
+          <p:cNvSpPr/>
+          <p:nvPr/>
+        </p:nvSpPr>
+        <p:spPr>
+          <a:xfrm>
+            <a:off x="5806440" y="3793274"/>
+            <a:ext cx="1691640" cy="108127"/>
+          </a:xfrm>
+          <a:prstGeom prst="roundRect">
+            <a:avLst>
+              <a:gd name="adj" fmla="val 50000"/>
+            </a:avLst>
+          </a:prstGeom>
+          <a:pattFill prst="smGrid">
+            <a:fgClr>
+              <a:srgbClr val="EF4444"/>
+            </a:fgClr>
+            <a:bgClr>
+              <a:srgbClr val="FFFFFF"/>
+            </a:bgClr>
+          </a:pattFill>
+          <a:ln>
+            <a:noFill/>
+          </a:ln>
+          <a:effectLst/>
+        </p:spPr>
+        <p:style>
+          <a:lnRef idx="1">
+            <a:schemeClr val="accent1"/>
+          </a:lnRef>
+          <a:fillRef idx="3">
+            <a:schemeClr val="accent1"/>
+          </a:fillRef>
+          <a:effectRef idx="2">
+            <a:schemeClr val="accent1"/>
+          </a:effectRef>
+          <a:fontRef idx="minor">
+            <a:schemeClr val="lt1"/>
+          </a:fontRef>
+        </p:style>
+        <p:txBody>
+          <a:bodyPr rtlCol="0" anchor="ctr"/>
+          <a:lstStyle/>
+          <a:p>
+            <a:pPr algn="ctr"/>
+          </a:p>
+        </p:txBody>
+      </p:sp>
+      <p:sp>
+        <p:nvSpPr>
+          <p:cNvPr id="64" name="Rounded Rectangle 63"/>
+          <p:cNvSpPr/>
+          <p:nvPr/>
+        </p:nvSpPr>
+        <p:spPr>
+          <a:xfrm>
+            <a:off x="5806440" y="3793274"/>
+            <a:ext cx="372160" cy="108127"/>
+          </a:xfrm>
+          <a:prstGeom prst="roundRect">
+            <a:avLst>
+              <a:gd name="adj" fmla="val 50000"/>
+            </a:avLst>
+          </a:prstGeom>
+          <a:solidFill>
+            <a:srgbClr val="EF4444"/>
+          </a:solidFill>
+          <a:ln>
+            <a:noFill/>
+          </a:ln>
+          <a:effectLst>
+            <a:outerShdw blurRad="76200" dist="19050" dir="5400000" rotWithShape="0">
+              <a:srgbClr val="EF4444">
+                <a:alpha val="55000"/>
+              </a:srgbClr>
+            </a:outerShdw>
+          </a:effectLst>
+        </p:spPr>
+        <p:style>
+          <a:lnRef idx="1">
+            <a:schemeClr val="accent1"/>
+          </a:lnRef>
+          <a:fillRef idx="3">
+            <a:schemeClr val="accent1"/>
+          </a:fillRef>
+          <a:effectRef idx="2">
+            <a:schemeClr val="accent1"/>
+          </a:effectRef>
+          <a:fontRef idx="minor">
+            <a:schemeClr val="lt1"/>
+          </a:fontRef>
+        </p:style>
+        <p:txBody>
+          <a:bodyPr rtlCol="0" anchor="ctr"/>
+          <a:lstStyle/>
+          <a:p>
+            <a:pPr algn="ctr"/>
+          </a:p>
+        </p:txBody>
+      </p:sp>
+      <p:sp>
+        <p:nvSpPr>
+          <p:cNvPr id="65" name="TextBox 64"/>
+          <p:cNvSpPr txBox="1"/>
+          <p:nvPr/>
+        </p:nvSpPr>
+        <p:spPr>
+          <a:xfrm>
+            <a:off x="7543800" y="3761270"/>
+            <a:ext cx="457200" cy="172135"/>
+          </a:xfrm>
+          <a:prstGeom prst="rect">
+            <a:avLst/>
+          </a:prstGeom>
+          <a:noFill/>
+        </p:spPr>
+        <p:txBody>
+          <a:bodyPr wrap="none" lIns="0" rIns="0" tIns="0" bIns="0">
+            <a:spAutoFit/>
+          </a:bodyPr>
+          <a:lstStyle/>
+          <a:p>
+            <a:pPr algn="l"/>
+            <a:r>
+              <a:rPr sz="800" b="1">
+                <a:solidFill>
+                  <a:srgbClr val="EF4444"/>
+                </a:solidFill>
+                <a:latin typeface="Calibri"/>
+              </a:rPr>
+              <a:t>22%</a:t>
+            </a:r>
+          </a:p>
+        </p:txBody>
+      </p:sp>
+      <p:sp>
+        <p:nvSpPr>
+          <p:cNvPr id="66" name="Rounded Rectangle 65"/>
+          <p:cNvSpPr/>
+          <p:nvPr/>
+        </p:nvSpPr>
+        <p:spPr>
+          <a:xfrm>
+            <a:off x="5806440" y="3989870"/>
+            <a:ext cx="1691640" cy="108127"/>
+          </a:xfrm>
+          <a:prstGeom prst="roundRect">
+            <a:avLst>
+              <a:gd name="adj" fmla="val 50000"/>
+            </a:avLst>
+          </a:prstGeom>
+          <a:pattFill prst="smGrid">
+            <a:fgClr>
+              <a:srgbClr val="F59E0B"/>
+            </a:fgClr>
+            <a:bgClr>
+              <a:srgbClr val="FFFFFF"/>
+            </a:bgClr>
+          </a:pattFill>
+          <a:ln>
+            <a:noFill/>
+          </a:ln>
+          <a:effectLst/>
+        </p:spPr>
+        <p:style>
+          <a:lnRef idx="1">
+            <a:schemeClr val="accent1"/>
+          </a:lnRef>
+          <a:fillRef idx="3">
+            <a:schemeClr val="accent1"/>
+          </a:fillRef>
+          <a:effectRef idx="2">
+            <a:schemeClr val="accent1"/>
+          </a:effectRef>
+          <a:fontRef idx="minor">
+            <a:schemeClr val="lt1"/>
+          </a:fontRef>
+        </p:style>
+        <p:txBody>
+          <a:bodyPr rtlCol="0" anchor="ctr"/>
+          <a:lstStyle/>
+          <a:p>
+            <a:pPr algn="ctr"/>
+          </a:p>
+        </p:txBody>
+      </p:sp>
+      <p:sp>
+        <p:nvSpPr>
+          <p:cNvPr id="67" name="Rounded Rectangle 66"/>
+          <p:cNvSpPr/>
+          <p:nvPr/>
+        </p:nvSpPr>
+        <p:spPr>
+          <a:xfrm>
+            <a:off x="5806440" y="3989870"/>
+            <a:ext cx="1353312" cy="108127"/>
+          </a:xfrm>
+          <a:prstGeom prst="roundRect">
+            <a:avLst>
+              <a:gd name="adj" fmla="val 50000"/>
+            </a:avLst>
+          </a:prstGeom>
+          <a:solidFill>
+            <a:srgbClr val="F59E0B"/>
+          </a:solidFill>
+          <a:ln>
+            <a:noFill/>
+          </a:ln>
+          <a:effectLst>
+            <a:outerShdw blurRad="76200" dist="19050" dir="5400000" rotWithShape="0">
+              <a:srgbClr val="F59E0B">
+                <a:alpha val="55000"/>
+              </a:srgbClr>
+            </a:outerShdw>
+          </a:effectLst>
+        </p:spPr>
+        <p:style>
+          <a:lnRef idx="1">
+            <a:schemeClr val="accent1"/>
+          </a:lnRef>
+          <a:fillRef idx="3">
+            <a:schemeClr val="accent1"/>
+          </a:fillRef>
+          <a:effectRef idx="2">
+            <a:schemeClr val="accent1"/>
+          </a:effectRef>
+          <a:fontRef idx="minor">
+            <a:schemeClr val="lt1"/>
+          </a:fontRef>
+        </p:style>
+        <p:txBody>
+          <a:bodyPr rtlCol="0" anchor="ctr"/>
+          <a:lstStyle/>
+          <a:p>
+            <a:pPr algn="ctr"/>
+          </a:p>
+        </p:txBody>
+      </p:sp>
+      <p:sp>
+        <p:nvSpPr>
+          <p:cNvPr id="68" name="TextBox 67"/>
+          <p:cNvSpPr txBox="1"/>
+          <p:nvPr/>
+        </p:nvSpPr>
+        <p:spPr>
+          <a:xfrm>
+            <a:off x="7543800" y="3957866"/>
+            <a:ext cx="457200" cy="172135"/>
+          </a:xfrm>
+          <a:prstGeom prst="rect">
+            <a:avLst/>
+          </a:prstGeom>
+          <a:noFill/>
+        </p:spPr>
+        <p:txBody>
+          <a:bodyPr wrap="none" lIns="0" rIns="0" tIns="0" bIns="0">
+            <a:spAutoFit/>
+          </a:bodyPr>
+          <a:lstStyle/>
+          <a:p>
+            <a:pPr algn="l"/>
+            <a:r>
+              <a:rPr sz="800" b="1">
+                <a:solidFill>
+                  <a:srgbClr val="F59E0B"/>
+                </a:solidFill>
+                <a:latin typeface="Calibri"/>
+              </a:rPr>
+              <a:t>80%</a:t>
+            </a:r>
+          </a:p>
+        </p:txBody>
+      </p:sp>
+      <p:sp>
+        <p:nvSpPr>
+          <p:cNvPr id="69" name="Rounded Rectangle 68"/>
+          <p:cNvSpPr/>
+          <p:nvPr/>
+        </p:nvSpPr>
+        <p:spPr>
+          <a:xfrm>
+            <a:off x="5806440" y="4186466"/>
+            <a:ext cx="1691640" cy="108127"/>
+          </a:xfrm>
+          <a:prstGeom prst="roundRect">
+            <a:avLst>
+              <a:gd name="adj" fmla="val 50000"/>
+            </a:avLst>
+          </a:prstGeom>
+          <a:pattFill prst="smGrid">
+            <a:fgClr>
+              <a:srgbClr val="EF4444"/>
+            </a:fgClr>
+            <a:bgClr>
+              <a:srgbClr val="FFFFFF"/>
+            </a:bgClr>
+          </a:pattFill>
+          <a:ln>
+            <a:noFill/>
+          </a:ln>
+          <a:effectLst/>
+        </p:spPr>
+        <p:style>
+          <a:lnRef idx="1">
+            <a:schemeClr val="accent1"/>
+          </a:lnRef>
+          <a:fillRef idx="3">
+            <a:schemeClr val="accent1"/>
+          </a:fillRef>
+          <a:effectRef idx="2">
+            <a:schemeClr val="accent1"/>
+          </a:effectRef>
+          <a:fontRef idx="minor">
+            <a:schemeClr val="lt1"/>
+          </a:fontRef>
+        </p:style>
+        <p:txBody>
+          <a:bodyPr rtlCol="0" anchor="ctr"/>
+          <a:lstStyle/>
+          <a:p>
+            <a:pPr algn="ctr"/>
+          </a:p>
+        </p:txBody>
+      </p:sp>
+      <p:sp>
+        <p:nvSpPr>
+          <p:cNvPr id="70" name="Rounded Rectangle 69"/>
+          <p:cNvSpPr/>
+          <p:nvPr/>
+        </p:nvSpPr>
+        <p:spPr>
+          <a:xfrm>
+            <a:off x="5806440" y="4186466"/>
+            <a:ext cx="1674723" cy="108127"/>
+          </a:xfrm>
+          <a:prstGeom prst="roundRect">
+            <a:avLst>
+              <a:gd name="adj" fmla="val 50000"/>
+            </a:avLst>
+          </a:prstGeom>
+          <a:solidFill>
+            <a:srgbClr val="EF4444"/>
+          </a:solidFill>
+          <a:ln>
+            <a:noFill/>
+          </a:ln>
+          <a:effectLst>
+            <a:outerShdw blurRad="76200" dist="19050" dir="5400000" rotWithShape="0">
+              <a:srgbClr val="EF4444">
+                <a:alpha val="55000"/>
+              </a:srgbClr>
+            </a:outerShdw>
+          </a:effectLst>
+        </p:spPr>
+        <p:style>
+          <a:lnRef idx="1">
+            <a:schemeClr val="accent1"/>
+          </a:lnRef>
+          <a:fillRef idx="3">
+            <a:schemeClr val="accent1"/>
+          </a:fillRef>
+          <a:effectRef idx="2">
+            <a:schemeClr val="accent1"/>
+          </a:effectRef>
+          <a:fontRef idx="minor">
+            <a:schemeClr val="lt1"/>
+          </a:fontRef>
+        </p:style>
+        <p:txBody>
+          <a:bodyPr rtlCol="0" anchor="ctr"/>
+          <a:lstStyle/>
+          <a:p>
+            <a:pPr algn="ctr"/>
+          </a:p>
+        </p:txBody>
+      </p:sp>
+      <p:sp>
+        <p:nvSpPr>
+          <p:cNvPr id="71" name="TextBox 70"/>
+          <p:cNvSpPr txBox="1"/>
+          <p:nvPr/>
+        </p:nvSpPr>
+        <p:spPr>
+          <a:xfrm>
+            <a:off x="7543800" y="4154462"/>
+            <a:ext cx="457200" cy="172135"/>
+          </a:xfrm>
+          <a:prstGeom prst="rect">
+            <a:avLst/>
+          </a:prstGeom>
+          <a:noFill/>
+        </p:spPr>
+        <p:txBody>
+          <a:bodyPr wrap="none" lIns="0" rIns="0" tIns="0" bIns="0">
+            <a:spAutoFit/>
+          </a:bodyPr>
+          <a:lstStyle/>
+          <a:p>
+            <a:pPr algn="l"/>
+            <a:r>
+              <a:rPr sz="800" b="1">
+                <a:solidFill>
+                  <a:srgbClr val="EF4444"/>
+                </a:solidFill>
+                <a:latin typeface="Calibri"/>
+              </a:rPr>
+              <a:t>99%</a:t>
+            </a:r>
+          </a:p>
+        </p:txBody>
+      </p:sp>
+      <p:sp>
+        <p:nvSpPr>
+          <p:cNvPr id="72" name="Rounded Rectangle 71"/>
+          <p:cNvSpPr/>
+          <p:nvPr/>
+        </p:nvSpPr>
+        <p:spPr>
+          <a:xfrm>
+            <a:off x="5806440" y="4383062"/>
+            <a:ext cx="1691640" cy="108127"/>
+          </a:xfrm>
+          <a:prstGeom prst="roundRect">
+            <a:avLst>
+              <a:gd name="adj" fmla="val 50000"/>
+            </a:avLst>
+          </a:prstGeom>
+          <a:pattFill prst="smGrid">
+            <a:fgClr>
+              <a:srgbClr val="22C55E"/>
+            </a:fgClr>
+            <a:bgClr>
+              <a:srgbClr val="FFFFFF"/>
+            </a:bgClr>
+          </a:pattFill>
+          <a:ln>
+            <a:noFill/>
+          </a:ln>
+          <a:effectLst/>
+        </p:spPr>
+        <p:style>
+          <a:lnRef idx="1">
+            <a:schemeClr val="accent1"/>
+          </a:lnRef>
+          <a:fillRef idx="3">
+            <a:schemeClr val="accent1"/>
+          </a:fillRef>
+          <a:effectRef idx="2">
+            <a:schemeClr val="accent1"/>
+          </a:effectRef>
+          <a:fontRef idx="minor">
+            <a:schemeClr val="lt1"/>
+          </a:fontRef>
+        </p:style>
+        <p:txBody>
+          <a:bodyPr rtlCol="0" anchor="ctr"/>
+          <a:lstStyle/>
+          <a:p>
+            <a:pPr algn="ctr"/>
+          </a:p>
+        </p:txBody>
+      </p:sp>
+      <p:sp>
+        <p:nvSpPr>
+          <p:cNvPr id="73" name="Rounded Rectangle 72"/>
+          <p:cNvSpPr/>
+          <p:nvPr/>
+        </p:nvSpPr>
+        <p:spPr>
+          <a:xfrm>
+            <a:off x="5806440" y="4383062"/>
+            <a:ext cx="524408" cy="108127"/>
+          </a:xfrm>
+          <a:prstGeom prst="roundRect">
+            <a:avLst>
+              <a:gd name="adj" fmla="val 50000"/>
+            </a:avLst>
+          </a:prstGeom>
+          <a:solidFill>
+            <a:srgbClr val="22C55E"/>
+          </a:solidFill>
+          <a:ln>
+            <a:noFill/>
+          </a:ln>
+          <a:effectLst>
+            <a:outerShdw blurRad="76200" dist="19050" dir="5400000" rotWithShape="0">
+              <a:srgbClr val="22C55E">
+                <a:alpha val="55000"/>
+              </a:srgbClr>
+            </a:outerShdw>
+          </a:effectLst>
+        </p:spPr>
+        <p:style>
+          <a:lnRef idx="1">
+            <a:schemeClr val="accent1"/>
+          </a:lnRef>
+          <a:fillRef idx="3">
+            <a:schemeClr val="accent1"/>
+          </a:fillRef>
+          <a:effectRef idx="2">
+            <a:schemeClr val="accent1"/>
+          </a:effectRef>
+          <a:fontRef idx="minor">
+            <a:schemeClr val="lt1"/>
+          </a:fontRef>
+        </p:style>
+        <p:txBody>
+          <a:bodyPr rtlCol="0" anchor="ctr"/>
+          <a:lstStyle/>
+          <a:p>
+            <a:pPr algn="ctr"/>
+          </a:p>
+        </p:txBody>
+      </p:sp>
+      <p:sp>
+        <p:nvSpPr>
+          <p:cNvPr id="74" name="TextBox 73"/>
+          <p:cNvSpPr txBox="1"/>
+          <p:nvPr/>
+        </p:nvSpPr>
+        <p:spPr>
+          <a:xfrm>
+            <a:off x="7543800" y="4351058"/>
+            <a:ext cx="457200" cy="172135"/>
+          </a:xfrm>
+          <a:prstGeom prst="rect">
+            <a:avLst/>
+          </a:prstGeom>
+          <a:noFill/>
+        </p:spPr>
+        <p:txBody>
+          <a:bodyPr wrap="none" lIns="0" rIns="0" tIns="0" bIns="0">
+            <a:spAutoFit/>
+          </a:bodyPr>
+          <a:lstStyle/>
+          <a:p>
+            <a:pPr algn="l"/>
+            <a:r>
+              <a:rPr sz="800" b="1">
+                <a:solidFill>
+                  <a:srgbClr val="22C55E"/>
+                </a:solidFill>
+                <a:latin typeface="Calibri"/>
+              </a:rPr>
+              <a:t>31%</a:t>
+            </a:r>
+          </a:p>
+        </p:txBody>
+      </p:sp>
+      <p:sp>
+        <p:nvSpPr>
+          <p:cNvPr id="75" name="Rounded Rectangle 74"/>
+          <p:cNvSpPr/>
+          <p:nvPr/>
+        </p:nvSpPr>
+        <p:spPr>
+          <a:xfrm>
+            <a:off x="5806440" y="4579658"/>
+            <a:ext cx="1691640" cy="108127"/>
+          </a:xfrm>
+          <a:prstGeom prst="roundRect">
+            <a:avLst>
+              <a:gd name="adj" fmla="val 50000"/>
+            </a:avLst>
+          </a:prstGeom>
+          <a:pattFill prst="smGrid">
+            <a:fgClr>
+              <a:srgbClr val="22C55E"/>
+            </a:fgClr>
+            <a:bgClr>
+              <a:srgbClr val="FFFFFF"/>
+            </a:bgClr>
+          </a:pattFill>
+          <a:ln>
+            <a:noFill/>
+          </a:ln>
+          <a:effectLst/>
+        </p:spPr>
+        <p:style>
+          <a:lnRef idx="1">
+            <a:schemeClr val="accent1"/>
+          </a:lnRef>
+          <a:fillRef idx="3">
+            <a:schemeClr val="accent1"/>
+          </a:fillRef>
+          <a:effectRef idx="2">
+            <a:schemeClr val="accent1"/>
+          </a:effectRef>
+          <a:fontRef idx="minor">
+            <a:schemeClr val="lt1"/>
+          </a:fontRef>
+        </p:style>
+        <p:txBody>
+          <a:bodyPr rtlCol="0" anchor="ctr"/>
+          <a:lstStyle/>
+          <a:p>
+            <a:pPr algn="ctr"/>
+          </a:p>
+        </p:txBody>
+      </p:sp>
+      <p:sp>
+        <p:nvSpPr>
+          <p:cNvPr id="76" name="Rounded Rectangle 75"/>
+          <p:cNvSpPr/>
+          <p:nvPr/>
+        </p:nvSpPr>
+        <p:spPr>
+          <a:xfrm>
+            <a:off x="5806440" y="4579658"/>
+            <a:ext cx="1251813" cy="108127"/>
+          </a:xfrm>
+          <a:prstGeom prst="roundRect">
+            <a:avLst>
+              <a:gd name="adj" fmla="val 50000"/>
+            </a:avLst>
+          </a:prstGeom>
+          <a:solidFill>
+            <a:srgbClr val="22C55E"/>
+          </a:solidFill>
+          <a:ln>
+            <a:noFill/>
+          </a:ln>
+          <a:effectLst>
+            <a:outerShdw blurRad="76200" dist="19050" dir="5400000" rotWithShape="0">
+              <a:srgbClr val="22C55E">
+                <a:alpha val="55000"/>
+              </a:srgbClr>
+            </a:outerShdw>
+          </a:effectLst>
+        </p:spPr>
+        <p:style>
+          <a:lnRef idx="1">
+            <a:schemeClr val="accent1"/>
+          </a:lnRef>
+          <a:fillRef idx="3">
+            <a:schemeClr val="accent1"/>
+          </a:fillRef>
+          <a:effectRef idx="2">
+            <a:schemeClr val="accent1"/>
+          </a:effectRef>
+          <a:fontRef idx="minor">
+            <a:schemeClr val="lt1"/>
+          </a:fontRef>
+        </p:style>
+        <p:txBody>
+          <a:bodyPr rtlCol="0" anchor="ctr"/>
+          <a:lstStyle/>
+          <a:p>
+            <a:pPr algn="ctr"/>
+          </a:p>
+        </p:txBody>
+      </p:sp>
+      <p:sp>
+        <p:nvSpPr>
+          <p:cNvPr id="77" name="TextBox 76"/>
+          <p:cNvSpPr txBox="1"/>
+          <p:nvPr/>
+        </p:nvSpPr>
+        <p:spPr>
+          <a:xfrm>
+            <a:off x="7543800" y="4547654"/>
+            <a:ext cx="457200" cy="172135"/>
+          </a:xfrm>
+          <a:prstGeom prst="rect">
+            <a:avLst/>
+          </a:prstGeom>
+          <a:noFill/>
+        </p:spPr>
+        <p:txBody>
+          <a:bodyPr wrap="none" lIns="0" rIns="0" tIns="0" bIns="0">
+            <a:spAutoFit/>
+          </a:bodyPr>
+          <a:lstStyle/>
+          <a:p>
+            <a:pPr algn="l"/>
+            <a:r>
+              <a:rPr sz="800" b="1">
+                <a:solidFill>
+                  <a:srgbClr val="22C55E"/>
+                </a:solidFill>
+                <a:latin typeface="Calibri"/>
+              </a:rPr>
+              <a:t>74%</a:t>
+            </a:r>
+          </a:p>
+        </p:txBody>
+      </p:sp>
+      <p:sp>
+        <p:nvSpPr>
+          <p:cNvPr id="78" name="Rounded Rectangle 77"/>
+          <p:cNvSpPr/>
+          <p:nvPr/>
+        </p:nvSpPr>
+        <p:spPr>
+          <a:xfrm>
+            <a:off x="5806440" y="4776254"/>
+            <a:ext cx="1691640" cy="108127"/>
+          </a:xfrm>
+          <a:prstGeom prst="roundRect">
+            <a:avLst>
+              <a:gd name="adj" fmla="val 50000"/>
+            </a:avLst>
+          </a:prstGeom>
+          <a:pattFill prst="smGrid">
+            <a:fgClr>
+              <a:srgbClr val="F59E0B"/>
+            </a:fgClr>
+            <a:bgClr>
+              <a:srgbClr val="FFFFFF"/>
+            </a:bgClr>
+          </a:pattFill>
+          <a:ln>
+            <a:noFill/>
+          </a:ln>
+          <a:effectLst/>
+        </p:spPr>
+        <p:style>
+          <a:lnRef idx="1">
+            <a:schemeClr val="accent1"/>
+          </a:lnRef>
+          <a:fillRef idx="3">
+            <a:schemeClr val="accent1"/>
+          </a:fillRef>
+          <a:effectRef idx="2">
+            <a:schemeClr val="accent1"/>
+          </a:effectRef>
+          <a:fontRef idx="minor">
+            <a:schemeClr val="lt1"/>
+          </a:fontRef>
+        </p:style>
+        <p:txBody>
+          <a:bodyPr rtlCol="0" anchor="ctr"/>
+          <a:lstStyle/>
+          <a:p>
+            <a:pPr algn="ctr"/>
+          </a:p>
+        </p:txBody>
+      </p:sp>
+      <p:sp>
+        <p:nvSpPr>
+          <p:cNvPr id="79" name="Rounded Rectangle 78"/>
+          <p:cNvSpPr/>
+          <p:nvPr/>
+        </p:nvSpPr>
+        <p:spPr>
+          <a:xfrm>
+            <a:off x="5806440" y="4776254"/>
+            <a:ext cx="108127" cy="108127"/>
+          </a:xfrm>
+          <a:prstGeom prst="roundRect">
+            <a:avLst>
+              <a:gd name="adj" fmla="val 50000"/>
+            </a:avLst>
+          </a:prstGeom>
+          <a:solidFill>
+            <a:srgbClr val="F59E0B"/>
+          </a:solidFill>
+          <a:ln>
+            <a:noFill/>
+          </a:ln>
+          <a:effectLst>
+            <a:outerShdw blurRad="76200" dist="19050" dir="5400000" rotWithShape="0">
+              <a:srgbClr val="F59E0B">
+                <a:alpha val="55000"/>
+              </a:srgbClr>
+            </a:outerShdw>
+          </a:effectLst>
+        </p:spPr>
+        <p:style>
+          <a:lnRef idx="1">
+            <a:schemeClr val="accent1"/>
+          </a:lnRef>
+          <a:fillRef idx="3">
+            <a:schemeClr val="accent1"/>
+          </a:fillRef>
+          <a:effectRef idx="2">
+            <a:schemeClr val="accent1"/>
+          </a:effectRef>
+          <a:fontRef idx="minor">
+            <a:schemeClr val="lt1"/>
+          </a:fontRef>
+        </p:style>
+        <p:txBody>
+          <a:bodyPr rtlCol="0" anchor="ctr"/>
+          <a:lstStyle/>
+          <a:p>
+            <a:pPr algn="ctr"/>
+          </a:p>
+        </p:txBody>
+      </p:sp>
+      <p:sp>
+        <p:nvSpPr>
+          <p:cNvPr id="80" name="TextBox 79"/>
+          <p:cNvSpPr txBox="1"/>
+          <p:nvPr/>
+        </p:nvSpPr>
+        <p:spPr>
+          <a:xfrm>
+            <a:off x="7543800" y="4744250"/>
+            <a:ext cx="457200" cy="172135"/>
+          </a:xfrm>
+          <a:prstGeom prst="rect">
+            <a:avLst/>
+          </a:prstGeom>
+          <a:noFill/>
+        </p:spPr>
+        <p:txBody>
+          <a:bodyPr wrap="none" lIns="0" rIns="0" tIns="0" bIns="0">
+            <a:spAutoFit/>
+          </a:bodyPr>
+          <a:lstStyle/>
+          <a:p>
+            <a:pPr algn="l"/>
+            <a:r>
+              <a:rPr sz="800" b="1">
+                <a:solidFill>
+                  <a:srgbClr val="F59E0B"/>
+                </a:solidFill>
+                <a:latin typeface="Calibri"/>
+              </a:rPr>
+              <a:t>4%</a:t>
+            </a:r>
+          </a:p>
+        </p:txBody>
+      </p:sp>
     </p:spTree>
     <p:extLst>
       <p:ext uri="{BB962C8B-B14F-4D97-AF65-F5344CB8AC3E}">

--- a/cierre_base.pptx
+++ b/cierre_base.pptx
@@ -6301,7 +6301,7 @@
               <a:tr h="201168">
                 <a:tc>
                   <a:txBody>
-                    <a:bodyPr wrap="square"/>
+                    <a:bodyPr wrap="none"/>
                     <a:lstStyle/>
                     <a:p>
                       <a:pPr algn="ctr"/>
@@ -6324,7 +6324,7 @@
                 </a:tc>
                 <a:tc>
                   <a:txBody>
-                    <a:bodyPr wrap="square"/>
+                    <a:bodyPr wrap="none"/>
                     <a:lstStyle/>
                     <a:p>
                       <a:pPr algn="ctr"/>
@@ -6347,7 +6347,7 @@
                 </a:tc>
                 <a:tc>
                   <a:txBody>
-                    <a:bodyPr wrap="square"/>
+                    <a:bodyPr wrap="none"/>
                     <a:lstStyle/>
                     <a:p>
                       <a:pPr algn="ctr"/>
@@ -6370,7 +6370,7 @@
                 </a:tc>
                 <a:tc>
                   <a:txBody>
-                    <a:bodyPr wrap="square"/>
+                    <a:bodyPr wrap="none"/>
                     <a:lstStyle/>
                     <a:p>
                       <a:pPr algn="ctr"/>
@@ -6393,7 +6393,7 @@
                 </a:tc>
                 <a:tc>
                   <a:txBody>
-                    <a:bodyPr wrap="square"/>
+                    <a:bodyPr wrap="none"/>
                     <a:lstStyle/>
                     <a:p>
                       <a:pPr algn="ctr"/>
@@ -6416,7 +6416,7 @@
                 </a:tc>
                 <a:tc>
                   <a:txBody>
-                    <a:bodyPr wrap="square"/>
+                    <a:bodyPr wrap="none"/>
                     <a:lstStyle/>
                     <a:p>
                       <a:pPr algn="ctr"/>
@@ -6439,7 +6439,7 @@
                 </a:tc>
                 <a:tc>
                   <a:txBody>
-                    <a:bodyPr wrap="square"/>
+                    <a:bodyPr wrap="none"/>
                     <a:lstStyle/>
                     <a:p>
                       <a:pPr algn="ctr"/>
@@ -6462,7 +6462,7 @@
                 </a:tc>
                 <a:tc>
                   <a:txBody>
-                    <a:bodyPr wrap="square"/>
+                    <a:bodyPr wrap="none"/>
                     <a:lstStyle/>
                     <a:p>
                       <a:pPr algn="ctr"/>
@@ -6487,7 +6487,7 @@
               <a:tr h="196596">
                 <a:tc>
                   <a:txBody>
-                    <a:bodyPr wrap="square"/>
+                    <a:bodyPr wrap="none"/>
                     <a:lstStyle/>
                     <a:p>
                       <a:pPr algn="ctr"/>
@@ -6510,7 +6510,7 @@
                 </a:tc>
                 <a:tc>
                   <a:txBody>
-                    <a:bodyPr wrap="square"/>
+                    <a:bodyPr wrap="none"/>
                     <a:lstStyle/>
                     <a:p>
                       <a:pPr algn="l"/>
@@ -6533,7 +6533,7 @@
                 </a:tc>
                 <a:tc>
                   <a:txBody>
-                    <a:bodyPr wrap="square"/>
+                    <a:bodyPr wrap="none"/>
                     <a:lstStyle/>
                     <a:p>
                       <a:pPr algn="ctr"/>
@@ -6556,7 +6556,7 @@
                 </a:tc>
                 <a:tc>
                   <a:txBody>
-                    <a:bodyPr wrap="square"/>
+                    <a:bodyPr wrap="none"/>
                     <a:lstStyle/>
                     <a:p>
                       <a:pPr algn="ctr"/>
@@ -6579,7 +6579,7 @@
                 </a:tc>
                 <a:tc>
                   <a:txBody>
-                    <a:bodyPr wrap="square"/>
+                    <a:bodyPr wrap="none"/>
                     <a:lstStyle/>
                     <a:p>
                       <a:pPr algn="ctr"/>
@@ -6602,7 +6602,7 @@
                 </a:tc>
                 <a:tc>
                   <a:txBody>
-                    <a:bodyPr wrap="square"/>
+                    <a:bodyPr wrap="none"/>
                     <a:lstStyle/>
                     <a:p>
                       <a:pPr algn="ctr"/>
@@ -6625,7 +6625,7 @@
                 </a:tc>
                 <a:tc>
                   <a:txBody>
-                    <a:bodyPr wrap="square"/>
+                    <a:bodyPr wrap="none"/>
                     <a:lstStyle/>
                     <a:p>
                       <a:pPr algn="r"/>
@@ -6648,7 +6648,7 @@
                 </a:tc>
                 <a:tc>
                   <a:txBody>
-                    <a:bodyPr wrap="square"/>
+                    <a:bodyPr wrap="none"/>
                     <a:lstStyle/>
                     <a:p>
                       <a:pPr algn="ctr"/>
@@ -6673,7 +6673,7 @@
               <a:tr h="196596">
                 <a:tc>
                   <a:txBody>
-                    <a:bodyPr wrap="square"/>
+                    <a:bodyPr wrap="none"/>
                     <a:lstStyle/>
                     <a:p>
                       <a:pPr algn="ctr"/>
@@ -6696,7 +6696,7 @@
                 </a:tc>
                 <a:tc>
                   <a:txBody>
-                    <a:bodyPr wrap="square"/>
+                    <a:bodyPr wrap="none"/>
                     <a:lstStyle/>
                     <a:p>
                       <a:pPr algn="l"/>
@@ -6719,7 +6719,7 @@
                 </a:tc>
                 <a:tc>
                   <a:txBody>
-                    <a:bodyPr wrap="square"/>
+                    <a:bodyPr wrap="none"/>
                     <a:lstStyle/>
                     <a:p>
                       <a:pPr algn="ctr"/>
@@ -6742,7 +6742,7 @@
                 </a:tc>
                 <a:tc>
                   <a:txBody>
-                    <a:bodyPr wrap="square"/>
+                    <a:bodyPr wrap="none"/>
                     <a:lstStyle/>
                     <a:p>
                       <a:pPr algn="ctr"/>
@@ -6765,7 +6765,7 @@
                 </a:tc>
                 <a:tc>
                   <a:txBody>
-                    <a:bodyPr wrap="square"/>
+                    <a:bodyPr wrap="none"/>
                     <a:lstStyle/>
                     <a:p>
                       <a:pPr algn="ctr"/>
@@ -6788,7 +6788,7 @@
                 </a:tc>
                 <a:tc>
                   <a:txBody>
-                    <a:bodyPr wrap="square"/>
+                    <a:bodyPr wrap="none"/>
                     <a:lstStyle/>
                     <a:p>
                       <a:pPr algn="ctr"/>
@@ -6811,7 +6811,7 @@
                 </a:tc>
                 <a:tc>
                   <a:txBody>
-                    <a:bodyPr wrap="square"/>
+                    <a:bodyPr wrap="none"/>
                     <a:lstStyle/>
                     <a:p>
                       <a:pPr algn="r"/>
@@ -6834,7 +6834,7 @@
                 </a:tc>
                 <a:tc>
                   <a:txBody>
-                    <a:bodyPr wrap="square"/>
+                    <a:bodyPr wrap="none"/>
                     <a:lstStyle/>
                     <a:p>
                       <a:pPr algn="ctr"/>
@@ -6859,7 +6859,7 @@
               <a:tr h="196596">
                 <a:tc>
                   <a:txBody>
-                    <a:bodyPr wrap="square"/>
+                    <a:bodyPr wrap="none"/>
                     <a:lstStyle/>
                     <a:p>
                       <a:pPr algn="ctr"/>
@@ -6882,7 +6882,7 @@
                 </a:tc>
                 <a:tc>
                   <a:txBody>
-                    <a:bodyPr wrap="square"/>
+                    <a:bodyPr wrap="none"/>
                     <a:lstStyle/>
                     <a:p>
                       <a:pPr algn="l"/>
@@ -6905,7 +6905,7 @@
                 </a:tc>
                 <a:tc>
                   <a:txBody>
-                    <a:bodyPr wrap="square"/>
+                    <a:bodyPr wrap="none"/>
                     <a:lstStyle/>
                     <a:p>
                       <a:pPr algn="ctr"/>
@@ -6928,7 +6928,7 @@
                 </a:tc>
                 <a:tc>
                   <a:txBody>
-                    <a:bodyPr wrap="square"/>
+                    <a:bodyPr wrap="none"/>
                     <a:lstStyle/>
                     <a:p>
                       <a:pPr algn="ctr"/>
@@ -6951,7 +6951,7 @@
                 </a:tc>
                 <a:tc>
                   <a:txBody>
-                    <a:bodyPr wrap="square"/>
+                    <a:bodyPr wrap="none"/>
                     <a:lstStyle/>
                     <a:p>
                       <a:pPr algn="ctr"/>
@@ -6974,7 +6974,7 @@
                 </a:tc>
                 <a:tc>
                   <a:txBody>
-                    <a:bodyPr wrap="square"/>
+                    <a:bodyPr wrap="none"/>
                     <a:lstStyle/>
                     <a:p>
                       <a:pPr algn="ctr"/>
@@ -6997,7 +6997,7 @@
                 </a:tc>
                 <a:tc>
                   <a:txBody>
-                    <a:bodyPr wrap="square"/>
+                    <a:bodyPr wrap="none"/>
                     <a:lstStyle/>
                     <a:p>
                       <a:pPr algn="r"/>
@@ -7020,7 +7020,7 @@
                 </a:tc>
                 <a:tc>
                   <a:txBody>
-                    <a:bodyPr wrap="square"/>
+                    <a:bodyPr wrap="none"/>
                     <a:lstStyle/>
                     <a:p>
                       <a:pPr algn="ctr"/>
@@ -7045,7 +7045,7 @@
               <a:tr h="196596">
                 <a:tc>
                   <a:txBody>
-                    <a:bodyPr wrap="square"/>
+                    <a:bodyPr wrap="none"/>
                     <a:lstStyle/>
                     <a:p>
                       <a:pPr algn="ctr"/>
@@ -7068,7 +7068,7 @@
                 </a:tc>
                 <a:tc>
                   <a:txBody>
-                    <a:bodyPr wrap="square"/>
+                    <a:bodyPr wrap="none"/>
                     <a:lstStyle/>
                     <a:p>
                       <a:pPr algn="l"/>
@@ -7091,7 +7091,7 @@
                 </a:tc>
                 <a:tc>
                   <a:txBody>
-                    <a:bodyPr wrap="square"/>
+                    <a:bodyPr wrap="none"/>
                     <a:lstStyle/>
                     <a:p>
                       <a:pPr algn="ctr"/>
@@ -7114,7 +7114,7 @@
                 </a:tc>
                 <a:tc>
                   <a:txBody>
-                    <a:bodyPr wrap="square"/>
+                    <a:bodyPr wrap="none"/>
                     <a:lstStyle/>
                     <a:p>
                       <a:pPr algn="ctr"/>
@@ -7137,7 +7137,7 @@
                 </a:tc>
                 <a:tc>
                   <a:txBody>
-                    <a:bodyPr wrap="square"/>
+                    <a:bodyPr wrap="none"/>
                     <a:lstStyle/>
                     <a:p>
                       <a:pPr algn="ctr"/>
@@ -7160,7 +7160,7 @@
                 </a:tc>
                 <a:tc>
                   <a:txBody>
-                    <a:bodyPr wrap="square"/>
+                    <a:bodyPr wrap="none"/>
                     <a:lstStyle/>
                     <a:p>
                       <a:pPr algn="ctr"/>
@@ -7183,7 +7183,7 @@
                 </a:tc>
                 <a:tc>
                   <a:txBody>
-                    <a:bodyPr wrap="square"/>
+                    <a:bodyPr wrap="none"/>
                     <a:lstStyle/>
                     <a:p>
                       <a:pPr algn="r"/>
@@ -7206,7 +7206,7 @@
                 </a:tc>
                 <a:tc>
                   <a:txBody>
-                    <a:bodyPr wrap="square"/>
+                    <a:bodyPr wrap="none"/>
                     <a:lstStyle/>
                     <a:p>
                       <a:pPr algn="ctr"/>
@@ -7231,7 +7231,7 @@
               <a:tr h="196596">
                 <a:tc>
                   <a:txBody>
-                    <a:bodyPr wrap="square"/>
+                    <a:bodyPr wrap="none"/>
                     <a:lstStyle/>
                     <a:p>
                       <a:pPr algn="ctr"/>
@@ -7254,7 +7254,7 @@
                 </a:tc>
                 <a:tc>
                   <a:txBody>
-                    <a:bodyPr wrap="square"/>
+                    <a:bodyPr wrap="none"/>
                     <a:lstStyle/>
                     <a:p>
                       <a:pPr algn="l"/>
@@ -7277,7 +7277,7 @@
                 </a:tc>
                 <a:tc>
                   <a:txBody>
-                    <a:bodyPr wrap="square"/>
+                    <a:bodyPr wrap="none"/>
                     <a:lstStyle/>
                     <a:p>
                       <a:pPr algn="ctr"/>
@@ -7300,7 +7300,7 @@
                 </a:tc>
                 <a:tc>
                   <a:txBody>
-                    <a:bodyPr wrap="square"/>
+                    <a:bodyPr wrap="none"/>
                     <a:lstStyle/>
                     <a:p>
                       <a:pPr algn="ctr"/>
@@ -7323,7 +7323,7 @@
                 </a:tc>
                 <a:tc>
                   <a:txBody>
-                    <a:bodyPr wrap="square"/>
+                    <a:bodyPr wrap="none"/>
                     <a:lstStyle/>
                     <a:p>
                       <a:pPr algn="ctr"/>
@@ -7346,7 +7346,7 @@
                 </a:tc>
                 <a:tc>
                   <a:txBody>
-                    <a:bodyPr wrap="square"/>
+                    <a:bodyPr wrap="none"/>
                     <a:lstStyle/>
                     <a:p>
                       <a:pPr algn="ctr"/>
@@ -7369,7 +7369,7 @@
                 </a:tc>
                 <a:tc>
                   <a:txBody>
-                    <a:bodyPr wrap="square"/>
+                    <a:bodyPr wrap="none"/>
                     <a:lstStyle/>
                     <a:p>
                       <a:pPr algn="r"/>
@@ -7392,7 +7392,7 @@
                 </a:tc>
                 <a:tc>
                   <a:txBody>
-                    <a:bodyPr wrap="square"/>
+                    <a:bodyPr wrap="none"/>
                     <a:lstStyle/>
                     <a:p>
                       <a:pPr algn="ctr"/>
@@ -7417,7 +7417,7 @@
               <a:tr h="196596">
                 <a:tc>
                   <a:txBody>
-                    <a:bodyPr wrap="square"/>
+                    <a:bodyPr wrap="none"/>
                     <a:lstStyle/>
                     <a:p>
                       <a:pPr algn="ctr"/>
@@ -7440,7 +7440,7 @@
                 </a:tc>
                 <a:tc>
                   <a:txBody>
-                    <a:bodyPr wrap="square"/>
+                    <a:bodyPr wrap="none"/>
                     <a:lstStyle/>
                     <a:p>
                       <a:pPr algn="l"/>
@@ -7451,7 +7451,7 @@
                           </a:solidFill>
                           <a:latin typeface="Calibri"/>
                         </a:rPr>
-                        <a:t>Contabilidad || Integración Mecanica-SAE (Fase 1)</a:t>
+                        <a:t>Contabilidad || Integración Mecanica-SAE (Fase…</a:t>
                       </a:r>
                     </a:p>
                   </a:txBody>
@@ -7463,7 +7463,7 @@
                 </a:tc>
                 <a:tc>
                   <a:txBody>
-                    <a:bodyPr wrap="square"/>
+                    <a:bodyPr wrap="none"/>
                     <a:lstStyle/>
                     <a:p>
                       <a:pPr algn="ctr"/>
@@ -7486,7 +7486,7 @@
                 </a:tc>
                 <a:tc>
                   <a:txBody>
-                    <a:bodyPr wrap="square"/>
+                    <a:bodyPr wrap="none"/>
                     <a:lstStyle/>
                     <a:p>
                       <a:pPr algn="ctr"/>
@@ -7509,7 +7509,7 @@
                 </a:tc>
                 <a:tc>
                   <a:txBody>
-                    <a:bodyPr wrap="square"/>
+                    <a:bodyPr wrap="none"/>
                     <a:lstStyle/>
                     <a:p>
                       <a:pPr algn="ctr"/>
@@ -7532,7 +7532,7 @@
                 </a:tc>
                 <a:tc>
                   <a:txBody>
-                    <a:bodyPr wrap="square"/>
+                    <a:bodyPr wrap="none"/>
                     <a:lstStyle/>
                     <a:p>
                       <a:pPr algn="ctr"/>
@@ -7555,7 +7555,7 @@
                 </a:tc>
                 <a:tc>
                   <a:txBody>
-                    <a:bodyPr wrap="square"/>
+                    <a:bodyPr wrap="none"/>
                     <a:lstStyle/>
                     <a:p>
                       <a:pPr algn="r"/>
@@ -7578,7 +7578,7 @@
                 </a:tc>
                 <a:tc>
                   <a:txBody>
-                    <a:bodyPr wrap="square"/>
+                    <a:bodyPr wrap="none"/>
                     <a:lstStyle/>
                     <a:p>
                       <a:pPr algn="ctr"/>
@@ -7603,7 +7603,7 @@
               <a:tr h="196596">
                 <a:tc>
                   <a:txBody>
-                    <a:bodyPr wrap="square"/>
+                    <a:bodyPr wrap="none"/>
                     <a:lstStyle/>
                     <a:p>
                       <a:pPr algn="ctr"/>
@@ -7626,7 +7626,7 @@
                 </a:tc>
                 <a:tc>
                   <a:txBody>
-                    <a:bodyPr wrap="square"/>
+                    <a:bodyPr wrap="none"/>
                     <a:lstStyle/>
                     <a:p>
                       <a:pPr algn="l"/>
@@ -7649,7 +7649,7 @@
                 </a:tc>
                 <a:tc>
                   <a:txBody>
-                    <a:bodyPr wrap="square"/>
+                    <a:bodyPr wrap="none"/>
                     <a:lstStyle/>
                     <a:p>
                       <a:pPr algn="ctr"/>
@@ -7672,7 +7672,7 @@
                 </a:tc>
                 <a:tc>
                   <a:txBody>
-                    <a:bodyPr wrap="square"/>
+                    <a:bodyPr wrap="none"/>
                     <a:lstStyle/>
                     <a:p>
                       <a:pPr algn="ctr"/>
@@ -7695,7 +7695,7 @@
                 </a:tc>
                 <a:tc>
                   <a:txBody>
-                    <a:bodyPr wrap="square"/>
+                    <a:bodyPr wrap="none"/>
                     <a:lstStyle/>
                     <a:p>
                       <a:pPr algn="ctr"/>
@@ -7718,7 +7718,7 @@
                 </a:tc>
                 <a:tc>
                   <a:txBody>
-                    <a:bodyPr wrap="square"/>
+                    <a:bodyPr wrap="none"/>
                     <a:lstStyle/>
                     <a:p>
                       <a:pPr algn="ctr"/>
@@ -7741,7 +7741,7 @@
                 </a:tc>
                 <a:tc>
                   <a:txBody>
-                    <a:bodyPr wrap="square"/>
+                    <a:bodyPr wrap="none"/>
                     <a:lstStyle/>
                     <a:p>
                       <a:pPr algn="r"/>
@@ -7764,7 +7764,7 @@
                 </a:tc>
                 <a:tc>
                   <a:txBody>
-                    <a:bodyPr wrap="square"/>
+                    <a:bodyPr wrap="none"/>
                     <a:lstStyle/>
                     <a:p>
                       <a:pPr algn="ctr"/>
@@ -7789,7 +7789,7 @@
               <a:tr h="196596">
                 <a:tc>
                   <a:txBody>
-                    <a:bodyPr wrap="square"/>
+                    <a:bodyPr wrap="none"/>
                     <a:lstStyle/>
                     <a:p>
                       <a:pPr algn="ctr"/>
@@ -7812,7 +7812,7 @@
                 </a:tc>
                 <a:tc>
                   <a:txBody>
-                    <a:bodyPr wrap="square"/>
+                    <a:bodyPr wrap="none"/>
                     <a:lstStyle/>
                     <a:p>
                       <a:pPr algn="l"/>
@@ -7835,7 +7835,7 @@
                 </a:tc>
                 <a:tc>
                   <a:txBody>
-                    <a:bodyPr wrap="square"/>
+                    <a:bodyPr wrap="none"/>
                     <a:lstStyle/>
                     <a:p>
                       <a:pPr algn="ctr"/>
@@ -7858,7 +7858,7 @@
                 </a:tc>
                 <a:tc>
                   <a:txBody>
-                    <a:bodyPr wrap="square"/>
+                    <a:bodyPr wrap="none"/>
                     <a:lstStyle/>
                     <a:p>
                       <a:pPr algn="ctr"/>
@@ -7881,7 +7881,7 @@
                 </a:tc>
                 <a:tc>
                   <a:txBody>
-                    <a:bodyPr wrap="square"/>
+                    <a:bodyPr wrap="none"/>
                     <a:lstStyle/>
                     <a:p>
                       <a:pPr algn="ctr"/>
@@ -7904,7 +7904,7 @@
                 </a:tc>
                 <a:tc>
                   <a:txBody>
-                    <a:bodyPr wrap="square"/>
+                    <a:bodyPr wrap="none"/>
                     <a:lstStyle/>
                     <a:p>
                       <a:pPr algn="ctr"/>
@@ -7927,7 +7927,7 @@
                 </a:tc>
                 <a:tc>
                   <a:txBody>
-                    <a:bodyPr wrap="square"/>
+                    <a:bodyPr wrap="none"/>
                     <a:lstStyle/>
                     <a:p>
                       <a:pPr algn="r"/>
@@ -7950,7 +7950,7 @@
                 </a:tc>
                 <a:tc>
                   <a:txBody>
-                    <a:bodyPr wrap="square"/>
+                    <a:bodyPr wrap="none"/>
                     <a:lstStyle/>
                     <a:p>
                       <a:pPr algn="ctr"/>
@@ -7975,7 +7975,7 @@
               <a:tr h="196596">
                 <a:tc>
                   <a:txBody>
-                    <a:bodyPr wrap="square"/>
+                    <a:bodyPr wrap="none"/>
                     <a:lstStyle/>
                     <a:p>
                       <a:pPr algn="ctr"/>
@@ -7998,7 +7998,7 @@
                 </a:tc>
                 <a:tc>
                   <a:txBody>
-                    <a:bodyPr wrap="square"/>
+                    <a:bodyPr wrap="none"/>
                     <a:lstStyle/>
                     <a:p>
                       <a:pPr algn="l"/>
@@ -8021,7 +8021,7 @@
                 </a:tc>
                 <a:tc>
                   <a:txBody>
-                    <a:bodyPr wrap="square"/>
+                    <a:bodyPr wrap="none"/>
                     <a:lstStyle/>
                     <a:p>
                       <a:pPr algn="ctr"/>
@@ -8044,7 +8044,7 @@
                 </a:tc>
                 <a:tc>
                   <a:txBody>
-                    <a:bodyPr wrap="square"/>
+                    <a:bodyPr wrap="none"/>
                     <a:lstStyle/>
                     <a:p>
                       <a:pPr algn="ctr"/>
@@ -8067,7 +8067,7 @@
                 </a:tc>
                 <a:tc>
                   <a:txBody>
-                    <a:bodyPr wrap="square"/>
+                    <a:bodyPr wrap="none"/>
                     <a:lstStyle/>
                     <a:p>
                       <a:pPr algn="ctr"/>
@@ -8090,7 +8090,7 @@
                 </a:tc>
                 <a:tc>
                   <a:txBody>
-                    <a:bodyPr wrap="square"/>
+                    <a:bodyPr wrap="none"/>
                     <a:lstStyle/>
                     <a:p>
                       <a:pPr algn="ctr"/>
@@ -8113,7 +8113,7 @@
                 </a:tc>
                 <a:tc>
                   <a:txBody>
-                    <a:bodyPr wrap="square"/>
+                    <a:bodyPr wrap="none"/>
                     <a:lstStyle/>
                     <a:p>
                       <a:pPr algn="r"/>
@@ -8136,7 +8136,7 @@
                 </a:tc>
                 <a:tc>
                   <a:txBody>
-                    <a:bodyPr wrap="square"/>
+                    <a:bodyPr wrap="none"/>
                     <a:lstStyle/>
                     <a:p>
                       <a:pPr algn="ctr"/>
@@ -8161,7 +8161,7 @@
               <a:tr h="196596">
                 <a:tc>
                   <a:txBody>
-                    <a:bodyPr wrap="square"/>
+                    <a:bodyPr wrap="none"/>
                     <a:lstStyle/>
                     <a:p>
                       <a:pPr algn="ctr"/>
@@ -8184,7 +8184,7 @@
                 </a:tc>
                 <a:tc>
                   <a:txBody>
-                    <a:bodyPr wrap="square"/>
+                    <a:bodyPr wrap="none"/>
                     <a:lstStyle/>
                     <a:p>
                       <a:pPr algn="l"/>
@@ -8207,7 +8207,7 @@
                 </a:tc>
                 <a:tc>
                   <a:txBody>
-                    <a:bodyPr wrap="square"/>
+                    <a:bodyPr wrap="none"/>
                     <a:lstStyle/>
                     <a:p>
                       <a:pPr algn="ctr"/>
@@ -8230,7 +8230,7 @@
                 </a:tc>
                 <a:tc>
                   <a:txBody>
-                    <a:bodyPr wrap="square"/>
+                    <a:bodyPr wrap="none"/>
                     <a:lstStyle/>
                     <a:p>
                       <a:pPr algn="ctr"/>
@@ -8253,7 +8253,7 @@
                 </a:tc>
                 <a:tc>
                   <a:txBody>
-                    <a:bodyPr wrap="square"/>
+                    <a:bodyPr wrap="none"/>
                     <a:lstStyle/>
                     <a:p>
                       <a:pPr algn="ctr"/>
@@ -8276,7 +8276,7 @@
                 </a:tc>
                 <a:tc>
                   <a:txBody>
-                    <a:bodyPr wrap="square"/>
+                    <a:bodyPr wrap="none"/>
                     <a:lstStyle/>
                     <a:p>
                       <a:pPr algn="ctr"/>
@@ -8299,7 +8299,7 @@
                 </a:tc>
                 <a:tc>
                   <a:txBody>
-                    <a:bodyPr wrap="square"/>
+                    <a:bodyPr wrap="none"/>
                     <a:lstStyle/>
                     <a:p>
                       <a:pPr algn="r"/>
@@ -8322,7 +8322,7 @@
                 </a:tc>
                 <a:tc>
                   <a:txBody>
-                    <a:bodyPr wrap="square"/>
+                    <a:bodyPr wrap="none"/>
                     <a:lstStyle/>
                     <a:p>
                       <a:pPr algn="ctr"/>
@@ -8347,7 +8347,7 @@
               <a:tr h="196596">
                 <a:tc>
                   <a:txBody>
-                    <a:bodyPr wrap="square"/>
+                    <a:bodyPr wrap="none"/>
                     <a:lstStyle/>
                     <a:p>
                       <a:pPr algn="ctr"/>
@@ -8370,7 +8370,7 @@
                 </a:tc>
                 <a:tc>
                   <a:txBody>
-                    <a:bodyPr wrap="square"/>
+                    <a:bodyPr wrap="none"/>
                     <a:lstStyle/>
                     <a:p>
                       <a:pPr algn="l"/>
@@ -8393,7 +8393,7 @@
                 </a:tc>
                 <a:tc>
                   <a:txBody>
-                    <a:bodyPr wrap="square"/>
+                    <a:bodyPr wrap="none"/>
                     <a:lstStyle/>
                     <a:p>
                       <a:pPr algn="ctr"/>
@@ -8416,7 +8416,7 @@
                 </a:tc>
                 <a:tc>
                   <a:txBody>
-                    <a:bodyPr wrap="square"/>
+                    <a:bodyPr wrap="none"/>
                     <a:lstStyle/>
                     <a:p>
                       <a:pPr algn="ctr"/>
@@ -8439,7 +8439,7 @@
                 </a:tc>
                 <a:tc>
                   <a:txBody>
-                    <a:bodyPr wrap="square"/>
+                    <a:bodyPr wrap="none"/>
                     <a:lstStyle/>
                     <a:p>
                       <a:pPr algn="ctr"/>
@@ -8462,7 +8462,7 @@
                 </a:tc>
                 <a:tc>
                   <a:txBody>
-                    <a:bodyPr wrap="square"/>
+                    <a:bodyPr wrap="none"/>
                     <a:lstStyle/>
                     <a:p>
                       <a:pPr algn="ctr"/>
@@ -8485,7 +8485,7 @@
                 </a:tc>
                 <a:tc>
                   <a:txBody>
-                    <a:bodyPr wrap="square"/>
+                    <a:bodyPr wrap="none"/>
                     <a:lstStyle/>
                     <a:p>
                       <a:pPr algn="r"/>
@@ -8508,7 +8508,7 @@
                 </a:tc>
                 <a:tc>
                   <a:txBody>
-                    <a:bodyPr wrap="square"/>
+                    <a:bodyPr wrap="none"/>
                     <a:lstStyle/>
                     <a:p>
                       <a:pPr algn="ctr"/>
@@ -8533,7 +8533,7 @@
               <a:tr h="196596">
                 <a:tc>
                   <a:txBody>
-                    <a:bodyPr wrap="square"/>
+                    <a:bodyPr wrap="none"/>
                     <a:lstStyle/>
                     <a:p>
                       <a:pPr algn="ctr"/>
@@ -8556,7 +8556,7 @@
                 </a:tc>
                 <a:tc>
                   <a:txBody>
-                    <a:bodyPr wrap="square"/>
+                    <a:bodyPr wrap="none"/>
                     <a:lstStyle/>
                     <a:p>
                       <a:pPr algn="l"/>
@@ -8579,7 +8579,7 @@
                 </a:tc>
                 <a:tc>
                   <a:txBody>
-                    <a:bodyPr wrap="square"/>
+                    <a:bodyPr wrap="none"/>
                     <a:lstStyle/>
                     <a:p>
                       <a:pPr algn="ctr"/>
@@ -8602,7 +8602,7 @@
                 </a:tc>
                 <a:tc>
                   <a:txBody>
-                    <a:bodyPr wrap="square"/>
+                    <a:bodyPr wrap="none"/>
                     <a:lstStyle/>
                     <a:p>
                       <a:pPr algn="ctr"/>
@@ -8625,7 +8625,7 @@
                 </a:tc>
                 <a:tc>
                   <a:txBody>
-                    <a:bodyPr wrap="square"/>
+                    <a:bodyPr wrap="none"/>
                     <a:lstStyle/>
                     <a:p>
                       <a:pPr algn="ctr"/>
@@ -8648,7 +8648,7 @@
                 </a:tc>
                 <a:tc>
                   <a:txBody>
-                    <a:bodyPr wrap="square"/>
+                    <a:bodyPr wrap="none"/>
                     <a:lstStyle/>
                     <a:p>
                       <a:pPr algn="ctr"/>
@@ -8671,7 +8671,7 @@
                 </a:tc>
                 <a:tc>
                   <a:txBody>
-                    <a:bodyPr wrap="square"/>
+                    <a:bodyPr wrap="none"/>
                     <a:lstStyle/>
                     <a:p>
                       <a:pPr algn="r"/>
@@ -8694,7 +8694,7 @@
                 </a:tc>
                 <a:tc>
                   <a:txBody>
-                    <a:bodyPr wrap="square"/>
+                    <a:bodyPr wrap="none"/>
                     <a:lstStyle/>
                     <a:p>
                       <a:pPr algn="ctr"/>
@@ -8719,7 +8719,7 @@
               <a:tr h="196596">
                 <a:tc>
                   <a:txBody>
-                    <a:bodyPr wrap="square"/>
+                    <a:bodyPr wrap="none"/>
                     <a:lstStyle/>
                     <a:p>
                       <a:pPr algn="ctr"/>
@@ -8742,7 +8742,7 @@
                 </a:tc>
                 <a:tc>
                   <a:txBody>
-                    <a:bodyPr wrap="square"/>
+                    <a:bodyPr wrap="none"/>
                     <a:lstStyle/>
                     <a:p>
                       <a:pPr algn="l"/>
@@ -8765,7 +8765,7 @@
                 </a:tc>
                 <a:tc>
                   <a:txBody>
-                    <a:bodyPr wrap="square"/>
+                    <a:bodyPr wrap="none"/>
                     <a:lstStyle/>
                     <a:p>
                       <a:pPr algn="ctr"/>
@@ -8788,7 +8788,7 @@
                 </a:tc>
                 <a:tc>
                   <a:txBody>
-                    <a:bodyPr wrap="square"/>
+                    <a:bodyPr wrap="none"/>
                     <a:lstStyle/>
                     <a:p>
                       <a:pPr algn="ctr"/>
@@ -8811,7 +8811,7 @@
                 </a:tc>
                 <a:tc>
                   <a:txBody>
-                    <a:bodyPr wrap="square"/>
+                    <a:bodyPr wrap="none"/>
                     <a:lstStyle/>
                     <a:p>
                       <a:pPr algn="ctr"/>
@@ -8834,7 +8834,7 @@
                 </a:tc>
                 <a:tc>
                   <a:txBody>
-                    <a:bodyPr wrap="square"/>
+                    <a:bodyPr wrap="none"/>
                     <a:lstStyle/>
                     <a:p>
                       <a:pPr algn="ctr"/>
@@ -8857,7 +8857,7 @@
                 </a:tc>
                 <a:tc>
                   <a:txBody>
-                    <a:bodyPr wrap="square"/>
+                    <a:bodyPr wrap="none"/>
                     <a:lstStyle/>
                     <a:p>
                       <a:pPr algn="r"/>
@@ -8880,7 +8880,7 @@
                 </a:tc>
                 <a:tc>
                   <a:txBody>
-                    <a:bodyPr wrap="square"/>
+                    <a:bodyPr wrap="none"/>
                     <a:lstStyle/>
                     <a:p>
                       <a:pPr algn="ctr"/>
@@ -8905,7 +8905,7 @@
               <a:tr h="196596">
                 <a:tc>
                   <a:txBody>
-                    <a:bodyPr wrap="square"/>
+                    <a:bodyPr wrap="none"/>
                     <a:lstStyle/>
                     <a:p>
                       <a:pPr algn="ctr"/>
@@ -8928,7 +8928,7 @@
                 </a:tc>
                 <a:tc>
                   <a:txBody>
-                    <a:bodyPr wrap="square"/>
+                    <a:bodyPr wrap="none"/>
                     <a:lstStyle/>
                     <a:p>
                       <a:pPr algn="l"/>
@@ -8951,7 +8951,7 @@
                 </a:tc>
                 <a:tc>
                   <a:txBody>
-                    <a:bodyPr wrap="square"/>
+                    <a:bodyPr wrap="none"/>
                     <a:lstStyle/>
                     <a:p>
                       <a:pPr algn="ctr"/>
@@ -8974,7 +8974,7 @@
                 </a:tc>
                 <a:tc>
                   <a:txBody>
-                    <a:bodyPr wrap="square"/>
+                    <a:bodyPr wrap="none"/>
                     <a:lstStyle/>
                     <a:p>
                       <a:pPr algn="ctr"/>
@@ -8997,7 +8997,7 @@
                 </a:tc>
                 <a:tc>
                   <a:txBody>
-                    <a:bodyPr wrap="square"/>
+                    <a:bodyPr wrap="none"/>
                     <a:lstStyle/>
                     <a:p>
                       <a:pPr algn="ctr"/>
@@ -9020,7 +9020,7 @@
                 </a:tc>
                 <a:tc>
                   <a:txBody>
-                    <a:bodyPr wrap="square"/>
+                    <a:bodyPr wrap="none"/>
                     <a:lstStyle/>
                     <a:p>
                       <a:pPr algn="ctr"/>
@@ -9043,7 +9043,7 @@
                 </a:tc>
                 <a:tc>
                   <a:txBody>
-                    <a:bodyPr wrap="square"/>
+                    <a:bodyPr wrap="none"/>
                     <a:lstStyle/>
                     <a:p>
                       <a:pPr algn="r"/>
@@ -9066,7 +9066,7 @@
                 </a:tc>
                 <a:tc>
                   <a:txBody>
-                    <a:bodyPr wrap="square"/>
+                    <a:bodyPr wrap="none"/>
                     <a:lstStyle/>
                     <a:p>
                       <a:pPr algn="ctr"/>
@@ -9091,7 +9091,7 @@
               <a:tr h="196596">
                 <a:tc>
                   <a:txBody>
-                    <a:bodyPr wrap="square"/>
+                    <a:bodyPr wrap="none"/>
                     <a:lstStyle/>
                     <a:p>
                       <a:pPr algn="ctr"/>
@@ -9114,7 +9114,7 @@
                 </a:tc>
                 <a:tc>
                   <a:txBody>
-                    <a:bodyPr wrap="square"/>
+                    <a:bodyPr wrap="none"/>
                     <a:lstStyle/>
                     <a:p>
                       <a:pPr algn="l"/>
@@ -9125,7 +9125,7 @@
                           </a:solidFill>
                           <a:latin typeface="Calibri"/>
                         </a:rPr>
-                        <a:t>Contabilidad || Integración Mecanica-SAE (Fase 2)</a:t>
+                        <a:t>Contabilidad || Integración Mecanica-SAE (Fase…</a:t>
                       </a:r>
                     </a:p>
                   </a:txBody>
@@ -9137,7 +9137,7 @@
                 </a:tc>
                 <a:tc>
                   <a:txBody>
-                    <a:bodyPr wrap="square"/>
+                    <a:bodyPr wrap="none"/>
                     <a:lstStyle/>
                     <a:p>
                       <a:pPr algn="ctr"/>
@@ -9160,7 +9160,7 @@
                 </a:tc>
                 <a:tc>
                   <a:txBody>
-                    <a:bodyPr wrap="square"/>
+                    <a:bodyPr wrap="none"/>
                     <a:lstStyle/>
                     <a:p>
                       <a:pPr algn="ctr"/>
@@ -9183,7 +9183,7 @@
                 </a:tc>
                 <a:tc>
                   <a:txBody>
-                    <a:bodyPr wrap="square"/>
+                    <a:bodyPr wrap="none"/>
                     <a:lstStyle/>
                     <a:p>
                       <a:pPr algn="ctr"/>
@@ -9206,7 +9206,7 @@
                 </a:tc>
                 <a:tc>
                   <a:txBody>
-                    <a:bodyPr wrap="square"/>
+                    <a:bodyPr wrap="none"/>
                     <a:lstStyle/>
                     <a:p>
                       <a:pPr algn="ctr"/>
@@ -9229,7 +9229,7 @@
                 </a:tc>
                 <a:tc>
                   <a:txBody>
-                    <a:bodyPr wrap="square"/>
+                    <a:bodyPr wrap="none"/>
                     <a:lstStyle/>
                     <a:p>
                       <a:pPr algn="r"/>
@@ -9252,7 +9252,7 @@
                 </a:tc>
                 <a:tc>
                   <a:txBody>
-                    <a:bodyPr wrap="square"/>
+                    <a:bodyPr wrap="none"/>
                     <a:lstStyle/>
                     <a:p>
                       <a:pPr algn="ctr"/>
@@ -9277,7 +9277,7 @@
               <a:tr h="196596">
                 <a:tc>
                   <a:txBody>
-                    <a:bodyPr wrap="square"/>
+                    <a:bodyPr wrap="none"/>
                     <a:lstStyle/>
                     <a:p>
                       <a:pPr algn="ctr"/>
@@ -9300,7 +9300,7 @@
                 </a:tc>
                 <a:tc>
                   <a:txBody>
-                    <a:bodyPr wrap="square"/>
+                    <a:bodyPr wrap="none"/>
                     <a:lstStyle/>
                     <a:p>
                       <a:pPr algn="l"/>
@@ -9323,7 +9323,7 @@
                 </a:tc>
                 <a:tc>
                   <a:txBody>
-                    <a:bodyPr wrap="square"/>
+                    <a:bodyPr wrap="none"/>
                     <a:lstStyle/>
                     <a:p>
                       <a:pPr algn="ctr"/>
@@ -9346,7 +9346,7 @@
                 </a:tc>
                 <a:tc>
                   <a:txBody>
-                    <a:bodyPr wrap="square"/>
+                    <a:bodyPr wrap="none"/>
                     <a:lstStyle/>
                     <a:p>
                       <a:pPr algn="ctr"/>
@@ -9369,7 +9369,7 @@
                 </a:tc>
                 <a:tc>
                   <a:txBody>
-                    <a:bodyPr wrap="square"/>
+                    <a:bodyPr wrap="none"/>
                     <a:lstStyle/>
                     <a:p>
                       <a:pPr algn="ctr"/>
@@ -9392,7 +9392,7 @@
                 </a:tc>
                 <a:tc>
                   <a:txBody>
-                    <a:bodyPr wrap="square"/>
+                    <a:bodyPr wrap="none"/>
                     <a:lstStyle/>
                     <a:p>
                       <a:pPr algn="ctr"/>
@@ -9415,7 +9415,7 @@
                 </a:tc>
                 <a:tc>
                   <a:txBody>
-                    <a:bodyPr wrap="square"/>
+                    <a:bodyPr wrap="none"/>
                     <a:lstStyle/>
                     <a:p>
                       <a:pPr algn="r"/>
@@ -9438,7 +9438,7 @@
                 </a:tc>
                 <a:tc>
                   <a:txBody>
-                    <a:bodyPr wrap="square"/>
+                    <a:bodyPr wrap="none"/>
                     <a:lstStyle/>
                     <a:p>
                       <a:pPr algn="ctr"/>
@@ -9463,7 +9463,7 @@
               <a:tr h="196596">
                 <a:tc>
                   <a:txBody>
-                    <a:bodyPr wrap="square"/>
+                    <a:bodyPr wrap="none"/>
                     <a:lstStyle/>
                     <a:p>
                       <a:pPr algn="ctr"/>
@@ -9486,7 +9486,7 @@
                 </a:tc>
                 <a:tc>
                   <a:txBody>
-                    <a:bodyPr wrap="square"/>
+                    <a:bodyPr wrap="none"/>
                     <a:lstStyle/>
                     <a:p>
                       <a:pPr algn="l"/>
@@ -9509,7 +9509,7 @@
                 </a:tc>
                 <a:tc>
                   <a:txBody>
-                    <a:bodyPr wrap="square"/>
+                    <a:bodyPr wrap="none"/>
                     <a:lstStyle/>
                     <a:p>
                       <a:pPr algn="ctr"/>
@@ -9532,7 +9532,7 @@
                 </a:tc>
                 <a:tc>
                   <a:txBody>
-                    <a:bodyPr wrap="square"/>
+                    <a:bodyPr wrap="none"/>
                     <a:lstStyle/>
                     <a:p>
                       <a:pPr algn="ctr"/>
@@ -9555,7 +9555,7 @@
                 </a:tc>
                 <a:tc>
                   <a:txBody>
-                    <a:bodyPr wrap="square"/>
+                    <a:bodyPr wrap="none"/>
                     <a:lstStyle/>
                     <a:p>
                       <a:pPr algn="ctr"/>
@@ -9578,7 +9578,7 @@
                 </a:tc>
                 <a:tc>
                   <a:txBody>
-                    <a:bodyPr wrap="square"/>
+                    <a:bodyPr wrap="none"/>
                     <a:lstStyle/>
                     <a:p>
                       <a:pPr algn="ctr"/>
@@ -9601,7 +9601,7 @@
                 </a:tc>
                 <a:tc>
                   <a:txBody>
-                    <a:bodyPr wrap="square"/>
+                    <a:bodyPr wrap="none"/>
                     <a:lstStyle/>
                     <a:p>
                       <a:pPr algn="r"/>
@@ -9624,7 +9624,7 @@
                 </a:tc>
                 <a:tc>
                   <a:txBody>
-                    <a:bodyPr wrap="square"/>
+                    <a:bodyPr wrap="none"/>
                     <a:lstStyle/>
                     <a:p>
                       <a:pPr algn="ctr"/>
@@ -9649,7 +9649,7 @@
               <a:tr h="196596">
                 <a:tc>
                   <a:txBody>
-                    <a:bodyPr wrap="square"/>
+                    <a:bodyPr wrap="none"/>
                     <a:lstStyle/>
                     <a:p>
                       <a:pPr algn="ctr"/>
@@ -9672,7 +9672,7 @@
                 </a:tc>
                 <a:tc>
                   <a:txBody>
-                    <a:bodyPr wrap="square"/>
+                    <a:bodyPr wrap="none"/>
                     <a:lstStyle/>
                     <a:p>
                       <a:pPr algn="l"/>
@@ -9695,7 +9695,7 @@
                 </a:tc>
                 <a:tc>
                   <a:txBody>
-                    <a:bodyPr wrap="square"/>
+                    <a:bodyPr wrap="none"/>
                     <a:lstStyle/>
                     <a:p>
                       <a:pPr algn="ctr"/>
@@ -9718,7 +9718,7 @@
                 </a:tc>
                 <a:tc>
                   <a:txBody>
-                    <a:bodyPr wrap="square"/>
+                    <a:bodyPr wrap="none"/>
                     <a:lstStyle/>
                     <a:p>
                       <a:pPr algn="ctr"/>
@@ -9741,7 +9741,7 @@
                 </a:tc>
                 <a:tc>
                   <a:txBody>
-                    <a:bodyPr wrap="square"/>
+                    <a:bodyPr wrap="none"/>
                     <a:lstStyle/>
                     <a:p>
                       <a:pPr algn="ctr"/>
@@ -9764,7 +9764,7 @@
                 </a:tc>
                 <a:tc>
                   <a:txBody>
-                    <a:bodyPr wrap="square"/>
+                    <a:bodyPr wrap="none"/>
                     <a:lstStyle/>
                     <a:p>
                       <a:pPr algn="ctr"/>
@@ -9787,7 +9787,7 @@
                 </a:tc>
                 <a:tc>
                   <a:txBody>
-                    <a:bodyPr wrap="square"/>
+                    <a:bodyPr wrap="none"/>
                     <a:lstStyle/>
                     <a:p>
                       <a:pPr algn="r"/>
@@ -9810,7 +9810,7 @@
                 </a:tc>
                 <a:tc>
                   <a:txBody>
-                    <a:bodyPr wrap="square"/>
+                    <a:bodyPr wrap="none"/>
                     <a:lstStyle/>
                     <a:p>
                       <a:pPr algn="ctr"/>

--- a/cierre_base.pptx
+++ b/cierre_base.pptx
@@ -6280,7 +6280,7 @@
         </p:nvGraphicFramePr>
         <p:xfrm>
           <a:off x="73152" y="1188720"/>
-          <a:ext cx="8741664" cy="3739896"/>
+          <a:ext cx="8741664" cy="4087368"/>
         </p:xfrm>
         <a:graphic>
           <a:graphicData uri="http://schemas.openxmlformats.org/drawingml/2006/table">
@@ -6298,7 +6298,7 @@
                 <a:gridCol w="2212848"/>
                 <a:gridCol w="841248"/>
               </a:tblGrid>
-              <a:tr h="201168">
+              <a:tr h="219456">
                 <a:tc>
                   <a:txBody>
                     <a:bodyPr wrap="none"/>
@@ -6316,7 +6316,7 @@
                       </a:r>
                     </a:p>
                   </a:txBody>
-                  <a:tcPr>
+                  <a:tcPr marT="0" marB="0" marL="38100" marR="38100" anchor="ctr">
                     <a:solidFill>
                       <a:srgbClr val="C9A84C"/>
                     </a:solidFill>
@@ -6339,7 +6339,7 @@
                       </a:r>
                     </a:p>
                   </a:txBody>
-                  <a:tcPr>
+                  <a:tcPr marT="0" marB="0" marL="38100" marR="38100" anchor="ctr">
                     <a:solidFill>
                       <a:srgbClr val="C9A84C"/>
                     </a:solidFill>
@@ -6362,7 +6362,7 @@
                       </a:r>
                     </a:p>
                   </a:txBody>
-                  <a:tcPr>
+                  <a:tcPr marT="0" marB="0" marL="38100" marR="38100" anchor="ctr">
                     <a:solidFill>
                       <a:srgbClr val="C9A84C"/>
                     </a:solidFill>
@@ -6385,7 +6385,7 @@
                       </a:r>
                     </a:p>
                   </a:txBody>
-                  <a:tcPr>
+                  <a:tcPr marT="0" marB="0" marL="38100" marR="38100" anchor="ctr">
                     <a:solidFill>
                       <a:srgbClr val="C9A84C"/>
                     </a:solidFill>
@@ -6408,7 +6408,7 @@
                       </a:r>
                     </a:p>
                   </a:txBody>
-                  <a:tcPr>
+                  <a:tcPr marT="0" marB="0" marL="38100" marR="38100" anchor="ctr">
                     <a:solidFill>
                       <a:srgbClr val="C9A84C"/>
                     </a:solidFill>
@@ -6431,7 +6431,7 @@
                       </a:r>
                     </a:p>
                   </a:txBody>
-                  <a:tcPr>
+                  <a:tcPr marT="0" marB="0" marL="38100" marR="38100" anchor="ctr">
                     <a:solidFill>
                       <a:srgbClr val="C9A84C"/>
                     </a:solidFill>
@@ -6454,7 +6454,7 @@
                       </a:r>
                     </a:p>
                   </a:txBody>
-                  <a:tcPr>
+                  <a:tcPr marT="0" marB="0" marL="38100" marR="38100" anchor="ctr">
                     <a:solidFill>
                       <a:srgbClr val="C9A84C"/>
                     </a:solidFill>
@@ -6477,14 +6477,14 @@
                       </a:r>
                     </a:p>
                   </a:txBody>
-                  <a:tcPr>
+                  <a:tcPr marT="0" marB="0" marL="38100" marR="38100" anchor="ctr">
                     <a:solidFill>
                       <a:srgbClr val="C9A84C"/>
                     </a:solidFill>
                   </a:tcPr>
                 </a:tc>
               </a:tr>
-              <a:tr h="196596">
+              <a:tr h="214884">
                 <a:tc>
                   <a:txBody>
                     <a:bodyPr wrap="none"/>
@@ -6502,7 +6502,7 @@
                       </a:r>
                     </a:p>
                   </a:txBody>
-                  <a:tcPr>
+                  <a:tcPr marT="0" marB="0" marL="38100" marR="38100" anchor="ctr">
                     <a:solidFill>
                       <a:srgbClr val="F5F7FA"/>
                     </a:solidFill>
@@ -6525,7 +6525,7 @@
                       </a:r>
                     </a:p>
                   </a:txBody>
-                  <a:tcPr>
+                  <a:tcPr marT="0" marB="0" marL="38100" marR="38100" anchor="ctr">
                     <a:solidFill>
                       <a:srgbClr val="F5F7FA"/>
                     </a:solidFill>
@@ -6548,7 +6548,7 @@
                       </a:r>
                     </a:p>
                   </a:txBody>
-                  <a:tcPr>
+                  <a:tcPr marT="0" marB="0" marL="38100" marR="38100" anchor="ctr">
                     <a:solidFill>
                       <a:srgbClr val="F5F7FA"/>
                     </a:solidFill>
@@ -6571,7 +6571,7 @@
                       </a:r>
                     </a:p>
                   </a:txBody>
-                  <a:tcPr>
+                  <a:tcPr marT="0" marB="0" marL="38100" marR="38100" anchor="ctr">
                     <a:solidFill>
                       <a:srgbClr val="F5F7FA"/>
                     </a:solidFill>
@@ -6594,7 +6594,7 @@
                       </a:r>
                     </a:p>
                   </a:txBody>
-                  <a:tcPr>
+                  <a:tcPr marT="0" marB="0" marL="38100" marR="38100" anchor="ctr">
                     <a:solidFill>
                       <a:srgbClr val="F5F7FA"/>
                     </a:solidFill>
@@ -6617,7 +6617,7 @@
                       </a:r>
                     </a:p>
                   </a:txBody>
-                  <a:tcPr>
+                  <a:tcPr marT="0" marB="0" marL="38100" marR="38100" anchor="ctr">
                     <a:solidFill>
                       <a:srgbClr val="F5F7FA"/>
                     </a:solidFill>
@@ -6640,7 +6640,7 @@
                       </a:r>
                     </a:p>
                   </a:txBody>
-                  <a:tcPr>
+                  <a:tcPr marT="0" marB="0" marL="38100" marR="38100" anchor="ctr">
                     <a:solidFill>
                       <a:srgbClr val="F5F7FA"/>
                     </a:solidFill>
@@ -6663,14 +6663,14 @@
                       </a:r>
                     </a:p>
                   </a:txBody>
-                  <a:tcPr>
+                  <a:tcPr marT="0" marB="0" marL="38100" marR="38100" anchor="ctr">
                     <a:solidFill>
                       <a:srgbClr val="F5F7FA"/>
                     </a:solidFill>
                   </a:tcPr>
                 </a:tc>
               </a:tr>
-              <a:tr h="196596">
+              <a:tr h="214884">
                 <a:tc>
                   <a:txBody>
                     <a:bodyPr wrap="none"/>
@@ -6688,7 +6688,7 @@
                       </a:r>
                     </a:p>
                   </a:txBody>
-                  <a:tcPr>
+                  <a:tcPr marT="0" marB="0" marL="38100" marR="38100" anchor="ctr">
                     <a:solidFill>
                       <a:srgbClr val="FFFFFF"/>
                     </a:solidFill>
@@ -6711,7 +6711,7 @@
                       </a:r>
                     </a:p>
                   </a:txBody>
-                  <a:tcPr>
+                  <a:tcPr marT="0" marB="0" marL="38100" marR="38100" anchor="ctr">
                     <a:solidFill>
                       <a:srgbClr val="FFFFFF"/>
                     </a:solidFill>
@@ -6734,7 +6734,7 @@
                       </a:r>
                     </a:p>
                   </a:txBody>
-                  <a:tcPr>
+                  <a:tcPr marT="0" marB="0" marL="38100" marR="38100" anchor="ctr">
                     <a:solidFill>
                       <a:srgbClr val="FFFFFF"/>
                     </a:solidFill>
@@ -6757,7 +6757,7 @@
                       </a:r>
                     </a:p>
                   </a:txBody>
-                  <a:tcPr>
+                  <a:tcPr marT="0" marB="0" marL="38100" marR="38100" anchor="ctr">
                     <a:solidFill>
                       <a:srgbClr val="FFFFFF"/>
                     </a:solidFill>
@@ -6780,7 +6780,7 @@
                       </a:r>
                     </a:p>
                   </a:txBody>
-                  <a:tcPr>
+                  <a:tcPr marT="0" marB="0" marL="38100" marR="38100" anchor="ctr">
                     <a:solidFill>
                       <a:srgbClr val="FFFFFF"/>
                     </a:solidFill>
@@ -6803,7 +6803,7 @@
                       </a:r>
                     </a:p>
                   </a:txBody>
-                  <a:tcPr>
+                  <a:tcPr marT="0" marB="0" marL="38100" marR="38100" anchor="ctr">
                     <a:solidFill>
                       <a:srgbClr val="FFFFFF"/>
                     </a:solidFill>
@@ -6826,7 +6826,7 @@
                       </a:r>
                     </a:p>
                   </a:txBody>
-                  <a:tcPr>
+                  <a:tcPr marT="0" marB="0" marL="38100" marR="38100" anchor="ctr">
                     <a:solidFill>
                       <a:srgbClr val="FFFFFF"/>
                     </a:solidFill>
@@ -6849,14 +6849,14 @@
                       </a:r>
                     </a:p>
                   </a:txBody>
-                  <a:tcPr>
+                  <a:tcPr marT="0" marB="0" marL="38100" marR="38100" anchor="ctr">
                     <a:solidFill>
                       <a:srgbClr val="FFFFFF"/>
                     </a:solidFill>
                   </a:tcPr>
                 </a:tc>
               </a:tr>
-              <a:tr h="196596">
+              <a:tr h="214884">
                 <a:tc>
                   <a:txBody>
                     <a:bodyPr wrap="none"/>
@@ -6874,7 +6874,7 @@
                       </a:r>
                     </a:p>
                   </a:txBody>
-                  <a:tcPr>
+                  <a:tcPr marT="0" marB="0" marL="38100" marR="38100" anchor="ctr">
                     <a:solidFill>
                       <a:srgbClr val="F5F7FA"/>
                     </a:solidFill>
@@ -6897,7 +6897,7 @@
                       </a:r>
                     </a:p>
                   </a:txBody>
-                  <a:tcPr>
+                  <a:tcPr marT="0" marB="0" marL="38100" marR="38100" anchor="ctr">
                     <a:solidFill>
                       <a:srgbClr val="F5F7FA"/>
                     </a:solidFill>
@@ -6920,7 +6920,7 @@
                       </a:r>
                     </a:p>
                   </a:txBody>
-                  <a:tcPr>
+                  <a:tcPr marT="0" marB="0" marL="38100" marR="38100" anchor="ctr">
                     <a:solidFill>
                       <a:srgbClr val="F5F7FA"/>
                     </a:solidFill>
@@ -6943,7 +6943,7 @@
                       </a:r>
                     </a:p>
                   </a:txBody>
-                  <a:tcPr>
+                  <a:tcPr marT="0" marB="0" marL="38100" marR="38100" anchor="ctr">
                     <a:solidFill>
                       <a:srgbClr val="F5F7FA"/>
                     </a:solidFill>
@@ -6966,7 +6966,7 @@
                       </a:r>
                     </a:p>
                   </a:txBody>
-                  <a:tcPr>
+                  <a:tcPr marT="0" marB="0" marL="38100" marR="38100" anchor="ctr">
                     <a:solidFill>
                       <a:srgbClr val="F5F7FA"/>
                     </a:solidFill>
@@ -6989,7 +6989,7 @@
                       </a:r>
                     </a:p>
                   </a:txBody>
-                  <a:tcPr>
+                  <a:tcPr marT="0" marB="0" marL="38100" marR="38100" anchor="ctr">
                     <a:solidFill>
                       <a:srgbClr val="F5F7FA"/>
                     </a:solidFill>
@@ -7012,7 +7012,7 @@
                       </a:r>
                     </a:p>
                   </a:txBody>
-                  <a:tcPr>
+                  <a:tcPr marT="0" marB="0" marL="38100" marR="38100" anchor="ctr">
                     <a:solidFill>
                       <a:srgbClr val="F5F7FA"/>
                     </a:solidFill>
@@ -7035,14 +7035,14 @@
                       </a:r>
                     </a:p>
                   </a:txBody>
-                  <a:tcPr>
+                  <a:tcPr marT="0" marB="0" marL="38100" marR="38100" anchor="ctr">
                     <a:solidFill>
                       <a:srgbClr val="F5F7FA"/>
                     </a:solidFill>
                   </a:tcPr>
                 </a:tc>
               </a:tr>
-              <a:tr h="196596">
+              <a:tr h="214884">
                 <a:tc>
                   <a:txBody>
                     <a:bodyPr wrap="none"/>
@@ -7060,7 +7060,7 @@
                       </a:r>
                     </a:p>
                   </a:txBody>
-                  <a:tcPr>
+                  <a:tcPr marT="0" marB="0" marL="38100" marR="38100" anchor="ctr">
                     <a:solidFill>
                       <a:srgbClr val="FFFFFF"/>
                     </a:solidFill>
@@ -7083,7 +7083,7 @@
                       </a:r>
                     </a:p>
                   </a:txBody>
-                  <a:tcPr>
+                  <a:tcPr marT="0" marB="0" marL="38100" marR="38100" anchor="ctr">
                     <a:solidFill>
                       <a:srgbClr val="FFFFFF"/>
                     </a:solidFill>
@@ -7106,7 +7106,7 @@
                       </a:r>
                     </a:p>
                   </a:txBody>
-                  <a:tcPr>
+                  <a:tcPr marT="0" marB="0" marL="38100" marR="38100" anchor="ctr">
                     <a:solidFill>
                       <a:srgbClr val="FFFFFF"/>
                     </a:solidFill>
@@ -7129,7 +7129,7 @@
                       </a:r>
                     </a:p>
                   </a:txBody>
-                  <a:tcPr>
+                  <a:tcPr marT="0" marB="0" marL="38100" marR="38100" anchor="ctr">
                     <a:solidFill>
                       <a:srgbClr val="FFFFFF"/>
                     </a:solidFill>
@@ -7152,7 +7152,7 @@
                       </a:r>
                     </a:p>
                   </a:txBody>
-                  <a:tcPr>
+                  <a:tcPr marT="0" marB="0" marL="38100" marR="38100" anchor="ctr">
                     <a:solidFill>
                       <a:srgbClr val="FFFFFF"/>
                     </a:solidFill>
@@ -7175,7 +7175,7 @@
                       </a:r>
                     </a:p>
                   </a:txBody>
-                  <a:tcPr>
+                  <a:tcPr marT="0" marB="0" marL="38100" marR="38100" anchor="ctr">
                     <a:solidFill>
                       <a:srgbClr val="FFFFFF"/>
                     </a:solidFill>
@@ -7198,7 +7198,7 @@
                       </a:r>
                     </a:p>
                   </a:txBody>
-                  <a:tcPr>
+                  <a:tcPr marT="0" marB="0" marL="38100" marR="38100" anchor="ctr">
                     <a:solidFill>
                       <a:srgbClr val="FFFFFF"/>
                     </a:solidFill>
@@ -7221,14 +7221,14 @@
                       </a:r>
                     </a:p>
                   </a:txBody>
-                  <a:tcPr>
+                  <a:tcPr marT="0" marB="0" marL="38100" marR="38100" anchor="ctr">
                     <a:solidFill>
                       <a:srgbClr val="FFFFFF"/>
                     </a:solidFill>
                   </a:tcPr>
                 </a:tc>
               </a:tr>
-              <a:tr h="196596">
+              <a:tr h="214884">
                 <a:tc>
                   <a:txBody>
                     <a:bodyPr wrap="none"/>
@@ -7246,7 +7246,7 @@
                       </a:r>
                     </a:p>
                   </a:txBody>
-                  <a:tcPr>
+                  <a:tcPr marT="0" marB="0" marL="38100" marR="38100" anchor="ctr">
                     <a:solidFill>
                       <a:srgbClr val="F5F7FA"/>
                     </a:solidFill>
@@ -7269,7 +7269,7 @@
                       </a:r>
                     </a:p>
                   </a:txBody>
-                  <a:tcPr>
+                  <a:tcPr marT="0" marB="0" marL="38100" marR="38100" anchor="ctr">
                     <a:solidFill>
                       <a:srgbClr val="F5F7FA"/>
                     </a:solidFill>
@@ -7292,7 +7292,7 @@
                       </a:r>
                     </a:p>
                   </a:txBody>
-                  <a:tcPr>
+                  <a:tcPr marT="0" marB="0" marL="38100" marR="38100" anchor="ctr">
                     <a:solidFill>
                       <a:srgbClr val="F5F7FA"/>
                     </a:solidFill>
@@ -7315,7 +7315,7 @@
                       </a:r>
                     </a:p>
                   </a:txBody>
-                  <a:tcPr>
+                  <a:tcPr marT="0" marB="0" marL="38100" marR="38100" anchor="ctr">
                     <a:solidFill>
                       <a:srgbClr val="F5F7FA"/>
                     </a:solidFill>
@@ -7338,7 +7338,7 @@
                       </a:r>
                     </a:p>
                   </a:txBody>
-                  <a:tcPr>
+                  <a:tcPr marT="0" marB="0" marL="38100" marR="38100" anchor="ctr">
                     <a:solidFill>
                       <a:srgbClr val="F5F7FA"/>
                     </a:solidFill>
@@ -7361,7 +7361,7 @@
                       </a:r>
                     </a:p>
                   </a:txBody>
-                  <a:tcPr>
+                  <a:tcPr marT="0" marB="0" marL="38100" marR="38100" anchor="ctr">
                     <a:solidFill>
                       <a:srgbClr val="F5F7FA"/>
                     </a:solidFill>
@@ -7384,7 +7384,7 @@
                       </a:r>
                     </a:p>
                   </a:txBody>
-                  <a:tcPr>
+                  <a:tcPr marT="0" marB="0" marL="38100" marR="38100" anchor="ctr">
                     <a:solidFill>
                       <a:srgbClr val="F5F7FA"/>
                     </a:solidFill>
@@ -7407,14 +7407,14 @@
                       </a:r>
                     </a:p>
                   </a:txBody>
-                  <a:tcPr>
+                  <a:tcPr marT="0" marB="0" marL="38100" marR="38100" anchor="ctr">
                     <a:solidFill>
                       <a:srgbClr val="F5F7FA"/>
                     </a:solidFill>
                   </a:tcPr>
                 </a:tc>
               </a:tr>
-              <a:tr h="196596">
+              <a:tr h="214884">
                 <a:tc>
                   <a:txBody>
                     <a:bodyPr wrap="none"/>
@@ -7432,7 +7432,7 @@
                       </a:r>
                     </a:p>
                   </a:txBody>
-                  <a:tcPr>
+                  <a:tcPr marT="0" marB="0" marL="38100" marR="38100" anchor="ctr">
                     <a:solidFill>
                       <a:srgbClr val="FFFFFF"/>
                     </a:solidFill>
@@ -7455,7 +7455,7 @@
                       </a:r>
                     </a:p>
                   </a:txBody>
-                  <a:tcPr>
+                  <a:tcPr marT="0" marB="0" marL="38100" marR="38100" anchor="ctr">
                     <a:solidFill>
                       <a:srgbClr val="FFFFFF"/>
                     </a:solidFill>
@@ -7478,7 +7478,7 @@
                       </a:r>
                     </a:p>
                   </a:txBody>
-                  <a:tcPr>
+                  <a:tcPr marT="0" marB="0" marL="38100" marR="38100" anchor="ctr">
                     <a:solidFill>
                       <a:srgbClr val="FFFFFF"/>
                     </a:solidFill>
@@ -7501,7 +7501,7 @@
                       </a:r>
                     </a:p>
                   </a:txBody>
-                  <a:tcPr>
+                  <a:tcPr marT="0" marB="0" marL="38100" marR="38100" anchor="ctr">
                     <a:solidFill>
                       <a:srgbClr val="FFFFFF"/>
                     </a:solidFill>
@@ -7524,7 +7524,7 @@
                       </a:r>
                     </a:p>
                   </a:txBody>
-                  <a:tcPr>
+                  <a:tcPr marT="0" marB="0" marL="38100" marR="38100" anchor="ctr">
                     <a:solidFill>
                       <a:srgbClr val="FFFFFF"/>
                     </a:solidFill>
@@ -7547,7 +7547,7 @@
                       </a:r>
                     </a:p>
                   </a:txBody>
-                  <a:tcPr>
+                  <a:tcPr marT="0" marB="0" marL="38100" marR="38100" anchor="ctr">
                     <a:solidFill>
                       <a:srgbClr val="FFFFFF"/>
                     </a:solidFill>
@@ -7570,7 +7570,7 @@
                       </a:r>
                     </a:p>
                   </a:txBody>
-                  <a:tcPr>
+                  <a:tcPr marT="0" marB="0" marL="38100" marR="38100" anchor="ctr">
                     <a:solidFill>
                       <a:srgbClr val="FFFFFF"/>
                     </a:solidFill>
@@ -7593,14 +7593,14 @@
                       </a:r>
                     </a:p>
                   </a:txBody>
-                  <a:tcPr>
+                  <a:tcPr marT="0" marB="0" marL="38100" marR="38100" anchor="ctr">
                     <a:solidFill>
                       <a:srgbClr val="FFFFFF"/>
                     </a:solidFill>
                   </a:tcPr>
                 </a:tc>
               </a:tr>
-              <a:tr h="196596">
+              <a:tr h="214884">
                 <a:tc>
                   <a:txBody>
                     <a:bodyPr wrap="none"/>
@@ -7618,7 +7618,7 @@
                       </a:r>
                     </a:p>
                   </a:txBody>
-                  <a:tcPr>
+                  <a:tcPr marT="0" marB="0" marL="38100" marR="38100" anchor="ctr">
                     <a:solidFill>
                       <a:srgbClr val="F5F7FA"/>
                     </a:solidFill>
@@ -7641,7 +7641,7 @@
                       </a:r>
                     </a:p>
                   </a:txBody>
-                  <a:tcPr>
+                  <a:tcPr marT="0" marB="0" marL="38100" marR="38100" anchor="ctr">
                     <a:solidFill>
                       <a:srgbClr val="F5F7FA"/>
                     </a:solidFill>
@@ -7664,7 +7664,7 @@
                       </a:r>
                     </a:p>
                   </a:txBody>
-                  <a:tcPr>
+                  <a:tcPr marT="0" marB="0" marL="38100" marR="38100" anchor="ctr">
                     <a:solidFill>
                       <a:srgbClr val="F5F7FA"/>
                     </a:solidFill>
@@ -7687,7 +7687,7 @@
                       </a:r>
                     </a:p>
                   </a:txBody>
-                  <a:tcPr>
+                  <a:tcPr marT="0" marB="0" marL="38100" marR="38100" anchor="ctr">
                     <a:solidFill>
                       <a:srgbClr val="F5F7FA"/>
                     </a:solidFill>
@@ -7710,7 +7710,7 @@
                       </a:r>
                     </a:p>
                   </a:txBody>
-                  <a:tcPr>
+                  <a:tcPr marT="0" marB="0" marL="38100" marR="38100" anchor="ctr">
                     <a:solidFill>
                       <a:srgbClr val="F5F7FA"/>
                     </a:solidFill>
@@ -7733,7 +7733,7 @@
                       </a:r>
                     </a:p>
                   </a:txBody>
-                  <a:tcPr>
+                  <a:tcPr marT="0" marB="0" marL="38100" marR="38100" anchor="ctr">
                     <a:solidFill>
                       <a:srgbClr val="F5F7FA"/>
                     </a:solidFill>
@@ -7756,7 +7756,7 @@
                       </a:r>
                     </a:p>
                   </a:txBody>
-                  <a:tcPr>
+                  <a:tcPr marT="0" marB="0" marL="38100" marR="38100" anchor="ctr">
                     <a:solidFill>
                       <a:srgbClr val="F5F7FA"/>
                     </a:solidFill>
@@ -7779,14 +7779,14 @@
                       </a:r>
                     </a:p>
                   </a:txBody>
-                  <a:tcPr>
+                  <a:tcPr marT="0" marB="0" marL="38100" marR="38100" anchor="ctr">
                     <a:solidFill>
                       <a:srgbClr val="F5F7FA"/>
                     </a:solidFill>
                   </a:tcPr>
                 </a:tc>
               </a:tr>
-              <a:tr h="196596">
+              <a:tr h="214884">
                 <a:tc>
                   <a:txBody>
                     <a:bodyPr wrap="none"/>
@@ -7804,7 +7804,7 @@
                       </a:r>
                     </a:p>
                   </a:txBody>
-                  <a:tcPr>
+                  <a:tcPr marT="0" marB="0" marL="38100" marR="38100" anchor="ctr">
                     <a:solidFill>
                       <a:srgbClr val="FFFFFF"/>
                     </a:solidFill>
@@ -7827,7 +7827,7 @@
                       </a:r>
                     </a:p>
                   </a:txBody>
-                  <a:tcPr>
+                  <a:tcPr marT="0" marB="0" marL="38100" marR="38100" anchor="ctr">
                     <a:solidFill>
                       <a:srgbClr val="FFFFFF"/>
                     </a:solidFill>
@@ -7850,7 +7850,7 @@
                       </a:r>
                     </a:p>
                   </a:txBody>
-                  <a:tcPr>
+                  <a:tcPr marT="0" marB="0" marL="38100" marR="38100" anchor="ctr">
                     <a:solidFill>
                       <a:srgbClr val="FFFFFF"/>
                     </a:solidFill>
@@ -7873,7 +7873,7 @@
                       </a:r>
                     </a:p>
                   </a:txBody>
-                  <a:tcPr>
+                  <a:tcPr marT="0" marB="0" marL="38100" marR="38100" anchor="ctr">
                     <a:solidFill>
                       <a:srgbClr val="FFFFFF"/>
                     </a:solidFill>
@@ -7896,7 +7896,7 @@
                       </a:r>
                     </a:p>
                   </a:txBody>
-                  <a:tcPr>
+                  <a:tcPr marT="0" marB="0" marL="38100" marR="38100" anchor="ctr">
                     <a:solidFill>
                       <a:srgbClr val="FFFFFF"/>
                     </a:solidFill>
@@ -7919,7 +7919,7 @@
                       </a:r>
                     </a:p>
                   </a:txBody>
-                  <a:tcPr>
+                  <a:tcPr marT="0" marB="0" marL="38100" marR="38100" anchor="ctr">
                     <a:solidFill>
                       <a:srgbClr val="FFFFFF"/>
                     </a:solidFill>
@@ -7942,7 +7942,7 @@
                       </a:r>
                     </a:p>
                   </a:txBody>
-                  <a:tcPr>
+                  <a:tcPr marT="0" marB="0" marL="38100" marR="38100" anchor="ctr">
                     <a:solidFill>
                       <a:srgbClr val="FFFFFF"/>
                     </a:solidFill>
@@ -7965,14 +7965,14 @@
                       </a:r>
                     </a:p>
                   </a:txBody>
-                  <a:tcPr>
+                  <a:tcPr marT="0" marB="0" marL="38100" marR="38100" anchor="ctr">
                     <a:solidFill>
                       <a:srgbClr val="FFFFFF"/>
                     </a:solidFill>
                   </a:tcPr>
                 </a:tc>
               </a:tr>
-              <a:tr h="196596">
+              <a:tr h="214884">
                 <a:tc>
                   <a:txBody>
                     <a:bodyPr wrap="none"/>
@@ -7990,7 +7990,7 @@
                       </a:r>
                     </a:p>
                   </a:txBody>
-                  <a:tcPr>
+                  <a:tcPr marT="0" marB="0" marL="38100" marR="38100" anchor="ctr">
                     <a:solidFill>
                       <a:srgbClr val="F5F7FA"/>
                     </a:solidFill>
@@ -8013,7 +8013,7 @@
                       </a:r>
                     </a:p>
                   </a:txBody>
-                  <a:tcPr>
+                  <a:tcPr marT="0" marB="0" marL="38100" marR="38100" anchor="ctr">
                     <a:solidFill>
                       <a:srgbClr val="F5F7FA"/>
                     </a:solidFill>
@@ -8036,7 +8036,7 @@
                       </a:r>
                     </a:p>
                   </a:txBody>
-                  <a:tcPr>
+                  <a:tcPr marT="0" marB="0" marL="38100" marR="38100" anchor="ctr">
                     <a:solidFill>
                       <a:srgbClr val="F5F7FA"/>
                     </a:solidFill>
@@ -8059,7 +8059,7 @@
                       </a:r>
                     </a:p>
                   </a:txBody>
-                  <a:tcPr>
+                  <a:tcPr marT="0" marB="0" marL="38100" marR="38100" anchor="ctr">
                     <a:solidFill>
                       <a:srgbClr val="F5F7FA"/>
                     </a:solidFill>
@@ -8082,7 +8082,7 @@
                       </a:r>
                     </a:p>
                   </a:txBody>
-                  <a:tcPr>
+                  <a:tcPr marT="0" marB="0" marL="38100" marR="38100" anchor="ctr">
                     <a:solidFill>
                       <a:srgbClr val="F5F7FA"/>
                     </a:solidFill>
@@ -8105,7 +8105,7 @@
                       </a:r>
                     </a:p>
                   </a:txBody>
-                  <a:tcPr>
+                  <a:tcPr marT="0" marB="0" marL="38100" marR="38100" anchor="ctr">
                     <a:solidFill>
                       <a:srgbClr val="F5F7FA"/>
                     </a:solidFill>
@@ -8128,7 +8128,7 @@
                       </a:r>
                     </a:p>
                   </a:txBody>
-                  <a:tcPr>
+                  <a:tcPr marT="0" marB="0" marL="38100" marR="38100" anchor="ctr">
                     <a:solidFill>
                       <a:srgbClr val="F5F7FA"/>
                     </a:solidFill>
@@ -8151,14 +8151,14 @@
                       </a:r>
                     </a:p>
                   </a:txBody>
-                  <a:tcPr>
+                  <a:tcPr marT="0" marB="0" marL="38100" marR="38100" anchor="ctr">
                     <a:solidFill>
                       <a:srgbClr val="F5F7FA"/>
                     </a:solidFill>
                   </a:tcPr>
                 </a:tc>
               </a:tr>
-              <a:tr h="196596">
+              <a:tr h="214884">
                 <a:tc>
                   <a:txBody>
                     <a:bodyPr wrap="none"/>
@@ -8176,7 +8176,7 @@
                       </a:r>
                     </a:p>
                   </a:txBody>
-                  <a:tcPr>
+                  <a:tcPr marT="0" marB="0" marL="38100" marR="38100" anchor="ctr">
                     <a:solidFill>
                       <a:srgbClr val="FFFFFF"/>
                     </a:solidFill>
@@ -8199,7 +8199,7 @@
                       </a:r>
                     </a:p>
                   </a:txBody>
-                  <a:tcPr>
+                  <a:tcPr marT="0" marB="0" marL="38100" marR="38100" anchor="ctr">
                     <a:solidFill>
                       <a:srgbClr val="FFFFFF"/>
                     </a:solidFill>
@@ -8222,7 +8222,7 @@
                       </a:r>
                     </a:p>
                   </a:txBody>
-                  <a:tcPr>
+                  <a:tcPr marT="0" marB="0" marL="38100" marR="38100" anchor="ctr">
                     <a:solidFill>
                       <a:srgbClr val="FFFFFF"/>
                     </a:solidFill>
@@ -8245,7 +8245,7 @@
                       </a:r>
                     </a:p>
                   </a:txBody>
-                  <a:tcPr>
+                  <a:tcPr marT="0" marB="0" marL="38100" marR="38100" anchor="ctr">
                     <a:solidFill>
                       <a:srgbClr val="FFFFFF"/>
                     </a:solidFill>
@@ -8268,7 +8268,7 @@
                       </a:r>
                     </a:p>
                   </a:txBody>
-                  <a:tcPr>
+                  <a:tcPr marT="0" marB="0" marL="38100" marR="38100" anchor="ctr">
                     <a:solidFill>
                       <a:srgbClr val="FFFFFF"/>
                     </a:solidFill>
@@ -8291,7 +8291,7 @@
                       </a:r>
                     </a:p>
                   </a:txBody>
-                  <a:tcPr>
+                  <a:tcPr marT="0" marB="0" marL="38100" marR="38100" anchor="ctr">
                     <a:solidFill>
                       <a:srgbClr val="FFFFFF"/>
                     </a:solidFill>
@@ -8314,7 +8314,7 @@
                       </a:r>
                     </a:p>
                   </a:txBody>
-                  <a:tcPr>
+                  <a:tcPr marT="0" marB="0" marL="38100" marR="38100" anchor="ctr">
                     <a:solidFill>
                       <a:srgbClr val="FFFFFF"/>
                     </a:solidFill>
@@ -8337,14 +8337,14 @@
                       </a:r>
                     </a:p>
                   </a:txBody>
-                  <a:tcPr>
+                  <a:tcPr marT="0" marB="0" marL="38100" marR="38100" anchor="ctr">
                     <a:solidFill>
                       <a:srgbClr val="FFFFFF"/>
                     </a:solidFill>
                   </a:tcPr>
                 </a:tc>
               </a:tr>
-              <a:tr h="196596">
+              <a:tr h="214884">
                 <a:tc>
                   <a:txBody>
                     <a:bodyPr wrap="none"/>
@@ -8362,7 +8362,7 @@
                       </a:r>
                     </a:p>
                   </a:txBody>
-                  <a:tcPr>
+                  <a:tcPr marT="0" marB="0" marL="38100" marR="38100" anchor="ctr">
                     <a:solidFill>
                       <a:srgbClr val="F5F7FA"/>
                     </a:solidFill>
@@ -8385,7 +8385,7 @@
                       </a:r>
                     </a:p>
                   </a:txBody>
-                  <a:tcPr>
+                  <a:tcPr marT="0" marB="0" marL="38100" marR="38100" anchor="ctr">
                     <a:solidFill>
                       <a:srgbClr val="F5F7FA"/>
                     </a:solidFill>
@@ -8408,7 +8408,7 @@
                       </a:r>
                     </a:p>
                   </a:txBody>
-                  <a:tcPr>
+                  <a:tcPr marT="0" marB="0" marL="38100" marR="38100" anchor="ctr">
                     <a:solidFill>
                       <a:srgbClr val="F5F7FA"/>
                     </a:solidFill>
@@ -8431,7 +8431,7 @@
                       </a:r>
                     </a:p>
                   </a:txBody>
-                  <a:tcPr>
+                  <a:tcPr marT="0" marB="0" marL="38100" marR="38100" anchor="ctr">
                     <a:solidFill>
                       <a:srgbClr val="F5F7FA"/>
                     </a:solidFill>
@@ -8454,7 +8454,7 @@
                       </a:r>
                     </a:p>
                   </a:txBody>
-                  <a:tcPr>
+                  <a:tcPr marT="0" marB="0" marL="38100" marR="38100" anchor="ctr">
                     <a:solidFill>
                       <a:srgbClr val="F5F7FA"/>
                     </a:solidFill>
@@ -8477,7 +8477,7 @@
                       </a:r>
                     </a:p>
                   </a:txBody>
-                  <a:tcPr>
+                  <a:tcPr marT="0" marB="0" marL="38100" marR="38100" anchor="ctr">
                     <a:solidFill>
                       <a:srgbClr val="F5F7FA"/>
                     </a:solidFill>
@@ -8500,7 +8500,7 @@
                       </a:r>
                     </a:p>
                   </a:txBody>
-                  <a:tcPr>
+                  <a:tcPr marT="0" marB="0" marL="38100" marR="38100" anchor="ctr">
                     <a:solidFill>
                       <a:srgbClr val="F5F7FA"/>
                     </a:solidFill>
@@ -8523,14 +8523,14 @@
                       </a:r>
                     </a:p>
                   </a:txBody>
-                  <a:tcPr>
+                  <a:tcPr marT="0" marB="0" marL="38100" marR="38100" anchor="ctr">
                     <a:solidFill>
                       <a:srgbClr val="F5F7FA"/>
                     </a:solidFill>
                   </a:tcPr>
                 </a:tc>
               </a:tr>
-              <a:tr h="196596">
+              <a:tr h="214884">
                 <a:tc>
                   <a:txBody>
                     <a:bodyPr wrap="none"/>
@@ -8548,7 +8548,7 @@
                       </a:r>
                     </a:p>
                   </a:txBody>
-                  <a:tcPr>
+                  <a:tcPr marT="0" marB="0" marL="38100" marR="38100" anchor="ctr">
                     <a:solidFill>
                       <a:srgbClr val="FFFFFF"/>
                     </a:solidFill>
@@ -8571,7 +8571,7 @@
                       </a:r>
                     </a:p>
                   </a:txBody>
-                  <a:tcPr>
+                  <a:tcPr marT="0" marB="0" marL="38100" marR="38100" anchor="ctr">
                     <a:solidFill>
                       <a:srgbClr val="FFFFFF"/>
                     </a:solidFill>
@@ -8594,7 +8594,7 @@
                       </a:r>
                     </a:p>
                   </a:txBody>
-                  <a:tcPr>
+                  <a:tcPr marT="0" marB="0" marL="38100" marR="38100" anchor="ctr">
                     <a:solidFill>
                       <a:srgbClr val="FFFFFF"/>
                     </a:solidFill>
@@ -8617,7 +8617,7 @@
                       </a:r>
                     </a:p>
                   </a:txBody>
-                  <a:tcPr>
+                  <a:tcPr marT="0" marB="0" marL="38100" marR="38100" anchor="ctr">
                     <a:solidFill>
                       <a:srgbClr val="FFFFFF"/>
                     </a:solidFill>
@@ -8640,7 +8640,7 @@
                       </a:r>
                     </a:p>
                   </a:txBody>
-                  <a:tcPr>
+                  <a:tcPr marT="0" marB="0" marL="38100" marR="38100" anchor="ctr">
                     <a:solidFill>
                       <a:srgbClr val="FFFFFF"/>
                     </a:solidFill>
@@ -8663,7 +8663,7 @@
                       </a:r>
                     </a:p>
                   </a:txBody>
-                  <a:tcPr>
+                  <a:tcPr marT="0" marB="0" marL="38100" marR="38100" anchor="ctr">
                     <a:solidFill>
                       <a:srgbClr val="FFFFFF"/>
                     </a:solidFill>
@@ -8686,7 +8686,7 @@
                       </a:r>
                     </a:p>
                   </a:txBody>
-                  <a:tcPr>
+                  <a:tcPr marT="0" marB="0" marL="38100" marR="38100" anchor="ctr">
                     <a:solidFill>
                       <a:srgbClr val="FFFFFF"/>
                     </a:solidFill>
@@ -8709,14 +8709,14 @@
                       </a:r>
                     </a:p>
                   </a:txBody>
-                  <a:tcPr>
+                  <a:tcPr marT="0" marB="0" marL="38100" marR="38100" anchor="ctr">
                     <a:solidFill>
                       <a:srgbClr val="FFFFFF"/>
                     </a:solidFill>
                   </a:tcPr>
                 </a:tc>
               </a:tr>
-              <a:tr h="196596">
+              <a:tr h="214884">
                 <a:tc>
                   <a:txBody>
                     <a:bodyPr wrap="none"/>
@@ -8734,7 +8734,7 @@
                       </a:r>
                     </a:p>
                   </a:txBody>
-                  <a:tcPr>
+                  <a:tcPr marT="0" marB="0" marL="38100" marR="38100" anchor="ctr">
                     <a:solidFill>
                       <a:srgbClr val="F5F7FA"/>
                     </a:solidFill>
@@ -8757,7 +8757,7 @@
                       </a:r>
                     </a:p>
                   </a:txBody>
-                  <a:tcPr>
+                  <a:tcPr marT="0" marB="0" marL="38100" marR="38100" anchor="ctr">
                     <a:solidFill>
                       <a:srgbClr val="F5F7FA"/>
                     </a:solidFill>
@@ -8780,7 +8780,7 @@
                       </a:r>
                     </a:p>
                   </a:txBody>
-                  <a:tcPr>
+                  <a:tcPr marT="0" marB="0" marL="38100" marR="38100" anchor="ctr">
                     <a:solidFill>
                       <a:srgbClr val="F5F7FA"/>
                     </a:solidFill>
@@ -8803,7 +8803,7 @@
                       </a:r>
                     </a:p>
                   </a:txBody>
-                  <a:tcPr>
+                  <a:tcPr marT="0" marB="0" marL="38100" marR="38100" anchor="ctr">
                     <a:solidFill>
                       <a:srgbClr val="F5F7FA"/>
                     </a:solidFill>
@@ -8826,7 +8826,7 @@
                       </a:r>
                     </a:p>
                   </a:txBody>
-                  <a:tcPr>
+                  <a:tcPr marT="0" marB="0" marL="38100" marR="38100" anchor="ctr">
                     <a:solidFill>
                       <a:srgbClr val="F5F7FA"/>
                     </a:solidFill>
@@ -8849,7 +8849,7 @@
                       </a:r>
                     </a:p>
                   </a:txBody>
-                  <a:tcPr>
+                  <a:tcPr marT="0" marB="0" marL="38100" marR="38100" anchor="ctr">
                     <a:solidFill>
                       <a:srgbClr val="F5F7FA"/>
                     </a:solidFill>
@@ -8872,7 +8872,7 @@
                       </a:r>
                     </a:p>
                   </a:txBody>
-                  <a:tcPr>
+                  <a:tcPr marT="0" marB="0" marL="38100" marR="38100" anchor="ctr">
                     <a:solidFill>
                       <a:srgbClr val="F5F7FA"/>
                     </a:solidFill>
@@ -8895,14 +8895,14 @@
                       </a:r>
                     </a:p>
                   </a:txBody>
-                  <a:tcPr>
+                  <a:tcPr marT="0" marB="0" marL="38100" marR="38100" anchor="ctr">
                     <a:solidFill>
                       <a:srgbClr val="F5F7FA"/>
                     </a:solidFill>
                   </a:tcPr>
                 </a:tc>
               </a:tr>
-              <a:tr h="196596">
+              <a:tr h="214884">
                 <a:tc>
                   <a:txBody>
                     <a:bodyPr wrap="none"/>
@@ -8920,7 +8920,7 @@
                       </a:r>
                     </a:p>
                   </a:txBody>
-                  <a:tcPr>
+                  <a:tcPr marT="0" marB="0" marL="38100" marR="38100" anchor="ctr">
                     <a:solidFill>
                       <a:srgbClr val="FFFFFF"/>
                     </a:solidFill>
@@ -8943,7 +8943,7 @@
                       </a:r>
                     </a:p>
                   </a:txBody>
-                  <a:tcPr>
+                  <a:tcPr marT="0" marB="0" marL="38100" marR="38100" anchor="ctr">
                     <a:solidFill>
                       <a:srgbClr val="FFFFFF"/>
                     </a:solidFill>
@@ -8966,7 +8966,7 @@
                       </a:r>
                     </a:p>
                   </a:txBody>
-                  <a:tcPr>
+                  <a:tcPr marT="0" marB="0" marL="38100" marR="38100" anchor="ctr">
                     <a:solidFill>
                       <a:srgbClr val="FFFFFF"/>
                     </a:solidFill>
@@ -8989,7 +8989,7 @@
                       </a:r>
                     </a:p>
                   </a:txBody>
-                  <a:tcPr>
+                  <a:tcPr marT="0" marB="0" marL="38100" marR="38100" anchor="ctr">
                     <a:solidFill>
                       <a:srgbClr val="FFFFFF"/>
                     </a:solidFill>
@@ -9012,7 +9012,7 @@
                       </a:r>
                     </a:p>
                   </a:txBody>
-                  <a:tcPr>
+                  <a:tcPr marT="0" marB="0" marL="38100" marR="38100" anchor="ctr">
                     <a:solidFill>
                       <a:srgbClr val="FFFFFF"/>
                     </a:solidFill>
@@ -9035,7 +9035,7 @@
                       </a:r>
                     </a:p>
                   </a:txBody>
-                  <a:tcPr>
+                  <a:tcPr marT="0" marB="0" marL="38100" marR="38100" anchor="ctr">
                     <a:solidFill>
                       <a:srgbClr val="FFFFFF"/>
                     </a:solidFill>
@@ -9058,7 +9058,7 @@
                       </a:r>
                     </a:p>
                   </a:txBody>
-                  <a:tcPr>
+                  <a:tcPr marT="0" marB="0" marL="38100" marR="38100" anchor="ctr">
                     <a:solidFill>
                       <a:srgbClr val="FFFFFF"/>
                     </a:solidFill>
@@ -9081,14 +9081,14 @@
                       </a:r>
                     </a:p>
                   </a:txBody>
-                  <a:tcPr>
+                  <a:tcPr marT="0" marB="0" marL="38100" marR="38100" anchor="ctr">
                     <a:solidFill>
                       <a:srgbClr val="FFFFFF"/>
                     </a:solidFill>
                   </a:tcPr>
                 </a:tc>
               </a:tr>
-              <a:tr h="196596">
+              <a:tr h="214884">
                 <a:tc>
                   <a:txBody>
                     <a:bodyPr wrap="none"/>
@@ -9106,7 +9106,7 @@
                       </a:r>
                     </a:p>
                   </a:txBody>
-                  <a:tcPr>
+                  <a:tcPr marT="0" marB="0" marL="38100" marR="38100" anchor="ctr">
                     <a:solidFill>
                       <a:srgbClr val="F5F7FA"/>
                     </a:solidFill>
@@ -9129,7 +9129,7 @@
                       </a:r>
                     </a:p>
                   </a:txBody>
-                  <a:tcPr>
+                  <a:tcPr marT="0" marB="0" marL="38100" marR="38100" anchor="ctr">
                     <a:solidFill>
                       <a:srgbClr val="F5F7FA"/>
                     </a:solidFill>
@@ -9152,7 +9152,7 @@
                       </a:r>
                     </a:p>
                   </a:txBody>
-                  <a:tcPr>
+                  <a:tcPr marT="0" marB="0" marL="38100" marR="38100" anchor="ctr">
                     <a:solidFill>
                       <a:srgbClr val="F5F7FA"/>
                     </a:solidFill>
@@ -9175,7 +9175,7 @@
                       </a:r>
                     </a:p>
                   </a:txBody>
-                  <a:tcPr>
+                  <a:tcPr marT="0" marB="0" marL="38100" marR="38100" anchor="ctr">
                     <a:solidFill>
                       <a:srgbClr val="F5F7FA"/>
                     </a:solidFill>
@@ -9198,7 +9198,7 @@
                       </a:r>
                     </a:p>
                   </a:txBody>
-                  <a:tcPr>
+                  <a:tcPr marT="0" marB="0" marL="38100" marR="38100" anchor="ctr">
                     <a:solidFill>
                       <a:srgbClr val="F5F7FA"/>
                     </a:solidFill>
@@ -9221,7 +9221,7 @@
                       </a:r>
                     </a:p>
                   </a:txBody>
-                  <a:tcPr>
+                  <a:tcPr marT="0" marB="0" marL="38100" marR="38100" anchor="ctr">
                     <a:solidFill>
                       <a:srgbClr val="F5F7FA"/>
                     </a:solidFill>
@@ -9244,7 +9244,7 @@
                       </a:r>
                     </a:p>
                   </a:txBody>
-                  <a:tcPr>
+                  <a:tcPr marT="0" marB="0" marL="38100" marR="38100" anchor="ctr">
                     <a:solidFill>
                       <a:srgbClr val="F5F7FA"/>
                     </a:solidFill>
@@ -9267,14 +9267,14 @@
                       </a:r>
                     </a:p>
                   </a:txBody>
-                  <a:tcPr>
+                  <a:tcPr marT="0" marB="0" marL="38100" marR="38100" anchor="ctr">
                     <a:solidFill>
                       <a:srgbClr val="F5F7FA"/>
                     </a:solidFill>
                   </a:tcPr>
                 </a:tc>
               </a:tr>
-              <a:tr h="196596">
+              <a:tr h="214884">
                 <a:tc>
                   <a:txBody>
                     <a:bodyPr wrap="none"/>
@@ -9292,7 +9292,7 @@
                       </a:r>
                     </a:p>
                   </a:txBody>
-                  <a:tcPr>
+                  <a:tcPr marT="0" marB="0" marL="38100" marR="38100" anchor="ctr">
                     <a:solidFill>
                       <a:srgbClr val="FFFFFF"/>
                     </a:solidFill>
@@ -9315,7 +9315,7 @@
                       </a:r>
                     </a:p>
                   </a:txBody>
-                  <a:tcPr>
+                  <a:tcPr marT="0" marB="0" marL="38100" marR="38100" anchor="ctr">
                     <a:solidFill>
                       <a:srgbClr val="FFFFFF"/>
                     </a:solidFill>
@@ -9338,7 +9338,7 @@
                       </a:r>
                     </a:p>
                   </a:txBody>
-                  <a:tcPr>
+                  <a:tcPr marT="0" marB="0" marL="38100" marR="38100" anchor="ctr">
                     <a:solidFill>
                       <a:srgbClr val="FFFFFF"/>
                     </a:solidFill>
@@ -9361,7 +9361,7 @@
                       </a:r>
                     </a:p>
                   </a:txBody>
-                  <a:tcPr>
+                  <a:tcPr marT="0" marB="0" marL="38100" marR="38100" anchor="ctr">
                     <a:solidFill>
                       <a:srgbClr val="FFFFFF"/>
                     </a:solidFill>
@@ -9384,7 +9384,7 @@
                       </a:r>
                     </a:p>
                   </a:txBody>
-                  <a:tcPr>
+                  <a:tcPr marT="0" marB="0" marL="38100" marR="38100" anchor="ctr">
                     <a:solidFill>
                       <a:srgbClr val="FFFFFF"/>
                     </a:solidFill>
@@ -9407,7 +9407,7 @@
                       </a:r>
                     </a:p>
                   </a:txBody>
-                  <a:tcPr>
+                  <a:tcPr marT="0" marB="0" marL="38100" marR="38100" anchor="ctr">
                     <a:solidFill>
                       <a:srgbClr val="FFFFFF"/>
                     </a:solidFill>
@@ -9430,7 +9430,7 @@
                       </a:r>
                     </a:p>
                   </a:txBody>
-                  <a:tcPr>
+                  <a:tcPr marT="0" marB="0" marL="38100" marR="38100" anchor="ctr">
                     <a:solidFill>
                       <a:srgbClr val="FFFFFF"/>
                     </a:solidFill>
@@ -9453,14 +9453,14 @@
                       </a:r>
                     </a:p>
                   </a:txBody>
-                  <a:tcPr>
+                  <a:tcPr marT="0" marB="0" marL="38100" marR="38100" anchor="ctr">
                     <a:solidFill>
                       <a:srgbClr val="FFFFFF"/>
                     </a:solidFill>
                   </a:tcPr>
                 </a:tc>
               </a:tr>
-              <a:tr h="196596">
+              <a:tr h="214884">
                 <a:tc>
                   <a:txBody>
                     <a:bodyPr wrap="none"/>
@@ -9478,7 +9478,7 @@
                       </a:r>
                     </a:p>
                   </a:txBody>
-                  <a:tcPr>
+                  <a:tcPr marT="0" marB="0" marL="38100" marR="38100" anchor="ctr">
                     <a:solidFill>
                       <a:srgbClr val="F5F7FA"/>
                     </a:solidFill>
@@ -9501,7 +9501,7 @@
                       </a:r>
                     </a:p>
                   </a:txBody>
-                  <a:tcPr>
+                  <a:tcPr marT="0" marB="0" marL="38100" marR="38100" anchor="ctr">
                     <a:solidFill>
                       <a:srgbClr val="F5F7FA"/>
                     </a:solidFill>
@@ -9524,7 +9524,7 @@
                       </a:r>
                     </a:p>
                   </a:txBody>
-                  <a:tcPr>
+                  <a:tcPr marT="0" marB="0" marL="38100" marR="38100" anchor="ctr">
                     <a:solidFill>
                       <a:srgbClr val="F5F7FA"/>
                     </a:solidFill>
@@ -9547,7 +9547,7 @@
                       </a:r>
                     </a:p>
                   </a:txBody>
-                  <a:tcPr>
+                  <a:tcPr marT="0" marB="0" marL="38100" marR="38100" anchor="ctr">
                     <a:solidFill>
                       <a:srgbClr val="F5F7FA"/>
                     </a:solidFill>
@@ -9570,7 +9570,7 @@
                       </a:r>
                     </a:p>
                   </a:txBody>
-                  <a:tcPr>
+                  <a:tcPr marT="0" marB="0" marL="38100" marR="38100" anchor="ctr">
                     <a:solidFill>
                       <a:srgbClr val="F5F7FA"/>
                     </a:solidFill>
@@ -9593,7 +9593,7 @@
                       </a:r>
                     </a:p>
                   </a:txBody>
-                  <a:tcPr>
+                  <a:tcPr marT="0" marB="0" marL="38100" marR="38100" anchor="ctr">
                     <a:solidFill>
                       <a:srgbClr val="F5F7FA"/>
                     </a:solidFill>
@@ -9616,7 +9616,7 @@
                       </a:r>
                     </a:p>
                   </a:txBody>
-                  <a:tcPr>
+                  <a:tcPr marT="0" marB="0" marL="38100" marR="38100" anchor="ctr">
                     <a:solidFill>
                       <a:srgbClr val="F5F7FA"/>
                     </a:solidFill>
@@ -9639,14 +9639,14 @@
                       </a:r>
                     </a:p>
                   </a:txBody>
-                  <a:tcPr>
+                  <a:tcPr marT="0" marB="0" marL="38100" marR="38100" anchor="ctr">
                     <a:solidFill>
                       <a:srgbClr val="F5F7FA"/>
                     </a:solidFill>
                   </a:tcPr>
                 </a:tc>
               </a:tr>
-              <a:tr h="196596">
+              <a:tr h="214884">
                 <a:tc>
                   <a:txBody>
                     <a:bodyPr wrap="none"/>
@@ -9664,7 +9664,7 @@
                       </a:r>
                     </a:p>
                   </a:txBody>
-                  <a:tcPr>
+                  <a:tcPr marT="0" marB="0" marL="38100" marR="38100" anchor="ctr">
                     <a:solidFill>
                       <a:srgbClr val="FFFFFF"/>
                     </a:solidFill>
@@ -9687,7 +9687,7 @@
                       </a:r>
                     </a:p>
                   </a:txBody>
-                  <a:tcPr>
+                  <a:tcPr marT="0" marB="0" marL="38100" marR="38100" anchor="ctr">
                     <a:solidFill>
                       <a:srgbClr val="FFFFFF"/>
                     </a:solidFill>
@@ -9710,7 +9710,7 @@
                       </a:r>
                     </a:p>
                   </a:txBody>
-                  <a:tcPr>
+                  <a:tcPr marT="0" marB="0" marL="38100" marR="38100" anchor="ctr">
                     <a:solidFill>
                       <a:srgbClr val="FFFFFF"/>
                     </a:solidFill>
@@ -9733,7 +9733,7 @@
                       </a:r>
                     </a:p>
                   </a:txBody>
-                  <a:tcPr>
+                  <a:tcPr marT="0" marB="0" marL="38100" marR="38100" anchor="ctr">
                     <a:solidFill>
                       <a:srgbClr val="FFFFFF"/>
                     </a:solidFill>
@@ -9756,7 +9756,7 @@
                       </a:r>
                     </a:p>
                   </a:txBody>
-                  <a:tcPr>
+                  <a:tcPr marT="0" marB="0" marL="38100" marR="38100" anchor="ctr">
                     <a:solidFill>
                       <a:srgbClr val="FFFFFF"/>
                     </a:solidFill>
@@ -9779,7 +9779,7 @@
                       </a:r>
                     </a:p>
                   </a:txBody>
-                  <a:tcPr>
+                  <a:tcPr marT="0" marB="0" marL="38100" marR="38100" anchor="ctr">
                     <a:solidFill>
                       <a:srgbClr val="FFFFFF"/>
                     </a:solidFill>
@@ -9802,7 +9802,7 @@
                       </a:r>
                     </a:p>
                   </a:txBody>
-                  <a:tcPr>
+                  <a:tcPr marT="0" marB="0" marL="38100" marR="38100" anchor="ctr">
                     <a:solidFill>
                       <a:srgbClr val="FFFFFF"/>
                     </a:solidFill>
@@ -9825,7 +9825,7 @@
                       </a:r>
                     </a:p>
                   </a:txBody>
-                  <a:tcPr>
+                  <a:tcPr marT="0" marB="0" marL="38100" marR="38100" anchor="ctr">
                     <a:solidFill>
                       <a:srgbClr val="FFFFFF"/>
                     </a:solidFill>
@@ -9844,8 +9844,8 @@
         </p:nvSpPr>
         <p:spPr>
           <a:xfrm>
-            <a:off x="5806440" y="1434122"/>
-            <a:ext cx="1691640" cy="108127"/>
+            <a:off x="5806440" y="1456524"/>
+            <a:ext cx="1691640" cy="118186"/>
           </a:xfrm>
           <a:prstGeom prst="roundRect">
             <a:avLst>
@@ -9895,8 +9895,8 @@
         </p:nvSpPr>
         <p:spPr>
           <a:xfrm>
-            <a:off x="5806440" y="1434122"/>
-            <a:ext cx="1387144" cy="108127"/>
+            <a:off x="5806440" y="1456524"/>
+            <a:ext cx="1387144" cy="118186"/>
           </a:xfrm>
           <a:prstGeom prst="roundRect">
             <a:avLst>
@@ -9947,8 +9947,8 @@
         </p:nvSpPr>
         <p:spPr>
           <a:xfrm>
-            <a:off x="7543800" y="1402118"/>
-            <a:ext cx="457200" cy="172135"/>
+            <a:off x="7543800" y="1424520"/>
+            <a:ext cx="457200" cy="182194"/>
           </a:xfrm>
           <a:prstGeom prst="rect">
             <a:avLst/>
@@ -9982,8 +9982,8 @@
         </p:nvSpPr>
         <p:spPr>
           <a:xfrm>
-            <a:off x="5806440" y="1630718"/>
-            <a:ext cx="1691640" cy="108127"/>
+            <a:off x="5806440" y="1671408"/>
+            <a:ext cx="1691640" cy="118186"/>
           </a:xfrm>
           <a:prstGeom prst="roundRect">
             <a:avLst>
@@ -10033,8 +10033,8 @@
         </p:nvSpPr>
         <p:spPr>
           <a:xfrm>
-            <a:off x="5806440" y="1630718"/>
-            <a:ext cx="1691640" cy="108127"/>
+            <a:off x="5806440" y="1671408"/>
+            <a:ext cx="1691640" cy="118186"/>
           </a:xfrm>
           <a:prstGeom prst="roundRect">
             <a:avLst>
@@ -10085,8 +10085,8 @@
         </p:nvSpPr>
         <p:spPr>
           <a:xfrm>
-            <a:off x="7543800" y="1598714"/>
-            <a:ext cx="457200" cy="172135"/>
+            <a:off x="7543800" y="1639404"/>
+            <a:ext cx="457200" cy="182194"/>
           </a:xfrm>
           <a:prstGeom prst="rect">
             <a:avLst/>
@@ -10120,8 +10120,8 @@
         </p:nvSpPr>
         <p:spPr>
           <a:xfrm>
-            <a:off x="5806440" y="1827314"/>
-            <a:ext cx="1691640" cy="108127"/>
+            <a:off x="5806440" y="1886292"/>
+            <a:ext cx="1691640" cy="118186"/>
           </a:xfrm>
           <a:prstGeom prst="roundRect">
             <a:avLst>
@@ -10171,8 +10171,8 @@
         </p:nvSpPr>
         <p:spPr>
           <a:xfrm>
-            <a:off x="5806440" y="1827314"/>
-            <a:ext cx="1691640" cy="108127"/>
+            <a:off x="5806440" y="1886292"/>
+            <a:ext cx="1691640" cy="118186"/>
           </a:xfrm>
           <a:prstGeom prst="roundRect">
             <a:avLst>
@@ -10223,8 +10223,8 @@
         </p:nvSpPr>
         <p:spPr>
           <a:xfrm>
-            <a:off x="7543800" y="1795310"/>
-            <a:ext cx="457200" cy="172135"/>
+            <a:off x="7543800" y="1854288"/>
+            <a:ext cx="457200" cy="182194"/>
           </a:xfrm>
           <a:prstGeom prst="rect">
             <a:avLst/>
@@ -10258,8 +10258,8 @@
         </p:nvSpPr>
         <p:spPr>
           <a:xfrm>
-            <a:off x="5806440" y="2023910"/>
-            <a:ext cx="1691640" cy="108127"/>
+            <a:off x="5806440" y="2101176"/>
+            <a:ext cx="1691640" cy="118186"/>
           </a:xfrm>
           <a:prstGeom prst="roundRect">
             <a:avLst>
@@ -10309,8 +10309,8 @@
         </p:nvSpPr>
         <p:spPr>
           <a:xfrm>
-            <a:off x="5806440" y="2023910"/>
-            <a:ext cx="1691640" cy="108127"/>
+            <a:off x="5806440" y="2101176"/>
+            <a:ext cx="1691640" cy="118186"/>
           </a:xfrm>
           <a:prstGeom prst="roundRect">
             <a:avLst>
@@ -10361,8 +10361,8 @@
         </p:nvSpPr>
         <p:spPr>
           <a:xfrm>
-            <a:off x="7543800" y="1991906"/>
-            <a:ext cx="457200" cy="172135"/>
+            <a:off x="7543800" y="2069172"/>
+            <a:ext cx="457200" cy="182194"/>
           </a:xfrm>
           <a:prstGeom prst="rect">
             <a:avLst/>
@@ -10396,8 +10396,8 @@
         </p:nvSpPr>
         <p:spPr>
           <a:xfrm>
-            <a:off x="5806440" y="2220506"/>
-            <a:ext cx="1691640" cy="108127"/>
+            <a:off x="5806440" y="2316060"/>
+            <a:ext cx="1691640" cy="118186"/>
           </a:xfrm>
           <a:prstGeom prst="roundRect">
             <a:avLst>
@@ -10447,8 +10447,8 @@
         </p:nvSpPr>
         <p:spPr>
           <a:xfrm>
-            <a:off x="5806440" y="2220506"/>
-            <a:ext cx="1640890" cy="108127"/>
+            <a:off x="5806440" y="2316060"/>
+            <a:ext cx="1640890" cy="118186"/>
           </a:xfrm>
           <a:prstGeom prst="roundRect">
             <a:avLst>
@@ -10499,8 +10499,8 @@
         </p:nvSpPr>
         <p:spPr>
           <a:xfrm>
-            <a:off x="7543800" y="2188502"/>
-            <a:ext cx="457200" cy="172135"/>
+            <a:off x="7543800" y="2284056"/>
+            <a:ext cx="457200" cy="182194"/>
           </a:xfrm>
           <a:prstGeom prst="rect">
             <a:avLst/>
@@ -10534,8 +10534,8 @@
         </p:nvSpPr>
         <p:spPr>
           <a:xfrm>
-            <a:off x="5806440" y="2417102"/>
-            <a:ext cx="1691640" cy="108127"/>
+            <a:off x="5806440" y="2530944"/>
+            <a:ext cx="1691640" cy="118186"/>
           </a:xfrm>
           <a:prstGeom prst="roundRect">
             <a:avLst>
@@ -10585,8 +10585,8 @@
         </p:nvSpPr>
         <p:spPr>
           <a:xfrm>
-            <a:off x="5806440" y="2417102"/>
-            <a:ext cx="1607058" cy="108127"/>
+            <a:off x="5806440" y="2530944"/>
+            <a:ext cx="1607058" cy="118186"/>
           </a:xfrm>
           <a:prstGeom prst="roundRect">
             <a:avLst>
@@ -10637,8 +10637,8 @@
         </p:nvSpPr>
         <p:spPr>
           <a:xfrm>
-            <a:off x="7543800" y="2385098"/>
-            <a:ext cx="457200" cy="172135"/>
+            <a:off x="7543800" y="2498940"/>
+            <a:ext cx="457200" cy="182194"/>
           </a:xfrm>
           <a:prstGeom prst="rect">
             <a:avLst/>
@@ -10672,8 +10672,8 @@
         </p:nvSpPr>
         <p:spPr>
           <a:xfrm>
-            <a:off x="5806440" y="2613698"/>
-            <a:ext cx="1691640" cy="108127"/>
+            <a:off x="5806440" y="2745828"/>
+            <a:ext cx="1691640" cy="118186"/>
           </a:xfrm>
           <a:prstGeom prst="roundRect">
             <a:avLst>
@@ -10723,8 +10723,8 @@
         </p:nvSpPr>
         <p:spPr>
           <a:xfrm>
-            <a:off x="5806440" y="2613698"/>
-            <a:ext cx="1691640" cy="108127"/>
+            <a:off x="5806440" y="2745828"/>
+            <a:ext cx="1691640" cy="118186"/>
           </a:xfrm>
           <a:prstGeom prst="roundRect">
             <a:avLst>
@@ -10775,8 +10775,8 @@
         </p:nvSpPr>
         <p:spPr>
           <a:xfrm>
-            <a:off x="7543800" y="2581694"/>
-            <a:ext cx="457200" cy="172135"/>
+            <a:off x="7543800" y="2713824"/>
+            <a:ext cx="457200" cy="182194"/>
           </a:xfrm>
           <a:prstGeom prst="rect">
             <a:avLst/>
@@ -10810,8 +10810,8 @@
         </p:nvSpPr>
         <p:spPr>
           <a:xfrm>
-            <a:off x="5806440" y="2810294"/>
-            <a:ext cx="1691640" cy="108127"/>
+            <a:off x="5806440" y="2960712"/>
+            <a:ext cx="1691640" cy="118186"/>
           </a:xfrm>
           <a:prstGeom prst="roundRect">
             <a:avLst>
@@ -10861,8 +10861,8 @@
         </p:nvSpPr>
         <p:spPr>
           <a:xfrm>
-            <a:off x="5806440" y="2810294"/>
-            <a:ext cx="1691640" cy="108127"/>
+            <a:off x="5806440" y="2960712"/>
+            <a:ext cx="1691640" cy="118186"/>
           </a:xfrm>
           <a:prstGeom prst="roundRect">
             <a:avLst>
@@ -10913,8 +10913,8 @@
         </p:nvSpPr>
         <p:spPr>
           <a:xfrm>
-            <a:off x="7543800" y="2778290"/>
-            <a:ext cx="457200" cy="172135"/>
+            <a:off x="7543800" y="2928708"/>
+            <a:ext cx="457200" cy="182194"/>
           </a:xfrm>
           <a:prstGeom prst="rect">
             <a:avLst/>
@@ -10948,8 +10948,8 @@
         </p:nvSpPr>
         <p:spPr>
           <a:xfrm>
-            <a:off x="5806440" y="3006890"/>
-            <a:ext cx="1691640" cy="108127"/>
+            <a:off x="5806440" y="3175596"/>
+            <a:ext cx="1691640" cy="118186"/>
           </a:xfrm>
           <a:prstGeom prst="roundRect">
             <a:avLst>
@@ -10999,8 +10999,8 @@
         </p:nvSpPr>
         <p:spPr>
           <a:xfrm>
-            <a:off x="5806440" y="3006890"/>
-            <a:ext cx="1691640" cy="108127"/>
+            <a:off x="5806440" y="3175596"/>
+            <a:ext cx="1691640" cy="118186"/>
           </a:xfrm>
           <a:prstGeom prst="roundRect">
             <a:avLst>
@@ -11051,8 +11051,8 @@
         </p:nvSpPr>
         <p:spPr>
           <a:xfrm>
-            <a:off x="7543800" y="2974886"/>
-            <a:ext cx="457200" cy="172135"/>
+            <a:off x="7543800" y="3143592"/>
+            <a:ext cx="457200" cy="182194"/>
           </a:xfrm>
           <a:prstGeom prst="rect">
             <a:avLst/>
@@ -11086,8 +11086,8 @@
         </p:nvSpPr>
         <p:spPr>
           <a:xfrm>
-            <a:off x="5806440" y="3203486"/>
-            <a:ext cx="1691640" cy="108127"/>
+            <a:off x="5806440" y="3390480"/>
+            <a:ext cx="1691640" cy="118186"/>
           </a:xfrm>
           <a:prstGeom prst="roundRect">
             <a:avLst>
@@ -11137,8 +11137,8 @@
         </p:nvSpPr>
         <p:spPr>
           <a:xfrm>
-            <a:off x="5806440" y="3203486"/>
-            <a:ext cx="1691640" cy="108127"/>
+            <a:off x="5806440" y="3390480"/>
+            <a:ext cx="1691640" cy="118186"/>
           </a:xfrm>
           <a:prstGeom prst="roundRect">
             <a:avLst>
@@ -11189,8 +11189,8 @@
         </p:nvSpPr>
         <p:spPr>
           <a:xfrm>
-            <a:off x="7543800" y="3171482"/>
-            <a:ext cx="457200" cy="172135"/>
+            <a:off x="7543800" y="3358476"/>
+            <a:ext cx="457200" cy="182194"/>
           </a:xfrm>
           <a:prstGeom prst="rect">
             <a:avLst/>
@@ -11224,8 +11224,8 @@
         </p:nvSpPr>
         <p:spPr>
           <a:xfrm>
-            <a:off x="5806440" y="3400082"/>
-            <a:ext cx="1691640" cy="108127"/>
+            <a:off x="5806440" y="3605364"/>
+            <a:ext cx="1691640" cy="118186"/>
           </a:xfrm>
           <a:prstGeom prst="roundRect">
             <a:avLst>
@@ -11275,8 +11275,8 @@
         </p:nvSpPr>
         <p:spPr>
           <a:xfrm>
-            <a:off x="5806440" y="3400082"/>
-            <a:ext cx="1691640" cy="108127"/>
+            <a:off x="5806440" y="3605364"/>
+            <a:ext cx="1691640" cy="118186"/>
           </a:xfrm>
           <a:prstGeom prst="roundRect">
             <a:avLst>
@@ -11327,8 +11327,8 @@
         </p:nvSpPr>
         <p:spPr>
           <a:xfrm>
-            <a:off x="7543800" y="3368078"/>
-            <a:ext cx="457200" cy="172135"/>
+            <a:off x="7543800" y="3573360"/>
+            <a:ext cx="457200" cy="182194"/>
           </a:xfrm>
           <a:prstGeom prst="rect">
             <a:avLst/>
@@ -11362,8 +11362,8 @@
         </p:nvSpPr>
         <p:spPr>
           <a:xfrm>
-            <a:off x="5806440" y="3596678"/>
-            <a:ext cx="1691640" cy="108127"/>
+            <a:off x="5806440" y="3820248"/>
+            <a:ext cx="1691640" cy="118186"/>
           </a:xfrm>
           <a:prstGeom prst="roundRect">
             <a:avLst>
@@ -11413,8 +11413,8 @@
         </p:nvSpPr>
         <p:spPr>
           <a:xfrm>
-            <a:off x="5806440" y="3596678"/>
-            <a:ext cx="1691640" cy="108127"/>
+            <a:off x="5806440" y="3820248"/>
+            <a:ext cx="1691640" cy="118186"/>
           </a:xfrm>
           <a:prstGeom prst="roundRect">
             <a:avLst>
@@ -11465,8 +11465,8 @@
         </p:nvSpPr>
         <p:spPr>
           <a:xfrm>
-            <a:off x="7543800" y="3564674"/>
-            <a:ext cx="457200" cy="172135"/>
+            <a:off x="7543800" y="3788244"/>
+            <a:ext cx="457200" cy="182194"/>
           </a:xfrm>
           <a:prstGeom prst="rect">
             <a:avLst/>
@@ -11500,8 +11500,8 @@
         </p:nvSpPr>
         <p:spPr>
           <a:xfrm>
-            <a:off x="5806440" y="3793274"/>
-            <a:ext cx="1691640" cy="108127"/>
+            <a:off x="5806440" y="4035132"/>
+            <a:ext cx="1691640" cy="118186"/>
           </a:xfrm>
           <a:prstGeom prst="roundRect">
             <a:avLst>
@@ -11551,8 +11551,8 @@
         </p:nvSpPr>
         <p:spPr>
           <a:xfrm>
-            <a:off x="5806440" y="3793274"/>
-            <a:ext cx="372160" cy="108127"/>
+            <a:off x="5806440" y="4035132"/>
+            <a:ext cx="372160" cy="118186"/>
           </a:xfrm>
           <a:prstGeom prst="roundRect">
             <a:avLst>
@@ -11603,8 +11603,8 @@
         </p:nvSpPr>
         <p:spPr>
           <a:xfrm>
-            <a:off x="7543800" y="3761270"/>
-            <a:ext cx="457200" cy="172135"/>
+            <a:off x="7543800" y="4003128"/>
+            <a:ext cx="457200" cy="182194"/>
           </a:xfrm>
           <a:prstGeom prst="rect">
             <a:avLst/>
@@ -11638,8 +11638,8 @@
         </p:nvSpPr>
         <p:spPr>
           <a:xfrm>
-            <a:off x="5806440" y="3989870"/>
-            <a:ext cx="1691640" cy="108127"/>
+            <a:off x="5806440" y="4250016"/>
+            <a:ext cx="1691640" cy="118186"/>
           </a:xfrm>
           <a:prstGeom prst="roundRect">
             <a:avLst>
@@ -11689,8 +11689,8 @@
         </p:nvSpPr>
         <p:spPr>
           <a:xfrm>
-            <a:off x="5806440" y="3989870"/>
-            <a:ext cx="1353312" cy="108127"/>
+            <a:off x="5806440" y="4250016"/>
+            <a:ext cx="1353312" cy="118186"/>
           </a:xfrm>
           <a:prstGeom prst="roundRect">
             <a:avLst>
@@ -11741,8 +11741,8 @@
         </p:nvSpPr>
         <p:spPr>
           <a:xfrm>
-            <a:off x="7543800" y="3957866"/>
-            <a:ext cx="457200" cy="172135"/>
+            <a:off x="7543800" y="4218012"/>
+            <a:ext cx="457200" cy="182194"/>
           </a:xfrm>
           <a:prstGeom prst="rect">
             <a:avLst/>
@@ -11776,8 +11776,8 @@
         </p:nvSpPr>
         <p:spPr>
           <a:xfrm>
-            <a:off x="5806440" y="4186466"/>
-            <a:ext cx="1691640" cy="108127"/>
+            <a:off x="5806440" y="4464900"/>
+            <a:ext cx="1691640" cy="118186"/>
           </a:xfrm>
           <a:prstGeom prst="roundRect">
             <a:avLst>
@@ -11827,8 +11827,8 @@
         </p:nvSpPr>
         <p:spPr>
           <a:xfrm>
-            <a:off x="5806440" y="4186466"/>
-            <a:ext cx="1674723" cy="108127"/>
+            <a:off x="5806440" y="4464900"/>
+            <a:ext cx="1674723" cy="118186"/>
           </a:xfrm>
           <a:prstGeom prst="roundRect">
             <a:avLst>
@@ -11879,8 +11879,8 @@
         </p:nvSpPr>
         <p:spPr>
           <a:xfrm>
-            <a:off x="7543800" y="4154462"/>
-            <a:ext cx="457200" cy="172135"/>
+            <a:off x="7543800" y="4432896"/>
+            <a:ext cx="457200" cy="182194"/>
           </a:xfrm>
           <a:prstGeom prst="rect">
             <a:avLst/>
@@ -11914,8 +11914,8 @@
         </p:nvSpPr>
         <p:spPr>
           <a:xfrm>
-            <a:off x="5806440" y="4383062"/>
-            <a:ext cx="1691640" cy="108127"/>
+            <a:off x="5806440" y="4679784"/>
+            <a:ext cx="1691640" cy="118186"/>
           </a:xfrm>
           <a:prstGeom prst="roundRect">
             <a:avLst>
@@ -11965,8 +11965,8 @@
         </p:nvSpPr>
         <p:spPr>
           <a:xfrm>
-            <a:off x="5806440" y="4383062"/>
-            <a:ext cx="524408" cy="108127"/>
+            <a:off x="5806440" y="4679784"/>
+            <a:ext cx="524408" cy="118186"/>
           </a:xfrm>
           <a:prstGeom prst="roundRect">
             <a:avLst>
@@ -12017,8 +12017,8 @@
         </p:nvSpPr>
         <p:spPr>
           <a:xfrm>
-            <a:off x="7543800" y="4351058"/>
-            <a:ext cx="457200" cy="172135"/>
+            <a:off x="7543800" y="4647780"/>
+            <a:ext cx="457200" cy="182194"/>
           </a:xfrm>
           <a:prstGeom prst="rect">
             <a:avLst/>
@@ -12052,8 +12052,8 @@
         </p:nvSpPr>
         <p:spPr>
           <a:xfrm>
-            <a:off x="5806440" y="4579658"/>
-            <a:ext cx="1691640" cy="108127"/>
+            <a:off x="5806440" y="4894668"/>
+            <a:ext cx="1691640" cy="118186"/>
           </a:xfrm>
           <a:prstGeom prst="roundRect">
             <a:avLst>
@@ -12103,8 +12103,8 @@
         </p:nvSpPr>
         <p:spPr>
           <a:xfrm>
-            <a:off x="5806440" y="4579658"/>
-            <a:ext cx="1251813" cy="108127"/>
+            <a:off x="5806440" y="4894668"/>
+            <a:ext cx="1251813" cy="118186"/>
           </a:xfrm>
           <a:prstGeom prst="roundRect">
             <a:avLst>
@@ -12155,8 +12155,8 @@
         </p:nvSpPr>
         <p:spPr>
           <a:xfrm>
-            <a:off x="7543800" y="4547654"/>
-            <a:ext cx="457200" cy="172135"/>
+            <a:off x="7543800" y="4862664"/>
+            <a:ext cx="457200" cy="182194"/>
           </a:xfrm>
           <a:prstGeom prst="rect">
             <a:avLst/>
@@ -12190,8 +12190,8 @@
         </p:nvSpPr>
         <p:spPr>
           <a:xfrm>
-            <a:off x="5806440" y="4776254"/>
-            <a:ext cx="1691640" cy="108127"/>
+            <a:off x="5806440" y="5109552"/>
+            <a:ext cx="1691640" cy="118186"/>
           </a:xfrm>
           <a:prstGeom prst="roundRect">
             <a:avLst>
@@ -12241,8 +12241,8 @@
         </p:nvSpPr>
         <p:spPr>
           <a:xfrm>
-            <a:off x="5806440" y="4776254"/>
-            <a:ext cx="108127" cy="108127"/>
+            <a:off x="5806440" y="5109552"/>
+            <a:ext cx="118186" cy="118186"/>
           </a:xfrm>
           <a:prstGeom prst="roundRect">
             <a:avLst>
@@ -12293,8 +12293,8 @@
         </p:nvSpPr>
         <p:spPr>
           <a:xfrm>
-            <a:off x="7543800" y="4744250"/>
-            <a:ext cx="457200" cy="172135"/>
+            <a:off x="7543800" y="5077548"/>
+            <a:ext cx="457200" cy="182194"/>
           </a:xfrm>
           <a:prstGeom prst="rect">
             <a:avLst/>

--- a/cierre_base.pptx
+++ b/cierre_base.pptx
@@ -5849,8 +5849,7 @@
                 </a:solidFill>
                 <a:latin typeface="Calibri"/>
               </a:rPr>
-              <a:t>En riesgo
-de atraso</a:t>
+              <a:t>En riesgo de atraso</a:t>
             </a:r>
           </a:p>
         </p:txBody>
@@ -6280,7 +6279,7 @@
         </p:nvGraphicFramePr>
         <p:xfrm>
           <a:off x="73152" y="1188720"/>
-          <a:ext cx="8741664" cy="4087368"/>
+          <a:ext cx="8741664" cy="3575304"/>
         </p:xfrm>
         <a:graphic>
           <a:graphicData uri="http://schemas.openxmlformats.org/drawingml/2006/table">
@@ -6298,7 +6297,7 @@
                 <a:gridCol w="2212848"/>
                 <a:gridCol w="841248"/>
               </a:tblGrid>
-              <a:tr h="219456">
+              <a:tr h="201168">
                 <a:tc>
                   <a:txBody>
                     <a:bodyPr wrap="none"/>
@@ -6484,7 +6483,7 @@
                   </a:tcPr>
                 </a:tc>
               </a:tr>
-              <a:tr h="214884">
+              <a:tr h="187452">
                 <a:tc>
                   <a:txBody>
                     <a:bodyPr wrap="none"/>
@@ -6670,7 +6669,7 @@
                   </a:tcPr>
                 </a:tc>
               </a:tr>
-              <a:tr h="214884">
+              <a:tr h="187452">
                 <a:tc>
                   <a:txBody>
                     <a:bodyPr wrap="none"/>
@@ -6856,7 +6855,7 @@
                   </a:tcPr>
                 </a:tc>
               </a:tr>
-              <a:tr h="214884">
+              <a:tr h="187452">
                 <a:tc>
                   <a:txBody>
                     <a:bodyPr wrap="none"/>
@@ -7042,7 +7041,7 @@
                   </a:tcPr>
                 </a:tc>
               </a:tr>
-              <a:tr h="214884">
+              <a:tr h="187452">
                 <a:tc>
                   <a:txBody>
                     <a:bodyPr wrap="none"/>
@@ -7228,7 +7227,7 @@
                   </a:tcPr>
                 </a:tc>
               </a:tr>
-              <a:tr h="214884">
+              <a:tr h="187452">
                 <a:tc>
                   <a:txBody>
                     <a:bodyPr wrap="none"/>
@@ -7414,7 +7413,7 @@
                   </a:tcPr>
                 </a:tc>
               </a:tr>
-              <a:tr h="214884">
+              <a:tr h="187452">
                 <a:tc>
                   <a:txBody>
                     <a:bodyPr wrap="none"/>
@@ -7600,7 +7599,7 @@
                   </a:tcPr>
                 </a:tc>
               </a:tr>
-              <a:tr h="214884">
+              <a:tr h="187452">
                 <a:tc>
                   <a:txBody>
                     <a:bodyPr wrap="none"/>
@@ -7786,7 +7785,7 @@
                   </a:tcPr>
                 </a:tc>
               </a:tr>
-              <a:tr h="214884">
+              <a:tr h="187452">
                 <a:tc>
                   <a:txBody>
                     <a:bodyPr wrap="none"/>
@@ -7972,7 +7971,7 @@
                   </a:tcPr>
                 </a:tc>
               </a:tr>
-              <a:tr h="214884">
+              <a:tr h="187452">
                 <a:tc>
                   <a:txBody>
                     <a:bodyPr wrap="none"/>
@@ -8158,7 +8157,7 @@
                   </a:tcPr>
                 </a:tc>
               </a:tr>
-              <a:tr h="214884">
+              <a:tr h="187452">
                 <a:tc>
                   <a:txBody>
                     <a:bodyPr wrap="none"/>
@@ -8344,7 +8343,7 @@
                   </a:tcPr>
                 </a:tc>
               </a:tr>
-              <a:tr h="214884">
+              <a:tr h="187452">
                 <a:tc>
                   <a:txBody>
                     <a:bodyPr wrap="none"/>
@@ -8530,7 +8529,7 @@
                   </a:tcPr>
                 </a:tc>
               </a:tr>
-              <a:tr h="214884">
+              <a:tr h="187452">
                 <a:tc>
                   <a:txBody>
                     <a:bodyPr wrap="none"/>
@@ -8716,7 +8715,7 @@
                   </a:tcPr>
                 </a:tc>
               </a:tr>
-              <a:tr h="214884">
+              <a:tr h="187452">
                 <a:tc>
                   <a:txBody>
                     <a:bodyPr wrap="none"/>
@@ -8902,7 +8901,7 @@
                   </a:tcPr>
                 </a:tc>
               </a:tr>
-              <a:tr h="214884">
+              <a:tr h="187452">
                 <a:tc>
                   <a:txBody>
                     <a:bodyPr wrap="none"/>
@@ -9088,7 +9087,7 @@
                   </a:tcPr>
                 </a:tc>
               </a:tr>
-              <a:tr h="214884">
+              <a:tr h="187452">
                 <a:tc>
                   <a:txBody>
                     <a:bodyPr wrap="none"/>
@@ -9274,7 +9273,7 @@
                   </a:tcPr>
                 </a:tc>
               </a:tr>
-              <a:tr h="214884">
+              <a:tr h="187452">
                 <a:tc>
                   <a:txBody>
                     <a:bodyPr wrap="none"/>
@@ -9460,7 +9459,7 @@
                   </a:tcPr>
                 </a:tc>
               </a:tr>
-              <a:tr h="214884">
+              <a:tr h="187452">
                 <a:tc>
                   <a:txBody>
                     <a:bodyPr wrap="none"/>
@@ -9646,7 +9645,7 @@
                   </a:tcPr>
                 </a:tc>
               </a:tr>
-              <a:tr h="214884">
+              <a:tr h="187452">
                 <a:tc>
                   <a:txBody>
                     <a:bodyPr wrap="none"/>
@@ -9844,8 +9843,8 @@
         </p:nvSpPr>
         <p:spPr>
           <a:xfrm>
-            <a:off x="5806440" y="1456524"/>
-            <a:ext cx="1691640" cy="118186"/>
+            <a:off x="5806440" y="1432064"/>
+            <a:ext cx="1691640" cy="103098"/>
           </a:xfrm>
           <a:prstGeom prst="roundRect">
             <a:avLst>
@@ -9895,8 +9894,8 @@
         </p:nvSpPr>
         <p:spPr>
           <a:xfrm>
-            <a:off x="5806440" y="1456524"/>
-            <a:ext cx="1387144" cy="118186"/>
+            <a:off x="5806440" y="1432064"/>
+            <a:ext cx="1387144" cy="103098"/>
           </a:xfrm>
           <a:prstGeom prst="roundRect">
             <a:avLst>
@@ -9947,8 +9946,8 @@
         </p:nvSpPr>
         <p:spPr>
           <a:xfrm>
-            <a:off x="7543800" y="1424520"/>
-            <a:ext cx="457200" cy="182194"/>
+            <a:off x="7543800" y="1400060"/>
+            <a:ext cx="457200" cy="167106"/>
           </a:xfrm>
           <a:prstGeom prst="rect">
             <a:avLst/>
@@ -9982,8 +9981,8 @@
         </p:nvSpPr>
         <p:spPr>
           <a:xfrm>
-            <a:off x="5806440" y="1671408"/>
-            <a:ext cx="1691640" cy="118186"/>
+            <a:off x="5806440" y="1619516"/>
+            <a:ext cx="1691640" cy="103098"/>
           </a:xfrm>
           <a:prstGeom prst="roundRect">
             <a:avLst>
@@ -10033,8 +10032,8 @@
         </p:nvSpPr>
         <p:spPr>
           <a:xfrm>
-            <a:off x="5806440" y="1671408"/>
-            <a:ext cx="1691640" cy="118186"/>
+            <a:off x="5806440" y="1619516"/>
+            <a:ext cx="1691640" cy="103098"/>
           </a:xfrm>
           <a:prstGeom prst="roundRect">
             <a:avLst>
@@ -10085,8 +10084,8 @@
         </p:nvSpPr>
         <p:spPr>
           <a:xfrm>
-            <a:off x="7543800" y="1639404"/>
-            <a:ext cx="457200" cy="182194"/>
+            <a:off x="7543800" y="1587512"/>
+            <a:ext cx="457200" cy="167106"/>
           </a:xfrm>
           <a:prstGeom prst="rect">
             <a:avLst/>
@@ -10120,8 +10119,8 @@
         </p:nvSpPr>
         <p:spPr>
           <a:xfrm>
-            <a:off x="5806440" y="1886292"/>
-            <a:ext cx="1691640" cy="118186"/>
+            <a:off x="5806440" y="1806968"/>
+            <a:ext cx="1691640" cy="103098"/>
           </a:xfrm>
           <a:prstGeom prst="roundRect">
             <a:avLst>
@@ -10171,8 +10170,8 @@
         </p:nvSpPr>
         <p:spPr>
           <a:xfrm>
-            <a:off x="5806440" y="1886292"/>
-            <a:ext cx="1691640" cy="118186"/>
+            <a:off x="5806440" y="1806968"/>
+            <a:ext cx="1691640" cy="103098"/>
           </a:xfrm>
           <a:prstGeom prst="roundRect">
             <a:avLst>
@@ -10223,8 +10222,8 @@
         </p:nvSpPr>
         <p:spPr>
           <a:xfrm>
-            <a:off x="7543800" y="1854288"/>
-            <a:ext cx="457200" cy="182194"/>
+            <a:off x="7543800" y="1774964"/>
+            <a:ext cx="457200" cy="167106"/>
           </a:xfrm>
           <a:prstGeom prst="rect">
             <a:avLst/>
@@ -10258,8 +10257,8 @@
         </p:nvSpPr>
         <p:spPr>
           <a:xfrm>
-            <a:off x="5806440" y="2101176"/>
-            <a:ext cx="1691640" cy="118186"/>
+            <a:off x="5806440" y="1994420"/>
+            <a:ext cx="1691640" cy="103098"/>
           </a:xfrm>
           <a:prstGeom prst="roundRect">
             <a:avLst>
@@ -10309,8 +10308,8 @@
         </p:nvSpPr>
         <p:spPr>
           <a:xfrm>
-            <a:off x="5806440" y="2101176"/>
-            <a:ext cx="1691640" cy="118186"/>
+            <a:off x="5806440" y="1994420"/>
+            <a:ext cx="1691640" cy="103098"/>
           </a:xfrm>
           <a:prstGeom prst="roundRect">
             <a:avLst>
@@ -10361,8 +10360,8 @@
         </p:nvSpPr>
         <p:spPr>
           <a:xfrm>
-            <a:off x="7543800" y="2069172"/>
-            <a:ext cx="457200" cy="182194"/>
+            <a:off x="7543800" y="1962416"/>
+            <a:ext cx="457200" cy="167106"/>
           </a:xfrm>
           <a:prstGeom prst="rect">
             <a:avLst/>
@@ -10396,8 +10395,8 @@
         </p:nvSpPr>
         <p:spPr>
           <a:xfrm>
-            <a:off x="5806440" y="2316060"/>
-            <a:ext cx="1691640" cy="118186"/>
+            <a:off x="5806440" y="2181872"/>
+            <a:ext cx="1691640" cy="103098"/>
           </a:xfrm>
           <a:prstGeom prst="roundRect">
             <a:avLst>
@@ -10447,8 +10446,8 @@
         </p:nvSpPr>
         <p:spPr>
           <a:xfrm>
-            <a:off x="5806440" y="2316060"/>
-            <a:ext cx="1640890" cy="118186"/>
+            <a:off x="5806440" y="2181872"/>
+            <a:ext cx="1640890" cy="103098"/>
           </a:xfrm>
           <a:prstGeom prst="roundRect">
             <a:avLst>
@@ -10499,8 +10498,8 @@
         </p:nvSpPr>
         <p:spPr>
           <a:xfrm>
-            <a:off x="7543800" y="2284056"/>
-            <a:ext cx="457200" cy="182194"/>
+            <a:off x="7543800" y="2149868"/>
+            <a:ext cx="457200" cy="167106"/>
           </a:xfrm>
           <a:prstGeom prst="rect">
             <a:avLst/>
@@ -10534,8 +10533,8 @@
         </p:nvSpPr>
         <p:spPr>
           <a:xfrm>
-            <a:off x="5806440" y="2530944"/>
-            <a:ext cx="1691640" cy="118186"/>
+            <a:off x="5806440" y="2369324"/>
+            <a:ext cx="1691640" cy="103098"/>
           </a:xfrm>
           <a:prstGeom prst="roundRect">
             <a:avLst>
@@ -10585,8 +10584,8 @@
         </p:nvSpPr>
         <p:spPr>
           <a:xfrm>
-            <a:off x="5806440" y="2530944"/>
-            <a:ext cx="1607058" cy="118186"/>
+            <a:off x="5806440" y="2369324"/>
+            <a:ext cx="1607058" cy="103098"/>
           </a:xfrm>
           <a:prstGeom prst="roundRect">
             <a:avLst>
@@ -10637,8 +10636,8 @@
         </p:nvSpPr>
         <p:spPr>
           <a:xfrm>
-            <a:off x="7543800" y="2498940"/>
-            <a:ext cx="457200" cy="182194"/>
+            <a:off x="7543800" y="2337320"/>
+            <a:ext cx="457200" cy="167106"/>
           </a:xfrm>
           <a:prstGeom prst="rect">
             <a:avLst/>
@@ -10672,8 +10671,8 @@
         </p:nvSpPr>
         <p:spPr>
           <a:xfrm>
-            <a:off x="5806440" y="2745828"/>
-            <a:ext cx="1691640" cy="118186"/>
+            <a:off x="5806440" y="2556776"/>
+            <a:ext cx="1691640" cy="103098"/>
           </a:xfrm>
           <a:prstGeom prst="roundRect">
             <a:avLst>
@@ -10723,8 +10722,8 @@
         </p:nvSpPr>
         <p:spPr>
           <a:xfrm>
-            <a:off x="5806440" y="2745828"/>
-            <a:ext cx="1691640" cy="118186"/>
+            <a:off x="5806440" y="2556776"/>
+            <a:ext cx="1691640" cy="103098"/>
           </a:xfrm>
           <a:prstGeom prst="roundRect">
             <a:avLst>
@@ -10775,8 +10774,8 @@
         </p:nvSpPr>
         <p:spPr>
           <a:xfrm>
-            <a:off x="7543800" y="2713824"/>
-            <a:ext cx="457200" cy="182194"/>
+            <a:off x="7543800" y="2524772"/>
+            <a:ext cx="457200" cy="167106"/>
           </a:xfrm>
           <a:prstGeom prst="rect">
             <a:avLst/>
@@ -10810,8 +10809,8 @@
         </p:nvSpPr>
         <p:spPr>
           <a:xfrm>
-            <a:off x="5806440" y="2960712"/>
-            <a:ext cx="1691640" cy="118186"/>
+            <a:off x="5806440" y="2744228"/>
+            <a:ext cx="1691640" cy="103098"/>
           </a:xfrm>
           <a:prstGeom prst="roundRect">
             <a:avLst>
@@ -10861,8 +10860,8 @@
         </p:nvSpPr>
         <p:spPr>
           <a:xfrm>
-            <a:off x="5806440" y="2960712"/>
-            <a:ext cx="1691640" cy="118186"/>
+            <a:off x="5806440" y="2744228"/>
+            <a:ext cx="1691640" cy="103098"/>
           </a:xfrm>
           <a:prstGeom prst="roundRect">
             <a:avLst>
@@ -10913,8 +10912,8 @@
         </p:nvSpPr>
         <p:spPr>
           <a:xfrm>
-            <a:off x="7543800" y="2928708"/>
-            <a:ext cx="457200" cy="182194"/>
+            <a:off x="7543800" y="2712224"/>
+            <a:ext cx="457200" cy="167106"/>
           </a:xfrm>
           <a:prstGeom prst="rect">
             <a:avLst/>
@@ -10948,8 +10947,8 @@
         </p:nvSpPr>
         <p:spPr>
           <a:xfrm>
-            <a:off x="5806440" y="3175596"/>
-            <a:ext cx="1691640" cy="118186"/>
+            <a:off x="5806440" y="2931680"/>
+            <a:ext cx="1691640" cy="103098"/>
           </a:xfrm>
           <a:prstGeom prst="roundRect">
             <a:avLst>
@@ -10999,8 +10998,8 @@
         </p:nvSpPr>
         <p:spPr>
           <a:xfrm>
-            <a:off x="5806440" y="3175596"/>
-            <a:ext cx="1691640" cy="118186"/>
+            <a:off x="5806440" y="2931680"/>
+            <a:ext cx="1691640" cy="103098"/>
           </a:xfrm>
           <a:prstGeom prst="roundRect">
             <a:avLst>
@@ -11051,8 +11050,8 @@
         </p:nvSpPr>
         <p:spPr>
           <a:xfrm>
-            <a:off x="7543800" y="3143592"/>
-            <a:ext cx="457200" cy="182194"/>
+            <a:off x="7543800" y="2899676"/>
+            <a:ext cx="457200" cy="167106"/>
           </a:xfrm>
           <a:prstGeom prst="rect">
             <a:avLst/>
@@ -11086,8 +11085,8 @@
         </p:nvSpPr>
         <p:spPr>
           <a:xfrm>
-            <a:off x="5806440" y="3390480"/>
-            <a:ext cx="1691640" cy="118186"/>
+            <a:off x="5806440" y="3119132"/>
+            <a:ext cx="1691640" cy="103098"/>
           </a:xfrm>
           <a:prstGeom prst="roundRect">
             <a:avLst>
@@ -11137,8 +11136,8 @@
         </p:nvSpPr>
         <p:spPr>
           <a:xfrm>
-            <a:off x="5806440" y="3390480"/>
-            <a:ext cx="1691640" cy="118186"/>
+            <a:off x="5806440" y="3119132"/>
+            <a:ext cx="1691640" cy="103098"/>
           </a:xfrm>
           <a:prstGeom prst="roundRect">
             <a:avLst>
@@ -11189,8 +11188,8 @@
         </p:nvSpPr>
         <p:spPr>
           <a:xfrm>
-            <a:off x="7543800" y="3358476"/>
-            <a:ext cx="457200" cy="182194"/>
+            <a:off x="7543800" y="3087128"/>
+            <a:ext cx="457200" cy="167106"/>
           </a:xfrm>
           <a:prstGeom prst="rect">
             <a:avLst/>
@@ -11224,8 +11223,8 @@
         </p:nvSpPr>
         <p:spPr>
           <a:xfrm>
-            <a:off x="5806440" y="3605364"/>
-            <a:ext cx="1691640" cy="118186"/>
+            <a:off x="5806440" y="3306584"/>
+            <a:ext cx="1691640" cy="103098"/>
           </a:xfrm>
           <a:prstGeom prst="roundRect">
             <a:avLst>
@@ -11275,8 +11274,8 @@
         </p:nvSpPr>
         <p:spPr>
           <a:xfrm>
-            <a:off x="5806440" y="3605364"/>
-            <a:ext cx="1691640" cy="118186"/>
+            <a:off x="5806440" y="3306584"/>
+            <a:ext cx="1691640" cy="103098"/>
           </a:xfrm>
           <a:prstGeom prst="roundRect">
             <a:avLst>
@@ -11327,8 +11326,8 @@
         </p:nvSpPr>
         <p:spPr>
           <a:xfrm>
-            <a:off x="7543800" y="3573360"/>
-            <a:ext cx="457200" cy="182194"/>
+            <a:off x="7543800" y="3274580"/>
+            <a:ext cx="457200" cy="167106"/>
           </a:xfrm>
           <a:prstGeom prst="rect">
             <a:avLst/>
@@ -11362,8 +11361,8 @@
         </p:nvSpPr>
         <p:spPr>
           <a:xfrm>
-            <a:off x="5806440" y="3820248"/>
-            <a:ext cx="1691640" cy="118186"/>
+            <a:off x="5806440" y="3494036"/>
+            <a:ext cx="1691640" cy="103098"/>
           </a:xfrm>
           <a:prstGeom prst="roundRect">
             <a:avLst>
@@ -11413,8 +11412,8 @@
         </p:nvSpPr>
         <p:spPr>
           <a:xfrm>
-            <a:off x="5806440" y="3820248"/>
-            <a:ext cx="1691640" cy="118186"/>
+            <a:off x="5806440" y="3494036"/>
+            <a:ext cx="1691640" cy="103098"/>
           </a:xfrm>
           <a:prstGeom prst="roundRect">
             <a:avLst>
@@ -11465,8 +11464,8 @@
         </p:nvSpPr>
         <p:spPr>
           <a:xfrm>
-            <a:off x="7543800" y="3788244"/>
-            <a:ext cx="457200" cy="182194"/>
+            <a:off x="7543800" y="3462032"/>
+            <a:ext cx="457200" cy="167106"/>
           </a:xfrm>
           <a:prstGeom prst="rect">
             <a:avLst/>
@@ -11500,8 +11499,8 @@
         </p:nvSpPr>
         <p:spPr>
           <a:xfrm>
-            <a:off x="5806440" y="4035132"/>
-            <a:ext cx="1691640" cy="118186"/>
+            <a:off x="5806440" y="3681488"/>
+            <a:ext cx="1691640" cy="103098"/>
           </a:xfrm>
           <a:prstGeom prst="roundRect">
             <a:avLst>
@@ -11551,8 +11550,8 @@
         </p:nvSpPr>
         <p:spPr>
           <a:xfrm>
-            <a:off x="5806440" y="4035132"/>
-            <a:ext cx="372160" cy="118186"/>
+            <a:off x="5806440" y="3681488"/>
+            <a:ext cx="372160" cy="103098"/>
           </a:xfrm>
           <a:prstGeom prst="roundRect">
             <a:avLst>
@@ -11603,8 +11602,8 @@
         </p:nvSpPr>
         <p:spPr>
           <a:xfrm>
-            <a:off x="7543800" y="4003128"/>
-            <a:ext cx="457200" cy="182194"/>
+            <a:off x="7543800" y="3649484"/>
+            <a:ext cx="457200" cy="167106"/>
           </a:xfrm>
           <a:prstGeom prst="rect">
             <a:avLst/>
@@ -11638,8 +11637,8 @@
         </p:nvSpPr>
         <p:spPr>
           <a:xfrm>
-            <a:off x="5806440" y="4250016"/>
-            <a:ext cx="1691640" cy="118186"/>
+            <a:off x="5806440" y="3868940"/>
+            <a:ext cx="1691640" cy="103098"/>
           </a:xfrm>
           <a:prstGeom prst="roundRect">
             <a:avLst>
@@ -11689,8 +11688,8 @@
         </p:nvSpPr>
         <p:spPr>
           <a:xfrm>
-            <a:off x="5806440" y="4250016"/>
-            <a:ext cx="1353312" cy="118186"/>
+            <a:off x="5806440" y="3868940"/>
+            <a:ext cx="1353312" cy="103098"/>
           </a:xfrm>
           <a:prstGeom prst="roundRect">
             <a:avLst>
@@ -11741,8 +11740,8 @@
         </p:nvSpPr>
         <p:spPr>
           <a:xfrm>
-            <a:off x="7543800" y="4218012"/>
-            <a:ext cx="457200" cy="182194"/>
+            <a:off x="7543800" y="3836936"/>
+            <a:ext cx="457200" cy="167106"/>
           </a:xfrm>
           <a:prstGeom prst="rect">
             <a:avLst/>
@@ -11776,8 +11775,8 @@
         </p:nvSpPr>
         <p:spPr>
           <a:xfrm>
-            <a:off x="5806440" y="4464900"/>
-            <a:ext cx="1691640" cy="118186"/>
+            <a:off x="5806440" y="4056392"/>
+            <a:ext cx="1691640" cy="103098"/>
           </a:xfrm>
           <a:prstGeom prst="roundRect">
             <a:avLst>
@@ -11827,8 +11826,8 @@
         </p:nvSpPr>
         <p:spPr>
           <a:xfrm>
-            <a:off x="5806440" y="4464900"/>
-            <a:ext cx="1674723" cy="118186"/>
+            <a:off x="5806440" y="4056392"/>
+            <a:ext cx="1674723" cy="103098"/>
           </a:xfrm>
           <a:prstGeom prst="roundRect">
             <a:avLst>
@@ -11879,8 +11878,8 @@
         </p:nvSpPr>
         <p:spPr>
           <a:xfrm>
-            <a:off x="7543800" y="4432896"/>
-            <a:ext cx="457200" cy="182194"/>
+            <a:off x="7543800" y="4024388"/>
+            <a:ext cx="457200" cy="167106"/>
           </a:xfrm>
           <a:prstGeom prst="rect">
             <a:avLst/>
@@ -11914,8 +11913,8 @@
         </p:nvSpPr>
         <p:spPr>
           <a:xfrm>
-            <a:off x="5806440" y="4679784"/>
-            <a:ext cx="1691640" cy="118186"/>
+            <a:off x="5806440" y="4243844"/>
+            <a:ext cx="1691640" cy="103098"/>
           </a:xfrm>
           <a:prstGeom prst="roundRect">
             <a:avLst>
@@ -11965,8 +11964,8 @@
         </p:nvSpPr>
         <p:spPr>
           <a:xfrm>
-            <a:off x="5806440" y="4679784"/>
-            <a:ext cx="524408" cy="118186"/>
+            <a:off x="5806440" y="4243844"/>
+            <a:ext cx="524408" cy="103098"/>
           </a:xfrm>
           <a:prstGeom prst="roundRect">
             <a:avLst>
@@ -12017,8 +12016,8 @@
         </p:nvSpPr>
         <p:spPr>
           <a:xfrm>
-            <a:off x="7543800" y="4647780"/>
-            <a:ext cx="457200" cy="182194"/>
+            <a:off x="7543800" y="4211840"/>
+            <a:ext cx="457200" cy="167106"/>
           </a:xfrm>
           <a:prstGeom prst="rect">
             <a:avLst/>
@@ -12052,8 +12051,8 @@
         </p:nvSpPr>
         <p:spPr>
           <a:xfrm>
-            <a:off x="5806440" y="4894668"/>
-            <a:ext cx="1691640" cy="118186"/>
+            <a:off x="5806440" y="4431296"/>
+            <a:ext cx="1691640" cy="103098"/>
           </a:xfrm>
           <a:prstGeom prst="roundRect">
             <a:avLst>
@@ -12103,8 +12102,8 @@
         </p:nvSpPr>
         <p:spPr>
           <a:xfrm>
-            <a:off x="5806440" y="4894668"/>
-            <a:ext cx="1251813" cy="118186"/>
+            <a:off x="5806440" y="4431296"/>
+            <a:ext cx="1251813" cy="103098"/>
           </a:xfrm>
           <a:prstGeom prst="roundRect">
             <a:avLst>
@@ -12155,8 +12154,8 @@
         </p:nvSpPr>
         <p:spPr>
           <a:xfrm>
-            <a:off x="7543800" y="4862664"/>
-            <a:ext cx="457200" cy="182194"/>
+            <a:off x="7543800" y="4399292"/>
+            <a:ext cx="457200" cy="167106"/>
           </a:xfrm>
           <a:prstGeom prst="rect">
             <a:avLst/>
@@ -12190,8 +12189,8 @@
         </p:nvSpPr>
         <p:spPr>
           <a:xfrm>
-            <a:off x="5806440" y="5109552"/>
-            <a:ext cx="1691640" cy="118186"/>
+            <a:off x="5806440" y="4618748"/>
+            <a:ext cx="1691640" cy="103098"/>
           </a:xfrm>
           <a:prstGeom prst="roundRect">
             <a:avLst>
@@ -12241,8 +12240,8 @@
         </p:nvSpPr>
         <p:spPr>
           <a:xfrm>
-            <a:off x="5806440" y="5109552"/>
-            <a:ext cx="118186" cy="118186"/>
+            <a:off x="5806440" y="4618748"/>
+            <a:ext cx="103098" cy="103098"/>
           </a:xfrm>
           <a:prstGeom prst="roundRect">
             <a:avLst>
@@ -12293,8 +12292,8 @@
         </p:nvSpPr>
         <p:spPr>
           <a:xfrm>
-            <a:off x="7543800" y="5077548"/>
-            <a:ext cx="457200" cy="182194"/>
+            <a:off x="7543800" y="4586744"/>
+            <a:ext cx="457200" cy="167106"/>
           </a:xfrm>
           <a:prstGeom prst="rect">
             <a:avLst/>

--- a/cierre_base.pptx
+++ b/cierre_base.pptx
@@ -6269,3575 +6269,622 @@
           </a:p>
         </p:txBody>
       </p:sp>
-      <p:graphicFrame>
-        <p:nvGraphicFramePr>
-          <p:cNvPr id="26" name="Table 25"/>
-          <p:cNvGraphicFramePr>
-            <a:graphicFrameLocks noGrp="1"/>
-          </p:cNvGraphicFramePr>
-          <p:nvPr/>
-        </p:nvGraphicFramePr>
-        <p:xfrm>
-          <a:off x="73152" y="1188720"/>
-          <a:ext cx="8741664" cy="3575304"/>
-        </p:xfrm>
-        <a:graphic>
-          <a:graphicData uri="http://schemas.openxmlformats.org/drawingml/2006/table">
-            <a:tbl>
-              <a:tblPr firstRow="1" bandRow="1">
-                <a:tableStyleId>{5C22544A-7EE6-4342-B048-85BDC9FD1C3A}</a:tableStyleId>
-              </a:tblPr>
-              <a:tblGrid>
-                <a:gridCol w="758952"/>
-                <a:gridCol w="2468880"/>
-                <a:gridCol w="667512"/>
-                <a:gridCol w="667512"/>
-                <a:gridCol w="530352"/>
-                <a:gridCol w="594360"/>
-                <a:gridCol w="2212848"/>
-                <a:gridCol w="841248"/>
-              </a:tblGrid>
-              <a:tr h="201168">
-                <a:tc>
-                  <a:txBody>
-                    <a:bodyPr wrap="none"/>
-                    <a:lstStyle/>
-                    <a:p>
-                      <a:pPr algn="ctr"/>
-                      <a:r>
-                        <a:rPr sz="700" b="1">
-                          <a:solidFill>
-                            <a:srgbClr val="1A2340"/>
-                          </a:solidFill>
-                          <a:latin typeface="Calibri"/>
-                        </a:rPr>
-                        <a:t>TIPO</a:t>
-                      </a:r>
-                    </a:p>
-                  </a:txBody>
-                  <a:tcPr marT="0" marB="0" marL="38100" marR="38100" anchor="ctr">
-                    <a:solidFill>
-                      <a:srgbClr val="C9A84C"/>
-                    </a:solidFill>
-                  </a:tcPr>
-                </a:tc>
-                <a:tc>
-                  <a:txBody>
-                    <a:bodyPr wrap="none"/>
-                    <a:lstStyle/>
-                    <a:p>
-                      <a:pPr algn="ctr"/>
-                      <a:r>
-                        <a:rPr sz="700" b="1">
-                          <a:solidFill>
-                            <a:srgbClr val="1A2340"/>
-                          </a:solidFill>
-                          <a:latin typeface="Calibri"/>
-                        </a:rPr>
-                        <a:t>PROYECTO</a:t>
-                      </a:r>
-                    </a:p>
-                  </a:txBody>
-                  <a:tcPr marT="0" marB="0" marL="38100" marR="38100" anchor="ctr">
-                    <a:solidFill>
-                      <a:srgbClr val="C9A84C"/>
-                    </a:solidFill>
-                  </a:tcPr>
-                </a:tc>
-                <a:tc>
-                  <a:txBody>
-                    <a:bodyPr wrap="none"/>
-                    <a:lstStyle/>
-                    <a:p>
-                      <a:pPr algn="ctr"/>
-                      <a:r>
-                        <a:rPr sz="700" b="1">
-                          <a:solidFill>
-                            <a:srgbClr val="1A2340"/>
-                          </a:solidFill>
-                          <a:latin typeface="Calibri"/>
-                        </a:rPr>
-                        <a:t>INICIO</a:t>
-                      </a:r>
-                    </a:p>
-                  </a:txBody>
-                  <a:tcPr marT="0" marB="0" marL="38100" marR="38100" anchor="ctr">
-                    <a:solidFill>
-                      <a:srgbClr val="C9A84C"/>
-                    </a:solidFill>
-                  </a:tcPr>
-                </a:tc>
-                <a:tc>
-                  <a:txBody>
-                    <a:bodyPr wrap="none"/>
-                    <a:lstStyle/>
-                    <a:p>
-                      <a:pPr algn="ctr"/>
-                      <a:r>
-                        <a:rPr sz="700" b="1">
-                          <a:solidFill>
-                            <a:srgbClr val="1A2340"/>
-                          </a:solidFill>
-                          <a:latin typeface="Calibri"/>
-                        </a:rPr>
-                        <a:t>FIN</a:t>
-                      </a:r>
-                    </a:p>
-                  </a:txBody>
-                  <a:tcPr marT="0" marB="0" marL="38100" marR="38100" anchor="ctr">
-                    <a:solidFill>
-                      <a:srgbClr val="C9A84C"/>
-                    </a:solidFill>
-                  </a:tcPr>
-                </a:tc>
-                <a:tc>
-                  <a:txBody>
-                    <a:bodyPr wrap="none"/>
-                    <a:lstStyle/>
-                    <a:p>
-                      <a:pPr algn="ctr"/>
-                      <a:r>
-                        <a:rPr sz="700" b="1">
-                          <a:solidFill>
-                            <a:srgbClr val="1A2340"/>
-                          </a:solidFill>
-                          <a:latin typeface="Calibri"/>
-                        </a:rPr>
-                        <a:t>% REAL</a:t>
-                      </a:r>
-                    </a:p>
-                  </a:txBody>
-                  <a:tcPr marT="0" marB="0" marL="38100" marR="38100" anchor="ctr">
-                    <a:solidFill>
-                      <a:srgbClr val="C9A84C"/>
-                    </a:solidFill>
-                  </a:tcPr>
-                </a:tc>
-                <a:tc>
-                  <a:txBody>
-                    <a:bodyPr wrap="none"/>
-                    <a:lstStyle/>
-                    <a:p>
-                      <a:pPr algn="ctr"/>
-                      <a:r>
-                        <a:rPr sz="700" b="1">
-                          <a:solidFill>
-                            <a:srgbClr val="1A2340"/>
-                          </a:solidFill>
-                          <a:latin typeface="Calibri"/>
-                        </a:rPr>
-                        <a:t>% ESPERADO</a:t>
-                      </a:r>
-                    </a:p>
-                  </a:txBody>
-                  <a:tcPr marT="0" marB="0" marL="38100" marR="38100" anchor="ctr">
-                    <a:solidFill>
-                      <a:srgbClr val="C9A84C"/>
-                    </a:solidFill>
-                  </a:tcPr>
-                </a:tc>
-                <a:tc>
-                  <a:txBody>
-                    <a:bodyPr wrap="none"/>
-                    <a:lstStyle/>
-                    <a:p>
-                      <a:pPr algn="ctr"/>
-                      <a:r>
-                        <a:rPr sz="700" b="1">
-                          <a:solidFill>
-                            <a:srgbClr val="1A2340"/>
-                          </a:solidFill>
-                          <a:latin typeface="Calibri"/>
-                        </a:rPr>
-                        <a:t>BARRA DE AVANCE</a:t>
-                      </a:r>
-                    </a:p>
-                  </a:txBody>
-                  <a:tcPr marT="0" marB="0" marL="38100" marR="38100" anchor="ctr">
-                    <a:solidFill>
-                      <a:srgbClr val="C9A84C"/>
-                    </a:solidFill>
-                  </a:tcPr>
-                </a:tc>
-                <a:tc>
-                  <a:txBody>
-                    <a:bodyPr wrap="none"/>
-                    <a:lstStyle/>
-                    <a:p>
-                      <a:pPr algn="ctr"/>
-                      <a:r>
-                        <a:rPr sz="700" b="1">
-                          <a:solidFill>
-                            <a:srgbClr val="1A2340"/>
-                          </a:solidFill>
-                          <a:latin typeface="Calibri"/>
-                        </a:rPr>
-                        <a:t>SEMÁFORO</a:t>
-                      </a:r>
-                    </a:p>
-                  </a:txBody>
-                  <a:tcPr marT="0" marB="0" marL="38100" marR="38100" anchor="ctr">
-                    <a:solidFill>
-                      <a:srgbClr val="C9A84C"/>
-                    </a:solidFill>
-                  </a:tcPr>
-                </a:tc>
-              </a:tr>
-              <a:tr h="187452">
-                <a:tc>
-                  <a:txBody>
-                    <a:bodyPr wrap="none"/>
-                    <a:lstStyle/>
-                    <a:p>
-                      <a:pPr algn="ctr"/>
-                      <a:r>
-                        <a:rPr sz="700" b="1">
-                          <a:solidFill>
-                            <a:srgbClr val="1A2340"/>
-                          </a:solidFill>
-                          <a:latin typeface="Calibri"/>
-                        </a:rPr>
-                        <a:t>Proyecto</a:t>
-                      </a:r>
-                    </a:p>
-                  </a:txBody>
-                  <a:tcPr marT="0" marB="0" marL="38100" marR="38100" anchor="ctr">
-                    <a:solidFill>
-                      <a:srgbClr val="F5F7FA"/>
-                    </a:solidFill>
-                  </a:tcPr>
-                </a:tc>
-                <a:tc>
-                  <a:txBody>
-                    <a:bodyPr wrap="none"/>
-                    <a:lstStyle/>
-                    <a:p>
-                      <a:pPr algn="l"/>
-                      <a:r>
-                        <a:rPr sz="700" b="0">
-                          <a:solidFill>
-                            <a:srgbClr val="1A2340"/>
-                          </a:solidFill>
-                          <a:latin typeface="Calibri"/>
-                        </a:rPr>
-                        <a:t>Talleres || Mecánica Mx (Mejoras)</a:t>
-                      </a:r>
-                    </a:p>
-                  </a:txBody>
-                  <a:tcPr marT="0" marB="0" marL="38100" marR="38100" anchor="ctr">
-                    <a:solidFill>
-                      <a:srgbClr val="F5F7FA"/>
-                    </a:solidFill>
-                  </a:tcPr>
-                </a:tc>
-                <a:tc>
-                  <a:txBody>
-                    <a:bodyPr wrap="none"/>
-                    <a:lstStyle/>
-                    <a:p>
-                      <a:pPr algn="ctr"/>
-                      <a:r>
-                        <a:rPr sz="700" b="0">
-                          <a:solidFill>
-                            <a:srgbClr val="555555"/>
-                          </a:solidFill>
-                          <a:latin typeface="Calibri"/>
-                        </a:rPr>
-                        <a:t>07/04/2026</a:t>
-                      </a:r>
-                    </a:p>
-                  </a:txBody>
-                  <a:tcPr marT="0" marB="0" marL="38100" marR="38100" anchor="ctr">
-                    <a:solidFill>
-                      <a:srgbClr val="F5F7FA"/>
-                    </a:solidFill>
-                  </a:tcPr>
-                </a:tc>
-                <a:tc>
-                  <a:txBody>
-                    <a:bodyPr wrap="none"/>
-                    <a:lstStyle/>
-                    <a:p>
-                      <a:pPr algn="ctr"/>
-                      <a:r>
-                        <a:rPr sz="700" b="0">
-                          <a:solidFill>
-                            <a:srgbClr val="555555"/>
-                          </a:solidFill>
-                          <a:latin typeface="Calibri"/>
-                        </a:rPr>
-                        <a:t>01/07/2026</a:t>
-                      </a:r>
-                    </a:p>
-                  </a:txBody>
-                  <a:tcPr marT="0" marB="0" marL="38100" marR="38100" anchor="ctr">
-                    <a:solidFill>
-                      <a:srgbClr val="F5F7FA"/>
-                    </a:solidFill>
-                  </a:tcPr>
-                </a:tc>
-                <a:tc>
-                  <a:txBody>
-                    <a:bodyPr wrap="none"/>
-                    <a:lstStyle/>
-                    <a:p>
-                      <a:pPr algn="ctr"/>
-                      <a:r>
-                        <a:rPr sz="700" b="1">
-                          <a:solidFill>
-                            <a:srgbClr val="1A2340"/>
-                          </a:solidFill>
-                          <a:latin typeface="Calibri"/>
-                        </a:rPr>
-                        <a:t>82%</a:t>
-                      </a:r>
-                    </a:p>
-                  </a:txBody>
-                  <a:tcPr marT="0" marB="0" marL="38100" marR="38100" anchor="ctr">
-                    <a:solidFill>
-                      <a:srgbClr val="F5F7FA"/>
-                    </a:solidFill>
-                  </a:tcPr>
-                </a:tc>
-                <a:tc>
-                  <a:txBody>
-                    <a:bodyPr wrap="none"/>
-                    <a:lstStyle/>
-                    <a:p>
-                      <a:pPr algn="ctr"/>
-                      <a:r>
-                        <a:rPr sz="700" b="0">
-                          <a:solidFill>
-                            <a:srgbClr val="555555"/>
-                          </a:solidFill>
-                          <a:latin typeface="Calibri"/>
-                        </a:rPr>
-                        <a:t>100%</a:t>
-                      </a:r>
-                    </a:p>
-                  </a:txBody>
-                  <a:tcPr marT="0" marB="0" marL="38100" marR="38100" anchor="ctr">
-                    <a:solidFill>
-                      <a:srgbClr val="F5F7FA"/>
-                    </a:solidFill>
-                  </a:tcPr>
-                </a:tc>
-                <a:tc>
-                  <a:txBody>
-                    <a:bodyPr wrap="none"/>
-                    <a:lstStyle/>
-                    <a:p>
-                      <a:pPr algn="r"/>
-                      <a:r>
-                        <a:rPr sz="700" b="1">
-                          <a:solidFill>
-                            <a:srgbClr val="EF4444"/>
-                          </a:solidFill>
-                          <a:latin typeface="Calibri"/>
-                        </a:rPr>
-                        <a:t/>
-                      </a:r>
-                    </a:p>
-                  </a:txBody>
-                  <a:tcPr marT="0" marB="0" marL="38100" marR="38100" anchor="ctr">
-                    <a:solidFill>
-                      <a:srgbClr val="F5F7FA"/>
-                    </a:solidFill>
-                  </a:tcPr>
-                </a:tc>
-                <a:tc>
-                  <a:txBody>
-                    <a:bodyPr wrap="none"/>
-                    <a:lstStyle/>
-                    <a:p>
-                      <a:pPr algn="ctr"/>
-                      <a:r>
-                        <a:rPr sz="700" b="1">
-                          <a:solidFill>
-                            <a:srgbClr val="EF4444"/>
-                          </a:solidFill>
-                          <a:latin typeface="Calibri"/>
-                        </a:rPr>
-                        <a:t>Atrasado</a:t>
-                      </a:r>
-                    </a:p>
-                  </a:txBody>
-                  <a:tcPr marT="0" marB="0" marL="38100" marR="38100" anchor="ctr">
-                    <a:solidFill>
-                      <a:srgbClr val="F5F7FA"/>
-                    </a:solidFill>
-                  </a:tcPr>
-                </a:tc>
-              </a:tr>
-              <a:tr h="187452">
-                <a:tc>
-                  <a:txBody>
-                    <a:bodyPr wrap="none"/>
-                    <a:lstStyle/>
-                    <a:p>
-                      <a:pPr algn="ctr"/>
-                      <a:r>
-                        <a:rPr sz="700" b="1">
-                          <a:solidFill>
-                            <a:srgbClr val="1A2340"/>
-                          </a:solidFill>
-                          <a:latin typeface="Calibri"/>
-                        </a:rPr>
-                        <a:t>Proyecto</a:t>
-                      </a:r>
-                    </a:p>
-                  </a:txBody>
-                  <a:tcPr marT="0" marB="0" marL="38100" marR="38100" anchor="ctr">
-                    <a:solidFill>
-                      <a:srgbClr val="FFFFFF"/>
-                    </a:solidFill>
-                  </a:tcPr>
-                </a:tc>
-                <a:tc>
-                  <a:txBody>
-                    <a:bodyPr wrap="none"/>
-                    <a:lstStyle/>
-                    <a:p>
-                      <a:pPr algn="l"/>
-                      <a:r>
-                        <a:rPr sz="700" b="0">
-                          <a:solidFill>
-                            <a:srgbClr val="1A2340"/>
-                          </a:solidFill>
-                          <a:latin typeface="Calibri"/>
-                        </a:rPr>
-                        <a:t>Administración || AdContent - Catálogos</a:t>
-                      </a:r>
-                    </a:p>
-                  </a:txBody>
-                  <a:tcPr marT="0" marB="0" marL="38100" marR="38100" anchor="ctr">
-                    <a:solidFill>
-                      <a:srgbClr val="FFFFFF"/>
-                    </a:solidFill>
-                  </a:tcPr>
-                </a:tc>
-                <a:tc>
-                  <a:txBody>
-                    <a:bodyPr wrap="none"/>
-                    <a:lstStyle/>
-                    <a:p>
-                      <a:pPr algn="ctr"/>
-                      <a:r>
-                        <a:rPr sz="700" b="0">
-                          <a:solidFill>
-                            <a:srgbClr val="555555"/>
-                          </a:solidFill>
-                          <a:latin typeface="Calibri"/>
-                        </a:rPr>
-                        <a:t>01/04/2026</a:t>
-                      </a:r>
-                    </a:p>
-                  </a:txBody>
-                  <a:tcPr marT="0" marB="0" marL="38100" marR="38100" anchor="ctr">
-                    <a:solidFill>
-                      <a:srgbClr val="FFFFFF"/>
-                    </a:solidFill>
-                  </a:tcPr>
-                </a:tc>
-                <a:tc>
-                  <a:txBody>
-                    <a:bodyPr wrap="none"/>
-                    <a:lstStyle/>
-                    <a:p>
-                      <a:pPr algn="ctr"/>
-                      <a:r>
-                        <a:rPr sz="700" b="0">
-                          <a:solidFill>
-                            <a:srgbClr val="555555"/>
-                          </a:solidFill>
-                          <a:latin typeface="Calibri"/>
-                        </a:rPr>
-                        <a:t>02/06/2026</a:t>
-                      </a:r>
-                    </a:p>
-                  </a:txBody>
-                  <a:tcPr marT="0" marB="0" marL="38100" marR="38100" anchor="ctr">
-                    <a:solidFill>
-                      <a:srgbClr val="FFFFFF"/>
-                    </a:solidFill>
-                  </a:tcPr>
-                </a:tc>
-                <a:tc>
-                  <a:txBody>
-                    <a:bodyPr wrap="none"/>
-                    <a:lstStyle/>
-                    <a:p>
-                      <a:pPr algn="ctr"/>
-                      <a:r>
-                        <a:rPr sz="700" b="1">
-                          <a:solidFill>
-                            <a:srgbClr val="1A2340"/>
-                          </a:solidFill>
-                          <a:latin typeface="Calibri"/>
-                        </a:rPr>
-                        <a:t>100%</a:t>
-                      </a:r>
-                    </a:p>
-                  </a:txBody>
-                  <a:tcPr marT="0" marB="0" marL="38100" marR="38100" anchor="ctr">
-                    <a:solidFill>
-                      <a:srgbClr val="FFFFFF"/>
-                    </a:solidFill>
-                  </a:tcPr>
-                </a:tc>
-                <a:tc>
-                  <a:txBody>
-                    <a:bodyPr wrap="none"/>
-                    <a:lstStyle/>
-                    <a:p>
-                      <a:pPr algn="ctr"/>
-                      <a:r>
-                        <a:rPr sz="700" b="0">
-                          <a:solidFill>
-                            <a:srgbClr val="555555"/>
-                          </a:solidFill>
-                          <a:latin typeface="Calibri"/>
-                        </a:rPr>
-                        <a:t>100%</a:t>
-                      </a:r>
-                    </a:p>
-                  </a:txBody>
-                  <a:tcPr marT="0" marB="0" marL="38100" marR="38100" anchor="ctr">
-                    <a:solidFill>
-                      <a:srgbClr val="FFFFFF"/>
-                    </a:solidFill>
-                  </a:tcPr>
-                </a:tc>
-                <a:tc>
-                  <a:txBody>
-                    <a:bodyPr wrap="none"/>
-                    <a:lstStyle/>
-                    <a:p>
-                      <a:pPr algn="r"/>
-                      <a:r>
-                        <a:rPr sz="700" b="1">
-                          <a:solidFill>
-                            <a:srgbClr val="22C55E"/>
-                          </a:solidFill>
-                          <a:latin typeface="Calibri"/>
-                        </a:rPr>
-                        <a:t/>
-                      </a:r>
-                    </a:p>
-                  </a:txBody>
-                  <a:tcPr marT="0" marB="0" marL="38100" marR="38100" anchor="ctr">
-                    <a:solidFill>
-                      <a:srgbClr val="FFFFFF"/>
-                    </a:solidFill>
-                  </a:tcPr>
-                </a:tc>
-                <a:tc>
-                  <a:txBody>
-                    <a:bodyPr wrap="none"/>
-                    <a:lstStyle/>
-                    <a:p>
-                      <a:pPr algn="ctr"/>
-                      <a:r>
-                        <a:rPr sz="700" b="1">
-                          <a:solidFill>
-                            <a:srgbClr val="22C55E"/>
-                          </a:solidFill>
-                          <a:latin typeface="Calibri"/>
-                        </a:rPr>
-                        <a:t>Terminado</a:t>
-                      </a:r>
-                    </a:p>
-                  </a:txBody>
-                  <a:tcPr marT="0" marB="0" marL="38100" marR="38100" anchor="ctr">
-                    <a:solidFill>
-                      <a:srgbClr val="FFFFFF"/>
-                    </a:solidFill>
-                  </a:tcPr>
-                </a:tc>
-              </a:tr>
-              <a:tr h="187452">
-                <a:tc>
-                  <a:txBody>
-                    <a:bodyPr wrap="none"/>
-                    <a:lstStyle/>
-                    <a:p>
-                      <a:pPr algn="ctr"/>
-                      <a:r>
-                        <a:rPr sz="700" b="1">
-                          <a:solidFill>
-                            <a:srgbClr val="1A2340"/>
-                          </a:solidFill>
-                          <a:latin typeface="Calibri"/>
-                        </a:rPr>
-                        <a:t>Proyecto</a:t>
-                      </a:r>
-                    </a:p>
-                  </a:txBody>
-                  <a:tcPr marT="0" marB="0" marL="38100" marR="38100" anchor="ctr">
-                    <a:solidFill>
-                      <a:srgbClr val="F5F7FA"/>
-                    </a:solidFill>
-                  </a:tcPr>
-                </a:tc>
-                <a:tc>
-                  <a:txBody>
-                    <a:bodyPr wrap="none"/>
-                    <a:lstStyle/>
-                    <a:p>
-                      <a:pPr algn="l"/>
-                      <a:r>
-                        <a:rPr sz="700" b="0">
-                          <a:solidFill>
-                            <a:srgbClr val="1A2340"/>
-                          </a:solidFill>
-                          <a:latin typeface="Calibri"/>
-                        </a:rPr>
-                        <a:t>Capital Humano || BUK Soporte – Incidencia</a:t>
-                      </a:r>
-                    </a:p>
-                  </a:txBody>
-                  <a:tcPr marT="0" marB="0" marL="38100" marR="38100" anchor="ctr">
-                    <a:solidFill>
-                      <a:srgbClr val="F5F7FA"/>
-                    </a:solidFill>
-                  </a:tcPr>
-                </a:tc>
-                <a:tc>
-                  <a:txBody>
-                    <a:bodyPr wrap="none"/>
-                    <a:lstStyle/>
-                    <a:p>
-                      <a:pPr algn="ctr"/>
-                      <a:r>
-                        <a:rPr sz="700" b="0">
-                          <a:solidFill>
-                            <a:srgbClr val="555555"/>
-                          </a:solidFill>
-                          <a:latin typeface="Calibri"/>
-                        </a:rPr>
-                        <a:t>02/03/2026</a:t>
-                      </a:r>
-                    </a:p>
-                  </a:txBody>
-                  <a:tcPr marT="0" marB="0" marL="38100" marR="38100" anchor="ctr">
-                    <a:solidFill>
-                      <a:srgbClr val="F5F7FA"/>
-                    </a:solidFill>
-                  </a:tcPr>
-                </a:tc>
-                <a:tc>
-                  <a:txBody>
-                    <a:bodyPr wrap="none"/>
-                    <a:lstStyle/>
-                    <a:p>
-                      <a:pPr algn="ctr"/>
-                      <a:r>
-                        <a:rPr sz="700" b="0">
-                          <a:solidFill>
-                            <a:srgbClr val="555555"/>
-                          </a:solidFill>
-                          <a:latin typeface="Calibri"/>
-                        </a:rPr>
-                        <a:t>29/05/2026</a:t>
-                      </a:r>
-                    </a:p>
-                  </a:txBody>
-                  <a:tcPr marT="0" marB="0" marL="38100" marR="38100" anchor="ctr">
-                    <a:solidFill>
-                      <a:srgbClr val="F5F7FA"/>
-                    </a:solidFill>
-                  </a:tcPr>
-                </a:tc>
-                <a:tc>
-                  <a:txBody>
-                    <a:bodyPr wrap="none"/>
-                    <a:lstStyle/>
-                    <a:p>
-                      <a:pPr algn="ctr"/>
-                      <a:r>
-                        <a:rPr sz="700" b="1">
-                          <a:solidFill>
-                            <a:srgbClr val="1A2340"/>
-                          </a:solidFill>
-                          <a:latin typeface="Calibri"/>
-                        </a:rPr>
-                        <a:t>100%</a:t>
-                      </a:r>
-                    </a:p>
-                  </a:txBody>
-                  <a:tcPr marT="0" marB="0" marL="38100" marR="38100" anchor="ctr">
-                    <a:solidFill>
-                      <a:srgbClr val="F5F7FA"/>
-                    </a:solidFill>
-                  </a:tcPr>
-                </a:tc>
-                <a:tc>
-                  <a:txBody>
-                    <a:bodyPr wrap="none"/>
-                    <a:lstStyle/>
-                    <a:p>
-                      <a:pPr algn="ctr"/>
-                      <a:r>
-                        <a:rPr sz="700" b="0">
-                          <a:solidFill>
-                            <a:srgbClr val="555555"/>
-                          </a:solidFill>
-                          <a:latin typeface="Calibri"/>
-                        </a:rPr>
-                        <a:t>100%</a:t>
-                      </a:r>
-                    </a:p>
-                  </a:txBody>
-                  <a:tcPr marT="0" marB="0" marL="38100" marR="38100" anchor="ctr">
-                    <a:solidFill>
-                      <a:srgbClr val="F5F7FA"/>
-                    </a:solidFill>
-                  </a:tcPr>
-                </a:tc>
-                <a:tc>
-                  <a:txBody>
-                    <a:bodyPr wrap="none"/>
-                    <a:lstStyle/>
-                    <a:p>
-                      <a:pPr algn="r"/>
-                      <a:r>
-                        <a:rPr sz="700" b="1">
-                          <a:solidFill>
-                            <a:srgbClr val="22C55E"/>
-                          </a:solidFill>
-                          <a:latin typeface="Calibri"/>
-                        </a:rPr>
-                        <a:t/>
-                      </a:r>
-                    </a:p>
-                  </a:txBody>
-                  <a:tcPr marT="0" marB="0" marL="38100" marR="38100" anchor="ctr">
-                    <a:solidFill>
-                      <a:srgbClr val="F5F7FA"/>
-                    </a:solidFill>
-                  </a:tcPr>
-                </a:tc>
-                <a:tc>
-                  <a:txBody>
-                    <a:bodyPr wrap="none"/>
-                    <a:lstStyle/>
-                    <a:p>
-                      <a:pPr algn="ctr"/>
-                      <a:r>
-                        <a:rPr sz="700" b="1">
-                          <a:solidFill>
-                            <a:srgbClr val="22C55E"/>
-                          </a:solidFill>
-                          <a:latin typeface="Calibri"/>
-                        </a:rPr>
-                        <a:t>Terminado</a:t>
-                      </a:r>
-                    </a:p>
-                  </a:txBody>
-                  <a:tcPr marT="0" marB="0" marL="38100" marR="38100" anchor="ctr">
-                    <a:solidFill>
-                      <a:srgbClr val="F5F7FA"/>
-                    </a:solidFill>
-                  </a:tcPr>
-                </a:tc>
-              </a:tr>
-              <a:tr h="187452">
-                <a:tc>
-                  <a:txBody>
-                    <a:bodyPr wrap="none"/>
-                    <a:lstStyle/>
-                    <a:p>
-                      <a:pPr algn="ctr"/>
-                      <a:r>
-                        <a:rPr sz="700" b="1">
-                          <a:solidFill>
-                            <a:srgbClr val="1A2340"/>
-                          </a:solidFill>
-                          <a:latin typeface="Calibri"/>
-                        </a:rPr>
-                        <a:t>Proyecto</a:t>
-                      </a:r>
-                    </a:p>
-                  </a:txBody>
-                  <a:tcPr marT="0" marB="0" marL="38100" marR="38100" anchor="ctr">
-                    <a:solidFill>
-                      <a:srgbClr val="FFFFFF"/>
-                    </a:solidFill>
-                  </a:tcPr>
-                </a:tc>
-                <a:tc>
-                  <a:txBody>
-                    <a:bodyPr wrap="none"/>
-                    <a:lstStyle/>
-                    <a:p>
-                      <a:pPr algn="l"/>
-                      <a:r>
-                        <a:rPr sz="700" b="0">
-                          <a:solidFill>
-                            <a:srgbClr val="1A2340"/>
-                          </a:solidFill>
-                          <a:latin typeface="Calibri"/>
-                        </a:rPr>
-                        <a:t>Capital Humano || BUK Campos Personalizados</a:t>
-                      </a:r>
-                    </a:p>
-                  </a:txBody>
-                  <a:tcPr marT="0" marB="0" marL="38100" marR="38100" anchor="ctr">
-                    <a:solidFill>
-                      <a:srgbClr val="FFFFFF"/>
-                    </a:solidFill>
-                  </a:tcPr>
-                </a:tc>
-                <a:tc>
-                  <a:txBody>
-                    <a:bodyPr wrap="none"/>
-                    <a:lstStyle/>
-                    <a:p>
-                      <a:pPr algn="ctr"/>
-                      <a:r>
-                        <a:rPr sz="700" b="0">
-                          <a:solidFill>
-                            <a:srgbClr val="555555"/>
-                          </a:solidFill>
-                          <a:latin typeface="Calibri"/>
-                        </a:rPr>
-                        <a:t>26/02/2026</a:t>
-                      </a:r>
-                    </a:p>
-                  </a:txBody>
-                  <a:tcPr marT="0" marB="0" marL="38100" marR="38100" anchor="ctr">
-                    <a:solidFill>
-                      <a:srgbClr val="FFFFFF"/>
-                    </a:solidFill>
-                  </a:tcPr>
-                </a:tc>
-                <a:tc>
-                  <a:txBody>
-                    <a:bodyPr wrap="none"/>
-                    <a:lstStyle/>
-                    <a:p>
-                      <a:pPr algn="ctr"/>
-                      <a:r>
-                        <a:rPr sz="700" b="0">
-                          <a:solidFill>
-                            <a:srgbClr val="555555"/>
-                          </a:solidFill>
-                          <a:latin typeface="Calibri"/>
-                        </a:rPr>
-                        <a:t>25/05/2026</a:t>
-                      </a:r>
-                    </a:p>
-                  </a:txBody>
-                  <a:tcPr marT="0" marB="0" marL="38100" marR="38100" anchor="ctr">
-                    <a:solidFill>
-                      <a:srgbClr val="FFFFFF"/>
-                    </a:solidFill>
-                  </a:tcPr>
-                </a:tc>
-                <a:tc>
-                  <a:txBody>
-                    <a:bodyPr wrap="none"/>
-                    <a:lstStyle/>
-                    <a:p>
-                      <a:pPr algn="ctr"/>
-                      <a:r>
-                        <a:rPr sz="700" b="1">
-                          <a:solidFill>
-                            <a:srgbClr val="1A2340"/>
-                          </a:solidFill>
-                          <a:latin typeface="Calibri"/>
-                        </a:rPr>
-                        <a:t>100%</a:t>
-                      </a:r>
-                    </a:p>
-                  </a:txBody>
-                  <a:tcPr marT="0" marB="0" marL="38100" marR="38100" anchor="ctr">
-                    <a:solidFill>
-                      <a:srgbClr val="FFFFFF"/>
-                    </a:solidFill>
-                  </a:tcPr>
-                </a:tc>
-                <a:tc>
-                  <a:txBody>
-                    <a:bodyPr wrap="none"/>
-                    <a:lstStyle/>
-                    <a:p>
-                      <a:pPr algn="ctr"/>
-                      <a:r>
-                        <a:rPr sz="700" b="0">
-                          <a:solidFill>
-                            <a:srgbClr val="555555"/>
-                          </a:solidFill>
-                          <a:latin typeface="Calibri"/>
-                        </a:rPr>
-                        <a:t>100%</a:t>
-                      </a:r>
-                    </a:p>
-                  </a:txBody>
-                  <a:tcPr marT="0" marB="0" marL="38100" marR="38100" anchor="ctr">
-                    <a:solidFill>
-                      <a:srgbClr val="FFFFFF"/>
-                    </a:solidFill>
-                  </a:tcPr>
-                </a:tc>
-                <a:tc>
-                  <a:txBody>
-                    <a:bodyPr wrap="none"/>
-                    <a:lstStyle/>
-                    <a:p>
-                      <a:pPr algn="r"/>
-                      <a:r>
-                        <a:rPr sz="700" b="1">
-                          <a:solidFill>
-                            <a:srgbClr val="22C55E"/>
-                          </a:solidFill>
-                          <a:latin typeface="Calibri"/>
-                        </a:rPr>
-                        <a:t/>
-                      </a:r>
-                    </a:p>
-                  </a:txBody>
-                  <a:tcPr marT="0" marB="0" marL="38100" marR="38100" anchor="ctr">
-                    <a:solidFill>
-                      <a:srgbClr val="FFFFFF"/>
-                    </a:solidFill>
-                  </a:tcPr>
-                </a:tc>
-                <a:tc>
-                  <a:txBody>
-                    <a:bodyPr wrap="none"/>
-                    <a:lstStyle/>
-                    <a:p>
-                      <a:pPr algn="ctr"/>
-                      <a:r>
-                        <a:rPr sz="700" b="1">
-                          <a:solidFill>
-                            <a:srgbClr val="22C55E"/>
-                          </a:solidFill>
-                          <a:latin typeface="Calibri"/>
-                        </a:rPr>
-                        <a:t>Terminado</a:t>
-                      </a:r>
-                    </a:p>
-                  </a:txBody>
-                  <a:tcPr marT="0" marB="0" marL="38100" marR="38100" anchor="ctr">
-                    <a:solidFill>
-                      <a:srgbClr val="FFFFFF"/>
-                    </a:solidFill>
-                  </a:tcPr>
-                </a:tc>
-              </a:tr>
-              <a:tr h="187452">
-                <a:tc>
-                  <a:txBody>
-                    <a:bodyPr wrap="none"/>
-                    <a:lstStyle/>
-                    <a:p>
-                      <a:pPr algn="ctr"/>
-                      <a:r>
-                        <a:rPr sz="700" b="1">
-                          <a:solidFill>
-                            <a:srgbClr val="1A2340"/>
-                          </a:solidFill>
-                          <a:latin typeface="Calibri"/>
-                        </a:rPr>
-                        <a:t>Proyecto</a:t>
-                      </a:r>
-                    </a:p>
-                  </a:txBody>
-                  <a:tcPr marT="0" marB="0" marL="38100" marR="38100" anchor="ctr">
-                    <a:solidFill>
-                      <a:srgbClr val="F5F7FA"/>
-                    </a:solidFill>
-                  </a:tcPr>
-                </a:tc>
-                <a:tc>
-                  <a:txBody>
-                    <a:bodyPr wrap="none"/>
-                    <a:lstStyle/>
-                    <a:p>
-                      <a:pPr algn="l"/>
-                      <a:r>
-                        <a:rPr sz="700" b="0">
-                          <a:solidFill>
-                            <a:srgbClr val="1A2340"/>
-                          </a:solidFill>
-                          <a:latin typeface="Calibri"/>
-                        </a:rPr>
-                        <a:t>TRIM || Marketplace || Caddi</a:t>
-                      </a:r>
-                    </a:p>
-                  </a:txBody>
-                  <a:tcPr marT="0" marB="0" marL="38100" marR="38100" anchor="ctr">
-                    <a:solidFill>
-                      <a:srgbClr val="F5F7FA"/>
-                    </a:solidFill>
-                  </a:tcPr>
-                </a:tc>
-                <a:tc>
-                  <a:txBody>
-                    <a:bodyPr wrap="none"/>
-                    <a:lstStyle/>
-                    <a:p>
-                      <a:pPr algn="ctr"/>
-                      <a:r>
-                        <a:rPr sz="700" b="0">
-                          <a:solidFill>
-                            <a:srgbClr val="555555"/>
-                          </a:solidFill>
-                          <a:latin typeface="Calibri"/>
-                        </a:rPr>
-                        <a:t>07/08/2025</a:t>
-                      </a:r>
-                    </a:p>
-                  </a:txBody>
-                  <a:tcPr marT="0" marB="0" marL="38100" marR="38100" anchor="ctr">
-                    <a:solidFill>
-                      <a:srgbClr val="F5F7FA"/>
-                    </a:solidFill>
-                  </a:tcPr>
-                </a:tc>
-                <a:tc>
-                  <a:txBody>
-                    <a:bodyPr wrap="none"/>
-                    <a:lstStyle/>
-                    <a:p>
-                      <a:pPr algn="ctr"/>
-                      <a:r>
-                        <a:rPr sz="700" b="0">
-                          <a:solidFill>
-                            <a:srgbClr val="555555"/>
-                          </a:solidFill>
-                          <a:latin typeface="Calibri"/>
-                        </a:rPr>
-                        <a:t>04/08/2026</a:t>
-                      </a:r>
-                    </a:p>
-                  </a:txBody>
-                  <a:tcPr marT="0" marB="0" marL="38100" marR="38100" anchor="ctr">
-                    <a:solidFill>
-                      <a:srgbClr val="F5F7FA"/>
-                    </a:solidFill>
-                  </a:tcPr>
-                </a:tc>
-                <a:tc>
-                  <a:txBody>
-                    <a:bodyPr wrap="none"/>
-                    <a:lstStyle/>
-                    <a:p>
-                      <a:pPr algn="ctr"/>
-                      <a:r>
-                        <a:rPr sz="700" b="1">
-                          <a:solidFill>
-                            <a:srgbClr val="1A2340"/>
-                          </a:solidFill>
-                          <a:latin typeface="Calibri"/>
-                        </a:rPr>
-                        <a:t>97%</a:t>
-                      </a:r>
-                    </a:p>
-                  </a:txBody>
-                  <a:tcPr marT="0" marB="0" marL="38100" marR="38100" anchor="ctr">
-                    <a:solidFill>
-                      <a:srgbClr val="F5F7FA"/>
-                    </a:solidFill>
-                  </a:tcPr>
-                </a:tc>
-                <a:tc>
-                  <a:txBody>
-                    <a:bodyPr wrap="none"/>
-                    <a:lstStyle/>
-                    <a:p>
-                      <a:pPr algn="ctr"/>
-                      <a:r>
-                        <a:rPr sz="700" b="0">
-                          <a:solidFill>
-                            <a:srgbClr val="555555"/>
-                          </a:solidFill>
-                          <a:latin typeface="Calibri"/>
-                        </a:rPr>
-                        <a:t>91%</a:t>
-                      </a:r>
-                    </a:p>
-                  </a:txBody>
-                  <a:tcPr marT="0" marB="0" marL="38100" marR="38100" anchor="ctr">
-                    <a:solidFill>
-                      <a:srgbClr val="F5F7FA"/>
-                    </a:solidFill>
-                  </a:tcPr>
-                </a:tc>
-                <a:tc>
-                  <a:txBody>
-                    <a:bodyPr wrap="none"/>
-                    <a:lstStyle/>
-                    <a:p>
-                      <a:pPr algn="r"/>
-                      <a:r>
-                        <a:rPr sz="700" b="1">
-                          <a:solidFill>
-                            <a:srgbClr val="22C55E"/>
-                          </a:solidFill>
-                          <a:latin typeface="Calibri"/>
-                        </a:rPr>
-                        <a:t/>
-                      </a:r>
-                    </a:p>
-                  </a:txBody>
-                  <a:tcPr marT="0" marB="0" marL="38100" marR="38100" anchor="ctr">
-                    <a:solidFill>
-                      <a:srgbClr val="F5F7FA"/>
-                    </a:solidFill>
-                  </a:tcPr>
-                </a:tc>
-                <a:tc>
-                  <a:txBody>
-                    <a:bodyPr wrap="none"/>
-                    <a:lstStyle/>
-                    <a:p>
-                      <a:pPr algn="ctr"/>
-                      <a:r>
-                        <a:rPr sz="700" b="1">
-                          <a:solidFill>
-                            <a:srgbClr val="22C55E"/>
-                          </a:solidFill>
-                          <a:latin typeface="Calibri"/>
-                        </a:rPr>
-                        <a:t>A tiempo</a:t>
-                      </a:r>
-                    </a:p>
-                  </a:txBody>
-                  <a:tcPr marT="0" marB="0" marL="38100" marR="38100" anchor="ctr">
-                    <a:solidFill>
-                      <a:srgbClr val="F5F7FA"/>
-                    </a:solidFill>
-                  </a:tcPr>
-                </a:tc>
-              </a:tr>
-              <a:tr h="187452">
-                <a:tc>
-                  <a:txBody>
-                    <a:bodyPr wrap="none"/>
-                    <a:lstStyle/>
-                    <a:p>
-                      <a:pPr algn="ctr"/>
-                      <a:r>
-                        <a:rPr sz="700" b="1">
-                          <a:solidFill>
-                            <a:srgbClr val="1A2340"/>
-                          </a:solidFill>
-                          <a:latin typeface="Calibri"/>
-                        </a:rPr>
-                        <a:t>Proyecto</a:t>
-                      </a:r>
-                    </a:p>
-                  </a:txBody>
-                  <a:tcPr marT="0" marB="0" marL="38100" marR="38100" anchor="ctr">
-                    <a:solidFill>
-                      <a:srgbClr val="FFFFFF"/>
-                    </a:solidFill>
-                  </a:tcPr>
-                </a:tc>
-                <a:tc>
-                  <a:txBody>
-                    <a:bodyPr wrap="none"/>
-                    <a:lstStyle/>
-                    <a:p>
-                      <a:pPr algn="l"/>
-                      <a:r>
-                        <a:rPr sz="700" b="0">
-                          <a:solidFill>
-                            <a:srgbClr val="1A2340"/>
-                          </a:solidFill>
-                          <a:latin typeface="Calibri"/>
-                        </a:rPr>
-                        <a:t>Contabilidad || Integración Mecanica-SAE (Fase…</a:t>
-                      </a:r>
-                    </a:p>
-                  </a:txBody>
-                  <a:tcPr marT="0" marB="0" marL="38100" marR="38100" anchor="ctr">
-                    <a:solidFill>
-                      <a:srgbClr val="FFFFFF"/>
-                    </a:solidFill>
-                  </a:tcPr>
-                </a:tc>
-                <a:tc>
-                  <a:txBody>
-                    <a:bodyPr wrap="none"/>
-                    <a:lstStyle/>
-                    <a:p>
-                      <a:pPr algn="ctr"/>
-                      <a:r>
-                        <a:rPr sz="700" b="0">
-                          <a:solidFill>
-                            <a:srgbClr val="555555"/>
-                          </a:solidFill>
-                          <a:latin typeface="Calibri"/>
-                        </a:rPr>
-                        <a:t>14/08/2025</a:t>
-                      </a:r>
-                    </a:p>
-                  </a:txBody>
-                  <a:tcPr marT="0" marB="0" marL="38100" marR="38100" anchor="ctr">
-                    <a:solidFill>
-                      <a:srgbClr val="FFFFFF"/>
-                    </a:solidFill>
-                  </a:tcPr>
-                </a:tc>
-                <a:tc>
-                  <a:txBody>
-                    <a:bodyPr wrap="none"/>
-                    <a:lstStyle/>
-                    <a:p>
-                      <a:pPr algn="ctr"/>
-                      <a:r>
-                        <a:rPr sz="700" b="0">
-                          <a:solidFill>
-                            <a:srgbClr val="555555"/>
-                          </a:solidFill>
-                          <a:latin typeface="Calibri"/>
-                        </a:rPr>
-                        <a:t>02/06/2026</a:t>
-                      </a:r>
-                    </a:p>
-                  </a:txBody>
-                  <a:tcPr marT="0" marB="0" marL="38100" marR="38100" anchor="ctr">
-                    <a:solidFill>
-                      <a:srgbClr val="FFFFFF"/>
-                    </a:solidFill>
-                  </a:tcPr>
-                </a:tc>
-                <a:tc>
-                  <a:txBody>
-                    <a:bodyPr wrap="none"/>
-                    <a:lstStyle/>
-                    <a:p>
-                      <a:pPr algn="ctr"/>
-                      <a:r>
-                        <a:rPr sz="700" b="1">
-                          <a:solidFill>
-                            <a:srgbClr val="1A2340"/>
-                          </a:solidFill>
-                          <a:latin typeface="Calibri"/>
-                        </a:rPr>
-                        <a:t>95%</a:t>
-                      </a:r>
-                    </a:p>
-                  </a:txBody>
-                  <a:tcPr marT="0" marB="0" marL="38100" marR="38100" anchor="ctr">
-                    <a:solidFill>
-                      <a:srgbClr val="FFFFFF"/>
-                    </a:solidFill>
-                  </a:tcPr>
-                </a:tc>
-                <a:tc>
-                  <a:txBody>
-                    <a:bodyPr wrap="none"/>
-                    <a:lstStyle/>
-                    <a:p>
-                      <a:pPr algn="ctr"/>
-                      <a:r>
-                        <a:rPr sz="700" b="0">
-                          <a:solidFill>
-                            <a:srgbClr val="555555"/>
-                          </a:solidFill>
-                          <a:latin typeface="Calibri"/>
-                        </a:rPr>
-                        <a:t>100%</a:t>
-                      </a:r>
-                    </a:p>
-                  </a:txBody>
-                  <a:tcPr marT="0" marB="0" marL="38100" marR="38100" anchor="ctr">
-                    <a:solidFill>
-                      <a:srgbClr val="FFFFFF"/>
-                    </a:solidFill>
-                  </a:tcPr>
-                </a:tc>
-                <a:tc>
-                  <a:txBody>
-                    <a:bodyPr wrap="none"/>
-                    <a:lstStyle/>
-                    <a:p>
-                      <a:pPr algn="r"/>
-                      <a:r>
-                        <a:rPr sz="700" b="1">
-                          <a:solidFill>
-                            <a:srgbClr val="EF4444"/>
-                          </a:solidFill>
-                          <a:latin typeface="Calibri"/>
-                        </a:rPr>
-                        <a:t/>
-                      </a:r>
-                    </a:p>
-                  </a:txBody>
-                  <a:tcPr marT="0" marB="0" marL="38100" marR="38100" anchor="ctr">
-                    <a:solidFill>
-                      <a:srgbClr val="FFFFFF"/>
-                    </a:solidFill>
-                  </a:tcPr>
-                </a:tc>
-                <a:tc>
-                  <a:txBody>
-                    <a:bodyPr wrap="none"/>
-                    <a:lstStyle/>
-                    <a:p>
-                      <a:pPr algn="ctr"/>
-                      <a:r>
-                        <a:rPr sz="700" b="1">
-                          <a:solidFill>
-                            <a:srgbClr val="EF4444"/>
-                          </a:solidFill>
-                          <a:latin typeface="Calibri"/>
-                        </a:rPr>
-                        <a:t>Atrasado</a:t>
-                      </a:r>
-                    </a:p>
-                  </a:txBody>
-                  <a:tcPr marT="0" marB="0" marL="38100" marR="38100" anchor="ctr">
-                    <a:solidFill>
-                      <a:srgbClr val="FFFFFF"/>
-                    </a:solidFill>
-                  </a:tcPr>
-                </a:tc>
-              </a:tr>
-              <a:tr h="187452">
-                <a:tc>
-                  <a:txBody>
-                    <a:bodyPr wrap="none"/>
-                    <a:lstStyle/>
-                    <a:p>
-                      <a:pPr algn="ctr"/>
-                      <a:r>
-                        <a:rPr sz="700" b="1">
-                          <a:solidFill>
-                            <a:srgbClr val="1A2340"/>
-                          </a:solidFill>
-                          <a:latin typeface="Calibri"/>
-                        </a:rPr>
-                        <a:t>Proyecto</a:t>
-                      </a:r>
-                    </a:p>
-                  </a:txBody>
-                  <a:tcPr marT="0" marB="0" marL="38100" marR="38100" anchor="ctr">
-                    <a:solidFill>
-                      <a:srgbClr val="F5F7FA"/>
-                    </a:solidFill>
-                  </a:tcPr>
-                </a:tc>
-                <a:tc>
-                  <a:txBody>
-                    <a:bodyPr wrap="none"/>
-                    <a:lstStyle/>
-                    <a:p>
-                      <a:pPr algn="l"/>
-                      <a:r>
-                        <a:rPr sz="700" b="0">
-                          <a:solidFill>
-                            <a:srgbClr val="1A2340"/>
-                          </a:solidFill>
-                          <a:latin typeface="Calibri"/>
-                        </a:rPr>
-                        <a:t>Operaciones Fleet || Desarrollos</a:t>
-                      </a:r>
-                    </a:p>
-                  </a:txBody>
-                  <a:tcPr marT="0" marB="0" marL="38100" marR="38100" anchor="ctr">
-                    <a:solidFill>
-                      <a:srgbClr val="F5F7FA"/>
-                    </a:solidFill>
-                  </a:tcPr>
-                </a:tc>
-                <a:tc>
-                  <a:txBody>
-                    <a:bodyPr wrap="none"/>
-                    <a:lstStyle/>
-                    <a:p>
-                      <a:pPr algn="ctr"/>
-                      <a:r>
-                        <a:rPr sz="700" b="0">
-                          <a:solidFill>
-                            <a:srgbClr val="555555"/>
-                          </a:solidFill>
-                          <a:latin typeface="Calibri"/>
-                        </a:rPr>
-                        <a:t>08/08/2025</a:t>
-                      </a:r>
-                    </a:p>
-                  </a:txBody>
-                  <a:tcPr marT="0" marB="0" marL="38100" marR="38100" anchor="ctr">
-                    <a:solidFill>
-                      <a:srgbClr val="F5F7FA"/>
-                    </a:solidFill>
-                  </a:tcPr>
-                </a:tc>
-                <a:tc>
-                  <a:txBody>
-                    <a:bodyPr wrap="none"/>
-                    <a:lstStyle/>
-                    <a:p>
-                      <a:pPr algn="ctr"/>
-                      <a:r>
-                        <a:rPr sz="700" b="0">
-                          <a:solidFill>
-                            <a:srgbClr val="555555"/>
-                          </a:solidFill>
-                          <a:latin typeface="Calibri"/>
-                        </a:rPr>
-                        <a:t>05/06/2026</a:t>
-                      </a:r>
-                    </a:p>
-                  </a:txBody>
-                  <a:tcPr marT="0" marB="0" marL="38100" marR="38100" anchor="ctr">
-                    <a:solidFill>
-                      <a:srgbClr val="F5F7FA"/>
-                    </a:solidFill>
-                  </a:tcPr>
-                </a:tc>
-                <a:tc>
-                  <a:txBody>
-                    <a:bodyPr wrap="none"/>
-                    <a:lstStyle/>
-                    <a:p>
-                      <a:pPr algn="ctr"/>
-                      <a:r>
-                        <a:rPr sz="700" b="1">
-                          <a:solidFill>
-                            <a:srgbClr val="1A2340"/>
-                          </a:solidFill>
-                          <a:latin typeface="Calibri"/>
-                        </a:rPr>
-                        <a:t>100%</a:t>
-                      </a:r>
-                    </a:p>
-                  </a:txBody>
-                  <a:tcPr marT="0" marB="0" marL="38100" marR="38100" anchor="ctr">
-                    <a:solidFill>
-                      <a:srgbClr val="F5F7FA"/>
-                    </a:solidFill>
-                  </a:tcPr>
-                </a:tc>
-                <a:tc>
-                  <a:txBody>
-                    <a:bodyPr wrap="none"/>
-                    <a:lstStyle/>
-                    <a:p>
-                      <a:pPr algn="ctr"/>
-                      <a:r>
-                        <a:rPr sz="700" b="0">
-                          <a:solidFill>
-                            <a:srgbClr val="555555"/>
-                          </a:solidFill>
-                          <a:latin typeface="Calibri"/>
-                        </a:rPr>
-                        <a:t>100%</a:t>
-                      </a:r>
-                    </a:p>
-                  </a:txBody>
-                  <a:tcPr marT="0" marB="0" marL="38100" marR="38100" anchor="ctr">
-                    <a:solidFill>
-                      <a:srgbClr val="F5F7FA"/>
-                    </a:solidFill>
-                  </a:tcPr>
-                </a:tc>
-                <a:tc>
-                  <a:txBody>
-                    <a:bodyPr wrap="none"/>
-                    <a:lstStyle/>
-                    <a:p>
-                      <a:pPr algn="r"/>
-                      <a:r>
-                        <a:rPr sz="700" b="1">
-                          <a:solidFill>
-                            <a:srgbClr val="22C55E"/>
-                          </a:solidFill>
-                          <a:latin typeface="Calibri"/>
-                        </a:rPr>
-                        <a:t/>
-                      </a:r>
-                    </a:p>
-                  </a:txBody>
-                  <a:tcPr marT="0" marB="0" marL="38100" marR="38100" anchor="ctr">
-                    <a:solidFill>
-                      <a:srgbClr val="F5F7FA"/>
-                    </a:solidFill>
-                  </a:tcPr>
-                </a:tc>
-                <a:tc>
-                  <a:txBody>
-                    <a:bodyPr wrap="none"/>
-                    <a:lstStyle/>
-                    <a:p>
-                      <a:pPr algn="ctr"/>
-                      <a:r>
-                        <a:rPr sz="700" b="1">
-                          <a:solidFill>
-                            <a:srgbClr val="22C55E"/>
-                          </a:solidFill>
-                          <a:latin typeface="Calibri"/>
-                        </a:rPr>
-                        <a:t>Terminado</a:t>
-                      </a:r>
-                    </a:p>
-                  </a:txBody>
-                  <a:tcPr marT="0" marB="0" marL="38100" marR="38100" anchor="ctr">
-                    <a:solidFill>
-                      <a:srgbClr val="F5F7FA"/>
-                    </a:solidFill>
-                  </a:tcPr>
-                </a:tc>
-              </a:tr>
-              <a:tr h="187452">
-                <a:tc>
-                  <a:txBody>
-                    <a:bodyPr wrap="none"/>
-                    <a:lstStyle/>
-                    <a:p>
-                      <a:pPr algn="ctr"/>
-                      <a:r>
-                        <a:rPr sz="700" b="1">
-                          <a:solidFill>
-                            <a:srgbClr val="1A2340"/>
-                          </a:solidFill>
-                          <a:latin typeface="Calibri"/>
-                        </a:rPr>
-                        <a:t>Proyecto</a:t>
-                      </a:r>
-                    </a:p>
-                  </a:txBody>
-                  <a:tcPr marT="0" marB="0" marL="38100" marR="38100" anchor="ctr">
-                    <a:solidFill>
-                      <a:srgbClr val="FFFFFF"/>
-                    </a:solidFill>
-                  </a:tcPr>
-                </a:tc>
-                <a:tc>
-                  <a:txBody>
-                    <a:bodyPr wrap="none"/>
-                    <a:lstStyle/>
-                    <a:p>
-                      <a:pPr algn="l"/>
-                      <a:r>
-                        <a:rPr sz="700" b="0">
-                          <a:solidFill>
-                            <a:srgbClr val="1A2340"/>
-                          </a:solidFill>
-                          <a:latin typeface="Calibri"/>
-                        </a:rPr>
-                        <a:t>Operaciones Fleet || Lobby Fix</a:t>
-                      </a:r>
-                    </a:p>
-                  </a:txBody>
-                  <a:tcPr marT="0" marB="0" marL="38100" marR="38100" anchor="ctr">
-                    <a:solidFill>
-                      <a:srgbClr val="FFFFFF"/>
-                    </a:solidFill>
-                  </a:tcPr>
-                </a:tc>
-                <a:tc>
-                  <a:txBody>
-                    <a:bodyPr wrap="none"/>
-                    <a:lstStyle/>
-                    <a:p>
-                      <a:pPr algn="ctr"/>
-                      <a:r>
-                        <a:rPr sz="700" b="0">
-                          <a:solidFill>
-                            <a:srgbClr val="555555"/>
-                          </a:solidFill>
-                          <a:latin typeface="Calibri"/>
-                        </a:rPr>
-                        <a:t>11/11/2025</a:t>
-                      </a:r>
-                    </a:p>
-                  </a:txBody>
-                  <a:tcPr marT="0" marB="0" marL="38100" marR="38100" anchor="ctr">
-                    <a:solidFill>
-                      <a:srgbClr val="FFFFFF"/>
-                    </a:solidFill>
-                  </a:tcPr>
-                </a:tc>
-                <a:tc>
-                  <a:txBody>
-                    <a:bodyPr wrap="none"/>
-                    <a:lstStyle/>
-                    <a:p>
-                      <a:pPr algn="ctr"/>
-                      <a:r>
-                        <a:rPr sz="700" b="0">
-                          <a:solidFill>
-                            <a:srgbClr val="555555"/>
-                          </a:solidFill>
-                          <a:latin typeface="Calibri"/>
-                        </a:rPr>
-                        <a:t>29/06/2026</a:t>
-                      </a:r>
-                    </a:p>
-                  </a:txBody>
-                  <a:tcPr marT="0" marB="0" marL="38100" marR="38100" anchor="ctr">
-                    <a:solidFill>
-                      <a:srgbClr val="FFFFFF"/>
-                    </a:solidFill>
-                  </a:tcPr>
-                </a:tc>
-                <a:tc>
-                  <a:txBody>
-                    <a:bodyPr wrap="none"/>
-                    <a:lstStyle/>
-                    <a:p>
-                      <a:pPr algn="ctr"/>
-                      <a:r>
-                        <a:rPr sz="700" b="1">
-                          <a:solidFill>
-                            <a:srgbClr val="1A2340"/>
-                          </a:solidFill>
-                          <a:latin typeface="Calibri"/>
-                        </a:rPr>
-                        <a:t>100%</a:t>
-                      </a:r>
-                    </a:p>
-                  </a:txBody>
-                  <a:tcPr marT="0" marB="0" marL="38100" marR="38100" anchor="ctr">
-                    <a:solidFill>
-                      <a:srgbClr val="FFFFFF"/>
-                    </a:solidFill>
-                  </a:tcPr>
-                </a:tc>
-                <a:tc>
-                  <a:txBody>
-                    <a:bodyPr wrap="none"/>
-                    <a:lstStyle/>
-                    <a:p>
-                      <a:pPr algn="ctr"/>
-                      <a:r>
-                        <a:rPr sz="700" b="0">
-                          <a:solidFill>
-                            <a:srgbClr val="555555"/>
-                          </a:solidFill>
-                          <a:latin typeface="Calibri"/>
-                        </a:rPr>
-                        <a:t>100%</a:t>
-                      </a:r>
-                    </a:p>
-                  </a:txBody>
-                  <a:tcPr marT="0" marB="0" marL="38100" marR="38100" anchor="ctr">
-                    <a:solidFill>
-                      <a:srgbClr val="FFFFFF"/>
-                    </a:solidFill>
-                  </a:tcPr>
-                </a:tc>
-                <a:tc>
-                  <a:txBody>
-                    <a:bodyPr wrap="none"/>
-                    <a:lstStyle/>
-                    <a:p>
-                      <a:pPr algn="r"/>
-                      <a:r>
-                        <a:rPr sz="700" b="1">
-                          <a:solidFill>
-                            <a:srgbClr val="22C55E"/>
-                          </a:solidFill>
-                          <a:latin typeface="Calibri"/>
-                        </a:rPr>
-                        <a:t/>
-                      </a:r>
-                    </a:p>
-                  </a:txBody>
-                  <a:tcPr marT="0" marB="0" marL="38100" marR="38100" anchor="ctr">
-                    <a:solidFill>
-                      <a:srgbClr val="FFFFFF"/>
-                    </a:solidFill>
-                  </a:tcPr>
-                </a:tc>
-                <a:tc>
-                  <a:txBody>
-                    <a:bodyPr wrap="none"/>
-                    <a:lstStyle/>
-                    <a:p>
-                      <a:pPr algn="ctr"/>
-                      <a:r>
-                        <a:rPr sz="700" b="1">
-                          <a:solidFill>
-                            <a:srgbClr val="22C55E"/>
-                          </a:solidFill>
-                          <a:latin typeface="Calibri"/>
-                        </a:rPr>
-                        <a:t>Terminado</a:t>
-                      </a:r>
-                    </a:p>
-                  </a:txBody>
-                  <a:tcPr marT="0" marB="0" marL="38100" marR="38100" anchor="ctr">
-                    <a:solidFill>
-                      <a:srgbClr val="FFFFFF"/>
-                    </a:solidFill>
-                  </a:tcPr>
-                </a:tc>
-              </a:tr>
-              <a:tr h="187452">
-                <a:tc>
-                  <a:txBody>
-                    <a:bodyPr wrap="none"/>
-                    <a:lstStyle/>
-                    <a:p>
-                      <a:pPr algn="ctr"/>
-                      <a:r>
-                        <a:rPr sz="700" b="1">
-                          <a:solidFill>
-                            <a:srgbClr val="1A2340"/>
-                          </a:solidFill>
-                          <a:latin typeface="Calibri"/>
-                        </a:rPr>
-                        <a:t>Proyecto</a:t>
-                      </a:r>
-                    </a:p>
-                  </a:txBody>
-                  <a:tcPr marT="0" marB="0" marL="38100" marR="38100" anchor="ctr">
-                    <a:solidFill>
-                      <a:srgbClr val="F5F7FA"/>
-                    </a:solidFill>
-                  </a:tcPr>
-                </a:tc>
-                <a:tc>
-                  <a:txBody>
-                    <a:bodyPr wrap="none"/>
-                    <a:lstStyle/>
-                    <a:p>
-                      <a:pPr algn="l"/>
-                      <a:r>
-                        <a:rPr sz="700" b="0">
-                          <a:solidFill>
-                            <a:srgbClr val="1A2340"/>
-                          </a:solidFill>
-                          <a:latin typeface="Calibri"/>
-                        </a:rPr>
-                        <a:t>Operaciones Fleet || Nexcar || Desarrollos</a:t>
-                      </a:r>
-                    </a:p>
-                  </a:txBody>
-                  <a:tcPr marT="0" marB="0" marL="38100" marR="38100" anchor="ctr">
-                    <a:solidFill>
-                      <a:srgbClr val="F5F7FA"/>
-                    </a:solidFill>
-                  </a:tcPr>
-                </a:tc>
-                <a:tc>
-                  <a:txBody>
-                    <a:bodyPr wrap="none"/>
-                    <a:lstStyle/>
-                    <a:p>
-                      <a:pPr algn="ctr"/>
-                      <a:r>
-                        <a:rPr sz="700" b="0">
-                          <a:solidFill>
-                            <a:srgbClr val="555555"/>
-                          </a:solidFill>
-                          <a:latin typeface="Calibri"/>
-                        </a:rPr>
-                        <a:t>05/03/2026</a:t>
-                      </a:r>
-                    </a:p>
-                  </a:txBody>
-                  <a:tcPr marT="0" marB="0" marL="38100" marR="38100" anchor="ctr">
-                    <a:solidFill>
-                      <a:srgbClr val="F5F7FA"/>
-                    </a:solidFill>
-                  </a:tcPr>
-                </a:tc>
-                <a:tc>
-                  <a:txBody>
-                    <a:bodyPr wrap="none"/>
-                    <a:lstStyle/>
-                    <a:p>
-                      <a:pPr algn="ctr"/>
-                      <a:r>
-                        <a:rPr sz="700" b="0">
-                          <a:solidFill>
-                            <a:srgbClr val="555555"/>
-                          </a:solidFill>
-                          <a:latin typeface="Calibri"/>
-                        </a:rPr>
-                        <a:t>10/07/2026</a:t>
-                      </a:r>
-                    </a:p>
-                  </a:txBody>
-                  <a:tcPr marT="0" marB="0" marL="38100" marR="38100" anchor="ctr">
-                    <a:solidFill>
-                      <a:srgbClr val="F5F7FA"/>
-                    </a:solidFill>
-                  </a:tcPr>
-                </a:tc>
-                <a:tc>
-                  <a:txBody>
-                    <a:bodyPr wrap="none"/>
-                    <a:lstStyle/>
-                    <a:p>
-                      <a:pPr algn="ctr"/>
-                      <a:r>
-                        <a:rPr sz="700" b="1">
-                          <a:solidFill>
-                            <a:srgbClr val="1A2340"/>
-                          </a:solidFill>
-                          <a:latin typeface="Calibri"/>
-                        </a:rPr>
-                        <a:t>100%</a:t>
-                      </a:r>
-                    </a:p>
-                  </a:txBody>
-                  <a:tcPr marT="0" marB="0" marL="38100" marR="38100" anchor="ctr">
-                    <a:solidFill>
-                      <a:srgbClr val="F5F7FA"/>
-                    </a:solidFill>
-                  </a:tcPr>
-                </a:tc>
-                <a:tc>
-                  <a:txBody>
-                    <a:bodyPr wrap="none"/>
-                    <a:lstStyle/>
-                    <a:p>
-                      <a:pPr algn="ctr"/>
-                      <a:r>
-                        <a:rPr sz="700" b="0">
-                          <a:solidFill>
-                            <a:srgbClr val="555555"/>
-                          </a:solidFill>
-                          <a:latin typeface="Calibri"/>
-                        </a:rPr>
-                        <a:t>96%</a:t>
-                      </a:r>
-                    </a:p>
-                  </a:txBody>
-                  <a:tcPr marT="0" marB="0" marL="38100" marR="38100" anchor="ctr">
-                    <a:solidFill>
-                      <a:srgbClr val="F5F7FA"/>
-                    </a:solidFill>
-                  </a:tcPr>
-                </a:tc>
-                <a:tc>
-                  <a:txBody>
-                    <a:bodyPr wrap="none"/>
-                    <a:lstStyle/>
-                    <a:p>
-                      <a:pPr algn="r"/>
-                      <a:r>
-                        <a:rPr sz="700" b="1">
-                          <a:solidFill>
-                            <a:srgbClr val="22C55E"/>
-                          </a:solidFill>
-                          <a:latin typeface="Calibri"/>
-                        </a:rPr>
-                        <a:t/>
-                      </a:r>
-                    </a:p>
-                  </a:txBody>
-                  <a:tcPr marT="0" marB="0" marL="38100" marR="38100" anchor="ctr">
-                    <a:solidFill>
-                      <a:srgbClr val="F5F7FA"/>
-                    </a:solidFill>
-                  </a:tcPr>
-                </a:tc>
-                <a:tc>
-                  <a:txBody>
-                    <a:bodyPr wrap="none"/>
-                    <a:lstStyle/>
-                    <a:p>
-                      <a:pPr algn="ctr"/>
-                      <a:r>
-                        <a:rPr sz="700" b="1">
-                          <a:solidFill>
-                            <a:srgbClr val="22C55E"/>
-                          </a:solidFill>
-                          <a:latin typeface="Calibri"/>
-                        </a:rPr>
-                        <a:t>Terminado</a:t>
-                      </a:r>
-                    </a:p>
-                  </a:txBody>
-                  <a:tcPr marT="0" marB="0" marL="38100" marR="38100" anchor="ctr">
-                    <a:solidFill>
-                      <a:srgbClr val="F5F7FA"/>
-                    </a:solidFill>
-                  </a:tcPr>
-                </a:tc>
-              </a:tr>
-              <a:tr h="187452">
-                <a:tc>
-                  <a:txBody>
-                    <a:bodyPr wrap="none"/>
-                    <a:lstStyle/>
-                    <a:p>
-                      <a:pPr algn="ctr"/>
-                      <a:r>
-                        <a:rPr sz="700" b="1">
-                          <a:solidFill>
-                            <a:srgbClr val="1A2340"/>
-                          </a:solidFill>
-                          <a:latin typeface="Calibri"/>
-                        </a:rPr>
-                        <a:t>Proyecto</a:t>
-                      </a:r>
-                    </a:p>
-                  </a:txBody>
-                  <a:tcPr marT="0" marB="0" marL="38100" marR="38100" anchor="ctr">
-                    <a:solidFill>
-                      <a:srgbClr val="FFFFFF"/>
-                    </a:solidFill>
-                  </a:tcPr>
-                </a:tc>
-                <a:tc>
-                  <a:txBody>
-                    <a:bodyPr wrap="none"/>
-                    <a:lstStyle/>
-                    <a:p>
-                      <a:pPr algn="l"/>
-                      <a:r>
-                        <a:rPr sz="700" b="0">
-                          <a:solidFill>
-                            <a:srgbClr val="1A2340"/>
-                          </a:solidFill>
-                          <a:latin typeface="Calibri"/>
-                        </a:rPr>
-                        <a:t>Operaciones Fleet || Data Lab</a:t>
-                      </a:r>
-                    </a:p>
-                  </a:txBody>
-                  <a:tcPr marT="0" marB="0" marL="38100" marR="38100" anchor="ctr">
-                    <a:solidFill>
-                      <a:srgbClr val="FFFFFF"/>
-                    </a:solidFill>
-                  </a:tcPr>
-                </a:tc>
-                <a:tc>
-                  <a:txBody>
-                    <a:bodyPr wrap="none"/>
-                    <a:lstStyle/>
-                    <a:p>
-                      <a:pPr algn="ctr"/>
-                      <a:r>
-                        <a:rPr sz="700" b="0">
-                          <a:solidFill>
-                            <a:srgbClr val="555555"/>
-                          </a:solidFill>
-                          <a:latin typeface="Calibri"/>
-                        </a:rPr>
-                        <a:t>20/01/2026</a:t>
-                      </a:r>
-                    </a:p>
-                  </a:txBody>
-                  <a:tcPr marT="0" marB="0" marL="38100" marR="38100" anchor="ctr">
-                    <a:solidFill>
-                      <a:srgbClr val="FFFFFF"/>
-                    </a:solidFill>
-                  </a:tcPr>
-                </a:tc>
-                <a:tc>
-                  <a:txBody>
-                    <a:bodyPr wrap="none"/>
-                    <a:lstStyle/>
-                    <a:p>
-                      <a:pPr algn="ctr"/>
-                      <a:r>
-                        <a:rPr sz="700" b="0">
-                          <a:solidFill>
-                            <a:srgbClr val="555555"/>
-                          </a:solidFill>
-                          <a:latin typeface="Calibri"/>
-                        </a:rPr>
-                        <a:t>22/06/2026</a:t>
-                      </a:r>
-                    </a:p>
-                  </a:txBody>
-                  <a:tcPr marT="0" marB="0" marL="38100" marR="38100" anchor="ctr">
-                    <a:solidFill>
-                      <a:srgbClr val="FFFFFF"/>
-                    </a:solidFill>
-                  </a:tcPr>
-                </a:tc>
-                <a:tc>
-                  <a:txBody>
-                    <a:bodyPr wrap="none"/>
-                    <a:lstStyle/>
-                    <a:p>
-                      <a:pPr algn="ctr"/>
-                      <a:r>
-                        <a:rPr sz="700" b="1">
-                          <a:solidFill>
-                            <a:srgbClr val="1A2340"/>
-                          </a:solidFill>
-                          <a:latin typeface="Calibri"/>
-                        </a:rPr>
-                        <a:t>100%</a:t>
-                      </a:r>
-                    </a:p>
-                  </a:txBody>
-                  <a:tcPr marT="0" marB="0" marL="38100" marR="38100" anchor="ctr">
-                    <a:solidFill>
-                      <a:srgbClr val="FFFFFF"/>
-                    </a:solidFill>
-                  </a:tcPr>
-                </a:tc>
-                <a:tc>
-                  <a:txBody>
-                    <a:bodyPr wrap="none"/>
-                    <a:lstStyle/>
-                    <a:p>
-                      <a:pPr algn="ctr"/>
-                      <a:r>
-                        <a:rPr sz="700" b="0">
-                          <a:solidFill>
-                            <a:srgbClr val="555555"/>
-                          </a:solidFill>
-                          <a:latin typeface="Calibri"/>
-                        </a:rPr>
-                        <a:t>100%</a:t>
-                      </a:r>
-                    </a:p>
-                  </a:txBody>
-                  <a:tcPr marT="0" marB="0" marL="38100" marR="38100" anchor="ctr">
-                    <a:solidFill>
-                      <a:srgbClr val="FFFFFF"/>
-                    </a:solidFill>
-                  </a:tcPr>
-                </a:tc>
-                <a:tc>
-                  <a:txBody>
-                    <a:bodyPr wrap="none"/>
-                    <a:lstStyle/>
-                    <a:p>
-                      <a:pPr algn="r"/>
-                      <a:r>
-                        <a:rPr sz="700" b="1">
-                          <a:solidFill>
-                            <a:srgbClr val="22C55E"/>
-                          </a:solidFill>
-                          <a:latin typeface="Calibri"/>
-                        </a:rPr>
-                        <a:t/>
-                      </a:r>
-                    </a:p>
-                  </a:txBody>
-                  <a:tcPr marT="0" marB="0" marL="38100" marR="38100" anchor="ctr">
-                    <a:solidFill>
-                      <a:srgbClr val="FFFFFF"/>
-                    </a:solidFill>
-                  </a:tcPr>
-                </a:tc>
-                <a:tc>
-                  <a:txBody>
-                    <a:bodyPr wrap="none"/>
-                    <a:lstStyle/>
-                    <a:p>
-                      <a:pPr algn="ctr"/>
-                      <a:r>
-                        <a:rPr sz="700" b="1">
-                          <a:solidFill>
-                            <a:srgbClr val="22C55E"/>
-                          </a:solidFill>
-                          <a:latin typeface="Calibri"/>
-                        </a:rPr>
-                        <a:t>Terminado</a:t>
-                      </a:r>
-                    </a:p>
-                  </a:txBody>
-                  <a:tcPr marT="0" marB="0" marL="38100" marR="38100" anchor="ctr">
-                    <a:solidFill>
-                      <a:srgbClr val="FFFFFF"/>
-                    </a:solidFill>
-                  </a:tcPr>
-                </a:tc>
-              </a:tr>
-              <a:tr h="187452">
-                <a:tc>
-                  <a:txBody>
-                    <a:bodyPr wrap="none"/>
-                    <a:lstStyle/>
-                    <a:p>
-                      <a:pPr algn="ctr"/>
-                      <a:r>
-                        <a:rPr sz="700" b="1">
-                          <a:solidFill>
-                            <a:srgbClr val="1A2340"/>
-                          </a:solidFill>
-                          <a:latin typeface="Calibri"/>
-                        </a:rPr>
-                        <a:t>Proyecto</a:t>
-                      </a:r>
-                    </a:p>
-                  </a:txBody>
-                  <a:tcPr marT="0" marB="0" marL="38100" marR="38100" anchor="ctr">
-                    <a:solidFill>
-                      <a:srgbClr val="F5F7FA"/>
-                    </a:solidFill>
-                  </a:tcPr>
-                </a:tc>
-                <a:tc>
-                  <a:txBody>
-                    <a:bodyPr wrap="none"/>
-                    <a:lstStyle/>
-                    <a:p>
-                      <a:pPr algn="l"/>
-                      <a:r>
-                        <a:rPr sz="700" b="0">
-                          <a:solidFill>
-                            <a:srgbClr val="1A2340"/>
-                          </a:solidFill>
-                          <a:latin typeface="Calibri"/>
-                        </a:rPr>
-                        <a:t>Cartera || Cambio de Pac de Timbrado</a:t>
-                      </a:r>
-                    </a:p>
-                  </a:txBody>
-                  <a:tcPr marT="0" marB="0" marL="38100" marR="38100" anchor="ctr">
-                    <a:solidFill>
-                      <a:srgbClr val="F5F7FA"/>
-                    </a:solidFill>
-                  </a:tcPr>
-                </a:tc>
-                <a:tc>
-                  <a:txBody>
-                    <a:bodyPr wrap="none"/>
-                    <a:lstStyle/>
-                    <a:p>
-                      <a:pPr algn="ctr"/>
-                      <a:r>
-                        <a:rPr sz="700" b="0">
-                          <a:solidFill>
-                            <a:srgbClr val="555555"/>
-                          </a:solidFill>
-                          <a:latin typeface="Calibri"/>
-                        </a:rPr>
-                        <a:t>07/07/2025</a:t>
-                      </a:r>
-                    </a:p>
-                  </a:txBody>
-                  <a:tcPr marT="0" marB="0" marL="38100" marR="38100" anchor="ctr">
-                    <a:solidFill>
-                      <a:srgbClr val="F5F7FA"/>
-                    </a:solidFill>
-                  </a:tcPr>
-                </a:tc>
-                <a:tc>
-                  <a:txBody>
-                    <a:bodyPr wrap="none"/>
-                    <a:lstStyle/>
-                    <a:p>
-                      <a:pPr algn="ctr"/>
-                      <a:r>
-                        <a:rPr sz="700" b="0">
-                          <a:solidFill>
-                            <a:srgbClr val="555555"/>
-                          </a:solidFill>
-                          <a:latin typeface="Calibri"/>
-                        </a:rPr>
-                        <a:t>25/02/2026</a:t>
-                      </a:r>
-                    </a:p>
-                  </a:txBody>
-                  <a:tcPr marT="0" marB="0" marL="38100" marR="38100" anchor="ctr">
-                    <a:solidFill>
-                      <a:srgbClr val="F5F7FA"/>
-                    </a:solidFill>
-                  </a:tcPr>
-                </a:tc>
-                <a:tc>
-                  <a:txBody>
-                    <a:bodyPr wrap="none"/>
-                    <a:lstStyle/>
-                    <a:p>
-                      <a:pPr algn="ctr"/>
-                      <a:r>
-                        <a:rPr sz="700" b="1">
-                          <a:solidFill>
-                            <a:srgbClr val="1A2340"/>
-                          </a:solidFill>
-                          <a:latin typeface="Calibri"/>
-                        </a:rPr>
-                        <a:t>100%</a:t>
-                      </a:r>
-                    </a:p>
-                  </a:txBody>
-                  <a:tcPr marT="0" marB="0" marL="38100" marR="38100" anchor="ctr">
-                    <a:solidFill>
-                      <a:srgbClr val="F5F7FA"/>
-                    </a:solidFill>
-                  </a:tcPr>
-                </a:tc>
-                <a:tc>
-                  <a:txBody>
-                    <a:bodyPr wrap="none"/>
-                    <a:lstStyle/>
-                    <a:p>
-                      <a:pPr algn="ctr"/>
-                      <a:r>
-                        <a:rPr sz="700" b="0">
-                          <a:solidFill>
-                            <a:srgbClr val="555555"/>
-                          </a:solidFill>
-                          <a:latin typeface="Calibri"/>
-                        </a:rPr>
-                        <a:t>100%</a:t>
-                      </a:r>
-                    </a:p>
-                  </a:txBody>
-                  <a:tcPr marT="0" marB="0" marL="38100" marR="38100" anchor="ctr">
-                    <a:solidFill>
-                      <a:srgbClr val="F5F7FA"/>
-                    </a:solidFill>
-                  </a:tcPr>
-                </a:tc>
-                <a:tc>
-                  <a:txBody>
-                    <a:bodyPr wrap="none"/>
-                    <a:lstStyle/>
-                    <a:p>
-                      <a:pPr algn="r"/>
-                      <a:r>
-                        <a:rPr sz="700" b="1">
-                          <a:solidFill>
-                            <a:srgbClr val="22C55E"/>
-                          </a:solidFill>
-                          <a:latin typeface="Calibri"/>
-                        </a:rPr>
-                        <a:t/>
-                      </a:r>
-                    </a:p>
-                  </a:txBody>
-                  <a:tcPr marT="0" marB="0" marL="38100" marR="38100" anchor="ctr">
-                    <a:solidFill>
-                      <a:srgbClr val="F5F7FA"/>
-                    </a:solidFill>
-                  </a:tcPr>
-                </a:tc>
-                <a:tc>
-                  <a:txBody>
-                    <a:bodyPr wrap="none"/>
-                    <a:lstStyle/>
-                    <a:p>
-                      <a:pPr algn="ctr"/>
-                      <a:r>
-                        <a:rPr sz="700" b="1">
-                          <a:solidFill>
-                            <a:srgbClr val="22C55E"/>
-                          </a:solidFill>
-                          <a:latin typeface="Calibri"/>
-                        </a:rPr>
-                        <a:t>Terminado</a:t>
-                      </a:r>
-                    </a:p>
-                  </a:txBody>
-                  <a:tcPr marT="0" marB="0" marL="38100" marR="38100" anchor="ctr">
-                    <a:solidFill>
-                      <a:srgbClr val="F5F7FA"/>
-                    </a:solidFill>
-                  </a:tcPr>
-                </a:tc>
-              </a:tr>
-              <a:tr h="187452">
-                <a:tc>
-                  <a:txBody>
-                    <a:bodyPr wrap="none"/>
-                    <a:lstStyle/>
-                    <a:p>
-                      <a:pPr algn="ctr"/>
-                      <a:r>
-                        <a:rPr sz="700" b="1">
-                          <a:solidFill>
-                            <a:srgbClr val="1A2340"/>
-                          </a:solidFill>
-                          <a:latin typeface="Calibri"/>
-                        </a:rPr>
-                        <a:t>Proyecto</a:t>
-                      </a:r>
-                    </a:p>
-                  </a:txBody>
-                  <a:tcPr marT="0" marB="0" marL="38100" marR="38100" anchor="ctr">
-                    <a:solidFill>
-                      <a:srgbClr val="FFFFFF"/>
-                    </a:solidFill>
-                  </a:tcPr>
-                </a:tc>
-                <a:tc>
-                  <a:txBody>
-                    <a:bodyPr wrap="none"/>
-                    <a:lstStyle/>
-                    <a:p>
-                      <a:pPr algn="l"/>
-                      <a:r>
-                        <a:rPr sz="700" b="0">
-                          <a:solidFill>
-                            <a:srgbClr val="1A2340"/>
-                          </a:solidFill>
-                          <a:latin typeface="Calibri"/>
-                        </a:rPr>
-                        <a:t>Operaciones Fleet || Nueva Instancia</a:t>
-                      </a:r>
-                    </a:p>
-                  </a:txBody>
-                  <a:tcPr marT="0" marB="0" marL="38100" marR="38100" anchor="ctr">
-                    <a:solidFill>
-                      <a:srgbClr val="FFFFFF"/>
-                    </a:solidFill>
-                  </a:tcPr>
-                </a:tc>
-                <a:tc>
-                  <a:txBody>
-                    <a:bodyPr wrap="none"/>
-                    <a:lstStyle/>
-                    <a:p>
-                      <a:pPr algn="ctr"/>
-                      <a:r>
-                        <a:rPr sz="700" b="0">
-                          <a:solidFill>
-                            <a:srgbClr val="555555"/>
-                          </a:solidFill>
-                          <a:latin typeface="Calibri"/>
-                        </a:rPr>
-                        <a:t>08/08/2025</a:t>
-                      </a:r>
-                    </a:p>
-                  </a:txBody>
-                  <a:tcPr marT="0" marB="0" marL="38100" marR="38100" anchor="ctr">
-                    <a:solidFill>
-                      <a:srgbClr val="FFFFFF"/>
-                    </a:solidFill>
-                  </a:tcPr>
-                </a:tc>
-                <a:tc>
-                  <a:txBody>
-                    <a:bodyPr wrap="none"/>
-                    <a:lstStyle/>
-                    <a:p>
-                      <a:pPr algn="ctr"/>
-                      <a:r>
-                        <a:rPr sz="700" b="0">
-                          <a:solidFill>
-                            <a:srgbClr val="555555"/>
-                          </a:solidFill>
-                          <a:latin typeface="Calibri"/>
-                        </a:rPr>
-                        <a:t>01/06/2026</a:t>
-                      </a:r>
-                    </a:p>
-                  </a:txBody>
-                  <a:tcPr marT="0" marB="0" marL="38100" marR="38100" anchor="ctr">
-                    <a:solidFill>
-                      <a:srgbClr val="FFFFFF"/>
-                    </a:solidFill>
-                  </a:tcPr>
-                </a:tc>
-                <a:tc>
-                  <a:txBody>
-                    <a:bodyPr wrap="none"/>
-                    <a:lstStyle/>
-                    <a:p>
-                      <a:pPr algn="ctr"/>
-                      <a:r>
-                        <a:rPr sz="700" b="1">
-                          <a:solidFill>
-                            <a:srgbClr val="1A2340"/>
-                          </a:solidFill>
-                          <a:latin typeface="Calibri"/>
-                        </a:rPr>
-                        <a:t>100%</a:t>
-                      </a:r>
-                    </a:p>
-                  </a:txBody>
-                  <a:tcPr marT="0" marB="0" marL="38100" marR="38100" anchor="ctr">
-                    <a:solidFill>
-                      <a:srgbClr val="FFFFFF"/>
-                    </a:solidFill>
-                  </a:tcPr>
-                </a:tc>
-                <a:tc>
-                  <a:txBody>
-                    <a:bodyPr wrap="none"/>
-                    <a:lstStyle/>
-                    <a:p>
-                      <a:pPr algn="ctr"/>
-                      <a:r>
-                        <a:rPr sz="700" b="0">
-                          <a:solidFill>
-                            <a:srgbClr val="555555"/>
-                          </a:solidFill>
-                          <a:latin typeface="Calibri"/>
-                        </a:rPr>
-                        <a:t>100%</a:t>
-                      </a:r>
-                    </a:p>
-                  </a:txBody>
-                  <a:tcPr marT="0" marB="0" marL="38100" marR="38100" anchor="ctr">
-                    <a:solidFill>
-                      <a:srgbClr val="FFFFFF"/>
-                    </a:solidFill>
-                  </a:tcPr>
-                </a:tc>
-                <a:tc>
-                  <a:txBody>
-                    <a:bodyPr wrap="none"/>
-                    <a:lstStyle/>
-                    <a:p>
-                      <a:pPr algn="r"/>
-                      <a:r>
-                        <a:rPr sz="700" b="1">
-                          <a:solidFill>
-                            <a:srgbClr val="22C55E"/>
-                          </a:solidFill>
-                          <a:latin typeface="Calibri"/>
-                        </a:rPr>
-                        <a:t/>
-                      </a:r>
-                    </a:p>
-                  </a:txBody>
-                  <a:tcPr marT="0" marB="0" marL="38100" marR="38100" anchor="ctr">
-                    <a:solidFill>
-                      <a:srgbClr val="FFFFFF"/>
-                    </a:solidFill>
-                  </a:tcPr>
-                </a:tc>
-                <a:tc>
-                  <a:txBody>
-                    <a:bodyPr wrap="none"/>
-                    <a:lstStyle/>
-                    <a:p>
-                      <a:pPr algn="ctr"/>
-                      <a:r>
-                        <a:rPr sz="700" b="1">
-                          <a:solidFill>
-                            <a:srgbClr val="22C55E"/>
-                          </a:solidFill>
-                          <a:latin typeface="Calibri"/>
-                        </a:rPr>
-                        <a:t>Terminado</a:t>
-                      </a:r>
-                    </a:p>
-                  </a:txBody>
-                  <a:tcPr marT="0" marB="0" marL="38100" marR="38100" anchor="ctr">
-                    <a:solidFill>
-                      <a:srgbClr val="FFFFFF"/>
-                    </a:solidFill>
-                  </a:tcPr>
-                </a:tc>
-              </a:tr>
-              <a:tr h="187452">
-                <a:tc>
-                  <a:txBody>
-                    <a:bodyPr wrap="none"/>
-                    <a:lstStyle/>
-                    <a:p>
-                      <a:pPr algn="ctr"/>
-                      <a:r>
-                        <a:rPr sz="700" b="1">
-                          <a:solidFill>
-                            <a:srgbClr val="1A2340"/>
-                          </a:solidFill>
-                          <a:latin typeface="Calibri"/>
-                        </a:rPr>
-                        <a:t>Proyecto</a:t>
-                      </a:r>
-                    </a:p>
-                  </a:txBody>
-                  <a:tcPr marT="0" marB="0" marL="38100" marR="38100" anchor="ctr">
-                    <a:solidFill>
-                      <a:srgbClr val="F5F7FA"/>
-                    </a:solidFill>
-                  </a:tcPr>
-                </a:tc>
-                <a:tc>
-                  <a:txBody>
-                    <a:bodyPr wrap="none"/>
-                    <a:lstStyle/>
-                    <a:p>
-                      <a:pPr algn="l"/>
-                      <a:r>
-                        <a:rPr sz="700" b="0">
-                          <a:solidFill>
-                            <a:srgbClr val="1A2340"/>
-                          </a:solidFill>
-                          <a:latin typeface="Calibri"/>
-                        </a:rPr>
-                        <a:t>Tesoreria || Adcontent H2H</a:t>
-                      </a:r>
-                    </a:p>
-                  </a:txBody>
-                  <a:tcPr marT="0" marB="0" marL="38100" marR="38100" anchor="ctr">
-                    <a:solidFill>
-                      <a:srgbClr val="F5F7FA"/>
-                    </a:solidFill>
-                  </a:tcPr>
-                </a:tc>
-                <a:tc>
-                  <a:txBody>
-                    <a:bodyPr wrap="none"/>
-                    <a:lstStyle/>
-                    <a:p>
-                      <a:pPr algn="ctr"/>
-                      <a:r>
-                        <a:rPr sz="700" b="0">
-                          <a:solidFill>
-                            <a:srgbClr val="555555"/>
-                          </a:solidFill>
-                          <a:latin typeface="Calibri"/>
-                        </a:rPr>
-                        <a:t>07/04/2026</a:t>
-                      </a:r>
-                    </a:p>
-                  </a:txBody>
-                  <a:tcPr marT="0" marB="0" marL="38100" marR="38100" anchor="ctr">
-                    <a:solidFill>
-                      <a:srgbClr val="F5F7FA"/>
-                    </a:solidFill>
-                  </a:tcPr>
-                </a:tc>
-                <a:tc>
-                  <a:txBody>
-                    <a:bodyPr wrap="none"/>
-                    <a:lstStyle/>
-                    <a:p>
-                      <a:pPr algn="ctr"/>
-                      <a:r>
-                        <a:rPr sz="700" b="0">
-                          <a:solidFill>
-                            <a:srgbClr val="555555"/>
-                          </a:solidFill>
-                          <a:latin typeface="Calibri"/>
-                        </a:rPr>
-                        <a:t>26/08/2026</a:t>
-                      </a:r>
-                    </a:p>
-                  </a:txBody>
-                  <a:tcPr marT="0" marB="0" marL="38100" marR="38100" anchor="ctr">
-                    <a:solidFill>
-                      <a:srgbClr val="F5F7FA"/>
-                    </a:solidFill>
-                  </a:tcPr>
-                </a:tc>
-                <a:tc>
-                  <a:txBody>
-                    <a:bodyPr wrap="none"/>
-                    <a:lstStyle/>
-                    <a:p>
-                      <a:pPr algn="ctr"/>
-                      <a:r>
-                        <a:rPr sz="700" b="1">
-                          <a:solidFill>
-                            <a:srgbClr val="1A2340"/>
-                          </a:solidFill>
-                          <a:latin typeface="Calibri"/>
-                        </a:rPr>
-                        <a:t>22%</a:t>
-                      </a:r>
-                    </a:p>
-                  </a:txBody>
-                  <a:tcPr marT="0" marB="0" marL="38100" marR="38100" anchor="ctr">
-                    <a:solidFill>
-                      <a:srgbClr val="F5F7FA"/>
-                    </a:solidFill>
-                  </a:tcPr>
-                </a:tc>
-                <a:tc>
-                  <a:txBody>
-                    <a:bodyPr wrap="none"/>
-                    <a:lstStyle/>
-                    <a:p>
-                      <a:pPr algn="ctr"/>
-                      <a:r>
-                        <a:rPr sz="700" b="0">
-                          <a:solidFill>
-                            <a:srgbClr val="555555"/>
-                          </a:solidFill>
-                          <a:latin typeface="Calibri"/>
-                        </a:rPr>
-                        <a:t>63%</a:t>
-                      </a:r>
-                    </a:p>
-                  </a:txBody>
-                  <a:tcPr marT="0" marB="0" marL="38100" marR="38100" anchor="ctr">
-                    <a:solidFill>
-                      <a:srgbClr val="F5F7FA"/>
-                    </a:solidFill>
-                  </a:tcPr>
-                </a:tc>
-                <a:tc>
-                  <a:txBody>
-                    <a:bodyPr wrap="none"/>
-                    <a:lstStyle/>
-                    <a:p>
-                      <a:pPr algn="r"/>
-                      <a:r>
-                        <a:rPr sz="700" b="1">
-                          <a:solidFill>
-                            <a:srgbClr val="EF4444"/>
-                          </a:solidFill>
-                          <a:latin typeface="Calibri"/>
-                        </a:rPr>
-                        <a:t/>
-                      </a:r>
-                    </a:p>
-                  </a:txBody>
-                  <a:tcPr marT="0" marB="0" marL="38100" marR="38100" anchor="ctr">
-                    <a:solidFill>
-                      <a:srgbClr val="F5F7FA"/>
-                    </a:solidFill>
-                  </a:tcPr>
-                </a:tc>
-                <a:tc>
-                  <a:txBody>
-                    <a:bodyPr wrap="none"/>
-                    <a:lstStyle/>
-                    <a:p>
-                      <a:pPr algn="ctr"/>
-                      <a:r>
-                        <a:rPr sz="700" b="1">
-                          <a:solidFill>
-                            <a:srgbClr val="EF4444"/>
-                          </a:solidFill>
-                          <a:latin typeface="Calibri"/>
-                        </a:rPr>
-                        <a:t>Atrasado</a:t>
-                      </a:r>
-                    </a:p>
-                  </a:txBody>
-                  <a:tcPr marT="0" marB="0" marL="38100" marR="38100" anchor="ctr">
-                    <a:solidFill>
-                      <a:srgbClr val="F5F7FA"/>
-                    </a:solidFill>
-                  </a:tcPr>
-                </a:tc>
-              </a:tr>
-              <a:tr h="187452">
-                <a:tc>
-                  <a:txBody>
-                    <a:bodyPr wrap="none"/>
-                    <a:lstStyle/>
-                    <a:p>
-                      <a:pPr algn="ctr"/>
-                      <a:r>
-                        <a:rPr sz="700" b="1">
-                          <a:solidFill>
-                            <a:srgbClr val="1A2340"/>
-                          </a:solidFill>
-                          <a:latin typeface="Calibri"/>
-                        </a:rPr>
-                        <a:t>Proyecto</a:t>
-                      </a:r>
-                    </a:p>
-                  </a:txBody>
-                  <a:tcPr marT="0" marB="0" marL="38100" marR="38100" anchor="ctr">
-                    <a:solidFill>
-                      <a:srgbClr val="FFFFFF"/>
-                    </a:solidFill>
-                  </a:tcPr>
-                </a:tc>
-                <a:tc>
-                  <a:txBody>
-                    <a:bodyPr wrap="none"/>
-                    <a:lstStyle/>
-                    <a:p>
-                      <a:pPr algn="l"/>
-                      <a:r>
-                        <a:rPr sz="700" b="0">
-                          <a:solidFill>
-                            <a:srgbClr val="1A2340"/>
-                          </a:solidFill>
-                          <a:latin typeface="Calibri"/>
-                        </a:rPr>
-                        <a:t>Talleres || Integración Mecanica Mx - SAE</a:t>
-                      </a:r>
-                    </a:p>
-                  </a:txBody>
-                  <a:tcPr marT="0" marB="0" marL="38100" marR="38100" anchor="ctr">
-                    <a:solidFill>
-                      <a:srgbClr val="FFFFFF"/>
-                    </a:solidFill>
-                  </a:tcPr>
-                </a:tc>
-                <a:tc>
-                  <a:txBody>
-                    <a:bodyPr wrap="none"/>
-                    <a:lstStyle/>
-                    <a:p>
-                      <a:pPr algn="ctr"/>
-                      <a:r>
-                        <a:rPr sz="700" b="0">
-                          <a:solidFill>
-                            <a:srgbClr val="555555"/>
-                          </a:solidFill>
-                          <a:latin typeface="Calibri"/>
-                        </a:rPr>
-                        <a:t>20/04/2026</a:t>
-                      </a:r>
-                    </a:p>
-                  </a:txBody>
-                  <a:tcPr marT="0" marB="0" marL="38100" marR="38100" anchor="ctr">
-                    <a:solidFill>
-                      <a:srgbClr val="FFFFFF"/>
-                    </a:solidFill>
-                  </a:tcPr>
-                </a:tc>
-                <a:tc>
-                  <a:txBody>
-                    <a:bodyPr wrap="none"/>
-                    <a:lstStyle/>
-                    <a:p>
-                      <a:pPr algn="ctr"/>
-                      <a:r>
-                        <a:rPr sz="700" b="0">
-                          <a:solidFill>
-                            <a:srgbClr val="555555"/>
-                          </a:solidFill>
-                          <a:latin typeface="Calibri"/>
-                        </a:rPr>
-                        <a:t>20/07/2026</a:t>
-                      </a:r>
-                    </a:p>
-                  </a:txBody>
-                  <a:tcPr marT="0" marB="0" marL="38100" marR="38100" anchor="ctr">
-                    <a:solidFill>
-                      <a:srgbClr val="FFFFFF"/>
-                    </a:solidFill>
-                  </a:tcPr>
-                </a:tc>
-                <a:tc>
-                  <a:txBody>
-                    <a:bodyPr wrap="none"/>
-                    <a:lstStyle/>
-                    <a:p>
-                      <a:pPr algn="ctr"/>
-                      <a:r>
-                        <a:rPr sz="700" b="1">
-                          <a:solidFill>
-                            <a:srgbClr val="1A2340"/>
-                          </a:solidFill>
-                          <a:latin typeface="Calibri"/>
-                        </a:rPr>
-                        <a:t>80%</a:t>
-                      </a:r>
-                    </a:p>
-                  </a:txBody>
-                  <a:tcPr marT="0" marB="0" marL="38100" marR="38100" anchor="ctr">
-                    <a:solidFill>
-                      <a:srgbClr val="FFFFFF"/>
-                    </a:solidFill>
-                  </a:tcPr>
-                </a:tc>
-                <a:tc>
-                  <a:txBody>
-                    <a:bodyPr wrap="none"/>
-                    <a:lstStyle/>
-                    <a:p>
-                      <a:pPr algn="ctr"/>
-                      <a:r>
-                        <a:rPr sz="700" b="0">
-                          <a:solidFill>
-                            <a:srgbClr val="555555"/>
-                          </a:solidFill>
-                          <a:latin typeface="Calibri"/>
-                        </a:rPr>
-                        <a:t>84%</a:t>
-                      </a:r>
-                    </a:p>
-                  </a:txBody>
-                  <a:tcPr marT="0" marB="0" marL="38100" marR="38100" anchor="ctr">
-                    <a:solidFill>
-                      <a:srgbClr val="FFFFFF"/>
-                    </a:solidFill>
-                  </a:tcPr>
-                </a:tc>
-                <a:tc>
-                  <a:txBody>
-                    <a:bodyPr wrap="none"/>
-                    <a:lstStyle/>
-                    <a:p>
-                      <a:pPr algn="r"/>
-                      <a:r>
-                        <a:rPr sz="700" b="1">
-                          <a:solidFill>
-                            <a:srgbClr val="F59E0B"/>
-                          </a:solidFill>
-                          <a:latin typeface="Calibri"/>
-                        </a:rPr>
-                        <a:t/>
-                      </a:r>
-                    </a:p>
-                  </a:txBody>
-                  <a:tcPr marT="0" marB="0" marL="38100" marR="38100" anchor="ctr">
-                    <a:solidFill>
-                      <a:srgbClr val="FFFFFF"/>
-                    </a:solidFill>
-                  </a:tcPr>
-                </a:tc>
-                <a:tc>
-                  <a:txBody>
-                    <a:bodyPr wrap="none"/>
-                    <a:lstStyle/>
-                    <a:p>
-                      <a:pPr algn="ctr"/>
-                      <a:r>
-                        <a:rPr sz="700" b="1">
-                          <a:solidFill>
-                            <a:srgbClr val="F59E0B"/>
-                          </a:solidFill>
-                          <a:latin typeface="Calibri"/>
-                        </a:rPr>
-                        <a:t>Riesgo de atraso</a:t>
-                      </a:r>
-                    </a:p>
-                  </a:txBody>
-                  <a:tcPr marT="0" marB="0" marL="38100" marR="38100" anchor="ctr">
-                    <a:solidFill>
-                      <a:srgbClr val="FFFFFF"/>
-                    </a:solidFill>
-                  </a:tcPr>
-                </a:tc>
-              </a:tr>
-              <a:tr h="187452">
-                <a:tc>
-                  <a:txBody>
-                    <a:bodyPr wrap="none"/>
-                    <a:lstStyle/>
-                    <a:p>
-                      <a:pPr algn="ctr"/>
-                      <a:r>
-                        <a:rPr sz="700" b="1">
-                          <a:solidFill>
-                            <a:srgbClr val="1A2340"/>
-                          </a:solidFill>
-                          <a:latin typeface="Calibri"/>
-                        </a:rPr>
-                        <a:t>Proyecto</a:t>
-                      </a:r>
-                    </a:p>
-                  </a:txBody>
-                  <a:tcPr marT="0" marB="0" marL="38100" marR="38100" anchor="ctr">
-                    <a:solidFill>
-                      <a:srgbClr val="F5F7FA"/>
-                    </a:solidFill>
-                  </a:tcPr>
-                </a:tc>
-                <a:tc>
-                  <a:txBody>
-                    <a:bodyPr wrap="none"/>
-                    <a:lstStyle/>
-                    <a:p>
-                      <a:pPr algn="l"/>
-                      <a:r>
-                        <a:rPr sz="700" b="0">
-                          <a:solidFill>
-                            <a:srgbClr val="1A2340"/>
-                          </a:solidFill>
-                          <a:latin typeface="Calibri"/>
-                        </a:rPr>
-                        <a:t>Contabilidad || Integración Mecanica-SAE (Fase…</a:t>
-                      </a:r>
-                    </a:p>
-                  </a:txBody>
-                  <a:tcPr marT="0" marB="0" marL="38100" marR="38100" anchor="ctr">
-                    <a:solidFill>
-                      <a:srgbClr val="F5F7FA"/>
-                    </a:solidFill>
-                  </a:tcPr>
-                </a:tc>
-                <a:tc>
-                  <a:txBody>
-                    <a:bodyPr wrap="none"/>
-                    <a:lstStyle/>
-                    <a:p>
-                      <a:pPr algn="ctr"/>
-                      <a:r>
-                        <a:rPr sz="700" b="0">
-                          <a:solidFill>
-                            <a:srgbClr val="555555"/>
-                          </a:solidFill>
-                          <a:latin typeface="Calibri"/>
-                        </a:rPr>
-                        <a:t>21/04/2026</a:t>
-                      </a:r>
-                    </a:p>
-                  </a:txBody>
-                  <a:tcPr marT="0" marB="0" marL="38100" marR="38100" anchor="ctr">
-                    <a:solidFill>
-                      <a:srgbClr val="F5F7FA"/>
-                    </a:solidFill>
-                  </a:tcPr>
-                </a:tc>
-                <a:tc>
-                  <a:txBody>
-                    <a:bodyPr wrap="none"/>
-                    <a:lstStyle/>
-                    <a:p>
-                      <a:pPr algn="ctr"/>
-                      <a:r>
-                        <a:rPr sz="700" b="0">
-                          <a:solidFill>
-                            <a:srgbClr val="555555"/>
-                          </a:solidFill>
-                          <a:latin typeface="Calibri"/>
-                        </a:rPr>
-                        <a:t>12/06/2026</a:t>
-                      </a:r>
-                    </a:p>
-                  </a:txBody>
-                  <a:tcPr marT="0" marB="0" marL="38100" marR="38100" anchor="ctr">
-                    <a:solidFill>
-                      <a:srgbClr val="F5F7FA"/>
-                    </a:solidFill>
-                  </a:tcPr>
-                </a:tc>
-                <a:tc>
-                  <a:txBody>
-                    <a:bodyPr wrap="none"/>
-                    <a:lstStyle/>
-                    <a:p>
-                      <a:pPr algn="ctr"/>
-                      <a:r>
-                        <a:rPr sz="700" b="1">
-                          <a:solidFill>
-                            <a:srgbClr val="1A2340"/>
-                          </a:solidFill>
-                          <a:latin typeface="Calibri"/>
-                        </a:rPr>
-                        <a:t>99%</a:t>
-                      </a:r>
-                    </a:p>
-                  </a:txBody>
-                  <a:tcPr marT="0" marB="0" marL="38100" marR="38100" anchor="ctr">
-                    <a:solidFill>
-                      <a:srgbClr val="F5F7FA"/>
-                    </a:solidFill>
-                  </a:tcPr>
-                </a:tc>
-                <a:tc>
-                  <a:txBody>
-                    <a:bodyPr wrap="none"/>
-                    <a:lstStyle/>
-                    <a:p>
-                      <a:pPr algn="ctr"/>
-                      <a:r>
-                        <a:rPr sz="700" b="0">
-                          <a:solidFill>
-                            <a:srgbClr val="555555"/>
-                          </a:solidFill>
-                          <a:latin typeface="Calibri"/>
-                        </a:rPr>
-                        <a:t>100%</a:t>
-                      </a:r>
-                    </a:p>
-                  </a:txBody>
-                  <a:tcPr marT="0" marB="0" marL="38100" marR="38100" anchor="ctr">
-                    <a:solidFill>
-                      <a:srgbClr val="F5F7FA"/>
-                    </a:solidFill>
-                  </a:tcPr>
-                </a:tc>
-                <a:tc>
-                  <a:txBody>
-                    <a:bodyPr wrap="none"/>
-                    <a:lstStyle/>
-                    <a:p>
-                      <a:pPr algn="r"/>
-                      <a:r>
-                        <a:rPr sz="700" b="1">
-                          <a:solidFill>
-                            <a:srgbClr val="EF4444"/>
-                          </a:solidFill>
-                          <a:latin typeface="Calibri"/>
-                        </a:rPr>
-                        <a:t/>
-                      </a:r>
-                    </a:p>
-                  </a:txBody>
-                  <a:tcPr marT="0" marB="0" marL="38100" marR="38100" anchor="ctr">
-                    <a:solidFill>
-                      <a:srgbClr val="F5F7FA"/>
-                    </a:solidFill>
-                  </a:tcPr>
-                </a:tc>
-                <a:tc>
-                  <a:txBody>
-                    <a:bodyPr wrap="none"/>
-                    <a:lstStyle/>
-                    <a:p>
-                      <a:pPr algn="ctr"/>
-                      <a:r>
-                        <a:rPr sz="700" b="1">
-                          <a:solidFill>
-                            <a:srgbClr val="EF4444"/>
-                          </a:solidFill>
-                          <a:latin typeface="Calibri"/>
-                        </a:rPr>
-                        <a:t>Atrasado</a:t>
-                      </a:r>
-                    </a:p>
-                  </a:txBody>
-                  <a:tcPr marT="0" marB="0" marL="38100" marR="38100" anchor="ctr">
-                    <a:solidFill>
-                      <a:srgbClr val="F5F7FA"/>
-                    </a:solidFill>
-                  </a:tcPr>
-                </a:tc>
-              </a:tr>
-              <a:tr h="187452">
-                <a:tc>
-                  <a:txBody>
-                    <a:bodyPr wrap="none"/>
-                    <a:lstStyle/>
-                    <a:p>
-                      <a:pPr algn="ctr"/>
-                      <a:r>
-                        <a:rPr sz="700" b="1">
-                          <a:solidFill>
-                            <a:srgbClr val="1A2340"/>
-                          </a:solidFill>
-                          <a:latin typeface="Calibri"/>
-                        </a:rPr>
-                        <a:t>Proyecto</a:t>
-                      </a:r>
-                    </a:p>
-                  </a:txBody>
-                  <a:tcPr marT="0" marB="0" marL="38100" marR="38100" anchor="ctr">
-                    <a:solidFill>
-                      <a:srgbClr val="FFFFFF"/>
-                    </a:solidFill>
-                  </a:tcPr>
-                </a:tc>
-                <a:tc>
-                  <a:txBody>
-                    <a:bodyPr wrap="none"/>
-                    <a:lstStyle/>
-                    <a:p>
-                      <a:pPr algn="l"/>
-                      <a:r>
-                        <a:rPr sz="700" b="0">
-                          <a:solidFill>
-                            <a:srgbClr val="1A2340"/>
-                          </a:solidFill>
-                          <a:latin typeface="Calibri"/>
-                        </a:rPr>
-                        <a:t>DTI || Integración de sistemas</a:t>
-                      </a:r>
-                    </a:p>
-                  </a:txBody>
-                  <a:tcPr marT="0" marB="0" marL="38100" marR="38100" anchor="ctr">
-                    <a:solidFill>
-                      <a:srgbClr val="FFFFFF"/>
-                    </a:solidFill>
-                  </a:tcPr>
-                </a:tc>
-                <a:tc>
-                  <a:txBody>
-                    <a:bodyPr wrap="none"/>
-                    <a:lstStyle/>
-                    <a:p>
-                      <a:pPr algn="ctr"/>
-                      <a:r>
-                        <a:rPr sz="700" b="0">
-                          <a:solidFill>
-                            <a:srgbClr val="555555"/>
-                          </a:solidFill>
-                          <a:latin typeface="Calibri"/>
-                        </a:rPr>
-                        <a:t>01/06/2026</a:t>
-                      </a:r>
-                    </a:p>
-                  </a:txBody>
-                  <a:tcPr marT="0" marB="0" marL="38100" marR="38100" anchor="ctr">
-                    <a:solidFill>
-                      <a:srgbClr val="FFFFFF"/>
-                    </a:solidFill>
-                  </a:tcPr>
-                </a:tc>
-                <a:tc>
-                  <a:txBody>
-                    <a:bodyPr wrap="none"/>
-                    <a:lstStyle/>
-                    <a:p>
-                      <a:pPr algn="ctr"/>
-                      <a:r>
-                        <a:rPr sz="700" b="0">
-                          <a:solidFill>
-                            <a:srgbClr val="555555"/>
-                          </a:solidFill>
-                          <a:latin typeface="Calibri"/>
-                        </a:rPr>
-                        <a:t>23/09/2026</a:t>
-                      </a:r>
-                    </a:p>
-                  </a:txBody>
-                  <a:tcPr marT="0" marB="0" marL="38100" marR="38100" anchor="ctr">
-                    <a:solidFill>
-                      <a:srgbClr val="FFFFFF"/>
-                    </a:solidFill>
-                  </a:tcPr>
-                </a:tc>
-                <a:tc>
-                  <a:txBody>
-                    <a:bodyPr wrap="none"/>
-                    <a:lstStyle/>
-                    <a:p>
-                      <a:pPr algn="ctr"/>
-                      <a:r>
-                        <a:rPr sz="700" b="1">
-                          <a:solidFill>
-                            <a:srgbClr val="1A2340"/>
-                          </a:solidFill>
-                          <a:latin typeface="Calibri"/>
-                        </a:rPr>
-                        <a:t>31%</a:t>
-                      </a:r>
-                    </a:p>
-                  </a:txBody>
-                  <a:tcPr marT="0" marB="0" marL="38100" marR="38100" anchor="ctr">
-                    <a:solidFill>
-                      <a:srgbClr val="FFFFFF"/>
-                    </a:solidFill>
-                  </a:tcPr>
-                </a:tc>
-                <a:tc>
-                  <a:txBody>
-                    <a:bodyPr wrap="none"/>
-                    <a:lstStyle/>
-                    <a:p>
-                      <a:pPr algn="ctr"/>
-                      <a:r>
-                        <a:rPr sz="700" b="0">
-                          <a:solidFill>
-                            <a:srgbClr val="555555"/>
-                          </a:solidFill>
-                          <a:latin typeface="Calibri"/>
-                        </a:rPr>
-                        <a:t>30%</a:t>
-                      </a:r>
-                    </a:p>
-                  </a:txBody>
-                  <a:tcPr marT="0" marB="0" marL="38100" marR="38100" anchor="ctr">
-                    <a:solidFill>
-                      <a:srgbClr val="FFFFFF"/>
-                    </a:solidFill>
-                  </a:tcPr>
-                </a:tc>
-                <a:tc>
-                  <a:txBody>
-                    <a:bodyPr wrap="none"/>
-                    <a:lstStyle/>
-                    <a:p>
-                      <a:pPr algn="r"/>
-                      <a:r>
-                        <a:rPr sz="700" b="1">
-                          <a:solidFill>
-                            <a:srgbClr val="22C55E"/>
-                          </a:solidFill>
-                          <a:latin typeface="Calibri"/>
-                        </a:rPr>
-                        <a:t/>
-                      </a:r>
-                    </a:p>
-                  </a:txBody>
-                  <a:tcPr marT="0" marB="0" marL="38100" marR="38100" anchor="ctr">
-                    <a:solidFill>
-                      <a:srgbClr val="FFFFFF"/>
-                    </a:solidFill>
-                  </a:tcPr>
-                </a:tc>
-                <a:tc>
-                  <a:txBody>
-                    <a:bodyPr wrap="none"/>
-                    <a:lstStyle/>
-                    <a:p>
-                      <a:pPr algn="ctr"/>
-                      <a:r>
-                        <a:rPr sz="700" b="1">
-                          <a:solidFill>
-                            <a:srgbClr val="22C55E"/>
-                          </a:solidFill>
-                          <a:latin typeface="Calibri"/>
-                        </a:rPr>
-                        <a:t>A tiempo</a:t>
-                      </a:r>
-                    </a:p>
-                  </a:txBody>
-                  <a:tcPr marT="0" marB="0" marL="38100" marR="38100" anchor="ctr">
-                    <a:solidFill>
-                      <a:srgbClr val="FFFFFF"/>
-                    </a:solidFill>
-                  </a:tcPr>
-                </a:tc>
-              </a:tr>
-              <a:tr h="187452">
-                <a:tc>
-                  <a:txBody>
-                    <a:bodyPr wrap="none"/>
-                    <a:lstStyle/>
-                    <a:p>
-                      <a:pPr algn="ctr"/>
-                      <a:r>
-                        <a:rPr sz="700" b="1">
-                          <a:solidFill>
-                            <a:srgbClr val="1A2340"/>
-                          </a:solidFill>
-                          <a:latin typeface="Calibri"/>
-                        </a:rPr>
-                        <a:t>Proyecto</a:t>
-                      </a:r>
-                    </a:p>
-                  </a:txBody>
-                  <a:tcPr marT="0" marB="0" marL="38100" marR="38100" anchor="ctr">
-                    <a:solidFill>
-                      <a:srgbClr val="F5F7FA"/>
-                    </a:solidFill>
-                  </a:tcPr>
-                </a:tc>
-                <a:tc>
-                  <a:txBody>
-                    <a:bodyPr wrap="none"/>
-                    <a:lstStyle/>
-                    <a:p>
-                      <a:pPr algn="l"/>
-                      <a:r>
-                        <a:rPr sz="700" b="0">
-                          <a:solidFill>
-                            <a:srgbClr val="1A2340"/>
-                          </a:solidFill>
-                          <a:latin typeface="Calibri"/>
-                        </a:rPr>
-                        <a:t>Capital Humano || BUK Personalizados Fase 2</a:t>
-                      </a:r>
-                    </a:p>
-                  </a:txBody>
-                  <a:tcPr marT="0" marB="0" marL="38100" marR="38100" anchor="ctr">
-                    <a:solidFill>
-                      <a:srgbClr val="F5F7FA"/>
-                    </a:solidFill>
-                  </a:tcPr>
-                </a:tc>
-                <a:tc>
-                  <a:txBody>
-                    <a:bodyPr wrap="none"/>
-                    <a:lstStyle/>
-                    <a:p>
-                      <a:pPr algn="ctr"/>
-                      <a:r>
-                        <a:rPr sz="700" b="0">
-                          <a:solidFill>
-                            <a:srgbClr val="555555"/>
-                          </a:solidFill>
-                          <a:latin typeface="Calibri"/>
-                        </a:rPr>
-                        <a:t>08/06/2026</a:t>
-                      </a:r>
-                    </a:p>
-                  </a:txBody>
-                  <a:tcPr marT="0" marB="0" marL="38100" marR="38100" anchor="ctr">
-                    <a:solidFill>
-                      <a:srgbClr val="F5F7FA"/>
-                    </a:solidFill>
-                  </a:tcPr>
-                </a:tc>
-                <a:tc>
-                  <a:txBody>
-                    <a:bodyPr wrap="none"/>
-                    <a:lstStyle/>
-                    <a:p>
-                      <a:pPr algn="ctr"/>
-                      <a:r>
-                        <a:rPr sz="700" b="0">
-                          <a:solidFill>
-                            <a:srgbClr val="555555"/>
-                          </a:solidFill>
-                          <a:latin typeface="Calibri"/>
-                        </a:rPr>
-                        <a:t>11/08/2026</a:t>
-                      </a:r>
-                    </a:p>
-                  </a:txBody>
-                  <a:tcPr marT="0" marB="0" marL="38100" marR="38100" anchor="ctr">
-                    <a:solidFill>
-                      <a:srgbClr val="F5F7FA"/>
-                    </a:solidFill>
-                  </a:tcPr>
-                </a:tc>
-                <a:tc>
-                  <a:txBody>
-                    <a:bodyPr wrap="none"/>
-                    <a:lstStyle/>
-                    <a:p>
-                      <a:pPr algn="ctr"/>
-                      <a:r>
-                        <a:rPr sz="700" b="1">
-                          <a:solidFill>
-                            <a:srgbClr val="1A2340"/>
-                          </a:solidFill>
-                          <a:latin typeface="Calibri"/>
-                        </a:rPr>
-                        <a:t>74%</a:t>
-                      </a:r>
-                    </a:p>
-                  </a:txBody>
-                  <a:tcPr marT="0" marB="0" marL="38100" marR="38100" anchor="ctr">
-                    <a:solidFill>
-                      <a:srgbClr val="F5F7FA"/>
-                    </a:solidFill>
-                  </a:tcPr>
-                </a:tc>
-                <a:tc>
-                  <a:txBody>
-                    <a:bodyPr wrap="none"/>
-                    <a:lstStyle/>
-                    <a:p>
-                      <a:pPr algn="ctr"/>
-                      <a:r>
-                        <a:rPr sz="700" b="0">
-                          <a:solidFill>
-                            <a:srgbClr val="555555"/>
-                          </a:solidFill>
-                          <a:latin typeface="Calibri"/>
-                        </a:rPr>
-                        <a:t>43%</a:t>
-                      </a:r>
-                    </a:p>
-                  </a:txBody>
-                  <a:tcPr marT="0" marB="0" marL="38100" marR="38100" anchor="ctr">
-                    <a:solidFill>
-                      <a:srgbClr val="F5F7FA"/>
-                    </a:solidFill>
-                  </a:tcPr>
-                </a:tc>
-                <a:tc>
-                  <a:txBody>
-                    <a:bodyPr wrap="none"/>
-                    <a:lstStyle/>
-                    <a:p>
-                      <a:pPr algn="r"/>
-                      <a:r>
-                        <a:rPr sz="700" b="1">
-                          <a:solidFill>
-                            <a:srgbClr val="22C55E"/>
-                          </a:solidFill>
-                          <a:latin typeface="Calibri"/>
-                        </a:rPr>
-                        <a:t/>
-                      </a:r>
-                    </a:p>
-                  </a:txBody>
-                  <a:tcPr marT="0" marB="0" marL="38100" marR="38100" anchor="ctr">
-                    <a:solidFill>
-                      <a:srgbClr val="F5F7FA"/>
-                    </a:solidFill>
-                  </a:tcPr>
-                </a:tc>
-                <a:tc>
-                  <a:txBody>
-                    <a:bodyPr wrap="none"/>
-                    <a:lstStyle/>
-                    <a:p>
-                      <a:pPr algn="ctr"/>
-                      <a:r>
-                        <a:rPr sz="700" b="1">
-                          <a:solidFill>
-                            <a:srgbClr val="22C55E"/>
-                          </a:solidFill>
-                          <a:latin typeface="Calibri"/>
-                        </a:rPr>
-                        <a:t>A tiempo</a:t>
-                      </a:r>
-                    </a:p>
-                  </a:txBody>
-                  <a:tcPr marT="0" marB="0" marL="38100" marR="38100" anchor="ctr">
-                    <a:solidFill>
-                      <a:srgbClr val="F5F7FA"/>
-                    </a:solidFill>
-                  </a:tcPr>
-                </a:tc>
-              </a:tr>
-              <a:tr h="187452">
-                <a:tc>
-                  <a:txBody>
-                    <a:bodyPr wrap="none"/>
-                    <a:lstStyle/>
-                    <a:p>
-                      <a:pPr algn="ctr"/>
-                      <a:r>
-                        <a:rPr sz="700" b="1">
-                          <a:solidFill>
-                            <a:srgbClr val="1A2340"/>
-                          </a:solidFill>
-                          <a:latin typeface="Calibri"/>
-                        </a:rPr>
-                        <a:t>Proyecto</a:t>
-                      </a:r>
-                    </a:p>
-                  </a:txBody>
-                  <a:tcPr marT="0" marB="0" marL="38100" marR="38100" anchor="ctr">
-                    <a:solidFill>
-                      <a:srgbClr val="FFFFFF"/>
-                    </a:solidFill>
-                  </a:tcPr>
-                </a:tc>
-                <a:tc>
-                  <a:txBody>
-                    <a:bodyPr wrap="none"/>
-                    <a:lstStyle/>
-                    <a:p>
-                      <a:pPr algn="l"/>
-                      <a:r>
-                        <a:rPr sz="700" b="0">
-                          <a:solidFill>
-                            <a:srgbClr val="1A2340"/>
-                          </a:solidFill>
-                          <a:latin typeface="Calibri"/>
-                        </a:rPr>
-                        <a:t>Operaciones Fleet || Adcontent - Sfleet</a:t>
-                      </a:r>
-                    </a:p>
-                  </a:txBody>
-                  <a:tcPr marT="0" marB="0" marL="38100" marR="38100" anchor="ctr">
-                    <a:solidFill>
-                      <a:srgbClr val="FFFFFF"/>
-                    </a:solidFill>
-                  </a:tcPr>
-                </a:tc>
-                <a:tc>
-                  <a:txBody>
-                    <a:bodyPr wrap="none"/>
-                    <a:lstStyle/>
-                    <a:p>
-                      <a:pPr algn="ctr"/>
-                      <a:r>
-                        <a:rPr sz="700" b="0">
-                          <a:solidFill>
-                            <a:srgbClr val="555555"/>
-                          </a:solidFill>
-                          <a:latin typeface="Calibri"/>
-                        </a:rPr>
-                        <a:t>15/06/2026</a:t>
-                      </a:r>
-                    </a:p>
-                  </a:txBody>
-                  <a:tcPr marT="0" marB="0" marL="38100" marR="38100" anchor="ctr">
-                    <a:solidFill>
-                      <a:srgbClr val="FFFFFF"/>
-                    </a:solidFill>
-                  </a:tcPr>
-                </a:tc>
-                <a:tc>
-                  <a:txBody>
-                    <a:bodyPr wrap="none"/>
-                    <a:lstStyle/>
-                    <a:p>
-                      <a:pPr algn="ctr"/>
-                      <a:r>
-                        <a:rPr sz="700" b="0">
-                          <a:solidFill>
-                            <a:srgbClr val="555555"/>
-                          </a:solidFill>
-                          <a:latin typeface="Calibri"/>
-                        </a:rPr>
-                        <a:t>08/02/2027</a:t>
-                      </a:r>
-                    </a:p>
-                  </a:txBody>
-                  <a:tcPr marT="0" marB="0" marL="38100" marR="38100" anchor="ctr">
-                    <a:solidFill>
-                      <a:srgbClr val="FFFFFF"/>
-                    </a:solidFill>
-                  </a:tcPr>
-                </a:tc>
-                <a:tc>
-                  <a:txBody>
-                    <a:bodyPr wrap="none"/>
-                    <a:lstStyle/>
-                    <a:p>
-                      <a:pPr algn="ctr"/>
-                      <a:r>
-                        <a:rPr sz="700" b="1">
-                          <a:solidFill>
-                            <a:srgbClr val="1A2340"/>
-                          </a:solidFill>
-                          <a:latin typeface="Calibri"/>
-                        </a:rPr>
-                        <a:t>4%</a:t>
-                      </a:r>
-                    </a:p>
-                  </a:txBody>
-                  <a:tcPr marT="0" marB="0" marL="38100" marR="38100" anchor="ctr">
-                    <a:solidFill>
-                      <a:srgbClr val="FFFFFF"/>
-                    </a:solidFill>
-                  </a:tcPr>
-                </a:tc>
-                <a:tc>
-                  <a:txBody>
-                    <a:bodyPr wrap="none"/>
-                    <a:lstStyle/>
-                    <a:p>
-                      <a:pPr algn="ctr"/>
-                      <a:r>
-                        <a:rPr sz="700" b="0">
-                          <a:solidFill>
-                            <a:srgbClr val="555555"/>
-                          </a:solidFill>
-                          <a:latin typeface="Calibri"/>
-                        </a:rPr>
-                        <a:t>8%</a:t>
-                      </a:r>
-                    </a:p>
-                  </a:txBody>
-                  <a:tcPr marT="0" marB="0" marL="38100" marR="38100" anchor="ctr">
-                    <a:solidFill>
-                      <a:srgbClr val="FFFFFF"/>
-                    </a:solidFill>
-                  </a:tcPr>
-                </a:tc>
-                <a:tc>
-                  <a:txBody>
-                    <a:bodyPr wrap="none"/>
-                    <a:lstStyle/>
-                    <a:p>
-                      <a:pPr algn="r"/>
-                      <a:r>
-                        <a:rPr sz="700" b="1">
-                          <a:solidFill>
-                            <a:srgbClr val="F59E0B"/>
-                          </a:solidFill>
-                          <a:latin typeface="Calibri"/>
-                        </a:rPr>
-                        <a:t/>
-                      </a:r>
-                    </a:p>
-                  </a:txBody>
-                  <a:tcPr marT="0" marB="0" marL="38100" marR="38100" anchor="ctr">
-                    <a:solidFill>
-                      <a:srgbClr val="FFFFFF"/>
-                    </a:solidFill>
-                  </a:tcPr>
-                </a:tc>
-                <a:tc>
-                  <a:txBody>
-                    <a:bodyPr wrap="none"/>
-                    <a:lstStyle/>
-                    <a:p>
-                      <a:pPr algn="ctr"/>
-                      <a:r>
-                        <a:rPr sz="700" b="1">
-                          <a:solidFill>
-                            <a:srgbClr val="F59E0B"/>
-                          </a:solidFill>
-                          <a:latin typeface="Calibri"/>
-                        </a:rPr>
-                        <a:t>Riesgo de atraso</a:t>
-                      </a:r>
-                    </a:p>
-                  </a:txBody>
-                  <a:tcPr marT="0" marB="0" marL="38100" marR="38100" anchor="ctr">
-                    <a:solidFill>
-                      <a:srgbClr val="FFFFFF"/>
-                    </a:solidFill>
-                  </a:tcPr>
-                </a:tc>
-              </a:tr>
-            </a:tbl>
-          </a:graphicData>
-        </a:graphic>
-      </p:graphicFrame>
-      <p:sp>
-        <p:nvSpPr>
-          <p:cNvPr id="27" name="Rounded Rectangle 26"/>
+      <p:sp>
+        <p:nvSpPr>
+          <p:cNvPr id="26" name="Rectangle 25"/>
+          <p:cNvSpPr/>
+          <p:nvPr/>
+        </p:nvSpPr>
+        <p:spPr>
+          <a:xfrm>
+            <a:off x="73152" y="1188720"/>
+            <a:ext cx="8741664" cy="201168"/>
+          </a:xfrm>
+          <a:prstGeom prst="rect">
+            <a:avLst/>
+          </a:prstGeom>
+          <a:solidFill>
+            <a:srgbClr val="C9A84C"/>
+          </a:solidFill>
+          <a:ln>
+            <a:noFill/>
+          </a:ln>
+          <a:effectLst/>
+        </p:spPr>
+        <p:style>
+          <a:lnRef idx="1">
+            <a:schemeClr val="accent1"/>
+          </a:lnRef>
+          <a:fillRef idx="3">
+            <a:schemeClr val="accent1"/>
+          </a:fillRef>
+          <a:effectRef idx="2">
+            <a:schemeClr val="accent1"/>
+          </a:effectRef>
+          <a:fontRef idx="minor">
+            <a:schemeClr val="lt1"/>
+          </a:fontRef>
+        </p:style>
+        <p:txBody>
+          <a:bodyPr rtlCol="0" anchor="ctr"/>
+          <a:lstStyle/>
+          <a:p>
+            <a:pPr algn="ctr"/>
+          </a:p>
+        </p:txBody>
+      </p:sp>
+      <p:sp>
+        <p:nvSpPr>
+          <p:cNvPr id="27" name="TextBox 26"/>
+          <p:cNvSpPr txBox="1"/>
+          <p:nvPr/>
+        </p:nvSpPr>
+        <p:spPr>
+          <a:xfrm>
+            <a:off x="91440" y="1188720"/>
+            <a:ext cx="722375" cy="201168"/>
+          </a:xfrm>
+          <a:prstGeom prst="rect">
+            <a:avLst/>
+          </a:prstGeom>
+          <a:noFill/>
+        </p:spPr>
+        <p:txBody>
+          <a:bodyPr wrap="none" lIns="0" rIns="0" tIns="0" bIns="0" anchor="ctr">
+            <a:spAutoFit/>
+          </a:bodyPr>
+          <a:lstStyle/>
+          <a:p>
+            <a:pPr algn="ctr"/>
+            <a:r>
+              <a:rPr sz="700" b="1">
+                <a:solidFill>
+                  <a:srgbClr val="1A2340"/>
+                </a:solidFill>
+                <a:latin typeface="Calibri"/>
+              </a:rPr>
+              <a:t>TIPO</a:t>
+            </a:r>
+          </a:p>
+        </p:txBody>
+      </p:sp>
+      <p:sp>
+        <p:nvSpPr>
+          <p:cNvPr id="28" name="TextBox 27"/>
+          <p:cNvSpPr txBox="1"/>
+          <p:nvPr/>
+        </p:nvSpPr>
+        <p:spPr>
+          <a:xfrm>
+            <a:off x="850392" y="1188720"/>
+            <a:ext cx="2432304" cy="201168"/>
+          </a:xfrm>
+          <a:prstGeom prst="rect">
+            <a:avLst/>
+          </a:prstGeom>
+          <a:noFill/>
+        </p:spPr>
+        <p:txBody>
+          <a:bodyPr wrap="none" lIns="0" rIns="0" tIns="0" bIns="0" anchor="ctr">
+            <a:spAutoFit/>
+          </a:bodyPr>
+          <a:lstStyle/>
+          <a:p>
+            <a:pPr algn="ctr"/>
+            <a:r>
+              <a:rPr sz="700" b="1">
+                <a:solidFill>
+                  <a:srgbClr val="1A2340"/>
+                </a:solidFill>
+                <a:latin typeface="Calibri"/>
+              </a:rPr>
+              <a:t>PROYECTO</a:t>
+            </a:r>
+          </a:p>
+        </p:txBody>
+      </p:sp>
+      <p:sp>
+        <p:nvSpPr>
+          <p:cNvPr id="29" name="TextBox 28"/>
+          <p:cNvSpPr txBox="1"/>
+          <p:nvPr/>
+        </p:nvSpPr>
+        <p:spPr>
+          <a:xfrm>
+            <a:off x="3319272" y="1188720"/>
+            <a:ext cx="630936" cy="201168"/>
+          </a:xfrm>
+          <a:prstGeom prst="rect">
+            <a:avLst/>
+          </a:prstGeom>
+          <a:noFill/>
+        </p:spPr>
+        <p:txBody>
+          <a:bodyPr wrap="none" lIns="0" rIns="0" tIns="0" bIns="0" anchor="ctr">
+            <a:spAutoFit/>
+          </a:bodyPr>
+          <a:lstStyle/>
+          <a:p>
+            <a:pPr algn="ctr"/>
+            <a:r>
+              <a:rPr sz="700" b="1">
+                <a:solidFill>
+                  <a:srgbClr val="1A2340"/>
+                </a:solidFill>
+                <a:latin typeface="Calibri"/>
+              </a:rPr>
+              <a:t>INICIO</a:t>
+            </a:r>
+          </a:p>
+        </p:txBody>
+      </p:sp>
+      <p:sp>
+        <p:nvSpPr>
+          <p:cNvPr id="30" name="TextBox 29"/>
+          <p:cNvSpPr txBox="1"/>
+          <p:nvPr/>
+        </p:nvSpPr>
+        <p:spPr>
+          <a:xfrm>
+            <a:off x="3986783" y="1188720"/>
+            <a:ext cx="630936" cy="201168"/>
+          </a:xfrm>
+          <a:prstGeom prst="rect">
+            <a:avLst/>
+          </a:prstGeom>
+          <a:noFill/>
+        </p:spPr>
+        <p:txBody>
+          <a:bodyPr wrap="none" lIns="0" rIns="0" tIns="0" bIns="0" anchor="ctr">
+            <a:spAutoFit/>
+          </a:bodyPr>
+          <a:lstStyle/>
+          <a:p>
+            <a:pPr algn="ctr"/>
+            <a:r>
+              <a:rPr sz="700" b="1">
+                <a:solidFill>
+                  <a:srgbClr val="1A2340"/>
+                </a:solidFill>
+                <a:latin typeface="Calibri"/>
+              </a:rPr>
+              <a:t>FIN</a:t>
+            </a:r>
+          </a:p>
+        </p:txBody>
+      </p:sp>
+      <p:sp>
+        <p:nvSpPr>
+          <p:cNvPr id="31" name="TextBox 30"/>
+          <p:cNvSpPr txBox="1"/>
+          <p:nvPr/>
+        </p:nvSpPr>
+        <p:spPr>
+          <a:xfrm>
+            <a:off x="4654296" y="1188720"/>
+            <a:ext cx="493775" cy="201168"/>
+          </a:xfrm>
+          <a:prstGeom prst="rect">
+            <a:avLst/>
+          </a:prstGeom>
+          <a:noFill/>
+        </p:spPr>
+        <p:txBody>
+          <a:bodyPr wrap="none" lIns="0" rIns="0" tIns="0" bIns="0" anchor="ctr">
+            <a:spAutoFit/>
+          </a:bodyPr>
+          <a:lstStyle/>
+          <a:p>
+            <a:pPr algn="ctr"/>
+            <a:r>
+              <a:rPr sz="700" b="1">
+                <a:solidFill>
+                  <a:srgbClr val="1A2340"/>
+                </a:solidFill>
+                <a:latin typeface="Calibri"/>
+              </a:rPr>
+              <a:t>% REAL</a:t>
+            </a:r>
+          </a:p>
+        </p:txBody>
+      </p:sp>
+      <p:sp>
+        <p:nvSpPr>
+          <p:cNvPr id="32" name="TextBox 31"/>
+          <p:cNvSpPr txBox="1"/>
+          <p:nvPr/>
+        </p:nvSpPr>
+        <p:spPr>
+          <a:xfrm>
+            <a:off x="5184648" y="1188720"/>
+            <a:ext cx="557784" cy="201168"/>
+          </a:xfrm>
+          <a:prstGeom prst="rect">
+            <a:avLst/>
+          </a:prstGeom>
+          <a:noFill/>
+        </p:spPr>
+        <p:txBody>
+          <a:bodyPr wrap="none" lIns="0" rIns="0" tIns="0" bIns="0" anchor="ctr">
+            <a:spAutoFit/>
+          </a:bodyPr>
+          <a:lstStyle/>
+          <a:p>
+            <a:pPr algn="ctr"/>
+            <a:r>
+              <a:rPr sz="700" b="1">
+                <a:solidFill>
+                  <a:srgbClr val="1A2340"/>
+                </a:solidFill>
+                <a:latin typeface="Calibri"/>
+              </a:rPr>
+              <a:t>% ESPERADO</a:t>
+            </a:r>
+          </a:p>
+        </p:txBody>
+      </p:sp>
+      <p:sp>
+        <p:nvSpPr>
+          <p:cNvPr id="33" name="TextBox 32"/>
+          <p:cNvSpPr txBox="1"/>
+          <p:nvPr/>
+        </p:nvSpPr>
+        <p:spPr>
+          <a:xfrm>
+            <a:off x="5779008" y="1188720"/>
+            <a:ext cx="2176272" cy="201168"/>
+          </a:xfrm>
+          <a:prstGeom prst="rect">
+            <a:avLst/>
+          </a:prstGeom>
+          <a:noFill/>
+        </p:spPr>
+        <p:txBody>
+          <a:bodyPr wrap="none" lIns="0" rIns="0" tIns="0" bIns="0" anchor="ctr">
+            <a:spAutoFit/>
+          </a:bodyPr>
+          <a:lstStyle/>
+          <a:p>
+            <a:pPr algn="ctr"/>
+            <a:r>
+              <a:rPr sz="700" b="1">
+                <a:solidFill>
+                  <a:srgbClr val="1A2340"/>
+                </a:solidFill>
+                <a:latin typeface="Calibri"/>
+              </a:rPr>
+              <a:t>BARRA DE AVANCE</a:t>
+            </a:r>
+          </a:p>
+        </p:txBody>
+      </p:sp>
+      <p:sp>
+        <p:nvSpPr>
+          <p:cNvPr id="34" name="TextBox 33"/>
+          <p:cNvSpPr txBox="1"/>
+          <p:nvPr/>
+        </p:nvSpPr>
+        <p:spPr>
+          <a:xfrm>
+            <a:off x="7991856" y="1188720"/>
+            <a:ext cx="804672" cy="201168"/>
+          </a:xfrm>
+          <a:prstGeom prst="rect">
+            <a:avLst/>
+          </a:prstGeom>
+          <a:noFill/>
+        </p:spPr>
+        <p:txBody>
+          <a:bodyPr wrap="none" lIns="0" rIns="0" tIns="0" bIns="0" anchor="ctr">
+            <a:spAutoFit/>
+          </a:bodyPr>
+          <a:lstStyle/>
+          <a:p>
+            <a:pPr algn="ctr"/>
+            <a:r>
+              <a:rPr sz="700" b="1">
+                <a:solidFill>
+                  <a:srgbClr val="1A2340"/>
+                </a:solidFill>
+                <a:latin typeface="Calibri"/>
+              </a:rPr>
+              <a:t>SEMÁFORO</a:t>
+            </a:r>
+          </a:p>
+        </p:txBody>
+      </p:sp>
+      <p:sp>
+        <p:nvSpPr>
+          <p:cNvPr id="35" name="Rectangle 34"/>
+          <p:cNvSpPr/>
+          <p:nvPr/>
+        </p:nvSpPr>
+        <p:spPr>
+          <a:xfrm>
+            <a:off x="73152" y="1389888"/>
+            <a:ext cx="8741664" cy="187452"/>
+          </a:xfrm>
+          <a:prstGeom prst="rect">
+            <a:avLst/>
+          </a:prstGeom>
+          <a:solidFill>
+            <a:srgbClr val="F5F7FA"/>
+          </a:solidFill>
+          <a:ln>
+            <a:noFill/>
+          </a:ln>
+          <a:effectLst/>
+        </p:spPr>
+        <p:style>
+          <a:lnRef idx="1">
+            <a:schemeClr val="accent1"/>
+          </a:lnRef>
+          <a:fillRef idx="3">
+            <a:schemeClr val="accent1"/>
+          </a:fillRef>
+          <a:effectRef idx="2">
+            <a:schemeClr val="accent1"/>
+          </a:effectRef>
+          <a:fontRef idx="minor">
+            <a:schemeClr val="lt1"/>
+          </a:fontRef>
+        </p:style>
+        <p:txBody>
+          <a:bodyPr rtlCol="0" anchor="ctr"/>
+          <a:lstStyle/>
+          <a:p>
+            <a:pPr algn="ctr"/>
+          </a:p>
+        </p:txBody>
+      </p:sp>
+      <p:sp>
+        <p:nvSpPr>
+          <p:cNvPr id="36" name="TextBox 35"/>
+          <p:cNvSpPr txBox="1"/>
+          <p:nvPr/>
+        </p:nvSpPr>
+        <p:spPr>
+          <a:xfrm>
+            <a:off x="91440" y="1389888"/>
+            <a:ext cx="722375" cy="187452"/>
+          </a:xfrm>
+          <a:prstGeom prst="rect">
+            <a:avLst/>
+          </a:prstGeom>
+          <a:noFill/>
+        </p:spPr>
+        <p:txBody>
+          <a:bodyPr wrap="none" lIns="0" rIns="0" tIns="0" bIns="0" anchor="ctr">
+            <a:spAutoFit/>
+          </a:bodyPr>
+          <a:lstStyle/>
+          <a:p>
+            <a:pPr algn="ctr"/>
+            <a:r>
+              <a:rPr sz="700" b="1">
+                <a:solidFill>
+                  <a:srgbClr val="1A2340"/>
+                </a:solidFill>
+                <a:latin typeface="Calibri"/>
+              </a:rPr>
+              <a:t>Proyecto</a:t>
+            </a:r>
+          </a:p>
+        </p:txBody>
+      </p:sp>
+      <p:sp>
+        <p:nvSpPr>
+          <p:cNvPr id="37" name="TextBox 36"/>
+          <p:cNvSpPr txBox="1"/>
+          <p:nvPr/>
+        </p:nvSpPr>
+        <p:spPr>
+          <a:xfrm>
+            <a:off x="850392" y="1389888"/>
+            <a:ext cx="2432304" cy="187452"/>
+          </a:xfrm>
+          <a:prstGeom prst="rect">
+            <a:avLst/>
+          </a:prstGeom>
+          <a:noFill/>
+        </p:spPr>
+        <p:txBody>
+          <a:bodyPr wrap="none" lIns="0" rIns="0" tIns="0" bIns="0" anchor="ctr">
+            <a:spAutoFit/>
+          </a:bodyPr>
+          <a:lstStyle/>
+          <a:p>
+            <a:pPr algn="l"/>
+            <a:r>
+              <a:rPr sz="700" b="0">
+                <a:solidFill>
+                  <a:srgbClr val="1A2340"/>
+                </a:solidFill>
+                <a:latin typeface="Calibri"/>
+              </a:rPr>
+              <a:t>Talleres || Mecánica Mx (Mejoras)</a:t>
+            </a:r>
+          </a:p>
+        </p:txBody>
+      </p:sp>
+      <p:sp>
+        <p:nvSpPr>
+          <p:cNvPr id="38" name="TextBox 37"/>
+          <p:cNvSpPr txBox="1"/>
+          <p:nvPr/>
+        </p:nvSpPr>
+        <p:spPr>
+          <a:xfrm>
+            <a:off x="3319272" y="1389888"/>
+            <a:ext cx="630936" cy="187452"/>
+          </a:xfrm>
+          <a:prstGeom prst="rect">
+            <a:avLst/>
+          </a:prstGeom>
+          <a:noFill/>
+        </p:spPr>
+        <p:txBody>
+          <a:bodyPr wrap="none" lIns="0" rIns="0" tIns="0" bIns="0" anchor="ctr">
+            <a:spAutoFit/>
+          </a:bodyPr>
+          <a:lstStyle/>
+          <a:p>
+            <a:pPr algn="ctr"/>
+            <a:r>
+              <a:rPr sz="700" b="0">
+                <a:solidFill>
+                  <a:srgbClr val="555555"/>
+                </a:solidFill>
+                <a:latin typeface="Calibri"/>
+              </a:rPr>
+              <a:t>07/04/2026</a:t>
+            </a:r>
+          </a:p>
+        </p:txBody>
+      </p:sp>
+      <p:sp>
+        <p:nvSpPr>
+          <p:cNvPr id="39" name="TextBox 38"/>
+          <p:cNvSpPr txBox="1"/>
+          <p:nvPr/>
+        </p:nvSpPr>
+        <p:spPr>
+          <a:xfrm>
+            <a:off x="3986783" y="1389888"/>
+            <a:ext cx="630936" cy="187452"/>
+          </a:xfrm>
+          <a:prstGeom prst="rect">
+            <a:avLst/>
+          </a:prstGeom>
+          <a:noFill/>
+        </p:spPr>
+        <p:txBody>
+          <a:bodyPr wrap="none" lIns="0" rIns="0" tIns="0" bIns="0" anchor="ctr">
+            <a:spAutoFit/>
+          </a:bodyPr>
+          <a:lstStyle/>
+          <a:p>
+            <a:pPr algn="ctr"/>
+            <a:r>
+              <a:rPr sz="700" b="0">
+                <a:solidFill>
+                  <a:srgbClr val="555555"/>
+                </a:solidFill>
+                <a:latin typeface="Calibri"/>
+              </a:rPr>
+              <a:t>01/07/2026</a:t>
+            </a:r>
+          </a:p>
+        </p:txBody>
+      </p:sp>
+      <p:sp>
+        <p:nvSpPr>
+          <p:cNvPr id="40" name="TextBox 39"/>
+          <p:cNvSpPr txBox="1"/>
+          <p:nvPr/>
+        </p:nvSpPr>
+        <p:spPr>
+          <a:xfrm>
+            <a:off x="4654296" y="1389888"/>
+            <a:ext cx="493775" cy="187452"/>
+          </a:xfrm>
+          <a:prstGeom prst="rect">
+            <a:avLst/>
+          </a:prstGeom>
+          <a:noFill/>
+        </p:spPr>
+        <p:txBody>
+          <a:bodyPr wrap="none" lIns="0" rIns="0" tIns="0" bIns="0" anchor="ctr">
+            <a:spAutoFit/>
+          </a:bodyPr>
+          <a:lstStyle/>
+          <a:p>
+            <a:pPr algn="ctr"/>
+            <a:r>
+              <a:rPr sz="700" b="1">
+                <a:solidFill>
+                  <a:srgbClr val="1A2340"/>
+                </a:solidFill>
+                <a:latin typeface="Calibri"/>
+              </a:rPr>
+              <a:t>82%</a:t>
+            </a:r>
+          </a:p>
+        </p:txBody>
+      </p:sp>
+      <p:sp>
+        <p:nvSpPr>
+          <p:cNvPr id="41" name="TextBox 40"/>
+          <p:cNvSpPr txBox="1"/>
+          <p:nvPr/>
+        </p:nvSpPr>
+        <p:spPr>
+          <a:xfrm>
+            <a:off x="5184648" y="1389888"/>
+            <a:ext cx="557784" cy="187452"/>
+          </a:xfrm>
+          <a:prstGeom prst="rect">
+            <a:avLst/>
+          </a:prstGeom>
+          <a:noFill/>
+        </p:spPr>
+        <p:txBody>
+          <a:bodyPr wrap="none" lIns="0" rIns="0" tIns="0" bIns="0" anchor="ctr">
+            <a:spAutoFit/>
+          </a:bodyPr>
+          <a:lstStyle/>
+          <a:p>
+            <a:pPr algn="ctr"/>
+            <a:r>
+              <a:rPr sz="700" b="0">
+                <a:solidFill>
+                  <a:srgbClr val="555555"/>
+                </a:solidFill>
+                <a:latin typeface="Calibri"/>
+              </a:rPr>
+              <a:t>100%</a:t>
+            </a:r>
+          </a:p>
+        </p:txBody>
+      </p:sp>
+      <p:sp>
+        <p:nvSpPr>
+          <p:cNvPr id="42" name="TextBox 41"/>
+          <p:cNvSpPr txBox="1"/>
+          <p:nvPr/>
+        </p:nvSpPr>
+        <p:spPr>
+          <a:xfrm>
+            <a:off x="7991856" y="1389888"/>
+            <a:ext cx="804672" cy="187452"/>
+          </a:xfrm>
+          <a:prstGeom prst="rect">
+            <a:avLst/>
+          </a:prstGeom>
+          <a:noFill/>
+        </p:spPr>
+        <p:txBody>
+          <a:bodyPr wrap="none" lIns="0" rIns="0" tIns="0" bIns="0" anchor="ctr">
+            <a:spAutoFit/>
+          </a:bodyPr>
+          <a:lstStyle/>
+          <a:p>
+            <a:pPr algn="ctr"/>
+            <a:r>
+              <a:rPr sz="700" b="1">
+                <a:solidFill>
+                  <a:srgbClr val="EF4444"/>
+                </a:solidFill>
+                <a:latin typeface="Calibri"/>
+              </a:rPr>
+              <a:t>Atrasado</a:t>
+            </a:r>
+          </a:p>
+        </p:txBody>
+      </p:sp>
+      <p:sp>
+        <p:nvSpPr>
+          <p:cNvPr id="43" name="Rounded Rectangle 42"/>
           <p:cNvSpPr/>
           <p:nvPr/>
         </p:nvSpPr>
@@ -9888,7 +6935,7 @@
       </p:sp>
       <p:sp>
         <p:nvSpPr>
-          <p:cNvPr id="28" name="Rounded Rectangle 27"/>
+          <p:cNvPr id="44" name="Rounded Rectangle 43"/>
           <p:cNvSpPr/>
           <p:nvPr/>
         </p:nvSpPr>
@@ -9940,7 +6987,7 @@
       </p:sp>
       <p:sp>
         <p:nvSpPr>
-          <p:cNvPr id="29" name="TextBox 28"/>
+          <p:cNvPr id="45" name="TextBox 44"/>
           <p:cNvSpPr txBox="1"/>
           <p:nvPr/>
         </p:nvSpPr>
@@ -9975,7 +7022,296 @@
       </p:sp>
       <p:sp>
         <p:nvSpPr>
-          <p:cNvPr id="30" name="Rounded Rectangle 29"/>
+          <p:cNvPr id="46" name="Rectangle 45"/>
+          <p:cNvSpPr/>
+          <p:nvPr/>
+        </p:nvSpPr>
+        <p:spPr>
+          <a:xfrm>
+            <a:off x="73152" y="1577340"/>
+            <a:ext cx="8741664" cy="187452"/>
+          </a:xfrm>
+          <a:prstGeom prst="rect">
+            <a:avLst/>
+          </a:prstGeom>
+          <a:solidFill>
+            <a:srgbClr val="FFFFFF"/>
+          </a:solidFill>
+          <a:ln>
+            <a:noFill/>
+          </a:ln>
+          <a:effectLst/>
+        </p:spPr>
+        <p:style>
+          <a:lnRef idx="1">
+            <a:schemeClr val="accent1"/>
+          </a:lnRef>
+          <a:fillRef idx="3">
+            <a:schemeClr val="accent1"/>
+          </a:fillRef>
+          <a:effectRef idx="2">
+            <a:schemeClr val="accent1"/>
+          </a:effectRef>
+          <a:fontRef idx="minor">
+            <a:schemeClr val="lt1"/>
+          </a:fontRef>
+        </p:style>
+        <p:txBody>
+          <a:bodyPr rtlCol="0" anchor="ctr"/>
+          <a:lstStyle/>
+          <a:p>
+            <a:pPr algn="ctr"/>
+          </a:p>
+        </p:txBody>
+      </p:sp>
+      <p:sp>
+        <p:nvSpPr>
+          <p:cNvPr id="47" name="TextBox 46"/>
+          <p:cNvSpPr txBox="1"/>
+          <p:nvPr/>
+        </p:nvSpPr>
+        <p:spPr>
+          <a:xfrm>
+            <a:off x="91440" y="1577340"/>
+            <a:ext cx="722375" cy="187452"/>
+          </a:xfrm>
+          <a:prstGeom prst="rect">
+            <a:avLst/>
+          </a:prstGeom>
+          <a:noFill/>
+        </p:spPr>
+        <p:txBody>
+          <a:bodyPr wrap="none" lIns="0" rIns="0" tIns="0" bIns="0" anchor="ctr">
+            <a:spAutoFit/>
+          </a:bodyPr>
+          <a:lstStyle/>
+          <a:p>
+            <a:pPr algn="ctr"/>
+            <a:r>
+              <a:rPr sz="700" b="1">
+                <a:solidFill>
+                  <a:srgbClr val="1A2340"/>
+                </a:solidFill>
+                <a:latin typeface="Calibri"/>
+              </a:rPr>
+              <a:t>Proyecto</a:t>
+            </a:r>
+          </a:p>
+        </p:txBody>
+      </p:sp>
+      <p:sp>
+        <p:nvSpPr>
+          <p:cNvPr id="48" name="TextBox 47"/>
+          <p:cNvSpPr txBox="1"/>
+          <p:nvPr/>
+        </p:nvSpPr>
+        <p:spPr>
+          <a:xfrm>
+            <a:off x="850392" y="1577340"/>
+            <a:ext cx="2432304" cy="187452"/>
+          </a:xfrm>
+          <a:prstGeom prst="rect">
+            <a:avLst/>
+          </a:prstGeom>
+          <a:noFill/>
+        </p:spPr>
+        <p:txBody>
+          <a:bodyPr wrap="none" lIns="0" rIns="0" tIns="0" bIns="0" anchor="ctr">
+            <a:spAutoFit/>
+          </a:bodyPr>
+          <a:lstStyle/>
+          <a:p>
+            <a:pPr algn="l"/>
+            <a:r>
+              <a:rPr sz="700" b="0">
+                <a:solidFill>
+                  <a:srgbClr val="1A2340"/>
+                </a:solidFill>
+                <a:latin typeface="Calibri"/>
+              </a:rPr>
+              <a:t>Administración || AdContent - Catálogos</a:t>
+            </a:r>
+          </a:p>
+        </p:txBody>
+      </p:sp>
+      <p:sp>
+        <p:nvSpPr>
+          <p:cNvPr id="49" name="TextBox 48"/>
+          <p:cNvSpPr txBox="1"/>
+          <p:nvPr/>
+        </p:nvSpPr>
+        <p:spPr>
+          <a:xfrm>
+            <a:off x="3319272" y="1577340"/>
+            <a:ext cx="630936" cy="187452"/>
+          </a:xfrm>
+          <a:prstGeom prst="rect">
+            <a:avLst/>
+          </a:prstGeom>
+          <a:noFill/>
+        </p:spPr>
+        <p:txBody>
+          <a:bodyPr wrap="none" lIns="0" rIns="0" tIns="0" bIns="0" anchor="ctr">
+            <a:spAutoFit/>
+          </a:bodyPr>
+          <a:lstStyle/>
+          <a:p>
+            <a:pPr algn="ctr"/>
+            <a:r>
+              <a:rPr sz="700" b="0">
+                <a:solidFill>
+                  <a:srgbClr val="555555"/>
+                </a:solidFill>
+                <a:latin typeface="Calibri"/>
+              </a:rPr>
+              <a:t>01/04/2026</a:t>
+            </a:r>
+          </a:p>
+        </p:txBody>
+      </p:sp>
+      <p:sp>
+        <p:nvSpPr>
+          <p:cNvPr id="50" name="TextBox 49"/>
+          <p:cNvSpPr txBox="1"/>
+          <p:nvPr/>
+        </p:nvSpPr>
+        <p:spPr>
+          <a:xfrm>
+            <a:off x="3986783" y="1577340"/>
+            <a:ext cx="630936" cy="187452"/>
+          </a:xfrm>
+          <a:prstGeom prst="rect">
+            <a:avLst/>
+          </a:prstGeom>
+          <a:noFill/>
+        </p:spPr>
+        <p:txBody>
+          <a:bodyPr wrap="none" lIns="0" rIns="0" tIns="0" bIns="0" anchor="ctr">
+            <a:spAutoFit/>
+          </a:bodyPr>
+          <a:lstStyle/>
+          <a:p>
+            <a:pPr algn="ctr"/>
+            <a:r>
+              <a:rPr sz="700" b="0">
+                <a:solidFill>
+                  <a:srgbClr val="555555"/>
+                </a:solidFill>
+                <a:latin typeface="Calibri"/>
+              </a:rPr>
+              <a:t>02/06/2026</a:t>
+            </a:r>
+          </a:p>
+        </p:txBody>
+      </p:sp>
+      <p:sp>
+        <p:nvSpPr>
+          <p:cNvPr id="51" name="TextBox 50"/>
+          <p:cNvSpPr txBox="1"/>
+          <p:nvPr/>
+        </p:nvSpPr>
+        <p:spPr>
+          <a:xfrm>
+            <a:off x="4654296" y="1577340"/>
+            <a:ext cx="493775" cy="187452"/>
+          </a:xfrm>
+          <a:prstGeom prst="rect">
+            <a:avLst/>
+          </a:prstGeom>
+          <a:noFill/>
+        </p:spPr>
+        <p:txBody>
+          <a:bodyPr wrap="none" lIns="0" rIns="0" tIns="0" bIns="0" anchor="ctr">
+            <a:spAutoFit/>
+          </a:bodyPr>
+          <a:lstStyle/>
+          <a:p>
+            <a:pPr algn="ctr"/>
+            <a:r>
+              <a:rPr sz="700" b="1">
+                <a:solidFill>
+                  <a:srgbClr val="1A2340"/>
+                </a:solidFill>
+                <a:latin typeface="Calibri"/>
+              </a:rPr>
+              <a:t>100%</a:t>
+            </a:r>
+          </a:p>
+        </p:txBody>
+      </p:sp>
+      <p:sp>
+        <p:nvSpPr>
+          <p:cNvPr id="52" name="TextBox 51"/>
+          <p:cNvSpPr txBox="1"/>
+          <p:nvPr/>
+        </p:nvSpPr>
+        <p:spPr>
+          <a:xfrm>
+            <a:off x="5184648" y="1577340"/>
+            <a:ext cx="557784" cy="187452"/>
+          </a:xfrm>
+          <a:prstGeom prst="rect">
+            <a:avLst/>
+          </a:prstGeom>
+          <a:noFill/>
+        </p:spPr>
+        <p:txBody>
+          <a:bodyPr wrap="none" lIns="0" rIns="0" tIns="0" bIns="0" anchor="ctr">
+            <a:spAutoFit/>
+          </a:bodyPr>
+          <a:lstStyle/>
+          <a:p>
+            <a:pPr algn="ctr"/>
+            <a:r>
+              <a:rPr sz="700" b="0">
+                <a:solidFill>
+                  <a:srgbClr val="555555"/>
+                </a:solidFill>
+                <a:latin typeface="Calibri"/>
+              </a:rPr>
+              <a:t>100%</a:t>
+            </a:r>
+          </a:p>
+        </p:txBody>
+      </p:sp>
+      <p:sp>
+        <p:nvSpPr>
+          <p:cNvPr id="53" name="TextBox 52"/>
+          <p:cNvSpPr txBox="1"/>
+          <p:nvPr/>
+        </p:nvSpPr>
+        <p:spPr>
+          <a:xfrm>
+            <a:off x="7991856" y="1577340"/>
+            <a:ext cx="804672" cy="187452"/>
+          </a:xfrm>
+          <a:prstGeom prst="rect">
+            <a:avLst/>
+          </a:prstGeom>
+          <a:noFill/>
+        </p:spPr>
+        <p:txBody>
+          <a:bodyPr wrap="none" lIns="0" rIns="0" tIns="0" bIns="0" anchor="ctr">
+            <a:spAutoFit/>
+          </a:bodyPr>
+          <a:lstStyle/>
+          <a:p>
+            <a:pPr algn="ctr"/>
+            <a:r>
+              <a:rPr sz="700" b="1">
+                <a:solidFill>
+                  <a:srgbClr val="22C55E"/>
+                </a:solidFill>
+                <a:latin typeface="Calibri"/>
+              </a:rPr>
+              <a:t>Terminado</a:t>
+            </a:r>
+          </a:p>
+        </p:txBody>
+      </p:sp>
+      <p:sp>
+        <p:nvSpPr>
+          <p:cNvPr id="54" name="Rounded Rectangle 53"/>
           <p:cNvSpPr/>
           <p:nvPr/>
         </p:nvSpPr>
@@ -10026,7 +7362,7 @@
       </p:sp>
       <p:sp>
         <p:nvSpPr>
-          <p:cNvPr id="31" name="Rounded Rectangle 30"/>
+          <p:cNvPr id="55" name="Rounded Rectangle 54"/>
           <p:cNvSpPr/>
           <p:nvPr/>
         </p:nvSpPr>
@@ -10078,7 +7414,7 @@
       </p:sp>
       <p:sp>
         <p:nvSpPr>
-          <p:cNvPr id="32" name="TextBox 31"/>
+          <p:cNvPr id="56" name="TextBox 55"/>
           <p:cNvSpPr txBox="1"/>
           <p:nvPr/>
         </p:nvSpPr>
@@ -10113,7 +7449,296 @@
       </p:sp>
       <p:sp>
         <p:nvSpPr>
-          <p:cNvPr id="33" name="Rounded Rectangle 32"/>
+          <p:cNvPr id="57" name="Rectangle 56"/>
+          <p:cNvSpPr/>
+          <p:nvPr/>
+        </p:nvSpPr>
+        <p:spPr>
+          <a:xfrm>
+            <a:off x="73152" y="1764792"/>
+            <a:ext cx="8741664" cy="187452"/>
+          </a:xfrm>
+          <a:prstGeom prst="rect">
+            <a:avLst/>
+          </a:prstGeom>
+          <a:solidFill>
+            <a:srgbClr val="F5F7FA"/>
+          </a:solidFill>
+          <a:ln>
+            <a:noFill/>
+          </a:ln>
+          <a:effectLst/>
+        </p:spPr>
+        <p:style>
+          <a:lnRef idx="1">
+            <a:schemeClr val="accent1"/>
+          </a:lnRef>
+          <a:fillRef idx="3">
+            <a:schemeClr val="accent1"/>
+          </a:fillRef>
+          <a:effectRef idx="2">
+            <a:schemeClr val="accent1"/>
+          </a:effectRef>
+          <a:fontRef idx="minor">
+            <a:schemeClr val="lt1"/>
+          </a:fontRef>
+        </p:style>
+        <p:txBody>
+          <a:bodyPr rtlCol="0" anchor="ctr"/>
+          <a:lstStyle/>
+          <a:p>
+            <a:pPr algn="ctr"/>
+          </a:p>
+        </p:txBody>
+      </p:sp>
+      <p:sp>
+        <p:nvSpPr>
+          <p:cNvPr id="58" name="TextBox 57"/>
+          <p:cNvSpPr txBox="1"/>
+          <p:nvPr/>
+        </p:nvSpPr>
+        <p:spPr>
+          <a:xfrm>
+            <a:off x="91440" y="1764792"/>
+            <a:ext cx="722375" cy="187452"/>
+          </a:xfrm>
+          <a:prstGeom prst="rect">
+            <a:avLst/>
+          </a:prstGeom>
+          <a:noFill/>
+        </p:spPr>
+        <p:txBody>
+          <a:bodyPr wrap="none" lIns="0" rIns="0" tIns="0" bIns="0" anchor="ctr">
+            <a:spAutoFit/>
+          </a:bodyPr>
+          <a:lstStyle/>
+          <a:p>
+            <a:pPr algn="ctr"/>
+            <a:r>
+              <a:rPr sz="700" b="1">
+                <a:solidFill>
+                  <a:srgbClr val="1A2340"/>
+                </a:solidFill>
+                <a:latin typeface="Calibri"/>
+              </a:rPr>
+              <a:t>Proyecto</a:t>
+            </a:r>
+          </a:p>
+        </p:txBody>
+      </p:sp>
+      <p:sp>
+        <p:nvSpPr>
+          <p:cNvPr id="59" name="TextBox 58"/>
+          <p:cNvSpPr txBox="1"/>
+          <p:nvPr/>
+        </p:nvSpPr>
+        <p:spPr>
+          <a:xfrm>
+            <a:off x="850392" y="1764792"/>
+            <a:ext cx="2432304" cy="187452"/>
+          </a:xfrm>
+          <a:prstGeom prst="rect">
+            <a:avLst/>
+          </a:prstGeom>
+          <a:noFill/>
+        </p:spPr>
+        <p:txBody>
+          <a:bodyPr wrap="none" lIns="0" rIns="0" tIns="0" bIns="0" anchor="ctr">
+            <a:spAutoFit/>
+          </a:bodyPr>
+          <a:lstStyle/>
+          <a:p>
+            <a:pPr algn="l"/>
+            <a:r>
+              <a:rPr sz="700" b="0">
+                <a:solidFill>
+                  <a:srgbClr val="1A2340"/>
+                </a:solidFill>
+                <a:latin typeface="Calibri"/>
+              </a:rPr>
+              <a:t>Capital Humano || BUK Soporte – Incidencia</a:t>
+            </a:r>
+          </a:p>
+        </p:txBody>
+      </p:sp>
+      <p:sp>
+        <p:nvSpPr>
+          <p:cNvPr id="60" name="TextBox 59"/>
+          <p:cNvSpPr txBox="1"/>
+          <p:nvPr/>
+        </p:nvSpPr>
+        <p:spPr>
+          <a:xfrm>
+            <a:off x="3319272" y="1764792"/>
+            <a:ext cx="630936" cy="187452"/>
+          </a:xfrm>
+          <a:prstGeom prst="rect">
+            <a:avLst/>
+          </a:prstGeom>
+          <a:noFill/>
+        </p:spPr>
+        <p:txBody>
+          <a:bodyPr wrap="none" lIns="0" rIns="0" tIns="0" bIns="0" anchor="ctr">
+            <a:spAutoFit/>
+          </a:bodyPr>
+          <a:lstStyle/>
+          <a:p>
+            <a:pPr algn="ctr"/>
+            <a:r>
+              <a:rPr sz="700" b="0">
+                <a:solidFill>
+                  <a:srgbClr val="555555"/>
+                </a:solidFill>
+                <a:latin typeface="Calibri"/>
+              </a:rPr>
+              <a:t>02/03/2026</a:t>
+            </a:r>
+          </a:p>
+        </p:txBody>
+      </p:sp>
+      <p:sp>
+        <p:nvSpPr>
+          <p:cNvPr id="61" name="TextBox 60"/>
+          <p:cNvSpPr txBox="1"/>
+          <p:nvPr/>
+        </p:nvSpPr>
+        <p:spPr>
+          <a:xfrm>
+            <a:off x="3986783" y="1764792"/>
+            <a:ext cx="630936" cy="187452"/>
+          </a:xfrm>
+          <a:prstGeom prst="rect">
+            <a:avLst/>
+          </a:prstGeom>
+          <a:noFill/>
+        </p:spPr>
+        <p:txBody>
+          <a:bodyPr wrap="none" lIns="0" rIns="0" tIns="0" bIns="0" anchor="ctr">
+            <a:spAutoFit/>
+          </a:bodyPr>
+          <a:lstStyle/>
+          <a:p>
+            <a:pPr algn="ctr"/>
+            <a:r>
+              <a:rPr sz="700" b="0">
+                <a:solidFill>
+                  <a:srgbClr val="555555"/>
+                </a:solidFill>
+                <a:latin typeface="Calibri"/>
+              </a:rPr>
+              <a:t>29/05/2026</a:t>
+            </a:r>
+          </a:p>
+        </p:txBody>
+      </p:sp>
+      <p:sp>
+        <p:nvSpPr>
+          <p:cNvPr id="62" name="TextBox 61"/>
+          <p:cNvSpPr txBox="1"/>
+          <p:nvPr/>
+        </p:nvSpPr>
+        <p:spPr>
+          <a:xfrm>
+            <a:off x="4654296" y="1764792"/>
+            <a:ext cx="493775" cy="187452"/>
+          </a:xfrm>
+          <a:prstGeom prst="rect">
+            <a:avLst/>
+          </a:prstGeom>
+          <a:noFill/>
+        </p:spPr>
+        <p:txBody>
+          <a:bodyPr wrap="none" lIns="0" rIns="0" tIns="0" bIns="0" anchor="ctr">
+            <a:spAutoFit/>
+          </a:bodyPr>
+          <a:lstStyle/>
+          <a:p>
+            <a:pPr algn="ctr"/>
+            <a:r>
+              <a:rPr sz="700" b="1">
+                <a:solidFill>
+                  <a:srgbClr val="1A2340"/>
+                </a:solidFill>
+                <a:latin typeface="Calibri"/>
+              </a:rPr>
+              <a:t>100%</a:t>
+            </a:r>
+          </a:p>
+        </p:txBody>
+      </p:sp>
+      <p:sp>
+        <p:nvSpPr>
+          <p:cNvPr id="63" name="TextBox 62"/>
+          <p:cNvSpPr txBox="1"/>
+          <p:nvPr/>
+        </p:nvSpPr>
+        <p:spPr>
+          <a:xfrm>
+            <a:off x="5184648" y="1764792"/>
+            <a:ext cx="557784" cy="187452"/>
+          </a:xfrm>
+          <a:prstGeom prst="rect">
+            <a:avLst/>
+          </a:prstGeom>
+          <a:noFill/>
+        </p:spPr>
+        <p:txBody>
+          <a:bodyPr wrap="none" lIns="0" rIns="0" tIns="0" bIns="0" anchor="ctr">
+            <a:spAutoFit/>
+          </a:bodyPr>
+          <a:lstStyle/>
+          <a:p>
+            <a:pPr algn="ctr"/>
+            <a:r>
+              <a:rPr sz="700" b="0">
+                <a:solidFill>
+                  <a:srgbClr val="555555"/>
+                </a:solidFill>
+                <a:latin typeface="Calibri"/>
+              </a:rPr>
+              <a:t>100%</a:t>
+            </a:r>
+          </a:p>
+        </p:txBody>
+      </p:sp>
+      <p:sp>
+        <p:nvSpPr>
+          <p:cNvPr id="64" name="TextBox 63"/>
+          <p:cNvSpPr txBox="1"/>
+          <p:nvPr/>
+        </p:nvSpPr>
+        <p:spPr>
+          <a:xfrm>
+            <a:off x="7991856" y="1764792"/>
+            <a:ext cx="804672" cy="187452"/>
+          </a:xfrm>
+          <a:prstGeom prst="rect">
+            <a:avLst/>
+          </a:prstGeom>
+          <a:noFill/>
+        </p:spPr>
+        <p:txBody>
+          <a:bodyPr wrap="none" lIns="0" rIns="0" tIns="0" bIns="0" anchor="ctr">
+            <a:spAutoFit/>
+          </a:bodyPr>
+          <a:lstStyle/>
+          <a:p>
+            <a:pPr algn="ctr"/>
+            <a:r>
+              <a:rPr sz="700" b="1">
+                <a:solidFill>
+                  <a:srgbClr val="22C55E"/>
+                </a:solidFill>
+                <a:latin typeface="Calibri"/>
+              </a:rPr>
+              <a:t>Terminado</a:t>
+            </a:r>
+          </a:p>
+        </p:txBody>
+      </p:sp>
+      <p:sp>
+        <p:nvSpPr>
+          <p:cNvPr id="65" name="Rounded Rectangle 64"/>
           <p:cNvSpPr/>
           <p:nvPr/>
         </p:nvSpPr>
@@ -10164,7 +7789,7 @@
       </p:sp>
       <p:sp>
         <p:nvSpPr>
-          <p:cNvPr id="34" name="Rounded Rectangle 33"/>
+          <p:cNvPr id="66" name="Rounded Rectangle 65"/>
           <p:cNvSpPr/>
           <p:nvPr/>
         </p:nvSpPr>
@@ -10216,7 +7841,7 @@
       </p:sp>
       <p:sp>
         <p:nvSpPr>
-          <p:cNvPr id="35" name="TextBox 34"/>
+          <p:cNvPr id="67" name="TextBox 66"/>
           <p:cNvSpPr txBox="1"/>
           <p:nvPr/>
         </p:nvSpPr>
@@ -10251,7 +7876,296 @@
       </p:sp>
       <p:sp>
         <p:nvSpPr>
-          <p:cNvPr id="36" name="Rounded Rectangle 35"/>
+          <p:cNvPr id="68" name="Rectangle 67"/>
+          <p:cNvSpPr/>
+          <p:nvPr/>
+        </p:nvSpPr>
+        <p:spPr>
+          <a:xfrm>
+            <a:off x="73152" y="1952243"/>
+            <a:ext cx="8741664" cy="187452"/>
+          </a:xfrm>
+          <a:prstGeom prst="rect">
+            <a:avLst/>
+          </a:prstGeom>
+          <a:solidFill>
+            <a:srgbClr val="FFFFFF"/>
+          </a:solidFill>
+          <a:ln>
+            <a:noFill/>
+          </a:ln>
+          <a:effectLst/>
+        </p:spPr>
+        <p:style>
+          <a:lnRef idx="1">
+            <a:schemeClr val="accent1"/>
+          </a:lnRef>
+          <a:fillRef idx="3">
+            <a:schemeClr val="accent1"/>
+          </a:fillRef>
+          <a:effectRef idx="2">
+            <a:schemeClr val="accent1"/>
+          </a:effectRef>
+          <a:fontRef idx="minor">
+            <a:schemeClr val="lt1"/>
+          </a:fontRef>
+        </p:style>
+        <p:txBody>
+          <a:bodyPr rtlCol="0" anchor="ctr"/>
+          <a:lstStyle/>
+          <a:p>
+            <a:pPr algn="ctr"/>
+          </a:p>
+        </p:txBody>
+      </p:sp>
+      <p:sp>
+        <p:nvSpPr>
+          <p:cNvPr id="69" name="TextBox 68"/>
+          <p:cNvSpPr txBox="1"/>
+          <p:nvPr/>
+        </p:nvSpPr>
+        <p:spPr>
+          <a:xfrm>
+            <a:off x="91440" y="1952243"/>
+            <a:ext cx="722375" cy="187452"/>
+          </a:xfrm>
+          <a:prstGeom prst="rect">
+            <a:avLst/>
+          </a:prstGeom>
+          <a:noFill/>
+        </p:spPr>
+        <p:txBody>
+          <a:bodyPr wrap="none" lIns="0" rIns="0" tIns="0" bIns="0" anchor="ctr">
+            <a:spAutoFit/>
+          </a:bodyPr>
+          <a:lstStyle/>
+          <a:p>
+            <a:pPr algn="ctr"/>
+            <a:r>
+              <a:rPr sz="700" b="1">
+                <a:solidFill>
+                  <a:srgbClr val="1A2340"/>
+                </a:solidFill>
+                <a:latin typeface="Calibri"/>
+              </a:rPr>
+              <a:t>Proyecto</a:t>
+            </a:r>
+          </a:p>
+        </p:txBody>
+      </p:sp>
+      <p:sp>
+        <p:nvSpPr>
+          <p:cNvPr id="70" name="TextBox 69"/>
+          <p:cNvSpPr txBox="1"/>
+          <p:nvPr/>
+        </p:nvSpPr>
+        <p:spPr>
+          <a:xfrm>
+            <a:off x="850392" y="1952243"/>
+            <a:ext cx="2432304" cy="187452"/>
+          </a:xfrm>
+          <a:prstGeom prst="rect">
+            <a:avLst/>
+          </a:prstGeom>
+          <a:noFill/>
+        </p:spPr>
+        <p:txBody>
+          <a:bodyPr wrap="none" lIns="0" rIns="0" tIns="0" bIns="0" anchor="ctr">
+            <a:spAutoFit/>
+          </a:bodyPr>
+          <a:lstStyle/>
+          <a:p>
+            <a:pPr algn="l"/>
+            <a:r>
+              <a:rPr sz="700" b="0">
+                <a:solidFill>
+                  <a:srgbClr val="1A2340"/>
+                </a:solidFill>
+                <a:latin typeface="Calibri"/>
+              </a:rPr>
+              <a:t>Capital Humano || BUK Campos Personalizados</a:t>
+            </a:r>
+          </a:p>
+        </p:txBody>
+      </p:sp>
+      <p:sp>
+        <p:nvSpPr>
+          <p:cNvPr id="71" name="TextBox 70"/>
+          <p:cNvSpPr txBox="1"/>
+          <p:nvPr/>
+        </p:nvSpPr>
+        <p:spPr>
+          <a:xfrm>
+            <a:off x="3319272" y="1952243"/>
+            <a:ext cx="630936" cy="187452"/>
+          </a:xfrm>
+          <a:prstGeom prst="rect">
+            <a:avLst/>
+          </a:prstGeom>
+          <a:noFill/>
+        </p:spPr>
+        <p:txBody>
+          <a:bodyPr wrap="none" lIns="0" rIns="0" tIns="0" bIns="0" anchor="ctr">
+            <a:spAutoFit/>
+          </a:bodyPr>
+          <a:lstStyle/>
+          <a:p>
+            <a:pPr algn="ctr"/>
+            <a:r>
+              <a:rPr sz="700" b="0">
+                <a:solidFill>
+                  <a:srgbClr val="555555"/>
+                </a:solidFill>
+                <a:latin typeface="Calibri"/>
+              </a:rPr>
+              <a:t>26/02/2026</a:t>
+            </a:r>
+          </a:p>
+        </p:txBody>
+      </p:sp>
+      <p:sp>
+        <p:nvSpPr>
+          <p:cNvPr id="72" name="TextBox 71"/>
+          <p:cNvSpPr txBox="1"/>
+          <p:nvPr/>
+        </p:nvSpPr>
+        <p:spPr>
+          <a:xfrm>
+            <a:off x="3986783" y="1952243"/>
+            <a:ext cx="630936" cy="187452"/>
+          </a:xfrm>
+          <a:prstGeom prst="rect">
+            <a:avLst/>
+          </a:prstGeom>
+          <a:noFill/>
+        </p:spPr>
+        <p:txBody>
+          <a:bodyPr wrap="none" lIns="0" rIns="0" tIns="0" bIns="0" anchor="ctr">
+            <a:spAutoFit/>
+          </a:bodyPr>
+          <a:lstStyle/>
+          <a:p>
+            <a:pPr algn="ctr"/>
+            <a:r>
+              <a:rPr sz="700" b="0">
+                <a:solidFill>
+                  <a:srgbClr val="555555"/>
+                </a:solidFill>
+                <a:latin typeface="Calibri"/>
+              </a:rPr>
+              <a:t>25/05/2026</a:t>
+            </a:r>
+          </a:p>
+        </p:txBody>
+      </p:sp>
+      <p:sp>
+        <p:nvSpPr>
+          <p:cNvPr id="73" name="TextBox 72"/>
+          <p:cNvSpPr txBox="1"/>
+          <p:nvPr/>
+        </p:nvSpPr>
+        <p:spPr>
+          <a:xfrm>
+            <a:off x="4654296" y="1952243"/>
+            <a:ext cx="493775" cy="187452"/>
+          </a:xfrm>
+          <a:prstGeom prst="rect">
+            <a:avLst/>
+          </a:prstGeom>
+          <a:noFill/>
+        </p:spPr>
+        <p:txBody>
+          <a:bodyPr wrap="none" lIns="0" rIns="0" tIns="0" bIns="0" anchor="ctr">
+            <a:spAutoFit/>
+          </a:bodyPr>
+          <a:lstStyle/>
+          <a:p>
+            <a:pPr algn="ctr"/>
+            <a:r>
+              <a:rPr sz="700" b="1">
+                <a:solidFill>
+                  <a:srgbClr val="1A2340"/>
+                </a:solidFill>
+                <a:latin typeface="Calibri"/>
+              </a:rPr>
+              <a:t>100%</a:t>
+            </a:r>
+          </a:p>
+        </p:txBody>
+      </p:sp>
+      <p:sp>
+        <p:nvSpPr>
+          <p:cNvPr id="74" name="TextBox 73"/>
+          <p:cNvSpPr txBox="1"/>
+          <p:nvPr/>
+        </p:nvSpPr>
+        <p:spPr>
+          <a:xfrm>
+            <a:off x="5184648" y="1952243"/>
+            <a:ext cx="557784" cy="187452"/>
+          </a:xfrm>
+          <a:prstGeom prst="rect">
+            <a:avLst/>
+          </a:prstGeom>
+          <a:noFill/>
+        </p:spPr>
+        <p:txBody>
+          <a:bodyPr wrap="none" lIns="0" rIns="0" tIns="0" bIns="0" anchor="ctr">
+            <a:spAutoFit/>
+          </a:bodyPr>
+          <a:lstStyle/>
+          <a:p>
+            <a:pPr algn="ctr"/>
+            <a:r>
+              <a:rPr sz="700" b="0">
+                <a:solidFill>
+                  <a:srgbClr val="555555"/>
+                </a:solidFill>
+                <a:latin typeface="Calibri"/>
+              </a:rPr>
+              <a:t>100%</a:t>
+            </a:r>
+          </a:p>
+        </p:txBody>
+      </p:sp>
+      <p:sp>
+        <p:nvSpPr>
+          <p:cNvPr id="75" name="TextBox 74"/>
+          <p:cNvSpPr txBox="1"/>
+          <p:nvPr/>
+        </p:nvSpPr>
+        <p:spPr>
+          <a:xfrm>
+            <a:off x="7991856" y="1952243"/>
+            <a:ext cx="804672" cy="187452"/>
+          </a:xfrm>
+          <a:prstGeom prst="rect">
+            <a:avLst/>
+          </a:prstGeom>
+          <a:noFill/>
+        </p:spPr>
+        <p:txBody>
+          <a:bodyPr wrap="none" lIns="0" rIns="0" tIns="0" bIns="0" anchor="ctr">
+            <a:spAutoFit/>
+          </a:bodyPr>
+          <a:lstStyle/>
+          <a:p>
+            <a:pPr algn="ctr"/>
+            <a:r>
+              <a:rPr sz="700" b="1">
+                <a:solidFill>
+                  <a:srgbClr val="22C55E"/>
+                </a:solidFill>
+                <a:latin typeface="Calibri"/>
+              </a:rPr>
+              <a:t>Terminado</a:t>
+            </a:r>
+          </a:p>
+        </p:txBody>
+      </p:sp>
+      <p:sp>
+        <p:nvSpPr>
+          <p:cNvPr id="76" name="Rounded Rectangle 75"/>
           <p:cNvSpPr/>
           <p:nvPr/>
         </p:nvSpPr>
@@ -10302,7 +8216,7 @@
       </p:sp>
       <p:sp>
         <p:nvSpPr>
-          <p:cNvPr id="37" name="Rounded Rectangle 36"/>
+          <p:cNvPr id="77" name="Rounded Rectangle 76"/>
           <p:cNvSpPr/>
           <p:nvPr/>
         </p:nvSpPr>
@@ -10354,7 +8268,7 @@
       </p:sp>
       <p:sp>
         <p:nvSpPr>
-          <p:cNvPr id="38" name="TextBox 37"/>
+          <p:cNvPr id="78" name="TextBox 77"/>
           <p:cNvSpPr txBox="1"/>
           <p:nvPr/>
         </p:nvSpPr>
@@ -10389,7 +8303,296 @@
       </p:sp>
       <p:sp>
         <p:nvSpPr>
-          <p:cNvPr id="39" name="Rounded Rectangle 38"/>
+          <p:cNvPr id="79" name="Rectangle 78"/>
+          <p:cNvSpPr/>
+          <p:nvPr/>
+        </p:nvSpPr>
+        <p:spPr>
+          <a:xfrm>
+            <a:off x="73152" y="2139696"/>
+            <a:ext cx="8741664" cy="187452"/>
+          </a:xfrm>
+          <a:prstGeom prst="rect">
+            <a:avLst/>
+          </a:prstGeom>
+          <a:solidFill>
+            <a:srgbClr val="F5F7FA"/>
+          </a:solidFill>
+          <a:ln>
+            <a:noFill/>
+          </a:ln>
+          <a:effectLst/>
+        </p:spPr>
+        <p:style>
+          <a:lnRef idx="1">
+            <a:schemeClr val="accent1"/>
+          </a:lnRef>
+          <a:fillRef idx="3">
+            <a:schemeClr val="accent1"/>
+          </a:fillRef>
+          <a:effectRef idx="2">
+            <a:schemeClr val="accent1"/>
+          </a:effectRef>
+          <a:fontRef idx="minor">
+            <a:schemeClr val="lt1"/>
+          </a:fontRef>
+        </p:style>
+        <p:txBody>
+          <a:bodyPr rtlCol="0" anchor="ctr"/>
+          <a:lstStyle/>
+          <a:p>
+            <a:pPr algn="ctr"/>
+          </a:p>
+        </p:txBody>
+      </p:sp>
+      <p:sp>
+        <p:nvSpPr>
+          <p:cNvPr id="80" name="TextBox 79"/>
+          <p:cNvSpPr txBox="1"/>
+          <p:nvPr/>
+        </p:nvSpPr>
+        <p:spPr>
+          <a:xfrm>
+            <a:off x="91440" y="2139696"/>
+            <a:ext cx="722375" cy="187452"/>
+          </a:xfrm>
+          <a:prstGeom prst="rect">
+            <a:avLst/>
+          </a:prstGeom>
+          <a:noFill/>
+        </p:spPr>
+        <p:txBody>
+          <a:bodyPr wrap="none" lIns="0" rIns="0" tIns="0" bIns="0" anchor="ctr">
+            <a:spAutoFit/>
+          </a:bodyPr>
+          <a:lstStyle/>
+          <a:p>
+            <a:pPr algn="ctr"/>
+            <a:r>
+              <a:rPr sz="700" b="1">
+                <a:solidFill>
+                  <a:srgbClr val="1A2340"/>
+                </a:solidFill>
+                <a:latin typeface="Calibri"/>
+              </a:rPr>
+              <a:t>Proyecto</a:t>
+            </a:r>
+          </a:p>
+        </p:txBody>
+      </p:sp>
+      <p:sp>
+        <p:nvSpPr>
+          <p:cNvPr id="81" name="TextBox 80"/>
+          <p:cNvSpPr txBox="1"/>
+          <p:nvPr/>
+        </p:nvSpPr>
+        <p:spPr>
+          <a:xfrm>
+            <a:off x="850392" y="2139696"/>
+            <a:ext cx="2432304" cy="187452"/>
+          </a:xfrm>
+          <a:prstGeom prst="rect">
+            <a:avLst/>
+          </a:prstGeom>
+          <a:noFill/>
+        </p:spPr>
+        <p:txBody>
+          <a:bodyPr wrap="none" lIns="0" rIns="0" tIns="0" bIns="0" anchor="ctr">
+            <a:spAutoFit/>
+          </a:bodyPr>
+          <a:lstStyle/>
+          <a:p>
+            <a:pPr algn="l"/>
+            <a:r>
+              <a:rPr sz="700" b="0">
+                <a:solidFill>
+                  <a:srgbClr val="1A2340"/>
+                </a:solidFill>
+                <a:latin typeface="Calibri"/>
+              </a:rPr>
+              <a:t>TRIM || Marketplace || Caddi</a:t>
+            </a:r>
+          </a:p>
+        </p:txBody>
+      </p:sp>
+      <p:sp>
+        <p:nvSpPr>
+          <p:cNvPr id="82" name="TextBox 81"/>
+          <p:cNvSpPr txBox="1"/>
+          <p:nvPr/>
+        </p:nvSpPr>
+        <p:spPr>
+          <a:xfrm>
+            <a:off x="3319272" y="2139696"/>
+            <a:ext cx="630936" cy="187452"/>
+          </a:xfrm>
+          <a:prstGeom prst="rect">
+            <a:avLst/>
+          </a:prstGeom>
+          <a:noFill/>
+        </p:spPr>
+        <p:txBody>
+          <a:bodyPr wrap="none" lIns="0" rIns="0" tIns="0" bIns="0" anchor="ctr">
+            <a:spAutoFit/>
+          </a:bodyPr>
+          <a:lstStyle/>
+          <a:p>
+            <a:pPr algn="ctr"/>
+            <a:r>
+              <a:rPr sz="700" b="0">
+                <a:solidFill>
+                  <a:srgbClr val="555555"/>
+                </a:solidFill>
+                <a:latin typeface="Calibri"/>
+              </a:rPr>
+              <a:t>07/08/2025</a:t>
+            </a:r>
+          </a:p>
+        </p:txBody>
+      </p:sp>
+      <p:sp>
+        <p:nvSpPr>
+          <p:cNvPr id="83" name="TextBox 82"/>
+          <p:cNvSpPr txBox="1"/>
+          <p:nvPr/>
+        </p:nvSpPr>
+        <p:spPr>
+          <a:xfrm>
+            <a:off x="3986783" y="2139696"/>
+            <a:ext cx="630936" cy="187452"/>
+          </a:xfrm>
+          <a:prstGeom prst="rect">
+            <a:avLst/>
+          </a:prstGeom>
+          <a:noFill/>
+        </p:spPr>
+        <p:txBody>
+          <a:bodyPr wrap="none" lIns="0" rIns="0" tIns="0" bIns="0" anchor="ctr">
+            <a:spAutoFit/>
+          </a:bodyPr>
+          <a:lstStyle/>
+          <a:p>
+            <a:pPr algn="ctr"/>
+            <a:r>
+              <a:rPr sz="700" b="0">
+                <a:solidFill>
+                  <a:srgbClr val="555555"/>
+                </a:solidFill>
+                <a:latin typeface="Calibri"/>
+              </a:rPr>
+              <a:t>04/08/2026</a:t>
+            </a:r>
+          </a:p>
+        </p:txBody>
+      </p:sp>
+      <p:sp>
+        <p:nvSpPr>
+          <p:cNvPr id="84" name="TextBox 83"/>
+          <p:cNvSpPr txBox="1"/>
+          <p:nvPr/>
+        </p:nvSpPr>
+        <p:spPr>
+          <a:xfrm>
+            <a:off x="4654296" y="2139696"/>
+            <a:ext cx="493775" cy="187452"/>
+          </a:xfrm>
+          <a:prstGeom prst="rect">
+            <a:avLst/>
+          </a:prstGeom>
+          <a:noFill/>
+        </p:spPr>
+        <p:txBody>
+          <a:bodyPr wrap="none" lIns="0" rIns="0" tIns="0" bIns="0" anchor="ctr">
+            <a:spAutoFit/>
+          </a:bodyPr>
+          <a:lstStyle/>
+          <a:p>
+            <a:pPr algn="ctr"/>
+            <a:r>
+              <a:rPr sz="700" b="1">
+                <a:solidFill>
+                  <a:srgbClr val="1A2340"/>
+                </a:solidFill>
+                <a:latin typeface="Calibri"/>
+              </a:rPr>
+              <a:t>97%</a:t>
+            </a:r>
+          </a:p>
+        </p:txBody>
+      </p:sp>
+      <p:sp>
+        <p:nvSpPr>
+          <p:cNvPr id="85" name="TextBox 84"/>
+          <p:cNvSpPr txBox="1"/>
+          <p:nvPr/>
+        </p:nvSpPr>
+        <p:spPr>
+          <a:xfrm>
+            <a:off x="5184648" y="2139696"/>
+            <a:ext cx="557784" cy="187452"/>
+          </a:xfrm>
+          <a:prstGeom prst="rect">
+            <a:avLst/>
+          </a:prstGeom>
+          <a:noFill/>
+        </p:spPr>
+        <p:txBody>
+          <a:bodyPr wrap="none" lIns="0" rIns="0" tIns="0" bIns="0" anchor="ctr">
+            <a:spAutoFit/>
+          </a:bodyPr>
+          <a:lstStyle/>
+          <a:p>
+            <a:pPr algn="ctr"/>
+            <a:r>
+              <a:rPr sz="700" b="0">
+                <a:solidFill>
+                  <a:srgbClr val="555555"/>
+                </a:solidFill>
+                <a:latin typeface="Calibri"/>
+              </a:rPr>
+              <a:t>91%</a:t>
+            </a:r>
+          </a:p>
+        </p:txBody>
+      </p:sp>
+      <p:sp>
+        <p:nvSpPr>
+          <p:cNvPr id="86" name="TextBox 85"/>
+          <p:cNvSpPr txBox="1"/>
+          <p:nvPr/>
+        </p:nvSpPr>
+        <p:spPr>
+          <a:xfrm>
+            <a:off x="7991856" y="2139696"/>
+            <a:ext cx="804672" cy="187452"/>
+          </a:xfrm>
+          <a:prstGeom prst="rect">
+            <a:avLst/>
+          </a:prstGeom>
+          <a:noFill/>
+        </p:spPr>
+        <p:txBody>
+          <a:bodyPr wrap="none" lIns="0" rIns="0" tIns="0" bIns="0" anchor="ctr">
+            <a:spAutoFit/>
+          </a:bodyPr>
+          <a:lstStyle/>
+          <a:p>
+            <a:pPr algn="ctr"/>
+            <a:r>
+              <a:rPr sz="700" b="1">
+                <a:solidFill>
+                  <a:srgbClr val="22C55E"/>
+                </a:solidFill>
+                <a:latin typeface="Calibri"/>
+              </a:rPr>
+              <a:t>A tiempo</a:t>
+            </a:r>
+          </a:p>
+        </p:txBody>
+      </p:sp>
+      <p:sp>
+        <p:nvSpPr>
+          <p:cNvPr id="87" name="Rounded Rectangle 86"/>
           <p:cNvSpPr/>
           <p:nvPr/>
         </p:nvSpPr>
@@ -10440,7 +8643,7 @@
       </p:sp>
       <p:sp>
         <p:nvSpPr>
-          <p:cNvPr id="40" name="Rounded Rectangle 39"/>
+          <p:cNvPr id="88" name="Rounded Rectangle 87"/>
           <p:cNvSpPr/>
           <p:nvPr/>
         </p:nvSpPr>
@@ -10492,7 +8695,7 @@
       </p:sp>
       <p:sp>
         <p:nvSpPr>
-          <p:cNvPr id="41" name="TextBox 40"/>
+          <p:cNvPr id="89" name="TextBox 88"/>
           <p:cNvSpPr txBox="1"/>
           <p:nvPr/>
         </p:nvSpPr>
@@ -10527,7 +8730,296 @@
       </p:sp>
       <p:sp>
         <p:nvSpPr>
-          <p:cNvPr id="42" name="Rounded Rectangle 41"/>
+          <p:cNvPr id="90" name="Rectangle 89"/>
+          <p:cNvSpPr/>
+          <p:nvPr/>
+        </p:nvSpPr>
+        <p:spPr>
+          <a:xfrm>
+            <a:off x="73152" y="2327148"/>
+            <a:ext cx="8741664" cy="187452"/>
+          </a:xfrm>
+          <a:prstGeom prst="rect">
+            <a:avLst/>
+          </a:prstGeom>
+          <a:solidFill>
+            <a:srgbClr val="FFFFFF"/>
+          </a:solidFill>
+          <a:ln>
+            <a:noFill/>
+          </a:ln>
+          <a:effectLst/>
+        </p:spPr>
+        <p:style>
+          <a:lnRef idx="1">
+            <a:schemeClr val="accent1"/>
+          </a:lnRef>
+          <a:fillRef idx="3">
+            <a:schemeClr val="accent1"/>
+          </a:fillRef>
+          <a:effectRef idx="2">
+            <a:schemeClr val="accent1"/>
+          </a:effectRef>
+          <a:fontRef idx="minor">
+            <a:schemeClr val="lt1"/>
+          </a:fontRef>
+        </p:style>
+        <p:txBody>
+          <a:bodyPr rtlCol="0" anchor="ctr"/>
+          <a:lstStyle/>
+          <a:p>
+            <a:pPr algn="ctr"/>
+          </a:p>
+        </p:txBody>
+      </p:sp>
+      <p:sp>
+        <p:nvSpPr>
+          <p:cNvPr id="91" name="TextBox 90"/>
+          <p:cNvSpPr txBox="1"/>
+          <p:nvPr/>
+        </p:nvSpPr>
+        <p:spPr>
+          <a:xfrm>
+            <a:off x="91440" y="2327148"/>
+            <a:ext cx="722375" cy="187452"/>
+          </a:xfrm>
+          <a:prstGeom prst="rect">
+            <a:avLst/>
+          </a:prstGeom>
+          <a:noFill/>
+        </p:spPr>
+        <p:txBody>
+          <a:bodyPr wrap="none" lIns="0" rIns="0" tIns="0" bIns="0" anchor="ctr">
+            <a:spAutoFit/>
+          </a:bodyPr>
+          <a:lstStyle/>
+          <a:p>
+            <a:pPr algn="ctr"/>
+            <a:r>
+              <a:rPr sz="700" b="1">
+                <a:solidFill>
+                  <a:srgbClr val="1A2340"/>
+                </a:solidFill>
+                <a:latin typeface="Calibri"/>
+              </a:rPr>
+              <a:t>Proyecto</a:t>
+            </a:r>
+          </a:p>
+        </p:txBody>
+      </p:sp>
+      <p:sp>
+        <p:nvSpPr>
+          <p:cNvPr id="92" name="TextBox 91"/>
+          <p:cNvSpPr txBox="1"/>
+          <p:nvPr/>
+        </p:nvSpPr>
+        <p:spPr>
+          <a:xfrm>
+            <a:off x="850392" y="2327148"/>
+            <a:ext cx="2432304" cy="187452"/>
+          </a:xfrm>
+          <a:prstGeom prst="rect">
+            <a:avLst/>
+          </a:prstGeom>
+          <a:noFill/>
+        </p:spPr>
+        <p:txBody>
+          <a:bodyPr wrap="none" lIns="0" rIns="0" tIns="0" bIns="0" anchor="ctr">
+            <a:spAutoFit/>
+          </a:bodyPr>
+          <a:lstStyle/>
+          <a:p>
+            <a:pPr algn="l"/>
+            <a:r>
+              <a:rPr sz="700" b="0">
+                <a:solidFill>
+                  <a:srgbClr val="1A2340"/>
+                </a:solidFill>
+                <a:latin typeface="Calibri"/>
+              </a:rPr>
+              <a:t>Contabilidad || Integración Mecanica-SAE (Fase…</a:t>
+            </a:r>
+          </a:p>
+        </p:txBody>
+      </p:sp>
+      <p:sp>
+        <p:nvSpPr>
+          <p:cNvPr id="93" name="TextBox 92"/>
+          <p:cNvSpPr txBox="1"/>
+          <p:nvPr/>
+        </p:nvSpPr>
+        <p:spPr>
+          <a:xfrm>
+            <a:off x="3319272" y="2327148"/>
+            <a:ext cx="630936" cy="187452"/>
+          </a:xfrm>
+          <a:prstGeom prst="rect">
+            <a:avLst/>
+          </a:prstGeom>
+          <a:noFill/>
+        </p:spPr>
+        <p:txBody>
+          <a:bodyPr wrap="none" lIns="0" rIns="0" tIns="0" bIns="0" anchor="ctr">
+            <a:spAutoFit/>
+          </a:bodyPr>
+          <a:lstStyle/>
+          <a:p>
+            <a:pPr algn="ctr"/>
+            <a:r>
+              <a:rPr sz="700" b="0">
+                <a:solidFill>
+                  <a:srgbClr val="555555"/>
+                </a:solidFill>
+                <a:latin typeface="Calibri"/>
+              </a:rPr>
+              <a:t>14/08/2025</a:t>
+            </a:r>
+          </a:p>
+        </p:txBody>
+      </p:sp>
+      <p:sp>
+        <p:nvSpPr>
+          <p:cNvPr id="94" name="TextBox 93"/>
+          <p:cNvSpPr txBox="1"/>
+          <p:nvPr/>
+        </p:nvSpPr>
+        <p:spPr>
+          <a:xfrm>
+            <a:off x="3986783" y="2327148"/>
+            <a:ext cx="630936" cy="187452"/>
+          </a:xfrm>
+          <a:prstGeom prst="rect">
+            <a:avLst/>
+          </a:prstGeom>
+          <a:noFill/>
+        </p:spPr>
+        <p:txBody>
+          <a:bodyPr wrap="none" lIns="0" rIns="0" tIns="0" bIns="0" anchor="ctr">
+            <a:spAutoFit/>
+          </a:bodyPr>
+          <a:lstStyle/>
+          <a:p>
+            <a:pPr algn="ctr"/>
+            <a:r>
+              <a:rPr sz="700" b="0">
+                <a:solidFill>
+                  <a:srgbClr val="555555"/>
+                </a:solidFill>
+                <a:latin typeface="Calibri"/>
+              </a:rPr>
+              <a:t>02/06/2026</a:t>
+            </a:r>
+          </a:p>
+        </p:txBody>
+      </p:sp>
+      <p:sp>
+        <p:nvSpPr>
+          <p:cNvPr id="95" name="TextBox 94"/>
+          <p:cNvSpPr txBox="1"/>
+          <p:nvPr/>
+        </p:nvSpPr>
+        <p:spPr>
+          <a:xfrm>
+            <a:off x="4654296" y="2327148"/>
+            <a:ext cx="493775" cy="187452"/>
+          </a:xfrm>
+          <a:prstGeom prst="rect">
+            <a:avLst/>
+          </a:prstGeom>
+          <a:noFill/>
+        </p:spPr>
+        <p:txBody>
+          <a:bodyPr wrap="none" lIns="0" rIns="0" tIns="0" bIns="0" anchor="ctr">
+            <a:spAutoFit/>
+          </a:bodyPr>
+          <a:lstStyle/>
+          <a:p>
+            <a:pPr algn="ctr"/>
+            <a:r>
+              <a:rPr sz="700" b="1">
+                <a:solidFill>
+                  <a:srgbClr val="1A2340"/>
+                </a:solidFill>
+                <a:latin typeface="Calibri"/>
+              </a:rPr>
+              <a:t>95%</a:t>
+            </a:r>
+          </a:p>
+        </p:txBody>
+      </p:sp>
+      <p:sp>
+        <p:nvSpPr>
+          <p:cNvPr id="96" name="TextBox 95"/>
+          <p:cNvSpPr txBox="1"/>
+          <p:nvPr/>
+        </p:nvSpPr>
+        <p:spPr>
+          <a:xfrm>
+            <a:off x="5184648" y="2327148"/>
+            <a:ext cx="557784" cy="187452"/>
+          </a:xfrm>
+          <a:prstGeom prst="rect">
+            <a:avLst/>
+          </a:prstGeom>
+          <a:noFill/>
+        </p:spPr>
+        <p:txBody>
+          <a:bodyPr wrap="none" lIns="0" rIns="0" tIns="0" bIns="0" anchor="ctr">
+            <a:spAutoFit/>
+          </a:bodyPr>
+          <a:lstStyle/>
+          <a:p>
+            <a:pPr algn="ctr"/>
+            <a:r>
+              <a:rPr sz="700" b="0">
+                <a:solidFill>
+                  <a:srgbClr val="555555"/>
+                </a:solidFill>
+                <a:latin typeface="Calibri"/>
+              </a:rPr>
+              <a:t>100%</a:t>
+            </a:r>
+          </a:p>
+        </p:txBody>
+      </p:sp>
+      <p:sp>
+        <p:nvSpPr>
+          <p:cNvPr id="97" name="TextBox 96"/>
+          <p:cNvSpPr txBox="1"/>
+          <p:nvPr/>
+        </p:nvSpPr>
+        <p:spPr>
+          <a:xfrm>
+            <a:off x="7991856" y="2327148"/>
+            <a:ext cx="804672" cy="187452"/>
+          </a:xfrm>
+          <a:prstGeom prst="rect">
+            <a:avLst/>
+          </a:prstGeom>
+          <a:noFill/>
+        </p:spPr>
+        <p:txBody>
+          <a:bodyPr wrap="none" lIns="0" rIns="0" tIns="0" bIns="0" anchor="ctr">
+            <a:spAutoFit/>
+          </a:bodyPr>
+          <a:lstStyle/>
+          <a:p>
+            <a:pPr algn="ctr"/>
+            <a:r>
+              <a:rPr sz="700" b="1">
+                <a:solidFill>
+                  <a:srgbClr val="EF4444"/>
+                </a:solidFill>
+                <a:latin typeface="Calibri"/>
+              </a:rPr>
+              <a:t>Atrasado</a:t>
+            </a:r>
+          </a:p>
+        </p:txBody>
+      </p:sp>
+      <p:sp>
+        <p:nvSpPr>
+          <p:cNvPr id="98" name="Rounded Rectangle 97"/>
           <p:cNvSpPr/>
           <p:nvPr/>
         </p:nvSpPr>
@@ -10578,7 +9070,7 @@
       </p:sp>
       <p:sp>
         <p:nvSpPr>
-          <p:cNvPr id="43" name="Rounded Rectangle 42"/>
+          <p:cNvPr id="99" name="Rounded Rectangle 98"/>
           <p:cNvSpPr/>
           <p:nvPr/>
         </p:nvSpPr>
@@ -10630,7 +9122,7 @@
       </p:sp>
       <p:sp>
         <p:nvSpPr>
-          <p:cNvPr id="44" name="TextBox 43"/>
+          <p:cNvPr id="100" name="TextBox 99"/>
           <p:cNvSpPr txBox="1"/>
           <p:nvPr/>
         </p:nvSpPr>
@@ -10665,7 +9157,296 @@
       </p:sp>
       <p:sp>
         <p:nvSpPr>
-          <p:cNvPr id="45" name="Rounded Rectangle 44"/>
+          <p:cNvPr id="101" name="Rectangle 100"/>
+          <p:cNvSpPr/>
+          <p:nvPr/>
+        </p:nvSpPr>
+        <p:spPr>
+          <a:xfrm>
+            <a:off x="73152" y="2514600"/>
+            <a:ext cx="8741664" cy="187452"/>
+          </a:xfrm>
+          <a:prstGeom prst="rect">
+            <a:avLst/>
+          </a:prstGeom>
+          <a:solidFill>
+            <a:srgbClr val="F5F7FA"/>
+          </a:solidFill>
+          <a:ln>
+            <a:noFill/>
+          </a:ln>
+          <a:effectLst/>
+        </p:spPr>
+        <p:style>
+          <a:lnRef idx="1">
+            <a:schemeClr val="accent1"/>
+          </a:lnRef>
+          <a:fillRef idx="3">
+            <a:schemeClr val="accent1"/>
+          </a:fillRef>
+          <a:effectRef idx="2">
+            <a:schemeClr val="accent1"/>
+          </a:effectRef>
+          <a:fontRef idx="minor">
+            <a:schemeClr val="lt1"/>
+          </a:fontRef>
+        </p:style>
+        <p:txBody>
+          <a:bodyPr rtlCol="0" anchor="ctr"/>
+          <a:lstStyle/>
+          <a:p>
+            <a:pPr algn="ctr"/>
+          </a:p>
+        </p:txBody>
+      </p:sp>
+      <p:sp>
+        <p:nvSpPr>
+          <p:cNvPr id="102" name="TextBox 101"/>
+          <p:cNvSpPr txBox="1"/>
+          <p:nvPr/>
+        </p:nvSpPr>
+        <p:spPr>
+          <a:xfrm>
+            <a:off x="91440" y="2514600"/>
+            <a:ext cx="722375" cy="187452"/>
+          </a:xfrm>
+          <a:prstGeom prst="rect">
+            <a:avLst/>
+          </a:prstGeom>
+          <a:noFill/>
+        </p:spPr>
+        <p:txBody>
+          <a:bodyPr wrap="none" lIns="0" rIns="0" tIns="0" bIns="0" anchor="ctr">
+            <a:spAutoFit/>
+          </a:bodyPr>
+          <a:lstStyle/>
+          <a:p>
+            <a:pPr algn="ctr"/>
+            <a:r>
+              <a:rPr sz="700" b="1">
+                <a:solidFill>
+                  <a:srgbClr val="1A2340"/>
+                </a:solidFill>
+                <a:latin typeface="Calibri"/>
+              </a:rPr>
+              <a:t>Proyecto</a:t>
+            </a:r>
+          </a:p>
+        </p:txBody>
+      </p:sp>
+      <p:sp>
+        <p:nvSpPr>
+          <p:cNvPr id="103" name="TextBox 102"/>
+          <p:cNvSpPr txBox="1"/>
+          <p:nvPr/>
+        </p:nvSpPr>
+        <p:spPr>
+          <a:xfrm>
+            <a:off x="850392" y="2514600"/>
+            <a:ext cx="2432304" cy="187452"/>
+          </a:xfrm>
+          <a:prstGeom prst="rect">
+            <a:avLst/>
+          </a:prstGeom>
+          <a:noFill/>
+        </p:spPr>
+        <p:txBody>
+          <a:bodyPr wrap="none" lIns="0" rIns="0" tIns="0" bIns="0" anchor="ctr">
+            <a:spAutoFit/>
+          </a:bodyPr>
+          <a:lstStyle/>
+          <a:p>
+            <a:pPr algn="l"/>
+            <a:r>
+              <a:rPr sz="700" b="0">
+                <a:solidFill>
+                  <a:srgbClr val="1A2340"/>
+                </a:solidFill>
+                <a:latin typeface="Calibri"/>
+              </a:rPr>
+              <a:t>Operaciones Fleet || Desarrollos</a:t>
+            </a:r>
+          </a:p>
+        </p:txBody>
+      </p:sp>
+      <p:sp>
+        <p:nvSpPr>
+          <p:cNvPr id="104" name="TextBox 103"/>
+          <p:cNvSpPr txBox="1"/>
+          <p:nvPr/>
+        </p:nvSpPr>
+        <p:spPr>
+          <a:xfrm>
+            <a:off x="3319272" y="2514600"/>
+            <a:ext cx="630936" cy="187452"/>
+          </a:xfrm>
+          <a:prstGeom prst="rect">
+            <a:avLst/>
+          </a:prstGeom>
+          <a:noFill/>
+        </p:spPr>
+        <p:txBody>
+          <a:bodyPr wrap="none" lIns="0" rIns="0" tIns="0" bIns="0" anchor="ctr">
+            <a:spAutoFit/>
+          </a:bodyPr>
+          <a:lstStyle/>
+          <a:p>
+            <a:pPr algn="ctr"/>
+            <a:r>
+              <a:rPr sz="700" b="0">
+                <a:solidFill>
+                  <a:srgbClr val="555555"/>
+                </a:solidFill>
+                <a:latin typeface="Calibri"/>
+              </a:rPr>
+              <a:t>08/08/2025</a:t>
+            </a:r>
+          </a:p>
+        </p:txBody>
+      </p:sp>
+      <p:sp>
+        <p:nvSpPr>
+          <p:cNvPr id="105" name="TextBox 104"/>
+          <p:cNvSpPr txBox="1"/>
+          <p:nvPr/>
+        </p:nvSpPr>
+        <p:spPr>
+          <a:xfrm>
+            <a:off x="3986783" y="2514600"/>
+            <a:ext cx="630936" cy="187452"/>
+          </a:xfrm>
+          <a:prstGeom prst="rect">
+            <a:avLst/>
+          </a:prstGeom>
+          <a:noFill/>
+        </p:spPr>
+        <p:txBody>
+          <a:bodyPr wrap="none" lIns="0" rIns="0" tIns="0" bIns="0" anchor="ctr">
+            <a:spAutoFit/>
+          </a:bodyPr>
+          <a:lstStyle/>
+          <a:p>
+            <a:pPr algn="ctr"/>
+            <a:r>
+              <a:rPr sz="700" b="0">
+                <a:solidFill>
+                  <a:srgbClr val="555555"/>
+                </a:solidFill>
+                <a:latin typeface="Calibri"/>
+              </a:rPr>
+              <a:t>05/06/2026</a:t>
+            </a:r>
+          </a:p>
+        </p:txBody>
+      </p:sp>
+      <p:sp>
+        <p:nvSpPr>
+          <p:cNvPr id="106" name="TextBox 105"/>
+          <p:cNvSpPr txBox="1"/>
+          <p:nvPr/>
+        </p:nvSpPr>
+        <p:spPr>
+          <a:xfrm>
+            <a:off x="4654296" y="2514600"/>
+            <a:ext cx="493775" cy="187452"/>
+          </a:xfrm>
+          <a:prstGeom prst="rect">
+            <a:avLst/>
+          </a:prstGeom>
+          <a:noFill/>
+        </p:spPr>
+        <p:txBody>
+          <a:bodyPr wrap="none" lIns="0" rIns="0" tIns="0" bIns="0" anchor="ctr">
+            <a:spAutoFit/>
+          </a:bodyPr>
+          <a:lstStyle/>
+          <a:p>
+            <a:pPr algn="ctr"/>
+            <a:r>
+              <a:rPr sz="700" b="1">
+                <a:solidFill>
+                  <a:srgbClr val="1A2340"/>
+                </a:solidFill>
+                <a:latin typeface="Calibri"/>
+              </a:rPr>
+              <a:t>100%</a:t>
+            </a:r>
+          </a:p>
+        </p:txBody>
+      </p:sp>
+      <p:sp>
+        <p:nvSpPr>
+          <p:cNvPr id="107" name="TextBox 106"/>
+          <p:cNvSpPr txBox="1"/>
+          <p:nvPr/>
+        </p:nvSpPr>
+        <p:spPr>
+          <a:xfrm>
+            <a:off x="5184648" y="2514600"/>
+            <a:ext cx="557784" cy="187452"/>
+          </a:xfrm>
+          <a:prstGeom prst="rect">
+            <a:avLst/>
+          </a:prstGeom>
+          <a:noFill/>
+        </p:spPr>
+        <p:txBody>
+          <a:bodyPr wrap="none" lIns="0" rIns="0" tIns="0" bIns="0" anchor="ctr">
+            <a:spAutoFit/>
+          </a:bodyPr>
+          <a:lstStyle/>
+          <a:p>
+            <a:pPr algn="ctr"/>
+            <a:r>
+              <a:rPr sz="700" b="0">
+                <a:solidFill>
+                  <a:srgbClr val="555555"/>
+                </a:solidFill>
+                <a:latin typeface="Calibri"/>
+              </a:rPr>
+              <a:t>100%</a:t>
+            </a:r>
+          </a:p>
+        </p:txBody>
+      </p:sp>
+      <p:sp>
+        <p:nvSpPr>
+          <p:cNvPr id="108" name="TextBox 107"/>
+          <p:cNvSpPr txBox="1"/>
+          <p:nvPr/>
+        </p:nvSpPr>
+        <p:spPr>
+          <a:xfrm>
+            <a:off x="7991856" y="2514600"/>
+            <a:ext cx="804672" cy="187452"/>
+          </a:xfrm>
+          <a:prstGeom prst="rect">
+            <a:avLst/>
+          </a:prstGeom>
+          <a:noFill/>
+        </p:spPr>
+        <p:txBody>
+          <a:bodyPr wrap="none" lIns="0" rIns="0" tIns="0" bIns="0" anchor="ctr">
+            <a:spAutoFit/>
+          </a:bodyPr>
+          <a:lstStyle/>
+          <a:p>
+            <a:pPr algn="ctr"/>
+            <a:r>
+              <a:rPr sz="700" b="1">
+                <a:solidFill>
+                  <a:srgbClr val="22C55E"/>
+                </a:solidFill>
+                <a:latin typeface="Calibri"/>
+              </a:rPr>
+              <a:t>Terminado</a:t>
+            </a:r>
+          </a:p>
+        </p:txBody>
+      </p:sp>
+      <p:sp>
+        <p:nvSpPr>
+          <p:cNvPr id="109" name="Rounded Rectangle 108"/>
           <p:cNvSpPr/>
           <p:nvPr/>
         </p:nvSpPr>
@@ -10716,7 +9497,7 @@
       </p:sp>
       <p:sp>
         <p:nvSpPr>
-          <p:cNvPr id="46" name="Rounded Rectangle 45"/>
+          <p:cNvPr id="110" name="Rounded Rectangle 109"/>
           <p:cNvSpPr/>
           <p:nvPr/>
         </p:nvSpPr>
@@ -10768,7 +9549,7 @@
       </p:sp>
       <p:sp>
         <p:nvSpPr>
-          <p:cNvPr id="47" name="TextBox 46"/>
+          <p:cNvPr id="111" name="TextBox 110"/>
           <p:cNvSpPr txBox="1"/>
           <p:nvPr/>
         </p:nvSpPr>
@@ -10803,7 +9584,296 @@
       </p:sp>
       <p:sp>
         <p:nvSpPr>
-          <p:cNvPr id="48" name="Rounded Rectangle 47"/>
+          <p:cNvPr id="112" name="Rectangle 111"/>
+          <p:cNvSpPr/>
+          <p:nvPr/>
+        </p:nvSpPr>
+        <p:spPr>
+          <a:xfrm>
+            <a:off x="73152" y="2702052"/>
+            <a:ext cx="8741664" cy="187452"/>
+          </a:xfrm>
+          <a:prstGeom prst="rect">
+            <a:avLst/>
+          </a:prstGeom>
+          <a:solidFill>
+            <a:srgbClr val="FFFFFF"/>
+          </a:solidFill>
+          <a:ln>
+            <a:noFill/>
+          </a:ln>
+          <a:effectLst/>
+        </p:spPr>
+        <p:style>
+          <a:lnRef idx="1">
+            <a:schemeClr val="accent1"/>
+          </a:lnRef>
+          <a:fillRef idx="3">
+            <a:schemeClr val="accent1"/>
+          </a:fillRef>
+          <a:effectRef idx="2">
+            <a:schemeClr val="accent1"/>
+          </a:effectRef>
+          <a:fontRef idx="minor">
+            <a:schemeClr val="lt1"/>
+          </a:fontRef>
+        </p:style>
+        <p:txBody>
+          <a:bodyPr rtlCol="0" anchor="ctr"/>
+          <a:lstStyle/>
+          <a:p>
+            <a:pPr algn="ctr"/>
+          </a:p>
+        </p:txBody>
+      </p:sp>
+      <p:sp>
+        <p:nvSpPr>
+          <p:cNvPr id="113" name="TextBox 112"/>
+          <p:cNvSpPr txBox="1"/>
+          <p:nvPr/>
+        </p:nvSpPr>
+        <p:spPr>
+          <a:xfrm>
+            <a:off x="91440" y="2702052"/>
+            <a:ext cx="722375" cy="187452"/>
+          </a:xfrm>
+          <a:prstGeom prst="rect">
+            <a:avLst/>
+          </a:prstGeom>
+          <a:noFill/>
+        </p:spPr>
+        <p:txBody>
+          <a:bodyPr wrap="none" lIns="0" rIns="0" tIns="0" bIns="0" anchor="ctr">
+            <a:spAutoFit/>
+          </a:bodyPr>
+          <a:lstStyle/>
+          <a:p>
+            <a:pPr algn="ctr"/>
+            <a:r>
+              <a:rPr sz="700" b="1">
+                <a:solidFill>
+                  <a:srgbClr val="1A2340"/>
+                </a:solidFill>
+                <a:latin typeface="Calibri"/>
+              </a:rPr>
+              <a:t>Proyecto</a:t>
+            </a:r>
+          </a:p>
+        </p:txBody>
+      </p:sp>
+      <p:sp>
+        <p:nvSpPr>
+          <p:cNvPr id="114" name="TextBox 113"/>
+          <p:cNvSpPr txBox="1"/>
+          <p:nvPr/>
+        </p:nvSpPr>
+        <p:spPr>
+          <a:xfrm>
+            <a:off x="850392" y="2702052"/>
+            <a:ext cx="2432304" cy="187452"/>
+          </a:xfrm>
+          <a:prstGeom prst="rect">
+            <a:avLst/>
+          </a:prstGeom>
+          <a:noFill/>
+        </p:spPr>
+        <p:txBody>
+          <a:bodyPr wrap="none" lIns="0" rIns="0" tIns="0" bIns="0" anchor="ctr">
+            <a:spAutoFit/>
+          </a:bodyPr>
+          <a:lstStyle/>
+          <a:p>
+            <a:pPr algn="l"/>
+            <a:r>
+              <a:rPr sz="700" b="0">
+                <a:solidFill>
+                  <a:srgbClr val="1A2340"/>
+                </a:solidFill>
+                <a:latin typeface="Calibri"/>
+              </a:rPr>
+              <a:t>Operaciones Fleet || Lobby Fix</a:t>
+            </a:r>
+          </a:p>
+        </p:txBody>
+      </p:sp>
+      <p:sp>
+        <p:nvSpPr>
+          <p:cNvPr id="115" name="TextBox 114"/>
+          <p:cNvSpPr txBox="1"/>
+          <p:nvPr/>
+        </p:nvSpPr>
+        <p:spPr>
+          <a:xfrm>
+            <a:off x="3319272" y="2702052"/>
+            <a:ext cx="630936" cy="187452"/>
+          </a:xfrm>
+          <a:prstGeom prst="rect">
+            <a:avLst/>
+          </a:prstGeom>
+          <a:noFill/>
+        </p:spPr>
+        <p:txBody>
+          <a:bodyPr wrap="none" lIns="0" rIns="0" tIns="0" bIns="0" anchor="ctr">
+            <a:spAutoFit/>
+          </a:bodyPr>
+          <a:lstStyle/>
+          <a:p>
+            <a:pPr algn="ctr"/>
+            <a:r>
+              <a:rPr sz="700" b="0">
+                <a:solidFill>
+                  <a:srgbClr val="555555"/>
+                </a:solidFill>
+                <a:latin typeface="Calibri"/>
+              </a:rPr>
+              <a:t>11/11/2025</a:t>
+            </a:r>
+          </a:p>
+        </p:txBody>
+      </p:sp>
+      <p:sp>
+        <p:nvSpPr>
+          <p:cNvPr id="116" name="TextBox 115"/>
+          <p:cNvSpPr txBox="1"/>
+          <p:nvPr/>
+        </p:nvSpPr>
+        <p:spPr>
+          <a:xfrm>
+            <a:off x="3986783" y="2702052"/>
+            <a:ext cx="630936" cy="187452"/>
+          </a:xfrm>
+          <a:prstGeom prst="rect">
+            <a:avLst/>
+          </a:prstGeom>
+          <a:noFill/>
+        </p:spPr>
+        <p:txBody>
+          <a:bodyPr wrap="none" lIns="0" rIns="0" tIns="0" bIns="0" anchor="ctr">
+            <a:spAutoFit/>
+          </a:bodyPr>
+          <a:lstStyle/>
+          <a:p>
+            <a:pPr algn="ctr"/>
+            <a:r>
+              <a:rPr sz="700" b="0">
+                <a:solidFill>
+                  <a:srgbClr val="555555"/>
+                </a:solidFill>
+                <a:latin typeface="Calibri"/>
+              </a:rPr>
+              <a:t>29/06/2026</a:t>
+            </a:r>
+          </a:p>
+        </p:txBody>
+      </p:sp>
+      <p:sp>
+        <p:nvSpPr>
+          <p:cNvPr id="117" name="TextBox 116"/>
+          <p:cNvSpPr txBox="1"/>
+          <p:nvPr/>
+        </p:nvSpPr>
+        <p:spPr>
+          <a:xfrm>
+            <a:off x="4654296" y="2702052"/>
+            <a:ext cx="493775" cy="187452"/>
+          </a:xfrm>
+          <a:prstGeom prst="rect">
+            <a:avLst/>
+          </a:prstGeom>
+          <a:noFill/>
+        </p:spPr>
+        <p:txBody>
+          <a:bodyPr wrap="none" lIns="0" rIns="0" tIns="0" bIns="0" anchor="ctr">
+            <a:spAutoFit/>
+          </a:bodyPr>
+          <a:lstStyle/>
+          <a:p>
+            <a:pPr algn="ctr"/>
+            <a:r>
+              <a:rPr sz="700" b="1">
+                <a:solidFill>
+                  <a:srgbClr val="1A2340"/>
+                </a:solidFill>
+                <a:latin typeface="Calibri"/>
+              </a:rPr>
+              <a:t>100%</a:t>
+            </a:r>
+          </a:p>
+        </p:txBody>
+      </p:sp>
+      <p:sp>
+        <p:nvSpPr>
+          <p:cNvPr id="118" name="TextBox 117"/>
+          <p:cNvSpPr txBox="1"/>
+          <p:nvPr/>
+        </p:nvSpPr>
+        <p:spPr>
+          <a:xfrm>
+            <a:off x="5184648" y="2702052"/>
+            <a:ext cx="557784" cy="187452"/>
+          </a:xfrm>
+          <a:prstGeom prst="rect">
+            <a:avLst/>
+          </a:prstGeom>
+          <a:noFill/>
+        </p:spPr>
+        <p:txBody>
+          <a:bodyPr wrap="none" lIns="0" rIns="0" tIns="0" bIns="0" anchor="ctr">
+            <a:spAutoFit/>
+          </a:bodyPr>
+          <a:lstStyle/>
+          <a:p>
+            <a:pPr algn="ctr"/>
+            <a:r>
+              <a:rPr sz="700" b="0">
+                <a:solidFill>
+                  <a:srgbClr val="555555"/>
+                </a:solidFill>
+                <a:latin typeface="Calibri"/>
+              </a:rPr>
+              <a:t>100%</a:t>
+            </a:r>
+          </a:p>
+        </p:txBody>
+      </p:sp>
+      <p:sp>
+        <p:nvSpPr>
+          <p:cNvPr id="119" name="TextBox 118"/>
+          <p:cNvSpPr txBox="1"/>
+          <p:nvPr/>
+        </p:nvSpPr>
+        <p:spPr>
+          <a:xfrm>
+            <a:off x="7991856" y="2702052"/>
+            <a:ext cx="804672" cy="187452"/>
+          </a:xfrm>
+          <a:prstGeom prst="rect">
+            <a:avLst/>
+          </a:prstGeom>
+          <a:noFill/>
+        </p:spPr>
+        <p:txBody>
+          <a:bodyPr wrap="none" lIns="0" rIns="0" tIns="0" bIns="0" anchor="ctr">
+            <a:spAutoFit/>
+          </a:bodyPr>
+          <a:lstStyle/>
+          <a:p>
+            <a:pPr algn="ctr"/>
+            <a:r>
+              <a:rPr sz="700" b="1">
+                <a:solidFill>
+                  <a:srgbClr val="22C55E"/>
+                </a:solidFill>
+                <a:latin typeface="Calibri"/>
+              </a:rPr>
+              <a:t>Terminado</a:t>
+            </a:r>
+          </a:p>
+        </p:txBody>
+      </p:sp>
+      <p:sp>
+        <p:nvSpPr>
+          <p:cNvPr id="120" name="Rounded Rectangle 119"/>
           <p:cNvSpPr/>
           <p:nvPr/>
         </p:nvSpPr>
@@ -10854,7 +9924,7 @@
       </p:sp>
       <p:sp>
         <p:nvSpPr>
-          <p:cNvPr id="49" name="Rounded Rectangle 48"/>
+          <p:cNvPr id="121" name="Rounded Rectangle 120"/>
           <p:cNvSpPr/>
           <p:nvPr/>
         </p:nvSpPr>
@@ -10906,7 +9976,7 @@
       </p:sp>
       <p:sp>
         <p:nvSpPr>
-          <p:cNvPr id="50" name="TextBox 49"/>
+          <p:cNvPr id="122" name="TextBox 121"/>
           <p:cNvSpPr txBox="1"/>
           <p:nvPr/>
         </p:nvSpPr>
@@ -10941,7 +10011,296 @@
       </p:sp>
       <p:sp>
         <p:nvSpPr>
-          <p:cNvPr id="51" name="Rounded Rectangle 50"/>
+          <p:cNvPr id="123" name="Rectangle 122"/>
+          <p:cNvSpPr/>
+          <p:nvPr/>
+        </p:nvSpPr>
+        <p:spPr>
+          <a:xfrm>
+            <a:off x="73152" y="2889504"/>
+            <a:ext cx="8741664" cy="187452"/>
+          </a:xfrm>
+          <a:prstGeom prst="rect">
+            <a:avLst/>
+          </a:prstGeom>
+          <a:solidFill>
+            <a:srgbClr val="F5F7FA"/>
+          </a:solidFill>
+          <a:ln>
+            <a:noFill/>
+          </a:ln>
+          <a:effectLst/>
+        </p:spPr>
+        <p:style>
+          <a:lnRef idx="1">
+            <a:schemeClr val="accent1"/>
+          </a:lnRef>
+          <a:fillRef idx="3">
+            <a:schemeClr val="accent1"/>
+          </a:fillRef>
+          <a:effectRef idx="2">
+            <a:schemeClr val="accent1"/>
+          </a:effectRef>
+          <a:fontRef idx="minor">
+            <a:schemeClr val="lt1"/>
+          </a:fontRef>
+        </p:style>
+        <p:txBody>
+          <a:bodyPr rtlCol="0" anchor="ctr"/>
+          <a:lstStyle/>
+          <a:p>
+            <a:pPr algn="ctr"/>
+          </a:p>
+        </p:txBody>
+      </p:sp>
+      <p:sp>
+        <p:nvSpPr>
+          <p:cNvPr id="124" name="TextBox 123"/>
+          <p:cNvSpPr txBox="1"/>
+          <p:nvPr/>
+        </p:nvSpPr>
+        <p:spPr>
+          <a:xfrm>
+            <a:off x="91440" y="2889504"/>
+            <a:ext cx="722375" cy="187452"/>
+          </a:xfrm>
+          <a:prstGeom prst="rect">
+            <a:avLst/>
+          </a:prstGeom>
+          <a:noFill/>
+        </p:spPr>
+        <p:txBody>
+          <a:bodyPr wrap="none" lIns="0" rIns="0" tIns="0" bIns="0" anchor="ctr">
+            <a:spAutoFit/>
+          </a:bodyPr>
+          <a:lstStyle/>
+          <a:p>
+            <a:pPr algn="ctr"/>
+            <a:r>
+              <a:rPr sz="700" b="1">
+                <a:solidFill>
+                  <a:srgbClr val="1A2340"/>
+                </a:solidFill>
+                <a:latin typeface="Calibri"/>
+              </a:rPr>
+              <a:t>Proyecto</a:t>
+            </a:r>
+          </a:p>
+        </p:txBody>
+      </p:sp>
+      <p:sp>
+        <p:nvSpPr>
+          <p:cNvPr id="125" name="TextBox 124"/>
+          <p:cNvSpPr txBox="1"/>
+          <p:nvPr/>
+        </p:nvSpPr>
+        <p:spPr>
+          <a:xfrm>
+            <a:off x="850392" y="2889504"/>
+            <a:ext cx="2432304" cy="187452"/>
+          </a:xfrm>
+          <a:prstGeom prst="rect">
+            <a:avLst/>
+          </a:prstGeom>
+          <a:noFill/>
+        </p:spPr>
+        <p:txBody>
+          <a:bodyPr wrap="none" lIns="0" rIns="0" tIns="0" bIns="0" anchor="ctr">
+            <a:spAutoFit/>
+          </a:bodyPr>
+          <a:lstStyle/>
+          <a:p>
+            <a:pPr algn="l"/>
+            <a:r>
+              <a:rPr sz="700" b="0">
+                <a:solidFill>
+                  <a:srgbClr val="1A2340"/>
+                </a:solidFill>
+                <a:latin typeface="Calibri"/>
+              </a:rPr>
+              <a:t>Operaciones Fleet || Nexcar || Desarrollos</a:t>
+            </a:r>
+          </a:p>
+        </p:txBody>
+      </p:sp>
+      <p:sp>
+        <p:nvSpPr>
+          <p:cNvPr id="126" name="TextBox 125"/>
+          <p:cNvSpPr txBox="1"/>
+          <p:nvPr/>
+        </p:nvSpPr>
+        <p:spPr>
+          <a:xfrm>
+            <a:off x="3319272" y="2889504"/>
+            <a:ext cx="630936" cy="187452"/>
+          </a:xfrm>
+          <a:prstGeom prst="rect">
+            <a:avLst/>
+          </a:prstGeom>
+          <a:noFill/>
+        </p:spPr>
+        <p:txBody>
+          <a:bodyPr wrap="none" lIns="0" rIns="0" tIns="0" bIns="0" anchor="ctr">
+            <a:spAutoFit/>
+          </a:bodyPr>
+          <a:lstStyle/>
+          <a:p>
+            <a:pPr algn="ctr"/>
+            <a:r>
+              <a:rPr sz="700" b="0">
+                <a:solidFill>
+                  <a:srgbClr val="555555"/>
+                </a:solidFill>
+                <a:latin typeface="Calibri"/>
+              </a:rPr>
+              <a:t>05/03/2026</a:t>
+            </a:r>
+          </a:p>
+        </p:txBody>
+      </p:sp>
+      <p:sp>
+        <p:nvSpPr>
+          <p:cNvPr id="127" name="TextBox 126"/>
+          <p:cNvSpPr txBox="1"/>
+          <p:nvPr/>
+        </p:nvSpPr>
+        <p:spPr>
+          <a:xfrm>
+            <a:off x="3986783" y="2889504"/>
+            <a:ext cx="630936" cy="187452"/>
+          </a:xfrm>
+          <a:prstGeom prst="rect">
+            <a:avLst/>
+          </a:prstGeom>
+          <a:noFill/>
+        </p:spPr>
+        <p:txBody>
+          <a:bodyPr wrap="none" lIns="0" rIns="0" tIns="0" bIns="0" anchor="ctr">
+            <a:spAutoFit/>
+          </a:bodyPr>
+          <a:lstStyle/>
+          <a:p>
+            <a:pPr algn="ctr"/>
+            <a:r>
+              <a:rPr sz="700" b="0">
+                <a:solidFill>
+                  <a:srgbClr val="555555"/>
+                </a:solidFill>
+                <a:latin typeface="Calibri"/>
+              </a:rPr>
+              <a:t>10/07/2026</a:t>
+            </a:r>
+          </a:p>
+        </p:txBody>
+      </p:sp>
+      <p:sp>
+        <p:nvSpPr>
+          <p:cNvPr id="128" name="TextBox 127"/>
+          <p:cNvSpPr txBox="1"/>
+          <p:nvPr/>
+        </p:nvSpPr>
+        <p:spPr>
+          <a:xfrm>
+            <a:off x="4654296" y="2889504"/>
+            <a:ext cx="493775" cy="187452"/>
+          </a:xfrm>
+          <a:prstGeom prst="rect">
+            <a:avLst/>
+          </a:prstGeom>
+          <a:noFill/>
+        </p:spPr>
+        <p:txBody>
+          <a:bodyPr wrap="none" lIns="0" rIns="0" tIns="0" bIns="0" anchor="ctr">
+            <a:spAutoFit/>
+          </a:bodyPr>
+          <a:lstStyle/>
+          <a:p>
+            <a:pPr algn="ctr"/>
+            <a:r>
+              <a:rPr sz="700" b="1">
+                <a:solidFill>
+                  <a:srgbClr val="1A2340"/>
+                </a:solidFill>
+                <a:latin typeface="Calibri"/>
+              </a:rPr>
+              <a:t>100%</a:t>
+            </a:r>
+          </a:p>
+        </p:txBody>
+      </p:sp>
+      <p:sp>
+        <p:nvSpPr>
+          <p:cNvPr id="129" name="TextBox 128"/>
+          <p:cNvSpPr txBox="1"/>
+          <p:nvPr/>
+        </p:nvSpPr>
+        <p:spPr>
+          <a:xfrm>
+            <a:off x="5184648" y="2889504"/>
+            <a:ext cx="557784" cy="187452"/>
+          </a:xfrm>
+          <a:prstGeom prst="rect">
+            <a:avLst/>
+          </a:prstGeom>
+          <a:noFill/>
+        </p:spPr>
+        <p:txBody>
+          <a:bodyPr wrap="none" lIns="0" rIns="0" tIns="0" bIns="0" anchor="ctr">
+            <a:spAutoFit/>
+          </a:bodyPr>
+          <a:lstStyle/>
+          <a:p>
+            <a:pPr algn="ctr"/>
+            <a:r>
+              <a:rPr sz="700" b="0">
+                <a:solidFill>
+                  <a:srgbClr val="555555"/>
+                </a:solidFill>
+                <a:latin typeface="Calibri"/>
+              </a:rPr>
+              <a:t>96%</a:t>
+            </a:r>
+          </a:p>
+        </p:txBody>
+      </p:sp>
+      <p:sp>
+        <p:nvSpPr>
+          <p:cNvPr id="130" name="TextBox 129"/>
+          <p:cNvSpPr txBox="1"/>
+          <p:nvPr/>
+        </p:nvSpPr>
+        <p:spPr>
+          <a:xfrm>
+            <a:off x="7991856" y="2889504"/>
+            <a:ext cx="804672" cy="187452"/>
+          </a:xfrm>
+          <a:prstGeom prst="rect">
+            <a:avLst/>
+          </a:prstGeom>
+          <a:noFill/>
+        </p:spPr>
+        <p:txBody>
+          <a:bodyPr wrap="none" lIns="0" rIns="0" tIns="0" bIns="0" anchor="ctr">
+            <a:spAutoFit/>
+          </a:bodyPr>
+          <a:lstStyle/>
+          <a:p>
+            <a:pPr algn="ctr"/>
+            <a:r>
+              <a:rPr sz="700" b="1">
+                <a:solidFill>
+                  <a:srgbClr val="22C55E"/>
+                </a:solidFill>
+                <a:latin typeface="Calibri"/>
+              </a:rPr>
+              <a:t>Terminado</a:t>
+            </a:r>
+          </a:p>
+        </p:txBody>
+      </p:sp>
+      <p:sp>
+        <p:nvSpPr>
+          <p:cNvPr id="131" name="Rounded Rectangle 130"/>
           <p:cNvSpPr/>
           <p:nvPr/>
         </p:nvSpPr>
@@ -10992,7 +10351,7 @@
       </p:sp>
       <p:sp>
         <p:nvSpPr>
-          <p:cNvPr id="52" name="Rounded Rectangle 51"/>
+          <p:cNvPr id="132" name="Rounded Rectangle 131"/>
           <p:cNvSpPr/>
           <p:nvPr/>
         </p:nvSpPr>
@@ -11044,7 +10403,7 @@
       </p:sp>
       <p:sp>
         <p:nvSpPr>
-          <p:cNvPr id="53" name="TextBox 52"/>
+          <p:cNvPr id="133" name="TextBox 132"/>
           <p:cNvSpPr txBox="1"/>
           <p:nvPr/>
         </p:nvSpPr>
@@ -11079,7 +10438,296 @@
       </p:sp>
       <p:sp>
         <p:nvSpPr>
-          <p:cNvPr id="54" name="Rounded Rectangle 53"/>
+          <p:cNvPr id="134" name="Rectangle 133"/>
+          <p:cNvSpPr/>
+          <p:nvPr/>
+        </p:nvSpPr>
+        <p:spPr>
+          <a:xfrm>
+            <a:off x="73152" y="3076956"/>
+            <a:ext cx="8741664" cy="187452"/>
+          </a:xfrm>
+          <a:prstGeom prst="rect">
+            <a:avLst/>
+          </a:prstGeom>
+          <a:solidFill>
+            <a:srgbClr val="FFFFFF"/>
+          </a:solidFill>
+          <a:ln>
+            <a:noFill/>
+          </a:ln>
+          <a:effectLst/>
+        </p:spPr>
+        <p:style>
+          <a:lnRef idx="1">
+            <a:schemeClr val="accent1"/>
+          </a:lnRef>
+          <a:fillRef idx="3">
+            <a:schemeClr val="accent1"/>
+          </a:fillRef>
+          <a:effectRef idx="2">
+            <a:schemeClr val="accent1"/>
+          </a:effectRef>
+          <a:fontRef idx="minor">
+            <a:schemeClr val="lt1"/>
+          </a:fontRef>
+        </p:style>
+        <p:txBody>
+          <a:bodyPr rtlCol="0" anchor="ctr"/>
+          <a:lstStyle/>
+          <a:p>
+            <a:pPr algn="ctr"/>
+          </a:p>
+        </p:txBody>
+      </p:sp>
+      <p:sp>
+        <p:nvSpPr>
+          <p:cNvPr id="135" name="TextBox 134"/>
+          <p:cNvSpPr txBox="1"/>
+          <p:nvPr/>
+        </p:nvSpPr>
+        <p:spPr>
+          <a:xfrm>
+            <a:off x="91440" y="3076956"/>
+            <a:ext cx="722375" cy="187452"/>
+          </a:xfrm>
+          <a:prstGeom prst="rect">
+            <a:avLst/>
+          </a:prstGeom>
+          <a:noFill/>
+        </p:spPr>
+        <p:txBody>
+          <a:bodyPr wrap="none" lIns="0" rIns="0" tIns="0" bIns="0" anchor="ctr">
+            <a:spAutoFit/>
+          </a:bodyPr>
+          <a:lstStyle/>
+          <a:p>
+            <a:pPr algn="ctr"/>
+            <a:r>
+              <a:rPr sz="700" b="1">
+                <a:solidFill>
+                  <a:srgbClr val="1A2340"/>
+                </a:solidFill>
+                <a:latin typeface="Calibri"/>
+              </a:rPr>
+              <a:t>Proyecto</a:t>
+            </a:r>
+          </a:p>
+        </p:txBody>
+      </p:sp>
+      <p:sp>
+        <p:nvSpPr>
+          <p:cNvPr id="136" name="TextBox 135"/>
+          <p:cNvSpPr txBox="1"/>
+          <p:nvPr/>
+        </p:nvSpPr>
+        <p:spPr>
+          <a:xfrm>
+            <a:off x="850392" y="3076956"/>
+            <a:ext cx="2432304" cy="187452"/>
+          </a:xfrm>
+          <a:prstGeom prst="rect">
+            <a:avLst/>
+          </a:prstGeom>
+          <a:noFill/>
+        </p:spPr>
+        <p:txBody>
+          <a:bodyPr wrap="none" lIns="0" rIns="0" tIns="0" bIns="0" anchor="ctr">
+            <a:spAutoFit/>
+          </a:bodyPr>
+          <a:lstStyle/>
+          <a:p>
+            <a:pPr algn="l"/>
+            <a:r>
+              <a:rPr sz="700" b="0">
+                <a:solidFill>
+                  <a:srgbClr val="1A2340"/>
+                </a:solidFill>
+                <a:latin typeface="Calibri"/>
+              </a:rPr>
+              <a:t>Operaciones Fleet || Data Lab</a:t>
+            </a:r>
+          </a:p>
+        </p:txBody>
+      </p:sp>
+      <p:sp>
+        <p:nvSpPr>
+          <p:cNvPr id="137" name="TextBox 136"/>
+          <p:cNvSpPr txBox="1"/>
+          <p:nvPr/>
+        </p:nvSpPr>
+        <p:spPr>
+          <a:xfrm>
+            <a:off x="3319272" y="3076956"/>
+            <a:ext cx="630936" cy="187452"/>
+          </a:xfrm>
+          <a:prstGeom prst="rect">
+            <a:avLst/>
+          </a:prstGeom>
+          <a:noFill/>
+        </p:spPr>
+        <p:txBody>
+          <a:bodyPr wrap="none" lIns="0" rIns="0" tIns="0" bIns="0" anchor="ctr">
+            <a:spAutoFit/>
+          </a:bodyPr>
+          <a:lstStyle/>
+          <a:p>
+            <a:pPr algn="ctr"/>
+            <a:r>
+              <a:rPr sz="700" b="0">
+                <a:solidFill>
+                  <a:srgbClr val="555555"/>
+                </a:solidFill>
+                <a:latin typeface="Calibri"/>
+              </a:rPr>
+              <a:t>20/01/2026</a:t>
+            </a:r>
+          </a:p>
+        </p:txBody>
+      </p:sp>
+      <p:sp>
+        <p:nvSpPr>
+          <p:cNvPr id="138" name="TextBox 137"/>
+          <p:cNvSpPr txBox="1"/>
+          <p:nvPr/>
+        </p:nvSpPr>
+        <p:spPr>
+          <a:xfrm>
+            <a:off x="3986783" y="3076956"/>
+            <a:ext cx="630936" cy="187452"/>
+          </a:xfrm>
+          <a:prstGeom prst="rect">
+            <a:avLst/>
+          </a:prstGeom>
+          <a:noFill/>
+        </p:spPr>
+        <p:txBody>
+          <a:bodyPr wrap="none" lIns="0" rIns="0" tIns="0" bIns="0" anchor="ctr">
+            <a:spAutoFit/>
+          </a:bodyPr>
+          <a:lstStyle/>
+          <a:p>
+            <a:pPr algn="ctr"/>
+            <a:r>
+              <a:rPr sz="700" b="0">
+                <a:solidFill>
+                  <a:srgbClr val="555555"/>
+                </a:solidFill>
+                <a:latin typeface="Calibri"/>
+              </a:rPr>
+              <a:t>22/06/2026</a:t>
+            </a:r>
+          </a:p>
+        </p:txBody>
+      </p:sp>
+      <p:sp>
+        <p:nvSpPr>
+          <p:cNvPr id="139" name="TextBox 138"/>
+          <p:cNvSpPr txBox="1"/>
+          <p:nvPr/>
+        </p:nvSpPr>
+        <p:spPr>
+          <a:xfrm>
+            <a:off x="4654296" y="3076956"/>
+            <a:ext cx="493775" cy="187452"/>
+          </a:xfrm>
+          <a:prstGeom prst="rect">
+            <a:avLst/>
+          </a:prstGeom>
+          <a:noFill/>
+        </p:spPr>
+        <p:txBody>
+          <a:bodyPr wrap="none" lIns="0" rIns="0" tIns="0" bIns="0" anchor="ctr">
+            <a:spAutoFit/>
+          </a:bodyPr>
+          <a:lstStyle/>
+          <a:p>
+            <a:pPr algn="ctr"/>
+            <a:r>
+              <a:rPr sz="700" b="1">
+                <a:solidFill>
+                  <a:srgbClr val="1A2340"/>
+                </a:solidFill>
+                <a:latin typeface="Calibri"/>
+              </a:rPr>
+              <a:t>100%</a:t>
+            </a:r>
+          </a:p>
+        </p:txBody>
+      </p:sp>
+      <p:sp>
+        <p:nvSpPr>
+          <p:cNvPr id="140" name="TextBox 139"/>
+          <p:cNvSpPr txBox="1"/>
+          <p:nvPr/>
+        </p:nvSpPr>
+        <p:spPr>
+          <a:xfrm>
+            <a:off x="5184648" y="3076956"/>
+            <a:ext cx="557784" cy="187452"/>
+          </a:xfrm>
+          <a:prstGeom prst="rect">
+            <a:avLst/>
+          </a:prstGeom>
+          <a:noFill/>
+        </p:spPr>
+        <p:txBody>
+          <a:bodyPr wrap="none" lIns="0" rIns="0" tIns="0" bIns="0" anchor="ctr">
+            <a:spAutoFit/>
+          </a:bodyPr>
+          <a:lstStyle/>
+          <a:p>
+            <a:pPr algn="ctr"/>
+            <a:r>
+              <a:rPr sz="700" b="0">
+                <a:solidFill>
+                  <a:srgbClr val="555555"/>
+                </a:solidFill>
+                <a:latin typeface="Calibri"/>
+              </a:rPr>
+              <a:t>100%</a:t>
+            </a:r>
+          </a:p>
+        </p:txBody>
+      </p:sp>
+      <p:sp>
+        <p:nvSpPr>
+          <p:cNvPr id="141" name="TextBox 140"/>
+          <p:cNvSpPr txBox="1"/>
+          <p:nvPr/>
+        </p:nvSpPr>
+        <p:spPr>
+          <a:xfrm>
+            <a:off x="7991856" y="3076956"/>
+            <a:ext cx="804672" cy="187452"/>
+          </a:xfrm>
+          <a:prstGeom prst="rect">
+            <a:avLst/>
+          </a:prstGeom>
+          <a:noFill/>
+        </p:spPr>
+        <p:txBody>
+          <a:bodyPr wrap="none" lIns="0" rIns="0" tIns="0" bIns="0" anchor="ctr">
+            <a:spAutoFit/>
+          </a:bodyPr>
+          <a:lstStyle/>
+          <a:p>
+            <a:pPr algn="ctr"/>
+            <a:r>
+              <a:rPr sz="700" b="1">
+                <a:solidFill>
+                  <a:srgbClr val="22C55E"/>
+                </a:solidFill>
+                <a:latin typeface="Calibri"/>
+              </a:rPr>
+              <a:t>Terminado</a:t>
+            </a:r>
+          </a:p>
+        </p:txBody>
+      </p:sp>
+      <p:sp>
+        <p:nvSpPr>
+          <p:cNvPr id="142" name="Rounded Rectangle 141"/>
           <p:cNvSpPr/>
           <p:nvPr/>
         </p:nvSpPr>
@@ -11130,7 +10778,7 @@
       </p:sp>
       <p:sp>
         <p:nvSpPr>
-          <p:cNvPr id="55" name="Rounded Rectangle 54"/>
+          <p:cNvPr id="143" name="Rounded Rectangle 142"/>
           <p:cNvSpPr/>
           <p:nvPr/>
         </p:nvSpPr>
@@ -11182,7 +10830,7 @@
       </p:sp>
       <p:sp>
         <p:nvSpPr>
-          <p:cNvPr id="56" name="TextBox 55"/>
+          <p:cNvPr id="144" name="TextBox 143"/>
           <p:cNvSpPr txBox="1"/>
           <p:nvPr/>
         </p:nvSpPr>
@@ -11217,7 +10865,296 @@
       </p:sp>
       <p:sp>
         <p:nvSpPr>
-          <p:cNvPr id="57" name="Rounded Rectangle 56"/>
+          <p:cNvPr id="145" name="Rectangle 144"/>
+          <p:cNvSpPr/>
+          <p:nvPr/>
+        </p:nvSpPr>
+        <p:spPr>
+          <a:xfrm>
+            <a:off x="73152" y="3264408"/>
+            <a:ext cx="8741664" cy="187452"/>
+          </a:xfrm>
+          <a:prstGeom prst="rect">
+            <a:avLst/>
+          </a:prstGeom>
+          <a:solidFill>
+            <a:srgbClr val="F5F7FA"/>
+          </a:solidFill>
+          <a:ln>
+            <a:noFill/>
+          </a:ln>
+          <a:effectLst/>
+        </p:spPr>
+        <p:style>
+          <a:lnRef idx="1">
+            <a:schemeClr val="accent1"/>
+          </a:lnRef>
+          <a:fillRef idx="3">
+            <a:schemeClr val="accent1"/>
+          </a:fillRef>
+          <a:effectRef idx="2">
+            <a:schemeClr val="accent1"/>
+          </a:effectRef>
+          <a:fontRef idx="minor">
+            <a:schemeClr val="lt1"/>
+          </a:fontRef>
+        </p:style>
+        <p:txBody>
+          <a:bodyPr rtlCol="0" anchor="ctr"/>
+          <a:lstStyle/>
+          <a:p>
+            <a:pPr algn="ctr"/>
+          </a:p>
+        </p:txBody>
+      </p:sp>
+      <p:sp>
+        <p:nvSpPr>
+          <p:cNvPr id="146" name="TextBox 145"/>
+          <p:cNvSpPr txBox="1"/>
+          <p:nvPr/>
+        </p:nvSpPr>
+        <p:spPr>
+          <a:xfrm>
+            <a:off x="91440" y="3264408"/>
+            <a:ext cx="722375" cy="187452"/>
+          </a:xfrm>
+          <a:prstGeom prst="rect">
+            <a:avLst/>
+          </a:prstGeom>
+          <a:noFill/>
+        </p:spPr>
+        <p:txBody>
+          <a:bodyPr wrap="none" lIns="0" rIns="0" tIns="0" bIns="0" anchor="ctr">
+            <a:spAutoFit/>
+          </a:bodyPr>
+          <a:lstStyle/>
+          <a:p>
+            <a:pPr algn="ctr"/>
+            <a:r>
+              <a:rPr sz="700" b="1">
+                <a:solidFill>
+                  <a:srgbClr val="1A2340"/>
+                </a:solidFill>
+                <a:latin typeface="Calibri"/>
+              </a:rPr>
+              <a:t>Proyecto</a:t>
+            </a:r>
+          </a:p>
+        </p:txBody>
+      </p:sp>
+      <p:sp>
+        <p:nvSpPr>
+          <p:cNvPr id="147" name="TextBox 146"/>
+          <p:cNvSpPr txBox="1"/>
+          <p:nvPr/>
+        </p:nvSpPr>
+        <p:spPr>
+          <a:xfrm>
+            <a:off x="850392" y="3264408"/>
+            <a:ext cx="2432304" cy="187452"/>
+          </a:xfrm>
+          <a:prstGeom prst="rect">
+            <a:avLst/>
+          </a:prstGeom>
+          <a:noFill/>
+        </p:spPr>
+        <p:txBody>
+          <a:bodyPr wrap="none" lIns="0" rIns="0" tIns="0" bIns="0" anchor="ctr">
+            <a:spAutoFit/>
+          </a:bodyPr>
+          <a:lstStyle/>
+          <a:p>
+            <a:pPr algn="l"/>
+            <a:r>
+              <a:rPr sz="700" b="0">
+                <a:solidFill>
+                  <a:srgbClr val="1A2340"/>
+                </a:solidFill>
+                <a:latin typeface="Calibri"/>
+              </a:rPr>
+              <a:t>Cartera || Cambio de Pac de Timbrado</a:t>
+            </a:r>
+          </a:p>
+        </p:txBody>
+      </p:sp>
+      <p:sp>
+        <p:nvSpPr>
+          <p:cNvPr id="148" name="TextBox 147"/>
+          <p:cNvSpPr txBox="1"/>
+          <p:nvPr/>
+        </p:nvSpPr>
+        <p:spPr>
+          <a:xfrm>
+            <a:off x="3319272" y="3264408"/>
+            <a:ext cx="630936" cy="187452"/>
+          </a:xfrm>
+          <a:prstGeom prst="rect">
+            <a:avLst/>
+          </a:prstGeom>
+          <a:noFill/>
+        </p:spPr>
+        <p:txBody>
+          <a:bodyPr wrap="none" lIns="0" rIns="0" tIns="0" bIns="0" anchor="ctr">
+            <a:spAutoFit/>
+          </a:bodyPr>
+          <a:lstStyle/>
+          <a:p>
+            <a:pPr algn="ctr"/>
+            <a:r>
+              <a:rPr sz="700" b="0">
+                <a:solidFill>
+                  <a:srgbClr val="555555"/>
+                </a:solidFill>
+                <a:latin typeface="Calibri"/>
+              </a:rPr>
+              <a:t>07/07/2025</a:t>
+            </a:r>
+          </a:p>
+        </p:txBody>
+      </p:sp>
+      <p:sp>
+        <p:nvSpPr>
+          <p:cNvPr id="149" name="TextBox 148"/>
+          <p:cNvSpPr txBox="1"/>
+          <p:nvPr/>
+        </p:nvSpPr>
+        <p:spPr>
+          <a:xfrm>
+            <a:off x="3986783" y="3264408"/>
+            <a:ext cx="630936" cy="187452"/>
+          </a:xfrm>
+          <a:prstGeom prst="rect">
+            <a:avLst/>
+          </a:prstGeom>
+          <a:noFill/>
+        </p:spPr>
+        <p:txBody>
+          <a:bodyPr wrap="none" lIns="0" rIns="0" tIns="0" bIns="0" anchor="ctr">
+            <a:spAutoFit/>
+          </a:bodyPr>
+          <a:lstStyle/>
+          <a:p>
+            <a:pPr algn="ctr"/>
+            <a:r>
+              <a:rPr sz="700" b="0">
+                <a:solidFill>
+                  <a:srgbClr val="555555"/>
+                </a:solidFill>
+                <a:latin typeface="Calibri"/>
+              </a:rPr>
+              <a:t>25/02/2026</a:t>
+            </a:r>
+          </a:p>
+        </p:txBody>
+      </p:sp>
+      <p:sp>
+        <p:nvSpPr>
+          <p:cNvPr id="150" name="TextBox 149"/>
+          <p:cNvSpPr txBox="1"/>
+          <p:nvPr/>
+        </p:nvSpPr>
+        <p:spPr>
+          <a:xfrm>
+            <a:off x="4654296" y="3264408"/>
+            <a:ext cx="493775" cy="187452"/>
+          </a:xfrm>
+          <a:prstGeom prst="rect">
+            <a:avLst/>
+          </a:prstGeom>
+          <a:noFill/>
+        </p:spPr>
+        <p:txBody>
+          <a:bodyPr wrap="none" lIns="0" rIns="0" tIns="0" bIns="0" anchor="ctr">
+            <a:spAutoFit/>
+          </a:bodyPr>
+          <a:lstStyle/>
+          <a:p>
+            <a:pPr algn="ctr"/>
+            <a:r>
+              <a:rPr sz="700" b="1">
+                <a:solidFill>
+                  <a:srgbClr val="1A2340"/>
+                </a:solidFill>
+                <a:latin typeface="Calibri"/>
+              </a:rPr>
+              <a:t>100%</a:t>
+            </a:r>
+          </a:p>
+        </p:txBody>
+      </p:sp>
+      <p:sp>
+        <p:nvSpPr>
+          <p:cNvPr id="151" name="TextBox 150"/>
+          <p:cNvSpPr txBox="1"/>
+          <p:nvPr/>
+        </p:nvSpPr>
+        <p:spPr>
+          <a:xfrm>
+            <a:off x="5184648" y="3264408"/>
+            <a:ext cx="557784" cy="187452"/>
+          </a:xfrm>
+          <a:prstGeom prst="rect">
+            <a:avLst/>
+          </a:prstGeom>
+          <a:noFill/>
+        </p:spPr>
+        <p:txBody>
+          <a:bodyPr wrap="none" lIns="0" rIns="0" tIns="0" bIns="0" anchor="ctr">
+            <a:spAutoFit/>
+          </a:bodyPr>
+          <a:lstStyle/>
+          <a:p>
+            <a:pPr algn="ctr"/>
+            <a:r>
+              <a:rPr sz="700" b="0">
+                <a:solidFill>
+                  <a:srgbClr val="555555"/>
+                </a:solidFill>
+                <a:latin typeface="Calibri"/>
+              </a:rPr>
+              <a:t>100%</a:t>
+            </a:r>
+          </a:p>
+        </p:txBody>
+      </p:sp>
+      <p:sp>
+        <p:nvSpPr>
+          <p:cNvPr id="152" name="TextBox 151"/>
+          <p:cNvSpPr txBox="1"/>
+          <p:nvPr/>
+        </p:nvSpPr>
+        <p:spPr>
+          <a:xfrm>
+            <a:off x="7991856" y="3264408"/>
+            <a:ext cx="804672" cy="187452"/>
+          </a:xfrm>
+          <a:prstGeom prst="rect">
+            <a:avLst/>
+          </a:prstGeom>
+          <a:noFill/>
+        </p:spPr>
+        <p:txBody>
+          <a:bodyPr wrap="none" lIns="0" rIns="0" tIns="0" bIns="0" anchor="ctr">
+            <a:spAutoFit/>
+          </a:bodyPr>
+          <a:lstStyle/>
+          <a:p>
+            <a:pPr algn="ctr"/>
+            <a:r>
+              <a:rPr sz="700" b="1">
+                <a:solidFill>
+                  <a:srgbClr val="22C55E"/>
+                </a:solidFill>
+                <a:latin typeface="Calibri"/>
+              </a:rPr>
+              <a:t>Terminado</a:t>
+            </a:r>
+          </a:p>
+        </p:txBody>
+      </p:sp>
+      <p:sp>
+        <p:nvSpPr>
+          <p:cNvPr id="153" name="Rounded Rectangle 152"/>
           <p:cNvSpPr/>
           <p:nvPr/>
         </p:nvSpPr>
@@ -11268,7 +11205,7 @@
       </p:sp>
       <p:sp>
         <p:nvSpPr>
-          <p:cNvPr id="58" name="Rounded Rectangle 57"/>
+          <p:cNvPr id="154" name="Rounded Rectangle 153"/>
           <p:cNvSpPr/>
           <p:nvPr/>
         </p:nvSpPr>
@@ -11320,7 +11257,7 @@
       </p:sp>
       <p:sp>
         <p:nvSpPr>
-          <p:cNvPr id="59" name="TextBox 58"/>
+          <p:cNvPr id="155" name="TextBox 154"/>
           <p:cNvSpPr txBox="1"/>
           <p:nvPr/>
         </p:nvSpPr>
@@ -11355,7 +11292,296 @@
       </p:sp>
       <p:sp>
         <p:nvSpPr>
-          <p:cNvPr id="60" name="Rounded Rectangle 59"/>
+          <p:cNvPr id="156" name="Rectangle 155"/>
+          <p:cNvSpPr/>
+          <p:nvPr/>
+        </p:nvSpPr>
+        <p:spPr>
+          <a:xfrm>
+            <a:off x="73152" y="3451860"/>
+            <a:ext cx="8741664" cy="187452"/>
+          </a:xfrm>
+          <a:prstGeom prst="rect">
+            <a:avLst/>
+          </a:prstGeom>
+          <a:solidFill>
+            <a:srgbClr val="FFFFFF"/>
+          </a:solidFill>
+          <a:ln>
+            <a:noFill/>
+          </a:ln>
+          <a:effectLst/>
+        </p:spPr>
+        <p:style>
+          <a:lnRef idx="1">
+            <a:schemeClr val="accent1"/>
+          </a:lnRef>
+          <a:fillRef idx="3">
+            <a:schemeClr val="accent1"/>
+          </a:fillRef>
+          <a:effectRef idx="2">
+            <a:schemeClr val="accent1"/>
+          </a:effectRef>
+          <a:fontRef idx="minor">
+            <a:schemeClr val="lt1"/>
+          </a:fontRef>
+        </p:style>
+        <p:txBody>
+          <a:bodyPr rtlCol="0" anchor="ctr"/>
+          <a:lstStyle/>
+          <a:p>
+            <a:pPr algn="ctr"/>
+          </a:p>
+        </p:txBody>
+      </p:sp>
+      <p:sp>
+        <p:nvSpPr>
+          <p:cNvPr id="157" name="TextBox 156"/>
+          <p:cNvSpPr txBox="1"/>
+          <p:nvPr/>
+        </p:nvSpPr>
+        <p:spPr>
+          <a:xfrm>
+            <a:off x="91440" y="3451860"/>
+            <a:ext cx="722375" cy="187452"/>
+          </a:xfrm>
+          <a:prstGeom prst="rect">
+            <a:avLst/>
+          </a:prstGeom>
+          <a:noFill/>
+        </p:spPr>
+        <p:txBody>
+          <a:bodyPr wrap="none" lIns="0" rIns="0" tIns="0" bIns="0" anchor="ctr">
+            <a:spAutoFit/>
+          </a:bodyPr>
+          <a:lstStyle/>
+          <a:p>
+            <a:pPr algn="ctr"/>
+            <a:r>
+              <a:rPr sz="700" b="1">
+                <a:solidFill>
+                  <a:srgbClr val="1A2340"/>
+                </a:solidFill>
+                <a:latin typeface="Calibri"/>
+              </a:rPr>
+              <a:t>Proyecto</a:t>
+            </a:r>
+          </a:p>
+        </p:txBody>
+      </p:sp>
+      <p:sp>
+        <p:nvSpPr>
+          <p:cNvPr id="158" name="TextBox 157"/>
+          <p:cNvSpPr txBox="1"/>
+          <p:nvPr/>
+        </p:nvSpPr>
+        <p:spPr>
+          <a:xfrm>
+            <a:off x="850392" y="3451860"/>
+            <a:ext cx="2432304" cy="187452"/>
+          </a:xfrm>
+          <a:prstGeom prst="rect">
+            <a:avLst/>
+          </a:prstGeom>
+          <a:noFill/>
+        </p:spPr>
+        <p:txBody>
+          <a:bodyPr wrap="none" lIns="0" rIns="0" tIns="0" bIns="0" anchor="ctr">
+            <a:spAutoFit/>
+          </a:bodyPr>
+          <a:lstStyle/>
+          <a:p>
+            <a:pPr algn="l"/>
+            <a:r>
+              <a:rPr sz="700" b="0">
+                <a:solidFill>
+                  <a:srgbClr val="1A2340"/>
+                </a:solidFill>
+                <a:latin typeface="Calibri"/>
+              </a:rPr>
+              <a:t>Operaciones Fleet || Nueva Instancia</a:t>
+            </a:r>
+          </a:p>
+        </p:txBody>
+      </p:sp>
+      <p:sp>
+        <p:nvSpPr>
+          <p:cNvPr id="159" name="TextBox 158"/>
+          <p:cNvSpPr txBox="1"/>
+          <p:nvPr/>
+        </p:nvSpPr>
+        <p:spPr>
+          <a:xfrm>
+            <a:off x="3319272" y="3451860"/>
+            <a:ext cx="630936" cy="187452"/>
+          </a:xfrm>
+          <a:prstGeom prst="rect">
+            <a:avLst/>
+          </a:prstGeom>
+          <a:noFill/>
+        </p:spPr>
+        <p:txBody>
+          <a:bodyPr wrap="none" lIns="0" rIns="0" tIns="0" bIns="0" anchor="ctr">
+            <a:spAutoFit/>
+          </a:bodyPr>
+          <a:lstStyle/>
+          <a:p>
+            <a:pPr algn="ctr"/>
+            <a:r>
+              <a:rPr sz="700" b="0">
+                <a:solidFill>
+                  <a:srgbClr val="555555"/>
+                </a:solidFill>
+                <a:latin typeface="Calibri"/>
+              </a:rPr>
+              <a:t>08/08/2025</a:t>
+            </a:r>
+          </a:p>
+        </p:txBody>
+      </p:sp>
+      <p:sp>
+        <p:nvSpPr>
+          <p:cNvPr id="160" name="TextBox 159"/>
+          <p:cNvSpPr txBox="1"/>
+          <p:nvPr/>
+        </p:nvSpPr>
+        <p:spPr>
+          <a:xfrm>
+            <a:off x="3986783" y="3451860"/>
+            <a:ext cx="630936" cy="187452"/>
+          </a:xfrm>
+          <a:prstGeom prst="rect">
+            <a:avLst/>
+          </a:prstGeom>
+          <a:noFill/>
+        </p:spPr>
+        <p:txBody>
+          <a:bodyPr wrap="none" lIns="0" rIns="0" tIns="0" bIns="0" anchor="ctr">
+            <a:spAutoFit/>
+          </a:bodyPr>
+          <a:lstStyle/>
+          <a:p>
+            <a:pPr algn="ctr"/>
+            <a:r>
+              <a:rPr sz="700" b="0">
+                <a:solidFill>
+                  <a:srgbClr val="555555"/>
+                </a:solidFill>
+                <a:latin typeface="Calibri"/>
+              </a:rPr>
+              <a:t>01/06/2026</a:t>
+            </a:r>
+          </a:p>
+        </p:txBody>
+      </p:sp>
+      <p:sp>
+        <p:nvSpPr>
+          <p:cNvPr id="161" name="TextBox 160"/>
+          <p:cNvSpPr txBox="1"/>
+          <p:nvPr/>
+        </p:nvSpPr>
+        <p:spPr>
+          <a:xfrm>
+            <a:off x="4654296" y="3451860"/>
+            <a:ext cx="493775" cy="187452"/>
+          </a:xfrm>
+          <a:prstGeom prst="rect">
+            <a:avLst/>
+          </a:prstGeom>
+          <a:noFill/>
+        </p:spPr>
+        <p:txBody>
+          <a:bodyPr wrap="none" lIns="0" rIns="0" tIns="0" bIns="0" anchor="ctr">
+            <a:spAutoFit/>
+          </a:bodyPr>
+          <a:lstStyle/>
+          <a:p>
+            <a:pPr algn="ctr"/>
+            <a:r>
+              <a:rPr sz="700" b="1">
+                <a:solidFill>
+                  <a:srgbClr val="1A2340"/>
+                </a:solidFill>
+                <a:latin typeface="Calibri"/>
+              </a:rPr>
+              <a:t>100%</a:t>
+            </a:r>
+          </a:p>
+        </p:txBody>
+      </p:sp>
+      <p:sp>
+        <p:nvSpPr>
+          <p:cNvPr id="162" name="TextBox 161"/>
+          <p:cNvSpPr txBox="1"/>
+          <p:nvPr/>
+        </p:nvSpPr>
+        <p:spPr>
+          <a:xfrm>
+            <a:off x="5184648" y="3451860"/>
+            <a:ext cx="557784" cy="187452"/>
+          </a:xfrm>
+          <a:prstGeom prst="rect">
+            <a:avLst/>
+          </a:prstGeom>
+          <a:noFill/>
+        </p:spPr>
+        <p:txBody>
+          <a:bodyPr wrap="none" lIns="0" rIns="0" tIns="0" bIns="0" anchor="ctr">
+            <a:spAutoFit/>
+          </a:bodyPr>
+          <a:lstStyle/>
+          <a:p>
+            <a:pPr algn="ctr"/>
+            <a:r>
+              <a:rPr sz="700" b="0">
+                <a:solidFill>
+                  <a:srgbClr val="555555"/>
+                </a:solidFill>
+                <a:latin typeface="Calibri"/>
+              </a:rPr>
+              <a:t>100%</a:t>
+            </a:r>
+          </a:p>
+        </p:txBody>
+      </p:sp>
+      <p:sp>
+        <p:nvSpPr>
+          <p:cNvPr id="163" name="TextBox 162"/>
+          <p:cNvSpPr txBox="1"/>
+          <p:nvPr/>
+        </p:nvSpPr>
+        <p:spPr>
+          <a:xfrm>
+            <a:off x="7991856" y="3451860"/>
+            <a:ext cx="804672" cy="187452"/>
+          </a:xfrm>
+          <a:prstGeom prst="rect">
+            <a:avLst/>
+          </a:prstGeom>
+          <a:noFill/>
+        </p:spPr>
+        <p:txBody>
+          <a:bodyPr wrap="none" lIns="0" rIns="0" tIns="0" bIns="0" anchor="ctr">
+            <a:spAutoFit/>
+          </a:bodyPr>
+          <a:lstStyle/>
+          <a:p>
+            <a:pPr algn="ctr"/>
+            <a:r>
+              <a:rPr sz="700" b="1">
+                <a:solidFill>
+                  <a:srgbClr val="22C55E"/>
+                </a:solidFill>
+                <a:latin typeface="Calibri"/>
+              </a:rPr>
+              <a:t>Terminado</a:t>
+            </a:r>
+          </a:p>
+        </p:txBody>
+      </p:sp>
+      <p:sp>
+        <p:nvSpPr>
+          <p:cNvPr id="164" name="Rounded Rectangle 163"/>
           <p:cNvSpPr/>
           <p:nvPr/>
         </p:nvSpPr>
@@ -11406,7 +11632,7 @@
       </p:sp>
       <p:sp>
         <p:nvSpPr>
-          <p:cNvPr id="61" name="Rounded Rectangle 60"/>
+          <p:cNvPr id="165" name="Rounded Rectangle 164"/>
           <p:cNvSpPr/>
           <p:nvPr/>
         </p:nvSpPr>
@@ -11458,7 +11684,7 @@
       </p:sp>
       <p:sp>
         <p:nvSpPr>
-          <p:cNvPr id="62" name="TextBox 61"/>
+          <p:cNvPr id="166" name="TextBox 165"/>
           <p:cNvSpPr txBox="1"/>
           <p:nvPr/>
         </p:nvSpPr>
@@ -11493,7 +11719,296 @@
       </p:sp>
       <p:sp>
         <p:nvSpPr>
-          <p:cNvPr id="63" name="Rounded Rectangle 62"/>
+          <p:cNvPr id="167" name="Rectangle 166"/>
+          <p:cNvSpPr/>
+          <p:nvPr/>
+        </p:nvSpPr>
+        <p:spPr>
+          <a:xfrm>
+            <a:off x="73152" y="3639312"/>
+            <a:ext cx="8741664" cy="187452"/>
+          </a:xfrm>
+          <a:prstGeom prst="rect">
+            <a:avLst/>
+          </a:prstGeom>
+          <a:solidFill>
+            <a:srgbClr val="F5F7FA"/>
+          </a:solidFill>
+          <a:ln>
+            <a:noFill/>
+          </a:ln>
+          <a:effectLst/>
+        </p:spPr>
+        <p:style>
+          <a:lnRef idx="1">
+            <a:schemeClr val="accent1"/>
+          </a:lnRef>
+          <a:fillRef idx="3">
+            <a:schemeClr val="accent1"/>
+          </a:fillRef>
+          <a:effectRef idx="2">
+            <a:schemeClr val="accent1"/>
+          </a:effectRef>
+          <a:fontRef idx="minor">
+            <a:schemeClr val="lt1"/>
+          </a:fontRef>
+        </p:style>
+        <p:txBody>
+          <a:bodyPr rtlCol="0" anchor="ctr"/>
+          <a:lstStyle/>
+          <a:p>
+            <a:pPr algn="ctr"/>
+          </a:p>
+        </p:txBody>
+      </p:sp>
+      <p:sp>
+        <p:nvSpPr>
+          <p:cNvPr id="168" name="TextBox 167"/>
+          <p:cNvSpPr txBox="1"/>
+          <p:nvPr/>
+        </p:nvSpPr>
+        <p:spPr>
+          <a:xfrm>
+            <a:off x="91440" y="3639312"/>
+            <a:ext cx="722375" cy="187452"/>
+          </a:xfrm>
+          <a:prstGeom prst="rect">
+            <a:avLst/>
+          </a:prstGeom>
+          <a:noFill/>
+        </p:spPr>
+        <p:txBody>
+          <a:bodyPr wrap="none" lIns="0" rIns="0" tIns="0" bIns="0" anchor="ctr">
+            <a:spAutoFit/>
+          </a:bodyPr>
+          <a:lstStyle/>
+          <a:p>
+            <a:pPr algn="ctr"/>
+            <a:r>
+              <a:rPr sz="700" b="1">
+                <a:solidFill>
+                  <a:srgbClr val="1A2340"/>
+                </a:solidFill>
+                <a:latin typeface="Calibri"/>
+              </a:rPr>
+              <a:t>Proyecto</a:t>
+            </a:r>
+          </a:p>
+        </p:txBody>
+      </p:sp>
+      <p:sp>
+        <p:nvSpPr>
+          <p:cNvPr id="169" name="TextBox 168"/>
+          <p:cNvSpPr txBox="1"/>
+          <p:nvPr/>
+        </p:nvSpPr>
+        <p:spPr>
+          <a:xfrm>
+            <a:off x="850392" y="3639312"/>
+            <a:ext cx="2432304" cy="187452"/>
+          </a:xfrm>
+          <a:prstGeom prst="rect">
+            <a:avLst/>
+          </a:prstGeom>
+          <a:noFill/>
+        </p:spPr>
+        <p:txBody>
+          <a:bodyPr wrap="none" lIns="0" rIns="0" tIns="0" bIns="0" anchor="ctr">
+            <a:spAutoFit/>
+          </a:bodyPr>
+          <a:lstStyle/>
+          <a:p>
+            <a:pPr algn="l"/>
+            <a:r>
+              <a:rPr sz="700" b="0">
+                <a:solidFill>
+                  <a:srgbClr val="1A2340"/>
+                </a:solidFill>
+                <a:latin typeface="Calibri"/>
+              </a:rPr>
+              <a:t>Tesoreria || Adcontent H2H</a:t>
+            </a:r>
+          </a:p>
+        </p:txBody>
+      </p:sp>
+      <p:sp>
+        <p:nvSpPr>
+          <p:cNvPr id="170" name="TextBox 169"/>
+          <p:cNvSpPr txBox="1"/>
+          <p:nvPr/>
+        </p:nvSpPr>
+        <p:spPr>
+          <a:xfrm>
+            <a:off x="3319272" y="3639312"/>
+            <a:ext cx="630936" cy="187452"/>
+          </a:xfrm>
+          <a:prstGeom prst="rect">
+            <a:avLst/>
+          </a:prstGeom>
+          <a:noFill/>
+        </p:spPr>
+        <p:txBody>
+          <a:bodyPr wrap="none" lIns="0" rIns="0" tIns="0" bIns="0" anchor="ctr">
+            <a:spAutoFit/>
+          </a:bodyPr>
+          <a:lstStyle/>
+          <a:p>
+            <a:pPr algn="ctr"/>
+            <a:r>
+              <a:rPr sz="700" b="0">
+                <a:solidFill>
+                  <a:srgbClr val="555555"/>
+                </a:solidFill>
+                <a:latin typeface="Calibri"/>
+              </a:rPr>
+              <a:t>07/04/2026</a:t>
+            </a:r>
+          </a:p>
+        </p:txBody>
+      </p:sp>
+      <p:sp>
+        <p:nvSpPr>
+          <p:cNvPr id="171" name="TextBox 170"/>
+          <p:cNvSpPr txBox="1"/>
+          <p:nvPr/>
+        </p:nvSpPr>
+        <p:spPr>
+          <a:xfrm>
+            <a:off x="3986783" y="3639312"/>
+            <a:ext cx="630936" cy="187452"/>
+          </a:xfrm>
+          <a:prstGeom prst="rect">
+            <a:avLst/>
+          </a:prstGeom>
+          <a:noFill/>
+        </p:spPr>
+        <p:txBody>
+          <a:bodyPr wrap="none" lIns="0" rIns="0" tIns="0" bIns="0" anchor="ctr">
+            <a:spAutoFit/>
+          </a:bodyPr>
+          <a:lstStyle/>
+          <a:p>
+            <a:pPr algn="ctr"/>
+            <a:r>
+              <a:rPr sz="700" b="0">
+                <a:solidFill>
+                  <a:srgbClr val="555555"/>
+                </a:solidFill>
+                <a:latin typeface="Calibri"/>
+              </a:rPr>
+              <a:t>26/08/2026</a:t>
+            </a:r>
+          </a:p>
+        </p:txBody>
+      </p:sp>
+      <p:sp>
+        <p:nvSpPr>
+          <p:cNvPr id="172" name="TextBox 171"/>
+          <p:cNvSpPr txBox="1"/>
+          <p:nvPr/>
+        </p:nvSpPr>
+        <p:spPr>
+          <a:xfrm>
+            <a:off x="4654296" y="3639312"/>
+            <a:ext cx="493775" cy="187452"/>
+          </a:xfrm>
+          <a:prstGeom prst="rect">
+            <a:avLst/>
+          </a:prstGeom>
+          <a:noFill/>
+        </p:spPr>
+        <p:txBody>
+          <a:bodyPr wrap="none" lIns="0" rIns="0" tIns="0" bIns="0" anchor="ctr">
+            <a:spAutoFit/>
+          </a:bodyPr>
+          <a:lstStyle/>
+          <a:p>
+            <a:pPr algn="ctr"/>
+            <a:r>
+              <a:rPr sz="700" b="1">
+                <a:solidFill>
+                  <a:srgbClr val="1A2340"/>
+                </a:solidFill>
+                <a:latin typeface="Calibri"/>
+              </a:rPr>
+              <a:t>22%</a:t>
+            </a:r>
+          </a:p>
+        </p:txBody>
+      </p:sp>
+      <p:sp>
+        <p:nvSpPr>
+          <p:cNvPr id="173" name="TextBox 172"/>
+          <p:cNvSpPr txBox="1"/>
+          <p:nvPr/>
+        </p:nvSpPr>
+        <p:spPr>
+          <a:xfrm>
+            <a:off x="5184648" y="3639312"/>
+            <a:ext cx="557784" cy="187452"/>
+          </a:xfrm>
+          <a:prstGeom prst="rect">
+            <a:avLst/>
+          </a:prstGeom>
+          <a:noFill/>
+        </p:spPr>
+        <p:txBody>
+          <a:bodyPr wrap="none" lIns="0" rIns="0" tIns="0" bIns="0" anchor="ctr">
+            <a:spAutoFit/>
+          </a:bodyPr>
+          <a:lstStyle/>
+          <a:p>
+            <a:pPr algn="ctr"/>
+            <a:r>
+              <a:rPr sz="700" b="0">
+                <a:solidFill>
+                  <a:srgbClr val="555555"/>
+                </a:solidFill>
+                <a:latin typeface="Calibri"/>
+              </a:rPr>
+              <a:t>63%</a:t>
+            </a:r>
+          </a:p>
+        </p:txBody>
+      </p:sp>
+      <p:sp>
+        <p:nvSpPr>
+          <p:cNvPr id="174" name="TextBox 173"/>
+          <p:cNvSpPr txBox="1"/>
+          <p:nvPr/>
+        </p:nvSpPr>
+        <p:spPr>
+          <a:xfrm>
+            <a:off x="7991856" y="3639312"/>
+            <a:ext cx="804672" cy="187452"/>
+          </a:xfrm>
+          <a:prstGeom prst="rect">
+            <a:avLst/>
+          </a:prstGeom>
+          <a:noFill/>
+        </p:spPr>
+        <p:txBody>
+          <a:bodyPr wrap="none" lIns="0" rIns="0" tIns="0" bIns="0" anchor="ctr">
+            <a:spAutoFit/>
+          </a:bodyPr>
+          <a:lstStyle/>
+          <a:p>
+            <a:pPr algn="ctr"/>
+            <a:r>
+              <a:rPr sz="700" b="1">
+                <a:solidFill>
+                  <a:srgbClr val="EF4444"/>
+                </a:solidFill>
+                <a:latin typeface="Calibri"/>
+              </a:rPr>
+              <a:t>Atrasado</a:t>
+            </a:r>
+          </a:p>
+        </p:txBody>
+      </p:sp>
+      <p:sp>
+        <p:nvSpPr>
+          <p:cNvPr id="175" name="Rounded Rectangle 174"/>
           <p:cNvSpPr/>
           <p:nvPr/>
         </p:nvSpPr>
@@ -11544,7 +12059,7 @@
       </p:sp>
       <p:sp>
         <p:nvSpPr>
-          <p:cNvPr id="64" name="Rounded Rectangle 63"/>
+          <p:cNvPr id="176" name="Rounded Rectangle 175"/>
           <p:cNvSpPr/>
           <p:nvPr/>
         </p:nvSpPr>
@@ -11596,7 +12111,7 @@
       </p:sp>
       <p:sp>
         <p:nvSpPr>
-          <p:cNvPr id="65" name="TextBox 64"/>
+          <p:cNvPr id="177" name="TextBox 176"/>
           <p:cNvSpPr txBox="1"/>
           <p:nvPr/>
         </p:nvSpPr>
@@ -11631,7 +12146,296 @@
       </p:sp>
       <p:sp>
         <p:nvSpPr>
-          <p:cNvPr id="66" name="Rounded Rectangle 65"/>
+          <p:cNvPr id="178" name="Rectangle 177"/>
+          <p:cNvSpPr/>
+          <p:nvPr/>
+        </p:nvSpPr>
+        <p:spPr>
+          <a:xfrm>
+            <a:off x="73152" y="3826764"/>
+            <a:ext cx="8741664" cy="187452"/>
+          </a:xfrm>
+          <a:prstGeom prst="rect">
+            <a:avLst/>
+          </a:prstGeom>
+          <a:solidFill>
+            <a:srgbClr val="FFFFFF"/>
+          </a:solidFill>
+          <a:ln>
+            <a:noFill/>
+          </a:ln>
+          <a:effectLst/>
+        </p:spPr>
+        <p:style>
+          <a:lnRef idx="1">
+            <a:schemeClr val="accent1"/>
+          </a:lnRef>
+          <a:fillRef idx="3">
+            <a:schemeClr val="accent1"/>
+          </a:fillRef>
+          <a:effectRef idx="2">
+            <a:schemeClr val="accent1"/>
+          </a:effectRef>
+          <a:fontRef idx="minor">
+            <a:schemeClr val="lt1"/>
+          </a:fontRef>
+        </p:style>
+        <p:txBody>
+          <a:bodyPr rtlCol="0" anchor="ctr"/>
+          <a:lstStyle/>
+          <a:p>
+            <a:pPr algn="ctr"/>
+          </a:p>
+        </p:txBody>
+      </p:sp>
+      <p:sp>
+        <p:nvSpPr>
+          <p:cNvPr id="179" name="TextBox 178"/>
+          <p:cNvSpPr txBox="1"/>
+          <p:nvPr/>
+        </p:nvSpPr>
+        <p:spPr>
+          <a:xfrm>
+            <a:off x="91440" y="3826764"/>
+            <a:ext cx="722375" cy="187452"/>
+          </a:xfrm>
+          <a:prstGeom prst="rect">
+            <a:avLst/>
+          </a:prstGeom>
+          <a:noFill/>
+        </p:spPr>
+        <p:txBody>
+          <a:bodyPr wrap="none" lIns="0" rIns="0" tIns="0" bIns="0" anchor="ctr">
+            <a:spAutoFit/>
+          </a:bodyPr>
+          <a:lstStyle/>
+          <a:p>
+            <a:pPr algn="ctr"/>
+            <a:r>
+              <a:rPr sz="700" b="1">
+                <a:solidFill>
+                  <a:srgbClr val="1A2340"/>
+                </a:solidFill>
+                <a:latin typeface="Calibri"/>
+              </a:rPr>
+              <a:t>Proyecto</a:t>
+            </a:r>
+          </a:p>
+        </p:txBody>
+      </p:sp>
+      <p:sp>
+        <p:nvSpPr>
+          <p:cNvPr id="180" name="TextBox 179"/>
+          <p:cNvSpPr txBox="1"/>
+          <p:nvPr/>
+        </p:nvSpPr>
+        <p:spPr>
+          <a:xfrm>
+            <a:off x="850392" y="3826764"/>
+            <a:ext cx="2432304" cy="187452"/>
+          </a:xfrm>
+          <a:prstGeom prst="rect">
+            <a:avLst/>
+          </a:prstGeom>
+          <a:noFill/>
+        </p:spPr>
+        <p:txBody>
+          <a:bodyPr wrap="none" lIns="0" rIns="0" tIns="0" bIns="0" anchor="ctr">
+            <a:spAutoFit/>
+          </a:bodyPr>
+          <a:lstStyle/>
+          <a:p>
+            <a:pPr algn="l"/>
+            <a:r>
+              <a:rPr sz="700" b="0">
+                <a:solidFill>
+                  <a:srgbClr val="1A2340"/>
+                </a:solidFill>
+                <a:latin typeface="Calibri"/>
+              </a:rPr>
+              <a:t>Talleres || Integración Mecanica Mx - SAE</a:t>
+            </a:r>
+          </a:p>
+        </p:txBody>
+      </p:sp>
+      <p:sp>
+        <p:nvSpPr>
+          <p:cNvPr id="181" name="TextBox 180"/>
+          <p:cNvSpPr txBox="1"/>
+          <p:nvPr/>
+        </p:nvSpPr>
+        <p:spPr>
+          <a:xfrm>
+            <a:off x="3319272" y="3826764"/>
+            <a:ext cx="630936" cy="187452"/>
+          </a:xfrm>
+          <a:prstGeom prst="rect">
+            <a:avLst/>
+          </a:prstGeom>
+          <a:noFill/>
+        </p:spPr>
+        <p:txBody>
+          <a:bodyPr wrap="none" lIns="0" rIns="0" tIns="0" bIns="0" anchor="ctr">
+            <a:spAutoFit/>
+          </a:bodyPr>
+          <a:lstStyle/>
+          <a:p>
+            <a:pPr algn="ctr"/>
+            <a:r>
+              <a:rPr sz="700" b="0">
+                <a:solidFill>
+                  <a:srgbClr val="555555"/>
+                </a:solidFill>
+                <a:latin typeface="Calibri"/>
+              </a:rPr>
+              <a:t>20/04/2026</a:t>
+            </a:r>
+          </a:p>
+        </p:txBody>
+      </p:sp>
+      <p:sp>
+        <p:nvSpPr>
+          <p:cNvPr id="182" name="TextBox 181"/>
+          <p:cNvSpPr txBox="1"/>
+          <p:nvPr/>
+        </p:nvSpPr>
+        <p:spPr>
+          <a:xfrm>
+            <a:off x="3986783" y="3826764"/>
+            <a:ext cx="630936" cy="187452"/>
+          </a:xfrm>
+          <a:prstGeom prst="rect">
+            <a:avLst/>
+          </a:prstGeom>
+          <a:noFill/>
+        </p:spPr>
+        <p:txBody>
+          <a:bodyPr wrap="none" lIns="0" rIns="0" tIns="0" bIns="0" anchor="ctr">
+            <a:spAutoFit/>
+          </a:bodyPr>
+          <a:lstStyle/>
+          <a:p>
+            <a:pPr algn="ctr"/>
+            <a:r>
+              <a:rPr sz="700" b="0">
+                <a:solidFill>
+                  <a:srgbClr val="555555"/>
+                </a:solidFill>
+                <a:latin typeface="Calibri"/>
+              </a:rPr>
+              <a:t>20/07/2026</a:t>
+            </a:r>
+          </a:p>
+        </p:txBody>
+      </p:sp>
+      <p:sp>
+        <p:nvSpPr>
+          <p:cNvPr id="183" name="TextBox 182"/>
+          <p:cNvSpPr txBox="1"/>
+          <p:nvPr/>
+        </p:nvSpPr>
+        <p:spPr>
+          <a:xfrm>
+            <a:off x="4654296" y="3826764"/>
+            <a:ext cx="493775" cy="187452"/>
+          </a:xfrm>
+          <a:prstGeom prst="rect">
+            <a:avLst/>
+          </a:prstGeom>
+          <a:noFill/>
+        </p:spPr>
+        <p:txBody>
+          <a:bodyPr wrap="none" lIns="0" rIns="0" tIns="0" bIns="0" anchor="ctr">
+            <a:spAutoFit/>
+          </a:bodyPr>
+          <a:lstStyle/>
+          <a:p>
+            <a:pPr algn="ctr"/>
+            <a:r>
+              <a:rPr sz="700" b="1">
+                <a:solidFill>
+                  <a:srgbClr val="1A2340"/>
+                </a:solidFill>
+                <a:latin typeface="Calibri"/>
+              </a:rPr>
+              <a:t>80%</a:t>
+            </a:r>
+          </a:p>
+        </p:txBody>
+      </p:sp>
+      <p:sp>
+        <p:nvSpPr>
+          <p:cNvPr id="184" name="TextBox 183"/>
+          <p:cNvSpPr txBox="1"/>
+          <p:nvPr/>
+        </p:nvSpPr>
+        <p:spPr>
+          <a:xfrm>
+            <a:off x="5184648" y="3826764"/>
+            <a:ext cx="557784" cy="187452"/>
+          </a:xfrm>
+          <a:prstGeom prst="rect">
+            <a:avLst/>
+          </a:prstGeom>
+          <a:noFill/>
+        </p:spPr>
+        <p:txBody>
+          <a:bodyPr wrap="none" lIns="0" rIns="0" tIns="0" bIns="0" anchor="ctr">
+            <a:spAutoFit/>
+          </a:bodyPr>
+          <a:lstStyle/>
+          <a:p>
+            <a:pPr algn="ctr"/>
+            <a:r>
+              <a:rPr sz="700" b="0">
+                <a:solidFill>
+                  <a:srgbClr val="555555"/>
+                </a:solidFill>
+                <a:latin typeface="Calibri"/>
+              </a:rPr>
+              <a:t>84%</a:t>
+            </a:r>
+          </a:p>
+        </p:txBody>
+      </p:sp>
+      <p:sp>
+        <p:nvSpPr>
+          <p:cNvPr id="185" name="TextBox 184"/>
+          <p:cNvSpPr txBox="1"/>
+          <p:nvPr/>
+        </p:nvSpPr>
+        <p:spPr>
+          <a:xfrm>
+            <a:off x="7991856" y="3826764"/>
+            <a:ext cx="804672" cy="187452"/>
+          </a:xfrm>
+          <a:prstGeom prst="rect">
+            <a:avLst/>
+          </a:prstGeom>
+          <a:noFill/>
+        </p:spPr>
+        <p:txBody>
+          <a:bodyPr wrap="none" lIns="0" rIns="0" tIns="0" bIns="0" anchor="ctr">
+            <a:spAutoFit/>
+          </a:bodyPr>
+          <a:lstStyle/>
+          <a:p>
+            <a:pPr algn="ctr"/>
+            <a:r>
+              <a:rPr sz="700" b="1">
+                <a:solidFill>
+                  <a:srgbClr val="F59E0B"/>
+                </a:solidFill>
+                <a:latin typeface="Calibri"/>
+              </a:rPr>
+              <a:t>Riesgo de atraso</a:t>
+            </a:r>
+          </a:p>
+        </p:txBody>
+      </p:sp>
+      <p:sp>
+        <p:nvSpPr>
+          <p:cNvPr id="186" name="Rounded Rectangle 185"/>
           <p:cNvSpPr/>
           <p:nvPr/>
         </p:nvSpPr>
@@ -11682,7 +12486,7 @@
       </p:sp>
       <p:sp>
         <p:nvSpPr>
-          <p:cNvPr id="67" name="Rounded Rectangle 66"/>
+          <p:cNvPr id="187" name="Rounded Rectangle 186"/>
           <p:cNvSpPr/>
           <p:nvPr/>
         </p:nvSpPr>
@@ -11734,7 +12538,7 @@
       </p:sp>
       <p:sp>
         <p:nvSpPr>
-          <p:cNvPr id="68" name="TextBox 67"/>
+          <p:cNvPr id="188" name="TextBox 187"/>
           <p:cNvSpPr txBox="1"/>
           <p:nvPr/>
         </p:nvSpPr>
@@ -11769,7 +12573,296 @@
       </p:sp>
       <p:sp>
         <p:nvSpPr>
-          <p:cNvPr id="69" name="Rounded Rectangle 68"/>
+          <p:cNvPr id="189" name="Rectangle 188"/>
+          <p:cNvSpPr/>
+          <p:nvPr/>
+        </p:nvSpPr>
+        <p:spPr>
+          <a:xfrm>
+            <a:off x="73152" y="4014215"/>
+            <a:ext cx="8741664" cy="187452"/>
+          </a:xfrm>
+          <a:prstGeom prst="rect">
+            <a:avLst/>
+          </a:prstGeom>
+          <a:solidFill>
+            <a:srgbClr val="F5F7FA"/>
+          </a:solidFill>
+          <a:ln>
+            <a:noFill/>
+          </a:ln>
+          <a:effectLst/>
+        </p:spPr>
+        <p:style>
+          <a:lnRef idx="1">
+            <a:schemeClr val="accent1"/>
+          </a:lnRef>
+          <a:fillRef idx="3">
+            <a:schemeClr val="accent1"/>
+          </a:fillRef>
+          <a:effectRef idx="2">
+            <a:schemeClr val="accent1"/>
+          </a:effectRef>
+          <a:fontRef idx="minor">
+            <a:schemeClr val="lt1"/>
+          </a:fontRef>
+        </p:style>
+        <p:txBody>
+          <a:bodyPr rtlCol="0" anchor="ctr"/>
+          <a:lstStyle/>
+          <a:p>
+            <a:pPr algn="ctr"/>
+          </a:p>
+        </p:txBody>
+      </p:sp>
+      <p:sp>
+        <p:nvSpPr>
+          <p:cNvPr id="190" name="TextBox 189"/>
+          <p:cNvSpPr txBox="1"/>
+          <p:nvPr/>
+        </p:nvSpPr>
+        <p:spPr>
+          <a:xfrm>
+            <a:off x="91440" y="4014215"/>
+            <a:ext cx="722375" cy="187452"/>
+          </a:xfrm>
+          <a:prstGeom prst="rect">
+            <a:avLst/>
+          </a:prstGeom>
+          <a:noFill/>
+        </p:spPr>
+        <p:txBody>
+          <a:bodyPr wrap="none" lIns="0" rIns="0" tIns="0" bIns="0" anchor="ctr">
+            <a:spAutoFit/>
+          </a:bodyPr>
+          <a:lstStyle/>
+          <a:p>
+            <a:pPr algn="ctr"/>
+            <a:r>
+              <a:rPr sz="700" b="1">
+                <a:solidFill>
+                  <a:srgbClr val="1A2340"/>
+                </a:solidFill>
+                <a:latin typeface="Calibri"/>
+              </a:rPr>
+              <a:t>Proyecto</a:t>
+            </a:r>
+          </a:p>
+        </p:txBody>
+      </p:sp>
+      <p:sp>
+        <p:nvSpPr>
+          <p:cNvPr id="191" name="TextBox 190"/>
+          <p:cNvSpPr txBox="1"/>
+          <p:nvPr/>
+        </p:nvSpPr>
+        <p:spPr>
+          <a:xfrm>
+            <a:off x="850392" y="4014215"/>
+            <a:ext cx="2432304" cy="187452"/>
+          </a:xfrm>
+          <a:prstGeom prst="rect">
+            <a:avLst/>
+          </a:prstGeom>
+          <a:noFill/>
+        </p:spPr>
+        <p:txBody>
+          <a:bodyPr wrap="none" lIns="0" rIns="0" tIns="0" bIns="0" anchor="ctr">
+            <a:spAutoFit/>
+          </a:bodyPr>
+          <a:lstStyle/>
+          <a:p>
+            <a:pPr algn="l"/>
+            <a:r>
+              <a:rPr sz="700" b="0">
+                <a:solidFill>
+                  <a:srgbClr val="1A2340"/>
+                </a:solidFill>
+                <a:latin typeface="Calibri"/>
+              </a:rPr>
+              <a:t>Contabilidad || Integración Mecanica-SAE (Fase…</a:t>
+            </a:r>
+          </a:p>
+        </p:txBody>
+      </p:sp>
+      <p:sp>
+        <p:nvSpPr>
+          <p:cNvPr id="192" name="TextBox 191"/>
+          <p:cNvSpPr txBox="1"/>
+          <p:nvPr/>
+        </p:nvSpPr>
+        <p:spPr>
+          <a:xfrm>
+            <a:off x="3319272" y="4014215"/>
+            <a:ext cx="630936" cy="187452"/>
+          </a:xfrm>
+          <a:prstGeom prst="rect">
+            <a:avLst/>
+          </a:prstGeom>
+          <a:noFill/>
+        </p:spPr>
+        <p:txBody>
+          <a:bodyPr wrap="none" lIns="0" rIns="0" tIns="0" bIns="0" anchor="ctr">
+            <a:spAutoFit/>
+          </a:bodyPr>
+          <a:lstStyle/>
+          <a:p>
+            <a:pPr algn="ctr"/>
+            <a:r>
+              <a:rPr sz="700" b="0">
+                <a:solidFill>
+                  <a:srgbClr val="555555"/>
+                </a:solidFill>
+                <a:latin typeface="Calibri"/>
+              </a:rPr>
+              <a:t>21/04/2026</a:t>
+            </a:r>
+          </a:p>
+        </p:txBody>
+      </p:sp>
+      <p:sp>
+        <p:nvSpPr>
+          <p:cNvPr id="193" name="TextBox 192"/>
+          <p:cNvSpPr txBox="1"/>
+          <p:nvPr/>
+        </p:nvSpPr>
+        <p:spPr>
+          <a:xfrm>
+            <a:off x="3986783" y="4014215"/>
+            <a:ext cx="630936" cy="187452"/>
+          </a:xfrm>
+          <a:prstGeom prst="rect">
+            <a:avLst/>
+          </a:prstGeom>
+          <a:noFill/>
+        </p:spPr>
+        <p:txBody>
+          <a:bodyPr wrap="none" lIns="0" rIns="0" tIns="0" bIns="0" anchor="ctr">
+            <a:spAutoFit/>
+          </a:bodyPr>
+          <a:lstStyle/>
+          <a:p>
+            <a:pPr algn="ctr"/>
+            <a:r>
+              <a:rPr sz="700" b="0">
+                <a:solidFill>
+                  <a:srgbClr val="555555"/>
+                </a:solidFill>
+                <a:latin typeface="Calibri"/>
+              </a:rPr>
+              <a:t>12/06/2026</a:t>
+            </a:r>
+          </a:p>
+        </p:txBody>
+      </p:sp>
+      <p:sp>
+        <p:nvSpPr>
+          <p:cNvPr id="194" name="TextBox 193"/>
+          <p:cNvSpPr txBox="1"/>
+          <p:nvPr/>
+        </p:nvSpPr>
+        <p:spPr>
+          <a:xfrm>
+            <a:off x="4654296" y="4014215"/>
+            <a:ext cx="493775" cy="187452"/>
+          </a:xfrm>
+          <a:prstGeom prst="rect">
+            <a:avLst/>
+          </a:prstGeom>
+          <a:noFill/>
+        </p:spPr>
+        <p:txBody>
+          <a:bodyPr wrap="none" lIns="0" rIns="0" tIns="0" bIns="0" anchor="ctr">
+            <a:spAutoFit/>
+          </a:bodyPr>
+          <a:lstStyle/>
+          <a:p>
+            <a:pPr algn="ctr"/>
+            <a:r>
+              <a:rPr sz="700" b="1">
+                <a:solidFill>
+                  <a:srgbClr val="1A2340"/>
+                </a:solidFill>
+                <a:latin typeface="Calibri"/>
+              </a:rPr>
+              <a:t>99%</a:t>
+            </a:r>
+          </a:p>
+        </p:txBody>
+      </p:sp>
+      <p:sp>
+        <p:nvSpPr>
+          <p:cNvPr id="195" name="TextBox 194"/>
+          <p:cNvSpPr txBox="1"/>
+          <p:nvPr/>
+        </p:nvSpPr>
+        <p:spPr>
+          <a:xfrm>
+            <a:off x="5184648" y="4014215"/>
+            <a:ext cx="557784" cy="187452"/>
+          </a:xfrm>
+          <a:prstGeom prst="rect">
+            <a:avLst/>
+          </a:prstGeom>
+          <a:noFill/>
+        </p:spPr>
+        <p:txBody>
+          <a:bodyPr wrap="none" lIns="0" rIns="0" tIns="0" bIns="0" anchor="ctr">
+            <a:spAutoFit/>
+          </a:bodyPr>
+          <a:lstStyle/>
+          <a:p>
+            <a:pPr algn="ctr"/>
+            <a:r>
+              <a:rPr sz="700" b="0">
+                <a:solidFill>
+                  <a:srgbClr val="555555"/>
+                </a:solidFill>
+                <a:latin typeface="Calibri"/>
+              </a:rPr>
+              <a:t>100%</a:t>
+            </a:r>
+          </a:p>
+        </p:txBody>
+      </p:sp>
+      <p:sp>
+        <p:nvSpPr>
+          <p:cNvPr id="196" name="TextBox 195"/>
+          <p:cNvSpPr txBox="1"/>
+          <p:nvPr/>
+        </p:nvSpPr>
+        <p:spPr>
+          <a:xfrm>
+            <a:off x="7991856" y="4014215"/>
+            <a:ext cx="804672" cy="187452"/>
+          </a:xfrm>
+          <a:prstGeom prst="rect">
+            <a:avLst/>
+          </a:prstGeom>
+          <a:noFill/>
+        </p:spPr>
+        <p:txBody>
+          <a:bodyPr wrap="none" lIns="0" rIns="0" tIns="0" bIns="0" anchor="ctr">
+            <a:spAutoFit/>
+          </a:bodyPr>
+          <a:lstStyle/>
+          <a:p>
+            <a:pPr algn="ctr"/>
+            <a:r>
+              <a:rPr sz="700" b="1">
+                <a:solidFill>
+                  <a:srgbClr val="EF4444"/>
+                </a:solidFill>
+                <a:latin typeface="Calibri"/>
+              </a:rPr>
+              <a:t>Atrasado</a:t>
+            </a:r>
+          </a:p>
+        </p:txBody>
+      </p:sp>
+      <p:sp>
+        <p:nvSpPr>
+          <p:cNvPr id="197" name="Rounded Rectangle 196"/>
           <p:cNvSpPr/>
           <p:nvPr/>
         </p:nvSpPr>
@@ -11820,7 +12913,7 @@
       </p:sp>
       <p:sp>
         <p:nvSpPr>
-          <p:cNvPr id="70" name="Rounded Rectangle 69"/>
+          <p:cNvPr id="198" name="Rounded Rectangle 197"/>
           <p:cNvSpPr/>
           <p:nvPr/>
         </p:nvSpPr>
@@ -11872,7 +12965,7 @@
       </p:sp>
       <p:sp>
         <p:nvSpPr>
-          <p:cNvPr id="71" name="TextBox 70"/>
+          <p:cNvPr id="199" name="TextBox 198"/>
           <p:cNvSpPr txBox="1"/>
           <p:nvPr/>
         </p:nvSpPr>
@@ -11907,7 +13000,296 @@
       </p:sp>
       <p:sp>
         <p:nvSpPr>
-          <p:cNvPr id="72" name="Rounded Rectangle 71"/>
+          <p:cNvPr id="200" name="Rectangle 199"/>
+          <p:cNvSpPr/>
+          <p:nvPr/>
+        </p:nvSpPr>
+        <p:spPr>
+          <a:xfrm>
+            <a:off x="73152" y="4201668"/>
+            <a:ext cx="8741664" cy="187452"/>
+          </a:xfrm>
+          <a:prstGeom prst="rect">
+            <a:avLst/>
+          </a:prstGeom>
+          <a:solidFill>
+            <a:srgbClr val="FFFFFF"/>
+          </a:solidFill>
+          <a:ln>
+            <a:noFill/>
+          </a:ln>
+          <a:effectLst/>
+        </p:spPr>
+        <p:style>
+          <a:lnRef idx="1">
+            <a:schemeClr val="accent1"/>
+          </a:lnRef>
+          <a:fillRef idx="3">
+            <a:schemeClr val="accent1"/>
+          </a:fillRef>
+          <a:effectRef idx="2">
+            <a:schemeClr val="accent1"/>
+          </a:effectRef>
+          <a:fontRef idx="minor">
+            <a:schemeClr val="lt1"/>
+          </a:fontRef>
+        </p:style>
+        <p:txBody>
+          <a:bodyPr rtlCol="0" anchor="ctr"/>
+          <a:lstStyle/>
+          <a:p>
+            <a:pPr algn="ctr"/>
+          </a:p>
+        </p:txBody>
+      </p:sp>
+      <p:sp>
+        <p:nvSpPr>
+          <p:cNvPr id="201" name="TextBox 200"/>
+          <p:cNvSpPr txBox="1"/>
+          <p:nvPr/>
+        </p:nvSpPr>
+        <p:spPr>
+          <a:xfrm>
+            <a:off x="91440" y="4201668"/>
+            <a:ext cx="722375" cy="187452"/>
+          </a:xfrm>
+          <a:prstGeom prst="rect">
+            <a:avLst/>
+          </a:prstGeom>
+          <a:noFill/>
+        </p:spPr>
+        <p:txBody>
+          <a:bodyPr wrap="none" lIns="0" rIns="0" tIns="0" bIns="0" anchor="ctr">
+            <a:spAutoFit/>
+          </a:bodyPr>
+          <a:lstStyle/>
+          <a:p>
+            <a:pPr algn="ctr"/>
+            <a:r>
+              <a:rPr sz="700" b="1">
+                <a:solidFill>
+                  <a:srgbClr val="1A2340"/>
+                </a:solidFill>
+                <a:latin typeface="Calibri"/>
+              </a:rPr>
+              <a:t>Proyecto</a:t>
+            </a:r>
+          </a:p>
+        </p:txBody>
+      </p:sp>
+      <p:sp>
+        <p:nvSpPr>
+          <p:cNvPr id="202" name="TextBox 201"/>
+          <p:cNvSpPr txBox="1"/>
+          <p:nvPr/>
+        </p:nvSpPr>
+        <p:spPr>
+          <a:xfrm>
+            <a:off x="850392" y="4201668"/>
+            <a:ext cx="2432304" cy="187452"/>
+          </a:xfrm>
+          <a:prstGeom prst="rect">
+            <a:avLst/>
+          </a:prstGeom>
+          <a:noFill/>
+        </p:spPr>
+        <p:txBody>
+          <a:bodyPr wrap="none" lIns="0" rIns="0" tIns="0" bIns="0" anchor="ctr">
+            <a:spAutoFit/>
+          </a:bodyPr>
+          <a:lstStyle/>
+          <a:p>
+            <a:pPr algn="l"/>
+            <a:r>
+              <a:rPr sz="700" b="0">
+                <a:solidFill>
+                  <a:srgbClr val="1A2340"/>
+                </a:solidFill>
+                <a:latin typeface="Calibri"/>
+              </a:rPr>
+              <a:t>DTI || Integración de sistemas</a:t>
+            </a:r>
+          </a:p>
+        </p:txBody>
+      </p:sp>
+      <p:sp>
+        <p:nvSpPr>
+          <p:cNvPr id="203" name="TextBox 202"/>
+          <p:cNvSpPr txBox="1"/>
+          <p:nvPr/>
+        </p:nvSpPr>
+        <p:spPr>
+          <a:xfrm>
+            <a:off x="3319272" y="4201668"/>
+            <a:ext cx="630936" cy="187452"/>
+          </a:xfrm>
+          <a:prstGeom prst="rect">
+            <a:avLst/>
+          </a:prstGeom>
+          <a:noFill/>
+        </p:spPr>
+        <p:txBody>
+          <a:bodyPr wrap="none" lIns="0" rIns="0" tIns="0" bIns="0" anchor="ctr">
+            <a:spAutoFit/>
+          </a:bodyPr>
+          <a:lstStyle/>
+          <a:p>
+            <a:pPr algn="ctr"/>
+            <a:r>
+              <a:rPr sz="700" b="0">
+                <a:solidFill>
+                  <a:srgbClr val="555555"/>
+                </a:solidFill>
+                <a:latin typeface="Calibri"/>
+              </a:rPr>
+              <a:t>01/06/2026</a:t>
+            </a:r>
+          </a:p>
+        </p:txBody>
+      </p:sp>
+      <p:sp>
+        <p:nvSpPr>
+          <p:cNvPr id="204" name="TextBox 203"/>
+          <p:cNvSpPr txBox="1"/>
+          <p:nvPr/>
+        </p:nvSpPr>
+        <p:spPr>
+          <a:xfrm>
+            <a:off x="3986783" y="4201668"/>
+            <a:ext cx="630936" cy="187452"/>
+          </a:xfrm>
+          <a:prstGeom prst="rect">
+            <a:avLst/>
+          </a:prstGeom>
+          <a:noFill/>
+        </p:spPr>
+        <p:txBody>
+          <a:bodyPr wrap="none" lIns="0" rIns="0" tIns="0" bIns="0" anchor="ctr">
+            <a:spAutoFit/>
+          </a:bodyPr>
+          <a:lstStyle/>
+          <a:p>
+            <a:pPr algn="ctr"/>
+            <a:r>
+              <a:rPr sz="700" b="0">
+                <a:solidFill>
+                  <a:srgbClr val="555555"/>
+                </a:solidFill>
+                <a:latin typeface="Calibri"/>
+              </a:rPr>
+              <a:t>23/09/2026</a:t>
+            </a:r>
+          </a:p>
+        </p:txBody>
+      </p:sp>
+      <p:sp>
+        <p:nvSpPr>
+          <p:cNvPr id="205" name="TextBox 204"/>
+          <p:cNvSpPr txBox="1"/>
+          <p:nvPr/>
+        </p:nvSpPr>
+        <p:spPr>
+          <a:xfrm>
+            <a:off x="4654296" y="4201668"/>
+            <a:ext cx="493775" cy="187452"/>
+          </a:xfrm>
+          <a:prstGeom prst="rect">
+            <a:avLst/>
+          </a:prstGeom>
+          <a:noFill/>
+        </p:spPr>
+        <p:txBody>
+          <a:bodyPr wrap="none" lIns="0" rIns="0" tIns="0" bIns="0" anchor="ctr">
+            <a:spAutoFit/>
+          </a:bodyPr>
+          <a:lstStyle/>
+          <a:p>
+            <a:pPr algn="ctr"/>
+            <a:r>
+              <a:rPr sz="700" b="1">
+                <a:solidFill>
+                  <a:srgbClr val="1A2340"/>
+                </a:solidFill>
+                <a:latin typeface="Calibri"/>
+              </a:rPr>
+              <a:t>31%</a:t>
+            </a:r>
+          </a:p>
+        </p:txBody>
+      </p:sp>
+      <p:sp>
+        <p:nvSpPr>
+          <p:cNvPr id="206" name="TextBox 205"/>
+          <p:cNvSpPr txBox="1"/>
+          <p:nvPr/>
+        </p:nvSpPr>
+        <p:spPr>
+          <a:xfrm>
+            <a:off x="5184648" y="4201668"/>
+            <a:ext cx="557784" cy="187452"/>
+          </a:xfrm>
+          <a:prstGeom prst="rect">
+            <a:avLst/>
+          </a:prstGeom>
+          <a:noFill/>
+        </p:spPr>
+        <p:txBody>
+          <a:bodyPr wrap="none" lIns="0" rIns="0" tIns="0" bIns="0" anchor="ctr">
+            <a:spAutoFit/>
+          </a:bodyPr>
+          <a:lstStyle/>
+          <a:p>
+            <a:pPr algn="ctr"/>
+            <a:r>
+              <a:rPr sz="700" b="0">
+                <a:solidFill>
+                  <a:srgbClr val="555555"/>
+                </a:solidFill>
+                <a:latin typeface="Calibri"/>
+              </a:rPr>
+              <a:t>30%</a:t>
+            </a:r>
+          </a:p>
+        </p:txBody>
+      </p:sp>
+      <p:sp>
+        <p:nvSpPr>
+          <p:cNvPr id="207" name="TextBox 206"/>
+          <p:cNvSpPr txBox="1"/>
+          <p:nvPr/>
+        </p:nvSpPr>
+        <p:spPr>
+          <a:xfrm>
+            <a:off x="7991856" y="4201668"/>
+            <a:ext cx="804672" cy="187452"/>
+          </a:xfrm>
+          <a:prstGeom prst="rect">
+            <a:avLst/>
+          </a:prstGeom>
+          <a:noFill/>
+        </p:spPr>
+        <p:txBody>
+          <a:bodyPr wrap="none" lIns="0" rIns="0" tIns="0" bIns="0" anchor="ctr">
+            <a:spAutoFit/>
+          </a:bodyPr>
+          <a:lstStyle/>
+          <a:p>
+            <a:pPr algn="ctr"/>
+            <a:r>
+              <a:rPr sz="700" b="1">
+                <a:solidFill>
+                  <a:srgbClr val="22C55E"/>
+                </a:solidFill>
+                <a:latin typeface="Calibri"/>
+              </a:rPr>
+              <a:t>A tiempo</a:t>
+            </a:r>
+          </a:p>
+        </p:txBody>
+      </p:sp>
+      <p:sp>
+        <p:nvSpPr>
+          <p:cNvPr id="208" name="Rounded Rectangle 207"/>
           <p:cNvSpPr/>
           <p:nvPr/>
         </p:nvSpPr>
@@ -11958,7 +13340,7 @@
       </p:sp>
       <p:sp>
         <p:nvSpPr>
-          <p:cNvPr id="73" name="Rounded Rectangle 72"/>
+          <p:cNvPr id="209" name="Rounded Rectangle 208"/>
           <p:cNvSpPr/>
           <p:nvPr/>
         </p:nvSpPr>
@@ -12010,7 +13392,7 @@
       </p:sp>
       <p:sp>
         <p:nvSpPr>
-          <p:cNvPr id="74" name="TextBox 73"/>
+          <p:cNvPr id="210" name="TextBox 209"/>
           <p:cNvSpPr txBox="1"/>
           <p:nvPr/>
         </p:nvSpPr>
@@ -12045,7 +13427,296 @@
       </p:sp>
       <p:sp>
         <p:nvSpPr>
-          <p:cNvPr id="75" name="Rounded Rectangle 74"/>
+          <p:cNvPr id="211" name="Rectangle 210"/>
+          <p:cNvSpPr/>
+          <p:nvPr/>
+        </p:nvSpPr>
+        <p:spPr>
+          <a:xfrm>
+            <a:off x="73152" y="4389120"/>
+            <a:ext cx="8741664" cy="187452"/>
+          </a:xfrm>
+          <a:prstGeom prst="rect">
+            <a:avLst/>
+          </a:prstGeom>
+          <a:solidFill>
+            <a:srgbClr val="F5F7FA"/>
+          </a:solidFill>
+          <a:ln>
+            <a:noFill/>
+          </a:ln>
+          <a:effectLst/>
+        </p:spPr>
+        <p:style>
+          <a:lnRef idx="1">
+            <a:schemeClr val="accent1"/>
+          </a:lnRef>
+          <a:fillRef idx="3">
+            <a:schemeClr val="accent1"/>
+          </a:fillRef>
+          <a:effectRef idx="2">
+            <a:schemeClr val="accent1"/>
+          </a:effectRef>
+          <a:fontRef idx="minor">
+            <a:schemeClr val="lt1"/>
+          </a:fontRef>
+        </p:style>
+        <p:txBody>
+          <a:bodyPr rtlCol="0" anchor="ctr"/>
+          <a:lstStyle/>
+          <a:p>
+            <a:pPr algn="ctr"/>
+          </a:p>
+        </p:txBody>
+      </p:sp>
+      <p:sp>
+        <p:nvSpPr>
+          <p:cNvPr id="212" name="TextBox 211"/>
+          <p:cNvSpPr txBox="1"/>
+          <p:nvPr/>
+        </p:nvSpPr>
+        <p:spPr>
+          <a:xfrm>
+            <a:off x="91440" y="4389120"/>
+            <a:ext cx="722375" cy="187452"/>
+          </a:xfrm>
+          <a:prstGeom prst="rect">
+            <a:avLst/>
+          </a:prstGeom>
+          <a:noFill/>
+        </p:spPr>
+        <p:txBody>
+          <a:bodyPr wrap="none" lIns="0" rIns="0" tIns="0" bIns="0" anchor="ctr">
+            <a:spAutoFit/>
+          </a:bodyPr>
+          <a:lstStyle/>
+          <a:p>
+            <a:pPr algn="ctr"/>
+            <a:r>
+              <a:rPr sz="700" b="1">
+                <a:solidFill>
+                  <a:srgbClr val="1A2340"/>
+                </a:solidFill>
+                <a:latin typeface="Calibri"/>
+              </a:rPr>
+              <a:t>Proyecto</a:t>
+            </a:r>
+          </a:p>
+        </p:txBody>
+      </p:sp>
+      <p:sp>
+        <p:nvSpPr>
+          <p:cNvPr id="213" name="TextBox 212"/>
+          <p:cNvSpPr txBox="1"/>
+          <p:nvPr/>
+        </p:nvSpPr>
+        <p:spPr>
+          <a:xfrm>
+            <a:off x="850392" y="4389120"/>
+            <a:ext cx="2432304" cy="187452"/>
+          </a:xfrm>
+          <a:prstGeom prst="rect">
+            <a:avLst/>
+          </a:prstGeom>
+          <a:noFill/>
+        </p:spPr>
+        <p:txBody>
+          <a:bodyPr wrap="none" lIns="0" rIns="0" tIns="0" bIns="0" anchor="ctr">
+            <a:spAutoFit/>
+          </a:bodyPr>
+          <a:lstStyle/>
+          <a:p>
+            <a:pPr algn="l"/>
+            <a:r>
+              <a:rPr sz="700" b="0">
+                <a:solidFill>
+                  <a:srgbClr val="1A2340"/>
+                </a:solidFill>
+                <a:latin typeface="Calibri"/>
+              </a:rPr>
+              <a:t>Capital Humano || BUK Personalizados Fase 2</a:t>
+            </a:r>
+          </a:p>
+        </p:txBody>
+      </p:sp>
+      <p:sp>
+        <p:nvSpPr>
+          <p:cNvPr id="214" name="TextBox 213"/>
+          <p:cNvSpPr txBox="1"/>
+          <p:nvPr/>
+        </p:nvSpPr>
+        <p:spPr>
+          <a:xfrm>
+            <a:off x="3319272" y="4389120"/>
+            <a:ext cx="630936" cy="187452"/>
+          </a:xfrm>
+          <a:prstGeom prst="rect">
+            <a:avLst/>
+          </a:prstGeom>
+          <a:noFill/>
+        </p:spPr>
+        <p:txBody>
+          <a:bodyPr wrap="none" lIns="0" rIns="0" tIns="0" bIns="0" anchor="ctr">
+            <a:spAutoFit/>
+          </a:bodyPr>
+          <a:lstStyle/>
+          <a:p>
+            <a:pPr algn="ctr"/>
+            <a:r>
+              <a:rPr sz="700" b="0">
+                <a:solidFill>
+                  <a:srgbClr val="555555"/>
+                </a:solidFill>
+                <a:latin typeface="Calibri"/>
+              </a:rPr>
+              <a:t>08/06/2026</a:t>
+            </a:r>
+          </a:p>
+        </p:txBody>
+      </p:sp>
+      <p:sp>
+        <p:nvSpPr>
+          <p:cNvPr id="215" name="TextBox 214"/>
+          <p:cNvSpPr txBox="1"/>
+          <p:nvPr/>
+        </p:nvSpPr>
+        <p:spPr>
+          <a:xfrm>
+            <a:off x="3986783" y="4389120"/>
+            <a:ext cx="630936" cy="187452"/>
+          </a:xfrm>
+          <a:prstGeom prst="rect">
+            <a:avLst/>
+          </a:prstGeom>
+          <a:noFill/>
+        </p:spPr>
+        <p:txBody>
+          <a:bodyPr wrap="none" lIns="0" rIns="0" tIns="0" bIns="0" anchor="ctr">
+            <a:spAutoFit/>
+          </a:bodyPr>
+          <a:lstStyle/>
+          <a:p>
+            <a:pPr algn="ctr"/>
+            <a:r>
+              <a:rPr sz="700" b="0">
+                <a:solidFill>
+                  <a:srgbClr val="555555"/>
+                </a:solidFill>
+                <a:latin typeface="Calibri"/>
+              </a:rPr>
+              <a:t>11/08/2026</a:t>
+            </a:r>
+          </a:p>
+        </p:txBody>
+      </p:sp>
+      <p:sp>
+        <p:nvSpPr>
+          <p:cNvPr id="216" name="TextBox 215"/>
+          <p:cNvSpPr txBox="1"/>
+          <p:nvPr/>
+        </p:nvSpPr>
+        <p:spPr>
+          <a:xfrm>
+            <a:off x="4654296" y="4389120"/>
+            <a:ext cx="493775" cy="187452"/>
+          </a:xfrm>
+          <a:prstGeom prst="rect">
+            <a:avLst/>
+          </a:prstGeom>
+          <a:noFill/>
+        </p:spPr>
+        <p:txBody>
+          <a:bodyPr wrap="none" lIns="0" rIns="0" tIns="0" bIns="0" anchor="ctr">
+            <a:spAutoFit/>
+          </a:bodyPr>
+          <a:lstStyle/>
+          <a:p>
+            <a:pPr algn="ctr"/>
+            <a:r>
+              <a:rPr sz="700" b="1">
+                <a:solidFill>
+                  <a:srgbClr val="1A2340"/>
+                </a:solidFill>
+                <a:latin typeface="Calibri"/>
+              </a:rPr>
+              <a:t>74%</a:t>
+            </a:r>
+          </a:p>
+        </p:txBody>
+      </p:sp>
+      <p:sp>
+        <p:nvSpPr>
+          <p:cNvPr id="217" name="TextBox 216"/>
+          <p:cNvSpPr txBox="1"/>
+          <p:nvPr/>
+        </p:nvSpPr>
+        <p:spPr>
+          <a:xfrm>
+            <a:off x="5184648" y="4389120"/>
+            <a:ext cx="557784" cy="187452"/>
+          </a:xfrm>
+          <a:prstGeom prst="rect">
+            <a:avLst/>
+          </a:prstGeom>
+          <a:noFill/>
+        </p:spPr>
+        <p:txBody>
+          <a:bodyPr wrap="none" lIns="0" rIns="0" tIns="0" bIns="0" anchor="ctr">
+            <a:spAutoFit/>
+          </a:bodyPr>
+          <a:lstStyle/>
+          <a:p>
+            <a:pPr algn="ctr"/>
+            <a:r>
+              <a:rPr sz="700" b="0">
+                <a:solidFill>
+                  <a:srgbClr val="555555"/>
+                </a:solidFill>
+                <a:latin typeface="Calibri"/>
+              </a:rPr>
+              <a:t>43%</a:t>
+            </a:r>
+          </a:p>
+        </p:txBody>
+      </p:sp>
+      <p:sp>
+        <p:nvSpPr>
+          <p:cNvPr id="218" name="TextBox 217"/>
+          <p:cNvSpPr txBox="1"/>
+          <p:nvPr/>
+        </p:nvSpPr>
+        <p:spPr>
+          <a:xfrm>
+            <a:off x="7991856" y="4389120"/>
+            <a:ext cx="804672" cy="187452"/>
+          </a:xfrm>
+          <a:prstGeom prst="rect">
+            <a:avLst/>
+          </a:prstGeom>
+          <a:noFill/>
+        </p:spPr>
+        <p:txBody>
+          <a:bodyPr wrap="none" lIns="0" rIns="0" tIns="0" bIns="0" anchor="ctr">
+            <a:spAutoFit/>
+          </a:bodyPr>
+          <a:lstStyle/>
+          <a:p>
+            <a:pPr algn="ctr"/>
+            <a:r>
+              <a:rPr sz="700" b="1">
+                <a:solidFill>
+                  <a:srgbClr val="22C55E"/>
+                </a:solidFill>
+                <a:latin typeface="Calibri"/>
+              </a:rPr>
+              <a:t>A tiempo</a:t>
+            </a:r>
+          </a:p>
+        </p:txBody>
+      </p:sp>
+      <p:sp>
+        <p:nvSpPr>
+          <p:cNvPr id="219" name="Rounded Rectangle 218"/>
           <p:cNvSpPr/>
           <p:nvPr/>
         </p:nvSpPr>
@@ -12096,7 +13767,7 @@
       </p:sp>
       <p:sp>
         <p:nvSpPr>
-          <p:cNvPr id="76" name="Rounded Rectangle 75"/>
+          <p:cNvPr id="220" name="Rounded Rectangle 219"/>
           <p:cNvSpPr/>
           <p:nvPr/>
         </p:nvSpPr>
@@ -12148,7 +13819,7 @@
       </p:sp>
       <p:sp>
         <p:nvSpPr>
-          <p:cNvPr id="77" name="TextBox 76"/>
+          <p:cNvPr id="221" name="TextBox 220"/>
           <p:cNvSpPr txBox="1"/>
           <p:nvPr/>
         </p:nvSpPr>
@@ -12183,7 +13854,296 @@
       </p:sp>
       <p:sp>
         <p:nvSpPr>
-          <p:cNvPr id="78" name="Rounded Rectangle 77"/>
+          <p:cNvPr id="222" name="Rectangle 221"/>
+          <p:cNvSpPr/>
+          <p:nvPr/>
+        </p:nvSpPr>
+        <p:spPr>
+          <a:xfrm>
+            <a:off x="73152" y="4576572"/>
+            <a:ext cx="8741664" cy="187452"/>
+          </a:xfrm>
+          <a:prstGeom prst="rect">
+            <a:avLst/>
+          </a:prstGeom>
+          <a:solidFill>
+            <a:srgbClr val="FFFFFF"/>
+          </a:solidFill>
+          <a:ln>
+            <a:noFill/>
+          </a:ln>
+          <a:effectLst/>
+        </p:spPr>
+        <p:style>
+          <a:lnRef idx="1">
+            <a:schemeClr val="accent1"/>
+          </a:lnRef>
+          <a:fillRef idx="3">
+            <a:schemeClr val="accent1"/>
+          </a:fillRef>
+          <a:effectRef idx="2">
+            <a:schemeClr val="accent1"/>
+          </a:effectRef>
+          <a:fontRef idx="minor">
+            <a:schemeClr val="lt1"/>
+          </a:fontRef>
+        </p:style>
+        <p:txBody>
+          <a:bodyPr rtlCol="0" anchor="ctr"/>
+          <a:lstStyle/>
+          <a:p>
+            <a:pPr algn="ctr"/>
+          </a:p>
+        </p:txBody>
+      </p:sp>
+      <p:sp>
+        <p:nvSpPr>
+          <p:cNvPr id="223" name="TextBox 222"/>
+          <p:cNvSpPr txBox="1"/>
+          <p:nvPr/>
+        </p:nvSpPr>
+        <p:spPr>
+          <a:xfrm>
+            <a:off x="91440" y="4576572"/>
+            <a:ext cx="722375" cy="187452"/>
+          </a:xfrm>
+          <a:prstGeom prst="rect">
+            <a:avLst/>
+          </a:prstGeom>
+          <a:noFill/>
+        </p:spPr>
+        <p:txBody>
+          <a:bodyPr wrap="none" lIns="0" rIns="0" tIns="0" bIns="0" anchor="ctr">
+            <a:spAutoFit/>
+          </a:bodyPr>
+          <a:lstStyle/>
+          <a:p>
+            <a:pPr algn="ctr"/>
+            <a:r>
+              <a:rPr sz="700" b="1">
+                <a:solidFill>
+                  <a:srgbClr val="1A2340"/>
+                </a:solidFill>
+                <a:latin typeface="Calibri"/>
+              </a:rPr>
+              <a:t>Proyecto</a:t>
+            </a:r>
+          </a:p>
+        </p:txBody>
+      </p:sp>
+      <p:sp>
+        <p:nvSpPr>
+          <p:cNvPr id="224" name="TextBox 223"/>
+          <p:cNvSpPr txBox="1"/>
+          <p:nvPr/>
+        </p:nvSpPr>
+        <p:spPr>
+          <a:xfrm>
+            <a:off x="850392" y="4576572"/>
+            <a:ext cx="2432304" cy="187452"/>
+          </a:xfrm>
+          <a:prstGeom prst="rect">
+            <a:avLst/>
+          </a:prstGeom>
+          <a:noFill/>
+        </p:spPr>
+        <p:txBody>
+          <a:bodyPr wrap="none" lIns="0" rIns="0" tIns="0" bIns="0" anchor="ctr">
+            <a:spAutoFit/>
+          </a:bodyPr>
+          <a:lstStyle/>
+          <a:p>
+            <a:pPr algn="l"/>
+            <a:r>
+              <a:rPr sz="700" b="0">
+                <a:solidFill>
+                  <a:srgbClr val="1A2340"/>
+                </a:solidFill>
+                <a:latin typeface="Calibri"/>
+              </a:rPr>
+              <a:t>Operaciones Fleet || Adcontent - Sfleet</a:t>
+            </a:r>
+          </a:p>
+        </p:txBody>
+      </p:sp>
+      <p:sp>
+        <p:nvSpPr>
+          <p:cNvPr id="225" name="TextBox 224"/>
+          <p:cNvSpPr txBox="1"/>
+          <p:nvPr/>
+        </p:nvSpPr>
+        <p:spPr>
+          <a:xfrm>
+            <a:off x="3319272" y="4576572"/>
+            <a:ext cx="630936" cy="187452"/>
+          </a:xfrm>
+          <a:prstGeom prst="rect">
+            <a:avLst/>
+          </a:prstGeom>
+          <a:noFill/>
+        </p:spPr>
+        <p:txBody>
+          <a:bodyPr wrap="none" lIns="0" rIns="0" tIns="0" bIns="0" anchor="ctr">
+            <a:spAutoFit/>
+          </a:bodyPr>
+          <a:lstStyle/>
+          <a:p>
+            <a:pPr algn="ctr"/>
+            <a:r>
+              <a:rPr sz="700" b="0">
+                <a:solidFill>
+                  <a:srgbClr val="555555"/>
+                </a:solidFill>
+                <a:latin typeface="Calibri"/>
+              </a:rPr>
+              <a:t>15/06/2026</a:t>
+            </a:r>
+          </a:p>
+        </p:txBody>
+      </p:sp>
+      <p:sp>
+        <p:nvSpPr>
+          <p:cNvPr id="226" name="TextBox 225"/>
+          <p:cNvSpPr txBox="1"/>
+          <p:nvPr/>
+        </p:nvSpPr>
+        <p:spPr>
+          <a:xfrm>
+            <a:off x="3986783" y="4576572"/>
+            <a:ext cx="630936" cy="187452"/>
+          </a:xfrm>
+          <a:prstGeom prst="rect">
+            <a:avLst/>
+          </a:prstGeom>
+          <a:noFill/>
+        </p:spPr>
+        <p:txBody>
+          <a:bodyPr wrap="none" lIns="0" rIns="0" tIns="0" bIns="0" anchor="ctr">
+            <a:spAutoFit/>
+          </a:bodyPr>
+          <a:lstStyle/>
+          <a:p>
+            <a:pPr algn="ctr"/>
+            <a:r>
+              <a:rPr sz="700" b="0">
+                <a:solidFill>
+                  <a:srgbClr val="555555"/>
+                </a:solidFill>
+                <a:latin typeface="Calibri"/>
+              </a:rPr>
+              <a:t>08/02/2027</a:t>
+            </a:r>
+          </a:p>
+        </p:txBody>
+      </p:sp>
+      <p:sp>
+        <p:nvSpPr>
+          <p:cNvPr id="227" name="TextBox 226"/>
+          <p:cNvSpPr txBox="1"/>
+          <p:nvPr/>
+        </p:nvSpPr>
+        <p:spPr>
+          <a:xfrm>
+            <a:off x="4654296" y="4576572"/>
+            <a:ext cx="493775" cy="187452"/>
+          </a:xfrm>
+          <a:prstGeom prst="rect">
+            <a:avLst/>
+          </a:prstGeom>
+          <a:noFill/>
+        </p:spPr>
+        <p:txBody>
+          <a:bodyPr wrap="none" lIns="0" rIns="0" tIns="0" bIns="0" anchor="ctr">
+            <a:spAutoFit/>
+          </a:bodyPr>
+          <a:lstStyle/>
+          <a:p>
+            <a:pPr algn="ctr"/>
+            <a:r>
+              <a:rPr sz="700" b="1">
+                <a:solidFill>
+                  <a:srgbClr val="1A2340"/>
+                </a:solidFill>
+                <a:latin typeface="Calibri"/>
+              </a:rPr>
+              <a:t>4%</a:t>
+            </a:r>
+          </a:p>
+        </p:txBody>
+      </p:sp>
+      <p:sp>
+        <p:nvSpPr>
+          <p:cNvPr id="228" name="TextBox 227"/>
+          <p:cNvSpPr txBox="1"/>
+          <p:nvPr/>
+        </p:nvSpPr>
+        <p:spPr>
+          <a:xfrm>
+            <a:off x="5184648" y="4576572"/>
+            <a:ext cx="557784" cy="187452"/>
+          </a:xfrm>
+          <a:prstGeom prst="rect">
+            <a:avLst/>
+          </a:prstGeom>
+          <a:noFill/>
+        </p:spPr>
+        <p:txBody>
+          <a:bodyPr wrap="none" lIns="0" rIns="0" tIns="0" bIns="0" anchor="ctr">
+            <a:spAutoFit/>
+          </a:bodyPr>
+          <a:lstStyle/>
+          <a:p>
+            <a:pPr algn="ctr"/>
+            <a:r>
+              <a:rPr sz="700" b="0">
+                <a:solidFill>
+                  <a:srgbClr val="555555"/>
+                </a:solidFill>
+                <a:latin typeface="Calibri"/>
+              </a:rPr>
+              <a:t>8%</a:t>
+            </a:r>
+          </a:p>
+        </p:txBody>
+      </p:sp>
+      <p:sp>
+        <p:nvSpPr>
+          <p:cNvPr id="229" name="TextBox 228"/>
+          <p:cNvSpPr txBox="1"/>
+          <p:nvPr/>
+        </p:nvSpPr>
+        <p:spPr>
+          <a:xfrm>
+            <a:off x="7991856" y="4576572"/>
+            <a:ext cx="804672" cy="187452"/>
+          </a:xfrm>
+          <a:prstGeom prst="rect">
+            <a:avLst/>
+          </a:prstGeom>
+          <a:noFill/>
+        </p:spPr>
+        <p:txBody>
+          <a:bodyPr wrap="none" lIns="0" rIns="0" tIns="0" bIns="0" anchor="ctr">
+            <a:spAutoFit/>
+          </a:bodyPr>
+          <a:lstStyle/>
+          <a:p>
+            <a:pPr algn="ctr"/>
+            <a:r>
+              <a:rPr sz="700" b="1">
+                <a:solidFill>
+                  <a:srgbClr val="F59E0B"/>
+                </a:solidFill>
+                <a:latin typeface="Calibri"/>
+              </a:rPr>
+              <a:t>Riesgo de atraso</a:t>
+            </a:r>
+          </a:p>
+        </p:txBody>
+      </p:sp>
+      <p:sp>
+        <p:nvSpPr>
+          <p:cNvPr id="230" name="Rounded Rectangle 229"/>
           <p:cNvSpPr/>
           <p:nvPr/>
         </p:nvSpPr>
@@ -12234,7 +14194,7 @@
       </p:sp>
       <p:sp>
         <p:nvSpPr>
-          <p:cNvPr id="79" name="Rounded Rectangle 78"/>
+          <p:cNvPr id="231" name="Rounded Rectangle 230"/>
           <p:cNvSpPr/>
           <p:nvPr/>
         </p:nvSpPr>
@@ -12286,7 +14246,7 @@
       </p:sp>
       <p:sp>
         <p:nvSpPr>
-          <p:cNvPr id="80" name="TextBox 79"/>
+          <p:cNvPr id="232" name="TextBox 231"/>
           <p:cNvSpPr txBox="1"/>
           <p:nvPr/>
         </p:nvSpPr>

--- a/cierre_base.pptx
+++ b/cierre_base.pptx
@@ -8550,7 +8550,7 @@
                 </a:solidFill>
                 <a:latin typeface="Calibri"/>
               </a:rPr>
-              <a:t>91%</a:t>
+              <a:t>92%</a:t>
             </a:r>
           </a:p>
         </p:txBody>
@@ -10258,7 +10258,7 @@
                 </a:solidFill>
                 <a:latin typeface="Calibri"/>
               </a:rPr>
-              <a:t>96%</a:t>
+              <a:t>97%</a:t>
             </a:r>
           </a:p>
         </p:txBody>
@@ -11966,7 +11966,7 @@
                 </a:solidFill>
                 <a:latin typeface="Calibri"/>
               </a:rPr>
-              <a:t>63%</a:t>
+              <a:t>64%</a:t>
             </a:r>
           </a:p>
         </p:txBody>
@@ -12393,7 +12393,7 @@
                 </a:solidFill>
                 <a:latin typeface="Calibri"/>
               </a:rPr>
-              <a:t>84%</a:t>
+              <a:t>85%</a:t>
             </a:r>
           </a:p>
         </p:txBody>
@@ -13247,7 +13247,7 @@
                 </a:solidFill>
                 <a:latin typeface="Calibri"/>
               </a:rPr>
-              <a:t>30%</a:t>
+              <a:t>31%</a:t>
             </a:r>
           </a:p>
         </p:txBody>
@@ -13674,7 +13674,7 @@
                 </a:solidFill>
                 <a:latin typeface="Calibri"/>
               </a:rPr>
-              <a:t>43%</a:t>
+              <a:t>45%</a:t>
             </a:r>
           </a:p>
         </p:txBody>
@@ -14101,7 +14101,7 @@
                 </a:solidFill>
                 <a:latin typeface="Calibri"/>
               </a:rPr>
-              <a:t>8%</a:t>
+              <a:t>9%</a:t>
             </a:r>
           </a:p>
         </p:txBody>

--- a/cierre_base.pptx
+++ b/cierre_base.pptx
@@ -5331,7 +5331,7 @@
         </p:nvSpPr>
         <p:spPr>
           <a:xfrm>
-            <a:off x="1554480" y="4607642"/>
+            <a:off x="1920240" y="4607642"/>
             <a:ext cx="6858000" cy="282834"/>
           </a:xfrm>
           <a:prstGeom prst="rect">
@@ -5345,7 +5345,7 @@
           </a:bodyPr>
           <a:lstStyle/>
           <a:p>
-            <a:pPr algn="ctr"/>
+            <a:pPr algn="r"/>
             <a:r>
               <a:rPr lang="es-MX" sz="1388" b="1" dirty="0">
                 <a:solidFill>

--- a/cierre_base.pptx
+++ b/cierre_base.pptx
@@ -5347,7 +5347,7 @@
           <a:p>
             <a:pPr algn="r"/>
             <a:r>
-              <a:rPr lang="es-MX" sz="1388" b="1" dirty="0">
+              <a:rPr lang="es-MX" sz="1390" b="1" dirty="0">
                 <a:solidFill>
                   <a:srgbClr val="000000"/>
                 </a:solidFill>
@@ -14347,7 +14347,7 @@
               <a:rPr lang="es-MX" b="1" dirty="0">
                 <a:latin typeface="Aptos (cuerpo)"/>
               </a:rPr>
-              <a:t>Eventualidades de proyectos con retraso</a:t>
+              <a:t>Eventualidades de proyectos con atraso</a:t>
             </a:r>
             <a:endParaRPr lang="es-MX" b="1" dirty="0">
               <a:highlight>

--- a/cierre_base.pptx
+++ b/cierre_base.pptx
@@ -10258,7 +10258,7 @@
                 </a:solidFill>
                 <a:latin typeface="Calibri"/>
               </a:rPr>
-              <a:t>97%</a:t>
+              <a:t>98%</a:t>
             </a:r>
           </a:p>
         </p:txBody>
@@ -11966,7 +11966,7 @@
                 </a:solidFill>
                 <a:latin typeface="Calibri"/>
               </a:rPr>
-              <a:t>64%</a:t>
+              <a:t>65%</a:t>
             </a:r>
           </a:p>
         </p:txBody>
@@ -12393,7 +12393,7 @@
                 </a:solidFill>
                 <a:latin typeface="Calibri"/>
               </a:rPr>
-              <a:t>85%</a:t>
+              <a:t>86%</a:t>
             </a:r>
           </a:p>
         </p:txBody>
@@ -13247,7 +13247,7 @@
                 </a:solidFill>
                 <a:latin typeface="Calibri"/>
               </a:rPr>
-              <a:t>31%</a:t>
+              <a:t>32%</a:t>
             </a:r>
           </a:p>
         </p:txBody>
@@ -13261,6 +13261,433 @@
         <p:spPr>
           <a:xfrm>
             <a:off x="7991856" y="4201668"/>
+            <a:ext cx="804672" cy="187452"/>
+          </a:xfrm>
+          <a:prstGeom prst="rect">
+            <a:avLst/>
+          </a:prstGeom>
+          <a:noFill/>
+        </p:spPr>
+        <p:txBody>
+          <a:bodyPr wrap="none" lIns="0" rIns="0" tIns="0" bIns="0" anchor="ctr">
+            <a:spAutoFit/>
+          </a:bodyPr>
+          <a:lstStyle/>
+          <a:p>
+            <a:pPr algn="ctr"/>
+            <a:r>
+              <a:rPr sz="700" b="1">
+                <a:solidFill>
+                  <a:srgbClr val="F59E0B"/>
+                </a:solidFill>
+                <a:latin typeface="Calibri"/>
+              </a:rPr>
+              <a:t>Riesgo de atraso</a:t>
+            </a:r>
+          </a:p>
+        </p:txBody>
+      </p:sp>
+      <p:sp>
+        <p:nvSpPr>
+          <p:cNvPr id="208" name="Rounded Rectangle 207"/>
+          <p:cNvSpPr/>
+          <p:nvPr/>
+        </p:nvSpPr>
+        <p:spPr>
+          <a:xfrm>
+            <a:off x="5806440" y="4243844"/>
+            <a:ext cx="1691640" cy="103098"/>
+          </a:xfrm>
+          <a:prstGeom prst="roundRect">
+            <a:avLst>
+              <a:gd name="adj" fmla="val 50000"/>
+            </a:avLst>
+          </a:prstGeom>
+          <a:pattFill prst="smGrid">
+            <a:fgClr>
+              <a:srgbClr val="F59E0B"/>
+            </a:fgClr>
+            <a:bgClr>
+              <a:srgbClr val="FFFFFF"/>
+            </a:bgClr>
+          </a:pattFill>
+          <a:ln>
+            <a:noFill/>
+          </a:ln>
+          <a:effectLst/>
+        </p:spPr>
+        <p:style>
+          <a:lnRef idx="1">
+            <a:schemeClr val="accent1"/>
+          </a:lnRef>
+          <a:fillRef idx="3">
+            <a:schemeClr val="accent1"/>
+          </a:fillRef>
+          <a:effectRef idx="2">
+            <a:schemeClr val="accent1"/>
+          </a:effectRef>
+          <a:fontRef idx="minor">
+            <a:schemeClr val="lt1"/>
+          </a:fontRef>
+        </p:style>
+        <p:txBody>
+          <a:bodyPr rtlCol="0" anchor="ctr"/>
+          <a:lstStyle/>
+          <a:p>
+            <a:pPr algn="ctr"/>
+          </a:p>
+        </p:txBody>
+      </p:sp>
+      <p:sp>
+        <p:nvSpPr>
+          <p:cNvPr id="209" name="Rounded Rectangle 208"/>
+          <p:cNvSpPr/>
+          <p:nvPr/>
+        </p:nvSpPr>
+        <p:spPr>
+          <a:xfrm>
+            <a:off x="5806440" y="4243844"/>
+            <a:ext cx="524408" cy="103098"/>
+          </a:xfrm>
+          <a:prstGeom prst="roundRect">
+            <a:avLst>
+              <a:gd name="adj" fmla="val 50000"/>
+            </a:avLst>
+          </a:prstGeom>
+          <a:solidFill>
+            <a:srgbClr val="F59E0B"/>
+          </a:solidFill>
+          <a:ln>
+            <a:noFill/>
+          </a:ln>
+          <a:effectLst>
+            <a:outerShdw blurRad="76200" dist="19050" dir="5400000" rotWithShape="0">
+              <a:srgbClr val="F59E0B">
+                <a:alpha val="55000"/>
+              </a:srgbClr>
+            </a:outerShdw>
+          </a:effectLst>
+        </p:spPr>
+        <p:style>
+          <a:lnRef idx="1">
+            <a:schemeClr val="accent1"/>
+          </a:lnRef>
+          <a:fillRef idx="3">
+            <a:schemeClr val="accent1"/>
+          </a:fillRef>
+          <a:effectRef idx="2">
+            <a:schemeClr val="accent1"/>
+          </a:effectRef>
+          <a:fontRef idx="minor">
+            <a:schemeClr val="lt1"/>
+          </a:fontRef>
+        </p:style>
+        <p:txBody>
+          <a:bodyPr rtlCol="0" anchor="ctr"/>
+          <a:lstStyle/>
+          <a:p>
+            <a:pPr algn="ctr"/>
+          </a:p>
+        </p:txBody>
+      </p:sp>
+      <p:sp>
+        <p:nvSpPr>
+          <p:cNvPr id="210" name="TextBox 209"/>
+          <p:cNvSpPr txBox="1"/>
+          <p:nvPr/>
+        </p:nvSpPr>
+        <p:spPr>
+          <a:xfrm>
+            <a:off x="7543800" y="4211840"/>
+            <a:ext cx="457200" cy="167106"/>
+          </a:xfrm>
+          <a:prstGeom prst="rect">
+            <a:avLst/>
+          </a:prstGeom>
+          <a:noFill/>
+        </p:spPr>
+        <p:txBody>
+          <a:bodyPr wrap="none" lIns="0" rIns="0" tIns="0" bIns="0">
+            <a:spAutoFit/>
+          </a:bodyPr>
+          <a:lstStyle/>
+          <a:p>
+            <a:pPr algn="l"/>
+            <a:r>
+              <a:rPr sz="800" b="1">
+                <a:solidFill>
+                  <a:srgbClr val="F59E0B"/>
+                </a:solidFill>
+                <a:latin typeface="Calibri"/>
+              </a:rPr>
+              <a:t>31%</a:t>
+            </a:r>
+          </a:p>
+        </p:txBody>
+      </p:sp>
+      <p:sp>
+        <p:nvSpPr>
+          <p:cNvPr id="211" name="Rectangle 210"/>
+          <p:cNvSpPr/>
+          <p:nvPr/>
+        </p:nvSpPr>
+        <p:spPr>
+          <a:xfrm>
+            <a:off x="73152" y="4389120"/>
+            <a:ext cx="8741664" cy="187452"/>
+          </a:xfrm>
+          <a:prstGeom prst="rect">
+            <a:avLst/>
+          </a:prstGeom>
+          <a:solidFill>
+            <a:srgbClr val="F5F7FA"/>
+          </a:solidFill>
+          <a:ln>
+            <a:noFill/>
+          </a:ln>
+          <a:effectLst/>
+        </p:spPr>
+        <p:style>
+          <a:lnRef idx="1">
+            <a:schemeClr val="accent1"/>
+          </a:lnRef>
+          <a:fillRef idx="3">
+            <a:schemeClr val="accent1"/>
+          </a:fillRef>
+          <a:effectRef idx="2">
+            <a:schemeClr val="accent1"/>
+          </a:effectRef>
+          <a:fontRef idx="minor">
+            <a:schemeClr val="lt1"/>
+          </a:fontRef>
+        </p:style>
+        <p:txBody>
+          <a:bodyPr rtlCol="0" anchor="ctr"/>
+          <a:lstStyle/>
+          <a:p>
+            <a:pPr algn="ctr"/>
+          </a:p>
+        </p:txBody>
+      </p:sp>
+      <p:sp>
+        <p:nvSpPr>
+          <p:cNvPr id="212" name="TextBox 211"/>
+          <p:cNvSpPr txBox="1"/>
+          <p:nvPr/>
+        </p:nvSpPr>
+        <p:spPr>
+          <a:xfrm>
+            <a:off x="91440" y="4389120"/>
+            <a:ext cx="722375" cy="187452"/>
+          </a:xfrm>
+          <a:prstGeom prst="rect">
+            <a:avLst/>
+          </a:prstGeom>
+          <a:noFill/>
+        </p:spPr>
+        <p:txBody>
+          <a:bodyPr wrap="none" lIns="0" rIns="0" tIns="0" bIns="0" anchor="ctr">
+            <a:spAutoFit/>
+          </a:bodyPr>
+          <a:lstStyle/>
+          <a:p>
+            <a:pPr algn="ctr"/>
+            <a:r>
+              <a:rPr sz="700" b="1">
+                <a:solidFill>
+                  <a:srgbClr val="1A2340"/>
+                </a:solidFill>
+                <a:latin typeface="Calibri"/>
+              </a:rPr>
+              <a:t>Proyecto</a:t>
+            </a:r>
+          </a:p>
+        </p:txBody>
+      </p:sp>
+      <p:sp>
+        <p:nvSpPr>
+          <p:cNvPr id="213" name="TextBox 212"/>
+          <p:cNvSpPr txBox="1"/>
+          <p:nvPr/>
+        </p:nvSpPr>
+        <p:spPr>
+          <a:xfrm>
+            <a:off x="850392" y="4389120"/>
+            <a:ext cx="2432304" cy="187452"/>
+          </a:xfrm>
+          <a:prstGeom prst="rect">
+            <a:avLst/>
+          </a:prstGeom>
+          <a:noFill/>
+        </p:spPr>
+        <p:txBody>
+          <a:bodyPr wrap="none" lIns="0" rIns="0" tIns="0" bIns="0" anchor="ctr">
+            <a:spAutoFit/>
+          </a:bodyPr>
+          <a:lstStyle/>
+          <a:p>
+            <a:pPr algn="l"/>
+            <a:r>
+              <a:rPr sz="700" b="0">
+                <a:solidFill>
+                  <a:srgbClr val="1A2340"/>
+                </a:solidFill>
+                <a:latin typeface="Calibri"/>
+              </a:rPr>
+              <a:t>Capital Humano || BUK Personalizados Fase 2</a:t>
+            </a:r>
+          </a:p>
+        </p:txBody>
+      </p:sp>
+      <p:sp>
+        <p:nvSpPr>
+          <p:cNvPr id="214" name="TextBox 213"/>
+          <p:cNvSpPr txBox="1"/>
+          <p:nvPr/>
+        </p:nvSpPr>
+        <p:spPr>
+          <a:xfrm>
+            <a:off x="3319272" y="4389120"/>
+            <a:ext cx="630936" cy="187452"/>
+          </a:xfrm>
+          <a:prstGeom prst="rect">
+            <a:avLst/>
+          </a:prstGeom>
+          <a:noFill/>
+        </p:spPr>
+        <p:txBody>
+          <a:bodyPr wrap="none" lIns="0" rIns="0" tIns="0" bIns="0" anchor="ctr">
+            <a:spAutoFit/>
+          </a:bodyPr>
+          <a:lstStyle/>
+          <a:p>
+            <a:pPr algn="ctr"/>
+            <a:r>
+              <a:rPr sz="700" b="0">
+                <a:solidFill>
+                  <a:srgbClr val="555555"/>
+                </a:solidFill>
+                <a:latin typeface="Calibri"/>
+              </a:rPr>
+              <a:t>08/06/2026</a:t>
+            </a:r>
+          </a:p>
+        </p:txBody>
+      </p:sp>
+      <p:sp>
+        <p:nvSpPr>
+          <p:cNvPr id="215" name="TextBox 214"/>
+          <p:cNvSpPr txBox="1"/>
+          <p:nvPr/>
+        </p:nvSpPr>
+        <p:spPr>
+          <a:xfrm>
+            <a:off x="3986783" y="4389120"/>
+            <a:ext cx="630936" cy="187452"/>
+          </a:xfrm>
+          <a:prstGeom prst="rect">
+            <a:avLst/>
+          </a:prstGeom>
+          <a:noFill/>
+        </p:spPr>
+        <p:txBody>
+          <a:bodyPr wrap="none" lIns="0" rIns="0" tIns="0" bIns="0" anchor="ctr">
+            <a:spAutoFit/>
+          </a:bodyPr>
+          <a:lstStyle/>
+          <a:p>
+            <a:pPr algn="ctr"/>
+            <a:r>
+              <a:rPr sz="700" b="0">
+                <a:solidFill>
+                  <a:srgbClr val="555555"/>
+                </a:solidFill>
+                <a:latin typeface="Calibri"/>
+              </a:rPr>
+              <a:t>11/08/2026</a:t>
+            </a:r>
+          </a:p>
+        </p:txBody>
+      </p:sp>
+      <p:sp>
+        <p:nvSpPr>
+          <p:cNvPr id="216" name="TextBox 215"/>
+          <p:cNvSpPr txBox="1"/>
+          <p:nvPr/>
+        </p:nvSpPr>
+        <p:spPr>
+          <a:xfrm>
+            <a:off x="4654296" y="4389120"/>
+            <a:ext cx="493775" cy="187452"/>
+          </a:xfrm>
+          <a:prstGeom prst="rect">
+            <a:avLst/>
+          </a:prstGeom>
+          <a:noFill/>
+        </p:spPr>
+        <p:txBody>
+          <a:bodyPr wrap="none" lIns="0" rIns="0" tIns="0" bIns="0" anchor="ctr">
+            <a:spAutoFit/>
+          </a:bodyPr>
+          <a:lstStyle/>
+          <a:p>
+            <a:pPr algn="ctr"/>
+            <a:r>
+              <a:rPr sz="700" b="1">
+                <a:solidFill>
+                  <a:srgbClr val="1A2340"/>
+                </a:solidFill>
+                <a:latin typeface="Calibri"/>
+              </a:rPr>
+              <a:t>74%</a:t>
+            </a:r>
+          </a:p>
+        </p:txBody>
+      </p:sp>
+      <p:sp>
+        <p:nvSpPr>
+          <p:cNvPr id="217" name="TextBox 216"/>
+          <p:cNvSpPr txBox="1"/>
+          <p:nvPr/>
+        </p:nvSpPr>
+        <p:spPr>
+          <a:xfrm>
+            <a:off x="5184648" y="4389120"/>
+            <a:ext cx="557784" cy="187452"/>
+          </a:xfrm>
+          <a:prstGeom prst="rect">
+            <a:avLst/>
+          </a:prstGeom>
+          <a:noFill/>
+        </p:spPr>
+        <p:txBody>
+          <a:bodyPr wrap="none" lIns="0" rIns="0" tIns="0" bIns="0" anchor="ctr">
+            <a:spAutoFit/>
+          </a:bodyPr>
+          <a:lstStyle/>
+          <a:p>
+            <a:pPr algn="ctr"/>
+            <a:r>
+              <a:rPr sz="700" b="0">
+                <a:solidFill>
+                  <a:srgbClr val="555555"/>
+                </a:solidFill>
+                <a:latin typeface="Calibri"/>
+              </a:rPr>
+              <a:t>46%</a:t>
+            </a:r>
+          </a:p>
+        </p:txBody>
+      </p:sp>
+      <p:sp>
+        <p:nvSpPr>
+          <p:cNvPr id="218" name="TextBox 217"/>
+          <p:cNvSpPr txBox="1"/>
+          <p:nvPr/>
+        </p:nvSpPr>
+        <p:spPr>
+          <a:xfrm>
+            <a:off x="7991856" y="4389120"/>
             <a:ext cx="804672" cy="187452"/>
           </a:xfrm>
           <a:prstGeom prst="rect">
@@ -13289,13 +13716,13 @@
       </p:sp>
       <p:sp>
         <p:nvSpPr>
-          <p:cNvPr id="208" name="Rounded Rectangle 207"/>
+          <p:cNvPr id="219" name="Rounded Rectangle 218"/>
           <p:cNvSpPr/>
           <p:nvPr/>
         </p:nvSpPr>
         <p:spPr>
           <a:xfrm>
-            <a:off x="5806440" y="4243844"/>
+            <a:off x="5806440" y="4431296"/>
             <a:ext cx="1691640" cy="103098"/>
           </a:xfrm>
           <a:prstGeom prst="roundRect">
@@ -13340,14 +13767,14 @@
       </p:sp>
       <p:sp>
         <p:nvSpPr>
-          <p:cNvPr id="209" name="Rounded Rectangle 208"/>
+          <p:cNvPr id="220" name="Rounded Rectangle 219"/>
           <p:cNvSpPr/>
           <p:nvPr/>
         </p:nvSpPr>
         <p:spPr>
           <a:xfrm>
-            <a:off x="5806440" y="4243844"/>
-            <a:ext cx="524408" cy="103098"/>
+            <a:off x="5806440" y="4431296"/>
+            <a:ext cx="1251813" cy="103098"/>
           </a:xfrm>
           <a:prstGeom prst="roundRect">
             <a:avLst>
@@ -13392,13 +13819,13 @@
       </p:sp>
       <p:sp>
         <p:nvSpPr>
-          <p:cNvPr id="210" name="TextBox 209"/>
+          <p:cNvPr id="221" name="TextBox 220"/>
           <p:cNvSpPr txBox="1"/>
           <p:nvPr/>
         </p:nvSpPr>
         <p:spPr>
           <a:xfrm>
-            <a:off x="7543800" y="4211840"/>
+            <a:off x="7543800" y="4399292"/>
             <a:ext cx="457200" cy="167106"/>
           </a:xfrm>
           <a:prstGeom prst="rect">
@@ -13420,27 +13847,27 @@
                 </a:solidFill>
                 <a:latin typeface="Calibri"/>
               </a:rPr>
-              <a:t>31%</a:t>
-            </a:r>
-          </a:p>
-        </p:txBody>
-      </p:sp>
-      <p:sp>
-        <p:nvSpPr>
-          <p:cNvPr id="211" name="Rectangle 210"/>
+              <a:t>74%</a:t>
+            </a:r>
+          </a:p>
+        </p:txBody>
+      </p:sp>
+      <p:sp>
+        <p:nvSpPr>
+          <p:cNvPr id="222" name="Rectangle 221"/>
           <p:cNvSpPr/>
           <p:nvPr/>
         </p:nvSpPr>
         <p:spPr>
           <a:xfrm>
-            <a:off x="73152" y="4389120"/>
+            <a:off x="73152" y="4576572"/>
             <a:ext cx="8741664" cy="187452"/>
           </a:xfrm>
           <a:prstGeom prst="rect">
             <a:avLst/>
           </a:prstGeom>
           <a:solidFill>
-            <a:srgbClr val="F5F7FA"/>
+            <a:srgbClr val="FFFFFF"/>
           </a:solidFill>
           <a:ln>
             <a:noFill/>
@@ -13471,13 +13898,13 @@
       </p:sp>
       <p:sp>
         <p:nvSpPr>
-          <p:cNvPr id="212" name="TextBox 211"/>
+          <p:cNvPr id="223" name="TextBox 222"/>
           <p:cNvSpPr txBox="1"/>
           <p:nvPr/>
         </p:nvSpPr>
         <p:spPr>
           <a:xfrm>
-            <a:off x="91440" y="4389120"/>
+            <a:off x="91440" y="4576572"/>
             <a:ext cx="722375" cy="187452"/>
           </a:xfrm>
           <a:prstGeom prst="rect">
@@ -13506,13 +13933,13 @@
       </p:sp>
       <p:sp>
         <p:nvSpPr>
-          <p:cNvPr id="213" name="TextBox 212"/>
+          <p:cNvPr id="224" name="TextBox 223"/>
           <p:cNvSpPr txBox="1"/>
           <p:nvPr/>
         </p:nvSpPr>
         <p:spPr>
           <a:xfrm>
-            <a:off x="850392" y="4389120"/>
+            <a:off x="850392" y="4576572"/>
             <a:ext cx="2432304" cy="187452"/>
           </a:xfrm>
           <a:prstGeom prst="rect">
@@ -13534,20 +13961,20 @@
                 </a:solidFill>
                 <a:latin typeface="Calibri"/>
               </a:rPr>
-              <a:t>Capital Humano || BUK Personalizados Fase 2</a:t>
-            </a:r>
-          </a:p>
-        </p:txBody>
-      </p:sp>
-      <p:sp>
-        <p:nvSpPr>
-          <p:cNvPr id="214" name="TextBox 213"/>
+              <a:t>Operaciones Fleet || Adcontent - Sfleet</a:t>
+            </a:r>
+          </a:p>
+        </p:txBody>
+      </p:sp>
+      <p:sp>
+        <p:nvSpPr>
+          <p:cNvPr id="225" name="TextBox 224"/>
           <p:cNvSpPr txBox="1"/>
           <p:nvPr/>
         </p:nvSpPr>
         <p:spPr>
           <a:xfrm>
-            <a:off x="3319272" y="4389120"/>
+            <a:off x="3319272" y="4576572"/>
             <a:ext cx="630936" cy="187452"/>
           </a:xfrm>
           <a:prstGeom prst="rect">
@@ -13569,20 +13996,20 @@
                 </a:solidFill>
                 <a:latin typeface="Calibri"/>
               </a:rPr>
-              <a:t>08/06/2026</a:t>
-            </a:r>
-          </a:p>
-        </p:txBody>
-      </p:sp>
-      <p:sp>
-        <p:nvSpPr>
-          <p:cNvPr id="215" name="TextBox 214"/>
+              <a:t>15/06/2026</a:t>
+            </a:r>
+          </a:p>
+        </p:txBody>
+      </p:sp>
+      <p:sp>
+        <p:nvSpPr>
+          <p:cNvPr id="226" name="TextBox 225"/>
           <p:cNvSpPr txBox="1"/>
           <p:nvPr/>
         </p:nvSpPr>
         <p:spPr>
           <a:xfrm>
-            <a:off x="3986783" y="4389120"/>
+            <a:off x="3986783" y="4576572"/>
             <a:ext cx="630936" cy="187452"/>
           </a:xfrm>
           <a:prstGeom prst="rect">
@@ -13604,20 +14031,20 @@
                 </a:solidFill>
                 <a:latin typeface="Calibri"/>
               </a:rPr>
-              <a:t>11/08/2026</a:t>
-            </a:r>
-          </a:p>
-        </p:txBody>
-      </p:sp>
-      <p:sp>
-        <p:nvSpPr>
-          <p:cNvPr id="216" name="TextBox 215"/>
+              <a:t>12/02/2027</a:t>
+            </a:r>
+          </a:p>
+        </p:txBody>
+      </p:sp>
+      <p:sp>
+        <p:nvSpPr>
+          <p:cNvPr id="227" name="TextBox 226"/>
           <p:cNvSpPr txBox="1"/>
           <p:nvPr/>
         </p:nvSpPr>
         <p:spPr>
           <a:xfrm>
-            <a:off x="4654296" y="4389120"/>
+            <a:off x="4654296" y="4576572"/>
             <a:ext cx="493775" cy="187452"/>
           </a:xfrm>
           <a:prstGeom prst="rect">
@@ -13639,20 +14066,20 @@
                 </a:solidFill>
                 <a:latin typeface="Calibri"/>
               </a:rPr>
-              <a:t>74%</a:t>
-            </a:r>
-          </a:p>
-        </p:txBody>
-      </p:sp>
-      <p:sp>
-        <p:nvSpPr>
-          <p:cNvPr id="217" name="TextBox 216"/>
+              <a:t>12%</a:t>
+            </a:r>
+          </a:p>
+        </p:txBody>
+      </p:sp>
+      <p:sp>
+        <p:nvSpPr>
+          <p:cNvPr id="228" name="TextBox 227"/>
           <p:cNvSpPr txBox="1"/>
           <p:nvPr/>
         </p:nvSpPr>
         <p:spPr>
           <a:xfrm>
-            <a:off x="5184648" y="4389120"/>
+            <a:off x="5184648" y="4576572"/>
             <a:ext cx="557784" cy="187452"/>
           </a:xfrm>
           <a:prstGeom prst="rect">
@@ -13674,20 +14101,20 @@
                 </a:solidFill>
                 <a:latin typeface="Calibri"/>
               </a:rPr>
-              <a:t>45%</a:t>
-            </a:r>
-          </a:p>
-        </p:txBody>
-      </p:sp>
-      <p:sp>
-        <p:nvSpPr>
-          <p:cNvPr id="218" name="TextBox 217"/>
+              <a:t>9%</a:t>
+            </a:r>
+          </a:p>
+        </p:txBody>
+      </p:sp>
+      <p:sp>
+        <p:nvSpPr>
+          <p:cNvPr id="229" name="TextBox 228"/>
           <p:cNvSpPr txBox="1"/>
           <p:nvPr/>
         </p:nvSpPr>
         <p:spPr>
           <a:xfrm>
-            <a:off x="7991856" y="4389120"/>
+            <a:off x="7991856" y="4576572"/>
             <a:ext cx="804672" cy="187452"/>
           </a:xfrm>
           <a:prstGeom prst="rect">
@@ -13716,13 +14143,13 @@
       </p:sp>
       <p:sp>
         <p:nvSpPr>
-          <p:cNvPr id="219" name="Rounded Rectangle 218"/>
+          <p:cNvPr id="230" name="Rounded Rectangle 229"/>
           <p:cNvSpPr/>
           <p:nvPr/>
         </p:nvSpPr>
         <p:spPr>
           <a:xfrm>
-            <a:off x="5806440" y="4431296"/>
+            <a:off x="5806440" y="4618748"/>
             <a:ext cx="1691640" cy="103098"/>
           </a:xfrm>
           <a:prstGeom prst="roundRect">
@@ -13767,14 +14194,14 @@
       </p:sp>
       <p:sp>
         <p:nvSpPr>
-          <p:cNvPr id="220" name="Rounded Rectangle 219"/>
+          <p:cNvPr id="231" name="Rounded Rectangle 230"/>
           <p:cNvSpPr/>
           <p:nvPr/>
         </p:nvSpPr>
         <p:spPr>
           <a:xfrm>
-            <a:off x="5806440" y="4431296"/>
-            <a:ext cx="1251813" cy="103098"/>
+            <a:off x="5806440" y="4618748"/>
+            <a:ext cx="202996" cy="103098"/>
           </a:xfrm>
           <a:prstGeom prst="roundRect">
             <a:avLst>
@@ -13819,13 +14246,13 @@
       </p:sp>
       <p:sp>
         <p:nvSpPr>
-          <p:cNvPr id="221" name="TextBox 220"/>
+          <p:cNvPr id="232" name="TextBox 231"/>
           <p:cNvSpPr txBox="1"/>
           <p:nvPr/>
         </p:nvSpPr>
         <p:spPr>
           <a:xfrm>
-            <a:off x="7543800" y="4399292"/>
+            <a:off x="7543800" y="4586744"/>
             <a:ext cx="457200" cy="167106"/>
           </a:xfrm>
           <a:prstGeom prst="rect">
@@ -13847,434 +14274,7 @@
                 </a:solidFill>
                 <a:latin typeface="Calibri"/>
               </a:rPr>
-              <a:t>74%</a:t>
-            </a:r>
-          </a:p>
-        </p:txBody>
-      </p:sp>
-      <p:sp>
-        <p:nvSpPr>
-          <p:cNvPr id="222" name="Rectangle 221"/>
-          <p:cNvSpPr/>
-          <p:nvPr/>
-        </p:nvSpPr>
-        <p:spPr>
-          <a:xfrm>
-            <a:off x="73152" y="4576572"/>
-            <a:ext cx="8741664" cy="187452"/>
-          </a:xfrm>
-          <a:prstGeom prst="rect">
-            <a:avLst/>
-          </a:prstGeom>
-          <a:solidFill>
-            <a:srgbClr val="FFFFFF"/>
-          </a:solidFill>
-          <a:ln>
-            <a:noFill/>
-          </a:ln>
-          <a:effectLst/>
-        </p:spPr>
-        <p:style>
-          <a:lnRef idx="1">
-            <a:schemeClr val="accent1"/>
-          </a:lnRef>
-          <a:fillRef idx="3">
-            <a:schemeClr val="accent1"/>
-          </a:fillRef>
-          <a:effectRef idx="2">
-            <a:schemeClr val="accent1"/>
-          </a:effectRef>
-          <a:fontRef idx="minor">
-            <a:schemeClr val="lt1"/>
-          </a:fontRef>
-        </p:style>
-        <p:txBody>
-          <a:bodyPr rtlCol="0" anchor="ctr"/>
-          <a:lstStyle/>
-          <a:p>
-            <a:pPr algn="ctr"/>
-          </a:p>
-        </p:txBody>
-      </p:sp>
-      <p:sp>
-        <p:nvSpPr>
-          <p:cNvPr id="223" name="TextBox 222"/>
-          <p:cNvSpPr txBox="1"/>
-          <p:nvPr/>
-        </p:nvSpPr>
-        <p:spPr>
-          <a:xfrm>
-            <a:off x="91440" y="4576572"/>
-            <a:ext cx="722375" cy="187452"/>
-          </a:xfrm>
-          <a:prstGeom prst="rect">
-            <a:avLst/>
-          </a:prstGeom>
-          <a:noFill/>
-        </p:spPr>
-        <p:txBody>
-          <a:bodyPr wrap="none" lIns="0" rIns="0" tIns="0" bIns="0" anchor="ctr">
-            <a:spAutoFit/>
-          </a:bodyPr>
-          <a:lstStyle/>
-          <a:p>
-            <a:pPr algn="ctr"/>
-            <a:r>
-              <a:rPr sz="700" b="1">
-                <a:solidFill>
-                  <a:srgbClr val="1A2340"/>
-                </a:solidFill>
-                <a:latin typeface="Calibri"/>
-              </a:rPr>
-              <a:t>Proyecto</a:t>
-            </a:r>
-          </a:p>
-        </p:txBody>
-      </p:sp>
-      <p:sp>
-        <p:nvSpPr>
-          <p:cNvPr id="224" name="TextBox 223"/>
-          <p:cNvSpPr txBox="1"/>
-          <p:nvPr/>
-        </p:nvSpPr>
-        <p:spPr>
-          <a:xfrm>
-            <a:off x="850392" y="4576572"/>
-            <a:ext cx="2432304" cy="187452"/>
-          </a:xfrm>
-          <a:prstGeom prst="rect">
-            <a:avLst/>
-          </a:prstGeom>
-          <a:noFill/>
-        </p:spPr>
-        <p:txBody>
-          <a:bodyPr wrap="none" lIns="0" rIns="0" tIns="0" bIns="0" anchor="ctr">
-            <a:spAutoFit/>
-          </a:bodyPr>
-          <a:lstStyle/>
-          <a:p>
-            <a:pPr algn="l"/>
-            <a:r>
-              <a:rPr sz="700" b="0">
-                <a:solidFill>
-                  <a:srgbClr val="1A2340"/>
-                </a:solidFill>
-                <a:latin typeface="Calibri"/>
-              </a:rPr>
-              <a:t>Operaciones Fleet || Adcontent - Sfleet</a:t>
-            </a:r>
-          </a:p>
-        </p:txBody>
-      </p:sp>
-      <p:sp>
-        <p:nvSpPr>
-          <p:cNvPr id="225" name="TextBox 224"/>
-          <p:cNvSpPr txBox="1"/>
-          <p:nvPr/>
-        </p:nvSpPr>
-        <p:spPr>
-          <a:xfrm>
-            <a:off x="3319272" y="4576572"/>
-            <a:ext cx="630936" cy="187452"/>
-          </a:xfrm>
-          <a:prstGeom prst="rect">
-            <a:avLst/>
-          </a:prstGeom>
-          <a:noFill/>
-        </p:spPr>
-        <p:txBody>
-          <a:bodyPr wrap="none" lIns="0" rIns="0" tIns="0" bIns="0" anchor="ctr">
-            <a:spAutoFit/>
-          </a:bodyPr>
-          <a:lstStyle/>
-          <a:p>
-            <a:pPr algn="ctr"/>
-            <a:r>
-              <a:rPr sz="700" b="0">
-                <a:solidFill>
-                  <a:srgbClr val="555555"/>
-                </a:solidFill>
-                <a:latin typeface="Calibri"/>
-              </a:rPr>
-              <a:t>15/06/2026</a:t>
-            </a:r>
-          </a:p>
-        </p:txBody>
-      </p:sp>
-      <p:sp>
-        <p:nvSpPr>
-          <p:cNvPr id="226" name="TextBox 225"/>
-          <p:cNvSpPr txBox="1"/>
-          <p:nvPr/>
-        </p:nvSpPr>
-        <p:spPr>
-          <a:xfrm>
-            <a:off x="3986783" y="4576572"/>
-            <a:ext cx="630936" cy="187452"/>
-          </a:xfrm>
-          <a:prstGeom prst="rect">
-            <a:avLst/>
-          </a:prstGeom>
-          <a:noFill/>
-        </p:spPr>
-        <p:txBody>
-          <a:bodyPr wrap="none" lIns="0" rIns="0" tIns="0" bIns="0" anchor="ctr">
-            <a:spAutoFit/>
-          </a:bodyPr>
-          <a:lstStyle/>
-          <a:p>
-            <a:pPr algn="ctr"/>
-            <a:r>
-              <a:rPr sz="700" b="0">
-                <a:solidFill>
-                  <a:srgbClr val="555555"/>
-                </a:solidFill>
-                <a:latin typeface="Calibri"/>
-              </a:rPr>
-              <a:t>08/02/2027</a:t>
-            </a:r>
-          </a:p>
-        </p:txBody>
-      </p:sp>
-      <p:sp>
-        <p:nvSpPr>
-          <p:cNvPr id="227" name="TextBox 226"/>
-          <p:cNvSpPr txBox="1"/>
-          <p:nvPr/>
-        </p:nvSpPr>
-        <p:spPr>
-          <a:xfrm>
-            <a:off x="4654296" y="4576572"/>
-            <a:ext cx="493775" cy="187452"/>
-          </a:xfrm>
-          <a:prstGeom prst="rect">
-            <a:avLst/>
-          </a:prstGeom>
-          <a:noFill/>
-        </p:spPr>
-        <p:txBody>
-          <a:bodyPr wrap="none" lIns="0" rIns="0" tIns="0" bIns="0" anchor="ctr">
-            <a:spAutoFit/>
-          </a:bodyPr>
-          <a:lstStyle/>
-          <a:p>
-            <a:pPr algn="ctr"/>
-            <a:r>
-              <a:rPr sz="700" b="1">
-                <a:solidFill>
-                  <a:srgbClr val="1A2340"/>
-                </a:solidFill>
-                <a:latin typeface="Calibri"/>
-              </a:rPr>
-              <a:t>4%</a:t>
-            </a:r>
-          </a:p>
-        </p:txBody>
-      </p:sp>
-      <p:sp>
-        <p:nvSpPr>
-          <p:cNvPr id="228" name="TextBox 227"/>
-          <p:cNvSpPr txBox="1"/>
-          <p:nvPr/>
-        </p:nvSpPr>
-        <p:spPr>
-          <a:xfrm>
-            <a:off x="5184648" y="4576572"/>
-            <a:ext cx="557784" cy="187452"/>
-          </a:xfrm>
-          <a:prstGeom prst="rect">
-            <a:avLst/>
-          </a:prstGeom>
-          <a:noFill/>
-        </p:spPr>
-        <p:txBody>
-          <a:bodyPr wrap="none" lIns="0" rIns="0" tIns="0" bIns="0" anchor="ctr">
-            <a:spAutoFit/>
-          </a:bodyPr>
-          <a:lstStyle/>
-          <a:p>
-            <a:pPr algn="ctr"/>
-            <a:r>
-              <a:rPr sz="700" b="0">
-                <a:solidFill>
-                  <a:srgbClr val="555555"/>
-                </a:solidFill>
-                <a:latin typeface="Calibri"/>
-              </a:rPr>
-              <a:t>9%</a:t>
-            </a:r>
-          </a:p>
-        </p:txBody>
-      </p:sp>
-      <p:sp>
-        <p:nvSpPr>
-          <p:cNvPr id="229" name="TextBox 228"/>
-          <p:cNvSpPr txBox="1"/>
-          <p:nvPr/>
-        </p:nvSpPr>
-        <p:spPr>
-          <a:xfrm>
-            <a:off x="7991856" y="4576572"/>
-            <a:ext cx="804672" cy="187452"/>
-          </a:xfrm>
-          <a:prstGeom prst="rect">
-            <a:avLst/>
-          </a:prstGeom>
-          <a:noFill/>
-        </p:spPr>
-        <p:txBody>
-          <a:bodyPr wrap="none" lIns="0" rIns="0" tIns="0" bIns="0" anchor="ctr">
-            <a:spAutoFit/>
-          </a:bodyPr>
-          <a:lstStyle/>
-          <a:p>
-            <a:pPr algn="ctr"/>
-            <a:r>
-              <a:rPr sz="700" b="1">
-                <a:solidFill>
-                  <a:srgbClr val="F59E0B"/>
-                </a:solidFill>
-                <a:latin typeface="Calibri"/>
-              </a:rPr>
-              <a:t>Riesgo de atraso</a:t>
-            </a:r>
-          </a:p>
-        </p:txBody>
-      </p:sp>
-      <p:sp>
-        <p:nvSpPr>
-          <p:cNvPr id="230" name="Rounded Rectangle 229"/>
-          <p:cNvSpPr/>
-          <p:nvPr/>
-        </p:nvSpPr>
-        <p:spPr>
-          <a:xfrm>
-            <a:off x="5806440" y="4618748"/>
-            <a:ext cx="1691640" cy="103098"/>
-          </a:xfrm>
-          <a:prstGeom prst="roundRect">
-            <a:avLst>
-              <a:gd name="adj" fmla="val 50000"/>
-            </a:avLst>
-          </a:prstGeom>
-          <a:pattFill prst="smGrid">
-            <a:fgClr>
-              <a:srgbClr val="F59E0B"/>
-            </a:fgClr>
-            <a:bgClr>
-              <a:srgbClr val="FFFFFF"/>
-            </a:bgClr>
-          </a:pattFill>
-          <a:ln>
-            <a:noFill/>
-          </a:ln>
-          <a:effectLst/>
-        </p:spPr>
-        <p:style>
-          <a:lnRef idx="1">
-            <a:schemeClr val="accent1"/>
-          </a:lnRef>
-          <a:fillRef idx="3">
-            <a:schemeClr val="accent1"/>
-          </a:fillRef>
-          <a:effectRef idx="2">
-            <a:schemeClr val="accent1"/>
-          </a:effectRef>
-          <a:fontRef idx="minor">
-            <a:schemeClr val="lt1"/>
-          </a:fontRef>
-        </p:style>
-        <p:txBody>
-          <a:bodyPr rtlCol="0" anchor="ctr"/>
-          <a:lstStyle/>
-          <a:p>
-            <a:pPr algn="ctr"/>
-          </a:p>
-        </p:txBody>
-      </p:sp>
-      <p:sp>
-        <p:nvSpPr>
-          <p:cNvPr id="231" name="Rounded Rectangle 230"/>
-          <p:cNvSpPr/>
-          <p:nvPr/>
-        </p:nvSpPr>
-        <p:spPr>
-          <a:xfrm>
-            <a:off x="5806440" y="4618748"/>
-            <a:ext cx="103098" cy="103098"/>
-          </a:xfrm>
-          <a:prstGeom prst="roundRect">
-            <a:avLst>
-              <a:gd name="adj" fmla="val 50000"/>
-            </a:avLst>
-          </a:prstGeom>
-          <a:solidFill>
-            <a:srgbClr val="F59E0B"/>
-          </a:solidFill>
-          <a:ln>
-            <a:noFill/>
-          </a:ln>
-          <a:effectLst>
-            <a:outerShdw blurRad="76200" dist="19050" dir="5400000" rotWithShape="0">
-              <a:srgbClr val="F59E0B">
-                <a:alpha val="55000"/>
-              </a:srgbClr>
-            </a:outerShdw>
-          </a:effectLst>
-        </p:spPr>
-        <p:style>
-          <a:lnRef idx="1">
-            <a:schemeClr val="accent1"/>
-          </a:lnRef>
-          <a:fillRef idx="3">
-            <a:schemeClr val="accent1"/>
-          </a:fillRef>
-          <a:effectRef idx="2">
-            <a:schemeClr val="accent1"/>
-          </a:effectRef>
-          <a:fontRef idx="minor">
-            <a:schemeClr val="lt1"/>
-          </a:fontRef>
-        </p:style>
-        <p:txBody>
-          <a:bodyPr rtlCol="0" anchor="ctr"/>
-          <a:lstStyle/>
-          <a:p>
-            <a:pPr algn="ctr"/>
-          </a:p>
-        </p:txBody>
-      </p:sp>
-      <p:sp>
-        <p:nvSpPr>
-          <p:cNvPr id="232" name="TextBox 231"/>
-          <p:cNvSpPr txBox="1"/>
-          <p:nvPr/>
-        </p:nvSpPr>
-        <p:spPr>
-          <a:xfrm>
-            <a:off x="7543800" y="4586744"/>
-            <a:ext cx="457200" cy="167106"/>
-          </a:xfrm>
-          <a:prstGeom prst="rect">
-            <a:avLst/>
-          </a:prstGeom>
-          <a:noFill/>
-        </p:spPr>
-        <p:txBody>
-          <a:bodyPr wrap="none" lIns="0" rIns="0" tIns="0" bIns="0">
-            <a:spAutoFit/>
-          </a:bodyPr>
-          <a:lstStyle/>
-          <a:p>
-            <a:pPr algn="l"/>
-            <a:r>
-              <a:rPr sz="800" b="1">
-                <a:solidFill>
-                  <a:srgbClr val="F59E0B"/>
-                </a:solidFill>
-                <a:latin typeface="Calibri"/>
-              </a:rPr>
-              <a:t>4%</a:t>
+              <a:t>12%</a:t>
             </a:r>
           </a:p>
         </p:txBody>

--- a/cierre_base.pptx
+++ b/cierre_base.pptx
@@ -5353,7 +5353,7 @@
                 </a:solidFill>
                 <a:latin typeface="Arial Nova Light"/>
               </a:rPr>
-              <a:t>Cierre semanal del 2 de Julio al 9 de Julio</a:t>
+              <a:t>Cierre semanal del 9 de Julio al 16 de Julio</a:t>
             </a:r>
             <a:endParaRPr lang="es-MX" sz="1400" b="1" dirty="0">
               <a:solidFill>
@@ -6264,7 +6264,7 @@
                 </a:solidFill>
                 <a:latin typeface="Calibri"/>
               </a:rPr>
-              <a:t>Cierre semanal del 2 de Julio al 9 de Julio</a:t>
+              <a:t>Cierre semanal del 9 de Julio al 16 de Julio</a:t>
             </a:r>
           </a:p>
         </p:txBody>
@@ -8550,7 +8550,7 @@
                 </a:solidFill>
                 <a:latin typeface="Calibri"/>
               </a:rPr>
-              <a:t>92%</a:t>
+              <a:t>93%</a:t>
             </a:r>
           </a:p>
         </p:txBody>
@@ -10258,7 +10258,7 @@
                 </a:solidFill>
                 <a:latin typeface="Calibri"/>
               </a:rPr>
-              <a:t>98%</a:t>
+              <a:t>100%</a:t>
             </a:r>
           </a:p>
         </p:txBody>
@@ -11966,7 +11966,7 @@
                 </a:solidFill>
                 <a:latin typeface="Calibri"/>
               </a:rPr>
-              <a:t>65%</a:t>
+              <a:t>66%</a:t>
             </a:r>
           </a:p>
         </p:txBody>
@@ -12393,7 +12393,7 @@
                 </a:solidFill>
                 <a:latin typeface="Calibri"/>
               </a:rPr>
-              <a:t>86%</a:t>
+              <a:t>89%</a:t>
             </a:r>
           </a:p>
         </p:txBody>
@@ -13247,7 +13247,7 @@
                 </a:solidFill>
                 <a:latin typeface="Calibri"/>
               </a:rPr>
-              <a:t>32%</a:t>
+              <a:t>34%</a:t>
             </a:r>
           </a:p>
         </p:txBody>
@@ -13674,7 +13674,7 @@
                 </a:solidFill>
                 <a:latin typeface="Calibri"/>
               </a:rPr>
-              <a:t>46%</a:t>
+              <a:t>50%</a:t>
             </a:r>
           </a:p>
         </p:txBody>
@@ -14101,7 +14101,7 @@
                 </a:solidFill>
                 <a:latin typeface="Calibri"/>
               </a:rPr>
-              <a:t>9%</a:t>
+              <a:t>10%</a:t>
             </a:r>
           </a:p>
         </p:txBody>

--- a/cierre_base.pptx
+++ b/cierre_base.pptx
@@ -5699,7 +5699,7 @@
                 </a:solidFill>
                 <a:latin typeface="Calibri"/>
               </a:rPr>
-              <a:t>3</a:t>
+              <a:t>4</a:t>
             </a:r>
           </a:p>
         </p:txBody>
@@ -5814,7 +5814,7 @@
                 </a:solidFill>
                 <a:latin typeface="Calibri"/>
               </a:rPr>
-              <a:t>2</a:t>
+              <a:t>1</a:t>
             </a:r>
           </a:p>
         </p:txBody>
@@ -6044,7 +6044,7 @@
                 </a:solidFill>
                 <a:latin typeface="Calibri"/>
               </a:rPr>
-              <a:t>3</a:t>
+              <a:t>4</a:t>
             </a:r>
           </a:p>
         </p:txBody>
@@ -6772,7 +6772,7 @@
                 </a:solidFill>
                 <a:latin typeface="Calibri"/>
               </a:rPr>
-              <a:t>01/07/2026</a:t>
+              <a:t>02/07/2026</a:t>
             </a:r>
           </a:p>
         </p:txBody>
@@ -6807,7 +6807,7 @@
                 </a:solidFill>
                 <a:latin typeface="Calibri"/>
               </a:rPr>
-              <a:t>82%</a:t>
+              <a:t>80%</a:t>
             </a:r>
           </a:p>
         </p:txBody>
@@ -6942,7 +6942,7 @@
         <p:spPr>
           <a:xfrm>
             <a:off x="5806440" y="1432064"/>
-            <a:ext cx="1387144" cy="103098"/>
+            <a:ext cx="1353312" cy="103098"/>
           </a:xfrm>
           <a:prstGeom prst="roundRect">
             <a:avLst>
@@ -7015,7 +7015,7 @@
                 </a:solidFill>
                 <a:latin typeface="Calibri"/>
               </a:rPr>
-              <a:t>82%</a:t>
+              <a:t>80%</a:t>
             </a:r>
           </a:p>
         </p:txBody>
@@ -8515,7 +8515,7 @@
                 </a:solidFill>
                 <a:latin typeface="Calibri"/>
               </a:rPr>
-              <a:t>97%</a:t>
+              <a:t>99%</a:t>
             </a:r>
           </a:p>
         </p:txBody>
@@ -8650,7 +8650,7 @@
         <p:spPr>
           <a:xfrm>
             <a:off x="5806440" y="2181872"/>
-            <a:ext cx="1640890" cy="103098"/>
+            <a:ext cx="1674723" cy="103098"/>
           </a:xfrm>
           <a:prstGeom prst="roundRect">
             <a:avLst>
@@ -8723,7 +8723,7 @@
                 </a:solidFill>
                 <a:latin typeface="Calibri"/>
               </a:rPr>
-              <a:t>97%</a:t>
+              <a:t>99%</a:t>
             </a:r>
           </a:p>
         </p:txBody>
@@ -8942,7 +8942,7 @@
                 </a:solidFill>
                 <a:latin typeface="Calibri"/>
               </a:rPr>
-              <a:t>95%</a:t>
+              <a:t>96%</a:t>
             </a:r>
           </a:p>
         </p:txBody>
@@ -9077,7 +9077,7 @@
         <p:spPr>
           <a:xfrm>
             <a:off x="5806440" y="2369324"/>
-            <a:ext cx="1607058" cy="103098"/>
+            <a:ext cx="1623974" cy="103098"/>
           </a:xfrm>
           <a:prstGeom prst="roundRect">
             <a:avLst>
@@ -9150,7 +9150,7 @@
                 </a:solidFill>
                 <a:latin typeface="Calibri"/>
               </a:rPr>
-              <a:t>95%</a:t>
+              <a:t>96%</a:t>
             </a:r>
           </a:p>
         </p:txBody>
@@ -12358,7 +12358,7 @@
                 </a:solidFill>
                 <a:latin typeface="Calibri"/>
               </a:rPr>
-              <a:t>80%</a:t>
+              <a:t>91%</a:t>
             </a:r>
           </a:p>
         </p:txBody>
@@ -12424,6 +12424,860 @@
             <a:r>
               <a:rPr sz="700" b="1">
                 <a:solidFill>
+                  <a:srgbClr val="22C55E"/>
+                </a:solidFill>
+                <a:latin typeface="Calibri"/>
+              </a:rPr>
+              <a:t>A tiempo</a:t>
+            </a:r>
+          </a:p>
+        </p:txBody>
+      </p:sp>
+      <p:sp>
+        <p:nvSpPr>
+          <p:cNvPr id="186" name="Rounded Rectangle 185"/>
+          <p:cNvSpPr/>
+          <p:nvPr/>
+        </p:nvSpPr>
+        <p:spPr>
+          <a:xfrm>
+            <a:off x="5806440" y="3868940"/>
+            <a:ext cx="1691640" cy="103098"/>
+          </a:xfrm>
+          <a:prstGeom prst="roundRect">
+            <a:avLst>
+              <a:gd name="adj" fmla="val 50000"/>
+            </a:avLst>
+          </a:prstGeom>
+          <a:pattFill prst="smGrid">
+            <a:fgClr>
+              <a:srgbClr val="22C55E"/>
+            </a:fgClr>
+            <a:bgClr>
+              <a:srgbClr val="FFFFFF"/>
+            </a:bgClr>
+          </a:pattFill>
+          <a:ln>
+            <a:noFill/>
+          </a:ln>
+          <a:effectLst/>
+        </p:spPr>
+        <p:style>
+          <a:lnRef idx="1">
+            <a:schemeClr val="accent1"/>
+          </a:lnRef>
+          <a:fillRef idx="3">
+            <a:schemeClr val="accent1"/>
+          </a:fillRef>
+          <a:effectRef idx="2">
+            <a:schemeClr val="accent1"/>
+          </a:effectRef>
+          <a:fontRef idx="minor">
+            <a:schemeClr val="lt1"/>
+          </a:fontRef>
+        </p:style>
+        <p:txBody>
+          <a:bodyPr rtlCol="0" anchor="ctr"/>
+          <a:lstStyle/>
+          <a:p>
+            <a:pPr algn="ctr"/>
+          </a:p>
+        </p:txBody>
+      </p:sp>
+      <p:sp>
+        <p:nvSpPr>
+          <p:cNvPr id="187" name="Rounded Rectangle 186"/>
+          <p:cNvSpPr/>
+          <p:nvPr/>
+        </p:nvSpPr>
+        <p:spPr>
+          <a:xfrm>
+            <a:off x="5806440" y="3868940"/>
+            <a:ext cx="1539392" cy="103098"/>
+          </a:xfrm>
+          <a:prstGeom prst="roundRect">
+            <a:avLst>
+              <a:gd name="adj" fmla="val 50000"/>
+            </a:avLst>
+          </a:prstGeom>
+          <a:solidFill>
+            <a:srgbClr val="22C55E"/>
+          </a:solidFill>
+          <a:ln>
+            <a:noFill/>
+          </a:ln>
+          <a:effectLst>
+            <a:outerShdw blurRad="76200" dist="19050" dir="5400000" rotWithShape="0">
+              <a:srgbClr val="22C55E">
+                <a:alpha val="55000"/>
+              </a:srgbClr>
+            </a:outerShdw>
+          </a:effectLst>
+        </p:spPr>
+        <p:style>
+          <a:lnRef idx="1">
+            <a:schemeClr val="accent1"/>
+          </a:lnRef>
+          <a:fillRef idx="3">
+            <a:schemeClr val="accent1"/>
+          </a:fillRef>
+          <a:effectRef idx="2">
+            <a:schemeClr val="accent1"/>
+          </a:effectRef>
+          <a:fontRef idx="minor">
+            <a:schemeClr val="lt1"/>
+          </a:fontRef>
+        </p:style>
+        <p:txBody>
+          <a:bodyPr rtlCol="0" anchor="ctr"/>
+          <a:lstStyle/>
+          <a:p>
+            <a:pPr algn="ctr"/>
+          </a:p>
+        </p:txBody>
+      </p:sp>
+      <p:sp>
+        <p:nvSpPr>
+          <p:cNvPr id="188" name="TextBox 187"/>
+          <p:cNvSpPr txBox="1"/>
+          <p:nvPr/>
+        </p:nvSpPr>
+        <p:spPr>
+          <a:xfrm>
+            <a:off x="7543800" y="3836936"/>
+            <a:ext cx="457200" cy="167106"/>
+          </a:xfrm>
+          <a:prstGeom prst="rect">
+            <a:avLst/>
+          </a:prstGeom>
+          <a:noFill/>
+        </p:spPr>
+        <p:txBody>
+          <a:bodyPr wrap="none" lIns="0" rIns="0" tIns="0" bIns="0">
+            <a:spAutoFit/>
+          </a:bodyPr>
+          <a:lstStyle/>
+          <a:p>
+            <a:pPr algn="l"/>
+            <a:r>
+              <a:rPr sz="800" b="1">
+                <a:solidFill>
+                  <a:srgbClr val="22C55E"/>
+                </a:solidFill>
+                <a:latin typeface="Calibri"/>
+              </a:rPr>
+              <a:t>91%</a:t>
+            </a:r>
+          </a:p>
+        </p:txBody>
+      </p:sp>
+      <p:sp>
+        <p:nvSpPr>
+          <p:cNvPr id="189" name="Rectangle 188"/>
+          <p:cNvSpPr/>
+          <p:nvPr/>
+        </p:nvSpPr>
+        <p:spPr>
+          <a:xfrm>
+            <a:off x="73152" y="4014215"/>
+            <a:ext cx="8741664" cy="187452"/>
+          </a:xfrm>
+          <a:prstGeom prst="rect">
+            <a:avLst/>
+          </a:prstGeom>
+          <a:solidFill>
+            <a:srgbClr val="F5F7FA"/>
+          </a:solidFill>
+          <a:ln>
+            <a:noFill/>
+          </a:ln>
+          <a:effectLst/>
+        </p:spPr>
+        <p:style>
+          <a:lnRef idx="1">
+            <a:schemeClr val="accent1"/>
+          </a:lnRef>
+          <a:fillRef idx="3">
+            <a:schemeClr val="accent1"/>
+          </a:fillRef>
+          <a:effectRef idx="2">
+            <a:schemeClr val="accent1"/>
+          </a:effectRef>
+          <a:fontRef idx="minor">
+            <a:schemeClr val="lt1"/>
+          </a:fontRef>
+        </p:style>
+        <p:txBody>
+          <a:bodyPr rtlCol="0" anchor="ctr"/>
+          <a:lstStyle/>
+          <a:p>
+            <a:pPr algn="ctr"/>
+          </a:p>
+        </p:txBody>
+      </p:sp>
+      <p:sp>
+        <p:nvSpPr>
+          <p:cNvPr id="190" name="TextBox 189"/>
+          <p:cNvSpPr txBox="1"/>
+          <p:nvPr/>
+        </p:nvSpPr>
+        <p:spPr>
+          <a:xfrm>
+            <a:off x="91440" y="4014215"/>
+            <a:ext cx="722375" cy="187452"/>
+          </a:xfrm>
+          <a:prstGeom prst="rect">
+            <a:avLst/>
+          </a:prstGeom>
+          <a:noFill/>
+        </p:spPr>
+        <p:txBody>
+          <a:bodyPr wrap="none" lIns="0" rIns="0" tIns="0" bIns="0" anchor="ctr">
+            <a:spAutoFit/>
+          </a:bodyPr>
+          <a:lstStyle/>
+          <a:p>
+            <a:pPr algn="ctr"/>
+            <a:r>
+              <a:rPr sz="700" b="1">
+                <a:solidFill>
+                  <a:srgbClr val="1A2340"/>
+                </a:solidFill>
+                <a:latin typeface="Calibri"/>
+              </a:rPr>
+              <a:t>Proyecto</a:t>
+            </a:r>
+          </a:p>
+        </p:txBody>
+      </p:sp>
+      <p:sp>
+        <p:nvSpPr>
+          <p:cNvPr id="191" name="TextBox 190"/>
+          <p:cNvSpPr txBox="1"/>
+          <p:nvPr/>
+        </p:nvSpPr>
+        <p:spPr>
+          <a:xfrm>
+            <a:off x="850392" y="4014215"/>
+            <a:ext cx="2432304" cy="187452"/>
+          </a:xfrm>
+          <a:prstGeom prst="rect">
+            <a:avLst/>
+          </a:prstGeom>
+          <a:noFill/>
+        </p:spPr>
+        <p:txBody>
+          <a:bodyPr wrap="none" lIns="0" rIns="0" tIns="0" bIns="0" anchor="ctr">
+            <a:spAutoFit/>
+          </a:bodyPr>
+          <a:lstStyle/>
+          <a:p>
+            <a:pPr algn="l"/>
+            <a:r>
+              <a:rPr sz="700" b="0">
+                <a:solidFill>
+                  <a:srgbClr val="1A2340"/>
+                </a:solidFill>
+                <a:latin typeface="Calibri"/>
+              </a:rPr>
+              <a:t>Contabilidad || Integración Mecanica-SAE (Fase…</a:t>
+            </a:r>
+          </a:p>
+        </p:txBody>
+      </p:sp>
+      <p:sp>
+        <p:nvSpPr>
+          <p:cNvPr id="192" name="TextBox 191"/>
+          <p:cNvSpPr txBox="1"/>
+          <p:nvPr/>
+        </p:nvSpPr>
+        <p:spPr>
+          <a:xfrm>
+            <a:off x="3319272" y="4014215"/>
+            <a:ext cx="630936" cy="187452"/>
+          </a:xfrm>
+          <a:prstGeom prst="rect">
+            <a:avLst/>
+          </a:prstGeom>
+          <a:noFill/>
+        </p:spPr>
+        <p:txBody>
+          <a:bodyPr wrap="none" lIns="0" rIns="0" tIns="0" bIns="0" anchor="ctr">
+            <a:spAutoFit/>
+          </a:bodyPr>
+          <a:lstStyle/>
+          <a:p>
+            <a:pPr algn="ctr"/>
+            <a:r>
+              <a:rPr sz="700" b="0">
+                <a:solidFill>
+                  <a:srgbClr val="555555"/>
+                </a:solidFill>
+                <a:latin typeface="Calibri"/>
+              </a:rPr>
+              <a:t>21/04/2026</a:t>
+            </a:r>
+          </a:p>
+        </p:txBody>
+      </p:sp>
+      <p:sp>
+        <p:nvSpPr>
+          <p:cNvPr id="193" name="TextBox 192"/>
+          <p:cNvSpPr txBox="1"/>
+          <p:nvPr/>
+        </p:nvSpPr>
+        <p:spPr>
+          <a:xfrm>
+            <a:off x="3986783" y="4014215"/>
+            <a:ext cx="630936" cy="187452"/>
+          </a:xfrm>
+          <a:prstGeom prst="rect">
+            <a:avLst/>
+          </a:prstGeom>
+          <a:noFill/>
+        </p:spPr>
+        <p:txBody>
+          <a:bodyPr wrap="none" lIns="0" rIns="0" tIns="0" bIns="0" anchor="ctr">
+            <a:spAutoFit/>
+          </a:bodyPr>
+          <a:lstStyle/>
+          <a:p>
+            <a:pPr algn="ctr"/>
+            <a:r>
+              <a:rPr sz="700" b="0">
+                <a:solidFill>
+                  <a:srgbClr val="555555"/>
+                </a:solidFill>
+                <a:latin typeface="Calibri"/>
+              </a:rPr>
+              <a:t>12/06/2026</a:t>
+            </a:r>
+          </a:p>
+        </p:txBody>
+      </p:sp>
+      <p:sp>
+        <p:nvSpPr>
+          <p:cNvPr id="194" name="TextBox 193"/>
+          <p:cNvSpPr txBox="1"/>
+          <p:nvPr/>
+        </p:nvSpPr>
+        <p:spPr>
+          <a:xfrm>
+            <a:off x="4654296" y="4014215"/>
+            <a:ext cx="493775" cy="187452"/>
+          </a:xfrm>
+          <a:prstGeom prst="rect">
+            <a:avLst/>
+          </a:prstGeom>
+          <a:noFill/>
+        </p:spPr>
+        <p:txBody>
+          <a:bodyPr wrap="none" lIns="0" rIns="0" tIns="0" bIns="0" anchor="ctr">
+            <a:spAutoFit/>
+          </a:bodyPr>
+          <a:lstStyle/>
+          <a:p>
+            <a:pPr algn="ctr"/>
+            <a:r>
+              <a:rPr sz="700" b="1">
+                <a:solidFill>
+                  <a:srgbClr val="1A2340"/>
+                </a:solidFill>
+                <a:latin typeface="Calibri"/>
+              </a:rPr>
+              <a:t>99%</a:t>
+            </a:r>
+          </a:p>
+        </p:txBody>
+      </p:sp>
+      <p:sp>
+        <p:nvSpPr>
+          <p:cNvPr id="195" name="TextBox 194"/>
+          <p:cNvSpPr txBox="1"/>
+          <p:nvPr/>
+        </p:nvSpPr>
+        <p:spPr>
+          <a:xfrm>
+            <a:off x="5184648" y="4014215"/>
+            <a:ext cx="557784" cy="187452"/>
+          </a:xfrm>
+          <a:prstGeom prst="rect">
+            <a:avLst/>
+          </a:prstGeom>
+          <a:noFill/>
+        </p:spPr>
+        <p:txBody>
+          <a:bodyPr wrap="none" lIns="0" rIns="0" tIns="0" bIns="0" anchor="ctr">
+            <a:spAutoFit/>
+          </a:bodyPr>
+          <a:lstStyle/>
+          <a:p>
+            <a:pPr algn="ctr"/>
+            <a:r>
+              <a:rPr sz="700" b="0">
+                <a:solidFill>
+                  <a:srgbClr val="555555"/>
+                </a:solidFill>
+                <a:latin typeface="Calibri"/>
+              </a:rPr>
+              <a:t>100%</a:t>
+            </a:r>
+          </a:p>
+        </p:txBody>
+      </p:sp>
+      <p:sp>
+        <p:nvSpPr>
+          <p:cNvPr id="196" name="TextBox 195"/>
+          <p:cNvSpPr txBox="1"/>
+          <p:nvPr/>
+        </p:nvSpPr>
+        <p:spPr>
+          <a:xfrm>
+            <a:off x="7991856" y="4014215"/>
+            <a:ext cx="804672" cy="187452"/>
+          </a:xfrm>
+          <a:prstGeom prst="rect">
+            <a:avLst/>
+          </a:prstGeom>
+          <a:noFill/>
+        </p:spPr>
+        <p:txBody>
+          <a:bodyPr wrap="none" lIns="0" rIns="0" tIns="0" bIns="0" anchor="ctr">
+            <a:spAutoFit/>
+          </a:bodyPr>
+          <a:lstStyle/>
+          <a:p>
+            <a:pPr algn="ctr"/>
+            <a:r>
+              <a:rPr sz="700" b="1">
+                <a:solidFill>
+                  <a:srgbClr val="EF4444"/>
+                </a:solidFill>
+                <a:latin typeface="Calibri"/>
+              </a:rPr>
+              <a:t>Atrasado</a:t>
+            </a:r>
+          </a:p>
+        </p:txBody>
+      </p:sp>
+      <p:sp>
+        <p:nvSpPr>
+          <p:cNvPr id="197" name="Rounded Rectangle 196"/>
+          <p:cNvSpPr/>
+          <p:nvPr/>
+        </p:nvSpPr>
+        <p:spPr>
+          <a:xfrm>
+            <a:off x="5806440" y="4056392"/>
+            <a:ext cx="1691640" cy="103098"/>
+          </a:xfrm>
+          <a:prstGeom prst="roundRect">
+            <a:avLst>
+              <a:gd name="adj" fmla="val 50000"/>
+            </a:avLst>
+          </a:prstGeom>
+          <a:pattFill prst="smGrid">
+            <a:fgClr>
+              <a:srgbClr val="EF4444"/>
+            </a:fgClr>
+            <a:bgClr>
+              <a:srgbClr val="FFFFFF"/>
+            </a:bgClr>
+          </a:pattFill>
+          <a:ln>
+            <a:noFill/>
+          </a:ln>
+          <a:effectLst/>
+        </p:spPr>
+        <p:style>
+          <a:lnRef idx="1">
+            <a:schemeClr val="accent1"/>
+          </a:lnRef>
+          <a:fillRef idx="3">
+            <a:schemeClr val="accent1"/>
+          </a:fillRef>
+          <a:effectRef idx="2">
+            <a:schemeClr val="accent1"/>
+          </a:effectRef>
+          <a:fontRef idx="minor">
+            <a:schemeClr val="lt1"/>
+          </a:fontRef>
+        </p:style>
+        <p:txBody>
+          <a:bodyPr rtlCol="0" anchor="ctr"/>
+          <a:lstStyle/>
+          <a:p>
+            <a:pPr algn="ctr"/>
+          </a:p>
+        </p:txBody>
+      </p:sp>
+      <p:sp>
+        <p:nvSpPr>
+          <p:cNvPr id="198" name="Rounded Rectangle 197"/>
+          <p:cNvSpPr/>
+          <p:nvPr/>
+        </p:nvSpPr>
+        <p:spPr>
+          <a:xfrm>
+            <a:off x="5806440" y="4056392"/>
+            <a:ext cx="1674723" cy="103098"/>
+          </a:xfrm>
+          <a:prstGeom prst="roundRect">
+            <a:avLst>
+              <a:gd name="adj" fmla="val 50000"/>
+            </a:avLst>
+          </a:prstGeom>
+          <a:solidFill>
+            <a:srgbClr val="EF4444"/>
+          </a:solidFill>
+          <a:ln>
+            <a:noFill/>
+          </a:ln>
+          <a:effectLst>
+            <a:outerShdw blurRad="76200" dist="19050" dir="5400000" rotWithShape="0">
+              <a:srgbClr val="EF4444">
+                <a:alpha val="55000"/>
+              </a:srgbClr>
+            </a:outerShdw>
+          </a:effectLst>
+        </p:spPr>
+        <p:style>
+          <a:lnRef idx="1">
+            <a:schemeClr val="accent1"/>
+          </a:lnRef>
+          <a:fillRef idx="3">
+            <a:schemeClr val="accent1"/>
+          </a:fillRef>
+          <a:effectRef idx="2">
+            <a:schemeClr val="accent1"/>
+          </a:effectRef>
+          <a:fontRef idx="minor">
+            <a:schemeClr val="lt1"/>
+          </a:fontRef>
+        </p:style>
+        <p:txBody>
+          <a:bodyPr rtlCol="0" anchor="ctr"/>
+          <a:lstStyle/>
+          <a:p>
+            <a:pPr algn="ctr"/>
+          </a:p>
+        </p:txBody>
+      </p:sp>
+      <p:sp>
+        <p:nvSpPr>
+          <p:cNvPr id="199" name="TextBox 198"/>
+          <p:cNvSpPr txBox="1"/>
+          <p:nvPr/>
+        </p:nvSpPr>
+        <p:spPr>
+          <a:xfrm>
+            <a:off x="7543800" y="4024388"/>
+            <a:ext cx="457200" cy="167106"/>
+          </a:xfrm>
+          <a:prstGeom prst="rect">
+            <a:avLst/>
+          </a:prstGeom>
+          <a:noFill/>
+        </p:spPr>
+        <p:txBody>
+          <a:bodyPr wrap="none" lIns="0" rIns="0" tIns="0" bIns="0">
+            <a:spAutoFit/>
+          </a:bodyPr>
+          <a:lstStyle/>
+          <a:p>
+            <a:pPr algn="l"/>
+            <a:r>
+              <a:rPr sz="800" b="1">
+                <a:solidFill>
+                  <a:srgbClr val="EF4444"/>
+                </a:solidFill>
+                <a:latin typeface="Calibri"/>
+              </a:rPr>
+              <a:t>99%</a:t>
+            </a:r>
+          </a:p>
+        </p:txBody>
+      </p:sp>
+      <p:sp>
+        <p:nvSpPr>
+          <p:cNvPr id="200" name="Rectangle 199"/>
+          <p:cNvSpPr/>
+          <p:nvPr/>
+        </p:nvSpPr>
+        <p:spPr>
+          <a:xfrm>
+            <a:off x="73152" y="4201668"/>
+            <a:ext cx="8741664" cy="187452"/>
+          </a:xfrm>
+          <a:prstGeom prst="rect">
+            <a:avLst/>
+          </a:prstGeom>
+          <a:solidFill>
+            <a:srgbClr val="FFFFFF"/>
+          </a:solidFill>
+          <a:ln>
+            <a:noFill/>
+          </a:ln>
+          <a:effectLst/>
+        </p:spPr>
+        <p:style>
+          <a:lnRef idx="1">
+            <a:schemeClr val="accent1"/>
+          </a:lnRef>
+          <a:fillRef idx="3">
+            <a:schemeClr val="accent1"/>
+          </a:fillRef>
+          <a:effectRef idx="2">
+            <a:schemeClr val="accent1"/>
+          </a:effectRef>
+          <a:fontRef idx="minor">
+            <a:schemeClr val="lt1"/>
+          </a:fontRef>
+        </p:style>
+        <p:txBody>
+          <a:bodyPr rtlCol="0" anchor="ctr"/>
+          <a:lstStyle/>
+          <a:p>
+            <a:pPr algn="ctr"/>
+          </a:p>
+        </p:txBody>
+      </p:sp>
+      <p:sp>
+        <p:nvSpPr>
+          <p:cNvPr id="201" name="TextBox 200"/>
+          <p:cNvSpPr txBox="1"/>
+          <p:nvPr/>
+        </p:nvSpPr>
+        <p:spPr>
+          <a:xfrm>
+            <a:off x="91440" y="4201668"/>
+            <a:ext cx="722375" cy="187452"/>
+          </a:xfrm>
+          <a:prstGeom prst="rect">
+            <a:avLst/>
+          </a:prstGeom>
+          <a:noFill/>
+        </p:spPr>
+        <p:txBody>
+          <a:bodyPr wrap="none" lIns="0" rIns="0" tIns="0" bIns="0" anchor="ctr">
+            <a:spAutoFit/>
+          </a:bodyPr>
+          <a:lstStyle/>
+          <a:p>
+            <a:pPr algn="ctr"/>
+            <a:r>
+              <a:rPr sz="700" b="1">
+                <a:solidFill>
+                  <a:srgbClr val="1A2340"/>
+                </a:solidFill>
+                <a:latin typeface="Calibri"/>
+              </a:rPr>
+              <a:t>Proyecto</a:t>
+            </a:r>
+          </a:p>
+        </p:txBody>
+      </p:sp>
+      <p:sp>
+        <p:nvSpPr>
+          <p:cNvPr id="202" name="TextBox 201"/>
+          <p:cNvSpPr txBox="1"/>
+          <p:nvPr/>
+        </p:nvSpPr>
+        <p:spPr>
+          <a:xfrm>
+            <a:off x="850392" y="4201668"/>
+            <a:ext cx="2432304" cy="187452"/>
+          </a:xfrm>
+          <a:prstGeom prst="rect">
+            <a:avLst/>
+          </a:prstGeom>
+          <a:noFill/>
+        </p:spPr>
+        <p:txBody>
+          <a:bodyPr wrap="none" lIns="0" rIns="0" tIns="0" bIns="0" anchor="ctr">
+            <a:spAutoFit/>
+          </a:bodyPr>
+          <a:lstStyle/>
+          <a:p>
+            <a:pPr algn="l"/>
+            <a:r>
+              <a:rPr sz="700" b="0">
+                <a:solidFill>
+                  <a:srgbClr val="1A2340"/>
+                </a:solidFill>
+                <a:latin typeface="Calibri"/>
+              </a:rPr>
+              <a:t>DTI || Integración de sistemas</a:t>
+            </a:r>
+          </a:p>
+        </p:txBody>
+      </p:sp>
+      <p:sp>
+        <p:nvSpPr>
+          <p:cNvPr id="203" name="TextBox 202"/>
+          <p:cNvSpPr txBox="1"/>
+          <p:nvPr/>
+        </p:nvSpPr>
+        <p:spPr>
+          <a:xfrm>
+            <a:off x="3319272" y="4201668"/>
+            <a:ext cx="630936" cy="187452"/>
+          </a:xfrm>
+          <a:prstGeom prst="rect">
+            <a:avLst/>
+          </a:prstGeom>
+          <a:noFill/>
+        </p:spPr>
+        <p:txBody>
+          <a:bodyPr wrap="none" lIns="0" rIns="0" tIns="0" bIns="0" anchor="ctr">
+            <a:spAutoFit/>
+          </a:bodyPr>
+          <a:lstStyle/>
+          <a:p>
+            <a:pPr algn="ctr"/>
+            <a:r>
+              <a:rPr sz="700" b="0">
+                <a:solidFill>
+                  <a:srgbClr val="555555"/>
+                </a:solidFill>
+                <a:latin typeface="Calibri"/>
+              </a:rPr>
+              <a:t>01/06/2026</a:t>
+            </a:r>
+          </a:p>
+        </p:txBody>
+      </p:sp>
+      <p:sp>
+        <p:nvSpPr>
+          <p:cNvPr id="204" name="TextBox 203"/>
+          <p:cNvSpPr txBox="1"/>
+          <p:nvPr/>
+        </p:nvSpPr>
+        <p:spPr>
+          <a:xfrm>
+            <a:off x="3986783" y="4201668"/>
+            <a:ext cx="630936" cy="187452"/>
+          </a:xfrm>
+          <a:prstGeom prst="rect">
+            <a:avLst/>
+          </a:prstGeom>
+          <a:noFill/>
+        </p:spPr>
+        <p:txBody>
+          <a:bodyPr wrap="none" lIns="0" rIns="0" tIns="0" bIns="0" anchor="ctr">
+            <a:spAutoFit/>
+          </a:bodyPr>
+          <a:lstStyle/>
+          <a:p>
+            <a:pPr algn="ctr"/>
+            <a:r>
+              <a:rPr sz="700" b="0">
+                <a:solidFill>
+                  <a:srgbClr val="555555"/>
+                </a:solidFill>
+                <a:latin typeface="Calibri"/>
+              </a:rPr>
+              <a:t>23/09/2026</a:t>
+            </a:r>
+          </a:p>
+        </p:txBody>
+      </p:sp>
+      <p:sp>
+        <p:nvSpPr>
+          <p:cNvPr id="205" name="TextBox 204"/>
+          <p:cNvSpPr txBox="1"/>
+          <p:nvPr/>
+        </p:nvSpPr>
+        <p:spPr>
+          <a:xfrm>
+            <a:off x="4654296" y="4201668"/>
+            <a:ext cx="493775" cy="187452"/>
+          </a:xfrm>
+          <a:prstGeom prst="rect">
+            <a:avLst/>
+          </a:prstGeom>
+          <a:noFill/>
+        </p:spPr>
+        <p:txBody>
+          <a:bodyPr wrap="none" lIns="0" rIns="0" tIns="0" bIns="0" anchor="ctr">
+            <a:spAutoFit/>
+          </a:bodyPr>
+          <a:lstStyle/>
+          <a:p>
+            <a:pPr algn="ctr"/>
+            <a:r>
+              <a:rPr sz="700" b="1">
+                <a:solidFill>
+                  <a:srgbClr val="1A2340"/>
+                </a:solidFill>
+                <a:latin typeface="Calibri"/>
+              </a:rPr>
+              <a:t>31%</a:t>
+            </a:r>
+          </a:p>
+        </p:txBody>
+      </p:sp>
+      <p:sp>
+        <p:nvSpPr>
+          <p:cNvPr id="206" name="TextBox 205"/>
+          <p:cNvSpPr txBox="1"/>
+          <p:nvPr/>
+        </p:nvSpPr>
+        <p:spPr>
+          <a:xfrm>
+            <a:off x="5184648" y="4201668"/>
+            <a:ext cx="557784" cy="187452"/>
+          </a:xfrm>
+          <a:prstGeom prst="rect">
+            <a:avLst/>
+          </a:prstGeom>
+          <a:noFill/>
+        </p:spPr>
+        <p:txBody>
+          <a:bodyPr wrap="none" lIns="0" rIns="0" tIns="0" bIns="0" anchor="ctr">
+            <a:spAutoFit/>
+          </a:bodyPr>
+          <a:lstStyle/>
+          <a:p>
+            <a:pPr algn="ctr"/>
+            <a:r>
+              <a:rPr sz="700" b="0">
+                <a:solidFill>
+                  <a:srgbClr val="555555"/>
+                </a:solidFill>
+                <a:latin typeface="Calibri"/>
+              </a:rPr>
+              <a:t>34%</a:t>
+            </a:r>
+          </a:p>
+        </p:txBody>
+      </p:sp>
+      <p:sp>
+        <p:nvSpPr>
+          <p:cNvPr id="207" name="TextBox 206"/>
+          <p:cNvSpPr txBox="1"/>
+          <p:nvPr/>
+        </p:nvSpPr>
+        <p:spPr>
+          <a:xfrm>
+            <a:off x="7991856" y="4201668"/>
+            <a:ext cx="804672" cy="187452"/>
+          </a:xfrm>
+          <a:prstGeom prst="rect">
+            <a:avLst/>
+          </a:prstGeom>
+          <a:noFill/>
+        </p:spPr>
+        <p:txBody>
+          <a:bodyPr wrap="none" lIns="0" rIns="0" tIns="0" bIns="0" anchor="ctr">
+            <a:spAutoFit/>
+          </a:bodyPr>
+          <a:lstStyle/>
+          <a:p>
+            <a:pPr algn="ctr"/>
+            <a:r>
+              <a:rPr sz="700" b="1">
+                <a:solidFill>
                   <a:srgbClr val="F59E0B"/>
                 </a:solidFill>
                 <a:latin typeface="Calibri"/>
@@ -12435,13 +13289,13 @@
       </p:sp>
       <p:sp>
         <p:nvSpPr>
-          <p:cNvPr id="186" name="Rounded Rectangle 185"/>
+          <p:cNvPr id="208" name="Rounded Rectangle 207"/>
           <p:cNvSpPr/>
           <p:nvPr/>
         </p:nvSpPr>
         <p:spPr>
           <a:xfrm>
-            <a:off x="5806440" y="3868940"/>
+            <a:off x="5806440" y="4243844"/>
             <a:ext cx="1691640" cy="103098"/>
           </a:xfrm>
           <a:prstGeom prst="roundRect">
@@ -12486,14 +13340,14 @@
       </p:sp>
       <p:sp>
         <p:nvSpPr>
-          <p:cNvPr id="187" name="Rounded Rectangle 186"/>
+          <p:cNvPr id="209" name="Rounded Rectangle 208"/>
           <p:cNvSpPr/>
           <p:nvPr/>
         </p:nvSpPr>
         <p:spPr>
           <a:xfrm>
-            <a:off x="5806440" y="3868940"/>
-            <a:ext cx="1353312" cy="103098"/>
+            <a:off x="5806440" y="4243844"/>
+            <a:ext cx="524408" cy="103098"/>
           </a:xfrm>
           <a:prstGeom prst="roundRect">
             <a:avLst>
@@ -12538,13 +13392,13 @@
       </p:sp>
       <p:sp>
         <p:nvSpPr>
-          <p:cNvPr id="188" name="TextBox 187"/>
+          <p:cNvPr id="210" name="TextBox 209"/>
           <p:cNvSpPr txBox="1"/>
           <p:nvPr/>
         </p:nvSpPr>
         <p:spPr>
           <a:xfrm>
-            <a:off x="7543800" y="3836936"/>
+            <a:off x="7543800" y="4211840"/>
             <a:ext cx="457200" cy="167106"/>
           </a:xfrm>
           <a:prstGeom prst="rect">
@@ -12566,20 +13420,20 @@
                 </a:solidFill>
                 <a:latin typeface="Calibri"/>
               </a:rPr>
-              <a:t>80%</a:t>
-            </a:r>
-          </a:p>
-        </p:txBody>
-      </p:sp>
-      <p:sp>
-        <p:nvSpPr>
-          <p:cNvPr id="189" name="Rectangle 188"/>
+              <a:t>31%</a:t>
+            </a:r>
+          </a:p>
+        </p:txBody>
+      </p:sp>
+      <p:sp>
+        <p:nvSpPr>
+          <p:cNvPr id="211" name="Rectangle 210"/>
           <p:cNvSpPr/>
           <p:nvPr/>
         </p:nvSpPr>
         <p:spPr>
           <a:xfrm>
-            <a:off x="73152" y="4014215"/>
+            <a:off x="73152" y="4389120"/>
             <a:ext cx="8741664" cy="187452"/>
           </a:xfrm>
           <a:prstGeom prst="rect">
@@ -12617,13 +13471,13 @@
       </p:sp>
       <p:sp>
         <p:nvSpPr>
-          <p:cNvPr id="190" name="TextBox 189"/>
+          <p:cNvPr id="212" name="TextBox 211"/>
           <p:cNvSpPr txBox="1"/>
           <p:nvPr/>
         </p:nvSpPr>
         <p:spPr>
           <a:xfrm>
-            <a:off x="91440" y="4014215"/>
+            <a:off x="91440" y="4389120"/>
             <a:ext cx="722375" cy="187452"/>
           </a:xfrm>
           <a:prstGeom prst="rect">
@@ -12652,860 +13506,6 @@
       </p:sp>
       <p:sp>
         <p:nvSpPr>
-          <p:cNvPr id="191" name="TextBox 190"/>
-          <p:cNvSpPr txBox="1"/>
-          <p:nvPr/>
-        </p:nvSpPr>
-        <p:spPr>
-          <a:xfrm>
-            <a:off x="850392" y="4014215"/>
-            <a:ext cx="2432304" cy="187452"/>
-          </a:xfrm>
-          <a:prstGeom prst="rect">
-            <a:avLst/>
-          </a:prstGeom>
-          <a:noFill/>
-        </p:spPr>
-        <p:txBody>
-          <a:bodyPr wrap="none" lIns="0" rIns="0" tIns="0" bIns="0" anchor="ctr">
-            <a:spAutoFit/>
-          </a:bodyPr>
-          <a:lstStyle/>
-          <a:p>
-            <a:pPr algn="l"/>
-            <a:r>
-              <a:rPr sz="700" b="0">
-                <a:solidFill>
-                  <a:srgbClr val="1A2340"/>
-                </a:solidFill>
-                <a:latin typeface="Calibri"/>
-              </a:rPr>
-              <a:t>Contabilidad || Integración Mecanica-SAE (Fase…</a:t>
-            </a:r>
-          </a:p>
-        </p:txBody>
-      </p:sp>
-      <p:sp>
-        <p:nvSpPr>
-          <p:cNvPr id="192" name="TextBox 191"/>
-          <p:cNvSpPr txBox="1"/>
-          <p:nvPr/>
-        </p:nvSpPr>
-        <p:spPr>
-          <a:xfrm>
-            <a:off x="3319272" y="4014215"/>
-            <a:ext cx="630936" cy="187452"/>
-          </a:xfrm>
-          <a:prstGeom prst="rect">
-            <a:avLst/>
-          </a:prstGeom>
-          <a:noFill/>
-        </p:spPr>
-        <p:txBody>
-          <a:bodyPr wrap="none" lIns="0" rIns="0" tIns="0" bIns="0" anchor="ctr">
-            <a:spAutoFit/>
-          </a:bodyPr>
-          <a:lstStyle/>
-          <a:p>
-            <a:pPr algn="ctr"/>
-            <a:r>
-              <a:rPr sz="700" b="0">
-                <a:solidFill>
-                  <a:srgbClr val="555555"/>
-                </a:solidFill>
-                <a:latin typeface="Calibri"/>
-              </a:rPr>
-              <a:t>21/04/2026</a:t>
-            </a:r>
-          </a:p>
-        </p:txBody>
-      </p:sp>
-      <p:sp>
-        <p:nvSpPr>
-          <p:cNvPr id="193" name="TextBox 192"/>
-          <p:cNvSpPr txBox="1"/>
-          <p:nvPr/>
-        </p:nvSpPr>
-        <p:spPr>
-          <a:xfrm>
-            <a:off x="3986783" y="4014215"/>
-            <a:ext cx="630936" cy="187452"/>
-          </a:xfrm>
-          <a:prstGeom prst="rect">
-            <a:avLst/>
-          </a:prstGeom>
-          <a:noFill/>
-        </p:spPr>
-        <p:txBody>
-          <a:bodyPr wrap="none" lIns="0" rIns="0" tIns="0" bIns="0" anchor="ctr">
-            <a:spAutoFit/>
-          </a:bodyPr>
-          <a:lstStyle/>
-          <a:p>
-            <a:pPr algn="ctr"/>
-            <a:r>
-              <a:rPr sz="700" b="0">
-                <a:solidFill>
-                  <a:srgbClr val="555555"/>
-                </a:solidFill>
-                <a:latin typeface="Calibri"/>
-              </a:rPr>
-              <a:t>12/06/2026</a:t>
-            </a:r>
-          </a:p>
-        </p:txBody>
-      </p:sp>
-      <p:sp>
-        <p:nvSpPr>
-          <p:cNvPr id="194" name="TextBox 193"/>
-          <p:cNvSpPr txBox="1"/>
-          <p:nvPr/>
-        </p:nvSpPr>
-        <p:spPr>
-          <a:xfrm>
-            <a:off x="4654296" y="4014215"/>
-            <a:ext cx="493775" cy="187452"/>
-          </a:xfrm>
-          <a:prstGeom prst="rect">
-            <a:avLst/>
-          </a:prstGeom>
-          <a:noFill/>
-        </p:spPr>
-        <p:txBody>
-          <a:bodyPr wrap="none" lIns="0" rIns="0" tIns="0" bIns="0" anchor="ctr">
-            <a:spAutoFit/>
-          </a:bodyPr>
-          <a:lstStyle/>
-          <a:p>
-            <a:pPr algn="ctr"/>
-            <a:r>
-              <a:rPr sz="700" b="1">
-                <a:solidFill>
-                  <a:srgbClr val="1A2340"/>
-                </a:solidFill>
-                <a:latin typeface="Calibri"/>
-              </a:rPr>
-              <a:t>99%</a:t>
-            </a:r>
-          </a:p>
-        </p:txBody>
-      </p:sp>
-      <p:sp>
-        <p:nvSpPr>
-          <p:cNvPr id="195" name="TextBox 194"/>
-          <p:cNvSpPr txBox="1"/>
-          <p:nvPr/>
-        </p:nvSpPr>
-        <p:spPr>
-          <a:xfrm>
-            <a:off x="5184648" y="4014215"/>
-            <a:ext cx="557784" cy="187452"/>
-          </a:xfrm>
-          <a:prstGeom prst="rect">
-            <a:avLst/>
-          </a:prstGeom>
-          <a:noFill/>
-        </p:spPr>
-        <p:txBody>
-          <a:bodyPr wrap="none" lIns="0" rIns="0" tIns="0" bIns="0" anchor="ctr">
-            <a:spAutoFit/>
-          </a:bodyPr>
-          <a:lstStyle/>
-          <a:p>
-            <a:pPr algn="ctr"/>
-            <a:r>
-              <a:rPr sz="700" b="0">
-                <a:solidFill>
-                  <a:srgbClr val="555555"/>
-                </a:solidFill>
-                <a:latin typeface="Calibri"/>
-              </a:rPr>
-              <a:t>100%</a:t>
-            </a:r>
-          </a:p>
-        </p:txBody>
-      </p:sp>
-      <p:sp>
-        <p:nvSpPr>
-          <p:cNvPr id="196" name="TextBox 195"/>
-          <p:cNvSpPr txBox="1"/>
-          <p:nvPr/>
-        </p:nvSpPr>
-        <p:spPr>
-          <a:xfrm>
-            <a:off x="7991856" y="4014215"/>
-            <a:ext cx="804672" cy="187452"/>
-          </a:xfrm>
-          <a:prstGeom prst="rect">
-            <a:avLst/>
-          </a:prstGeom>
-          <a:noFill/>
-        </p:spPr>
-        <p:txBody>
-          <a:bodyPr wrap="none" lIns="0" rIns="0" tIns="0" bIns="0" anchor="ctr">
-            <a:spAutoFit/>
-          </a:bodyPr>
-          <a:lstStyle/>
-          <a:p>
-            <a:pPr algn="ctr"/>
-            <a:r>
-              <a:rPr sz="700" b="1">
-                <a:solidFill>
-                  <a:srgbClr val="EF4444"/>
-                </a:solidFill>
-                <a:latin typeface="Calibri"/>
-              </a:rPr>
-              <a:t>Atrasado</a:t>
-            </a:r>
-          </a:p>
-        </p:txBody>
-      </p:sp>
-      <p:sp>
-        <p:nvSpPr>
-          <p:cNvPr id="197" name="Rounded Rectangle 196"/>
-          <p:cNvSpPr/>
-          <p:nvPr/>
-        </p:nvSpPr>
-        <p:spPr>
-          <a:xfrm>
-            <a:off x="5806440" y="4056392"/>
-            <a:ext cx="1691640" cy="103098"/>
-          </a:xfrm>
-          <a:prstGeom prst="roundRect">
-            <a:avLst>
-              <a:gd name="adj" fmla="val 50000"/>
-            </a:avLst>
-          </a:prstGeom>
-          <a:pattFill prst="smGrid">
-            <a:fgClr>
-              <a:srgbClr val="EF4444"/>
-            </a:fgClr>
-            <a:bgClr>
-              <a:srgbClr val="FFFFFF"/>
-            </a:bgClr>
-          </a:pattFill>
-          <a:ln>
-            <a:noFill/>
-          </a:ln>
-          <a:effectLst/>
-        </p:spPr>
-        <p:style>
-          <a:lnRef idx="1">
-            <a:schemeClr val="accent1"/>
-          </a:lnRef>
-          <a:fillRef idx="3">
-            <a:schemeClr val="accent1"/>
-          </a:fillRef>
-          <a:effectRef idx="2">
-            <a:schemeClr val="accent1"/>
-          </a:effectRef>
-          <a:fontRef idx="minor">
-            <a:schemeClr val="lt1"/>
-          </a:fontRef>
-        </p:style>
-        <p:txBody>
-          <a:bodyPr rtlCol="0" anchor="ctr"/>
-          <a:lstStyle/>
-          <a:p>
-            <a:pPr algn="ctr"/>
-          </a:p>
-        </p:txBody>
-      </p:sp>
-      <p:sp>
-        <p:nvSpPr>
-          <p:cNvPr id="198" name="Rounded Rectangle 197"/>
-          <p:cNvSpPr/>
-          <p:nvPr/>
-        </p:nvSpPr>
-        <p:spPr>
-          <a:xfrm>
-            <a:off x="5806440" y="4056392"/>
-            <a:ext cx="1674723" cy="103098"/>
-          </a:xfrm>
-          <a:prstGeom prst="roundRect">
-            <a:avLst>
-              <a:gd name="adj" fmla="val 50000"/>
-            </a:avLst>
-          </a:prstGeom>
-          <a:solidFill>
-            <a:srgbClr val="EF4444"/>
-          </a:solidFill>
-          <a:ln>
-            <a:noFill/>
-          </a:ln>
-          <a:effectLst>
-            <a:outerShdw blurRad="76200" dist="19050" dir="5400000" rotWithShape="0">
-              <a:srgbClr val="EF4444">
-                <a:alpha val="55000"/>
-              </a:srgbClr>
-            </a:outerShdw>
-          </a:effectLst>
-        </p:spPr>
-        <p:style>
-          <a:lnRef idx="1">
-            <a:schemeClr val="accent1"/>
-          </a:lnRef>
-          <a:fillRef idx="3">
-            <a:schemeClr val="accent1"/>
-          </a:fillRef>
-          <a:effectRef idx="2">
-            <a:schemeClr val="accent1"/>
-          </a:effectRef>
-          <a:fontRef idx="minor">
-            <a:schemeClr val="lt1"/>
-          </a:fontRef>
-        </p:style>
-        <p:txBody>
-          <a:bodyPr rtlCol="0" anchor="ctr"/>
-          <a:lstStyle/>
-          <a:p>
-            <a:pPr algn="ctr"/>
-          </a:p>
-        </p:txBody>
-      </p:sp>
-      <p:sp>
-        <p:nvSpPr>
-          <p:cNvPr id="199" name="TextBox 198"/>
-          <p:cNvSpPr txBox="1"/>
-          <p:nvPr/>
-        </p:nvSpPr>
-        <p:spPr>
-          <a:xfrm>
-            <a:off x="7543800" y="4024388"/>
-            <a:ext cx="457200" cy="167106"/>
-          </a:xfrm>
-          <a:prstGeom prst="rect">
-            <a:avLst/>
-          </a:prstGeom>
-          <a:noFill/>
-        </p:spPr>
-        <p:txBody>
-          <a:bodyPr wrap="none" lIns="0" rIns="0" tIns="0" bIns="0">
-            <a:spAutoFit/>
-          </a:bodyPr>
-          <a:lstStyle/>
-          <a:p>
-            <a:pPr algn="l"/>
-            <a:r>
-              <a:rPr sz="800" b="1">
-                <a:solidFill>
-                  <a:srgbClr val="EF4444"/>
-                </a:solidFill>
-                <a:latin typeface="Calibri"/>
-              </a:rPr>
-              <a:t>99%</a:t>
-            </a:r>
-          </a:p>
-        </p:txBody>
-      </p:sp>
-      <p:sp>
-        <p:nvSpPr>
-          <p:cNvPr id="200" name="Rectangle 199"/>
-          <p:cNvSpPr/>
-          <p:nvPr/>
-        </p:nvSpPr>
-        <p:spPr>
-          <a:xfrm>
-            <a:off x="73152" y="4201668"/>
-            <a:ext cx="8741664" cy="187452"/>
-          </a:xfrm>
-          <a:prstGeom prst="rect">
-            <a:avLst/>
-          </a:prstGeom>
-          <a:solidFill>
-            <a:srgbClr val="FFFFFF"/>
-          </a:solidFill>
-          <a:ln>
-            <a:noFill/>
-          </a:ln>
-          <a:effectLst/>
-        </p:spPr>
-        <p:style>
-          <a:lnRef idx="1">
-            <a:schemeClr val="accent1"/>
-          </a:lnRef>
-          <a:fillRef idx="3">
-            <a:schemeClr val="accent1"/>
-          </a:fillRef>
-          <a:effectRef idx="2">
-            <a:schemeClr val="accent1"/>
-          </a:effectRef>
-          <a:fontRef idx="minor">
-            <a:schemeClr val="lt1"/>
-          </a:fontRef>
-        </p:style>
-        <p:txBody>
-          <a:bodyPr rtlCol="0" anchor="ctr"/>
-          <a:lstStyle/>
-          <a:p>
-            <a:pPr algn="ctr"/>
-          </a:p>
-        </p:txBody>
-      </p:sp>
-      <p:sp>
-        <p:nvSpPr>
-          <p:cNvPr id="201" name="TextBox 200"/>
-          <p:cNvSpPr txBox="1"/>
-          <p:nvPr/>
-        </p:nvSpPr>
-        <p:spPr>
-          <a:xfrm>
-            <a:off x="91440" y="4201668"/>
-            <a:ext cx="722375" cy="187452"/>
-          </a:xfrm>
-          <a:prstGeom prst="rect">
-            <a:avLst/>
-          </a:prstGeom>
-          <a:noFill/>
-        </p:spPr>
-        <p:txBody>
-          <a:bodyPr wrap="none" lIns="0" rIns="0" tIns="0" bIns="0" anchor="ctr">
-            <a:spAutoFit/>
-          </a:bodyPr>
-          <a:lstStyle/>
-          <a:p>
-            <a:pPr algn="ctr"/>
-            <a:r>
-              <a:rPr sz="700" b="1">
-                <a:solidFill>
-                  <a:srgbClr val="1A2340"/>
-                </a:solidFill>
-                <a:latin typeface="Calibri"/>
-              </a:rPr>
-              <a:t>Proyecto</a:t>
-            </a:r>
-          </a:p>
-        </p:txBody>
-      </p:sp>
-      <p:sp>
-        <p:nvSpPr>
-          <p:cNvPr id="202" name="TextBox 201"/>
-          <p:cNvSpPr txBox="1"/>
-          <p:nvPr/>
-        </p:nvSpPr>
-        <p:spPr>
-          <a:xfrm>
-            <a:off x="850392" y="4201668"/>
-            <a:ext cx="2432304" cy="187452"/>
-          </a:xfrm>
-          <a:prstGeom prst="rect">
-            <a:avLst/>
-          </a:prstGeom>
-          <a:noFill/>
-        </p:spPr>
-        <p:txBody>
-          <a:bodyPr wrap="none" lIns="0" rIns="0" tIns="0" bIns="0" anchor="ctr">
-            <a:spAutoFit/>
-          </a:bodyPr>
-          <a:lstStyle/>
-          <a:p>
-            <a:pPr algn="l"/>
-            <a:r>
-              <a:rPr sz="700" b="0">
-                <a:solidFill>
-                  <a:srgbClr val="1A2340"/>
-                </a:solidFill>
-                <a:latin typeface="Calibri"/>
-              </a:rPr>
-              <a:t>DTI || Integración de sistemas</a:t>
-            </a:r>
-          </a:p>
-        </p:txBody>
-      </p:sp>
-      <p:sp>
-        <p:nvSpPr>
-          <p:cNvPr id="203" name="TextBox 202"/>
-          <p:cNvSpPr txBox="1"/>
-          <p:nvPr/>
-        </p:nvSpPr>
-        <p:spPr>
-          <a:xfrm>
-            <a:off x="3319272" y="4201668"/>
-            <a:ext cx="630936" cy="187452"/>
-          </a:xfrm>
-          <a:prstGeom prst="rect">
-            <a:avLst/>
-          </a:prstGeom>
-          <a:noFill/>
-        </p:spPr>
-        <p:txBody>
-          <a:bodyPr wrap="none" lIns="0" rIns="0" tIns="0" bIns="0" anchor="ctr">
-            <a:spAutoFit/>
-          </a:bodyPr>
-          <a:lstStyle/>
-          <a:p>
-            <a:pPr algn="ctr"/>
-            <a:r>
-              <a:rPr sz="700" b="0">
-                <a:solidFill>
-                  <a:srgbClr val="555555"/>
-                </a:solidFill>
-                <a:latin typeface="Calibri"/>
-              </a:rPr>
-              <a:t>01/06/2026</a:t>
-            </a:r>
-          </a:p>
-        </p:txBody>
-      </p:sp>
-      <p:sp>
-        <p:nvSpPr>
-          <p:cNvPr id="204" name="TextBox 203"/>
-          <p:cNvSpPr txBox="1"/>
-          <p:nvPr/>
-        </p:nvSpPr>
-        <p:spPr>
-          <a:xfrm>
-            <a:off x="3986783" y="4201668"/>
-            <a:ext cx="630936" cy="187452"/>
-          </a:xfrm>
-          <a:prstGeom prst="rect">
-            <a:avLst/>
-          </a:prstGeom>
-          <a:noFill/>
-        </p:spPr>
-        <p:txBody>
-          <a:bodyPr wrap="none" lIns="0" rIns="0" tIns="0" bIns="0" anchor="ctr">
-            <a:spAutoFit/>
-          </a:bodyPr>
-          <a:lstStyle/>
-          <a:p>
-            <a:pPr algn="ctr"/>
-            <a:r>
-              <a:rPr sz="700" b="0">
-                <a:solidFill>
-                  <a:srgbClr val="555555"/>
-                </a:solidFill>
-                <a:latin typeface="Calibri"/>
-              </a:rPr>
-              <a:t>23/09/2026</a:t>
-            </a:r>
-          </a:p>
-        </p:txBody>
-      </p:sp>
-      <p:sp>
-        <p:nvSpPr>
-          <p:cNvPr id="205" name="TextBox 204"/>
-          <p:cNvSpPr txBox="1"/>
-          <p:nvPr/>
-        </p:nvSpPr>
-        <p:spPr>
-          <a:xfrm>
-            <a:off x="4654296" y="4201668"/>
-            <a:ext cx="493775" cy="187452"/>
-          </a:xfrm>
-          <a:prstGeom prst="rect">
-            <a:avLst/>
-          </a:prstGeom>
-          <a:noFill/>
-        </p:spPr>
-        <p:txBody>
-          <a:bodyPr wrap="none" lIns="0" rIns="0" tIns="0" bIns="0" anchor="ctr">
-            <a:spAutoFit/>
-          </a:bodyPr>
-          <a:lstStyle/>
-          <a:p>
-            <a:pPr algn="ctr"/>
-            <a:r>
-              <a:rPr sz="700" b="1">
-                <a:solidFill>
-                  <a:srgbClr val="1A2340"/>
-                </a:solidFill>
-                <a:latin typeface="Calibri"/>
-              </a:rPr>
-              <a:t>31%</a:t>
-            </a:r>
-          </a:p>
-        </p:txBody>
-      </p:sp>
-      <p:sp>
-        <p:nvSpPr>
-          <p:cNvPr id="206" name="TextBox 205"/>
-          <p:cNvSpPr txBox="1"/>
-          <p:nvPr/>
-        </p:nvSpPr>
-        <p:spPr>
-          <a:xfrm>
-            <a:off x="5184648" y="4201668"/>
-            <a:ext cx="557784" cy="187452"/>
-          </a:xfrm>
-          <a:prstGeom prst="rect">
-            <a:avLst/>
-          </a:prstGeom>
-          <a:noFill/>
-        </p:spPr>
-        <p:txBody>
-          <a:bodyPr wrap="none" lIns="0" rIns="0" tIns="0" bIns="0" anchor="ctr">
-            <a:spAutoFit/>
-          </a:bodyPr>
-          <a:lstStyle/>
-          <a:p>
-            <a:pPr algn="ctr"/>
-            <a:r>
-              <a:rPr sz="700" b="0">
-                <a:solidFill>
-                  <a:srgbClr val="555555"/>
-                </a:solidFill>
-                <a:latin typeface="Calibri"/>
-              </a:rPr>
-              <a:t>34%</a:t>
-            </a:r>
-          </a:p>
-        </p:txBody>
-      </p:sp>
-      <p:sp>
-        <p:nvSpPr>
-          <p:cNvPr id="207" name="TextBox 206"/>
-          <p:cNvSpPr txBox="1"/>
-          <p:nvPr/>
-        </p:nvSpPr>
-        <p:spPr>
-          <a:xfrm>
-            <a:off x="7991856" y="4201668"/>
-            <a:ext cx="804672" cy="187452"/>
-          </a:xfrm>
-          <a:prstGeom prst="rect">
-            <a:avLst/>
-          </a:prstGeom>
-          <a:noFill/>
-        </p:spPr>
-        <p:txBody>
-          <a:bodyPr wrap="none" lIns="0" rIns="0" tIns="0" bIns="0" anchor="ctr">
-            <a:spAutoFit/>
-          </a:bodyPr>
-          <a:lstStyle/>
-          <a:p>
-            <a:pPr algn="ctr"/>
-            <a:r>
-              <a:rPr sz="700" b="1">
-                <a:solidFill>
-                  <a:srgbClr val="F59E0B"/>
-                </a:solidFill>
-                <a:latin typeface="Calibri"/>
-              </a:rPr>
-              <a:t>Riesgo de atraso</a:t>
-            </a:r>
-          </a:p>
-        </p:txBody>
-      </p:sp>
-      <p:sp>
-        <p:nvSpPr>
-          <p:cNvPr id="208" name="Rounded Rectangle 207"/>
-          <p:cNvSpPr/>
-          <p:nvPr/>
-        </p:nvSpPr>
-        <p:spPr>
-          <a:xfrm>
-            <a:off x="5806440" y="4243844"/>
-            <a:ext cx="1691640" cy="103098"/>
-          </a:xfrm>
-          <a:prstGeom prst="roundRect">
-            <a:avLst>
-              <a:gd name="adj" fmla="val 50000"/>
-            </a:avLst>
-          </a:prstGeom>
-          <a:pattFill prst="smGrid">
-            <a:fgClr>
-              <a:srgbClr val="F59E0B"/>
-            </a:fgClr>
-            <a:bgClr>
-              <a:srgbClr val="FFFFFF"/>
-            </a:bgClr>
-          </a:pattFill>
-          <a:ln>
-            <a:noFill/>
-          </a:ln>
-          <a:effectLst/>
-        </p:spPr>
-        <p:style>
-          <a:lnRef idx="1">
-            <a:schemeClr val="accent1"/>
-          </a:lnRef>
-          <a:fillRef idx="3">
-            <a:schemeClr val="accent1"/>
-          </a:fillRef>
-          <a:effectRef idx="2">
-            <a:schemeClr val="accent1"/>
-          </a:effectRef>
-          <a:fontRef idx="minor">
-            <a:schemeClr val="lt1"/>
-          </a:fontRef>
-        </p:style>
-        <p:txBody>
-          <a:bodyPr rtlCol="0" anchor="ctr"/>
-          <a:lstStyle/>
-          <a:p>
-            <a:pPr algn="ctr"/>
-          </a:p>
-        </p:txBody>
-      </p:sp>
-      <p:sp>
-        <p:nvSpPr>
-          <p:cNvPr id="209" name="Rounded Rectangle 208"/>
-          <p:cNvSpPr/>
-          <p:nvPr/>
-        </p:nvSpPr>
-        <p:spPr>
-          <a:xfrm>
-            <a:off x="5806440" y="4243844"/>
-            <a:ext cx="524408" cy="103098"/>
-          </a:xfrm>
-          <a:prstGeom prst="roundRect">
-            <a:avLst>
-              <a:gd name="adj" fmla="val 50000"/>
-            </a:avLst>
-          </a:prstGeom>
-          <a:solidFill>
-            <a:srgbClr val="F59E0B"/>
-          </a:solidFill>
-          <a:ln>
-            <a:noFill/>
-          </a:ln>
-          <a:effectLst>
-            <a:outerShdw blurRad="76200" dist="19050" dir="5400000" rotWithShape="0">
-              <a:srgbClr val="F59E0B">
-                <a:alpha val="55000"/>
-              </a:srgbClr>
-            </a:outerShdw>
-          </a:effectLst>
-        </p:spPr>
-        <p:style>
-          <a:lnRef idx="1">
-            <a:schemeClr val="accent1"/>
-          </a:lnRef>
-          <a:fillRef idx="3">
-            <a:schemeClr val="accent1"/>
-          </a:fillRef>
-          <a:effectRef idx="2">
-            <a:schemeClr val="accent1"/>
-          </a:effectRef>
-          <a:fontRef idx="minor">
-            <a:schemeClr val="lt1"/>
-          </a:fontRef>
-        </p:style>
-        <p:txBody>
-          <a:bodyPr rtlCol="0" anchor="ctr"/>
-          <a:lstStyle/>
-          <a:p>
-            <a:pPr algn="ctr"/>
-          </a:p>
-        </p:txBody>
-      </p:sp>
-      <p:sp>
-        <p:nvSpPr>
-          <p:cNvPr id="210" name="TextBox 209"/>
-          <p:cNvSpPr txBox="1"/>
-          <p:nvPr/>
-        </p:nvSpPr>
-        <p:spPr>
-          <a:xfrm>
-            <a:off x="7543800" y="4211840"/>
-            <a:ext cx="457200" cy="167106"/>
-          </a:xfrm>
-          <a:prstGeom prst="rect">
-            <a:avLst/>
-          </a:prstGeom>
-          <a:noFill/>
-        </p:spPr>
-        <p:txBody>
-          <a:bodyPr wrap="none" lIns="0" rIns="0" tIns="0" bIns="0">
-            <a:spAutoFit/>
-          </a:bodyPr>
-          <a:lstStyle/>
-          <a:p>
-            <a:pPr algn="l"/>
-            <a:r>
-              <a:rPr sz="800" b="1">
-                <a:solidFill>
-                  <a:srgbClr val="F59E0B"/>
-                </a:solidFill>
-                <a:latin typeface="Calibri"/>
-              </a:rPr>
-              <a:t>31%</a:t>
-            </a:r>
-          </a:p>
-        </p:txBody>
-      </p:sp>
-      <p:sp>
-        <p:nvSpPr>
-          <p:cNvPr id="211" name="Rectangle 210"/>
-          <p:cNvSpPr/>
-          <p:nvPr/>
-        </p:nvSpPr>
-        <p:spPr>
-          <a:xfrm>
-            <a:off x="73152" y="4389120"/>
-            <a:ext cx="8741664" cy="187452"/>
-          </a:xfrm>
-          <a:prstGeom prst="rect">
-            <a:avLst/>
-          </a:prstGeom>
-          <a:solidFill>
-            <a:srgbClr val="F5F7FA"/>
-          </a:solidFill>
-          <a:ln>
-            <a:noFill/>
-          </a:ln>
-          <a:effectLst/>
-        </p:spPr>
-        <p:style>
-          <a:lnRef idx="1">
-            <a:schemeClr val="accent1"/>
-          </a:lnRef>
-          <a:fillRef idx="3">
-            <a:schemeClr val="accent1"/>
-          </a:fillRef>
-          <a:effectRef idx="2">
-            <a:schemeClr val="accent1"/>
-          </a:effectRef>
-          <a:fontRef idx="minor">
-            <a:schemeClr val="lt1"/>
-          </a:fontRef>
-        </p:style>
-        <p:txBody>
-          <a:bodyPr rtlCol="0" anchor="ctr"/>
-          <a:lstStyle/>
-          <a:p>
-            <a:pPr algn="ctr"/>
-          </a:p>
-        </p:txBody>
-      </p:sp>
-      <p:sp>
-        <p:nvSpPr>
-          <p:cNvPr id="212" name="TextBox 211"/>
-          <p:cNvSpPr txBox="1"/>
-          <p:nvPr/>
-        </p:nvSpPr>
-        <p:spPr>
-          <a:xfrm>
-            <a:off x="91440" y="4389120"/>
-            <a:ext cx="722375" cy="187452"/>
-          </a:xfrm>
-          <a:prstGeom prst="rect">
-            <a:avLst/>
-          </a:prstGeom>
-          <a:noFill/>
-        </p:spPr>
-        <p:txBody>
-          <a:bodyPr wrap="none" lIns="0" rIns="0" tIns="0" bIns="0" anchor="ctr">
-            <a:spAutoFit/>
-          </a:bodyPr>
-          <a:lstStyle/>
-          <a:p>
-            <a:pPr algn="ctr"/>
-            <a:r>
-              <a:rPr sz="700" b="1">
-                <a:solidFill>
-                  <a:srgbClr val="1A2340"/>
-                </a:solidFill>
-                <a:latin typeface="Calibri"/>
-              </a:rPr>
-              <a:t>Proyecto</a:t>
-            </a:r>
-          </a:p>
-        </p:txBody>
-      </p:sp>
-      <p:sp>
-        <p:nvSpPr>
           <p:cNvPr id="213" name="TextBox 212"/>
           <p:cNvSpPr txBox="1"/>
           <p:nvPr/>
@@ -13639,7 +13639,7 @@
                 </a:solidFill>
                 <a:latin typeface="Calibri"/>
               </a:rPr>
-              <a:t>74%</a:t>
+              <a:t>86%</a:t>
             </a:r>
           </a:p>
         </p:txBody>
@@ -13774,7 +13774,7 @@
         <p:spPr>
           <a:xfrm>
             <a:off x="5806440" y="4431296"/>
-            <a:ext cx="1251813" cy="103098"/>
+            <a:ext cx="1454810" cy="103098"/>
           </a:xfrm>
           <a:prstGeom prst="roundRect">
             <a:avLst>
@@ -13847,7 +13847,7 @@
                 </a:solidFill>
                 <a:latin typeface="Calibri"/>
               </a:rPr>
-              <a:t>74%</a:t>
+              <a:t>86%</a:t>
             </a:r>
           </a:p>
         </p:txBody>

--- a/cierre_base.pptx
+++ b/cierre_base.pptx
@@ -5814,7 +5814,7 @@
                 </a:solidFill>
                 <a:latin typeface="Calibri"/>
               </a:rPr>
-              <a:t>1</a:t>
+              <a:t>2</a:t>
             </a:r>
           </a:p>
         </p:txBody>
@@ -5929,7 +5929,7 @@
                 </a:solidFill>
                 <a:latin typeface="Calibri"/>
               </a:rPr>
-              <a:t>4</a:t>
+              <a:t>3</a:t>
             </a:r>
           </a:p>
         </p:txBody>
@@ -6772,7 +6772,7 @@
                 </a:solidFill>
                 <a:latin typeface="Calibri"/>
               </a:rPr>
-              <a:t>02/07/2026</a:t>
+              <a:t>20/07/2026</a:t>
             </a:r>
           </a:p>
         </p:txBody>
@@ -6807,7 +6807,7 @@
                 </a:solidFill>
                 <a:latin typeface="Calibri"/>
               </a:rPr>
-              <a:t>80%</a:t>
+              <a:t>83%</a:t>
             </a:r>
           </a:p>
         </p:txBody>
@@ -6842,7 +6842,7 @@
                 </a:solidFill>
                 <a:latin typeface="Calibri"/>
               </a:rPr>
-              <a:t>100%</a:t>
+              <a:t>90%</a:t>
             </a:r>
           </a:p>
         </p:txBody>
@@ -6873,11 +6873,11 @@
             <a:r>
               <a:rPr sz="700" b="1">
                 <a:solidFill>
-                  <a:srgbClr val="EF4444"/>
+                  <a:srgbClr val="F59E0B"/>
                 </a:solidFill>
                 <a:latin typeface="Calibri"/>
               </a:rPr>
-              <a:t>Atrasado</a:t>
+              <a:t>Riesgo de atraso</a:t>
             </a:r>
           </a:p>
         </p:txBody>
@@ -6900,7 +6900,7 @@
           </a:prstGeom>
           <a:pattFill prst="smGrid">
             <a:fgClr>
-              <a:srgbClr val="EF4444"/>
+              <a:srgbClr val="F59E0B"/>
             </a:fgClr>
             <a:bgClr>
               <a:srgbClr val="FFFFFF"/>
@@ -6942,7 +6942,7 @@
         <p:spPr>
           <a:xfrm>
             <a:off x="5806440" y="1432064"/>
-            <a:ext cx="1353312" cy="103098"/>
+            <a:ext cx="1404061" cy="103098"/>
           </a:xfrm>
           <a:prstGeom prst="roundRect">
             <a:avLst>
@@ -6950,14 +6950,14 @@
             </a:avLst>
           </a:prstGeom>
           <a:solidFill>
-            <a:srgbClr val="EF4444"/>
+            <a:srgbClr val="F59E0B"/>
           </a:solidFill>
           <a:ln>
             <a:noFill/>
           </a:ln>
           <a:effectLst>
             <a:outerShdw blurRad="76200" dist="19050" dir="5400000" rotWithShape="0">
-              <a:srgbClr val="EF4444">
+              <a:srgbClr val="F59E0B">
                 <a:alpha val="55000"/>
               </a:srgbClr>
             </a:outerShdw>
@@ -7011,11 +7011,11 @@
             <a:r>
               <a:rPr sz="800" b="1">
                 <a:solidFill>
-                  <a:srgbClr val="EF4444"/>
+                  <a:srgbClr val="F59E0B"/>
                 </a:solidFill>
                 <a:latin typeface="Calibri"/>
               </a:rPr>
-              <a:t>80%</a:t>
+              <a:t>83%</a:t>
             </a:r>
           </a:p>
         </p:txBody>

--- a/cierre_base.pptx
+++ b/cierre_base.pptx
@@ -5353,7 +5353,7 @@
                 </a:solidFill>
                 <a:latin typeface="Arial Nova Light"/>
               </a:rPr>
-              <a:t>Cierre semanal del 9 de Julio al 16 de Julio</a:t>
+              <a:t>Cierre semanal del 2 de Julio al 9 de Julio</a:t>
             </a:r>
             <a:endParaRPr lang="es-MX" sz="1400" b="1" dirty="0">
               <a:solidFill>
@@ -6264,7 +6264,7 @@
                 </a:solidFill>
                 <a:latin typeface="Calibri"/>
               </a:rPr>
-              <a:t>Cierre semanal del 9 de Julio al 16 de Julio</a:t>
+              <a:t>Cierre semanal del 2 de Julio al 9 de Julio</a:t>
             </a:r>
           </a:p>
         </p:txBody>

--- a/cierre_base.pptx
+++ b/cierre_base.pptx
@@ -5814,7 +5814,7 @@
                 </a:solidFill>
                 <a:latin typeface="Calibri"/>
               </a:rPr>
-              <a:t>2</a:t>
+              <a:t>1</a:t>
             </a:r>
           </a:p>
         </p:txBody>
@@ -5929,7 +5929,7 @@
                 </a:solidFill>
                 <a:latin typeface="Calibri"/>
               </a:rPr>
-              <a:t>3</a:t>
+              <a:t>4</a:t>
             </a:r>
           </a:p>
         </p:txBody>
@@ -6807,7 +6807,7 @@
                 </a:solidFill>
                 <a:latin typeface="Calibri"/>
               </a:rPr>
-              <a:t>83%</a:t>
+              <a:t>53%</a:t>
             </a:r>
           </a:p>
         </p:txBody>
@@ -6873,11 +6873,11 @@
             <a:r>
               <a:rPr sz="700" b="1">
                 <a:solidFill>
-                  <a:srgbClr val="F59E0B"/>
+                  <a:srgbClr val="EF4444"/>
                 </a:solidFill>
                 <a:latin typeface="Calibri"/>
               </a:rPr>
-              <a:t>Riesgo de atraso</a:t>
+              <a:t>Atrasado</a:t>
             </a:r>
           </a:p>
         </p:txBody>
@@ -6900,7 +6900,7 @@
           </a:prstGeom>
           <a:pattFill prst="smGrid">
             <a:fgClr>
-              <a:srgbClr val="F59E0B"/>
+              <a:srgbClr val="EF4444"/>
             </a:fgClr>
             <a:bgClr>
               <a:srgbClr val="FFFFFF"/>
@@ -6942,7 +6942,7 @@
         <p:spPr>
           <a:xfrm>
             <a:off x="5806440" y="1432064"/>
-            <a:ext cx="1404061" cy="103098"/>
+            <a:ext cx="896569" cy="103098"/>
           </a:xfrm>
           <a:prstGeom prst="roundRect">
             <a:avLst>
@@ -6950,14 +6950,14 @@
             </a:avLst>
           </a:prstGeom>
           <a:solidFill>
-            <a:srgbClr val="F59E0B"/>
+            <a:srgbClr val="EF4444"/>
           </a:solidFill>
           <a:ln>
             <a:noFill/>
           </a:ln>
           <a:effectLst>
             <a:outerShdw blurRad="76200" dist="19050" dir="5400000" rotWithShape="0">
-              <a:srgbClr val="F59E0B">
+              <a:srgbClr val="EF4444">
                 <a:alpha val="55000"/>
               </a:srgbClr>
             </a:outerShdw>
@@ -7011,11 +7011,11 @@
             <a:r>
               <a:rPr sz="800" b="1">
                 <a:solidFill>
-                  <a:srgbClr val="F59E0B"/>
+                  <a:srgbClr val="EF4444"/>
                 </a:solidFill>
                 <a:latin typeface="Calibri"/>
               </a:rPr>
-              <a:t>83%</a:t>
+              <a:t>53%</a:t>
             </a:r>
           </a:p>
         </p:txBody>

--- a/cierre_base.pptx
+++ b/cierre_base.pptx
@@ -5353,7 +5353,7 @@
                 </a:solidFill>
                 <a:latin typeface="Arial Nova Light"/>
               </a:rPr>
-              <a:t>Cierre semanal del 2 de Julio al 9 de Julio</a:t>
+              <a:t>Cierre semanal del 9 de Julio al 16 de Julio</a:t>
             </a:r>
             <a:endParaRPr lang="es-MX" sz="1400" b="1" dirty="0">
               <a:solidFill>
@@ -5699,7 +5699,7 @@
                 </a:solidFill>
                 <a:latin typeface="Calibri"/>
               </a:rPr>
-              <a:t>4</a:t>
+              <a:t>3</a:t>
             </a:r>
           </a:p>
         </p:txBody>
@@ -5814,7 +5814,7 @@
                 </a:solidFill>
                 <a:latin typeface="Calibri"/>
               </a:rPr>
-              <a:t>1</a:t>
+              <a:t>2</a:t>
             </a:r>
           </a:p>
         </p:txBody>
@@ -6264,7 +6264,7 @@
                 </a:solidFill>
                 <a:latin typeface="Calibri"/>
               </a:rPr>
-              <a:t>Cierre semanal del 2 de Julio al 9 de Julio</a:t>
+              <a:t>Cierre semanal del 9 de Julio al 16 de Julio</a:t>
             </a:r>
           </a:p>
         </p:txBody>
@@ -6667,7 +6667,7 @@
                 </a:solidFill>
                 <a:latin typeface="Calibri"/>
               </a:rPr>
-              <a:t>Proyecto</a:t>
+              <a:t>ABOGADO</a:t>
             </a:r>
           </a:p>
         </p:txBody>
@@ -6807,7 +6807,7 @@
                 </a:solidFill>
                 <a:latin typeface="Calibri"/>
               </a:rPr>
-              <a:t>53%</a:t>
+              <a:t>78%</a:t>
             </a:r>
           </a:p>
         </p:txBody>
@@ -6842,7 +6842,7 @@
                 </a:solidFill>
                 <a:latin typeface="Calibri"/>
               </a:rPr>
-              <a:t>90%</a:t>
+              <a:t>94%</a:t>
             </a:r>
           </a:p>
         </p:txBody>
@@ -6942,7 +6942,7 @@
         <p:spPr>
           <a:xfrm>
             <a:off x="5806440" y="1432064"/>
-            <a:ext cx="896569" cy="103098"/>
+            <a:ext cx="1319479" cy="103098"/>
           </a:xfrm>
           <a:prstGeom prst="roundRect">
             <a:avLst>
@@ -7015,7 +7015,7 @@
                 </a:solidFill>
                 <a:latin typeface="Calibri"/>
               </a:rPr>
-              <a:t>53%</a:t>
+              <a:t>78%</a:t>
             </a:r>
           </a:p>
         </p:txBody>
@@ -7094,7 +7094,7 @@
                 </a:solidFill>
                 <a:latin typeface="Calibri"/>
               </a:rPr>
-              <a:t>Proyecto</a:t>
+              <a:t>Mejoras</a:t>
             </a:r>
           </a:p>
         </p:txBody>
@@ -7521,7 +7521,7 @@
                 </a:solidFill>
                 <a:latin typeface="Calibri"/>
               </a:rPr>
-              <a:t>Proyecto</a:t>
+              <a:t>Mejoras</a:t>
             </a:r>
           </a:p>
         </p:txBody>
@@ -7948,7 +7948,7 @@
                 </a:solidFill>
                 <a:latin typeface="Calibri"/>
               </a:rPr>
-              <a:t>Proyecto</a:t>
+              <a:t>Mejoras</a:t>
             </a:r>
           </a:p>
         </p:txBody>
@@ -8550,7 +8550,7 @@
                 </a:solidFill>
                 <a:latin typeface="Calibri"/>
               </a:rPr>
-              <a:t>93%</a:t>
+              <a:t>94%</a:t>
             </a:r>
           </a:p>
         </p:txBody>
@@ -9229,7 +9229,7 @@
                 </a:solidFill>
                 <a:latin typeface="Calibri"/>
               </a:rPr>
-              <a:t>Proyecto</a:t>
+              <a:t>Mejoras</a:t>
             </a:r>
           </a:p>
         </p:txBody>
@@ -10083,7 +10083,7 @@
                 </a:solidFill>
                 <a:latin typeface="Calibri"/>
               </a:rPr>
-              <a:t>Proyecto</a:t>
+              <a:t>Mejoras</a:t>
             </a:r>
           </a:p>
         </p:txBody>
@@ -11791,7 +11791,7 @@
                 </a:solidFill>
                 <a:latin typeface="Calibri"/>
               </a:rPr>
-              <a:t>Proyecto</a:t>
+              <a:t>Mejoras</a:t>
             </a:r>
           </a:p>
         </p:txBody>
@@ -11966,7 +11966,7 @@
                 </a:solidFill>
                 <a:latin typeface="Calibri"/>
               </a:rPr>
-              <a:t>66%</a:t>
+              <a:t>69%</a:t>
             </a:r>
           </a:p>
         </p:txBody>
@@ -12393,7 +12393,7 @@
                 </a:solidFill>
                 <a:latin typeface="Calibri"/>
               </a:rPr>
-              <a:t>89%</a:t>
+              <a:t>93%</a:t>
             </a:r>
           </a:p>
         </p:txBody>
@@ -12407,6 +12407,1287 @@
         <p:spPr>
           <a:xfrm>
             <a:off x="7991856" y="3826764"/>
+            <a:ext cx="804672" cy="187452"/>
+          </a:xfrm>
+          <a:prstGeom prst="rect">
+            <a:avLst/>
+          </a:prstGeom>
+          <a:noFill/>
+        </p:spPr>
+        <p:txBody>
+          <a:bodyPr wrap="none" lIns="0" rIns="0" tIns="0" bIns="0" anchor="ctr">
+            <a:spAutoFit/>
+          </a:bodyPr>
+          <a:lstStyle/>
+          <a:p>
+            <a:pPr algn="ctr"/>
+            <a:r>
+              <a:rPr sz="700" b="1">
+                <a:solidFill>
+                  <a:srgbClr val="F59E0B"/>
+                </a:solidFill>
+                <a:latin typeface="Calibri"/>
+              </a:rPr>
+              <a:t>Riesgo de atraso</a:t>
+            </a:r>
+          </a:p>
+        </p:txBody>
+      </p:sp>
+      <p:sp>
+        <p:nvSpPr>
+          <p:cNvPr id="186" name="Rounded Rectangle 185"/>
+          <p:cNvSpPr/>
+          <p:nvPr/>
+        </p:nvSpPr>
+        <p:spPr>
+          <a:xfrm>
+            <a:off x="5806440" y="3868940"/>
+            <a:ext cx="1691640" cy="103098"/>
+          </a:xfrm>
+          <a:prstGeom prst="roundRect">
+            <a:avLst>
+              <a:gd name="adj" fmla="val 50000"/>
+            </a:avLst>
+          </a:prstGeom>
+          <a:pattFill prst="smGrid">
+            <a:fgClr>
+              <a:srgbClr val="F59E0B"/>
+            </a:fgClr>
+            <a:bgClr>
+              <a:srgbClr val="FFFFFF"/>
+            </a:bgClr>
+          </a:pattFill>
+          <a:ln>
+            <a:noFill/>
+          </a:ln>
+          <a:effectLst/>
+        </p:spPr>
+        <p:style>
+          <a:lnRef idx="1">
+            <a:schemeClr val="accent1"/>
+          </a:lnRef>
+          <a:fillRef idx="3">
+            <a:schemeClr val="accent1"/>
+          </a:fillRef>
+          <a:effectRef idx="2">
+            <a:schemeClr val="accent1"/>
+          </a:effectRef>
+          <a:fontRef idx="minor">
+            <a:schemeClr val="lt1"/>
+          </a:fontRef>
+        </p:style>
+        <p:txBody>
+          <a:bodyPr rtlCol="0" anchor="ctr"/>
+          <a:lstStyle/>
+          <a:p>
+            <a:pPr algn="ctr"/>
+          </a:p>
+        </p:txBody>
+      </p:sp>
+      <p:sp>
+        <p:nvSpPr>
+          <p:cNvPr id="187" name="Rounded Rectangle 186"/>
+          <p:cNvSpPr/>
+          <p:nvPr/>
+        </p:nvSpPr>
+        <p:spPr>
+          <a:xfrm>
+            <a:off x="5806440" y="3868940"/>
+            <a:ext cx="1539392" cy="103098"/>
+          </a:xfrm>
+          <a:prstGeom prst="roundRect">
+            <a:avLst>
+              <a:gd name="adj" fmla="val 50000"/>
+            </a:avLst>
+          </a:prstGeom>
+          <a:solidFill>
+            <a:srgbClr val="F59E0B"/>
+          </a:solidFill>
+          <a:ln>
+            <a:noFill/>
+          </a:ln>
+          <a:effectLst>
+            <a:outerShdw blurRad="76200" dist="19050" dir="5400000" rotWithShape="0">
+              <a:srgbClr val="F59E0B">
+                <a:alpha val="55000"/>
+              </a:srgbClr>
+            </a:outerShdw>
+          </a:effectLst>
+        </p:spPr>
+        <p:style>
+          <a:lnRef idx="1">
+            <a:schemeClr val="accent1"/>
+          </a:lnRef>
+          <a:fillRef idx="3">
+            <a:schemeClr val="accent1"/>
+          </a:fillRef>
+          <a:effectRef idx="2">
+            <a:schemeClr val="accent1"/>
+          </a:effectRef>
+          <a:fontRef idx="minor">
+            <a:schemeClr val="lt1"/>
+          </a:fontRef>
+        </p:style>
+        <p:txBody>
+          <a:bodyPr rtlCol="0" anchor="ctr"/>
+          <a:lstStyle/>
+          <a:p>
+            <a:pPr algn="ctr"/>
+          </a:p>
+        </p:txBody>
+      </p:sp>
+      <p:sp>
+        <p:nvSpPr>
+          <p:cNvPr id="188" name="TextBox 187"/>
+          <p:cNvSpPr txBox="1"/>
+          <p:nvPr/>
+        </p:nvSpPr>
+        <p:spPr>
+          <a:xfrm>
+            <a:off x="7543800" y="3836936"/>
+            <a:ext cx="457200" cy="167106"/>
+          </a:xfrm>
+          <a:prstGeom prst="rect">
+            <a:avLst/>
+          </a:prstGeom>
+          <a:noFill/>
+        </p:spPr>
+        <p:txBody>
+          <a:bodyPr wrap="none" lIns="0" rIns="0" tIns="0" bIns="0">
+            <a:spAutoFit/>
+          </a:bodyPr>
+          <a:lstStyle/>
+          <a:p>
+            <a:pPr algn="l"/>
+            <a:r>
+              <a:rPr sz="800" b="1">
+                <a:solidFill>
+                  <a:srgbClr val="F59E0B"/>
+                </a:solidFill>
+                <a:latin typeface="Calibri"/>
+              </a:rPr>
+              <a:t>91%</a:t>
+            </a:r>
+          </a:p>
+        </p:txBody>
+      </p:sp>
+      <p:sp>
+        <p:nvSpPr>
+          <p:cNvPr id="189" name="Rectangle 188"/>
+          <p:cNvSpPr/>
+          <p:nvPr/>
+        </p:nvSpPr>
+        <p:spPr>
+          <a:xfrm>
+            <a:off x="73152" y="4014215"/>
+            <a:ext cx="8741664" cy="187452"/>
+          </a:xfrm>
+          <a:prstGeom prst="rect">
+            <a:avLst/>
+          </a:prstGeom>
+          <a:solidFill>
+            <a:srgbClr val="F5F7FA"/>
+          </a:solidFill>
+          <a:ln>
+            <a:noFill/>
+          </a:ln>
+          <a:effectLst/>
+        </p:spPr>
+        <p:style>
+          <a:lnRef idx="1">
+            <a:schemeClr val="accent1"/>
+          </a:lnRef>
+          <a:fillRef idx="3">
+            <a:schemeClr val="accent1"/>
+          </a:fillRef>
+          <a:effectRef idx="2">
+            <a:schemeClr val="accent1"/>
+          </a:effectRef>
+          <a:fontRef idx="minor">
+            <a:schemeClr val="lt1"/>
+          </a:fontRef>
+        </p:style>
+        <p:txBody>
+          <a:bodyPr rtlCol="0" anchor="ctr"/>
+          <a:lstStyle/>
+          <a:p>
+            <a:pPr algn="ctr"/>
+          </a:p>
+        </p:txBody>
+      </p:sp>
+      <p:sp>
+        <p:nvSpPr>
+          <p:cNvPr id="190" name="TextBox 189"/>
+          <p:cNvSpPr txBox="1"/>
+          <p:nvPr/>
+        </p:nvSpPr>
+        <p:spPr>
+          <a:xfrm>
+            <a:off x="91440" y="4014215"/>
+            <a:ext cx="722375" cy="187452"/>
+          </a:xfrm>
+          <a:prstGeom prst="rect">
+            <a:avLst/>
+          </a:prstGeom>
+          <a:noFill/>
+        </p:spPr>
+        <p:txBody>
+          <a:bodyPr wrap="none" lIns="0" rIns="0" tIns="0" bIns="0" anchor="ctr">
+            <a:spAutoFit/>
+          </a:bodyPr>
+          <a:lstStyle/>
+          <a:p>
+            <a:pPr algn="ctr"/>
+            <a:r>
+              <a:rPr sz="700" b="1">
+                <a:solidFill>
+                  <a:srgbClr val="1A2340"/>
+                </a:solidFill>
+                <a:latin typeface="Calibri"/>
+              </a:rPr>
+              <a:t>Mejoras</a:t>
+            </a:r>
+          </a:p>
+        </p:txBody>
+      </p:sp>
+      <p:sp>
+        <p:nvSpPr>
+          <p:cNvPr id="191" name="TextBox 190"/>
+          <p:cNvSpPr txBox="1"/>
+          <p:nvPr/>
+        </p:nvSpPr>
+        <p:spPr>
+          <a:xfrm>
+            <a:off x="850392" y="4014215"/>
+            <a:ext cx="2432304" cy="187452"/>
+          </a:xfrm>
+          <a:prstGeom prst="rect">
+            <a:avLst/>
+          </a:prstGeom>
+          <a:noFill/>
+        </p:spPr>
+        <p:txBody>
+          <a:bodyPr wrap="none" lIns="0" rIns="0" tIns="0" bIns="0" anchor="ctr">
+            <a:spAutoFit/>
+          </a:bodyPr>
+          <a:lstStyle/>
+          <a:p>
+            <a:pPr algn="l"/>
+            <a:r>
+              <a:rPr sz="700" b="0">
+                <a:solidFill>
+                  <a:srgbClr val="1A2340"/>
+                </a:solidFill>
+                <a:latin typeface="Calibri"/>
+              </a:rPr>
+              <a:t>Contabilidad || Integración Mecanica-SAE (Fase…</a:t>
+            </a:r>
+          </a:p>
+        </p:txBody>
+      </p:sp>
+      <p:sp>
+        <p:nvSpPr>
+          <p:cNvPr id="192" name="TextBox 191"/>
+          <p:cNvSpPr txBox="1"/>
+          <p:nvPr/>
+        </p:nvSpPr>
+        <p:spPr>
+          <a:xfrm>
+            <a:off x="3319272" y="4014215"/>
+            <a:ext cx="630936" cy="187452"/>
+          </a:xfrm>
+          <a:prstGeom prst="rect">
+            <a:avLst/>
+          </a:prstGeom>
+          <a:noFill/>
+        </p:spPr>
+        <p:txBody>
+          <a:bodyPr wrap="none" lIns="0" rIns="0" tIns="0" bIns="0" anchor="ctr">
+            <a:spAutoFit/>
+          </a:bodyPr>
+          <a:lstStyle/>
+          <a:p>
+            <a:pPr algn="ctr"/>
+            <a:r>
+              <a:rPr sz="700" b="0">
+                <a:solidFill>
+                  <a:srgbClr val="555555"/>
+                </a:solidFill>
+                <a:latin typeface="Calibri"/>
+              </a:rPr>
+              <a:t>21/04/2026</a:t>
+            </a:r>
+          </a:p>
+        </p:txBody>
+      </p:sp>
+      <p:sp>
+        <p:nvSpPr>
+          <p:cNvPr id="193" name="TextBox 192"/>
+          <p:cNvSpPr txBox="1"/>
+          <p:nvPr/>
+        </p:nvSpPr>
+        <p:spPr>
+          <a:xfrm>
+            <a:off x="3986783" y="4014215"/>
+            <a:ext cx="630936" cy="187452"/>
+          </a:xfrm>
+          <a:prstGeom prst="rect">
+            <a:avLst/>
+          </a:prstGeom>
+          <a:noFill/>
+        </p:spPr>
+        <p:txBody>
+          <a:bodyPr wrap="none" lIns="0" rIns="0" tIns="0" bIns="0" anchor="ctr">
+            <a:spAutoFit/>
+          </a:bodyPr>
+          <a:lstStyle/>
+          <a:p>
+            <a:pPr algn="ctr"/>
+            <a:r>
+              <a:rPr sz="700" b="0">
+                <a:solidFill>
+                  <a:srgbClr val="555555"/>
+                </a:solidFill>
+                <a:latin typeface="Calibri"/>
+              </a:rPr>
+              <a:t>12/06/2026</a:t>
+            </a:r>
+          </a:p>
+        </p:txBody>
+      </p:sp>
+      <p:sp>
+        <p:nvSpPr>
+          <p:cNvPr id="194" name="TextBox 193"/>
+          <p:cNvSpPr txBox="1"/>
+          <p:nvPr/>
+        </p:nvSpPr>
+        <p:spPr>
+          <a:xfrm>
+            <a:off x="4654296" y="4014215"/>
+            <a:ext cx="493775" cy="187452"/>
+          </a:xfrm>
+          <a:prstGeom prst="rect">
+            <a:avLst/>
+          </a:prstGeom>
+          <a:noFill/>
+        </p:spPr>
+        <p:txBody>
+          <a:bodyPr wrap="none" lIns="0" rIns="0" tIns="0" bIns="0" anchor="ctr">
+            <a:spAutoFit/>
+          </a:bodyPr>
+          <a:lstStyle/>
+          <a:p>
+            <a:pPr algn="ctr"/>
+            <a:r>
+              <a:rPr sz="700" b="1">
+                <a:solidFill>
+                  <a:srgbClr val="1A2340"/>
+                </a:solidFill>
+                <a:latin typeface="Calibri"/>
+              </a:rPr>
+              <a:t>99%</a:t>
+            </a:r>
+          </a:p>
+        </p:txBody>
+      </p:sp>
+      <p:sp>
+        <p:nvSpPr>
+          <p:cNvPr id="195" name="TextBox 194"/>
+          <p:cNvSpPr txBox="1"/>
+          <p:nvPr/>
+        </p:nvSpPr>
+        <p:spPr>
+          <a:xfrm>
+            <a:off x="5184648" y="4014215"/>
+            <a:ext cx="557784" cy="187452"/>
+          </a:xfrm>
+          <a:prstGeom prst="rect">
+            <a:avLst/>
+          </a:prstGeom>
+          <a:noFill/>
+        </p:spPr>
+        <p:txBody>
+          <a:bodyPr wrap="none" lIns="0" rIns="0" tIns="0" bIns="0" anchor="ctr">
+            <a:spAutoFit/>
+          </a:bodyPr>
+          <a:lstStyle/>
+          <a:p>
+            <a:pPr algn="ctr"/>
+            <a:r>
+              <a:rPr sz="700" b="0">
+                <a:solidFill>
+                  <a:srgbClr val="555555"/>
+                </a:solidFill>
+                <a:latin typeface="Calibri"/>
+              </a:rPr>
+              <a:t>100%</a:t>
+            </a:r>
+          </a:p>
+        </p:txBody>
+      </p:sp>
+      <p:sp>
+        <p:nvSpPr>
+          <p:cNvPr id="196" name="TextBox 195"/>
+          <p:cNvSpPr txBox="1"/>
+          <p:nvPr/>
+        </p:nvSpPr>
+        <p:spPr>
+          <a:xfrm>
+            <a:off x="7991856" y="4014215"/>
+            <a:ext cx="804672" cy="187452"/>
+          </a:xfrm>
+          <a:prstGeom prst="rect">
+            <a:avLst/>
+          </a:prstGeom>
+          <a:noFill/>
+        </p:spPr>
+        <p:txBody>
+          <a:bodyPr wrap="none" lIns="0" rIns="0" tIns="0" bIns="0" anchor="ctr">
+            <a:spAutoFit/>
+          </a:bodyPr>
+          <a:lstStyle/>
+          <a:p>
+            <a:pPr algn="ctr"/>
+            <a:r>
+              <a:rPr sz="700" b="1">
+                <a:solidFill>
+                  <a:srgbClr val="EF4444"/>
+                </a:solidFill>
+                <a:latin typeface="Calibri"/>
+              </a:rPr>
+              <a:t>Atrasado</a:t>
+            </a:r>
+          </a:p>
+        </p:txBody>
+      </p:sp>
+      <p:sp>
+        <p:nvSpPr>
+          <p:cNvPr id="197" name="Rounded Rectangle 196"/>
+          <p:cNvSpPr/>
+          <p:nvPr/>
+        </p:nvSpPr>
+        <p:spPr>
+          <a:xfrm>
+            <a:off x="5806440" y="4056392"/>
+            <a:ext cx="1691640" cy="103098"/>
+          </a:xfrm>
+          <a:prstGeom prst="roundRect">
+            <a:avLst>
+              <a:gd name="adj" fmla="val 50000"/>
+            </a:avLst>
+          </a:prstGeom>
+          <a:pattFill prst="smGrid">
+            <a:fgClr>
+              <a:srgbClr val="EF4444"/>
+            </a:fgClr>
+            <a:bgClr>
+              <a:srgbClr val="FFFFFF"/>
+            </a:bgClr>
+          </a:pattFill>
+          <a:ln>
+            <a:noFill/>
+          </a:ln>
+          <a:effectLst/>
+        </p:spPr>
+        <p:style>
+          <a:lnRef idx="1">
+            <a:schemeClr val="accent1"/>
+          </a:lnRef>
+          <a:fillRef idx="3">
+            <a:schemeClr val="accent1"/>
+          </a:fillRef>
+          <a:effectRef idx="2">
+            <a:schemeClr val="accent1"/>
+          </a:effectRef>
+          <a:fontRef idx="minor">
+            <a:schemeClr val="lt1"/>
+          </a:fontRef>
+        </p:style>
+        <p:txBody>
+          <a:bodyPr rtlCol="0" anchor="ctr"/>
+          <a:lstStyle/>
+          <a:p>
+            <a:pPr algn="ctr"/>
+          </a:p>
+        </p:txBody>
+      </p:sp>
+      <p:sp>
+        <p:nvSpPr>
+          <p:cNvPr id="198" name="Rounded Rectangle 197"/>
+          <p:cNvSpPr/>
+          <p:nvPr/>
+        </p:nvSpPr>
+        <p:spPr>
+          <a:xfrm>
+            <a:off x="5806440" y="4056392"/>
+            <a:ext cx="1674723" cy="103098"/>
+          </a:xfrm>
+          <a:prstGeom prst="roundRect">
+            <a:avLst>
+              <a:gd name="adj" fmla="val 50000"/>
+            </a:avLst>
+          </a:prstGeom>
+          <a:solidFill>
+            <a:srgbClr val="EF4444"/>
+          </a:solidFill>
+          <a:ln>
+            <a:noFill/>
+          </a:ln>
+          <a:effectLst>
+            <a:outerShdw blurRad="76200" dist="19050" dir="5400000" rotWithShape="0">
+              <a:srgbClr val="EF4444">
+                <a:alpha val="55000"/>
+              </a:srgbClr>
+            </a:outerShdw>
+          </a:effectLst>
+        </p:spPr>
+        <p:style>
+          <a:lnRef idx="1">
+            <a:schemeClr val="accent1"/>
+          </a:lnRef>
+          <a:fillRef idx="3">
+            <a:schemeClr val="accent1"/>
+          </a:fillRef>
+          <a:effectRef idx="2">
+            <a:schemeClr val="accent1"/>
+          </a:effectRef>
+          <a:fontRef idx="minor">
+            <a:schemeClr val="lt1"/>
+          </a:fontRef>
+        </p:style>
+        <p:txBody>
+          <a:bodyPr rtlCol="0" anchor="ctr"/>
+          <a:lstStyle/>
+          <a:p>
+            <a:pPr algn="ctr"/>
+          </a:p>
+        </p:txBody>
+      </p:sp>
+      <p:sp>
+        <p:nvSpPr>
+          <p:cNvPr id="199" name="TextBox 198"/>
+          <p:cNvSpPr txBox="1"/>
+          <p:nvPr/>
+        </p:nvSpPr>
+        <p:spPr>
+          <a:xfrm>
+            <a:off x="7543800" y="4024388"/>
+            <a:ext cx="457200" cy="167106"/>
+          </a:xfrm>
+          <a:prstGeom prst="rect">
+            <a:avLst/>
+          </a:prstGeom>
+          <a:noFill/>
+        </p:spPr>
+        <p:txBody>
+          <a:bodyPr wrap="none" lIns="0" rIns="0" tIns="0" bIns="0">
+            <a:spAutoFit/>
+          </a:bodyPr>
+          <a:lstStyle/>
+          <a:p>
+            <a:pPr algn="l"/>
+            <a:r>
+              <a:rPr sz="800" b="1">
+                <a:solidFill>
+                  <a:srgbClr val="EF4444"/>
+                </a:solidFill>
+                <a:latin typeface="Calibri"/>
+              </a:rPr>
+              <a:t>99%</a:t>
+            </a:r>
+          </a:p>
+        </p:txBody>
+      </p:sp>
+      <p:sp>
+        <p:nvSpPr>
+          <p:cNvPr id="200" name="Rectangle 199"/>
+          <p:cNvSpPr/>
+          <p:nvPr/>
+        </p:nvSpPr>
+        <p:spPr>
+          <a:xfrm>
+            <a:off x="73152" y="4201668"/>
+            <a:ext cx="8741664" cy="187452"/>
+          </a:xfrm>
+          <a:prstGeom prst="rect">
+            <a:avLst/>
+          </a:prstGeom>
+          <a:solidFill>
+            <a:srgbClr val="FFFFFF"/>
+          </a:solidFill>
+          <a:ln>
+            <a:noFill/>
+          </a:ln>
+          <a:effectLst/>
+        </p:spPr>
+        <p:style>
+          <a:lnRef idx="1">
+            <a:schemeClr val="accent1"/>
+          </a:lnRef>
+          <a:fillRef idx="3">
+            <a:schemeClr val="accent1"/>
+          </a:fillRef>
+          <a:effectRef idx="2">
+            <a:schemeClr val="accent1"/>
+          </a:effectRef>
+          <a:fontRef idx="minor">
+            <a:schemeClr val="lt1"/>
+          </a:fontRef>
+        </p:style>
+        <p:txBody>
+          <a:bodyPr rtlCol="0" anchor="ctr"/>
+          <a:lstStyle/>
+          <a:p>
+            <a:pPr algn="ctr"/>
+          </a:p>
+        </p:txBody>
+      </p:sp>
+      <p:sp>
+        <p:nvSpPr>
+          <p:cNvPr id="201" name="TextBox 200"/>
+          <p:cNvSpPr txBox="1"/>
+          <p:nvPr/>
+        </p:nvSpPr>
+        <p:spPr>
+          <a:xfrm>
+            <a:off x="91440" y="4201668"/>
+            <a:ext cx="722375" cy="187452"/>
+          </a:xfrm>
+          <a:prstGeom prst="rect">
+            <a:avLst/>
+          </a:prstGeom>
+          <a:noFill/>
+        </p:spPr>
+        <p:txBody>
+          <a:bodyPr wrap="none" lIns="0" rIns="0" tIns="0" bIns="0" anchor="ctr">
+            <a:spAutoFit/>
+          </a:bodyPr>
+          <a:lstStyle/>
+          <a:p>
+            <a:pPr algn="ctr"/>
+            <a:r>
+              <a:rPr sz="700" b="1">
+                <a:solidFill>
+                  <a:srgbClr val="1A2340"/>
+                </a:solidFill>
+                <a:latin typeface="Calibri"/>
+              </a:rPr>
+              <a:t>Proyecto</a:t>
+            </a:r>
+          </a:p>
+        </p:txBody>
+      </p:sp>
+      <p:sp>
+        <p:nvSpPr>
+          <p:cNvPr id="202" name="TextBox 201"/>
+          <p:cNvSpPr txBox="1"/>
+          <p:nvPr/>
+        </p:nvSpPr>
+        <p:spPr>
+          <a:xfrm>
+            <a:off x="850392" y="4201668"/>
+            <a:ext cx="2432304" cy="187452"/>
+          </a:xfrm>
+          <a:prstGeom prst="rect">
+            <a:avLst/>
+          </a:prstGeom>
+          <a:noFill/>
+        </p:spPr>
+        <p:txBody>
+          <a:bodyPr wrap="none" lIns="0" rIns="0" tIns="0" bIns="0" anchor="ctr">
+            <a:spAutoFit/>
+          </a:bodyPr>
+          <a:lstStyle/>
+          <a:p>
+            <a:pPr algn="l"/>
+            <a:r>
+              <a:rPr sz="700" b="0">
+                <a:solidFill>
+                  <a:srgbClr val="1A2340"/>
+                </a:solidFill>
+                <a:latin typeface="Calibri"/>
+              </a:rPr>
+              <a:t>DTI || Integración de sistemas</a:t>
+            </a:r>
+          </a:p>
+        </p:txBody>
+      </p:sp>
+      <p:sp>
+        <p:nvSpPr>
+          <p:cNvPr id="203" name="TextBox 202"/>
+          <p:cNvSpPr txBox="1"/>
+          <p:nvPr/>
+        </p:nvSpPr>
+        <p:spPr>
+          <a:xfrm>
+            <a:off x="3319272" y="4201668"/>
+            <a:ext cx="630936" cy="187452"/>
+          </a:xfrm>
+          <a:prstGeom prst="rect">
+            <a:avLst/>
+          </a:prstGeom>
+          <a:noFill/>
+        </p:spPr>
+        <p:txBody>
+          <a:bodyPr wrap="none" lIns="0" rIns="0" tIns="0" bIns="0" anchor="ctr">
+            <a:spAutoFit/>
+          </a:bodyPr>
+          <a:lstStyle/>
+          <a:p>
+            <a:pPr algn="ctr"/>
+            <a:r>
+              <a:rPr sz="700" b="0">
+                <a:solidFill>
+                  <a:srgbClr val="555555"/>
+                </a:solidFill>
+                <a:latin typeface="Calibri"/>
+              </a:rPr>
+              <a:t>01/06/2026</a:t>
+            </a:r>
+          </a:p>
+        </p:txBody>
+      </p:sp>
+      <p:sp>
+        <p:nvSpPr>
+          <p:cNvPr id="204" name="TextBox 203"/>
+          <p:cNvSpPr txBox="1"/>
+          <p:nvPr/>
+        </p:nvSpPr>
+        <p:spPr>
+          <a:xfrm>
+            <a:off x="3986783" y="4201668"/>
+            <a:ext cx="630936" cy="187452"/>
+          </a:xfrm>
+          <a:prstGeom prst="rect">
+            <a:avLst/>
+          </a:prstGeom>
+          <a:noFill/>
+        </p:spPr>
+        <p:txBody>
+          <a:bodyPr wrap="none" lIns="0" rIns="0" tIns="0" bIns="0" anchor="ctr">
+            <a:spAutoFit/>
+          </a:bodyPr>
+          <a:lstStyle/>
+          <a:p>
+            <a:pPr algn="ctr"/>
+            <a:r>
+              <a:rPr sz="700" b="0">
+                <a:solidFill>
+                  <a:srgbClr val="555555"/>
+                </a:solidFill>
+                <a:latin typeface="Calibri"/>
+              </a:rPr>
+              <a:t>23/09/2026</a:t>
+            </a:r>
+          </a:p>
+        </p:txBody>
+      </p:sp>
+      <p:sp>
+        <p:nvSpPr>
+          <p:cNvPr id="205" name="TextBox 204"/>
+          <p:cNvSpPr txBox="1"/>
+          <p:nvPr/>
+        </p:nvSpPr>
+        <p:spPr>
+          <a:xfrm>
+            <a:off x="4654296" y="4201668"/>
+            <a:ext cx="493775" cy="187452"/>
+          </a:xfrm>
+          <a:prstGeom prst="rect">
+            <a:avLst/>
+          </a:prstGeom>
+          <a:noFill/>
+        </p:spPr>
+        <p:txBody>
+          <a:bodyPr wrap="none" lIns="0" rIns="0" tIns="0" bIns="0" anchor="ctr">
+            <a:spAutoFit/>
+          </a:bodyPr>
+          <a:lstStyle/>
+          <a:p>
+            <a:pPr algn="ctr"/>
+            <a:r>
+              <a:rPr sz="700" b="1">
+                <a:solidFill>
+                  <a:srgbClr val="1A2340"/>
+                </a:solidFill>
+                <a:latin typeface="Calibri"/>
+              </a:rPr>
+              <a:t>31%</a:t>
+            </a:r>
+          </a:p>
+        </p:txBody>
+      </p:sp>
+      <p:sp>
+        <p:nvSpPr>
+          <p:cNvPr id="206" name="TextBox 205"/>
+          <p:cNvSpPr txBox="1"/>
+          <p:nvPr/>
+        </p:nvSpPr>
+        <p:spPr>
+          <a:xfrm>
+            <a:off x="5184648" y="4201668"/>
+            <a:ext cx="557784" cy="187452"/>
+          </a:xfrm>
+          <a:prstGeom prst="rect">
+            <a:avLst/>
+          </a:prstGeom>
+          <a:noFill/>
+        </p:spPr>
+        <p:txBody>
+          <a:bodyPr wrap="none" lIns="0" rIns="0" tIns="0" bIns="0" anchor="ctr">
+            <a:spAutoFit/>
+          </a:bodyPr>
+          <a:lstStyle/>
+          <a:p>
+            <a:pPr algn="ctr"/>
+            <a:r>
+              <a:rPr sz="700" b="0">
+                <a:solidFill>
+                  <a:srgbClr val="555555"/>
+                </a:solidFill>
+                <a:latin typeface="Calibri"/>
+              </a:rPr>
+              <a:t>37%</a:t>
+            </a:r>
+          </a:p>
+        </p:txBody>
+      </p:sp>
+      <p:sp>
+        <p:nvSpPr>
+          <p:cNvPr id="207" name="TextBox 206"/>
+          <p:cNvSpPr txBox="1"/>
+          <p:nvPr/>
+        </p:nvSpPr>
+        <p:spPr>
+          <a:xfrm>
+            <a:off x="7991856" y="4201668"/>
+            <a:ext cx="804672" cy="187452"/>
+          </a:xfrm>
+          <a:prstGeom prst="rect">
+            <a:avLst/>
+          </a:prstGeom>
+          <a:noFill/>
+        </p:spPr>
+        <p:txBody>
+          <a:bodyPr wrap="none" lIns="0" rIns="0" tIns="0" bIns="0" anchor="ctr">
+            <a:spAutoFit/>
+          </a:bodyPr>
+          <a:lstStyle/>
+          <a:p>
+            <a:pPr algn="ctr"/>
+            <a:r>
+              <a:rPr sz="700" b="1">
+                <a:solidFill>
+                  <a:srgbClr val="F59E0B"/>
+                </a:solidFill>
+                <a:latin typeface="Calibri"/>
+              </a:rPr>
+              <a:t>Riesgo de atraso</a:t>
+            </a:r>
+          </a:p>
+        </p:txBody>
+      </p:sp>
+      <p:sp>
+        <p:nvSpPr>
+          <p:cNvPr id="208" name="Rounded Rectangle 207"/>
+          <p:cNvSpPr/>
+          <p:nvPr/>
+        </p:nvSpPr>
+        <p:spPr>
+          <a:xfrm>
+            <a:off x="5806440" y="4243844"/>
+            <a:ext cx="1691640" cy="103098"/>
+          </a:xfrm>
+          <a:prstGeom prst="roundRect">
+            <a:avLst>
+              <a:gd name="adj" fmla="val 50000"/>
+            </a:avLst>
+          </a:prstGeom>
+          <a:pattFill prst="smGrid">
+            <a:fgClr>
+              <a:srgbClr val="F59E0B"/>
+            </a:fgClr>
+            <a:bgClr>
+              <a:srgbClr val="FFFFFF"/>
+            </a:bgClr>
+          </a:pattFill>
+          <a:ln>
+            <a:noFill/>
+          </a:ln>
+          <a:effectLst/>
+        </p:spPr>
+        <p:style>
+          <a:lnRef idx="1">
+            <a:schemeClr val="accent1"/>
+          </a:lnRef>
+          <a:fillRef idx="3">
+            <a:schemeClr val="accent1"/>
+          </a:fillRef>
+          <a:effectRef idx="2">
+            <a:schemeClr val="accent1"/>
+          </a:effectRef>
+          <a:fontRef idx="minor">
+            <a:schemeClr val="lt1"/>
+          </a:fontRef>
+        </p:style>
+        <p:txBody>
+          <a:bodyPr rtlCol="0" anchor="ctr"/>
+          <a:lstStyle/>
+          <a:p>
+            <a:pPr algn="ctr"/>
+          </a:p>
+        </p:txBody>
+      </p:sp>
+      <p:sp>
+        <p:nvSpPr>
+          <p:cNvPr id="209" name="Rounded Rectangle 208"/>
+          <p:cNvSpPr/>
+          <p:nvPr/>
+        </p:nvSpPr>
+        <p:spPr>
+          <a:xfrm>
+            <a:off x="5806440" y="4243844"/>
+            <a:ext cx="524408" cy="103098"/>
+          </a:xfrm>
+          <a:prstGeom prst="roundRect">
+            <a:avLst>
+              <a:gd name="adj" fmla="val 50000"/>
+            </a:avLst>
+          </a:prstGeom>
+          <a:solidFill>
+            <a:srgbClr val="F59E0B"/>
+          </a:solidFill>
+          <a:ln>
+            <a:noFill/>
+          </a:ln>
+          <a:effectLst>
+            <a:outerShdw blurRad="76200" dist="19050" dir="5400000" rotWithShape="0">
+              <a:srgbClr val="F59E0B">
+                <a:alpha val="55000"/>
+              </a:srgbClr>
+            </a:outerShdw>
+          </a:effectLst>
+        </p:spPr>
+        <p:style>
+          <a:lnRef idx="1">
+            <a:schemeClr val="accent1"/>
+          </a:lnRef>
+          <a:fillRef idx="3">
+            <a:schemeClr val="accent1"/>
+          </a:fillRef>
+          <a:effectRef idx="2">
+            <a:schemeClr val="accent1"/>
+          </a:effectRef>
+          <a:fontRef idx="minor">
+            <a:schemeClr val="lt1"/>
+          </a:fontRef>
+        </p:style>
+        <p:txBody>
+          <a:bodyPr rtlCol="0" anchor="ctr"/>
+          <a:lstStyle/>
+          <a:p>
+            <a:pPr algn="ctr"/>
+          </a:p>
+        </p:txBody>
+      </p:sp>
+      <p:sp>
+        <p:nvSpPr>
+          <p:cNvPr id="210" name="TextBox 209"/>
+          <p:cNvSpPr txBox="1"/>
+          <p:nvPr/>
+        </p:nvSpPr>
+        <p:spPr>
+          <a:xfrm>
+            <a:off x="7543800" y="4211840"/>
+            <a:ext cx="457200" cy="167106"/>
+          </a:xfrm>
+          <a:prstGeom prst="rect">
+            <a:avLst/>
+          </a:prstGeom>
+          <a:noFill/>
+        </p:spPr>
+        <p:txBody>
+          <a:bodyPr wrap="none" lIns="0" rIns="0" tIns="0" bIns="0">
+            <a:spAutoFit/>
+          </a:bodyPr>
+          <a:lstStyle/>
+          <a:p>
+            <a:pPr algn="l"/>
+            <a:r>
+              <a:rPr sz="800" b="1">
+                <a:solidFill>
+                  <a:srgbClr val="F59E0B"/>
+                </a:solidFill>
+                <a:latin typeface="Calibri"/>
+              </a:rPr>
+              <a:t>31%</a:t>
+            </a:r>
+          </a:p>
+        </p:txBody>
+      </p:sp>
+      <p:sp>
+        <p:nvSpPr>
+          <p:cNvPr id="211" name="Rectangle 210"/>
+          <p:cNvSpPr/>
+          <p:nvPr/>
+        </p:nvSpPr>
+        <p:spPr>
+          <a:xfrm>
+            <a:off x="73152" y="4389120"/>
+            <a:ext cx="8741664" cy="187452"/>
+          </a:xfrm>
+          <a:prstGeom prst="rect">
+            <a:avLst/>
+          </a:prstGeom>
+          <a:solidFill>
+            <a:srgbClr val="F5F7FA"/>
+          </a:solidFill>
+          <a:ln>
+            <a:noFill/>
+          </a:ln>
+          <a:effectLst/>
+        </p:spPr>
+        <p:style>
+          <a:lnRef idx="1">
+            <a:schemeClr val="accent1"/>
+          </a:lnRef>
+          <a:fillRef idx="3">
+            <a:schemeClr val="accent1"/>
+          </a:fillRef>
+          <a:effectRef idx="2">
+            <a:schemeClr val="accent1"/>
+          </a:effectRef>
+          <a:fontRef idx="minor">
+            <a:schemeClr val="lt1"/>
+          </a:fontRef>
+        </p:style>
+        <p:txBody>
+          <a:bodyPr rtlCol="0" anchor="ctr"/>
+          <a:lstStyle/>
+          <a:p>
+            <a:pPr algn="ctr"/>
+          </a:p>
+        </p:txBody>
+      </p:sp>
+      <p:sp>
+        <p:nvSpPr>
+          <p:cNvPr id="212" name="TextBox 211"/>
+          <p:cNvSpPr txBox="1"/>
+          <p:nvPr/>
+        </p:nvSpPr>
+        <p:spPr>
+          <a:xfrm>
+            <a:off x="91440" y="4389120"/>
+            <a:ext cx="722375" cy="187452"/>
+          </a:xfrm>
+          <a:prstGeom prst="rect">
+            <a:avLst/>
+          </a:prstGeom>
+          <a:noFill/>
+        </p:spPr>
+        <p:txBody>
+          <a:bodyPr wrap="none" lIns="0" rIns="0" tIns="0" bIns="0" anchor="ctr">
+            <a:spAutoFit/>
+          </a:bodyPr>
+          <a:lstStyle/>
+          <a:p>
+            <a:pPr algn="ctr"/>
+            <a:r>
+              <a:rPr sz="700" b="1">
+                <a:solidFill>
+                  <a:srgbClr val="1A2340"/>
+                </a:solidFill>
+                <a:latin typeface="Calibri"/>
+              </a:rPr>
+              <a:t>Mejoras</a:t>
+            </a:r>
+          </a:p>
+        </p:txBody>
+      </p:sp>
+      <p:sp>
+        <p:nvSpPr>
+          <p:cNvPr id="213" name="TextBox 212"/>
+          <p:cNvSpPr txBox="1"/>
+          <p:nvPr/>
+        </p:nvSpPr>
+        <p:spPr>
+          <a:xfrm>
+            <a:off x="850392" y="4389120"/>
+            <a:ext cx="2432304" cy="187452"/>
+          </a:xfrm>
+          <a:prstGeom prst="rect">
+            <a:avLst/>
+          </a:prstGeom>
+          <a:noFill/>
+        </p:spPr>
+        <p:txBody>
+          <a:bodyPr wrap="none" lIns="0" rIns="0" tIns="0" bIns="0" anchor="ctr">
+            <a:spAutoFit/>
+          </a:bodyPr>
+          <a:lstStyle/>
+          <a:p>
+            <a:pPr algn="l"/>
+            <a:r>
+              <a:rPr sz="700" b="0">
+                <a:solidFill>
+                  <a:srgbClr val="1A2340"/>
+                </a:solidFill>
+                <a:latin typeface="Calibri"/>
+              </a:rPr>
+              <a:t>Capital Humano || BUK Personalizados Fase 2</a:t>
+            </a:r>
+          </a:p>
+        </p:txBody>
+      </p:sp>
+      <p:sp>
+        <p:nvSpPr>
+          <p:cNvPr id="214" name="TextBox 213"/>
+          <p:cNvSpPr txBox="1"/>
+          <p:nvPr/>
+        </p:nvSpPr>
+        <p:spPr>
+          <a:xfrm>
+            <a:off x="3319272" y="4389120"/>
+            <a:ext cx="630936" cy="187452"/>
+          </a:xfrm>
+          <a:prstGeom prst="rect">
+            <a:avLst/>
+          </a:prstGeom>
+          <a:noFill/>
+        </p:spPr>
+        <p:txBody>
+          <a:bodyPr wrap="none" lIns="0" rIns="0" tIns="0" bIns="0" anchor="ctr">
+            <a:spAutoFit/>
+          </a:bodyPr>
+          <a:lstStyle/>
+          <a:p>
+            <a:pPr algn="ctr"/>
+            <a:r>
+              <a:rPr sz="700" b="0">
+                <a:solidFill>
+                  <a:srgbClr val="555555"/>
+                </a:solidFill>
+                <a:latin typeface="Calibri"/>
+              </a:rPr>
+              <a:t>08/06/2026</a:t>
+            </a:r>
+          </a:p>
+        </p:txBody>
+      </p:sp>
+      <p:sp>
+        <p:nvSpPr>
+          <p:cNvPr id="215" name="TextBox 214"/>
+          <p:cNvSpPr txBox="1"/>
+          <p:nvPr/>
+        </p:nvSpPr>
+        <p:spPr>
+          <a:xfrm>
+            <a:off x="3986783" y="4389120"/>
+            <a:ext cx="630936" cy="187452"/>
+          </a:xfrm>
+          <a:prstGeom prst="rect">
+            <a:avLst/>
+          </a:prstGeom>
+          <a:noFill/>
+        </p:spPr>
+        <p:txBody>
+          <a:bodyPr wrap="none" lIns="0" rIns="0" tIns="0" bIns="0" anchor="ctr">
+            <a:spAutoFit/>
+          </a:bodyPr>
+          <a:lstStyle/>
+          <a:p>
+            <a:pPr algn="ctr"/>
+            <a:r>
+              <a:rPr sz="700" b="0">
+                <a:solidFill>
+                  <a:srgbClr val="555555"/>
+                </a:solidFill>
+                <a:latin typeface="Calibri"/>
+              </a:rPr>
+              <a:t>11/08/2026</a:t>
+            </a:r>
+          </a:p>
+        </p:txBody>
+      </p:sp>
+      <p:sp>
+        <p:nvSpPr>
+          <p:cNvPr id="216" name="TextBox 215"/>
+          <p:cNvSpPr txBox="1"/>
+          <p:nvPr/>
+        </p:nvSpPr>
+        <p:spPr>
+          <a:xfrm>
+            <a:off x="4654296" y="4389120"/>
+            <a:ext cx="493775" cy="187452"/>
+          </a:xfrm>
+          <a:prstGeom prst="rect">
+            <a:avLst/>
+          </a:prstGeom>
+          <a:noFill/>
+        </p:spPr>
+        <p:txBody>
+          <a:bodyPr wrap="none" lIns="0" rIns="0" tIns="0" bIns="0" anchor="ctr">
+            <a:spAutoFit/>
+          </a:bodyPr>
+          <a:lstStyle/>
+          <a:p>
+            <a:pPr algn="ctr"/>
+            <a:r>
+              <a:rPr sz="700" b="1">
+                <a:solidFill>
+                  <a:srgbClr val="1A2340"/>
+                </a:solidFill>
+                <a:latin typeface="Calibri"/>
+              </a:rPr>
+              <a:t>86%</a:t>
+            </a:r>
+          </a:p>
+        </p:txBody>
+      </p:sp>
+      <p:sp>
+        <p:nvSpPr>
+          <p:cNvPr id="217" name="TextBox 216"/>
+          <p:cNvSpPr txBox="1"/>
+          <p:nvPr/>
+        </p:nvSpPr>
+        <p:spPr>
+          <a:xfrm>
+            <a:off x="5184648" y="4389120"/>
+            <a:ext cx="557784" cy="187452"/>
+          </a:xfrm>
+          <a:prstGeom prst="rect">
+            <a:avLst/>
+          </a:prstGeom>
+          <a:noFill/>
+        </p:spPr>
+        <p:txBody>
+          <a:bodyPr wrap="none" lIns="0" rIns="0" tIns="0" bIns="0" anchor="ctr">
+            <a:spAutoFit/>
+          </a:bodyPr>
+          <a:lstStyle/>
+          <a:p>
+            <a:pPr algn="ctr"/>
+            <a:r>
+              <a:rPr sz="700" b="0">
+                <a:solidFill>
+                  <a:srgbClr val="555555"/>
+                </a:solidFill>
+                <a:latin typeface="Calibri"/>
+              </a:rPr>
+              <a:t>56%</a:t>
+            </a:r>
+          </a:p>
+        </p:txBody>
+      </p:sp>
+      <p:sp>
+        <p:nvSpPr>
+          <p:cNvPr id="218" name="TextBox 217"/>
+          <p:cNvSpPr txBox="1"/>
+          <p:nvPr/>
+        </p:nvSpPr>
+        <p:spPr>
+          <a:xfrm>
+            <a:off x="7991856" y="4389120"/>
             <a:ext cx="804672" cy="187452"/>
           </a:xfrm>
           <a:prstGeom prst="rect">
@@ -12435,13 +13716,13 @@
       </p:sp>
       <p:sp>
         <p:nvSpPr>
-          <p:cNvPr id="186" name="Rounded Rectangle 185"/>
+          <p:cNvPr id="219" name="Rounded Rectangle 218"/>
           <p:cNvSpPr/>
           <p:nvPr/>
         </p:nvSpPr>
         <p:spPr>
           <a:xfrm>
-            <a:off x="5806440" y="3868940"/>
+            <a:off x="5806440" y="4431296"/>
             <a:ext cx="1691640" cy="103098"/>
           </a:xfrm>
           <a:prstGeom prst="roundRect">
@@ -12486,14 +13767,14 @@
       </p:sp>
       <p:sp>
         <p:nvSpPr>
-          <p:cNvPr id="187" name="Rounded Rectangle 186"/>
+          <p:cNvPr id="220" name="Rounded Rectangle 219"/>
           <p:cNvSpPr/>
           <p:nvPr/>
         </p:nvSpPr>
         <p:spPr>
           <a:xfrm>
-            <a:off x="5806440" y="3868940"/>
-            <a:ext cx="1539392" cy="103098"/>
+            <a:off x="5806440" y="4431296"/>
+            <a:ext cx="1454810" cy="103098"/>
           </a:xfrm>
           <a:prstGeom prst="roundRect">
             <a:avLst>
@@ -12538,13 +13819,13 @@
       </p:sp>
       <p:sp>
         <p:nvSpPr>
-          <p:cNvPr id="188" name="TextBox 187"/>
+          <p:cNvPr id="221" name="TextBox 220"/>
           <p:cNvSpPr txBox="1"/>
           <p:nvPr/>
         </p:nvSpPr>
         <p:spPr>
           <a:xfrm>
-            <a:off x="7543800" y="3836936"/>
+            <a:off x="7543800" y="4399292"/>
             <a:ext cx="457200" cy="167106"/>
           </a:xfrm>
           <a:prstGeom prst="rect">
@@ -12566,447 +13847,20 @@
                 </a:solidFill>
                 <a:latin typeface="Calibri"/>
               </a:rPr>
-              <a:t>91%</a:t>
-            </a:r>
-          </a:p>
-        </p:txBody>
-      </p:sp>
-      <p:sp>
-        <p:nvSpPr>
-          <p:cNvPr id="189" name="Rectangle 188"/>
+              <a:t>86%</a:t>
+            </a:r>
+          </a:p>
+        </p:txBody>
+      </p:sp>
+      <p:sp>
+        <p:nvSpPr>
+          <p:cNvPr id="222" name="Rectangle 221"/>
           <p:cNvSpPr/>
           <p:nvPr/>
         </p:nvSpPr>
         <p:spPr>
           <a:xfrm>
-            <a:off x="73152" y="4014215"/>
-            <a:ext cx="8741664" cy="187452"/>
-          </a:xfrm>
-          <a:prstGeom prst="rect">
-            <a:avLst/>
-          </a:prstGeom>
-          <a:solidFill>
-            <a:srgbClr val="F5F7FA"/>
-          </a:solidFill>
-          <a:ln>
-            <a:noFill/>
-          </a:ln>
-          <a:effectLst/>
-        </p:spPr>
-        <p:style>
-          <a:lnRef idx="1">
-            <a:schemeClr val="accent1"/>
-          </a:lnRef>
-          <a:fillRef idx="3">
-            <a:schemeClr val="accent1"/>
-          </a:fillRef>
-          <a:effectRef idx="2">
-            <a:schemeClr val="accent1"/>
-          </a:effectRef>
-          <a:fontRef idx="minor">
-            <a:schemeClr val="lt1"/>
-          </a:fontRef>
-        </p:style>
-        <p:txBody>
-          <a:bodyPr rtlCol="0" anchor="ctr"/>
-          <a:lstStyle/>
-          <a:p>
-            <a:pPr algn="ctr"/>
-          </a:p>
-        </p:txBody>
-      </p:sp>
-      <p:sp>
-        <p:nvSpPr>
-          <p:cNvPr id="190" name="TextBox 189"/>
-          <p:cNvSpPr txBox="1"/>
-          <p:nvPr/>
-        </p:nvSpPr>
-        <p:spPr>
-          <a:xfrm>
-            <a:off x="91440" y="4014215"/>
-            <a:ext cx="722375" cy="187452"/>
-          </a:xfrm>
-          <a:prstGeom prst="rect">
-            <a:avLst/>
-          </a:prstGeom>
-          <a:noFill/>
-        </p:spPr>
-        <p:txBody>
-          <a:bodyPr wrap="none" lIns="0" rIns="0" tIns="0" bIns="0" anchor="ctr">
-            <a:spAutoFit/>
-          </a:bodyPr>
-          <a:lstStyle/>
-          <a:p>
-            <a:pPr algn="ctr"/>
-            <a:r>
-              <a:rPr sz="700" b="1">
-                <a:solidFill>
-                  <a:srgbClr val="1A2340"/>
-                </a:solidFill>
-                <a:latin typeface="Calibri"/>
-              </a:rPr>
-              <a:t>Proyecto</a:t>
-            </a:r>
-          </a:p>
-        </p:txBody>
-      </p:sp>
-      <p:sp>
-        <p:nvSpPr>
-          <p:cNvPr id="191" name="TextBox 190"/>
-          <p:cNvSpPr txBox="1"/>
-          <p:nvPr/>
-        </p:nvSpPr>
-        <p:spPr>
-          <a:xfrm>
-            <a:off x="850392" y="4014215"/>
-            <a:ext cx="2432304" cy="187452"/>
-          </a:xfrm>
-          <a:prstGeom prst="rect">
-            <a:avLst/>
-          </a:prstGeom>
-          <a:noFill/>
-        </p:spPr>
-        <p:txBody>
-          <a:bodyPr wrap="none" lIns="0" rIns="0" tIns="0" bIns="0" anchor="ctr">
-            <a:spAutoFit/>
-          </a:bodyPr>
-          <a:lstStyle/>
-          <a:p>
-            <a:pPr algn="l"/>
-            <a:r>
-              <a:rPr sz="700" b="0">
-                <a:solidFill>
-                  <a:srgbClr val="1A2340"/>
-                </a:solidFill>
-                <a:latin typeface="Calibri"/>
-              </a:rPr>
-              <a:t>Contabilidad || Integración Mecanica-SAE (Fase…</a:t>
-            </a:r>
-          </a:p>
-        </p:txBody>
-      </p:sp>
-      <p:sp>
-        <p:nvSpPr>
-          <p:cNvPr id="192" name="TextBox 191"/>
-          <p:cNvSpPr txBox="1"/>
-          <p:nvPr/>
-        </p:nvSpPr>
-        <p:spPr>
-          <a:xfrm>
-            <a:off x="3319272" y="4014215"/>
-            <a:ext cx="630936" cy="187452"/>
-          </a:xfrm>
-          <a:prstGeom prst="rect">
-            <a:avLst/>
-          </a:prstGeom>
-          <a:noFill/>
-        </p:spPr>
-        <p:txBody>
-          <a:bodyPr wrap="none" lIns="0" rIns="0" tIns="0" bIns="0" anchor="ctr">
-            <a:spAutoFit/>
-          </a:bodyPr>
-          <a:lstStyle/>
-          <a:p>
-            <a:pPr algn="ctr"/>
-            <a:r>
-              <a:rPr sz="700" b="0">
-                <a:solidFill>
-                  <a:srgbClr val="555555"/>
-                </a:solidFill>
-                <a:latin typeface="Calibri"/>
-              </a:rPr>
-              <a:t>21/04/2026</a:t>
-            </a:r>
-          </a:p>
-        </p:txBody>
-      </p:sp>
-      <p:sp>
-        <p:nvSpPr>
-          <p:cNvPr id="193" name="TextBox 192"/>
-          <p:cNvSpPr txBox="1"/>
-          <p:nvPr/>
-        </p:nvSpPr>
-        <p:spPr>
-          <a:xfrm>
-            <a:off x="3986783" y="4014215"/>
-            <a:ext cx="630936" cy="187452"/>
-          </a:xfrm>
-          <a:prstGeom prst="rect">
-            <a:avLst/>
-          </a:prstGeom>
-          <a:noFill/>
-        </p:spPr>
-        <p:txBody>
-          <a:bodyPr wrap="none" lIns="0" rIns="0" tIns="0" bIns="0" anchor="ctr">
-            <a:spAutoFit/>
-          </a:bodyPr>
-          <a:lstStyle/>
-          <a:p>
-            <a:pPr algn="ctr"/>
-            <a:r>
-              <a:rPr sz="700" b="0">
-                <a:solidFill>
-                  <a:srgbClr val="555555"/>
-                </a:solidFill>
-                <a:latin typeface="Calibri"/>
-              </a:rPr>
-              <a:t>12/06/2026</a:t>
-            </a:r>
-          </a:p>
-        </p:txBody>
-      </p:sp>
-      <p:sp>
-        <p:nvSpPr>
-          <p:cNvPr id="194" name="TextBox 193"/>
-          <p:cNvSpPr txBox="1"/>
-          <p:nvPr/>
-        </p:nvSpPr>
-        <p:spPr>
-          <a:xfrm>
-            <a:off x="4654296" y="4014215"/>
-            <a:ext cx="493775" cy="187452"/>
-          </a:xfrm>
-          <a:prstGeom prst="rect">
-            <a:avLst/>
-          </a:prstGeom>
-          <a:noFill/>
-        </p:spPr>
-        <p:txBody>
-          <a:bodyPr wrap="none" lIns="0" rIns="0" tIns="0" bIns="0" anchor="ctr">
-            <a:spAutoFit/>
-          </a:bodyPr>
-          <a:lstStyle/>
-          <a:p>
-            <a:pPr algn="ctr"/>
-            <a:r>
-              <a:rPr sz="700" b="1">
-                <a:solidFill>
-                  <a:srgbClr val="1A2340"/>
-                </a:solidFill>
-                <a:latin typeface="Calibri"/>
-              </a:rPr>
-              <a:t>99%</a:t>
-            </a:r>
-          </a:p>
-        </p:txBody>
-      </p:sp>
-      <p:sp>
-        <p:nvSpPr>
-          <p:cNvPr id="195" name="TextBox 194"/>
-          <p:cNvSpPr txBox="1"/>
-          <p:nvPr/>
-        </p:nvSpPr>
-        <p:spPr>
-          <a:xfrm>
-            <a:off x="5184648" y="4014215"/>
-            <a:ext cx="557784" cy="187452"/>
-          </a:xfrm>
-          <a:prstGeom prst="rect">
-            <a:avLst/>
-          </a:prstGeom>
-          <a:noFill/>
-        </p:spPr>
-        <p:txBody>
-          <a:bodyPr wrap="none" lIns="0" rIns="0" tIns="0" bIns="0" anchor="ctr">
-            <a:spAutoFit/>
-          </a:bodyPr>
-          <a:lstStyle/>
-          <a:p>
-            <a:pPr algn="ctr"/>
-            <a:r>
-              <a:rPr sz="700" b="0">
-                <a:solidFill>
-                  <a:srgbClr val="555555"/>
-                </a:solidFill>
-                <a:latin typeface="Calibri"/>
-              </a:rPr>
-              <a:t>100%</a:t>
-            </a:r>
-          </a:p>
-        </p:txBody>
-      </p:sp>
-      <p:sp>
-        <p:nvSpPr>
-          <p:cNvPr id="196" name="TextBox 195"/>
-          <p:cNvSpPr txBox="1"/>
-          <p:nvPr/>
-        </p:nvSpPr>
-        <p:spPr>
-          <a:xfrm>
-            <a:off x="7991856" y="4014215"/>
-            <a:ext cx="804672" cy="187452"/>
-          </a:xfrm>
-          <a:prstGeom prst="rect">
-            <a:avLst/>
-          </a:prstGeom>
-          <a:noFill/>
-        </p:spPr>
-        <p:txBody>
-          <a:bodyPr wrap="none" lIns="0" rIns="0" tIns="0" bIns="0" anchor="ctr">
-            <a:spAutoFit/>
-          </a:bodyPr>
-          <a:lstStyle/>
-          <a:p>
-            <a:pPr algn="ctr"/>
-            <a:r>
-              <a:rPr sz="700" b="1">
-                <a:solidFill>
-                  <a:srgbClr val="EF4444"/>
-                </a:solidFill>
-                <a:latin typeface="Calibri"/>
-              </a:rPr>
-              <a:t>Atrasado</a:t>
-            </a:r>
-          </a:p>
-        </p:txBody>
-      </p:sp>
-      <p:sp>
-        <p:nvSpPr>
-          <p:cNvPr id="197" name="Rounded Rectangle 196"/>
-          <p:cNvSpPr/>
-          <p:nvPr/>
-        </p:nvSpPr>
-        <p:spPr>
-          <a:xfrm>
-            <a:off x="5806440" y="4056392"/>
-            <a:ext cx="1691640" cy="103098"/>
-          </a:xfrm>
-          <a:prstGeom prst="roundRect">
-            <a:avLst>
-              <a:gd name="adj" fmla="val 50000"/>
-            </a:avLst>
-          </a:prstGeom>
-          <a:pattFill prst="smGrid">
-            <a:fgClr>
-              <a:srgbClr val="EF4444"/>
-            </a:fgClr>
-            <a:bgClr>
-              <a:srgbClr val="FFFFFF"/>
-            </a:bgClr>
-          </a:pattFill>
-          <a:ln>
-            <a:noFill/>
-          </a:ln>
-          <a:effectLst/>
-        </p:spPr>
-        <p:style>
-          <a:lnRef idx="1">
-            <a:schemeClr val="accent1"/>
-          </a:lnRef>
-          <a:fillRef idx="3">
-            <a:schemeClr val="accent1"/>
-          </a:fillRef>
-          <a:effectRef idx="2">
-            <a:schemeClr val="accent1"/>
-          </a:effectRef>
-          <a:fontRef idx="minor">
-            <a:schemeClr val="lt1"/>
-          </a:fontRef>
-        </p:style>
-        <p:txBody>
-          <a:bodyPr rtlCol="0" anchor="ctr"/>
-          <a:lstStyle/>
-          <a:p>
-            <a:pPr algn="ctr"/>
-          </a:p>
-        </p:txBody>
-      </p:sp>
-      <p:sp>
-        <p:nvSpPr>
-          <p:cNvPr id="198" name="Rounded Rectangle 197"/>
-          <p:cNvSpPr/>
-          <p:nvPr/>
-        </p:nvSpPr>
-        <p:spPr>
-          <a:xfrm>
-            <a:off x="5806440" y="4056392"/>
-            <a:ext cx="1674723" cy="103098"/>
-          </a:xfrm>
-          <a:prstGeom prst="roundRect">
-            <a:avLst>
-              <a:gd name="adj" fmla="val 50000"/>
-            </a:avLst>
-          </a:prstGeom>
-          <a:solidFill>
-            <a:srgbClr val="EF4444"/>
-          </a:solidFill>
-          <a:ln>
-            <a:noFill/>
-          </a:ln>
-          <a:effectLst>
-            <a:outerShdw blurRad="76200" dist="19050" dir="5400000" rotWithShape="0">
-              <a:srgbClr val="EF4444">
-                <a:alpha val="55000"/>
-              </a:srgbClr>
-            </a:outerShdw>
-          </a:effectLst>
-        </p:spPr>
-        <p:style>
-          <a:lnRef idx="1">
-            <a:schemeClr val="accent1"/>
-          </a:lnRef>
-          <a:fillRef idx="3">
-            <a:schemeClr val="accent1"/>
-          </a:fillRef>
-          <a:effectRef idx="2">
-            <a:schemeClr val="accent1"/>
-          </a:effectRef>
-          <a:fontRef idx="minor">
-            <a:schemeClr val="lt1"/>
-          </a:fontRef>
-        </p:style>
-        <p:txBody>
-          <a:bodyPr rtlCol="0" anchor="ctr"/>
-          <a:lstStyle/>
-          <a:p>
-            <a:pPr algn="ctr"/>
-          </a:p>
-        </p:txBody>
-      </p:sp>
-      <p:sp>
-        <p:nvSpPr>
-          <p:cNvPr id="199" name="TextBox 198"/>
-          <p:cNvSpPr txBox="1"/>
-          <p:nvPr/>
-        </p:nvSpPr>
-        <p:spPr>
-          <a:xfrm>
-            <a:off x="7543800" y="4024388"/>
-            <a:ext cx="457200" cy="167106"/>
-          </a:xfrm>
-          <a:prstGeom prst="rect">
-            <a:avLst/>
-          </a:prstGeom>
-          <a:noFill/>
-        </p:spPr>
-        <p:txBody>
-          <a:bodyPr wrap="none" lIns="0" rIns="0" tIns="0" bIns="0">
-            <a:spAutoFit/>
-          </a:bodyPr>
-          <a:lstStyle/>
-          <a:p>
-            <a:pPr algn="l"/>
-            <a:r>
-              <a:rPr sz="800" b="1">
-                <a:solidFill>
-                  <a:srgbClr val="EF4444"/>
-                </a:solidFill>
-                <a:latin typeface="Calibri"/>
-              </a:rPr>
-              <a:t>99%</a:t>
-            </a:r>
-          </a:p>
-        </p:txBody>
-      </p:sp>
-      <p:sp>
-        <p:nvSpPr>
-          <p:cNvPr id="200" name="Rectangle 199"/>
-          <p:cNvSpPr/>
-          <p:nvPr/>
-        </p:nvSpPr>
-        <p:spPr>
-          <a:xfrm>
-            <a:off x="73152" y="4201668"/>
+            <a:off x="73152" y="4576572"/>
             <a:ext cx="8741664" cy="187452"/>
           </a:xfrm>
           <a:prstGeom prst="rect">
@@ -13044,13 +13898,13 @@
       </p:sp>
       <p:sp>
         <p:nvSpPr>
-          <p:cNvPr id="201" name="TextBox 200"/>
+          <p:cNvPr id="223" name="TextBox 222"/>
           <p:cNvSpPr txBox="1"/>
           <p:nvPr/>
         </p:nvSpPr>
         <p:spPr>
           <a:xfrm>
-            <a:off x="91440" y="4201668"/>
+            <a:off x="91440" y="4576572"/>
             <a:ext cx="722375" cy="187452"/>
           </a:xfrm>
           <a:prstGeom prst="rect">
@@ -13072,861 +13926,7 @@
                 </a:solidFill>
                 <a:latin typeface="Calibri"/>
               </a:rPr>
-              <a:t>Proyecto</a:t>
-            </a:r>
-          </a:p>
-        </p:txBody>
-      </p:sp>
-      <p:sp>
-        <p:nvSpPr>
-          <p:cNvPr id="202" name="TextBox 201"/>
-          <p:cNvSpPr txBox="1"/>
-          <p:nvPr/>
-        </p:nvSpPr>
-        <p:spPr>
-          <a:xfrm>
-            <a:off x="850392" y="4201668"/>
-            <a:ext cx="2432304" cy="187452"/>
-          </a:xfrm>
-          <a:prstGeom prst="rect">
-            <a:avLst/>
-          </a:prstGeom>
-          <a:noFill/>
-        </p:spPr>
-        <p:txBody>
-          <a:bodyPr wrap="none" lIns="0" rIns="0" tIns="0" bIns="0" anchor="ctr">
-            <a:spAutoFit/>
-          </a:bodyPr>
-          <a:lstStyle/>
-          <a:p>
-            <a:pPr algn="l"/>
-            <a:r>
-              <a:rPr sz="700" b="0">
-                <a:solidFill>
-                  <a:srgbClr val="1A2340"/>
-                </a:solidFill>
-                <a:latin typeface="Calibri"/>
-              </a:rPr>
-              <a:t>DTI || Integración de sistemas</a:t>
-            </a:r>
-          </a:p>
-        </p:txBody>
-      </p:sp>
-      <p:sp>
-        <p:nvSpPr>
-          <p:cNvPr id="203" name="TextBox 202"/>
-          <p:cNvSpPr txBox="1"/>
-          <p:nvPr/>
-        </p:nvSpPr>
-        <p:spPr>
-          <a:xfrm>
-            <a:off x="3319272" y="4201668"/>
-            <a:ext cx="630936" cy="187452"/>
-          </a:xfrm>
-          <a:prstGeom prst="rect">
-            <a:avLst/>
-          </a:prstGeom>
-          <a:noFill/>
-        </p:spPr>
-        <p:txBody>
-          <a:bodyPr wrap="none" lIns="0" rIns="0" tIns="0" bIns="0" anchor="ctr">
-            <a:spAutoFit/>
-          </a:bodyPr>
-          <a:lstStyle/>
-          <a:p>
-            <a:pPr algn="ctr"/>
-            <a:r>
-              <a:rPr sz="700" b="0">
-                <a:solidFill>
-                  <a:srgbClr val="555555"/>
-                </a:solidFill>
-                <a:latin typeface="Calibri"/>
-              </a:rPr>
-              <a:t>01/06/2026</a:t>
-            </a:r>
-          </a:p>
-        </p:txBody>
-      </p:sp>
-      <p:sp>
-        <p:nvSpPr>
-          <p:cNvPr id="204" name="TextBox 203"/>
-          <p:cNvSpPr txBox="1"/>
-          <p:nvPr/>
-        </p:nvSpPr>
-        <p:spPr>
-          <a:xfrm>
-            <a:off x="3986783" y="4201668"/>
-            <a:ext cx="630936" cy="187452"/>
-          </a:xfrm>
-          <a:prstGeom prst="rect">
-            <a:avLst/>
-          </a:prstGeom>
-          <a:noFill/>
-        </p:spPr>
-        <p:txBody>
-          <a:bodyPr wrap="none" lIns="0" rIns="0" tIns="0" bIns="0" anchor="ctr">
-            <a:spAutoFit/>
-          </a:bodyPr>
-          <a:lstStyle/>
-          <a:p>
-            <a:pPr algn="ctr"/>
-            <a:r>
-              <a:rPr sz="700" b="0">
-                <a:solidFill>
-                  <a:srgbClr val="555555"/>
-                </a:solidFill>
-                <a:latin typeface="Calibri"/>
-              </a:rPr>
-              <a:t>23/09/2026</a:t>
-            </a:r>
-          </a:p>
-        </p:txBody>
-      </p:sp>
-      <p:sp>
-        <p:nvSpPr>
-          <p:cNvPr id="205" name="TextBox 204"/>
-          <p:cNvSpPr txBox="1"/>
-          <p:nvPr/>
-        </p:nvSpPr>
-        <p:spPr>
-          <a:xfrm>
-            <a:off x="4654296" y="4201668"/>
-            <a:ext cx="493775" cy="187452"/>
-          </a:xfrm>
-          <a:prstGeom prst="rect">
-            <a:avLst/>
-          </a:prstGeom>
-          <a:noFill/>
-        </p:spPr>
-        <p:txBody>
-          <a:bodyPr wrap="none" lIns="0" rIns="0" tIns="0" bIns="0" anchor="ctr">
-            <a:spAutoFit/>
-          </a:bodyPr>
-          <a:lstStyle/>
-          <a:p>
-            <a:pPr algn="ctr"/>
-            <a:r>
-              <a:rPr sz="700" b="1">
-                <a:solidFill>
-                  <a:srgbClr val="1A2340"/>
-                </a:solidFill>
-                <a:latin typeface="Calibri"/>
-              </a:rPr>
-              <a:t>31%</a:t>
-            </a:r>
-          </a:p>
-        </p:txBody>
-      </p:sp>
-      <p:sp>
-        <p:nvSpPr>
-          <p:cNvPr id="206" name="TextBox 205"/>
-          <p:cNvSpPr txBox="1"/>
-          <p:nvPr/>
-        </p:nvSpPr>
-        <p:spPr>
-          <a:xfrm>
-            <a:off x="5184648" y="4201668"/>
-            <a:ext cx="557784" cy="187452"/>
-          </a:xfrm>
-          <a:prstGeom prst="rect">
-            <a:avLst/>
-          </a:prstGeom>
-          <a:noFill/>
-        </p:spPr>
-        <p:txBody>
-          <a:bodyPr wrap="none" lIns="0" rIns="0" tIns="0" bIns="0" anchor="ctr">
-            <a:spAutoFit/>
-          </a:bodyPr>
-          <a:lstStyle/>
-          <a:p>
-            <a:pPr algn="ctr"/>
-            <a:r>
-              <a:rPr sz="700" b="0">
-                <a:solidFill>
-                  <a:srgbClr val="555555"/>
-                </a:solidFill>
-                <a:latin typeface="Calibri"/>
-              </a:rPr>
-              <a:t>34%</a:t>
-            </a:r>
-          </a:p>
-        </p:txBody>
-      </p:sp>
-      <p:sp>
-        <p:nvSpPr>
-          <p:cNvPr id="207" name="TextBox 206"/>
-          <p:cNvSpPr txBox="1"/>
-          <p:nvPr/>
-        </p:nvSpPr>
-        <p:spPr>
-          <a:xfrm>
-            <a:off x="7991856" y="4201668"/>
-            <a:ext cx="804672" cy="187452"/>
-          </a:xfrm>
-          <a:prstGeom prst="rect">
-            <a:avLst/>
-          </a:prstGeom>
-          <a:noFill/>
-        </p:spPr>
-        <p:txBody>
-          <a:bodyPr wrap="none" lIns="0" rIns="0" tIns="0" bIns="0" anchor="ctr">
-            <a:spAutoFit/>
-          </a:bodyPr>
-          <a:lstStyle/>
-          <a:p>
-            <a:pPr algn="ctr"/>
-            <a:r>
-              <a:rPr sz="700" b="1">
-                <a:solidFill>
-                  <a:srgbClr val="F59E0B"/>
-                </a:solidFill>
-                <a:latin typeface="Calibri"/>
-              </a:rPr>
-              <a:t>Riesgo de atraso</a:t>
-            </a:r>
-          </a:p>
-        </p:txBody>
-      </p:sp>
-      <p:sp>
-        <p:nvSpPr>
-          <p:cNvPr id="208" name="Rounded Rectangle 207"/>
-          <p:cNvSpPr/>
-          <p:nvPr/>
-        </p:nvSpPr>
-        <p:spPr>
-          <a:xfrm>
-            <a:off x="5806440" y="4243844"/>
-            <a:ext cx="1691640" cy="103098"/>
-          </a:xfrm>
-          <a:prstGeom prst="roundRect">
-            <a:avLst>
-              <a:gd name="adj" fmla="val 50000"/>
-            </a:avLst>
-          </a:prstGeom>
-          <a:pattFill prst="smGrid">
-            <a:fgClr>
-              <a:srgbClr val="F59E0B"/>
-            </a:fgClr>
-            <a:bgClr>
-              <a:srgbClr val="FFFFFF"/>
-            </a:bgClr>
-          </a:pattFill>
-          <a:ln>
-            <a:noFill/>
-          </a:ln>
-          <a:effectLst/>
-        </p:spPr>
-        <p:style>
-          <a:lnRef idx="1">
-            <a:schemeClr val="accent1"/>
-          </a:lnRef>
-          <a:fillRef idx="3">
-            <a:schemeClr val="accent1"/>
-          </a:fillRef>
-          <a:effectRef idx="2">
-            <a:schemeClr val="accent1"/>
-          </a:effectRef>
-          <a:fontRef idx="minor">
-            <a:schemeClr val="lt1"/>
-          </a:fontRef>
-        </p:style>
-        <p:txBody>
-          <a:bodyPr rtlCol="0" anchor="ctr"/>
-          <a:lstStyle/>
-          <a:p>
-            <a:pPr algn="ctr"/>
-          </a:p>
-        </p:txBody>
-      </p:sp>
-      <p:sp>
-        <p:nvSpPr>
-          <p:cNvPr id="209" name="Rounded Rectangle 208"/>
-          <p:cNvSpPr/>
-          <p:nvPr/>
-        </p:nvSpPr>
-        <p:spPr>
-          <a:xfrm>
-            <a:off x="5806440" y="4243844"/>
-            <a:ext cx="524408" cy="103098"/>
-          </a:xfrm>
-          <a:prstGeom prst="roundRect">
-            <a:avLst>
-              <a:gd name="adj" fmla="val 50000"/>
-            </a:avLst>
-          </a:prstGeom>
-          <a:solidFill>
-            <a:srgbClr val="F59E0B"/>
-          </a:solidFill>
-          <a:ln>
-            <a:noFill/>
-          </a:ln>
-          <a:effectLst>
-            <a:outerShdw blurRad="76200" dist="19050" dir="5400000" rotWithShape="0">
-              <a:srgbClr val="F59E0B">
-                <a:alpha val="55000"/>
-              </a:srgbClr>
-            </a:outerShdw>
-          </a:effectLst>
-        </p:spPr>
-        <p:style>
-          <a:lnRef idx="1">
-            <a:schemeClr val="accent1"/>
-          </a:lnRef>
-          <a:fillRef idx="3">
-            <a:schemeClr val="accent1"/>
-          </a:fillRef>
-          <a:effectRef idx="2">
-            <a:schemeClr val="accent1"/>
-          </a:effectRef>
-          <a:fontRef idx="minor">
-            <a:schemeClr val="lt1"/>
-          </a:fontRef>
-        </p:style>
-        <p:txBody>
-          <a:bodyPr rtlCol="0" anchor="ctr"/>
-          <a:lstStyle/>
-          <a:p>
-            <a:pPr algn="ctr"/>
-          </a:p>
-        </p:txBody>
-      </p:sp>
-      <p:sp>
-        <p:nvSpPr>
-          <p:cNvPr id="210" name="TextBox 209"/>
-          <p:cNvSpPr txBox="1"/>
-          <p:nvPr/>
-        </p:nvSpPr>
-        <p:spPr>
-          <a:xfrm>
-            <a:off x="7543800" y="4211840"/>
-            <a:ext cx="457200" cy="167106"/>
-          </a:xfrm>
-          <a:prstGeom prst="rect">
-            <a:avLst/>
-          </a:prstGeom>
-          <a:noFill/>
-        </p:spPr>
-        <p:txBody>
-          <a:bodyPr wrap="none" lIns="0" rIns="0" tIns="0" bIns="0">
-            <a:spAutoFit/>
-          </a:bodyPr>
-          <a:lstStyle/>
-          <a:p>
-            <a:pPr algn="l"/>
-            <a:r>
-              <a:rPr sz="800" b="1">
-                <a:solidFill>
-                  <a:srgbClr val="F59E0B"/>
-                </a:solidFill>
-                <a:latin typeface="Calibri"/>
-              </a:rPr>
-              <a:t>31%</a:t>
-            </a:r>
-          </a:p>
-        </p:txBody>
-      </p:sp>
-      <p:sp>
-        <p:nvSpPr>
-          <p:cNvPr id="211" name="Rectangle 210"/>
-          <p:cNvSpPr/>
-          <p:nvPr/>
-        </p:nvSpPr>
-        <p:spPr>
-          <a:xfrm>
-            <a:off x="73152" y="4389120"/>
-            <a:ext cx="8741664" cy="187452"/>
-          </a:xfrm>
-          <a:prstGeom prst="rect">
-            <a:avLst/>
-          </a:prstGeom>
-          <a:solidFill>
-            <a:srgbClr val="F5F7FA"/>
-          </a:solidFill>
-          <a:ln>
-            <a:noFill/>
-          </a:ln>
-          <a:effectLst/>
-        </p:spPr>
-        <p:style>
-          <a:lnRef idx="1">
-            <a:schemeClr val="accent1"/>
-          </a:lnRef>
-          <a:fillRef idx="3">
-            <a:schemeClr val="accent1"/>
-          </a:fillRef>
-          <a:effectRef idx="2">
-            <a:schemeClr val="accent1"/>
-          </a:effectRef>
-          <a:fontRef idx="minor">
-            <a:schemeClr val="lt1"/>
-          </a:fontRef>
-        </p:style>
-        <p:txBody>
-          <a:bodyPr rtlCol="0" anchor="ctr"/>
-          <a:lstStyle/>
-          <a:p>
-            <a:pPr algn="ctr"/>
-          </a:p>
-        </p:txBody>
-      </p:sp>
-      <p:sp>
-        <p:nvSpPr>
-          <p:cNvPr id="212" name="TextBox 211"/>
-          <p:cNvSpPr txBox="1"/>
-          <p:nvPr/>
-        </p:nvSpPr>
-        <p:spPr>
-          <a:xfrm>
-            <a:off x="91440" y="4389120"/>
-            <a:ext cx="722375" cy="187452"/>
-          </a:xfrm>
-          <a:prstGeom prst="rect">
-            <a:avLst/>
-          </a:prstGeom>
-          <a:noFill/>
-        </p:spPr>
-        <p:txBody>
-          <a:bodyPr wrap="none" lIns="0" rIns="0" tIns="0" bIns="0" anchor="ctr">
-            <a:spAutoFit/>
-          </a:bodyPr>
-          <a:lstStyle/>
-          <a:p>
-            <a:pPr algn="ctr"/>
-            <a:r>
-              <a:rPr sz="700" b="1">
-                <a:solidFill>
-                  <a:srgbClr val="1A2340"/>
-                </a:solidFill>
-                <a:latin typeface="Calibri"/>
-              </a:rPr>
-              <a:t>Proyecto</a:t>
-            </a:r>
-          </a:p>
-        </p:txBody>
-      </p:sp>
-      <p:sp>
-        <p:nvSpPr>
-          <p:cNvPr id="213" name="TextBox 212"/>
-          <p:cNvSpPr txBox="1"/>
-          <p:nvPr/>
-        </p:nvSpPr>
-        <p:spPr>
-          <a:xfrm>
-            <a:off x="850392" y="4389120"/>
-            <a:ext cx="2432304" cy="187452"/>
-          </a:xfrm>
-          <a:prstGeom prst="rect">
-            <a:avLst/>
-          </a:prstGeom>
-          <a:noFill/>
-        </p:spPr>
-        <p:txBody>
-          <a:bodyPr wrap="none" lIns="0" rIns="0" tIns="0" bIns="0" anchor="ctr">
-            <a:spAutoFit/>
-          </a:bodyPr>
-          <a:lstStyle/>
-          <a:p>
-            <a:pPr algn="l"/>
-            <a:r>
-              <a:rPr sz="700" b="0">
-                <a:solidFill>
-                  <a:srgbClr val="1A2340"/>
-                </a:solidFill>
-                <a:latin typeface="Calibri"/>
-              </a:rPr>
-              <a:t>Capital Humano || BUK Personalizados Fase 2</a:t>
-            </a:r>
-          </a:p>
-        </p:txBody>
-      </p:sp>
-      <p:sp>
-        <p:nvSpPr>
-          <p:cNvPr id="214" name="TextBox 213"/>
-          <p:cNvSpPr txBox="1"/>
-          <p:nvPr/>
-        </p:nvSpPr>
-        <p:spPr>
-          <a:xfrm>
-            <a:off x="3319272" y="4389120"/>
-            <a:ext cx="630936" cy="187452"/>
-          </a:xfrm>
-          <a:prstGeom prst="rect">
-            <a:avLst/>
-          </a:prstGeom>
-          <a:noFill/>
-        </p:spPr>
-        <p:txBody>
-          <a:bodyPr wrap="none" lIns="0" rIns="0" tIns="0" bIns="0" anchor="ctr">
-            <a:spAutoFit/>
-          </a:bodyPr>
-          <a:lstStyle/>
-          <a:p>
-            <a:pPr algn="ctr"/>
-            <a:r>
-              <a:rPr sz="700" b="0">
-                <a:solidFill>
-                  <a:srgbClr val="555555"/>
-                </a:solidFill>
-                <a:latin typeface="Calibri"/>
-              </a:rPr>
-              <a:t>08/06/2026</a:t>
-            </a:r>
-          </a:p>
-        </p:txBody>
-      </p:sp>
-      <p:sp>
-        <p:nvSpPr>
-          <p:cNvPr id="215" name="TextBox 214"/>
-          <p:cNvSpPr txBox="1"/>
-          <p:nvPr/>
-        </p:nvSpPr>
-        <p:spPr>
-          <a:xfrm>
-            <a:off x="3986783" y="4389120"/>
-            <a:ext cx="630936" cy="187452"/>
-          </a:xfrm>
-          <a:prstGeom prst="rect">
-            <a:avLst/>
-          </a:prstGeom>
-          <a:noFill/>
-        </p:spPr>
-        <p:txBody>
-          <a:bodyPr wrap="none" lIns="0" rIns="0" tIns="0" bIns="0" anchor="ctr">
-            <a:spAutoFit/>
-          </a:bodyPr>
-          <a:lstStyle/>
-          <a:p>
-            <a:pPr algn="ctr"/>
-            <a:r>
-              <a:rPr sz="700" b="0">
-                <a:solidFill>
-                  <a:srgbClr val="555555"/>
-                </a:solidFill>
-                <a:latin typeface="Calibri"/>
-              </a:rPr>
-              <a:t>11/08/2026</a:t>
-            </a:r>
-          </a:p>
-        </p:txBody>
-      </p:sp>
-      <p:sp>
-        <p:nvSpPr>
-          <p:cNvPr id="216" name="TextBox 215"/>
-          <p:cNvSpPr txBox="1"/>
-          <p:nvPr/>
-        </p:nvSpPr>
-        <p:spPr>
-          <a:xfrm>
-            <a:off x="4654296" y="4389120"/>
-            <a:ext cx="493775" cy="187452"/>
-          </a:xfrm>
-          <a:prstGeom prst="rect">
-            <a:avLst/>
-          </a:prstGeom>
-          <a:noFill/>
-        </p:spPr>
-        <p:txBody>
-          <a:bodyPr wrap="none" lIns="0" rIns="0" tIns="0" bIns="0" anchor="ctr">
-            <a:spAutoFit/>
-          </a:bodyPr>
-          <a:lstStyle/>
-          <a:p>
-            <a:pPr algn="ctr"/>
-            <a:r>
-              <a:rPr sz="700" b="1">
-                <a:solidFill>
-                  <a:srgbClr val="1A2340"/>
-                </a:solidFill>
-                <a:latin typeface="Calibri"/>
-              </a:rPr>
-              <a:t>86%</a:t>
-            </a:r>
-          </a:p>
-        </p:txBody>
-      </p:sp>
-      <p:sp>
-        <p:nvSpPr>
-          <p:cNvPr id="217" name="TextBox 216"/>
-          <p:cNvSpPr txBox="1"/>
-          <p:nvPr/>
-        </p:nvSpPr>
-        <p:spPr>
-          <a:xfrm>
-            <a:off x="5184648" y="4389120"/>
-            <a:ext cx="557784" cy="187452"/>
-          </a:xfrm>
-          <a:prstGeom prst="rect">
-            <a:avLst/>
-          </a:prstGeom>
-          <a:noFill/>
-        </p:spPr>
-        <p:txBody>
-          <a:bodyPr wrap="none" lIns="0" rIns="0" tIns="0" bIns="0" anchor="ctr">
-            <a:spAutoFit/>
-          </a:bodyPr>
-          <a:lstStyle/>
-          <a:p>
-            <a:pPr algn="ctr"/>
-            <a:r>
-              <a:rPr sz="700" b="0">
-                <a:solidFill>
-                  <a:srgbClr val="555555"/>
-                </a:solidFill>
-                <a:latin typeface="Calibri"/>
-              </a:rPr>
-              <a:t>50%</a:t>
-            </a:r>
-          </a:p>
-        </p:txBody>
-      </p:sp>
-      <p:sp>
-        <p:nvSpPr>
-          <p:cNvPr id="218" name="TextBox 217"/>
-          <p:cNvSpPr txBox="1"/>
-          <p:nvPr/>
-        </p:nvSpPr>
-        <p:spPr>
-          <a:xfrm>
-            <a:off x="7991856" y="4389120"/>
-            <a:ext cx="804672" cy="187452"/>
-          </a:xfrm>
-          <a:prstGeom prst="rect">
-            <a:avLst/>
-          </a:prstGeom>
-          <a:noFill/>
-        </p:spPr>
-        <p:txBody>
-          <a:bodyPr wrap="none" lIns="0" rIns="0" tIns="0" bIns="0" anchor="ctr">
-            <a:spAutoFit/>
-          </a:bodyPr>
-          <a:lstStyle/>
-          <a:p>
-            <a:pPr algn="ctr"/>
-            <a:r>
-              <a:rPr sz="700" b="1">
-                <a:solidFill>
-                  <a:srgbClr val="22C55E"/>
-                </a:solidFill>
-                <a:latin typeface="Calibri"/>
-              </a:rPr>
-              <a:t>A tiempo</a:t>
-            </a:r>
-          </a:p>
-        </p:txBody>
-      </p:sp>
-      <p:sp>
-        <p:nvSpPr>
-          <p:cNvPr id="219" name="Rounded Rectangle 218"/>
-          <p:cNvSpPr/>
-          <p:nvPr/>
-        </p:nvSpPr>
-        <p:spPr>
-          <a:xfrm>
-            <a:off x="5806440" y="4431296"/>
-            <a:ext cx="1691640" cy="103098"/>
-          </a:xfrm>
-          <a:prstGeom prst="roundRect">
-            <a:avLst>
-              <a:gd name="adj" fmla="val 50000"/>
-            </a:avLst>
-          </a:prstGeom>
-          <a:pattFill prst="smGrid">
-            <a:fgClr>
-              <a:srgbClr val="22C55E"/>
-            </a:fgClr>
-            <a:bgClr>
-              <a:srgbClr val="FFFFFF"/>
-            </a:bgClr>
-          </a:pattFill>
-          <a:ln>
-            <a:noFill/>
-          </a:ln>
-          <a:effectLst/>
-        </p:spPr>
-        <p:style>
-          <a:lnRef idx="1">
-            <a:schemeClr val="accent1"/>
-          </a:lnRef>
-          <a:fillRef idx="3">
-            <a:schemeClr val="accent1"/>
-          </a:fillRef>
-          <a:effectRef idx="2">
-            <a:schemeClr val="accent1"/>
-          </a:effectRef>
-          <a:fontRef idx="minor">
-            <a:schemeClr val="lt1"/>
-          </a:fontRef>
-        </p:style>
-        <p:txBody>
-          <a:bodyPr rtlCol="0" anchor="ctr"/>
-          <a:lstStyle/>
-          <a:p>
-            <a:pPr algn="ctr"/>
-          </a:p>
-        </p:txBody>
-      </p:sp>
-      <p:sp>
-        <p:nvSpPr>
-          <p:cNvPr id="220" name="Rounded Rectangle 219"/>
-          <p:cNvSpPr/>
-          <p:nvPr/>
-        </p:nvSpPr>
-        <p:spPr>
-          <a:xfrm>
-            <a:off x="5806440" y="4431296"/>
-            <a:ext cx="1454810" cy="103098"/>
-          </a:xfrm>
-          <a:prstGeom prst="roundRect">
-            <a:avLst>
-              <a:gd name="adj" fmla="val 50000"/>
-            </a:avLst>
-          </a:prstGeom>
-          <a:solidFill>
-            <a:srgbClr val="22C55E"/>
-          </a:solidFill>
-          <a:ln>
-            <a:noFill/>
-          </a:ln>
-          <a:effectLst>
-            <a:outerShdw blurRad="76200" dist="19050" dir="5400000" rotWithShape="0">
-              <a:srgbClr val="22C55E">
-                <a:alpha val="55000"/>
-              </a:srgbClr>
-            </a:outerShdw>
-          </a:effectLst>
-        </p:spPr>
-        <p:style>
-          <a:lnRef idx="1">
-            <a:schemeClr val="accent1"/>
-          </a:lnRef>
-          <a:fillRef idx="3">
-            <a:schemeClr val="accent1"/>
-          </a:fillRef>
-          <a:effectRef idx="2">
-            <a:schemeClr val="accent1"/>
-          </a:effectRef>
-          <a:fontRef idx="minor">
-            <a:schemeClr val="lt1"/>
-          </a:fontRef>
-        </p:style>
-        <p:txBody>
-          <a:bodyPr rtlCol="0" anchor="ctr"/>
-          <a:lstStyle/>
-          <a:p>
-            <a:pPr algn="ctr"/>
-          </a:p>
-        </p:txBody>
-      </p:sp>
-      <p:sp>
-        <p:nvSpPr>
-          <p:cNvPr id="221" name="TextBox 220"/>
-          <p:cNvSpPr txBox="1"/>
-          <p:nvPr/>
-        </p:nvSpPr>
-        <p:spPr>
-          <a:xfrm>
-            <a:off x="7543800" y="4399292"/>
-            <a:ext cx="457200" cy="167106"/>
-          </a:xfrm>
-          <a:prstGeom prst="rect">
-            <a:avLst/>
-          </a:prstGeom>
-          <a:noFill/>
-        </p:spPr>
-        <p:txBody>
-          <a:bodyPr wrap="none" lIns="0" rIns="0" tIns="0" bIns="0">
-            <a:spAutoFit/>
-          </a:bodyPr>
-          <a:lstStyle/>
-          <a:p>
-            <a:pPr algn="l"/>
-            <a:r>
-              <a:rPr sz="800" b="1">
-                <a:solidFill>
-                  <a:srgbClr val="22C55E"/>
-                </a:solidFill>
-                <a:latin typeface="Calibri"/>
-              </a:rPr>
-              <a:t>86%</a:t>
-            </a:r>
-          </a:p>
-        </p:txBody>
-      </p:sp>
-      <p:sp>
-        <p:nvSpPr>
-          <p:cNvPr id="222" name="Rectangle 221"/>
-          <p:cNvSpPr/>
-          <p:nvPr/>
-        </p:nvSpPr>
-        <p:spPr>
-          <a:xfrm>
-            <a:off x="73152" y="4576572"/>
-            <a:ext cx="8741664" cy="187452"/>
-          </a:xfrm>
-          <a:prstGeom prst="rect">
-            <a:avLst/>
-          </a:prstGeom>
-          <a:solidFill>
-            <a:srgbClr val="FFFFFF"/>
-          </a:solidFill>
-          <a:ln>
-            <a:noFill/>
-          </a:ln>
-          <a:effectLst/>
-        </p:spPr>
-        <p:style>
-          <a:lnRef idx="1">
-            <a:schemeClr val="accent1"/>
-          </a:lnRef>
-          <a:fillRef idx="3">
-            <a:schemeClr val="accent1"/>
-          </a:fillRef>
-          <a:effectRef idx="2">
-            <a:schemeClr val="accent1"/>
-          </a:effectRef>
-          <a:fontRef idx="minor">
-            <a:schemeClr val="lt1"/>
-          </a:fontRef>
-        </p:style>
-        <p:txBody>
-          <a:bodyPr rtlCol="0" anchor="ctr"/>
-          <a:lstStyle/>
-          <a:p>
-            <a:pPr algn="ctr"/>
-          </a:p>
-        </p:txBody>
-      </p:sp>
-      <p:sp>
-        <p:nvSpPr>
-          <p:cNvPr id="223" name="TextBox 222"/>
-          <p:cNvSpPr txBox="1"/>
-          <p:nvPr/>
-        </p:nvSpPr>
-        <p:spPr>
-          <a:xfrm>
-            <a:off x="91440" y="4576572"/>
-            <a:ext cx="722375" cy="187452"/>
-          </a:xfrm>
-          <a:prstGeom prst="rect">
-            <a:avLst/>
-          </a:prstGeom>
-          <a:noFill/>
-        </p:spPr>
-        <p:txBody>
-          <a:bodyPr wrap="none" lIns="0" rIns="0" tIns="0" bIns="0" anchor="ctr">
-            <a:spAutoFit/>
-          </a:bodyPr>
-          <a:lstStyle/>
-          <a:p>
-            <a:pPr algn="ctr"/>
-            <a:r>
-              <a:rPr sz="700" b="1">
-                <a:solidFill>
-                  <a:srgbClr val="1A2340"/>
-                </a:solidFill>
-                <a:latin typeface="Calibri"/>
-              </a:rPr>
-              <a:t>Proyecto</a:t>
+              <a:t>Mejoras</a:t>
             </a:r>
           </a:p>
         </p:txBody>
@@ -14101,7 +14101,7 @@
                 </a:solidFill>
                 <a:latin typeface="Calibri"/>
               </a:rPr>
-              <a:t>10%</a:t>
+              <a:t>11%</a:t>
             </a:r>
           </a:p>
         </p:txBody>

--- a/cierre_base.pptx
+++ b/cierre_base.pptx
@@ -6667,7 +6667,7 @@
                 </a:solidFill>
                 <a:latin typeface="Calibri"/>
               </a:rPr>
-              <a:t>ABOGADO</a:t>
+              <a:t>MEJORA</a:t>
             </a:r>
           </a:p>
         </p:txBody>
@@ -6842,7 +6842,7 @@
                 </a:solidFill>
                 <a:latin typeface="Calibri"/>
               </a:rPr>
-              <a:t>94%</a:t>
+              <a:t>95%</a:t>
             </a:r>
           </a:p>
         </p:txBody>
@@ -11966,7 +11966,7 @@
                 </a:solidFill>
                 <a:latin typeface="Calibri"/>
               </a:rPr>
-              <a:t>69%</a:t>
+              <a:t>70%</a:t>
             </a:r>
           </a:p>
         </p:txBody>
@@ -12393,7 +12393,7 @@
                 </a:solidFill>
                 <a:latin typeface="Calibri"/>
               </a:rPr>
-              <a:t>93%</a:t>
+              <a:t>94%</a:t>
             </a:r>
           </a:p>
         </p:txBody>
@@ -13247,7 +13247,7 @@
                 </a:solidFill>
                 <a:latin typeface="Calibri"/>
               </a:rPr>
-              <a:t>37%</a:t>
+              <a:t>38%</a:t>
             </a:r>
           </a:p>
         </p:txBody>
@@ -13674,7 +13674,7 @@
                 </a:solidFill>
                 <a:latin typeface="Calibri"/>
               </a:rPr>
-              <a:t>56%</a:t>
+              <a:t>57%</a:t>
             </a:r>
           </a:p>
         </p:txBody>
@@ -14101,7 +14101,7 @@
                 </a:solidFill>
                 <a:latin typeface="Calibri"/>
               </a:rPr>
-              <a:t>11%</a:t>
+              <a:t>12%</a:t>
             </a:r>
           </a:p>
         </p:txBody>

--- a/cierre_base.pptx
+++ b/cierre_base.pptx
@@ -5353,7 +5353,7 @@
                 </a:solidFill>
                 <a:latin typeface="Arial Nova Light"/>
               </a:rPr>
-              <a:t>Cierre semanal del 9 de Julio al 16 de Julio</a:t>
+              <a:t>Cierre semanal del 23 de Julio al 30 de Julio</a:t>
             </a:r>
             <a:endParaRPr lang="es-MX" sz="1400" b="1" dirty="0">
               <a:solidFill>
@@ -5469,7 +5469,7 @@
                 </a:solidFill>
                 <a:latin typeface="Calibri"/>
               </a:rPr>
-              <a:t>18</a:t>
+              <a:t>12</a:t>
             </a:r>
           </a:p>
         </p:txBody>
@@ -5584,7 +5584,7 @@
                 </a:solidFill>
                 <a:latin typeface="Calibri"/>
               </a:rPr>
-              <a:t>9</a:t>
+              <a:t>6</a:t>
             </a:r>
           </a:p>
         </p:txBody>
@@ -5814,7 +5814,7 @@
                 </a:solidFill>
                 <a:latin typeface="Calibri"/>
               </a:rPr>
-              <a:t>2</a:t>
+              <a:t>0</a:t>
             </a:r>
           </a:p>
         </p:txBody>
@@ -5929,7 +5929,7 @@
                 </a:solidFill>
                 <a:latin typeface="Calibri"/>
               </a:rPr>
-              <a:t>4</a:t>
+              <a:t>3</a:t>
             </a:r>
           </a:p>
         </p:txBody>
@@ -6229,7 +6229,7 @@
                 </a:solidFill>
                 <a:latin typeface="Calibri"/>
               </a:rPr>
-              <a:t>ÁREA DE IMPLEMENTACIÓN</a:t>
+              <a:t>IMC — ÁREA DE IMPLEMENTACIÓN</a:t>
             </a:r>
           </a:p>
         </p:txBody>
@@ -6264,7 +6264,7 @@
                 </a:solidFill>
                 <a:latin typeface="Calibri"/>
               </a:rPr>
-              <a:t>Cierre semanal del 9 de Julio al 16 de Julio</a:t>
+              <a:t>Cierre semanal del 23 de Julio al 30 de Julio</a:t>
             </a:r>
           </a:p>
         </p:txBody>
@@ -6807,7 +6807,7 @@
                 </a:solidFill>
                 <a:latin typeface="Calibri"/>
               </a:rPr>
-              <a:t>78%</a:t>
+              <a:t>100%</a:t>
             </a:r>
           </a:p>
         </p:txBody>
@@ -6842,7 +6842,7 @@
                 </a:solidFill>
                 <a:latin typeface="Calibri"/>
               </a:rPr>
-              <a:t>95%</a:t>
+              <a:t>100%</a:t>
             </a:r>
           </a:p>
         </p:txBody>
@@ -6873,11 +6873,11 @@
             <a:r>
               <a:rPr sz="700" b="1">
                 <a:solidFill>
-                  <a:srgbClr val="EF4444"/>
+                  <a:srgbClr val="22C55E"/>
                 </a:solidFill>
                 <a:latin typeface="Calibri"/>
               </a:rPr>
-              <a:t>Atrasado</a:t>
+              <a:t>Terminado</a:t>
             </a:r>
           </a:p>
         </p:txBody>
@@ -6900,7 +6900,7 @@
           </a:prstGeom>
           <a:pattFill prst="smGrid">
             <a:fgClr>
-              <a:srgbClr val="EF4444"/>
+              <a:srgbClr val="22C55E"/>
             </a:fgClr>
             <a:bgClr>
               <a:srgbClr val="FFFFFF"/>
@@ -6942,7 +6942,7 @@
         <p:spPr>
           <a:xfrm>
             <a:off x="5806440" y="1432064"/>
-            <a:ext cx="1319479" cy="103098"/>
+            <a:ext cx="1691640" cy="103098"/>
           </a:xfrm>
           <a:prstGeom prst="roundRect">
             <a:avLst>
@@ -6950,14 +6950,14 @@
             </a:avLst>
           </a:prstGeom>
           <a:solidFill>
-            <a:srgbClr val="EF4444"/>
+            <a:srgbClr val="22C55E"/>
           </a:solidFill>
           <a:ln>
             <a:noFill/>
           </a:ln>
           <a:effectLst>
             <a:outerShdw blurRad="76200" dist="19050" dir="5400000" rotWithShape="0">
-              <a:srgbClr val="EF4444">
+              <a:srgbClr val="22C55E">
                 <a:alpha val="55000"/>
               </a:srgbClr>
             </a:outerShdw>
@@ -7011,11 +7011,11 @@
             <a:r>
               <a:rPr sz="800" b="1">
                 <a:solidFill>
-                  <a:srgbClr val="EF4444"/>
+                  <a:srgbClr val="22C55E"/>
                 </a:solidFill>
                 <a:latin typeface="Calibri"/>
               </a:rPr>
-              <a:t>78%</a:t>
+              <a:t>100%</a:t>
             </a:r>
           </a:p>
         </p:txBody>
@@ -7094,7 +7094,7 @@
                 </a:solidFill>
                 <a:latin typeface="Calibri"/>
               </a:rPr>
-              <a:t>Mejoras</a:t>
+              <a:t>Proyecto</a:t>
             </a:r>
           </a:p>
         </p:txBody>
@@ -7129,7 +7129,7 @@
                 </a:solidFill>
                 <a:latin typeface="Calibri"/>
               </a:rPr>
-              <a:t>Administración || AdContent - Catálogos</a:t>
+              <a:t>TRIM || Marketplace || Caddi</a:t>
             </a:r>
           </a:p>
         </p:txBody>
@@ -7164,7 +7164,7 @@
                 </a:solidFill>
                 <a:latin typeface="Calibri"/>
               </a:rPr>
-              <a:t>01/04/2026</a:t>
+              <a:t>07/08/2025</a:t>
             </a:r>
           </a:p>
         </p:txBody>
@@ -7199,7 +7199,7 @@
                 </a:solidFill>
                 <a:latin typeface="Calibri"/>
               </a:rPr>
-              <a:t>02/06/2026</a:t>
+              <a:t>04/08/2026</a:t>
             </a:r>
           </a:p>
         </p:txBody>
@@ -7269,7 +7269,7 @@
                 </a:solidFill>
                 <a:latin typeface="Calibri"/>
               </a:rPr>
-              <a:t>100%</a:t>
+              <a:t>98%</a:t>
             </a:r>
           </a:p>
         </p:txBody>
@@ -7521,7 +7521,7 @@
                 </a:solidFill>
                 <a:latin typeface="Calibri"/>
               </a:rPr>
-              <a:t>Mejoras</a:t>
+              <a:t>Proyecto</a:t>
             </a:r>
           </a:p>
         </p:txBody>
@@ -7556,7 +7556,7 @@
                 </a:solidFill>
                 <a:latin typeface="Calibri"/>
               </a:rPr>
-              <a:t>Capital Humano || BUK Soporte – Incidencia</a:t>
+              <a:t>Contabilidad || Integración Mecanica-SAE (Fase…</a:t>
             </a:r>
           </a:p>
         </p:txBody>
@@ -7591,7 +7591,7 @@
                 </a:solidFill>
                 <a:latin typeface="Calibri"/>
               </a:rPr>
-              <a:t>02/03/2026</a:t>
+              <a:t>14/08/2025</a:t>
             </a:r>
           </a:p>
         </p:txBody>
@@ -7626,7 +7626,7 @@
                 </a:solidFill>
                 <a:latin typeface="Calibri"/>
               </a:rPr>
-              <a:t>29/05/2026</a:t>
+              <a:t>02/06/2026</a:t>
             </a:r>
           </a:p>
         </p:txBody>
@@ -7661,7 +7661,7 @@
                 </a:solidFill>
                 <a:latin typeface="Calibri"/>
               </a:rPr>
-              <a:t>100%</a:t>
+              <a:t>96%</a:t>
             </a:r>
           </a:p>
         </p:txBody>
@@ -7727,11 +7727,11 @@
             <a:r>
               <a:rPr sz="700" b="1">
                 <a:solidFill>
-                  <a:srgbClr val="22C55E"/>
+                  <a:srgbClr val="EF4444"/>
                 </a:solidFill>
                 <a:latin typeface="Calibri"/>
               </a:rPr>
-              <a:t>Terminado</a:t>
+              <a:t>Atrasado</a:t>
             </a:r>
           </a:p>
         </p:txBody>
@@ -7754,7 +7754,7 @@
           </a:prstGeom>
           <a:pattFill prst="smGrid">
             <a:fgClr>
-              <a:srgbClr val="22C55E"/>
+              <a:srgbClr val="EF4444"/>
             </a:fgClr>
             <a:bgClr>
               <a:srgbClr val="FFFFFF"/>
@@ -7796,7 +7796,7 @@
         <p:spPr>
           <a:xfrm>
             <a:off x="5806440" y="1806968"/>
-            <a:ext cx="1691640" cy="103098"/>
+            <a:ext cx="1623974" cy="103098"/>
           </a:xfrm>
           <a:prstGeom prst="roundRect">
             <a:avLst>
@@ -7804,14 +7804,14 @@
             </a:avLst>
           </a:prstGeom>
           <a:solidFill>
-            <a:srgbClr val="22C55E"/>
+            <a:srgbClr val="EF4444"/>
           </a:solidFill>
           <a:ln>
             <a:noFill/>
           </a:ln>
           <a:effectLst>
             <a:outerShdw blurRad="76200" dist="19050" dir="5400000" rotWithShape="0">
-              <a:srgbClr val="22C55E">
+              <a:srgbClr val="EF4444">
                 <a:alpha val="55000"/>
               </a:srgbClr>
             </a:outerShdw>
@@ -7865,11 +7865,11 @@
             <a:r>
               <a:rPr sz="800" b="1">
                 <a:solidFill>
-                  <a:srgbClr val="22C55E"/>
+                  <a:srgbClr val="EF4444"/>
                 </a:solidFill>
                 <a:latin typeface="Calibri"/>
               </a:rPr>
-              <a:t>100%</a:t>
+              <a:t>96%</a:t>
             </a:r>
           </a:p>
         </p:txBody>
@@ -7983,7 +7983,7 @@
                 </a:solidFill>
                 <a:latin typeface="Calibri"/>
               </a:rPr>
-              <a:t>Capital Humano || BUK Campos Personalizados</a:t>
+              <a:t>Operaciones Fleet || Desarrollos</a:t>
             </a:r>
           </a:p>
         </p:txBody>
@@ -8018,7 +8018,7 @@
                 </a:solidFill>
                 <a:latin typeface="Calibri"/>
               </a:rPr>
-              <a:t>26/02/2026</a:t>
+              <a:t>08/08/2025</a:t>
             </a:r>
           </a:p>
         </p:txBody>
@@ -8053,7 +8053,7 @@
                 </a:solidFill>
                 <a:latin typeface="Calibri"/>
               </a:rPr>
-              <a:t>25/05/2026</a:t>
+              <a:t>05/06/2026</a:t>
             </a:r>
           </a:p>
         </p:txBody>
@@ -8410,7 +8410,7 @@
                 </a:solidFill>
                 <a:latin typeface="Calibri"/>
               </a:rPr>
-              <a:t>TRIM || Marketplace || Caddi</a:t>
+              <a:t>Operaciones Fleet || Lobby Fix</a:t>
             </a:r>
           </a:p>
         </p:txBody>
@@ -8445,7 +8445,7 @@
                 </a:solidFill>
                 <a:latin typeface="Calibri"/>
               </a:rPr>
-              <a:t>07/08/2025</a:t>
+              <a:t>11/11/2025</a:t>
             </a:r>
           </a:p>
         </p:txBody>
@@ -8480,7 +8480,7 @@
                 </a:solidFill>
                 <a:latin typeface="Calibri"/>
               </a:rPr>
-              <a:t>04/08/2026</a:t>
+              <a:t>29/06/2026</a:t>
             </a:r>
           </a:p>
         </p:txBody>
@@ -8515,7 +8515,7 @@
                 </a:solidFill>
                 <a:latin typeface="Calibri"/>
               </a:rPr>
-              <a:t>99%</a:t>
+              <a:t>100%</a:t>
             </a:r>
           </a:p>
         </p:txBody>
@@ -8550,7 +8550,7 @@
                 </a:solidFill>
                 <a:latin typeface="Calibri"/>
               </a:rPr>
-              <a:t>94%</a:t>
+              <a:t>100%</a:t>
             </a:r>
           </a:p>
         </p:txBody>
@@ -8585,7 +8585,7 @@
                 </a:solidFill>
                 <a:latin typeface="Calibri"/>
               </a:rPr>
-              <a:t>A tiempo</a:t>
+              <a:t>Terminado</a:t>
             </a:r>
           </a:p>
         </p:txBody>
@@ -8650,7 +8650,7 @@
         <p:spPr>
           <a:xfrm>
             <a:off x="5806440" y="2181872"/>
-            <a:ext cx="1674723" cy="103098"/>
+            <a:ext cx="1691640" cy="103098"/>
           </a:xfrm>
           <a:prstGeom prst="roundRect">
             <a:avLst>
@@ -8723,7 +8723,7 @@
                 </a:solidFill>
                 <a:latin typeface="Calibri"/>
               </a:rPr>
-              <a:t>99%</a:t>
+              <a:t>100%</a:t>
             </a:r>
           </a:p>
         </p:txBody>
@@ -8802,7 +8802,7 @@
                 </a:solidFill>
                 <a:latin typeface="Calibri"/>
               </a:rPr>
-              <a:t>Proyecto</a:t>
+              <a:t>Mejoras</a:t>
             </a:r>
           </a:p>
         </p:txBody>
@@ -8837,7 +8837,7 @@
                 </a:solidFill>
                 <a:latin typeface="Calibri"/>
               </a:rPr>
-              <a:t>Contabilidad || Integración Mecanica-SAE (Fase…</a:t>
+              <a:t>Operaciones Fleet || Nexcar || Desarrollos</a:t>
             </a:r>
           </a:p>
         </p:txBody>
@@ -8872,7 +8872,7 @@
                 </a:solidFill>
                 <a:latin typeface="Calibri"/>
               </a:rPr>
-              <a:t>14/08/2025</a:t>
+              <a:t>05/03/2026</a:t>
             </a:r>
           </a:p>
         </p:txBody>
@@ -8907,7 +8907,7 @@
                 </a:solidFill>
                 <a:latin typeface="Calibri"/>
               </a:rPr>
-              <a:t>02/06/2026</a:t>
+              <a:t>10/07/2026</a:t>
             </a:r>
           </a:p>
         </p:txBody>
@@ -8942,7 +8942,7 @@
                 </a:solidFill>
                 <a:latin typeface="Calibri"/>
               </a:rPr>
-              <a:t>96%</a:t>
+              <a:t>100%</a:t>
             </a:r>
           </a:p>
         </p:txBody>
@@ -9008,11 +9008,11 @@
             <a:r>
               <a:rPr sz="700" b="1">
                 <a:solidFill>
-                  <a:srgbClr val="EF4444"/>
+                  <a:srgbClr val="22C55E"/>
                 </a:solidFill>
                 <a:latin typeface="Calibri"/>
               </a:rPr>
-              <a:t>Atrasado</a:t>
+              <a:t>Terminado</a:t>
             </a:r>
           </a:p>
         </p:txBody>
@@ -9035,7 +9035,7 @@
           </a:prstGeom>
           <a:pattFill prst="smGrid">
             <a:fgClr>
-              <a:srgbClr val="EF4444"/>
+              <a:srgbClr val="22C55E"/>
             </a:fgClr>
             <a:bgClr>
               <a:srgbClr val="FFFFFF"/>
@@ -9077,7 +9077,7 @@
         <p:spPr>
           <a:xfrm>
             <a:off x="5806440" y="2369324"/>
-            <a:ext cx="1623974" cy="103098"/>
+            <a:ext cx="1691640" cy="103098"/>
           </a:xfrm>
           <a:prstGeom prst="roundRect">
             <a:avLst>
@@ -9085,14 +9085,14 @@
             </a:avLst>
           </a:prstGeom>
           <a:solidFill>
-            <a:srgbClr val="EF4444"/>
+            <a:srgbClr val="22C55E"/>
           </a:solidFill>
           <a:ln>
             <a:noFill/>
           </a:ln>
           <a:effectLst>
             <a:outerShdw blurRad="76200" dist="19050" dir="5400000" rotWithShape="0">
-              <a:srgbClr val="EF4444">
+              <a:srgbClr val="22C55E">
                 <a:alpha val="55000"/>
               </a:srgbClr>
             </a:outerShdw>
@@ -9146,11 +9146,11 @@
             <a:r>
               <a:rPr sz="800" b="1">
                 <a:solidFill>
-                  <a:srgbClr val="EF4444"/>
+                  <a:srgbClr val="22C55E"/>
                 </a:solidFill>
                 <a:latin typeface="Calibri"/>
               </a:rPr>
-              <a:t>96%</a:t>
+              <a:t>100%</a:t>
             </a:r>
           </a:p>
         </p:txBody>
@@ -9229,7 +9229,7 @@
                 </a:solidFill>
                 <a:latin typeface="Calibri"/>
               </a:rPr>
-              <a:t>Mejoras</a:t>
+              <a:t>Proyecto</a:t>
             </a:r>
           </a:p>
         </p:txBody>
@@ -9264,7 +9264,7 @@
                 </a:solidFill>
                 <a:latin typeface="Calibri"/>
               </a:rPr>
-              <a:t>Operaciones Fleet || Desarrollos</a:t>
+              <a:t>Operaciones Fleet || Nueva Instancia</a:t>
             </a:r>
           </a:p>
         </p:txBody>
@@ -9334,7 +9334,7 @@
                 </a:solidFill>
                 <a:latin typeface="Calibri"/>
               </a:rPr>
-              <a:t>05/06/2026</a:t>
+              <a:t>01/06/2026</a:t>
             </a:r>
           </a:p>
         </p:txBody>
@@ -9691,7 +9691,7 @@
                 </a:solidFill>
                 <a:latin typeface="Calibri"/>
               </a:rPr>
-              <a:t>Operaciones Fleet || Lobby Fix</a:t>
+              <a:t>Talleres || Integración Mecanica Mx - SAE</a:t>
             </a:r>
           </a:p>
         </p:txBody>
@@ -9726,7 +9726,7 @@
                 </a:solidFill>
                 <a:latin typeface="Calibri"/>
               </a:rPr>
-              <a:t>11/11/2025</a:t>
+              <a:t>20/04/2026</a:t>
             </a:r>
           </a:p>
         </p:txBody>
@@ -9761,7 +9761,7 @@
                 </a:solidFill>
                 <a:latin typeface="Calibri"/>
               </a:rPr>
-              <a:t>29/06/2026</a:t>
+              <a:t>20/07/2026</a:t>
             </a:r>
           </a:p>
         </p:txBody>
@@ -9796,7 +9796,7 @@
                 </a:solidFill>
                 <a:latin typeface="Calibri"/>
               </a:rPr>
-              <a:t>100%</a:t>
+              <a:t>91%</a:t>
             </a:r>
           </a:p>
         </p:txBody>
@@ -9862,11 +9862,11 @@
             <a:r>
               <a:rPr sz="700" b="1">
                 <a:solidFill>
-                  <a:srgbClr val="22C55E"/>
+                  <a:srgbClr val="EF4444"/>
                 </a:solidFill>
                 <a:latin typeface="Calibri"/>
               </a:rPr>
-              <a:t>Terminado</a:t>
+              <a:t>Atrasado</a:t>
             </a:r>
           </a:p>
         </p:txBody>
@@ -9889,7 +9889,7 @@
           </a:prstGeom>
           <a:pattFill prst="smGrid">
             <a:fgClr>
-              <a:srgbClr val="22C55E"/>
+              <a:srgbClr val="EF4444"/>
             </a:fgClr>
             <a:bgClr>
               <a:srgbClr val="FFFFFF"/>
@@ -9931,7 +9931,7 @@
         <p:spPr>
           <a:xfrm>
             <a:off x="5806440" y="2744228"/>
-            <a:ext cx="1691640" cy="103098"/>
+            <a:ext cx="1539392" cy="103098"/>
           </a:xfrm>
           <a:prstGeom prst="roundRect">
             <a:avLst>
@@ -9939,14 +9939,14 @@
             </a:avLst>
           </a:prstGeom>
           <a:solidFill>
-            <a:srgbClr val="22C55E"/>
+            <a:srgbClr val="EF4444"/>
           </a:solidFill>
           <a:ln>
             <a:noFill/>
           </a:ln>
           <a:effectLst>
             <a:outerShdw blurRad="76200" dist="19050" dir="5400000" rotWithShape="0">
-              <a:srgbClr val="22C55E">
+              <a:srgbClr val="EF4444">
                 <a:alpha val="55000"/>
               </a:srgbClr>
             </a:outerShdw>
@@ -10000,11 +10000,11 @@
             <a:r>
               <a:rPr sz="800" b="1">
                 <a:solidFill>
-                  <a:srgbClr val="22C55E"/>
+                  <a:srgbClr val="EF4444"/>
                 </a:solidFill>
                 <a:latin typeface="Calibri"/>
               </a:rPr>
-              <a:t>100%</a:t>
+              <a:t>91%</a:t>
             </a:r>
           </a:p>
         </p:txBody>
@@ -10118,7 +10118,7 @@
                 </a:solidFill>
                 <a:latin typeface="Calibri"/>
               </a:rPr>
-              <a:t>Operaciones Fleet || Nexcar || Desarrollos</a:t>
+              <a:t>Contabilidad || Integración Mecanica-SAE (Fase…</a:t>
             </a:r>
           </a:p>
         </p:txBody>
@@ -10153,7 +10153,7 @@
                 </a:solidFill>
                 <a:latin typeface="Calibri"/>
               </a:rPr>
-              <a:t>05/03/2026</a:t>
+              <a:t>21/04/2026</a:t>
             </a:r>
           </a:p>
         </p:txBody>
@@ -10188,7 +10188,7 @@
                 </a:solidFill>
                 <a:latin typeface="Calibri"/>
               </a:rPr>
-              <a:t>10/07/2026</a:t>
+              <a:t>12/06/2026</a:t>
             </a:r>
           </a:p>
         </p:txBody>
@@ -10223,7 +10223,7 @@
                 </a:solidFill>
                 <a:latin typeface="Calibri"/>
               </a:rPr>
-              <a:t>100%</a:t>
+              <a:t>99%</a:t>
             </a:r>
           </a:p>
         </p:txBody>
@@ -10289,11 +10289,11 @@
             <a:r>
               <a:rPr sz="700" b="1">
                 <a:solidFill>
-                  <a:srgbClr val="22C55E"/>
+                  <a:srgbClr val="EF4444"/>
                 </a:solidFill>
                 <a:latin typeface="Calibri"/>
               </a:rPr>
-              <a:t>Terminado</a:t>
+              <a:t>Atrasado</a:t>
             </a:r>
           </a:p>
         </p:txBody>
@@ -10316,7 +10316,7 @@
           </a:prstGeom>
           <a:pattFill prst="smGrid">
             <a:fgClr>
-              <a:srgbClr val="22C55E"/>
+              <a:srgbClr val="EF4444"/>
             </a:fgClr>
             <a:bgClr>
               <a:srgbClr val="FFFFFF"/>
@@ -10358,7 +10358,7 @@
         <p:spPr>
           <a:xfrm>
             <a:off x="5806440" y="2931680"/>
-            <a:ext cx="1691640" cy="103098"/>
+            <a:ext cx="1674723" cy="103098"/>
           </a:xfrm>
           <a:prstGeom prst="roundRect">
             <a:avLst>
@@ -10366,14 +10366,14 @@
             </a:avLst>
           </a:prstGeom>
           <a:solidFill>
-            <a:srgbClr val="22C55E"/>
+            <a:srgbClr val="EF4444"/>
           </a:solidFill>
           <a:ln>
             <a:noFill/>
           </a:ln>
           <a:effectLst>
             <a:outerShdw blurRad="76200" dist="19050" dir="5400000" rotWithShape="0">
-              <a:srgbClr val="22C55E">
+              <a:srgbClr val="EF4444">
                 <a:alpha val="55000"/>
               </a:srgbClr>
             </a:outerShdw>
@@ -10427,11 +10427,11 @@
             <a:r>
               <a:rPr sz="800" b="1">
                 <a:solidFill>
-                  <a:srgbClr val="22C55E"/>
+                  <a:srgbClr val="EF4444"/>
                 </a:solidFill>
                 <a:latin typeface="Calibri"/>
               </a:rPr>
-              <a:t>100%</a:t>
+              <a:t>99%</a:t>
             </a:r>
           </a:p>
         </p:txBody>
@@ -10545,7 +10545,7 @@
                 </a:solidFill>
                 <a:latin typeface="Calibri"/>
               </a:rPr>
-              <a:t>Operaciones Fleet || Data Lab</a:t>
+              <a:t>DTI || Integración de sistemas</a:t>
             </a:r>
           </a:p>
         </p:txBody>
@@ -10580,7 +10580,7 @@
                 </a:solidFill>
                 <a:latin typeface="Calibri"/>
               </a:rPr>
-              <a:t>20/01/2026</a:t>
+              <a:t>01/06/2026</a:t>
             </a:r>
           </a:p>
         </p:txBody>
@@ -10615,7 +10615,7 @@
                 </a:solidFill>
                 <a:latin typeface="Calibri"/>
               </a:rPr>
-              <a:t>22/06/2026</a:t>
+              <a:t>09/10/2026</a:t>
             </a:r>
           </a:p>
         </p:txBody>
@@ -10650,7 +10650,7 @@
                 </a:solidFill>
                 <a:latin typeface="Calibri"/>
               </a:rPr>
-              <a:t>100%</a:t>
+              <a:t>46%</a:t>
             </a:r>
           </a:p>
         </p:txBody>
@@ -10685,7 +10685,7 @@
                 </a:solidFill>
                 <a:latin typeface="Calibri"/>
               </a:rPr>
-              <a:t>100%</a:t>
+              <a:t>46%</a:t>
             </a:r>
           </a:p>
         </p:txBody>
@@ -10720,7 +10720,7 @@
                 </a:solidFill>
                 <a:latin typeface="Calibri"/>
               </a:rPr>
-              <a:t>Terminado</a:t>
+              <a:t>A tiempo</a:t>
             </a:r>
           </a:p>
         </p:txBody>
@@ -10785,7 +10785,7 @@
         <p:spPr>
           <a:xfrm>
             <a:off x="5806440" y="3119132"/>
-            <a:ext cx="1691640" cy="103098"/>
+            <a:ext cx="778154" cy="103098"/>
           </a:xfrm>
           <a:prstGeom prst="roundRect">
             <a:avLst>
@@ -10858,7 +10858,7 @@
                 </a:solidFill>
                 <a:latin typeface="Calibri"/>
               </a:rPr>
-              <a:t>100%</a:t>
+              <a:t>46%</a:t>
             </a:r>
           </a:p>
         </p:txBody>
@@ -10937,7 +10937,7 @@
                 </a:solidFill>
                 <a:latin typeface="Calibri"/>
               </a:rPr>
-              <a:t>Proyecto</a:t>
+              <a:t>Mejoras</a:t>
             </a:r>
           </a:p>
         </p:txBody>
@@ -10972,7 +10972,7 @@
                 </a:solidFill>
                 <a:latin typeface="Calibri"/>
               </a:rPr>
-              <a:t>Cartera || Cambio de Pac de Timbrado</a:t>
+              <a:t>Capital Humano || BUK Personalizados Fase 2</a:t>
             </a:r>
           </a:p>
         </p:txBody>
@@ -11007,7 +11007,7 @@
                 </a:solidFill>
                 <a:latin typeface="Calibri"/>
               </a:rPr>
-              <a:t>07/07/2025</a:t>
+              <a:t>08/06/2026</a:t>
             </a:r>
           </a:p>
         </p:txBody>
@@ -11042,7 +11042,7 @@
                 </a:solidFill>
                 <a:latin typeface="Calibri"/>
               </a:rPr>
-              <a:t>25/02/2026</a:t>
+              <a:t>06/08/2026</a:t>
             </a:r>
           </a:p>
         </p:txBody>
@@ -11077,7 +11077,7 @@
                 </a:solidFill>
                 <a:latin typeface="Calibri"/>
               </a:rPr>
-              <a:t>100%</a:t>
+              <a:t>91%</a:t>
             </a:r>
           </a:p>
         </p:txBody>
@@ -11112,7 +11112,7 @@
                 </a:solidFill>
                 <a:latin typeface="Calibri"/>
               </a:rPr>
-              <a:t>100%</a:t>
+              <a:t>89%</a:t>
             </a:r>
           </a:p>
         </p:txBody>
@@ -11147,7 +11147,7 @@
                 </a:solidFill>
                 <a:latin typeface="Calibri"/>
               </a:rPr>
-              <a:t>Terminado</a:t>
+              <a:t>A tiempo</a:t>
             </a:r>
           </a:p>
         </p:txBody>
@@ -11212,7 +11212,7 @@
         <p:spPr>
           <a:xfrm>
             <a:off x="5806440" y="3306584"/>
-            <a:ext cx="1691640" cy="103098"/>
+            <a:ext cx="1539392" cy="103098"/>
           </a:xfrm>
           <a:prstGeom prst="roundRect">
             <a:avLst>
@@ -11285,7 +11285,7 @@
                 </a:solidFill>
                 <a:latin typeface="Calibri"/>
               </a:rPr>
-              <a:t>100%</a:t>
+              <a:t>91%</a:t>
             </a:r>
           </a:p>
         </p:txBody>
@@ -11364,7 +11364,7 @@
                 </a:solidFill>
                 <a:latin typeface="Calibri"/>
               </a:rPr>
-              <a:t>Proyecto</a:t>
+              <a:t>Mejoras</a:t>
             </a:r>
           </a:p>
         </p:txBody>
@@ -11399,7 +11399,7 @@
                 </a:solidFill>
                 <a:latin typeface="Calibri"/>
               </a:rPr>
-              <a:t>Operaciones Fleet || Nueva Instancia</a:t>
+              <a:t>Operaciones Fleet || Adcontent - Sfleet</a:t>
             </a:r>
           </a:p>
         </p:txBody>
@@ -11434,7 +11434,7 @@
                 </a:solidFill>
                 <a:latin typeface="Calibri"/>
               </a:rPr>
-              <a:t>08/08/2025</a:t>
+              <a:t>15/06/2026</a:t>
             </a:r>
           </a:p>
         </p:txBody>
@@ -11469,7 +11469,7 @@
                 </a:solidFill>
                 <a:latin typeface="Calibri"/>
               </a:rPr>
-              <a:t>01/06/2026</a:t>
+              <a:t>17/05/2027</a:t>
             </a:r>
           </a:p>
         </p:txBody>
@@ -11504,7 +11504,7 @@
                 </a:solidFill>
                 <a:latin typeface="Calibri"/>
               </a:rPr>
-              <a:t>100%</a:t>
+              <a:t>17%</a:t>
             </a:r>
           </a:p>
         </p:txBody>
@@ -11539,7 +11539,7 @@
                 </a:solidFill>
                 <a:latin typeface="Calibri"/>
               </a:rPr>
-              <a:t>100%</a:t>
+              <a:t>13%</a:t>
             </a:r>
           </a:p>
         </p:txBody>
@@ -11574,7 +11574,7 @@
                 </a:solidFill>
                 <a:latin typeface="Calibri"/>
               </a:rPr>
-              <a:t>Terminado</a:t>
+              <a:t>A tiempo</a:t>
             </a:r>
           </a:p>
         </p:txBody>
@@ -11639,7 +11639,7 @@
         <p:spPr>
           <a:xfrm>
             <a:off x="5806440" y="3494036"/>
-            <a:ext cx="1691640" cy="103098"/>
+            <a:ext cx="287578" cy="103098"/>
           </a:xfrm>
           <a:prstGeom prst="roundRect">
             <a:avLst>
@@ -11712,2569 +11712,7 @@
                 </a:solidFill>
                 <a:latin typeface="Calibri"/>
               </a:rPr>
-              <a:t>100%</a:t>
-            </a:r>
-          </a:p>
-        </p:txBody>
-      </p:sp>
-      <p:sp>
-        <p:nvSpPr>
-          <p:cNvPr id="167" name="Rectangle 166"/>
-          <p:cNvSpPr/>
-          <p:nvPr/>
-        </p:nvSpPr>
-        <p:spPr>
-          <a:xfrm>
-            <a:off x="73152" y="3639312"/>
-            <a:ext cx="8741664" cy="187452"/>
-          </a:xfrm>
-          <a:prstGeom prst="rect">
-            <a:avLst/>
-          </a:prstGeom>
-          <a:solidFill>
-            <a:srgbClr val="F5F7FA"/>
-          </a:solidFill>
-          <a:ln>
-            <a:noFill/>
-          </a:ln>
-          <a:effectLst/>
-        </p:spPr>
-        <p:style>
-          <a:lnRef idx="1">
-            <a:schemeClr val="accent1"/>
-          </a:lnRef>
-          <a:fillRef idx="3">
-            <a:schemeClr val="accent1"/>
-          </a:fillRef>
-          <a:effectRef idx="2">
-            <a:schemeClr val="accent1"/>
-          </a:effectRef>
-          <a:fontRef idx="minor">
-            <a:schemeClr val="lt1"/>
-          </a:fontRef>
-        </p:style>
-        <p:txBody>
-          <a:bodyPr rtlCol="0" anchor="ctr"/>
-          <a:lstStyle/>
-          <a:p>
-            <a:pPr algn="ctr"/>
-          </a:p>
-        </p:txBody>
-      </p:sp>
-      <p:sp>
-        <p:nvSpPr>
-          <p:cNvPr id="168" name="TextBox 167"/>
-          <p:cNvSpPr txBox="1"/>
-          <p:nvPr/>
-        </p:nvSpPr>
-        <p:spPr>
-          <a:xfrm>
-            <a:off x="91440" y="3639312"/>
-            <a:ext cx="722375" cy="187452"/>
-          </a:xfrm>
-          <a:prstGeom prst="rect">
-            <a:avLst/>
-          </a:prstGeom>
-          <a:noFill/>
-        </p:spPr>
-        <p:txBody>
-          <a:bodyPr wrap="none" lIns="0" rIns="0" tIns="0" bIns="0" anchor="ctr">
-            <a:spAutoFit/>
-          </a:bodyPr>
-          <a:lstStyle/>
-          <a:p>
-            <a:pPr algn="ctr"/>
-            <a:r>
-              <a:rPr sz="700" b="1">
-                <a:solidFill>
-                  <a:srgbClr val="1A2340"/>
-                </a:solidFill>
-                <a:latin typeface="Calibri"/>
-              </a:rPr>
-              <a:t>Mejoras</a:t>
-            </a:r>
-          </a:p>
-        </p:txBody>
-      </p:sp>
-      <p:sp>
-        <p:nvSpPr>
-          <p:cNvPr id="169" name="TextBox 168"/>
-          <p:cNvSpPr txBox="1"/>
-          <p:nvPr/>
-        </p:nvSpPr>
-        <p:spPr>
-          <a:xfrm>
-            <a:off x="850392" y="3639312"/>
-            <a:ext cx="2432304" cy="187452"/>
-          </a:xfrm>
-          <a:prstGeom prst="rect">
-            <a:avLst/>
-          </a:prstGeom>
-          <a:noFill/>
-        </p:spPr>
-        <p:txBody>
-          <a:bodyPr wrap="none" lIns="0" rIns="0" tIns="0" bIns="0" anchor="ctr">
-            <a:spAutoFit/>
-          </a:bodyPr>
-          <a:lstStyle/>
-          <a:p>
-            <a:pPr algn="l"/>
-            <a:r>
-              <a:rPr sz="700" b="0">
-                <a:solidFill>
-                  <a:srgbClr val="1A2340"/>
-                </a:solidFill>
-                <a:latin typeface="Calibri"/>
-              </a:rPr>
-              <a:t>Tesoreria || Adcontent H2H</a:t>
-            </a:r>
-          </a:p>
-        </p:txBody>
-      </p:sp>
-      <p:sp>
-        <p:nvSpPr>
-          <p:cNvPr id="170" name="TextBox 169"/>
-          <p:cNvSpPr txBox="1"/>
-          <p:nvPr/>
-        </p:nvSpPr>
-        <p:spPr>
-          <a:xfrm>
-            <a:off x="3319272" y="3639312"/>
-            <a:ext cx="630936" cy="187452"/>
-          </a:xfrm>
-          <a:prstGeom prst="rect">
-            <a:avLst/>
-          </a:prstGeom>
-          <a:noFill/>
-        </p:spPr>
-        <p:txBody>
-          <a:bodyPr wrap="none" lIns="0" rIns="0" tIns="0" bIns="0" anchor="ctr">
-            <a:spAutoFit/>
-          </a:bodyPr>
-          <a:lstStyle/>
-          <a:p>
-            <a:pPr algn="ctr"/>
-            <a:r>
-              <a:rPr sz="700" b="0">
-                <a:solidFill>
-                  <a:srgbClr val="555555"/>
-                </a:solidFill>
-                <a:latin typeface="Calibri"/>
-              </a:rPr>
-              <a:t>07/04/2026</a:t>
-            </a:r>
-          </a:p>
-        </p:txBody>
-      </p:sp>
-      <p:sp>
-        <p:nvSpPr>
-          <p:cNvPr id="171" name="TextBox 170"/>
-          <p:cNvSpPr txBox="1"/>
-          <p:nvPr/>
-        </p:nvSpPr>
-        <p:spPr>
-          <a:xfrm>
-            <a:off x="3986783" y="3639312"/>
-            <a:ext cx="630936" cy="187452"/>
-          </a:xfrm>
-          <a:prstGeom prst="rect">
-            <a:avLst/>
-          </a:prstGeom>
-          <a:noFill/>
-        </p:spPr>
-        <p:txBody>
-          <a:bodyPr wrap="none" lIns="0" rIns="0" tIns="0" bIns="0" anchor="ctr">
-            <a:spAutoFit/>
-          </a:bodyPr>
-          <a:lstStyle/>
-          <a:p>
-            <a:pPr algn="ctr"/>
-            <a:r>
-              <a:rPr sz="700" b="0">
-                <a:solidFill>
-                  <a:srgbClr val="555555"/>
-                </a:solidFill>
-                <a:latin typeface="Calibri"/>
-              </a:rPr>
-              <a:t>26/08/2026</a:t>
-            </a:r>
-          </a:p>
-        </p:txBody>
-      </p:sp>
-      <p:sp>
-        <p:nvSpPr>
-          <p:cNvPr id="172" name="TextBox 171"/>
-          <p:cNvSpPr txBox="1"/>
-          <p:nvPr/>
-        </p:nvSpPr>
-        <p:spPr>
-          <a:xfrm>
-            <a:off x="4654296" y="3639312"/>
-            <a:ext cx="493775" cy="187452"/>
-          </a:xfrm>
-          <a:prstGeom prst="rect">
-            <a:avLst/>
-          </a:prstGeom>
-          <a:noFill/>
-        </p:spPr>
-        <p:txBody>
-          <a:bodyPr wrap="none" lIns="0" rIns="0" tIns="0" bIns="0" anchor="ctr">
-            <a:spAutoFit/>
-          </a:bodyPr>
-          <a:lstStyle/>
-          <a:p>
-            <a:pPr algn="ctr"/>
-            <a:r>
-              <a:rPr sz="700" b="1">
-                <a:solidFill>
-                  <a:srgbClr val="1A2340"/>
-                </a:solidFill>
-                <a:latin typeface="Calibri"/>
-              </a:rPr>
-              <a:t>22%</a:t>
-            </a:r>
-          </a:p>
-        </p:txBody>
-      </p:sp>
-      <p:sp>
-        <p:nvSpPr>
-          <p:cNvPr id="173" name="TextBox 172"/>
-          <p:cNvSpPr txBox="1"/>
-          <p:nvPr/>
-        </p:nvSpPr>
-        <p:spPr>
-          <a:xfrm>
-            <a:off x="5184648" y="3639312"/>
-            <a:ext cx="557784" cy="187452"/>
-          </a:xfrm>
-          <a:prstGeom prst="rect">
-            <a:avLst/>
-          </a:prstGeom>
-          <a:noFill/>
-        </p:spPr>
-        <p:txBody>
-          <a:bodyPr wrap="none" lIns="0" rIns="0" tIns="0" bIns="0" anchor="ctr">
-            <a:spAutoFit/>
-          </a:bodyPr>
-          <a:lstStyle/>
-          <a:p>
-            <a:pPr algn="ctr"/>
-            <a:r>
-              <a:rPr sz="700" b="0">
-                <a:solidFill>
-                  <a:srgbClr val="555555"/>
-                </a:solidFill>
-                <a:latin typeface="Calibri"/>
-              </a:rPr>
-              <a:t>70%</a:t>
-            </a:r>
-          </a:p>
-        </p:txBody>
-      </p:sp>
-      <p:sp>
-        <p:nvSpPr>
-          <p:cNvPr id="174" name="TextBox 173"/>
-          <p:cNvSpPr txBox="1"/>
-          <p:nvPr/>
-        </p:nvSpPr>
-        <p:spPr>
-          <a:xfrm>
-            <a:off x="7991856" y="3639312"/>
-            <a:ext cx="804672" cy="187452"/>
-          </a:xfrm>
-          <a:prstGeom prst="rect">
-            <a:avLst/>
-          </a:prstGeom>
-          <a:noFill/>
-        </p:spPr>
-        <p:txBody>
-          <a:bodyPr wrap="none" lIns="0" rIns="0" tIns="0" bIns="0" anchor="ctr">
-            <a:spAutoFit/>
-          </a:bodyPr>
-          <a:lstStyle/>
-          <a:p>
-            <a:pPr algn="ctr"/>
-            <a:r>
-              <a:rPr sz="700" b="1">
-                <a:solidFill>
-                  <a:srgbClr val="EF4444"/>
-                </a:solidFill>
-                <a:latin typeface="Calibri"/>
-              </a:rPr>
-              <a:t>Atrasado</a:t>
-            </a:r>
-          </a:p>
-        </p:txBody>
-      </p:sp>
-      <p:sp>
-        <p:nvSpPr>
-          <p:cNvPr id="175" name="Rounded Rectangle 174"/>
-          <p:cNvSpPr/>
-          <p:nvPr/>
-        </p:nvSpPr>
-        <p:spPr>
-          <a:xfrm>
-            <a:off x="5806440" y="3681488"/>
-            <a:ext cx="1691640" cy="103098"/>
-          </a:xfrm>
-          <a:prstGeom prst="roundRect">
-            <a:avLst>
-              <a:gd name="adj" fmla="val 50000"/>
-            </a:avLst>
-          </a:prstGeom>
-          <a:pattFill prst="smGrid">
-            <a:fgClr>
-              <a:srgbClr val="EF4444"/>
-            </a:fgClr>
-            <a:bgClr>
-              <a:srgbClr val="FFFFFF"/>
-            </a:bgClr>
-          </a:pattFill>
-          <a:ln>
-            <a:noFill/>
-          </a:ln>
-          <a:effectLst/>
-        </p:spPr>
-        <p:style>
-          <a:lnRef idx="1">
-            <a:schemeClr val="accent1"/>
-          </a:lnRef>
-          <a:fillRef idx="3">
-            <a:schemeClr val="accent1"/>
-          </a:fillRef>
-          <a:effectRef idx="2">
-            <a:schemeClr val="accent1"/>
-          </a:effectRef>
-          <a:fontRef idx="minor">
-            <a:schemeClr val="lt1"/>
-          </a:fontRef>
-        </p:style>
-        <p:txBody>
-          <a:bodyPr rtlCol="0" anchor="ctr"/>
-          <a:lstStyle/>
-          <a:p>
-            <a:pPr algn="ctr"/>
-          </a:p>
-        </p:txBody>
-      </p:sp>
-      <p:sp>
-        <p:nvSpPr>
-          <p:cNvPr id="176" name="Rounded Rectangle 175"/>
-          <p:cNvSpPr/>
-          <p:nvPr/>
-        </p:nvSpPr>
-        <p:spPr>
-          <a:xfrm>
-            <a:off x="5806440" y="3681488"/>
-            <a:ext cx="372160" cy="103098"/>
-          </a:xfrm>
-          <a:prstGeom prst="roundRect">
-            <a:avLst>
-              <a:gd name="adj" fmla="val 50000"/>
-            </a:avLst>
-          </a:prstGeom>
-          <a:solidFill>
-            <a:srgbClr val="EF4444"/>
-          </a:solidFill>
-          <a:ln>
-            <a:noFill/>
-          </a:ln>
-          <a:effectLst>
-            <a:outerShdw blurRad="76200" dist="19050" dir="5400000" rotWithShape="0">
-              <a:srgbClr val="EF4444">
-                <a:alpha val="55000"/>
-              </a:srgbClr>
-            </a:outerShdw>
-          </a:effectLst>
-        </p:spPr>
-        <p:style>
-          <a:lnRef idx="1">
-            <a:schemeClr val="accent1"/>
-          </a:lnRef>
-          <a:fillRef idx="3">
-            <a:schemeClr val="accent1"/>
-          </a:fillRef>
-          <a:effectRef idx="2">
-            <a:schemeClr val="accent1"/>
-          </a:effectRef>
-          <a:fontRef idx="minor">
-            <a:schemeClr val="lt1"/>
-          </a:fontRef>
-        </p:style>
-        <p:txBody>
-          <a:bodyPr rtlCol="0" anchor="ctr"/>
-          <a:lstStyle/>
-          <a:p>
-            <a:pPr algn="ctr"/>
-          </a:p>
-        </p:txBody>
-      </p:sp>
-      <p:sp>
-        <p:nvSpPr>
-          <p:cNvPr id="177" name="TextBox 176"/>
-          <p:cNvSpPr txBox="1"/>
-          <p:nvPr/>
-        </p:nvSpPr>
-        <p:spPr>
-          <a:xfrm>
-            <a:off x="7543800" y="3649484"/>
-            <a:ext cx="457200" cy="167106"/>
-          </a:xfrm>
-          <a:prstGeom prst="rect">
-            <a:avLst/>
-          </a:prstGeom>
-          <a:noFill/>
-        </p:spPr>
-        <p:txBody>
-          <a:bodyPr wrap="none" lIns="0" rIns="0" tIns="0" bIns="0">
-            <a:spAutoFit/>
-          </a:bodyPr>
-          <a:lstStyle/>
-          <a:p>
-            <a:pPr algn="l"/>
-            <a:r>
-              <a:rPr sz="800" b="1">
-                <a:solidFill>
-                  <a:srgbClr val="EF4444"/>
-                </a:solidFill>
-                <a:latin typeface="Calibri"/>
-              </a:rPr>
-              <a:t>22%</a:t>
-            </a:r>
-          </a:p>
-        </p:txBody>
-      </p:sp>
-      <p:sp>
-        <p:nvSpPr>
-          <p:cNvPr id="178" name="Rectangle 177"/>
-          <p:cNvSpPr/>
-          <p:nvPr/>
-        </p:nvSpPr>
-        <p:spPr>
-          <a:xfrm>
-            <a:off x="73152" y="3826764"/>
-            <a:ext cx="8741664" cy="187452"/>
-          </a:xfrm>
-          <a:prstGeom prst="rect">
-            <a:avLst/>
-          </a:prstGeom>
-          <a:solidFill>
-            <a:srgbClr val="FFFFFF"/>
-          </a:solidFill>
-          <a:ln>
-            <a:noFill/>
-          </a:ln>
-          <a:effectLst/>
-        </p:spPr>
-        <p:style>
-          <a:lnRef idx="1">
-            <a:schemeClr val="accent1"/>
-          </a:lnRef>
-          <a:fillRef idx="3">
-            <a:schemeClr val="accent1"/>
-          </a:fillRef>
-          <a:effectRef idx="2">
-            <a:schemeClr val="accent1"/>
-          </a:effectRef>
-          <a:fontRef idx="minor">
-            <a:schemeClr val="lt1"/>
-          </a:fontRef>
-        </p:style>
-        <p:txBody>
-          <a:bodyPr rtlCol="0" anchor="ctr"/>
-          <a:lstStyle/>
-          <a:p>
-            <a:pPr algn="ctr"/>
-          </a:p>
-        </p:txBody>
-      </p:sp>
-      <p:sp>
-        <p:nvSpPr>
-          <p:cNvPr id="179" name="TextBox 178"/>
-          <p:cNvSpPr txBox="1"/>
-          <p:nvPr/>
-        </p:nvSpPr>
-        <p:spPr>
-          <a:xfrm>
-            <a:off x="91440" y="3826764"/>
-            <a:ext cx="722375" cy="187452"/>
-          </a:xfrm>
-          <a:prstGeom prst="rect">
-            <a:avLst/>
-          </a:prstGeom>
-          <a:noFill/>
-        </p:spPr>
-        <p:txBody>
-          <a:bodyPr wrap="none" lIns="0" rIns="0" tIns="0" bIns="0" anchor="ctr">
-            <a:spAutoFit/>
-          </a:bodyPr>
-          <a:lstStyle/>
-          <a:p>
-            <a:pPr algn="ctr"/>
-            <a:r>
-              <a:rPr sz="700" b="1">
-                <a:solidFill>
-                  <a:srgbClr val="1A2340"/>
-                </a:solidFill>
-                <a:latin typeface="Calibri"/>
-              </a:rPr>
-              <a:t>Proyecto</a:t>
-            </a:r>
-          </a:p>
-        </p:txBody>
-      </p:sp>
-      <p:sp>
-        <p:nvSpPr>
-          <p:cNvPr id="180" name="TextBox 179"/>
-          <p:cNvSpPr txBox="1"/>
-          <p:nvPr/>
-        </p:nvSpPr>
-        <p:spPr>
-          <a:xfrm>
-            <a:off x="850392" y="3826764"/>
-            <a:ext cx="2432304" cy="187452"/>
-          </a:xfrm>
-          <a:prstGeom prst="rect">
-            <a:avLst/>
-          </a:prstGeom>
-          <a:noFill/>
-        </p:spPr>
-        <p:txBody>
-          <a:bodyPr wrap="none" lIns="0" rIns="0" tIns="0" bIns="0" anchor="ctr">
-            <a:spAutoFit/>
-          </a:bodyPr>
-          <a:lstStyle/>
-          <a:p>
-            <a:pPr algn="l"/>
-            <a:r>
-              <a:rPr sz="700" b="0">
-                <a:solidFill>
-                  <a:srgbClr val="1A2340"/>
-                </a:solidFill>
-                <a:latin typeface="Calibri"/>
-              </a:rPr>
-              <a:t>Talleres || Integración Mecanica Mx - SAE</a:t>
-            </a:r>
-          </a:p>
-        </p:txBody>
-      </p:sp>
-      <p:sp>
-        <p:nvSpPr>
-          <p:cNvPr id="181" name="TextBox 180"/>
-          <p:cNvSpPr txBox="1"/>
-          <p:nvPr/>
-        </p:nvSpPr>
-        <p:spPr>
-          <a:xfrm>
-            <a:off x="3319272" y="3826764"/>
-            <a:ext cx="630936" cy="187452"/>
-          </a:xfrm>
-          <a:prstGeom prst="rect">
-            <a:avLst/>
-          </a:prstGeom>
-          <a:noFill/>
-        </p:spPr>
-        <p:txBody>
-          <a:bodyPr wrap="none" lIns="0" rIns="0" tIns="0" bIns="0" anchor="ctr">
-            <a:spAutoFit/>
-          </a:bodyPr>
-          <a:lstStyle/>
-          <a:p>
-            <a:pPr algn="ctr"/>
-            <a:r>
-              <a:rPr sz="700" b="0">
-                <a:solidFill>
-                  <a:srgbClr val="555555"/>
-                </a:solidFill>
-                <a:latin typeface="Calibri"/>
-              </a:rPr>
-              <a:t>20/04/2026</a:t>
-            </a:r>
-          </a:p>
-        </p:txBody>
-      </p:sp>
-      <p:sp>
-        <p:nvSpPr>
-          <p:cNvPr id="182" name="TextBox 181"/>
-          <p:cNvSpPr txBox="1"/>
-          <p:nvPr/>
-        </p:nvSpPr>
-        <p:spPr>
-          <a:xfrm>
-            <a:off x="3986783" y="3826764"/>
-            <a:ext cx="630936" cy="187452"/>
-          </a:xfrm>
-          <a:prstGeom prst="rect">
-            <a:avLst/>
-          </a:prstGeom>
-          <a:noFill/>
-        </p:spPr>
-        <p:txBody>
-          <a:bodyPr wrap="none" lIns="0" rIns="0" tIns="0" bIns="0" anchor="ctr">
-            <a:spAutoFit/>
-          </a:bodyPr>
-          <a:lstStyle/>
-          <a:p>
-            <a:pPr algn="ctr"/>
-            <a:r>
-              <a:rPr sz="700" b="0">
-                <a:solidFill>
-                  <a:srgbClr val="555555"/>
-                </a:solidFill>
-                <a:latin typeface="Calibri"/>
-              </a:rPr>
-              <a:t>20/07/2026</a:t>
-            </a:r>
-          </a:p>
-        </p:txBody>
-      </p:sp>
-      <p:sp>
-        <p:nvSpPr>
-          <p:cNvPr id="183" name="TextBox 182"/>
-          <p:cNvSpPr txBox="1"/>
-          <p:nvPr/>
-        </p:nvSpPr>
-        <p:spPr>
-          <a:xfrm>
-            <a:off x="4654296" y="3826764"/>
-            <a:ext cx="493775" cy="187452"/>
-          </a:xfrm>
-          <a:prstGeom prst="rect">
-            <a:avLst/>
-          </a:prstGeom>
-          <a:noFill/>
-        </p:spPr>
-        <p:txBody>
-          <a:bodyPr wrap="none" lIns="0" rIns="0" tIns="0" bIns="0" anchor="ctr">
-            <a:spAutoFit/>
-          </a:bodyPr>
-          <a:lstStyle/>
-          <a:p>
-            <a:pPr algn="ctr"/>
-            <a:r>
-              <a:rPr sz="700" b="1">
-                <a:solidFill>
-                  <a:srgbClr val="1A2340"/>
-                </a:solidFill>
-                <a:latin typeface="Calibri"/>
-              </a:rPr>
-              <a:t>91%</a:t>
-            </a:r>
-          </a:p>
-        </p:txBody>
-      </p:sp>
-      <p:sp>
-        <p:nvSpPr>
-          <p:cNvPr id="184" name="TextBox 183"/>
-          <p:cNvSpPr txBox="1"/>
-          <p:nvPr/>
-        </p:nvSpPr>
-        <p:spPr>
-          <a:xfrm>
-            <a:off x="5184648" y="3826764"/>
-            <a:ext cx="557784" cy="187452"/>
-          </a:xfrm>
-          <a:prstGeom prst="rect">
-            <a:avLst/>
-          </a:prstGeom>
-          <a:noFill/>
-        </p:spPr>
-        <p:txBody>
-          <a:bodyPr wrap="none" lIns="0" rIns="0" tIns="0" bIns="0" anchor="ctr">
-            <a:spAutoFit/>
-          </a:bodyPr>
-          <a:lstStyle/>
-          <a:p>
-            <a:pPr algn="ctr"/>
-            <a:r>
-              <a:rPr sz="700" b="0">
-                <a:solidFill>
-                  <a:srgbClr val="555555"/>
-                </a:solidFill>
-                <a:latin typeface="Calibri"/>
-              </a:rPr>
-              <a:t>94%</a:t>
-            </a:r>
-          </a:p>
-        </p:txBody>
-      </p:sp>
-      <p:sp>
-        <p:nvSpPr>
-          <p:cNvPr id="185" name="TextBox 184"/>
-          <p:cNvSpPr txBox="1"/>
-          <p:nvPr/>
-        </p:nvSpPr>
-        <p:spPr>
-          <a:xfrm>
-            <a:off x="7991856" y="3826764"/>
-            <a:ext cx="804672" cy="187452"/>
-          </a:xfrm>
-          <a:prstGeom prst="rect">
-            <a:avLst/>
-          </a:prstGeom>
-          <a:noFill/>
-        </p:spPr>
-        <p:txBody>
-          <a:bodyPr wrap="none" lIns="0" rIns="0" tIns="0" bIns="0" anchor="ctr">
-            <a:spAutoFit/>
-          </a:bodyPr>
-          <a:lstStyle/>
-          <a:p>
-            <a:pPr algn="ctr"/>
-            <a:r>
-              <a:rPr sz="700" b="1">
-                <a:solidFill>
-                  <a:srgbClr val="F59E0B"/>
-                </a:solidFill>
-                <a:latin typeface="Calibri"/>
-              </a:rPr>
-              <a:t>Riesgo de atraso</a:t>
-            </a:r>
-          </a:p>
-        </p:txBody>
-      </p:sp>
-      <p:sp>
-        <p:nvSpPr>
-          <p:cNvPr id="186" name="Rounded Rectangle 185"/>
-          <p:cNvSpPr/>
-          <p:nvPr/>
-        </p:nvSpPr>
-        <p:spPr>
-          <a:xfrm>
-            <a:off x="5806440" y="3868940"/>
-            <a:ext cx="1691640" cy="103098"/>
-          </a:xfrm>
-          <a:prstGeom prst="roundRect">
-            <a:avLst>
-              <a:gd name="adj" fmla="val 50000"/>
-            </a:avLst>
-          </a:prstGeom>
-          <a:pattFill prst="smGrid">
-            <a:fgClr>
-              <a:srgbClr val="F59E0B"/>
-            </a:fgClr>
-            <a:bgClr>
-              <a:srgbClr val="FFFFFF"/>
-            </a:bgClr>
-          </a:pattFill>
-          <a:ln>
-            <a:noFill/>
-          </a:ln>
-          <a:effectLst/>
-        </p:spPr>
-        <p:style>
-          <a:lnRef idx="1">
-            <a:schemeClr val="accent1"/>
-          </a:lnRef>
-          <a:fillRef idx="3">
-            <a:schemeClr val="accent1"/>
-          </a:fillRef>
-          <a:effectRef idx="2">
-            <a:schemeClr val="accent1"/>
-          </a:effectRef>
-          <a:fontRef idx="minor">
-            <a:schemeClr val="lt1"/>
-          </a:fontRef>
-        </p:style>
-        <p:txBody>
-          <a:bodyPr rtlCol="0" anchor="ctr"/>
-          <a:lstStyle/>
-          <a:p>
-            <a:pPr algn="ctr"/>
-          </a:p>
-        </p:txBody>
-      </p:sp>
-      <p:sp>
-        <p:nvSpPr>
-          <p:cNvPr id="187" name="Rounded Rectangle 186"/>
-          <p:cNvSpPr/>
-          <p:nvPr/>
-        </p:nvSpPr>
-        <p:spPr>
-          <a:xfrm>
-            <a:off x="5806440" y="3868940"/>
-            <a:ext cx="1539392" cy="103098"/>
-          </a:xfrm>
-          <a:prstGeom prst="roundRect">
-            <a:avLst>
-              <a:gd name="adj" fmla="val 50000"/>
-            </a:avLst>
-          </a:prstGeom>
-          <a:solidFill>
-            <a:srgbClr val="F59E0B"/>
-          </a:solidFill>
-          <a:ln>
-            <a:noFill/>
-          </a:ln>
-          <a:effectLst>
-            <a:outerShdw blurRad="76200" dist="19050" dir="5400000" rotWithShape="0">
-              <a:srgbClr val="F59E0B">
-                <a:alpha val="55000"/>
-              </a:srgbClr>
-            </a:outerShdw>
-          </a:effectLst>
-        </p:spPr>
-        <p:style>
-          <a:lnRef idx="1">
-            <a:schemeClr val="accent1"/>
-          </a:lnRef>
-          <a:fillRef idx="3">
-            <a:schemeClr val="accent1"/>
-          </a:fillRef>
-          <a:effectRef idx="2">
-            <a:schemeClr val="accent1"/>
-          </a:effectRef>
-          <a:fontRef idx="minor">
-            <a:schemeClr val="lt1"/>
-          </a:fontRef>
-        </p:style>
-        <p:txBody>
-          <a:bodyPr rtlCol="0" anchor="ctr"/>
-          <a:lstStyle/>
-          <a:p>
-            <a:pPr algn="ctr"/>
-          </a:p>
-        </p:txBody>
-      </p:sp>
-      <p:sp>
-        <p:nvSpPr>
-          <p:cNvPr id="188" name="TextBox 187"/>
-          <p:cNvSpPr txBox="1"/>
-          <p:nvPr/>
-        </p:nvSpPr>
-        <p:spPr>
-          <a:xfrm>
-            <a:off x="7543800" y="3836936"/>
-            <a:ext cx="457200" cy="167106"/>
-          </a:xfrm>
-          <a:prstGeom prst="rect">
-            <a:avLst/>
-          </a:prstGeom>
-          <a:noFill/>
-        </p:spPr>
-        <p:txBody>
-          <a:bodyPr wrap="none" lIns="0" rIns="0" tIns="0" bIns="0">
-            <a:spAutoFit/>
-          </a:bodyPr>
-          <a:lstStyle/>
-          <a:p>
-            <a:pPr algn="l"/>
-            <a:r>
-              <a:rPr sz="800" b="1">
-                <a:solidFill>
-                  <a:srgbClr val="F59E0B"/>
-                </a:solidFill>
-                <a:latin typeface="Calibri"/>
-              </a:rPr>
-              <a:t>91%</a:t>
-            </a:r>
-          </a:p>
-        </p:txBody>
-      </p:sp>
-      <p:sp>
-        <p:nvSpPr>
-          <p:cNvPr id="189" name="Rectangle 188"/>
-          <p:cNvSpPr/>
-          <p:nvPr/>
-        </p:nvSpPr>
-        <p:spPr>
-          <a:xfrm>
-            <a:off x="73152" y="4014215"/>
-            <a:ext cx="8741664" cy="187452"/>
-          </a:xfrm>
-          <a:prstGeom prst="rect">
-            <a:avLst/>
-          </a:prstGeom>
-          <a:solidFill>
-            <a:srgbClr val="F5F7FA"/>
-          </a:solidFill>
-          <a:ln>
-            <a:noFill/>
-          </a:ln>
-          <a:effectLst/>
-        </p:spPr>
-        <p:style>
-          <a:lnRef idx="1">
-            <a:schemeClr val="accent1"/>
-          </a:lnRef>
-          <a:fillRef idx="3">
-            <a:schemeClr val="accent1"/>
-          </a:fillRef>
-          <a:effectRef idx="2">
-            <a:schemeClr val="accent1"/>
-          </a:effectRef>
-          <a:fontRef idx="minor">
-            <a:schemeClr val="lt1"/>
-          </a:fontRef>
-        </p:style>
-        <p:txBody>
-          <a:bodyPr rtlCol="0" anchor="ctr"/>
-          <a:lstStyle/>
-          <a:p>
-            <a:pPr algn="ctr"/>
-          </a:p>
-        </p:txBody>
-      </p:sp>
-      <p:sp>
-        <p:nvSpPr>
-          <p:cNvPr id="190" name="TextBox 189"/>
-          <p:cNvSpPr txBox="1"/>
-          <p:nvPr/>
-        </p:nvSpPr>
-        <p:spPr>
-          <a:xfrm>
-            <a:off x="91440" y="4014215"/>
-            <a:ext cx="722375" cy="187452"/>
-          </a:xfrm>
-          <a:prstGeom prst="rect">
-            <a:avLst/>
-          </a:prstGeom>
-          <a:noFill/>
-        </p:spPr>
-        <p:txBody>
-          <a:bodyPr wrap="none" lIns="0" rIns="0" tIns="0" bIns="0" anchor="ctr">
-            <a:spAutoFit/>
-          </a:bodyPr>
-          <a:lstStyle/>
-          <a:p>
-            <a:pPr algn="ctr"/>
-            <a:r>
-              <a:rPr sz="700" b="1">
-                <a:solidFill>
-                  <a:srgbClr val="1A2340"/>
-                </a:solidFill>
-                <a:latin typeface="Calibri"/>
-              </a:rPr>
-              <a:t>Mejoras</a:t>
-            </a:r>
-          </a:p>
-        </p:txBody>
-      </p:sp>
-      <p:sp>
-        <p:nvSpPr>
-          <p:cNvPr id="191" name="TextBox 190"/>
-          <p:cNvSpPr txBox="1"/>
-          <p:nvPr/>
-        </p:nvSpPr>
-        <p:spPr>
-          <a:xfrm>
-            <a:off x="850392" y="4014215"/>
-            <a:ext cx="2432304" cy="187452"/>
-          </a:xfrm>
-          <a:prstGeom prst="rect">
-            <a:avLst/>
-          </a:prstGeom>
-          <a:noFill/>
-        </p:spPr>
-        <p:txBody>
-          <a:bodyPr wrap="none" lIns="0" rIns="0" tIns="0" bIns="0" anchor="ctr">
-            <a:spAutoFit/>
-          </a:bodyPr>
-          <a:lstStyle/>
-          <a:p>
-            <a:pPr algn="l"/>
-            <a:r>
-              <a:rPr sz="700" b="0">
-                <a:solidFill>
-                  <a:srgbClr val="1A2340"/>
-                </a:solidFill>
-                <a:latin typeface="Calibri"/>
-              </a:rPr>
-              <a:t>Contabilidad || Integración Mecanica-SAE (Fase…</a:t>
-            </a:r>
-          </a:p>
-        </p:txBody>
-      </p:sp>
-      <p:sp>
-        <p:nvSpPr>
-          <p:cNvPr id="192" name="TextBox 191"/>
-          <p:cNvSpPr txBox="1"/>
-          <p:nvPr/>
-        </p:nvSpPr>
-        <p:spPr>
-          <a:xfrm>
-            <a:off x="3319272" y="4014215"/>
-            <a:ext cx="630936" cy="187452"/>
-          </a:xfrm>
-          <a:prstGeom prst="rect">
-            <a:avLst/>
-          </a:prstGeom>
-          <a:noFill/>
-        </p:spPr>
-        <p:txBody>
-          <a:bodyPr wrap="none" lIns="0" rIns="0" tIns="0" bIns="0" anchor="ctr">
-            <a:spAutoFit/>
-          </a:bodyPr>
-          <a:lstStyle/>
-          <a:p>
-            <a:pPr algn="ctr"/>
-            <a:r>
-              <a:rPr sz="700" b="0">
-                <a:solidFill>
-                  <a:srgbClr val="555555"/>
-                </a:solidFill>
-                <a:latin typeface="Calibri"/>
-              </a:rPr>
-              <a:t>21/04/2026</a:t>
-            </a:r>
-          </a:p>
-        </p:txBody>
-      </p:sp>
-      <p:sp>
-        <p:nvSpPr>
-          <p:cNvPr id="193" name="TextBox 192"/>
-          <p:cNvSpPr txBox="1"/>
-          <p:nvPr/>
-        </p:nvSpPr>
-        <p:spPr>
-          <a:xfrm>
-            <a:off x="3986783" y="4014215"/>
-            <a:ext cx="630936" cy="187452"/>
-          </a:xfrm>
-          <a:prstGeom prst="rect">
-            <a:avLst/>
-          </a:prstGeom>
-          <a:noFill/>
-        </p:spPr>
-        <p:txBody>
-          <a:bodyPr wrap="none" lIns="0" rIns="0" tIns="0" bIns="0" anchor="ctr">
-            <a:spAutoFit/>
-          </a:bodyPr>
-          <a:lstStyle/>
-          <a:p>
-            <a:pPr algn="ctr"/>
-            <a:r>
-              <a:rPr sz="700" b="0">
-                <a:solidFill>
-                  <a:srgbClr val="555555"/>
-                </a:solidFill>
-                <a:latin typeface="Calibri"/>
-              </a:rPr>
-              <a:t>12/06/2026</a:t>
-            </a:r>
-          </a:p>
-        </p:txBody>
-      </p:sp>
-      <p:sp>
-        <p:nvSpPr>
-          <p:cNvPr id="194" name="TextBox 193"/>
-          <p:cNvSpPr txBox="1"/>
-          <p:nvPr/>
-        </p:nvSpPr>
-        <p:spPr>
-          <a:xfrm>
-            <a:off x="4654296" y="4014215"/>
-            <a:ext cx="493775" cy="187452"/>
-          </a:xfrm>
-          <a:prstGeom prst="rect">
-            <a:avLst/>
-          </a:prstGeom>
-          <a:noFill/>
-        </p:spPr>
-        <p:txBody>
-          <a:bodyPr wrap="none" lIns="0" rIns="0" tIns="0" bIns="0" anchor="ctr">
-            <a:spAutoFit/>
-          </a:bodyPr>
-          <a:lstStyle/>
-          <a:p>
-            <a:pPr algn="ctr"/>
-            <a:r>
-              <a:rPr sz="700" b="1">
-                <a:solidFill>
-                  <a:srgbClr val="1A2340"/>
-                </a:solidFill>
-                <a:latin typeface="Calibri"/>
-              </a:rPr>
-              <a:t>99%</a:t>
-            </a:r>
-          </a:p>
-        </p:txBody>
-      </p:sp>
-      <p:sp>
-        <p:nvSpPr>
-          <p:cNvPr id="195" name="TextBox 194"/>
-          <p:cNvSpPr txBox="1"/>
-          <p:nvPr/>
-        </p:nvSpPr>
-        <p:spPr>
-          <a:xfrm>
-            <a:off x="5184648" y="4014215"/>
-            <a:ext cx="557784" cy="187452"/>
-          </a:xfrm>
-          <a:prstGeom prst="rect">
-            <a:avLst/>
-          </a:prstGeom>
-          <a:noFill/>
-        </p:spPr>
-        <p:txBody>
-          <a:bodyPr wrap="none" lIns="0" rIns="0" tIns="0" bIns="0" anchor="ctr">
-            <a:spAutoFit/>
-          </a:bodyPr>
-          <a:lstStyle/>
-          <a:p>
-            <a:pPr algn="ctr"/>
-            <a:r>
-              <a:rPr sz="700" b="0">
-                <a:solidFill>
-                  <a:srgbClr val="555555"/>
-                </a:solidFill>
-                <a:latin typeface="Calibri"/>
-              </a:rPr>
-              <a:t>100%</a:t>
-            </a:r>
-          </a:p>
-        </p:txBody>
-      </p:sp>
-      <p:sp>
-        <p:nvSpPr>
-          <p:cNvPr id="196" name="TextBox 195"/>
-          <p:cNvSpPr txBox="1"/>
-          <p:nvPr/>
-        </p:nvSpPr>
-        <p:spPr>
-          <a:xfrm>
-            <a:off x="7991856" y="4014215"/>
-            <a:ext cx="804672" cy="187452"/>
-          </a:xfrm>
-          <a:prstGeom prst="rect">
-            <a:avLst/>
-          </a:prstGeom>
-          <a:noFill/>
-        </p:spPr>
-        <p:txBody>
-          <a:bodyPr wrap="none" lIns="0" rIns="0" tIns="0" bIns="0" anchor="ctr">
-            <a:spAutoFit/>
-          </a:bodyPr>
-          <a:lstStyle/>
-          <a:p>
-            <a:pPr algn="ctr"/>
-            <a:r>
-              <a:rPr sz="700" b="1">
-                <a:solidFill>
-                  <a:srgbClr val="EF4444"/>
-                </a:solidFill>
-                <a:latin typeface="Calibri"/>
-              </a:rPr>
-              <a:t>Atrasado</a:t>
-            </a:r>
-          </a:p>
-        </p:txBody>
-      </p:sp>
-      <p:sp>
-        <p:nvSpPr>
-          <p:cNvPr id="197" name="Rounded Rectangle 196"/>
-          <p:cNvSpPr/>
-          <p:nvPr/>
-        </p:nvSpPr>
-        <p:spPr>
-          <a:xfrm>
-            <a:off x="5806440" y="4056392"/>
-            <a:ext cx="1691640" cy="103098"/>
-          </a:xfrm>
-          <a:prstGeom prst="roundRect">
-            <a:avLst>
-              <a:gd name="adj" fmla="val 50000"/>
-            </a:avLst>
-          </a:prstGeom>
-          <a:pattFill prst="smGrid">
-            <a:fgClr>
-              <a:srgbClr val="EF4444"/>
-            </a:fgClr>
-            <a:bgClr>
-              <a:srgbClr val="FFFFFF"/>
-            </a:bgClr>
-          </a:pattFill>
-          <a:ln>
-            <a:noFill/>
-          </a:ln>
-          <a:effectLst/>
-        </p:spPr>
-        <p:style>
-          <a:lnRef idx="1">
-            <a:schemeClr val="accent1"/>
-          </a:lnRef>
-          <a:fillRef idx="3">
-            <a:schemeClr val="accent1"/>
-          </a:fillRef>
-          <a:effectRef idx="2">
-            <a:schemeClr val="accent1"/>
-          </a:effectRef>
-          <a:fontRef idx="minor">
-            <a:schemeClr val="lt1"/>
-          </a:fontRef>
-        </p:style>
-        <p:txBody>
-          <a:bodyPr rtlCol="0" anchor="ctr"/>
-          <a:lstStyle/>
-          <a:p>
-            <a:pPr algn="ctr"/>
-          </a:p>
-        </p:txBody>
-      </p:sp>
-      <p:sp>
-        <p:nvSpPr>
-          <p:cNvPr id="198" name="Rounded Rectangle 197"/>
-          <p:cNvSpPr/>
-          <p:nvPr/>
-        </p:nvSpPr>
-        <p:spPr>
-          <a:xfrm>
-            <a:off x="5806440" y="4056392"/>
-            <a:ext cx="1674723" cy="103098"/>
-          </a:xfrm>
-          <a:prstGeom prst="roundRect">
-            <a:avLst>
-              <a:gd name="adj" fmla="val 50000"/>
-            </a:avLst>
-          </a:prstGeom>
-          <a:solidFill>
-            <a:srgbClr val="EF4444"/>
-          </a:solidFill>
-          <a:ln>
-            <a:noFill/>
-          </a:ln>
-          <a:effectLst>
-            <a:outerShdw blurRad="76200" dist="19050" dir="5400000" rotWithShape="0">
-              <a:srgbClr val="EF4444">
-                <a:alpha val="55000"/>
-              </a:srgbClr>
-            </a:outerShdw>
-          </a:effectLst>
-        </p:spPr>
-        <p:style>
-          <a:lnRef idx="1">
-            <a:schemeClr val="accent1"/>
-          </a:lnRef>
-          <a:fillRef idx="3">
-            <a:schemeClr val="accent1"/>
-          </a:fillRef>
-          <a:effectRef idx="2">
-            <a:schemeClr val="accent1"/>
-          </a:effectRef>
-          <a:fontRef idx="minor">
-            <a:schemeClr val="lt1"/>
-          </a:fontRef>
-        </p:style>
-        <p:txBody>
-          <a:bodyPr rtlCol="0" anchor="ctr"/>
-          <a:lstStyle/>
-          <a:p>
-            <a:pPr algn="ctr"/>
-          </a:p>
-        </p:txBody>
-      </p:sp>
-      <p:sp>
-        <p:nvSpPr>
-          <p:cNvPr id="199" name="TextBox 198"/>
-          <p:cNvSpPr txBox="1"/>
-          <p:nvPr/>
-        </p:nvSpPr>
-        <p:spPr>
-          <a:xfrm>
-            <a:off x="7543800" y="4024388"/>
-            <a:ext cx="457200" cy="167106"/>
-          </a:xfrm>
-          <a:prstGeom prst="rect">
-            <a:avLst/>
-          </a:prstGeom>
-          <a:noFill/>
-        </p:spPr>
-        <p:txBody>
-          <a:bodyPr wrap="none" lIns="0" rIns="0" tIns="0" bIns="0">
-            <a:spAutoFit/>
-          </a:bodyPr>
-          <a:lstStyle/>
-          <a:p>
-            <a:pPr algn="l"/>
-            <a:r>
-              <a:rPr sz="800" b="1">
-                <a:solidFill>
-                  <a:srgbClr val="EF4444"/>
-                </a:solidFill>
-                <a:latin typeface="Calibri"/>
-              </a:rPr>
-              <a:t>99%</a:t>
-            </a:r>
-          </a:p>
-        </p:txBody>
-      </p:sp>
-      <p:sp>
-        <p:nvSpPr>
-          <p:cNvPr id="200" name="Rectangle 199"/>
-          <p:cNvSpPr/>
-          <p:nvPr/>
-        </p:nvSpPr>
-        <p:spPr>
-          <a:xfrm>
-            <a:off x="73152" y="4201668"/>
-            <a:ext cx="8741664" cy="187452"/>
-          </a:xfrm>
-          <a:prstGeom prst="rect">
-            <a:avLst/>
-          </a:prstGeom>
-          <a:solidFill>
-            <a:srgbClr val="FFFFFF"/>
-          </a:solidFill>
-          <a:ln>
-            <a:noFill/>
-          </a:ln>
-          <a:effectLst/>
-        </p:spPr>
-        <p:style>
-          <a:lnRef idx="1">
-            <a:schemeClr val="accent1"/>
-          </a:lnRef>
-          <a:fillRef idx="3">
-            <a:schemeClr val="accent1"/>
-          </a:fillRef>
-          <a:effectRef idx="2">
-            <a:schemeClr val="accent1"/>
-          </a:effectRef>
-          <a:fontRef idx="minor">
-            <a:schemeClr val="lt1"/>
-          </a:fontRef>
-        </p:style>
-        <p:txBody>
-          <a:bodyPr rtlCol="0" anchor="ctr"/>
-          <a:lstStyle/>
-          <a:p>
-            <a:pPr algn="ctr"/>
-          </a:p>
-        </p:txBody>
-      </p:sp>
-      <p:sp>
-        <p:nvSpPr>
-          <p:cNvPr id="201" name="TextBox 200"/>
-          <p:cNvSpPr txBox="1"/>
-          <p:nvPr/>
-        </p:nvSpPr>
-        <p:spPr>
-          <a:xfrm>
-            <a:off x="91440" y="4201668"/>
-            <a:ext cx="722375" cy="187452"/>
-          </a:xfrm>
-          <a:prstGeom prst="rect">
-            <a:avLst/>
-          </a:prstGeom>
-          <a:noFill/>
-        </p:spPr>
-        <p:txBody>
-          <a:bodyPr wrap="none" lIns="0" rIns="0" tIns="0" bIns="0" anchor="ctr">
-            <a:spAutoFit/>
-          </a:bodyPr>
-          <a:lstStyle/>
-          <a:p>
-            <a:pPr algn="ctr"/>
-            <a:r>
-              <a:rPr sz="700" b="1">
-                <a:solidFill>
-                  <a:srgbClr val="1A2340"/>
-                </a:solidFill>
-                <a:latin typeface="Calibri"/>
-              </a:rPr>
-              <a:t>Proyecto</a:t>
-            </a:r>
-          </a:p>
-        </p:txBody>
-      </p:sp>
-      <p:sp>
-        <p:nvSpPr>
-          <p:cNvPr id="202" name="TextBox 201"/>
-          <p:cNvSpPr txBox="1"/>
-          <p:nvPr/>
-        </p:nvSpPr>
-        <p:spPr>
-          <a:xfrm>
-            <a:off x="850392" y="4201668"/>
-            <a:ext cx="2432304" cy="187452"/>
-          </a:xfrm>
-          <a:prstGeom prst="rect">
-            <a:avLst/>
-          </a:prstGeom>
-          <a:noFill/>
-        </p:spPr>
-        <p:txBody>
-          <a:bodyPr wrap="none" lIns="0" rIns="0" tIns="0" bIns="0" anchor="ctr">
-            <a:spAutoFit/>
-          </a:bodyPr>
-          <a:lstStyle/>
-          <a:p>
-            <a:pPr algn="l"/>
-            <a:r>
-              <a:rPr sz="700" b="0">
-                <a:solidFill>
-                  <a:srgbClr val="1A2340"/>
-                </a:solidFill>
-                <a:latin typeface="Calibri"/>
-              </a:rPr>
-              <a:t>DTI || Integración de sistemas</a:t>
-            </a:r>
-          </a:p>
-        </p:txBody>
-      </p:sp>
-      <p:sp>
-        <p:nvSpPr>
-          <p:cNvPr id="203" name="TextBox 202"/>
-          <p:cNvSpPr txBox="1"/>
-          <p:nvPr/>
-        </p:nvSpPr>
-        <p:spPr>
-          <a:xfrm>
-            <a:off x="3319272" y="4201668"/>
-            <a:ext cx="630936" cy="187452"/>
-          </a:xfrm>
-          <a:prstGeom prst="rect">
-            <a:avLst/>
-          </a:prstGeom>
-          <a:noFill/>
-        </p:spPr>
-        <p:txBody>
-          <a:bodyPr wrap="none" lIns="0" rIns="0" tIns="0" bIns="0" anchor="ctr">
-            <a:spAutoFit/>
-          </a:bodyPr>
-          <a:lstStyle/>
-          <a:p>
-            <a:pPr algn="ctr"/>
-            <a:r>
-              <a:rPr sz="700" b="0">
-                <a:solidFill>
-                  <a:srgbClr val="555555"/>
-                </a:solidFill>
-                <a:latin typeface="Calibri"/>
-              </a:rPr>
-              <a:t>01/06/2026</a:t>
-            </a:r>
-          </a:p>
-        </p:txBody>
-      </p:sp>
-      <p:sp>
-        <p:nvSpPr>
-          <p:cNvPr id="204" name="TextBox 203"/>
-          <p:cNvSpPr txBox="1"/>
-          <p:nvPr/>
-        </p:nvSpPr>
-        <p:spPr>
-          <a:xfrm>
-            <a:off x="3986783" y="4201668"/>
-            <a:ext cx="630936" cy="187452"/>
-          </a:xfrm>
-          <a:prstGeom prst="rect">
-            <a:avLst/>
-          </a:prstGeom>
-          <a:noFill/>
-        </p:spPr>
-        <p:txBody>
-          <a:bodyPr wrap="none" lIns="0" rIns="0" tIns="0" bIns="0" anchor="ctr">
-            <a:spAutoFit/>
-          </a:bodyPr>
-          <a:lstStyle/>
-          <a:p>
-            <a:pPr algn="ctr"/>
-            <a:r>
-              <a:rPr sz="700" b="0">
-                <a:solidFill>
-                  <a:srgbClr val="555555"/>
-                </a:solidFill>
-                <a:latin typeface="Calibri"/>
-              </a:rPr>
-              <a:t>23/09/2026</a:t>
-            </a:r>
-          </a:p>
-        </p:txBody>
-      </p:sp>
-      <p:sp>
-        <p:nvSpPr>
-          <p:cNvPr id="205" name="TextBox 204"/>
-          <p:cNvSpPr txBox="1"/>
-          <p:nvPr/>
-        </p:nvSpPr>
-        <p:spPr>
-          <a:xfrm>
-            <a:off x="4654296" y="4201668"/>
-            <a:ext cx="493775" cy="187452"/>
-          </a:xfrm>
-          <a:prstGeom prst="rect">
-            <a:avLst/>
-          </a:prstGeom>
-          <a:noFill/>
-        </p:spPr>
-        <p:txBody>
-          <a:bodyPr wrap="none" lIns="0" rIns="0" tIns="0" bIns="0" anchor="ctr">
-            <a:spAutoFit/>
-          </a:bodyPr>
-          <a:lstStyle/>
-          <a:p>
-            <a:pPr algn="ctr"/>
-            <a:r>
-              <a:rPr sz="700" b="1">
-                <a:solidFill>
-                  <a:srgbClr val="1A2340"/>
-                </a:solidFill>
-                <a:latin typeface="Calibri"/>
-              </a:rPr>
-              <a:t>31%</a:t>
-            </a:r>
-          </a:p>
-        </p:txBody>
-      </p:sp>
-      <p:sp>
-        <p:nvSpPr>
-          <p:cNvPr id="206" name="TextBox 205"/>
-          <p:cNvSpPr txBox="1"/>
-          <p:nvPr/>
-        </p:nvSpPr>
-        <p:spPr>
-          <a:xfrm>
-            <a:off x="5184648" y="4201668"/>
-            <a:ext cx="557784" cy="187452"/>
-          </a:xfrm>
-          <a:prstGeom prst="rect">
-            <a:avLst/>
-          </a:prstGeom>
-          <a:noFill/>
-        </p:spPr>
-        <p:txBody>
-          <a:bodyPr wrap="none" lIns="0" rIns="0" tIns="0" bIns="0" anchor="ctr">
-            <a:spAutoFit/>
-          </a:bodyPr>
-          <a:lstStyle/>
-          <a:p>
-            <a:pPr algn="ctr"/>
-            <a:r>
-              <a:rPr sz="700" b="0">
-                <a:solidFill>
-                  <a:srgbClr val="555555"/>
-                </a:solidFill>
-                <a:latin typeface="Calibri"/>
-              </a:rPr>
-              <a:t>38%</a:t>
-            </a:r>
-          </a:p>
-        </p:txBody>
-      </p:sp>
-      <p:sp>
-        <p:nvSpPr>
-          <p:cNvPr id="207" name="TextBox 206"/>
-          <p:cNvSpPr txBox="1"/>
-          <p:nvPr/>
-        </p:nvSpPr>
-        <p:spPr>
-          <a:xfrm>
-            <a:off x="7991856" y="4201668"/>
-            <a:ext cx="804672" cy="187452"/>
-          </a:xfrm>
-          <a:prstGeom prst="rect">
-            <a:avLst/>
-          </a:prstGeom>
-          <a:noFill/>
-        </p:spPr>
-        <p:txBody>
-          <a:bodyPr wrap="none" lIns="0" rIns="0" tIns="0" bIns="0" anchor="ctr">
-            <a:spAutoFit/>
-          </a:bodyPr>
-          <a:lstStyle/>
-          <a:p>
-            <a:pPr algn="ctr"/>
-            <a:r>
-              <a:rPr sz="700" b="1">
-                <a:solidFill>
-                  <a:srgbClr val="F59E0B"/>
-                </a:solidFill>
-                <a:latin typeface="Calibri"/>
-              </a:rPr>
-              <a:t>Riesgo de atraso</a:t>
-            </a:r>
-          </a:p>
-        </p:txBody>
-      </p:sp>
-      <p:sp>
-        <p:nvSpPr>
-          <p:cNvPr id="208" name="Rounded Rectangle 207"/>
-          <p:cNvSpPr/>
-          <p:nvPr/>
-        </p:nvSpPr>
-        <p:spPr>
-          <a:xfrm>
-            <a:off x="5806440" y="4243844"/>
-            <a:ext cx="1691640" cy="103098"/>
-          </a:xfrm>
-          <a:prstGeom prst="roundRect">
-            <a:avLst>
-              <a:gd name="adj" fmla="val 50000"/>
-            </a:avLst>
-          </a:prstGeom>
-          <a:pattFill prst="smGrid">
-            <a:fgClr>
-              <a:srgbClr val="F59E0B"/>
-            </a:fgClr>
-            <a:bgClr>
-              <a:srgbClr val="FFFFFF"/>
-            </a:bgClr>
-          </a:pattFill>
-          <a:ln>
-            <a:noFill/>
-          </a:ln>
-          <a:effectLst/>
-        </p:spPr>
-        <p:style>
-          <a:lnRef idx="1">
-            <a:schemeClr val="accent1"/>
-          </a:lnRef>
-          <a:fillRef idx="3">
-            <a:schemeClr val="accent1"/>
-          </a:fillRef>
-          <a:effectRef idx="2">
-            <a:schemeClr val="accent1"/>
-          </a:effectRef>
-          <a:fontRef idx="minor">
-            <a:schemeClr val="lt1"/>
-          </a:fontRef>
-        </p:style>
-        <p:txBody>
-          <a:bodyPr rtlCol="0" anchor="ctr"/>
-          <a:lstStyle/>
-          <a:p>
-            <a:pPr algn="ctr"/>
-          </a:p>
-        </p:txBody>
-      </p:sp>
-      <p:sp>
-        <p:nvSpPr>
-          <p:cNvPr id="209" name="Rounded Rectangle 208"/>
-          <p:cNvSpPr/>
-          <p:nvPr/>
-        </p:nvSpPr>
-        <p:spPr>
-          <a:xfrm>
-            <a:off x="5806440" y="4243844"/>
-            <a:ext cx="524408" cy="103098"/>
-          </a:xfrm>
-          <a:prstGeom prst="roundRect">
-            <a:avLst>
-              <a:gd name="adj" fmla="val 50000"/>
-            </a:avLst>
-          </a:prstGeom>
-          <a:solidFill>
-            <a:srgbClr val="F59E0B"/>
-          </a:solidFill>
-          <a:ln>
-            <a:noFill/>
-          </a:ln>
-          <a:effectLst>
-            <a:outerShdw blurRad="76200" dist="19050" dir="5400000" rotWithShape="0">
-              <a:srgbClr val="F59E0B">
-                <a:alpha val="55000"/>
-              </a:srgbClr>
-            </a:outerShdw>
-          </a:effectLst>
-        </p:spPr>
-        <p:style>
-          <a:lnRef idx="1">
-            <a:schemeClr val="accent1"/>
-          </a:lnRef>
-          <a:fillRef idx="3">
-            <a:schemeClr val="accent1"/>
-          </a:fillRef>
-          <a:effectRef idx="2">
-            <a:schemeClr val="accent1"/>
-          </a:effectRef>
-          <a:fontRef idx="minor">
-            <a:schemeClr val="lt1"/>
-          </a:fontRef>
-        </p:style>
-        <p:txBody>
-          <a:bodyPr rtlCol="0" anchor="ctr"/>
-          <a:lstStyle/>
-          <a:p>
-            <a:pPr algn="ctr"/>
-          </a:p>
-        </p:txBody>
-      </p:sp>
-      <p:sp>
-        <p:nvSpPr>
-          <p:cNvPr id="210" name="TextBox 209"/>
-          <p:cNvSpPr txBox="1"/>
-          <p:nvPr/>
-        </p:nvSpPr>
-        <p:spPr>
-          <a:xfrm>
-            <a:off x="7543800" y="4211840"/>
-            <a:ext cx="457200" cy="167106"/>
-          </a:xfrm>
-          <a:prstGeom prst="rect">
-            <a:avLst/>
-          </a:prstGeom>
-          <a:noFill/>
-        </p:spPr>
-        <p:txBody>
-          <a:bodyPr wrap="none" lIns="0" rIns="0" tIns="0" bIns="0">
-            <a:spAutoFit/>
-          </a:bodyPr>
-          <a:lstStyle/>
-          <a:p>
-            <a:pPr algn="l"/>
-            <a:r>
-              <a:rPr sz="800" b="1">
-                <a:solidFill>
-                  <a:srgbClr val="F59E0B"/>
-                </a:solidFill>
-                <a:latin typeface="Calibri"/>
-              </a:rPr>
-              <a:t>31%</a:t>
-            </a:r>
-          </a:p>
-        </p:txBody>
-      </p:sp>
-      <p:sp>
-        <p:nvSpPr>
-          <p:cNvPr id="211" name="Rectangle 210"/>
-          <p:cNvSpPr/>
-          <p:nvPr/>
-        </p:nvSpPr>
-        <p:spPr>
-          <a:xfrm>
-            <a:off x="73152" y="4389120"/>
-            <a:ext cx="8741664" cy="187452"/>
-          </a:xfrm>
-          <a:prstGeom prst="rect">
-            <a:avLst/>
-          </a:prstGeom>
-          <a:solidFill>
-            <a:srgbClr val="F5F7FA"/>
-          </a:solidFill>
-          <a:ln>
-            <a:noFill/>
-          </a:ln>
-          <a:effectLst/>
-        </p:spPr>
-        <p:style>
-          <a:lnRef idx="1">
-            <a:schemeClr val="accent1"/>
-          </a:lnRef>
-          <a:fillRef idx="3">
-            <a:schemeClr val="accent1"/>
-          </a:fillRef>
-          <a:effectRef idx="2">
-            <a:schemeClr val="accent1"/>
-          </a:effectRef>
-          <a:fontRef idx="minor">
-            <a:schemeClr val="lt1"/>
-          </a:fontRef>
-        </p:style>
-        <p:txBody>
-          <a:bodyPr rtlCol="0" anchor="ctr"/>
-          <a:lstStyle/>
-          <a:p>
-            <a:pPr algn="ctr"/>
-          </a:p>
-        </p:txBody>
-      </p:sp>
-      <p:sp>
-        <p:nvSpPr>
-          <p:cNvPr id="212" name="TextBox 211"/>
-          <p:cNvSpPr txBox="1"/>
-          <p:nvPr/>
-        </p:nvSpPr>
-        <p:spPr>
-          <a:xfrm>
-            <a:off x="91440" y="4389120"/>
-            <a:ext cx="722375" cy="187452"/>
-          </a:xfrm>
-          <a:prstGeom prst="rect">
-            <a:avLst/>
-          </a:prstGeom>
-          <a:noFill/>
-        </p:spPr>
-        <p:txBody>
-          <a:bodyPr wrap="none" lIns="0" rIns="0" tIns="0" bIns="0" anchor="ctr">
-            <a:spAutoFit/>
-          </a:bodyPr>
-          <a:lstStyle/>
-          <a:p>
-            <a:pPr algn="ctr"/>
-            <a:r>
-              <a:rPr sz="700" b="1">
-                <a:solidFill>
-                  <a:srgbClr val="1A2340"/>
-                </a:solidFill>
-                <a:latin typeface="Calibri"/>
-              </a:rPr>
-              <a:t>Mejoras</a:t>
-            </a:r>
-          </a:p>
-        </p:txBody>
-      </p:sp>
-      <p:sp>
-        <p:nvSpPr>
-          <p:cNvPr id="213" name="TextBox 212"/>
-          <p:cNvSpPr txBox="1"/>
-          <p:nvPr/>
-        </p:nvSpPr>
-        <p:spPr>
-          <a:xfrm>
-            <a:off x="850392" y="4389120"/>
-            <a:ext cx="2432304" cy="187452"/>
-          </a:xfrm>
-          <a:prstGeom prst="rect">
-            <a:avLst/>
-          </a:prstGeom>
-          <a:noFill/>
-        </p:spPr>
-        <p:txBody>
-          <a:bodyPr wrap="none" lIns="0" rIns="0" tIns="0" bIns="0" anchor="ctr">
-            <a:spAutoFit/>
-          </a:bodyPr>
-          <a:lstStyle/>
-          <a:p>
-            <a:pPr algn="l"/>
-            <a:r>
-              <a:rPr sz="700" b="0">
-                <a:solidFill>
-                  <a:srgbClr val="1A2340"/>
-                </a:solidFill>
-                <a:latin typeface="Calibri"/>
-              </a:rPr>
-              <a:t>Capital Humano || BUK Personalizados Fase 2</a:t>
-            </a:r>
-          </a:p>
-        </p:txBody>
-      </p:sp>
-      <p:sp>
-        <p:nvSpPr>
-          <p:cNvPr id="214" name="TextBox 213"/>
-          <p:cNvSpPr txBox="1"/>
-          <p:nvPr/>
-        </p:nvSpPr>
-        <p:spPr>
-          <a:xfrm>
-            <a:off x="3319272" y="4389120"/>
-            <a:ext cx="630936" cy="187452"/>
-          </a:xfrm>
-          <a:prstGeom prst="rect">
-            <a:avLst/>
-          </a:prstGeom>
-          <a:noFill/>
-        </p:spPr>
-        <p:txBody>
-          <a:bodyPr wrap="none" lIns="0" rIns="0" tIns="0" bIns="0" anchor="ctr">
-            <a:spAutoFit/>
-          </a:bodyPr>
-          <a:lstStyle/>
-          <a:p>
-            <a:pPr algn="ctr"/>
-            <a:r>
-              <a:rPr sz="700" b="0">
-                <a:solidFill>
-                  <a:srgbClr val="555555"/>
-                </a:solidFill>
-                <a:latin typeface="Calibri"/>
-              </a:rPr>
-              <a:t>08/06/2026</a:t>
-            </a:r>
-          </a:p>
-        </p:txBody>
-      </p:sp>
-      <p:sp>
-        <p:nvSpPr>
-          <p:cNvPr id="215" name="TextBox 214"/>
-          <p:cNvSpPr txBox="1"/>
-          <p:nvPr/>
-        </p:nvSpPr>
-        <p:spPr>
-          <a:xfrm>
-            <a:off x="3986783" y="4389120"/>
-            <a:ext cx="630936" cy="187452"/>
-          </a:xfrm>
-          <a:prstGeom prst="rect">
-            <a:avLst/>
-          </a:prstGeom>
-          <a:noFill/>
-        </p:spPr>
-        <p:txBody>
-          <a:bodyPr wrap="none" lIns="0" rIns="0" tIns="0" bIns="0" anchor="ctr">
-            <a:spAutoFit/>
-          </a:bodyPr>
-          <a:lstStyle/>
-          <a:p>
-            <a:pPr algn="ctr"/>
-            <a:r>
-              <a:rPr sz="700" b="0">
-                <a:solidFill>
-                  <a:srgbClr val="555555"/>
-                </a:solidFill>
-                <a:latin typeface="Calibri"/>
-              </a:rPr>
-              <a:t>11/08/2026</a:t>
-            </a:r>
-          </a:p>
-        </p:txBody>
-      </p:sp>
-      <p:sp>
-        <p:nvSpPr>
-          <p:cNvPr id="216" name="TextBox 215"/>
-          <p:cNvSpPr txBox="1"/>
-          <p:nvPr/>
-        </p:nvSpPr>
-        <p:spPr>
-          <a:xfrm>
-            <a:off x="4654296" y="4389120"/>
-            <a:ext cx="493775" cy="187452"/>
-          </a:xfrm>
-          <a:prstGeom prst="rect">
-            <a:avLst/>
-          </a:prstGeom>
-          <a:noFill/>
-        </p:spPr>
-        <p:txBody>
-          <a:bodyPr wrap="none" lIns="0" rIns="0" tIns="0" bIns="0" anchor="ctr">
-            <a:spAutoFit/>
-          </a:bodyPr>
-          <a:lstStyle/>
-          <a:p>
-            <a:pPr algn="ctr"/>
-            <a:r>
-              <a:rPr sz="700" b="1">
-                <a:solidFill>
-                  <a:srgbClr val="1A2340"/>
-                </a:solidFill>
-                <a:latin typeface="Calibri"/>
-              </a:rPr>
-              <a:t>86%</a:t>
-            </a:r>
-          </a:p>
-        </p:txBody>
-      </p:sp>
-      <p:sp>
-        <p:nvSpPr>
-          <p:cNvPr id="217" name="TextBox 216"/>
-          <p:cNvSpPr txBox="1"/>
-          <p:nvPr/>
-        </p:nvSpPr>
-        <p:spPr>
-          <a:xfrm>
-            <a:off x="5184648" y="4389120"/>
-            <a:ext cx="557784" cy="187452"/>
-          </a:xfrm>
-          <a:prstGeom prst="rect">
-            <a:avLst/>
-          </a:prstGeom>
-          <a:noFill/>
-        </p:spPr>
-        <p:txBody>
-          <a:bodyPr wrap="none" lIns="0" rIns="0" tIns="0" bIns="0" anchor="ctr">
-            <a:spAutoFit/>
-          </a:bodyPr>
-          <a:lstStyle/>
-          <a:p>
-            <a:pPr algn="ctr"/>
-            <a:r>
-              <a:rPr sz="700" b="0">
-                <a:solidFill>
-                  <a:srgbClr val="555555"/>
-                </a:solidFill>
-                <a:latin typeface="Calibri"/>
-              </a:rPr>
-              <a:t>57%</a:t>
-            </a:r>
-          </a:p>
-        </p:txBody>
-      </p:sp>
-      <p:sp>
-        <p:nvSpPr>
-          <p:cNvPr id="218" name="TextBox 217"/>
-          <p:cNvSpPr txBox="1"/>
-          <p:nvPr/>
-        </p:nvSpPr>
-        <p:spPr>
-          <a:xfrm>
-            <a:off x="7991856" y="4389120"/>
-            <a:ext cx="804672" cy="187452"/>
-          </a:xfrm>
-          <a:prstGeom prst="rect">
-            <a:avLst/>
-          </a:prstGeom>
-          <a:noFill/>
-        </p:spPr>
-        <p:txBody>
-          <a:bodyPr wrap="none" lIns="0" rIns="0" tIns="0" bIns="0" anchor="ctr">
-            <a:spAutoFit/>
-          </a:bodyPr>
-          <a:lstStyle/>
-          <a:p>
-            <a:pPr algn="ctr"/>
-            <a:r>
-              <a:rPr sz="700" b="1">
-                <a:solidFill>
-                  <a:srgbClr val="22C55E"/>
-                </a:solidFill>
-                <a:latin typeface="Calibri"/>
-              </a:rPr>
-              <a:t>A tiempo</a:t>
-            </a:r>
-          </a:p>
-        </p:txBody>
-      </p:sp>
-      <p:sp>
-        <p:nvSpPr>
-          <p:cNvPr id="219" name="Rounded Rectangle 218"/>
-          <p:cNvSpPr/>
-          <p:nvPr/>
-        </p:nvSpPr>
-        <p:spPr>
-          <a:xfrm>
-            <a:off x="5806440" y="4431296"/>
-            <a:ext cx="1691640" cy="103098"/>
-          </a:xfrm>
-          <a:prstGeom prst="roundRect">
-            <a:avLst>
-              <a:gd name="adj" fmla="val 50000"/>
-            </a:avLst>
-          </a:prstGeom>
-          <a:pattFill prst="smGrid">
-            <a:fgClr>
-              <a:srgbClr val="22C55E"/>
-            </a:fgClr>
-            <a:bgClr>
-              <a:srgbClr val="FFFFFF"/>
-            </a:bgClr>
-          </a:pattFill>
-          <a:ln>
-            <a:noFill/>
-          </a:ln>
-          <a:effectLst/>
-        </p:spPr>
-        <p:style>
-          <a:lnRef idx="1">
-            <a:schemeClr val="accent1"/>
-          </a:lnRef>
-          <a:fillRef idx="3">
-            <a:schemeClr val="accent1"/>
-          </a:fillRef>
-          <a:effectRef idx="2">
-            <a:schemeClr val="accent1"/>
-          </a:effectRef>
-          <a:fontRef idx="minor">
-            <a:schemeClr val="lt1"/>
-          </a:fontRef>
-        </p:style>
-        <p:txBody>
-          <a:bodyPr rtlCol="0" anchor="ctr"/>
-          <a:lstStyle/>
-          <a:p>
-            <a:pPr algn="ctr"/>
-          </a:p>
-        </p:txBody>
-      </p:sp>
-      <p:sp>
-        <p:nvSpPr>
-          <p:cNvPr id="220" name="Rounded Rectangle 219"/>
-          <p:cNvSpPr/>
-          <p:nvPr/>
-        </p:nvSpPr>
-        <p:spPr>
-          <a:xfrm>
-            <a:off x="5806440" y="4431296"/>
-            <a:ext cx="1454810" cy="103098"/>
-          </a:xfrm>
-          <a:prstGeom prst="roundRect">
-            <a:avLst>
-              <a:gd name="adj" fmla="val 50000"/>
-            </a:avLst>
-          </a:prstGeom>
-          <a:solidFill>
-            <a:srgbClr val="22C55E"/>
-          </a:solidFill>
-          <a:ln>
-            <a:noFill/>
-          </a:ln>
-          <a:effectLst>
-            <a:outerShdw blurRad="76200" dist="19050" dir="5400000" rotWithShape="0">
-              <a:srgbClr val="22C55E">
-                <a:alpha val="55000"/>
-              </a:srgbClr>
-            </a:outerShdw>
-          </a:effectLst>
-        </p:spPr>
-        <p:style>
-          <a:lnRef idx="1">
-            <a:schemeClr val="accent1"/>
-          </a:lnRef>
-          <a:fillRef idx="3">
-            <a:schemeClr val="accent1"/>
-          </a:fillRef>
-          <a:effectRef idx="2">
-            <a:schemeClr val="accent1"/>
-          </a:effectRef>
-          <a:fontRef idx="minor">
-            <a:schemeClr val="lt1"/>
-          </a:fontRef>
-        </p:style>
-        <p:txBody>
-          <a:bodyPr rtlCol="0" anchor="ctr"/>
-          <a:lstStyle/>
-          <a:p>
-            <a:pPr algn="ctr"/>
-          </a:p>
-        </p:txBody>
-      </p:sp>
-      <p:sp>
-        <p:nvSpPr>
-          <p:cNvPr id="221" name="TextBox 220"/>
-          <p:cNvSpPr txBox="1"/>
-          <p:nvPr/>
-        </p:nvSpPr>
-        <p:spPr>
-          <a:xfrm>
-            <a:off x="7543800" y="4399292"/>
-            <a:ext cx="457200" cy="167106"/>
-          </a:xfrm>
-          <a:prstGeom prst="rect">
-            <a:avLst/>
-          </a:prstGeom>
-          <a:noFill/>
-        </p:spPr>
-        <p:txBody>
-          <a:bodyPr wrap="none" lIns="0" rIns="0" tIns="0" bIns="0">
-            <a:spAutoFit/>
-          </a:bodyPr>
-          <a:lstStyle/>
-          <a:p>
-            <a:pPr algn="l"/>
-            <a:r>
-              <a:rPr sz="800" b="1">
-                <a:solidFill>
-                  <a:srgbClr val="22C55E"/>
-                </a:solidFill>
-                <a:latin typeface="Calibri"/>
-              </a:rPr>
-              <a:t>86%</a:t>
-            </a:r>
-          </a:p>
-        </p:txBody>
-      </p:sp>
-      <p:sp>
-        <p:nvSpPr>
-          <p:cNvPr id="222" name="Rectangle 221"/>
-          <p:cNvSpPr/>
-          <p:nvPr/>
-        </p:nvSpPr>
-        <p:spPr>
-          <a:xfrm>
-            <a:off x="73152" y="4576572"/>
-            <a:ext cx="8741664" cy="187452"/>
-          </a:xfrm>
-          <a:prstGeom prst="rect">
-            <a:avLst/>
-          </a:prstGeom>
-          <a:solidFill>
-            <a:srgbClr val="FFFFFF"/>
-          </a:solidFill>
-          <a:ln>
-            <a:noFill/>
-          </a:ln>
-          <a:effectLst/>
-        </p:spPr>
-        <p:style>
-          <a:lnRef idx="1">
-            <a:schemeClr val="accent1"/>
-          </a:lnRef>
-          <a:fillRef idx="3">
-            <a:schemeClr val="accent1"/>
-          </a:fillRef>
-          <a:effectRef idx="2">
-            <a:schemeClr val="accent1"/>
-          </a:effectRef>
-          <a:fontRef idx="minor">
-            <a:schemeClr val="lt1"/>
-          </a:fontRef>
-        </p:style>
-        <p:txBody>
-          <a:bodyPr rtlCol="0" anchor="ctr"/>
-          <a:lstStyle/>
-          <a:p>
-            <a:pPr algn="ctr"/>
-          </a:p>
-        </p:txBody>
-      </p:sp>
-      <p:sp>
-        <p:nvSpPr>
-          <p:cNvPr id="223" name="TextBox 222"/>
-          <p:cNvSpPr txBox="1"/>
-          <p:nvPr/>
-        </p:nvSpPr>
-        <p:spPr>
-          <a:xfrm>
-            <a:off x="91440" y="4576572"/>
-            <a:ext cx="722375" cy="187452"/>
-          </a:xfrm>
-          <a:prstGeom prst="rect">
-            <a:avLst/>
-          </a:prstGeom>
-          <a:noFill/>
-        </p:spPr>
-        <p:txBody>
-          <a:bodyPr wrap="none" lIns="0" rIns="0" tIns="0" bIns="0" anchor="ctr">
-            <a:spAutoFit/>
-          </a:bodyPr>
-          <a:lstStyle/>
-          <a:p>
-            <a:pPr algn="ctr"/>
-            <a:r>
-              <a:rPr sz="700" b="1">
-                <a:solidFill>
-                  <a:srgbClr val="1A2340"/>
-                </a:solidFill>
-                <a:latin typeface="Calibri"/>
-              </a:rPr>
-              <a:t>Mejoras</a:t>
-            </a:r>
-          </a:p>
-        </p:txBody>
-      </p:sp>
-      <p:sp>
-        <p:nvSpPr>
-          <p:cNvPr id="224" name="TextBox 223"/>
-          <p:cNvSpPr txBox="1"/>
-          <p:nvPr/>
-        </p:nvSpPr>
-        <p:spPr>
-          <a:xfrm>
-            <a:off x="850392" y="4576572"/>
-            <a:ext cx="2432304" cy="187452"/>
-          </a:xfrm>
-          <a:prstGeom prst="rect">
-            <a:avLst/>
-          </a:prstGeom>
-          <a:noFill/>
-        </p:spPr>
-        <p:txBody>
-          <a:bodyPr wrap="none" lIns="0" rIns="0" tIns="0" bIns="0" anchor="ctr">
-            <a:spAutoFit/>
-          </a:bodyPr>
-          <a:lstStyle/>
-          <a:p>
-            <a:pPr algn="l"/>
-            <a:r>
-              <a:rPr sz="700" b="0">
-                <a:solidFill>
-                  <a:srgbClr val="1A2340"/>
-                </a:solidFill>
-                <a:latin typeface="Calibri"/>
-              </a:rPr>
-              <a:t>Operaciones Fleet || Adcontent - Sfleet</a:t>
-            </a:r>
-          </a:p>
-        </p:txBody>
-      </p:sp>
-      <p:sp>
-        <p:nvSpPr>
-          <p:cNvPr id="225" name="TextBox 224"/>
-          <p:cNvSpPr txBox="1"/>
-          <p:nvPr/>
-        </p:nvSpPr>
-        <p:spPr>
-          <a:xfrm>
-            <a:off x="3319272" y="4576572"/>
-            <a:ext cx="630936" cy="187452"/>
-          </a:xfrm>
-          <a:prstGeom prst="rect">
-            <a:avLst/>
-          </a:prstGeom>
-          <a:noFill/>
-        </p:spPr>
-        <p:txBody>
-          <a:bodyPr wrap="none" lIns="0" rIns="0" tIns="0" bIns="0" anchor="ctr">
-            <a:spAutoFit/>
-          </a:bodyPr>
-          <a:lstStyle/>
-          <a:p>
-            <a:pPr algn="ctr"/>
-            <a:r>
-              <a:rPr sz="700" b="0">
-                <a:solidFill>
-                  <a:srgbClr val="555555"/>
-                </a:solidFill>
-                <a:latin typeface="Calibri"/>
-              </a:rPr>
-              <a:t>15/06/2026</a:t>
-            </a:r>
-          </a:p>
-        </p:txBody>
-      </p:sp>
-      <p:sp>
-        <p:nvSpPr>
-          <p:cNvPr id="226" name="TextBox 225"/>
-          <p:cNvSpPr txBox="1"/>
-          <p:nvPr/>
-        </p:nvSpPr>
-        <p:spPr>
-          <a:xfrm>
-            <a:off x="3986783" y="4576572"/>
-            <a:ext cx="630936" cy="187452"/>
-          </a:xfrm>
-          <a:prstGeom prst="rect">
-            <a:avLst/>
-          </a:prstGeom>
-          <a:noFill/>
-        </p:spPr>
-        <p:txBody>
-          <a:bodyPr wrap="none" lIns="0" rIns="0" tIns="0" bIns="0" anchor="ctr">
-            <a:spAutoFit/>
-          </a:bodyPr>
-          <a:lstStyle/>
-          <a:p>
-            <a:pPr algn="ctr"/>
-            <a:r>
-              <a:rPr sz="700" b="0">
-                <a:solidFill>
-                  <a:srgbClr val="555555"/>
-                </a:solidFill>
-                <a:latin typeface="Calibri"/>
-              </a:rPr>
-              <a:t>12/02/2027</a:t>
-            </a:r>
-          </a:p>
-        </p:txBody>
-      </p:sp>
-      <p:sp>
-        <p:nvSpPr>
-          <p:cNvPr id="227" name="TextBox 226"/>
-          <p:cNvSpPr txBox="1"/>
-          <p:nvPr/>
-        </p:nvSpPr>
-        <p:spPr>
-          <a:xfrm>
-            <a:off x="4654296" y="4576572"/>
-            <a:ext cx="493775" cy="187452"/>
-          </a:xfrm>
-          <a:prstGeom prst="rect">
-            <a:avLst/>
-          </a:prstGeom>
-          <a:noFill/>
-        </p:spPr>
-        <p:txBody>
-          <a:bodyPr wrap="none" lIns="0" rIns="0" tIns="0" bIns="0" anchor="ctr">
-            <a:spAutoFit/>
-          </a:bodyPr>
-          <a:lstStyle/>
-          <a:p>
-            <a:pPr algn="ctr"/>
-            <a:r>
-              <a:rPr sz="700" b="1">
-                <a:solidFill>
-                  <a:srgbClr val="1A2340"/>
-                </a:solidFill>
-                <a:latin typeface="Calibri"/>
-              </a:rPr>
-              <a:t>12%</a:t>
-            </a:r>
-          </a:p>
-        </p:txBody>
-      </p:sp>
-      <p:sp>
-        <p:nvSpPr>
-          <p:cNvPr id="228" name="TextBox 227"/>
-          <p:cNvSpPr txBox="1"/>
-          <p:nvPr/>
-        </p:nvSpPr>
-        <p:spPr>
-          <a:xfrm>
-            <a:off x="5184648" y="4576572"/>
-            <a:ext cx="557784" cy="187452"/>
-          </a:xfrm>
-          <a:prstGeom prst="rect">
-            <a:avLst/>
-          </a:prstGeom>
-          <a:noFill/>
-        </p:spPr>
-        <p:txBody>
-          <a:bodyPr wrap="none" lIns="0" rIns="0" tIns="0" bIns="0" anchor="ctr">
-            <a:spAutoFit/>
-          </a:bodyPr>
-          <a:lstStyle/>
-          <a:p>
-            <a:pPr algn="ctr"/>
-            <a:r>
-              <a:rPr sz="700" b="0">
-                <a:solidFill>
-                  <a:srgbClr val="555555"/>
-                </a:solidFill>
-                <a:latin typeface="Calibri"/>
-              </a:rPr>
-              <a:t>12%</a:t>
-            </a:r>
-          </a:p>
-        </p:txBody>
-      </p:sp>
-      <p:sp>
-        <p:nvSpPr>
-          <p:cNvPr id="229" name="TextBox 228"/>
-          <p:cNvSpPr txBox="1"/>
-          <p:nvPr/>
-        </p:nvSpPr>
-        <p:spPr>
-          <a:xfrm>
-            <a:off x="7991856" y="4576572"/>
-            <a:ext cx="804672" cy="187452"/>
-          </a:xfrm>
-          <a:prstGeom prst="rect">
-            <a:avLst/>
-          </a:prstGeom>
-          <a:noFill/>
-        </p:spPr>
-        <p:txBody>
-          <a:bodyPr wrap="none" lIns="0" rIns="0" tIns="0" bIns="0" anchor="ctr">
-            <a:spAutoFit/>
-          </a:bodyPr>
-          <a:lstStyle/>
-          <a:p>
-            <a:pPr algn="ctr"/>
-            <a:r>
-              <a:rPr sz="700" b="1">
-                <a:solidFill>
-                  <a:srgbClr val="22C55E"/>
-                </a:solidFill>
-                <a:latin typeface="Calibri"/>
-              </a:rPr>
-              <a:t>A tiempo</a:t>
-            </a:r>
-          </a:p>
-        </p:txBody>
-      </p:sp>
-      <p:sp>
-        <p:nvSpPr>
-          <p:cNvPr id="230" name="Rounded Rectangle 229"/>
-          <p:cNvSpPr/>
-          <p:nvPr/>
-        </p:nvSpPr>
-        <p:spPr>
-          <a:xfrm>
-            <a:off x="5806440" y="4618748"/>
-            <a:ext cx="1691640" cy="103098"/>
-          </a:xfrm>
-          <a:prstGeom prst="roundRect">
-            <a:avLst>
-              <a:gd name="adj" fmla="val 50000"/>
-            </a:avLst>
-          </a:prstGeom>
-          <a:pattFill prst="smGrid">
-            <a:fgClr>
-              <a:srgbClr val="22C55E"/>
-            </a:fgClr>
-            <a:bgClr>
-              <a:srgbClr val="FFFFFF"/>
-            </a:bgClr>
-          </a:pattFill>
-          <a:ln>
-            <a:noFill/>
-          </a:ln>
-          <a:effectLst/>
-        </p:spPr>
-        <p:style>
-          <a:lnRef idx="1">
-            <a:schemeClr val="accent1"/>
-          </a:lnRef>
-          <a:fillRef idx="3">
-            <a:schemeClr val="accent1"/>
-          </a:fillRef>
-          <a:effectRef idx="2">
-            <a:schemeClr val="accent1"/>
-          </a:effectRef>
-          <a:fontRef idx="minor">
-            <a:schemeClr val="lt1"/>
-          </a:fontRef>
-        </p:style>
-        <p:txBody>
-          <a:bodyPr rtlCol="0" anchor="ctr"/>
-          <a:lstStyle/>
-          <a:p>
-            <a:pPr algn="ctr"/>
-          </a:p>
-        </p:txBody>
-      </p:sp>
-      <p:sp>
-        <p:nvSpPr>
-          <p:cNvPr id="231" name="Rounded Rectangle 230"/>
-          <p:cNvSpPr/>
-          <p:nvPr/>
-        </p:nvSpPr>
-        <p:spPr>
-          <a:xfrm>
-            <a:off x="5806440" y="4618748"/>
-            <a:ext cx="202996" cy="103098"/>
-          </a:xfrm>
-          <a:prstGeom prst="roundRect">
-            <a:avLst>
-              <a:gd name="adj" fmla="val 50000"/>
-            </a:avLst>
-          </a:prstGeom>
-          <a:solidFill>
-            <a:srgbClr val="22C55E"/>
-          </a:solidFill>
-          <a:ln>
-            <a:noFill/>
-          </a:ln>
-          <a:effectLst>
-            <a:outerShdw blurRad="76200" dist="19050" dir="5400000" rotWithShape="0">
-              <a:srgbClr val="22C55E">
-                <a:alpha val="55000"/>
-              </a:srgbClr>
-            </a:outerShdw>
-          </a:effectLst>
-        </p:spPr>
-        <p:style>
-          <a:lnRef idx="1">
-            <a:schemeClr val="accent1"/>
-          </a:lnRef>
-          <a:fillRef idx="3">
-            <a:schemeClr val="accent1"/>
-          </a:fillRef>
-          <a:effectRef idx="2">
-            <a:schemeClr val="accent1"/>
-          </a:effectRef>
-          <a:fontRef idx="minor">
-            <a:schemeClr val="lt1"/>
-          </a:fontRef>
-        </p:style>
-        <p:txBody>
-          <a:bodyPr rtlCol="0" anchor="ctr"/>
-          <a:lstStyle/>
-          <a:p>
-            <a:pPr algn="ctr"/>
-          </a:p>
-        </p:txBody>
-      </p:sp>
-      <p:sp>
-        <p:nvSpPr>
-          <p:cNvPr id="232" name="TextBox 231"/>
-          <p:cNvSpPr txBox="1"/>
-          <p:nvPr/>
-        </p:nvSpPr>
-        <p:spPr>
-          <a:xfrm>
-            <a:off x="7543800" y="4586744"/>
-            <a:ext cx="457200" cy="167106"/>
-          </a:xfrm>
-          <a:prstGeom prst="rect">
-            <a:avLst/>
-          </a:prstGeom>
-          <a:noFill/>
-        </p:spPr>
-        <p:txBody>
-          <a:bodyPr wrap="none" lIns="0" rIns="0" tIns="0" bIns="0">
-            <a:spAutoFit/>
-          </a:bodyPr>
-          <a:lstStyle/>
-          <a:p>
-            <a:pPr algn="l"/>
-            <a:r>
-              <a:rPr sz="800" b="1">
-                <a:solidFill>
-                  <a:srgbClr val="22C55E"/>
-                </a:solidFill>
-                <a:latin typeface="Calibri"/>
-              </a:rPr>
-              <a:t>12%</a:t>
+              <a:t>17%</a:t>
             </a:r>
           </a:p>
         </p:txBody>
